--- a/public/documentazione/Presentazione_Portale_CWP.pptx
+++ b/public/documentazione/Presentazione_Portale_CWP.pptx
@@ -120,39 +120,39 @@
   <p:extLst>
     <p:ext uri="{521415D9-36F7-43E2-AB2F-B90AF26B5E84}">
       <p14:sectionLst xmlns:p14="http://schemas.microsoft.com/office/powerpoint/2010/main">
-        <p14:section name="Apertura" id="{5fd3adc2-d005-ef74-6a75-76b19b437f57}">
+        <p14:section name="Apertura" id="{c020b8ea-75b7-6335-c8c0-5a126b74730d}">
           <p14:sldIdLst>
             <p14:sldId id="256"/>
           </p14:sldIdLst>
         </p14:section>
-        <p14:section name="Metodologia" id="{4841dc62-dec2-ee1f-a0c6-f183464f1a9b}">
+        <p14:section name="Metodologia" id="{e9b60671-3a7b-234a-646d-c71b1912a013}">
           <p14:sldIdLst>
             <p14:sldId id="257"/>
           </p14:sldIdLst>
         </p14:section>
-        <p14:section name="Analisi funzionale" id="{86a39a2f-6825-1ea3-bac4-a815e207d50c}">
+        <p14:section name="Analisi funzionale" id="{8b195e39-8bff-d44d-d9cc-0f703a0085c1}">
           <p14:sldIdLst>
             <p14:sldId id="258"/>
             <p14:sldId id="259"/>
           </p14:sldIdLst>
         </p14:section>
-        <p14:section name="Già realtà" id="{773cd932-d0ba-6695-1855-b666ad93beff}">
+        <p14:section name="Già realtà" id="{9b56cd69-9048-7630-76b0-733bfc305b53}">
           <p14:sldIdLst>
             <p14:sldId id="260"/>
           </p14:sldIdLst>
         </p14:section>
-        <p14:section name="Architettura e ruoli" id="{55ed6f73-40e1-bb33-fffb-ebc0d1911b17}">
+        <p14:section name="Architettura e ruoli" id="{06bacbb1-e841-4b26-c19f-af95044424e2}">
           <p14:sldIdLst>
             <p14:sldId id="261"/>
             <p14:sldId id="262"/>
           </p14:sldIdLst>
         </p14:section>
-        <p14:section name="Novità" id="{b299f576-8413-ffdc-6ccd-28aa51eb1917}">
+        <p14:section name="Novità" id="{2dd705d3-520c-8e0c-575e-dfbede3df265}">
           <p14:sldIdLst>
             <p14:sldId id="263"/>
           </p14:sldIdLst>
         </p14:section>
-        <p14:section name="Punti aperti" id="{fe634d0f-4ab1-b6fb-e180-4e3bb877269c}">
+        <p14:section name="Punti aperti" id="{463577cf-8950-f50b-2f6b-9e8c1290604f}">
           <p14:sldIdLst>
             <p14:sldId id="264"/>
             <p14:sldId id="265"/>
@@ -161,7 +161,7 @@
             <p14:sldId id="268"/>
           </p14:sldIdLst>
         </p14:section>
-        <p14:section name="Scelte da prendere" id="{1d176e96-c04f-b2d4-8db5-729fb5ac488c}">
+        <p14:section name="Scelte da prendere" id="{ac04c7dd-d479-52e7-bdf4-9be2552045b8}">
           <p14:sldIdLst>
             <p14:sldId id="269"/>
           </p14:sldIdLst>
@@ -570,7 +570,7 @@
           <a:p>
             <a:r>
               <a:rPr lang="en-US" dirty="0"/>
-              <a:t>Presentazione di riepilogo del portale, aggiornata al 19 ottobre 2026 (revisione 2.0): metodologia, funzioni realizzate, novità, punti aperti di sviluppo e scelte ancora da prendere. Si rigenera a ogni rilascio insieme agli altri documenti ed è disponibile agli Amministratori nella pagina Documentazione del portale.</a:t>
+              <a:t>Presentazione di riepilogo del portale, aggiornata al 19 ottobre 2026 (revisione 2.1): metodologia, funzioni realizzate, novità, punti aperti di sviluppo e scelte ancora da prendere. Si rigenera a ogni rilascio insieme agli altri documenti ed è disponibile agli Amministratori nella pagina Documentazione del portale.</a:t>
             </a:r>
             <a:endParaRPr lang="en-US" dirty="0"/>
           </a:p>
@@ -658,7 +658,7 @@
           <a:p>
             <a:r>
               <a:rPr lang="en-US" dirty="0"/>
-              <a:t>Due nuovi moduli entrano nel progetto e in tutti i documenti (Registro, backlog punti 37 e 21). Simulatore di scenari, richiesto da Luca il 19/10: per ogni Comune si creano più scenari; la durata si sceglie da un menu a tendina tra 7, 10 e 21 anni (Standard 4.3.8: periodo di 10 anni oppure 7 rinnovabili fino a 21); si acquisiscono i dati dell'anno base (popolazione, produzione totale e pro capite, raccolta differenziata, ripartizione per frazione, parametri del calcolo); per ogni anno si inseriscono gli obiettivi di produzione totale e pro capite e di secco residuo pro capite; il simulatore ricalcola la percentuale di differenziata e stima anno per anno i crediti che il Comune potrebbe generare, con due metodi: il bilancio del Comune (tutte le utenze insieme, il più prudente) e il metodo per utenza con le sole utenze virtuose e il buffer del Capitolo 7, lo stesso delle stime dell'Allegato A dei contratti EsaCom. È una stima ex ante utile a presentare il Programma ai Comuni: il modello semplificato va confermato dalla Fondazione. Assistente virtuale: basato sui modelli Claude di Anthropic, integrato nel portale, aiuta Comuni e Operatori ma non decide; costi d'uso e dati leggibili da definire.</a:t>
+              <a:t>Due nuovi moduli entrano nel progetto e in tutti i documenti (Registro, backlog punti 37 e 21). Simulatore di scenari, richiesto da Luca il 19/10: per ogni Comune si creano più scenari; la durata si sceglie da un menu a tendina tra 7, 10 e 21 anni (Standard 4.3.8: periodo di 10 anni oppure 7 rinnovabili fino a 21); si acquisiscono i dati dell'anno base (popolazione, produzione totale e pro capite, raccolta differenziata, ripartizione per frazione, parametri del calcolo); per ogni anno si inseriscono gli obiettivi di produzione totale e pro capite e di secco residuo pro capite; il simulatore ricalcola la percentuale di differenziata e stima anno per anno i crediti che il Comune potrebbe generare, con due metodi: il bilancio del Comune (tutte le utenze insieme, il più prudente) e il metodo per utenza con le sole utenze virtuose e il buffer del Capitolo 7, lo stesso delle stime dell'Allegato A dei contratti EsaCom. È una stima ex ante utile a presentare il Programma ai Comuni: il modello semplificato va confermato dalla Fondazione. Assistente virtuale (prima versione del 19/10, da attivare): pulsante «✦ Assistente» per Amministratori e utenti degli enti; risponde in italiano solo dalla base di conoscenza (Manuale Utente e tariffe per gli enti, in più Manuale Amministratore e note sul calcolo per gli Amministratori), non vede le pratiche, non salva i testi, limite di 40 domande al giorno per utente. Funziona con Claude Haiku 5.5 tramite la funzione del server «assistente»; la base di conoscenza resta nella cache dei prompt, quindi una domanda costa di solito meno di un centesimo di dollaro. Per attivarlo serve una chiave della Claude Console inserita da Luca nei segreti di Supabase: l'uso API è fatturato a parte rispetto ai piani claude.ai, ma con un piano Max o Team si possono collegare i crediti API mensili del piano all'organizzazione della Console. Passi successivi: Operatori e aiuto sulla singola pratica.</a:t>
             </a:r>
             <a:endParaRPr lang="en-US" dirty="0"/>
           </a:p>
@@ -1362,7 +1362,7 @@
           <a:p>
             <a:r>
               <a:rPr lang="en-US" dirty="0"/>
-              <a:t>Pagina «effetto sorpresa»: nessuno si aspetta che il portale sia già online. Il sistema è stato realizzato da Luca Moretti con l'ausilio di Claude Code ed è quasi terminato; i servizi sono già in produzione: GitHub (codice), Vercel (pubblicazione del portale), Supabase (database, utenti, documenti, funzioni) e Resend (email). Il portale è pubblicato su portale-cwp.vercel.app e funziona con dati di prova: si può aprire durante la presentazione (collegamento cliccabile) o inquadrare il codice QR con il telefono. La pagina pubblica /programma mostra già gli 8 documenti ufficiali del Programma, la Metodologia approvata, la PEC e il soggetto promotore. Lo sviluppo del portale vero è partito il 17 ottobre 2026: da allora sono state pubblicate 111 versioni, 30 script del database e 5 funzioni sul server. Restano i punti aperti delle prossime slide (servizi a pagamento, sicurezza, dati da inserire, collaudo con un Comune). Suggerimento: aprire il portale dal vivo con un utente di prova e mostrare la pagina pubblica.</a:t>
+              <a:t>Pagina «effetto sorpresa»: nessuno si aspetta che il portale sia già online. Il sistema è stato realizzato da Luca Moretti con l'ausilio di Claude Code ed è quasi terminato; i servizi sono già in produzione: GitHub (codice), Vercel (pubblicazione del portale), Supabase (database, utenti, documenti, funzioni) e Resend (email). Il portale è pubblicato su portale-cwp.vercel.app e funziona con dati di prova: si può aprire durante la presentazione (collegamento cliccabile) o inquadrare il codice QR con il telefono. La pagina pubblica /programma mostra già gli 8 documenti ufficiali del Programma, la Metodologia approvata, la PEC e il soggetto promotore. Lo sviluppo del portale vero è partito il 17 ottobre 2026: da allora sono state pubblicate 112 versioni, 31 script del database e 6 funzioni sul server. Restano i punti aperti delle prossime slide (servizi a pagamento, sicurezza, dati da inserire, collaudo con un Comune). Suggerimento: aprire il portale dal vivo con un utente di prova e mostrare la pagina pubblica.</a:t>
             </a:r>
             <a:endParaRPr lang="en-US" dirty="0"/>
           </a:p>
@@ -2073,7 +2073,7 @@
                   <a:schemeClr val="accent6"/>
                 </a:solidFill>
               </a:rPr>
-              <a:t>Portale Carbon WastePrint · Stato dei lavori e recap · 19 ottobre 2026 · rev. 2.0</a:t>
+              <a:t>Portale Carbon WastePrint · Stato dei lavori e recap · 19 ottobre 2026 · rev. 2.1</a:t>
             </a:r>
             <a:endParaRPr lang="en-US" sz="1000" dirty="0"/>
           </a:p>
@@ -2571,7 +2571,7 @@
                   <a:schemeClr val="accent3"/>
                 </a:solidFill>
               </a:rPr>
-              <a:t>Stato dei lavori e recap: metodologia, funzioni, novità, punti aperti e scelte da prendere · aggiornata al 19 ottobre 2026 · rev. 2.0</a:t>
+              <a:t>Stato dei lavori e recap: metodologia, funzioni, novità, punti aperti e scelte da prendere · aggiornata al 19 ottobre 2026 · rev. 2.1</a:t>
             </a:r>
             <a:endParaRPr lang="en-US" sz="1800" dirty="0"/>
           </a:p>
@@ -3778,14 +3778,14 @@
       </p:sp>
       <p:sp>
         <p:nvSpPr>
-          <p:cNvPr id="34" name="Badge in arrivo"/>
+          <p:cNvPr id="34" name="Badge pronto"/>
           <p:cNvSpPr/>
           <p:nvPr/>
         </p:nvSpPr>
         <p:spPr>
           <a:xfrm>
             <a:off x="8778240" y="2029968"/>
-            <a:ext cx="1188720" cy="256032"/>
+            <a:ext cx="2194560" cy="256032"/>
           </a:xfrm>
           <a:prstGeom prst="roundRect">
             <a:avLst>
@@ -3812,7 +3812,7 @@
         <p:spPr>
           <a:xfrm>
             <a:off x="8778240" y="2029968"/>
-            <a:ext cx="1188720" cy="256032"/>
+            <a:ext cx="2194560" cy="256032"/>
           </a:xfrm>
           <a:prstGeom prst="rect">
             <a:avLst/>
@@ -3833,7 +3833,7 @@
                   <a:schemeClr val="tx2"/>
                 </a:solidFill>
               </a:rPr>
-              <a:t>IN ARRIVO</a:t>
+              <a:t>PRONTO · DA ATTIVARE</a:t>
             </a:r>
             <a:endParaRPr lang="en-US" sz="950" dirty="0"/>
           </a:p>
@@ -3872,7 +3872,7 @@
                   <a:schemeClr val="tx2"/>
                 </a:solidFill>
               </a:rPr>
-              <a:t>Per i Comuni</a:t>
+              <a:t>Per enti e Amministratori</a:t>
             </a:r>
             <a:endParaRPr lang="en-US" sz="1250" dirty="0"/>
           </a:p>
@@ -3889,7 +3889,7 @@
                   <a:schemeClr val="tx1"/>
                 </a:solidFill>
               </a:rPr>
-              <a:t>come compilare, cosa manca nella pratica, come preparare il tracciato dati</a:t>
+              <a:t>pulsante «✦ Assistente»: come si fa un'operazione, fasi, costi; risponde dai manuali e dalle tariffe</a:t>
             </a:r>
             <a:endParaRPr lang="en-US" sz="1250" dirty="0"/>
           </a:p>
@@ -3906,7 +3906,7 @@
                   <a:schemeClr val="tx2"/>
                 </a:solidFill>
               </a:rPr>
-              <a:t>Per gli Operatori</a:t>
+              <a:t>Garanzie</a:t>
             </a:r>
             <a:endParaRPr lang="en-US" sz="1250" dirty="0"/>
           </a:p>
@@ -3923,7 +3923,7 @@
                   <a:schemeClr val="tx1"/>
                 </a:solidFill>
               </a:rPr>
-              <a:t>controllo dei documenti, bozze di richieste di integrazione e di risposte, spiegazione del calcolo</a:t>
+              <a:t>non vede le pratiche e non decide; nessun testo salvato; limite di domande al giorno</a:t>
             </a:r>
             <a:endParaRPr lang="en-US" sz="1250" dirty="0"/>
           </a:p>
@@ -3940,7 +3940,7 @@
                   <a:schemeClr val="tx2"/>
                 </a:solidFill>
               </a:rPr>
-              <a:t>Garanzie</a:t>
+              <a:t>Come funziona</a:t>
             </a:r>
             <a:endParaRPr lang="en-US" sz="1250" dirty="0"/>
           </a:p>
@@ -3957,7 +3957,7 @@
                   <a:schemeClr val="tx1"/>
                 </a:solidFill>
               </a:rPr>
-              <a:t>supporto, fuori dal flusso decisionale; legge solo i dati permessi; ogni azione nell'audit</a:t>
+              <a:t>Claude Haiku 5.5 tramite una funzione sul server; la chiave resta in Supabase; meno di un centesimo a domanda</a:t>
             </a:r>
             <a:endParaRPr lang="en-US" sz="1250" dirty="0"/>
           </a:p>
@@ -3974,7 +3974,7 @@
                   <a:schemeClr val="tx2"/>
                 </a:solidFill>
               </a:rPr>
-              <a:t>Come funziona</a:t>
+              <a:t>Prossimi passi</a:t>
             </a:r>
             <a:endParaRPr lang="en-US" sz="1250" dirty="0"/>
           </a:p>
@@ -3991,7 +3991,7 @@
                   <a:schemeClr val="tx1"/>
                 </a:solidFill>
               </a:rPr>
-              <a:t>modelli Claude di Anthropic tramite una funzione sul server; la chiave resta in Supabase</a:t>
+              <a:t>chiave della Console (crediti API mensili di un piano Max o Team); poi Operatori e aiuto sulla pratica</a:t>
             </a:r>
             <a:endParaRPr lang="en-US" sz="1250" dirty="0"/>
           </a:p>
@@ -12929,7 +12929,7 @@
                 <a:ea typeface="Cambria" pitchFamily="34" charset="-122"/>
                 <a:cs typeface="Cambria" pitchFamily="34" charset="-120"/>
               </a:rPr>
-              <a:t>30</a:t>
+              <a:t>31</a:t>
             </a:r>
             <a:endParaRPr lang="en-US" sz="3000" dirty="0"/>
           </a:p>
@@ -13031,7 +13031,7 @@
                 <a:ea typeface="Cambria" pitchFamily="34" charset="-122"/>
                 <a:cs typeface="Cambria" pitchFamily="34" charset="-120"/>
               </a:rPr>
-              <a:t>5</a:t>
+              <a:t>6</a:t>
             </a:r>
             <a:endParaRPr lang="en-US" sz="3000" dirty="0"/>
           </a:p>
@@ -13235,7 +13235,7 @@
                 <a:ea typeface="Cambria" pitchFamily="34" charset="-122"/>
                 <a:cs typeface="Cambria" pitchFamily="34" charset="-120"/>
               </a:rPr>
-              <a:t>≈28.600</a:t>
+              <a:t>≈29.200</a:t>
             </a:r>
             <a:endParaRPr lang="en-US" sz="3000" dirty="0"/>
           </a:p>
@@ -14022,7 +14022,7 @@
                 <a:ea typeface="Cambria" pitchFamily="34" charset="-122"/>
                 <a:cs typeface="Cambria" pitchFamily="34" charset="-120"/>
               </a:rPr>
-              <a:t>111</a:t>
+              <a:t>112</a:t>
             </a:r>
             <a:endParaRPr lang="en-US" sz="2400" dirty="0"/>
           </a:p>
@@ -14075,7 +14075,7 @@
                 <a:ea typeface="Cambria" pitchFamily="34" charset="-122"/>
                 <a:cs typeface="Cambria" pitchFamily="34" charset="-120"/>
               </a:rPr>
-              <a:t>30</a:t>
+              <a:t>31</a:t>
             </a:r>
             <a:endParaRPr lang="en-US" sz="2400" dirty="0"/>
           </a:p>
@@ -14128,7 +14128,7 @@
                 <a:ea typeface="Cambria" pitchFamily="34" charset="-122"/>
                 <a:cs typeface="Cambria" pitchFamily="34" charset="-120"/>
               </a:rPr>
-              <a:t>5</a:t>
+              <a:t>6</a:t>
             </a:r>
             <a:endParaRPr lang="en-US" sz="2400" dirty="0"/>
           </a:p>
@@ -14181,7 +14181,7 @@
                 <a:ea typeface="Cambria" pitchFamily="34" charset="-122"/>
                 <a:cs typeface="Cambria" pitchFamily="34" charset="-120"/>
               </a:rPr>
-              <a:t>≈28.600</a:t>
+              <a:t>≈29.200</a:t>
             </a:r>
             <a:endParaRPr lang="en-US" sz="2400" dirty="0"/>
           </a:p>
@@ -17506,7 +17506,7 @@
                   <a:schemeClr val="tx2"/>
                 </a:solidFill>
               </a:rPr>
-              <a:t>Notifiche</a:t>
+              <a:t>Assistente virtuale</a:t>
             </a:r>
             <a:endParaRPr lang="en-US" sz="1350" dirty="0"/>
           </a:p>
@@ -17523,7 +17523,7 @@
                   <a:schemeClr val="tx1"/>
                 </a:solidFill>
               </a:rPr>
-              <a:t>la tendina della campanella resta sempre nello schermo</a:t>
+              <a:t>«✦ Assistente» con Claude per enti e Amministratori, risponde dai manuali e dalle tariffe (da attivare)</a:t>
             </a:r>
             <a:endParaRPr lang="en-US" sz="1350" dirty="0"/>
           </a:p>
@@ -17574,7 +17574,7 @@
                   <a:schemeClr val="tx2"/>
                 </a:solidFill>
               </a:rPr>
-              <a:t>Decisione</a:t>
+              <a:t>Documentazione</a:t>
             </a:r>
             <a:endParaRPr lang="en-US" sz="1350" dirty="0"/>
           </a:p>
@@ -17591,7 +17591,41 @@
                   <a:schemeClr val="tx1"/>
                 </a:solidFill>
               </a:rPr>
-              <a:t>qualificazione ACN non necessaria: il portale qualifica il modello, il Comune non acquista un servizio (parere legale da confermare)</a:t>
+              <a:t>gli 8 documenti ufficiali del Programma v1.2 e questa presentazione, per gli Amministratori</a:t>
+            </a:r>
+            <a:endParaRPr lang="en-US" sz="1350" dirty="0"/>
+          </a:p>
+          <a:p>
+            <a:pPr indent="0" marL="0">
+              <a:spcAft>
+                <a:spcPts val="500"/>
+              </a:spcAft>
+              <a:buNone/>
+            </a:pPr>
+            <a:r>
+              <a:rPr lang="en-US" sz="1350" b="1" dirty="0">
+                <a:solidFill>
+                  <a:schemeClr val="tx2"/>
+                </a:solidFill>
+              </a:rPr>
+              <a:t>Decisione</a:t>
+            </a:r>
+            <a:endParaRPr lang="en-US" sz="1350" dirty="0"/>
+          </a:p>
+          <a:p>
+            <a:pPr indent="0" marL="0">
+              <a:spcAft>
+                <a:spcPts val="500"/>
+              </a:spcAft>
+              <a:buNone/>
+            </a:pPr>
+            <a:r>
+              <a:rPr lang="en-US" sz="1200" dirty="0">
+                <a:solidFill>
+                  <a:schemeClr val="tx1"/>
+                </a:solidFill>
+              </a:rPr>
+              <a:t>qualificazione ACN non necessaria (parere legale da confermare)</a:t>
             </a:r>
             <a:endParaRPr lang="en-US" sz="1350" dirty="0"/>
           </a:p>
@@ -18374,7 +18408,7 @@
                   <a:schemeClr val="tx1"/>
                 </a:solidFill>
               </a:rPr>
-              <a:t>Nuovi moduli: simulatore (online, due metodi di stima), assistente virtuale Claude; utenti online per l'amministratore principale (in sviluppo)</a:t>
+              <a:t>Nuovi moduli: simulatore (online, due metodi), assistente virtuale (pronto, da attivare con la chiave); utenti online per l'amministratore principale (in sviluppo)</a:t>
             </a:r>
             <a:endParaRPr lang="en-US" sz="1350" dirty="0"/>
           </a:p>

--- a/public/documentazione/Presentazione_Portale_CWP.pptx
+++ b/public/documentazione/Presentazione_Portale_CWP.pptx
@@ -120,39 +120,39 @@
   <p:extLst>
     <p:ext uri="{521415D9-36F7-43E2-AB2F-B90AF26B5E84}">
       <p14:sectionLst xmlns:p14="http://schemas.microsoft.com/office/powerpoint/2010/main">
-        <p14:section name="Apertura" id="{c020b8ea-75b7-6335-c8c0-5a126b74730d}">
+        <p14:section name="Apertura" id="{181f59b5-1b41-3cf4-b12f-46ef4763a50c}">
           <p14:sldIdLst>
             <p14:sldId id="256"/>
           </p14:sldIdLst>
         </p14:section>
-        <p14:section name="Metodologia" id="{e9b60671-3a7b-234a-646d-c71b1912a013}">
+        <p14:section name="Metodologia" id="{6d85eec5-92c5-f15d-59c1-e46479db9ab7}">
           <p14:sldIdLst>
             <p14:sldId id="257"/>
           </p14:sldIdLst>
         </p14:section>
-        <p14:section name="Analisi funzionale" id="{8b195e39-8bff-d44d-d9cc-0f703a0085c1}">
+        <p14:section name="Analisi funzionale" id="{52821a7b-8d4c-b913-ed9e-fbefab313b56}">
           <p14:sldIdLst>
             <p14:sldId id="258"/>
             <p14:sldId id="259"/>
           </p14:sldIdLst>
         </p14:section>
-        <p14:section name="Già realtà" id="{9b56cd69-9048-7630-76b0-733bfc305b53}">
+        <p14:section name="Già realtà" id="{6c387520-900e-4abc-a9eb-4b995ad2b702}">
           <p14:sldIdLst>
             <p14:sldId id="260"/>
           </p14:sldIdLst>
         </p14:section>
-        <p14:section name="Architettura e ruoli" id="{06bacbb1-e841-4b26-c19f-af95044424e2}">
+        <p14:section name="Architettura e ruoli" id="{d48ae69c-de18-6727-cb30-bbc23bd27bb9}">
           <p14:sldIdLst>
             <p14:sldId id="261"/>
             <p14:sldId id="262"/>
           </p14:sldIdLst>
         </p14:section>
-        <p14:section name="Novità" id="{2dd705d3-520c-8e0c-575e-dfbede3df265}">
+        <p14:section name="Novità" id="{d8ebbb0e-922c-e772-8742-af1629613ddd}">
           <p14:sldIdLst>
             <p14:sldId id="263"/>
           </p14:sldIdLst>
         </p14:section>
-        <p14:section name="Punti aperti" id="{463577cf-8950-f50b-2f6b-9e8c1290604f}">
+        <p14:section name="Punti aperti" id="{dc7ef810-b2f9-2400-413b-d14bd0df313c}">
           <p14:sldIdLst>
             <p14:sldId id="264"/>
             <p14:sldId id="265"/>
@@ -161,7 +161,7 @@
             <p14:sldId id="268"/>
           </p14:sldIdLst>
         </p14:section>
-        <p14:section name="Scelte da prendere" id="{ac04c7dd-d479-52e7-bdf4-9be2552045b8}">
+        <p14:section name="Scelte da prendere" id="{ba012493-ff0e-5567-6048-5763374e7ee0}">
           <p14:sldIdLst>
             <p14:sldId id="269"/>
           </p14:sldIdLst>
@@ -570,7 +570,7 @@
           <a:p>
             <a:r>
               <a:rPr lang="en-US" dirty="0"/>
-              <a:t>Presentazione di riepilogo del portale, aggiornata al 19 ottobre 2026 (revisione 2.1): metodologia, funzioni realizzate, novità, punti aperti di sviluppo e scelte ancora da prendere. Si rigenera a ogni rilascio insieme agli altri documenti ed è disponibile agli Amministratori nella pagina Documentazione del portale.</a:t>
+              <a:t>Presentazione di riepilogo del portale, aggiornata al 19 ottobre 2026 (revisione 2.2): metodologia, funzioni realizzate, novità, punti aperti di sviluppo e scelte ancora da prendere. Si rigenera a ogni rilascio insieme agli altri documenti ed è disponibile agli Amministratori nella pagina Documentazione del portale.</a:t>
             </a:r>
             <a:endParaRPr lang="en-US" dirty="0"/>
           </a:p>
@@ -658,7 +658,7 @@
           <a:p>
             <a:r>
               <a:rPr lang="en-US" dirty="0"/>
-              <a:t>Due nuovi moduli entrano nel progetto e in tutti i documenti (Registro, backlog punti 37 e 21). Simulatore di scenari, richiesto da Luca il 19/10: per ogni Comune si creano più scenari; la durata si sceglie da un menu a tendina tra 7, 10 e 21 anni (Standard 4.3.8: periodo di 10 anni oppure 7 rinnovabili fino a 21); si acquisiscono i dati dell'anno base (popolazione, produzione totale e pro capite, raccolta differenziata, ripartizione per frazione, parametri del calcolo); per ogni anno si inseriscono gli obiettivi di produzione totale e pro capite e di secco residuo pro capite; il simulatore ricalcola la percentuale di differenziata e stima anno per anno i crediti che il Comune potrebbe generare, con due metodi: il bilancio del Comune (tutte le utenze insieme, il più prudente) e il metodo per utenza con le sole utenze virtuose e il buffer del Capitolo 7, lo stesso delle stime dell'Allegato A dei contratti EsaCom. È una stima ex ante utile a presentare il Programma ai Comuni: il modello semplificato va confermato dalla Fondazione. Assistente virtuale (prima versione del 19/10, da attivare): pulsante «✦ Assistente» per Amministratori e utenti degli enti; risponde in italiano solo dalla base di conoscenza (Manuale Utente e tariffe per gli enti, in più Manuale Amministratore e note sul calcolo per gli Amministratori), non vede le pratiche, non salva i testi, limite di 40 domande al giorno per utente. Funziona con Claude Haiku 5.5 tramite la funzione del server «assistente»; la base di conoscenza resta nella cache dei prompt, quindi una domanda costa di solito meno di un centesimo di dollaro. Per attivarlo serve una chiave della Claude Console inserita da Luca nei segreti di Supabase: l'uso API è fatturato a parte rispetto ai piani claude.ai, ma con un piano Max o Team si possono collegare i crediti API mensili del piano all'organizzazione della Console. Passi successivi: Operatori e aiuto sulla singola pratica.</a:t>
+              <a:t>Due nuovi moduli entrano nel progetto e in tutti i documenti (Registro, backlog punti 37 e 21). Simulatore di scenari, richiesto da Luca il 19/10: per ogni Comune si creano più scenari; la durata si sceglie da un menu a tendina tra 7, 10 e 21 anni (Standard 4.3.8: periodo di 10 anni oppure 7 rinnovabili fino a 21); si acquisiscono i dati dell'anno base (popolazione, produzione totale e pro capite, raccolta differenziata, ripartizione per frazione, parametri del calcolo); per ogni anno si inseriscono gli obiettivi di produzione totale e pro capite e di secco residuo pro capite; il simulatore ricalcola la percentuale di differenziata e stima anno per anno i crediti che il Comune potrebbe generare, con due metodi: il bilancio del Comune (tutte le utenze insieme, il più prudente) e il metodo per utenza con le sole utenze virtuose e il buffer del Capitolo 7, lo stesso delle stime dell'Allegato A dei contratti EsaCom. È una stima ex ante utile a presentare il Programma ai Comuni: il modello semplificato va confermato dalla Fondazione. Assistente virtuale (prima versione del 19/10, attiva dallo stesso giorno): pulsante «✦ Assistente» per Amministratori e utenti degli enti; risponde in italiano solo dalla base di conoscenza (Manuale Utente e tariffe per gli enti, in più Manuale Amministratore e note sul calcolo per gli Amministratori), non vede le pratiche, non salva i testi, limite di 40 domande al giorno per utente. Funziona con Claude Haiku 5.5 tramite la funzione del server «assistente»; la base di conoscenza resta nella cache dei prompt, quindi una domanda costa di solito meno di un centesimo di dollaro. Funziona con una chiave della Claude Console, legata a un solo spazio di lavoro, inserita da Luca nei segreti di Supabase: l'uso API è fatturato a parte rispetto ai piani claude.ai; Luca ha collegato i crediti API mensili del piano Max e acquistato 100 dollari di crediti. Prova dal vivo del 19/10: risposte corrette su creazione utenti e costi del Caso 1. Passi successivi: Operatori e aiuto sulla singola pratica.</a:t>
             </a:r>
             <a:endParaRPr lang="en-US" dirty="0"/>
           </a:p>
@@ -1362,7 +1362,7 @@
           <a:p>
             <a:r>
               <a:rPr lang="en-US" dirty="0"/>
-              <a:t>Pagina «effetto sorpresa»: nessuno si aspetta che il portale sia già online. Il sistema è stato realizzato da Luca Moretti con l'ausilio di Claude Code ed è quasi terminato; i servizi sono già in produzione: GitHub (codice), Vercel (pubblicazione del portale), Supabase (database, utenti, documenti, funzioni) e Resend (email). Il portale è pubblicato su portale-cwp.vercel.app e funziona con dati di prova: si può aprire durante la presentazione (collegamento cliccabile) o inquadrare il codice QR con il telefono. La pagina pubblica /programma mostra già gli 8 documenti ufficiali del Programma, la Metodologia approvata, la PEC e il soggetto promotore. Lo sviluppo del portale vero è partito il 17 ottobre 2026: da allora sono state pubblicate 112 versioni, 31 script del database e 6 funzioni sul server. Restano i punti aperti delle prossime slide (servizi a pagamento, sicurezza, dati da inserire, collaudo con un Comune). Suggerimento: aprire il portale dal vivo con un utente di prova e mostrare la pagina pubblica.</a:t>
+              <a:t>Pagina «effetto sorpresa»: nessuno si aspetta che il portale sia già online. Il sistema è stato realizzato da Luca Moretti con l'ausilio di Claude Code ed è quasi terminato; i servizi sono già in produzione: GitHub (codice), Vercel (pubblicazione del portale), Supabase (database, utenti, documenti, funzioni) e Resend (email). Il portale è pubblicato su portale-cwp.vercel.app e funziona con dati di prova: si può aprire durante la presentazione (collegamento cliccabile) o inquadrare il codice QR con il telefono. La pagina pubblica /programma mostra già gli 8 documenti ufficiali del Programma, la Metodologia approvata, la PEC e il soggetto promotore. Lo sviluppo del portale vero è partito il 17 ottobre 2026: da allora sono state pubblicate 114 versioni, 31 script del database e 6 funzioni sul server. Restano i punti aperti delle prossime slide (servizi a pagamento, sicurezza, dati da inserire, collaudo con un Comune). Suggerimento: aprire il portale dal vivo con un utente di prova e mostrare la pagina pubblica.</a:t>
             </a:r>
             <a:endParaRPr lang="en-US" dirty="0"/>
           </a:p>
@@ -2073,7 +2073,7 @@
                   <a:schemeClr val="accent6"/>
                 </a:solidFill>
               </a:rPr>
-              <a:t>Portale Carbon WastePrint · Stato dei lavori e recap · 19 ottobre 2026 · rev. 2.1</a:t>
+              <a:t>Portale Carbon WastePrint · Stato dei lavori e recap · 19 ottobre 2026 · rev. 2.2</a:t>
             </a:r>
             <a:endParaRPr lang="en-US" sz="1000" dirty="0"/>
           </a:p>
@@ -2571,7 +2571,7 @@
                   <a:schemeClr val="accent3"/>
                 </a:solidFill>
               </a:rPr>
-              <a:t>Stato dei lavori e recap: metodologia, funzioni, novità, punti aperti e scelte da prendere · aggiornata al 19 ottobre 2026 · rev. 2.1</a:t>
+              <a:t>Stato dei lavori e recap: metodologia, funzioni, novità, punti aperti e scelte da prendere · aggiornata al 19 ottobre 2026 · rev. 2.2</a:t>
             </a:r>
             <a:endParaRPr lang="en-US" sz="1800" dirty="0"/>
           </a:p>
@@ -3778,7 +3778,7 @@
       </p:sp>
       <p:sp>
         <p:nvSpPr>
-          <p:cNvPr id="34" name="Badge pronto"/>
+          <p:cNvPr id="34" name="Badge attivo"/>
           <p:cNvSpPr/>
           <p:nvPr/>
         </p:nvSpPr>
@@ -3833,7 +3833,7 @@
                   <a:schemeClr val="tx2"/>
                 </a:solidFill>
               </a:rPr>
-              <a:t>PRONTO · DA ATTIVARE</a:t>
+              <a:t>ATTIVO DAL 19/10</a:t>
             </a:r>
             <a:endParaRPr lang="en-US" sz="950" dirty="0"/>
           </a:p>
@@ -3991,7 +3991,7 @@
                   <a:schemeClr val="tx1"/>
                 </a:solidFill>
               </a:rPr>
-              <a:t>chiave della Console (crediti API mensili di un piano Max o Team); poi Operatori e aiuto sulla pratica</a:t>
+              <a:t>estensione agli Operatori e aiuto sulla singola pratica, con regole sulla privacy</a:t>
             </a:r>
             <a:endParaRPr lang="en-US" sz="1250" dirty="0"/>
           </a:p>
@@ -13235,7 +13235,7 @@
                 <a:ea typeface="Cambria" pitchFamily="34" charset="-122"/>
                 <a:cs typeface="Cambria" pitchFamily="34" charset="-120"/>
               </a:rPr>
-              <a:t>≈29.200</a:t>
+              <a:t>≈29.900</a:t>
             </a:r>
             <a:endParaRPr lang="en-US" sz="3000" dirty="0"/>
           </a:p>
@@ -14022,7 +14022,7 @@
                 <a:ea typeface="Cambria" pitchFamily="34" charset="-122"/>
                 <a:cs typeface="Cambria" pitchFamily="34" charset="-120"/>
               </a:rPr>
-              <a:t>112</a:t>
+              <a:t>114</a:t>
             </a:r>
             <a:endParaRPr lang="en-US" sz="2400" dirty="0"/>
           </a:p>
@@ -14181,7 +14181,7 @@
                 <a:ea typeface="Cambria" pitchFamily="34" charset="-122"/>
                 <a:cs typeface="Cambria" pitchFamily="34" charset="-120"/>
               </a:rPr>
-              <a:t>≈29.200</a:t>
+              <a:t>≈29.900</a:t>
             </a:r>
             <a:endParaRPr lang="en-US" sz="2400" dirty="0"/>
           </a:p>
@@ -17523,7 +17523,7 @@
                   <a:schemeClr val="tx1"/>
                 </a:solidFill>
               </a:rPr>
-              <a:t>«✦ Assistente» con Claude per enti e Amministratori, risponde dai manuali e dalle tariffe (da attivare)</a:t>
+              <a:t>«✦ Assistente» con Claude per enti e Amministratori, risponde dai manuali e dalle tariffe (attivo dal 19/10)</a:t>
             </a:r>
             <a:endParaRPr lang="en-US" sz="1350" dirty="0"/>
           </a:p>
@@ -18408,7 +18408,7 @@
                   <a:schemeClr val="tx1"/>
                 </a:solidFill>
               </a:rPr>
-              <a:t>Nuovi moduli: simulatore (online, due metodi), assistente virtuale (pronto, da attivare con la chiave); utenti online per l'amministratore principale (in sviluppo)</a:t>
+              <a:t>Nuovi moduli: simulatore (online, due metodi), assistente virtuale (attivo dal 19/10, poi Operatori e aiuto sulla pratica); utenti online per l'amministratore principale (in sviluppo)</a:t>
             </a:r>
             <a:endParaRPr lang="en-US" sz="1350" dirty="0"/>
           </a:p>

--- a/public/documentazione/Presentazione_Portale_CWP.pptx
+++ b/public/documentazione/Presentazione_Portale_CWP.pptx
@@ -120,39 +120,39 @@
   <p:extLst>
     <p:ext uri="{521415D9-36F7-43E2-AB2F-B90AF26B5E84}">
       <p14:sectionLst xmlns:p14="http://schemas.microsoft.com/office/powerpoint/2010/main">
-        <p14:section name="Apertura" id="{181f59b5-1b41-3cf4-b12f-46ef4763a50c}">
+        <p14:section name="Apertura" id="{8a570d48-dd66-debe-3a99-4b5460175aee}">
           <p14:sldIdLst>
             <p14:sldId id="256"/>
           </p14:sldIdLst>
         </p14:section>
-        <p14:section name="Metodologia" id="{6d85eec5-92c5-f15d-59c1-e46479db9ab7}">
+        <p14:section name="Metodologia" id="{b6edd4c9-3ec2-d8b9-3107-43776607cae8}">
           <p14:sldIdLst>
             <p14:sldId id="257"/>
           </p14:sldIdLst>
         </p14:section>
-        <p14:section name="Analisi funzionale" id="{52821a7b-8d4c-b913-ed9e-fbefab313b56}">
+        <p14:section name="Analisi funzionale" id="{6e52da88-0a01-2687-a589-a1ef96b02993}">
           <p14:sldIdLst>
             <p14:sldId id="258"/>
             <p14:sldId id="259"/>
           </p14:sldIdLst>
         </p14:section>
-        <p14:section name="Già realtà" id="{6c387520-900e-4abc-a9eb-4b995ad2b702}">
+        <p14:section name="Già realtà" id="{cbb81de3-b1f4-d2ae-2e1e-671212067a3a}">
           <p14:sldIdLst>
             <p14:sldId id="260"/>
           </p14:sldIdLst>
         </p14:section>
-        <p14:section name="Architettura e ruoli" id="{d48ae69c-de18-6727-cb30-bbc23bd27bb9}">
+        <p14:section name="Architettura e ruoli" id="{883b6f21-bda6-3bb8-fe0f-d6ad51280ed9}">
           <p14:sldIdLst>
             <p14:sldId id="261"/>
             <p14:sldId id="262"/>
           </p14:sldIdLst>
         </p14:section>
-        <p14:section name="Novità" id="{d8ebbb0e-922c-e772-8742-af1629613ddd}">
+        <p14:section name="Novità" id="{f5127522-d178-ffaf-84f3-6163f8e220f2}">
           <p14:sldIdLst>
             <p14:sldId id="263"/>
           </p14:sldIdLst>
         </p14:section>
-        <p14:section name="Punti aperti" id="{dc7ef810-b2f9-2400-413b-d14bd0df313c}">
+        <p14:section name="Punti aperti" id="{2f7c5d5e-2df6-6df4-e27e-307c5435a3ab}">
           <p14:sldIdLst>
             <p14:sldId id="264"/>
             <p14:sldId id="265"/>
@@ -161,7 +161,7 @@
             <p14:sldId id="268"/>
           </p14:sldIdLst>
         </p14:section>
-        <p14:section name="Scelte da prendere" id="{ba012493-ff0e-5567-6048-5763374e7ee0}">
+        <p14:section name="Scelte da prendere" id="{ea175a21-2a88-6b78-f7ef-5356118c6534}">
           <p14:sldIdLst>
             <p14:sldId id="269"/>
           </p14:sldIdLst>
@@ -570,7 +570,7 @@
           <a:p>
             <a:r>
               <a:rPr lang="en-US" dirty="0"/>
-              <a:t>Presentazione di riepilogo del portale, aggiornata al 19 ottobre 2026 (revisione 2.2): metodologia, funzioni realizzate, novità, punti aperti di sviluppo e scelte ancora da prendere. Si rigenera a ogni rilascio insieme agli altri documenti ed è disponibile agli Amministratori nella pagina Documentazione del portale.</a:t>
+              <a:t>Presentazione di riepilogo del portale, aggiornata al 19 ottobre 2026 (revisione 2.3): metodologia, funzioni realizzate, novità, punti aperti di sviluppo e scelte ancora da prendere. Si rigenera a ogni rilascio insieme agli altri documenti ed è disponibile agli Amministratori nella pagina Documentazione del portale.</a:t>
             </a:r>
             <a:endParaRPr lang="en-US" dirty="0"/>
           </a:p>
@@ -1362,7 +1362,7 @@
           <a:p>
             <a:r>
               <a:rPr lang="en-US" dirty="0"/>
-              <a:t>Pagina «effetto sorpresa»: nessuno si aspetta che il portale sia già online. Il sistema è stato realizzato da Luca Moretti con l'ausilio di Claude Code ed è quasi terminato; i servizi sono già in produzione: GitHub (codice), Vercel (pubblicazione del portale), Supabase (database, utenti, documenti, funzioni) e Resend (email). Il portale è pubblicato su portale-cwp.vercel.app e funziona con dati di prova: si può aprire durante la presentazione (collegamento cliccabile) o inquadrare il codice QR con il telefono. La pagina pubblica /programma mostra già gli 8 documenti ufficiali del Programma, la Metodologia approvata, la PEC e il soggetto promotore. Lo sviluppo del portale vero è partito il 17 ottobre 2026: da allora sono state pubblicate 114 versioni, 31 script del database e 6 funzioni sul server. Restano i punti aperti delle prossime slide (servizi a pagamento, sicurezza, dati da inserire, collaudo con un Comune). Suggerimento: aprire il portale dal vivo con un utente di prova e mostrare la pagina pubblica.</a:t>
+              <a:t>Pagina «effetto sorpresa»: nessuno si aspetta che il portale sia già online. Il sistema è stato realizzato da Luca Moretti con l'ausilio di Claude Code ed è quasi terminato; i servizi sono già in produzione: GitHub (codice), Vercel (pubblicazione del portale), Supabase (database, utenti, documenti, funzioni) e Resend (email). Il portale è pubblicato su portale-cwp.vercel.app e funziona con dati di prova: si può aprire durante la presentazione (collegamento cliccabile) o inquadrare il codice QR con il telefono. La pagina pubblica /programma mostra già gli 8 documenti ufficiali del Programma, la Metodologia approvata, la PEC e il soggetto promotore. Lo sviluppo del portale vero è partito il 17 ottobre 2026: da allora sono state pubblicate 115 versioni, 31 script del database e 6 funzioni sul server. Restano i punti aperti delle prossime slide (servizi a pagamento, sicurezza, dati da inserire, collaudo con un Comune). Suggerimento: aprire il portale dal vivo con un utente di prova e mostrare la pagina pubblica.</a:t>
             </a:r>
             <a:endParaRPr lang="en-US" dirty="0"/>
           </a:p>
@@ -1714,7 +1714,7 @@
           <a:p>
             <a:r>
               <a:rPr lang="en-US" dirty="0"/>
-              <a:t>La parte funzionale dei requisiti del 15/09 è chiusa e dal 18/10 sera il portale segue anche i documenti ufficiali del Programma. Restano tre gruppi. 1) Requisiti tecnici e di sicurezza (sezioni 13-15 dei requisiti); il 19/10 sono stati fatti l'archivio di backup completo e le Istruzioni di ripristino, mancano le copie automatiche di database e file. 2) Avvio della piattaforma pubblica (Guida 3.7): la pagina /programma è attiva e pubblica già gli otto documenti ufficiali v1.2 (Guida, Definizioni, Normativa, Standard, Metodologia, Politica di reclamo, Schema tariffario, Gestione qualità dei dati) e la Metodologia approvata; la PEC del Programma per i reclami è operate@pec.it; vanno aggiunti gli enti di validazione e verifica e i registri riconosciuti e la modulistica quando disponibile. L'accesso con SPID, CIE o CNS (Guida 3.9) richiede l'adesione della Fondazione come fornitore di servizi (AgID o aggregatore accreditato): fino ad allora resta l'email confermata. 3) Qualità dei dati e completamenti: i controlli del documento Gestione della qualità dei dati sono nel calcolo (Tabella 3 dello Standard ±30% con motivazione obbligatoria, completezza, unicità, letture a buon fine, tempestività) e servono popolazione e cluster SOSE ufficiali di ogni Comune; poi privacy, accessibilità, collaudo con dati reali. L'assistente AI resta un supporto al back-office, come previsto dai requisiti (sezione 17).</a:t>
+              <a:t>La parte funzionale dei requisiti del 15/09 è chiusa e dal 18/10 sera il portale segue anche i documenti ufficiali del Programma. Restano tre gruppi. 1) Requisiti tecnici e di sicurezza (sezioni 13-15 dei requisiti); il 19/10 sono stati fatti l'archivio di backup completo e le Istruzioni di ripristino, mancano le copie automatiche di database e file. 2) Avvio della piattaforma pubblica (Guida 3.7): la pagina /programma è attiva e pubblica già gli otto documenti ufficiali v1.2 (Guida, Definizioni, Normativa, Standard, Metodologia, Politica di reclamo, Schema tariffario, Gestione qualità dei dati) e la Metodologia approvata; la PEC del Programma per i reclami è operate@pec.it; vanno aggiunti gli enti di validazione e verifica e i registri riconosciuti e la modulistica quando disponibile. L'accesso con SPID, CIE o CNS (Guida 3.9) richiede l'adesione della Fondazione come fornitore di servizi (AgID o aggregatore accreditato): fino ad allora resta l'email confermata. 3) Qualità dei dati e completamenti: i controlli del documento Gestione della qualità dei dati sono nel calcolo (Tabella 3 dello Standard ±30% con motivazione obbligatoria, completezza, unicità, letture a buon fine, tempestività) e servono popolazione e cluster SOSE ufficiali di ogni Comune; poi privacy, accessibilità, collaudo con dati reali. L'assistente AI resta un supporto al back-office, come previsto dai requisiti (sezione 17). Da fare subito (19/10 sera). Azioni di Luca: ripubblicare le funzioni crea-utente e reimposta-password (email delle credenziali), rieseguire la funzione utente_mai_attivo dello script 30, verificare il dominio email su Resend, decidere se intestare alla Fondazione la fatturazione dell'assistente. Sviluppo: utenti online per l'amministratore principale, messaggi d'errore dell'assistente in italiano (proposta), stampa PDF del simulatore, sicurezza e piani a pagamento, collaudo con dati reali.</a:t>
             </a:r>
             <a:endParaRPr lang="en-US" dirty="0"/>
           </a:p>
@@ -2073,7 +2073,7 @@
                   <a:schemeClr val="accent6"/>
                 </a:solidFill>
               </a:rPr>
-              <a:t>Portale Carbon WastePrint · Stato dei lavori e recap · 19 ottobre 2026 · rev. 2.2</a:t>
+              <a:t>Portale Carbon WastePrint · Stato dei lavori e recap · 19 ottobre 2026 · rev. 2.3</a:t>
             </a:r>
             <a:endParaRPr lang="en-US" sz="1000" dirty="0"/>
           </a:p>
@@ -2571,7 +2571,7 @@
                   <a:schemeClr val="accent3"/>
                 </a:solidFill>
               </a:rPr>
-              <a:t>Stato dei lavori e recap: metodologia, funzioni, novità, punti aperti e scelte da prendere · aggiornata al 19 ottobre 2026 · rev. 2.2</a:t>
+              <a:t>Stato dei lavori e recap: metodologia, funzioni, novità, punti aperti e scelte da prendere · aggiornata al 19 ottobre 2026 · rev. 2.3</a:t>
             </a:r>
             <a:endParaRPr lang="en-US" sz="1800" dirty="0"/>
           </a:p>
@@ -14022,7 +14022,7 @@
                 <a:ea typeface="Cambria" pitchFamily="34" charset="-122"/>
                 <a:cs typeface="Cambria" pitchFamily="34" charset="-120"/>
               </a:rPr>
-              <a:t>114</a:t>
+              <a:t>115</a:t>
             </a:r>
             <a:endParaRPr lang="en-US" sz="2400" dirty="0"/>
           </a:p>
@@ -18408,7 +18408,7 @@
                   <a:schemeClr val="tx1"/>
                 </a:solidFill>
               </a:rPr>
-              <a:t>Nuovi moduli: simulatore (online, due metodi), assistente virtuale (attivo dal 19/10, poi Operatori e aiuto sulla pratica); utenti online per l'amministratore principale (in sviluppo)</a:t>
+              <a:t>Nuovi moduli: simulatore (online, due metodi), assistente virtuale (attivo dal 19/10; poi messaggi d'errore in italiano, Operatori e aiuto sulla pratica); utenti online per l'amministratore principale (in sviluppo)</a:t>
             </a:r>
             <a:endParaRPr lang="en-US" sz="1350" dirty="0"/>
           </a:p>

--- a/public/documentazione/Presentazione_Portale_CWP.pptx
+++ b/public/documentazione/Presentazione_Portale_CWP.pptx
@@ -120,39 +120,39 @@
   <p:extLst>
     <p:ext uri="{521415D9-36F7-43E2-AB2F-B90AF26B5E84}">
       <p14:sectionLst xmlns:p14="http://schemas.microsoft.com/office/powerpoint/2010/main">
-        <p14:section name="Apertura" id="{8a570d48-dd66-debe-3a99-4b5460175aee}">
+        <p14:section name="Apertura" id="{586038c2-e6bc-34c1-1572-aecc7d68e041}">
           <p14:sldIdLst>
             <p14:sldId id="256"/>
           </p14:sldIdLst>
         </p14:section>
-        <p14:section name="Metodologia" id="{b6edd4c9-3ec2-d8b9-3107-43776607cae8}">
+        <p14:section name="Metodologia" id="{8339a078-da6a-7b9b-7c10-52885fbc96ca}">
           <p14:sldIdLst>
             <p14:sldId id="257"/>
           </p14:sldIdLst>
         </p14:section>
-        <p14:section name="Analisi funzionale" id="{6e52da88-0a01-2687-a589-a1ef96b02993}">
+        <p14:section name="Analisi funzionale" id="{7e151900-7bc4-5dd0-54e7-9b5af9a7cdee}">
           <p14:sldIdLst>
             <p14:sldId id="258"/>
             <p14:sldId id="259"/>
           </p14:sldIdLst>
         </p14:section>
-        <p14:section name="Già realtà" id="{cbb81de3-b1f4-d2ae-2e1e-671212067a3a}">
+        <p14:section name="Già realtà" id="{020f0b95-6fea-3afc-8ac0-1208eb709dea}">
           <p14:sldIdLst>
             <p14:sldId id="260"/>
           </p14:sldIdLst>
         </p14:section>
-        <p14:section name="Architettura e ruoli" id="{883b6f21-bda6-3bb8-fe0f-d6ad51280ed9}">
+        <p14:section name="Architettura e ruoli" id="{75c8600f-d362-adac-6fd3-336154ea39ab}">
           <p14:sldIdLst>
             <p14:sldId id="261"/>
             <p14:sldId id="262"/>
           </p14:sldIdLst>
         </p14:section>
-        <p14:section name="Novità" id="{f5127522-d178-ffaf-84f3-6163f8e220f2}">
+        <p14:section name="Novità" id="{d5073bfe-1d4e-6caa-4263-0fa0591b3026}">
           <p14:sldIdLst>
             <p14:sldId id="263"/>
           </p14:sldIdLst>
         </p14:section>
-        <p14:section name="Punti aperti" id="{2f7c5d5e-2df6-6df4-e27e-307c5435a3ab}">
+        <p14:section name="Punti aperti" id="{99a768f6-4d6d-1680-7195-4431f2d79c25}">
           <p14:sldIdLst>
             <p14:sldId id="264"/>
             <p14:sldId id="265"/>
@@ -161,7 +161,7 @@
             <p14:sldId id="268"/>
           </p14:sldIdLst>
         </p14:section>
-        <p14:section name="Scelte da prendere" id="{ea175a21-2a88-6b78-f7ef-5356118c6534}">
+        <p14:section name="Scelte da prendere" id="{7723507d-81b1-9ee5-cff8-ed1c8a3a6b68}">
           <p14:sldIdLst>
             <p14:sldId id="269"/>
           </p14:sldIdLst>
@@ -570,7 +570,7 @@
           <a:p>
             <a:r>
               <a:rPr lang="en-US" dirty="0"/>
-              <a:t>Presentazione di riepilogo del portale, aggiornata al 19 ottobre 2026 (revisione 2.3): metodologia, funzioni realizzate, novità, punti aperti di sviluppo e scelte ancora da prendere. Si rigenera a ogni rilascio insieme agli altri documenti ed è disponibile agli Amministratori nella pagina Documentazione del portale.</a:t>
+              <a:t>Presentazione di riepilogo del portale, aggiornata al 20 ottobre 2026 (revisione 2.4): metodologia, funzioni realizzate, novità, punti aperti di sviluppo e scelte ancora da prendere. Si rigenera a ogni rilascio insieme agli altri documenti ed è disponibile agli Amministratori nella pagina Documentazione del portale.</a:t>
             </a:r>
             <a:endParaRPr lang="en-US" dirty="0"/>
           </a:p>
@@ -1362,7 +1362,7 @@
           <a:p>
             <a:r>
               <a:rPr lang="en-US" dirty="0"/>
-              <a:t>Pagina «effetto sorpresa»: nessuno si aspetta che il portale sia già online. Il sistema è stato realizzato da Luca Moretti con l'ausilio di Claude Code ed è quasi terminato; i servizi sono già in produzione: GitHub (codice), Vercel (pubblicazione del portale), Supabase (database, utenti, documenti, funzioni) e Resend (email). Il portale è pubblicato su portale-cwp.vercel.app e funziona con dati di prova: si può aprire durante la presentazione (collegamento cliccabile) o inquadrare il codice QR con il telefono. La pagina pubblica /programma mostra già gli 8 documenti ufficiali del Programma, la Metodologia approvata, la PEC e il soggetto promotore. Lo sviluppo del portale vero è partito il 17 ottobre 2026: da allora sono state pubblicate 115 versioni, 31 script del database e 6 funzioni sul server. Restano i punti aperti delle prossime slide (servizi a pagamento, sicurezza, dati da inserire, collaudo con un Comune). Suggerimento: aprire il portale dal vivo con un utente di prova e mostrare la pagina pubblica.</a:t>
+              <a:t>Pagina «effetto sorpresa»: nessuno si aspetta che il portale sia già online. Il sistema è stato realizzato da Luca Moretti con l'ausilio di Claude Code ed è quasi terminato; i servizi sono già in produzione: GitHub (codice), Vercel (pubblicazione del portale), Supabase (database, utenti, documenti, funzioni) e Resend (email). Il portale è pubblicato su portale-cwp.vercel.app e funziona con dati di prova: si può aprire durante la presentazione (collegamento cliccabile) o inquadrare il codice QR con il telefono. La pagina pubblica /programma mostra già gli 8 documenti ufficiali del Programma, la Metodologia approvata, la PEC e il soggetto promotore. Lo sviluppo del portale vero è partito il 17 ottobre 2026: da allora sono state pubblicate 116 versioni, 32 script del database e 6 funzioni sul server. Restano i punti aperti delle prossime slide (servizi a pagamento, sicurezza, dati da inserire, collaudo con un Comune). Suggerimento: aprire il portale dal vivo con un utente di prova e mostrare la pagina pubblica.</a:t>
             </a:r>
             <a:endParaRPr lang="en-US" dirty="0"/>
           </a:p>
@@ -1626,7 +1626,7 @@
           <a:p>
             <a:r>
               <a:rPr lang="en-US" dirty="0"/>
-              <a:t>Novità pubblicate il 19 ottobre pomeriggio, su richiesta di Luca. Dashboard (prima «Cruscotto»): per ogni pratica una barra di 7 luci, una per fase, accese le fasi completate e spente quelle da fare, la settima verde; la fase in corso ha il contorno. Ordinamento: ogni tabella del portale si ordina per qualsiasi colonna e gli elenchi a schede hanno il menu «Ordina per». Utenti: un Amministratore può nominare altri Amministratori, tutti con accesso completo; l'Amministratore principale luca.moretti@operate.it è protetto dal database (non si declassa, non si disattiva, non si cancella, nemmeno dal pannello di Supabase); si possono eliminare solo gli utenti che non hanno mai operato (nessuna voce nell'audit e nessun dato a loro nome). Email: il nuovo utente riceve indirizzo del portale, email e password temporanea, con l'obbligo di sceglierne una personale al primo accesso; finché il dominio operate.it non è verificato su Resend le email arrivano solo al titolare dell'account. Simulatore: oltre al bilancio del Comune c'è il metodo per utenza con le sole utenze virtuose (formula 32 con buffer), lo stesso delle stime dell'Allegato A dei contratti EsaCom; il buffer si calcola dalle Tabelle 15-16. Decisione: il portale non va qualificato ACN come servizio cloud per la PA, perché serve a qualificare il modello e il Comune vi riversa dati senza acquistare un servizio; restano GDPR, dati in UE e sicurezza; da confermare con un parere legale.</a:t>
+              <a:t>Novità pubblicate il 19 ottobre pomeriggio, su richiesta di Luca. Dashboard (prima «Cruscotto»): per ogni pratica una barra di 7 luci, una per fase, accese le fasi completate e spente quelle da fare, la settima verde; la fase in corso ha il contorno. Ordinamento: ogni tabella del portale si ordina per qualsiasi colonna e gli elenchi a schede hanno il menu «Ordina per». Utenti: un Amministratore può nominare altri Amministratori, tutti con accesso completo; l'Amministratore principale luca.moretti@operate.it è protetto dal database (non si declassa, non si disattiva, non si cancella, nemmeno dal pannello di Supabase); si possono eliminare solo gli utenti che non hanno mai operato (nessuna voce nell'audit e nessun dato a loro nome). Email: il nuovo utente riceve indirizzo del portale, email e password temporanea, con l'obbligo di sceglierne una personale al primo accesso; finché il dominio operate.it non è verificato su Resend le email arrivano solo al titolare dell'account. Simulatore: oltre al bilancio del Comune c'è il metodo per utenza con le sole utenze virtuose (formula 32 con buffer), lo stesso delle stime dell'Allegato A dei contratti EsaCom; il buffer si calcola dalle Tabelle 15-16. Decisione: il portale non va qualificato ACN come servizio cloud per la PA, perché serve a qualificare il modello e il Comune vi riversa dati senza acquistare un servizio; restano GDPR, dati in UE e sicurezza; da confermare con un parere legale. Il 20 ottobre: utenti online per l'Amministratore principale (chi è collegato adesso, pagina aperta, da quanto, e chi è stato visto nelle ultime 24 ore; si conserva solo l'ultimo collegamento, gli utenti ne sono informati nel Manuale Utente); messaggi d'errore dell'assistente in italiano semplice, con la causa per gli Amministratori; simulatore con PDF impaginato in A4 orizzontale ed export Excel con i fogli Sintesi, Anni, Economia e Costi.</a:t>
             </a:r>
             <a:endParaRPr lang="en-US" dirty="0"/>
           </a:p>
@@ -2073,7 +2073,7 @@
                   <a:schemeClr val="accent6"/>
                 </a:solidFill>
               </a:rPr>
-              <a:t>Portale Carbon WastePrint · Stato dei lavori e recap · 19 ottobre 2026 · rev. 2.3</a:t>
+              <a:t>Portale Carbon WastePrint · Stato dei lavori e recap · 20 ottobre 2026 · rev. 2.4</a:t>
             </a:r>
             <a:endParaRPr lang="en-US" sz="1000" dirty="0"/>
           </a:p>
@@ -2571,7 +2571,7 @@
                   <a:schemeClr val="accent3"/>
                 </a:solidFill>
               </a:rPr>
-              <a:t>Stato dei lavori e recap: metodologia, funzioni, novità, punti aperti e scelte da prendere · aggiornata al 19 ottobre 2026 · rev. 2.3</a:t>
+              <a:t>Stato dei lavori e recap: metodologia, funzioni, novità, punti aperti e scelte da prendere · aggiornata al 20 ottobre 2026 · rev. 2.4</a:t>
             </a:r>
             <a:endParaRPr lang="en-US" sz="1800" dirty="0"/>
           </a:p>
@@ -12929,7 +12929,7 @@
                 <a:ea typeface="Cambria" pitchFamily="34" charset="-122"/>
                 <a:cs typeface="Cambria" pitchFamily="34" charset="-120"/>
               </a:rPr>
-              <a:t>31</a:t>
+              <a:t>32</a:t>
             </a:r>
             <a:endParaRPr lang="en-US" sz="3000" dirty="0"/>
           </a:p>
@@ -13235,7 +13235,7 @@
                 <a:ea typeface="Cambria" pitchFamily="34" charset="-122"/>
                 <a:cs typeface="Cambria" pitchFamily="34" charset="-120"/>
               </a:rPr>
-              <a:t>≈29.900</a:t>
+              <a:t>≈31.000</a:t>
             </a:r>
             <a:endParaRPr lang="en-US" sz="3000" dirty="0"/>
           </a:p>
@@ -14022,7 +14022,7 @@
                 <a:ea typeface="Cambria" pitchFamily="34" charset="-122"/>
                 <a:cs typeface="Cambria" pitchFamily="34" charset="-120"/>
               </a:rPr>
-              <a:t>115</a:t>
+              <a:t>116</a:t>
             </a:r>
             <a:endParaRPr lang="en-US" sz="2400" dirty="0"/>
           </a:p>
@@ -14075,7 +14075,7 @@
                 <a:ea typeface="Cambria" pitchFamily="34" charset="-122"/>
                 <a:cs typeface="Cambria" pitchFamily="34" charset="-120"/>
               </a:rPr>
-              <a:t>31</a:t>
+              <a:t>32</a:t>
             </a:r>
             <a:endParaRPr lang="en-US" sz="2400" dirty="0"/>
           </a:p>
@@ -14181,7 +14181,7 @@
                 <a:ea typeface="Cambria" pitchFamily="34" charset="-122"/>
                 <a:cs typeface="Cambria" pitchFamily="34" charset="-120"/>
               </a:rPr>
-              <a:t>≈29.900</a:t>
+              <a:t>≈31.000</a:t>
             </a:r>
             <a:endParaRPr lang="en-US" sz="2400" dirty="0"/>
           </a:p>
@@ -17007,7 +17007,7 @@
                 <a:ea typeface="Cambria" pitchFamily="34" charset="-122"/>
                 <a:cs typeface="Cambria" pitchFamily="34" charset="-120"/>
               </a:rPr>
-              <a:t>Novità del 19 ottobre</a:t>
+              <a:t>Novità del 19 e 20 ottobre</a:t>
             </a:r>
             <a:endParaRPr lang="en-US" sz="3000" dirty="0"/>
           </a:p>
@@ -17455,7 +17455,7 @@
                   <a:schemeClr val="tx1"/>
                 </a:solidFill>
               </a:rPr>
-              <a:t>più amministratori con accesso completo; luca.moretti@operate.it è il principale e non si modifica né si cancella; si eliminano solo gli utenti mai attivi</a:t>
+              <a:t>più amministratori; luca.moretti@operate.it è il principale, non si modifica né si cancella, e vede chi è online, su quale pagina e da quanto (20/10)</a:t>
             </a:r>
             <a:endParaRPr lang="en-US" sz="1350" dirty="0"/>
           </a:p>
@@ -17523,7 +17523,7 @@
                   <a:schemeClr val="tx1"/>
                 </a:solidFill>
               </a:rPr>
-              <a:t>«✦ Assistente» con Claude per enti e Amministratori, risponde dai manuali e dalle tariffe (attivo dal 19/10)</a:t>
+              <a:t>«✦ Assistente» con Claude per enti e Amministratori, dai manuali e dalle tariffe; attivo dal 19/10, errori in italiano dal 20/10</a:t>
             </a:r>
             <a:endParaRPr lang="en-US" sz="1350" dirty="0"/>
           </a:p>
@@ -17557,7 +17557,7 @@
                   <a:schemeClr val="tx1"/>
                 </a:solidFill>
               </a:rPr>
-              <a:t>secondo metodo «per utenza, solo utenze virtuose», come nell'Allegato A EsaCom, con buffer del Capitolo 7</a:t>
+              <a:t>metodo «per utenza, solo utenze virtuose» come nell'Allegato A EsaCom; dal 20/10 PDF impaginato ed export Excel</a:t>
             </a:r>
             <a:endParaRPr lang="en-US" sz="1350" dirty="0"/>
           </a:p>

--- a/public/documentazione/Presentazione_Portale_CWP.pptx
+++ b/public/documentazione/Presentazione_Portale_CWP.pptx
@@ -120,39 +120,39 @@
   <p:extLst>
     <p:ext uri="{521415D9-36F7-43E2-AB2F-B90AF26B5E84}">
       <p14:sectionLst xmlns:p14="http://schemas.microsoft.com/office/powerpoint/2010/main">
-        <p14:section name="Apertura" id="{586038c2-e6bc-34c1-1572-aecc7d68e041}">
+        <p14:section name="Apertura" id="{749521ab-567c-edc4-f20c-d2c28398f0f4}">
           <p14:sldIdLst>
             <p14:sldId id="256"/>
           </p14:sldIdLst>
         </p14:section>
-        <p14:section name="Metodologia" id="{8339a078-da6a-7b9b-7c10-52885fbc96ca}">
+        <p14:section name="Metodologia" id="{a561608e-bdf1-5d59-a9fe-28c01bf7f31b}">
           <p14:sldIdLst>
             <p14:sldId id="257"/>
           </p14:sldIdLst>
         </p14:section>
-        <p14:section name="Analisi funzionale" id="{7e151900-7bc4-5dd0-54e7-9b5af9a7cdee}">
+        <p14:section name="Analisi funzionale" id="{ef9a5f01-c515-ff03-49f9-cb0a93ff5cd0}">
           <p14:sldIdLst>
             <p14:sldId id="258"/>
             <p14:sldId id="259"/>
           </p14:sldIdLst>
         </p14:section>
-        <p14:section name="Già realtà" id="{020f0b95-6fea-3afc-8ac0-1208eb709dea}">
+        <p14:section name="Già realtà" id="{2675d8c3-0239-e770-547f-96f1b65c4183}">
           <p14:sldIdLst>
             <p14:sldId id="260"/>
           </p14:sldIdLst>
         </p14:section>
-        <p14:section name="Architettura e ruoli" id="{75c8600f-d362-adac-6fd3-336154ea39ab}">
+        <p14:section name="Architettura e ruoli" id="{7a4812b8-7665-6757-eb0e-9a62f20c2e53}">
           <p14:sldIdLst>
             <p14:sldId id="261"/>
             <p14:sldId id="262"/>
           </p14:sldIdLst>
         </p14:section>
-        <p14:section name="Novità" id="{d5073bfe-1d4e-6caa-4263-0fa0591b3026}">
+        <p14:section name="Novità" id="{41139592-fbdb-1487-7d71-b015d452ce0c}">
           <p14:sldIdLst>
             <p14:sldId id="263"/>
           </p14:sldIdLst>
         </p14:section>
-        <p14:section name="Punti aperti" id="{99a768f6-4d6d-1680-7195-4431f2d79c25}">
+        <p14:section name="Punti aperti" id="{6f0005d9-7549-9279-6ec2-5141289bbf90}">
           <p14:sldIdLst>
             <p14:sldId id="264"/>
             <p14:sldId id="265"/>
@@ -161,7 +161,7 @@
             <p14:sldId id="268"/>
           </p14:sldIdLst>
         </p14:section>
-        <p14:section name="Scelte da prendere" id="{7723507d-81b1-9ee5-cff8-ed1c8a3a6b68}">
+        <p14:section name="Scelte da prendere" id="{7ac91522-762e-148b-3756-2c7dbf672ccc}">
           <p14:sldIdLst>
             <p14:sldId id="269"/>
           </p14:sldIdLst>
@@ -1362,7 +1362,7 @@
           <a:p>
             <a:r>
               <a:rPr lang="en-US" dirty="0"/>
-              <a:t>Pagina «effetto sorpresa»: nessuno si aspetta che il portale sia già online. Il sistema è stato realizzato da Luca Moretti con l'ausilio di Claude Code ed è quasi terminato; i servizi sono già in produzione: GitHub (codice), Vercel (pubblicazione del portale), Supabase (database, utenti, documenti, funzioni) e Resend (email). Il portale è pubblicato su portale-cwp.vercel.app e funziona con dati di prova: si può aprire durante la presentazione (collegamento cliccabile) o inquadrare il codice QR con il telefono. La pagina pubblica /programma mostra già gli 8 documenti ufficiali del Programma, la Metodologia approvata, la PEC e il soggetto promotore. Lo sviluppo del portale vero è partito il 17 ottobre 2026: da allora sono state pubblicate 116 versioni, 32 script del database e 6 funzioni sul server. Restano i punti aperti delle prossime slide (servizi a pagamento, sicurezza, dati da inserire, collaudo con un Comune). Suggerimento: aprire il portale dal vivo con un utente di prova e mostrare la pagina pubblica.</a:t>
+              <a:t>Pagina «effetto sorpresa»: nessuno si aspetta che il portale sia già online. Il sistema è stato realizzato da Luca Moretti con l'ausilio di Claude Code ed è quasi terminato; i servizi sono già in produzione: GitHub (codice), Vercel (pubblicazione del portale), Supabase (database, utenti, documenti, funzioni) e Resend (email). Il portale è pubblicato su portale-cwp.vercel.app e funziona con dati di prova: si può aprire durante la presentazione (collegamento cliccabile) o inquadrare il codice QR con il telefono. La pagina pubblica /programma mostra già gli 8 documenti ufficiali del Programma, la Metodologia approvata, la PEC e il soggetto promotore. Lo sviluppo del portale vero è partito il 17 ottobre 2026: da allora sono state pubblicate 117 versioni, 32 script del database e 6 funzioni sul server. Restano i punti aperti delle prossime slide (servizi a pagamento, sicurezza, dati da inserire, collaudo con un Comune). Suggerimento: aprire il portale dal vivo con un utente di prova e mostrare la pagina pubblica.</a:t>
             </a:r>
             <a:endParaRPr lang="en-US" dirty="0"/>
           </a:p>
@@ -14022,7 +14022,7 @@
                 <a:ea typeface="Cambria" pitchFamily="34" charset="-122"/>
                 <a:cs typeface="Cambria" pitchFamily="34" charset="-120"/>
               </a:rPr>
-              <a:t>116</a:t>
+              <a:t>117</a:t>
             </a:r>
             <a:endParaRPr lang="en-US" sz="2400" dirty="0"/>
           </a:p>

--- a/public/documentazione/Presentazione_Portale_CWP.pptx
+++ b/public/documentazione/Presentazione_Portale_CWP.pptx
@@ -120,39 +120,39 @@
   <p:extLst>
     <p:ext uri="{521415D9-36F7-43E2-AB2F-B90AF26B5E84}">
       <p14:sectionLst xmlns:p14="http://schemas.microsoft.com/office/powerpoint/2010/main">
-        <p14:section name="Apertura" id="{749521ab-567c-edc4-f20c-d2c28398f0f4}">
+        <p14:section name="Apertura" id="{d3283bdd-b4ed-302a-deb0-b9442ddeecd9}">
           <p14:sldIdLst>
             <p14:sldId id="256"/>
           </p14:sldIdLst>
         </p14:section>
-        <p14:section name="Metodologia" id="{a561608e-bdf1-5d59-a9fe-28c01bf7f31b}">
+        <p14:section name="Metodologia" id="{42dcc5b8-6dc8-6780-6ab4-2522678b9a03}">
           <p14:sldIdLst>
             <p14:sldId id="257"/>
           </p14:sldIdLst>
         </p14:section>
-        <p14:section name="Analisi funzionale" id="{ef9a5f01-c515-ff03-49f9-cb0a93ff5cd0}">
+        <p14:section name="Analisi funzionale" id="{7e921f03-fbfc-167f-e7f9-fd38ad486983}">
           <p14:sldIdLst>
             <p14:sldId id="258"/>
             <p14:sldId id="259"/>
           </p14:sldIdLst>
         </p14:section>
-        <p14:section name="Già realtà" id="{2675d8c3-0239-e770-547f-96f1b65c4183}">
+        <p14:section name="Già realtà" id="{e467d7b6-0a51-6511-6496-3caa113fbce3}">
           <p14:sldIdLst>
             <p14:sldId id="260"/>
           </p14:sldIdLst>
         </p14:section>
-        <p14:section name="Architettura e ruoli" id="{7a4812b8-7665-6757-eb0e-9a62f20c2e53}">
+        <p14:section name="Architettura e ruoli" id="{ed1a7542-5e02-3ad9-391c-d5212335e3d9}">
           <p14:sldIdLst>
             <p14:sldId id="261"/>
             <p14:sldId id="262"/>
           </p14:sldIdLst>
         </p14:section>
-        <p14:section name="Novità" id="{41139592-fbdb-1487-7d71-b015d452ce0c}">
+        <p14:section name="Novità" id="{2a0def76-db1d-2765-11db-42c9c1a75aa4}">
           <p14:sldIdLst>
             <p14:sldId id="263"/>
           </p14:sldIdLst>
         </p14:section>
-        <p14:section name="Punti aperti" id="{6f0005d9-7549-9279-6ec2-5141289bbf90}">
+        <p14:section name="Punti aperti" id="{b1eb82c0-1da0-dfc7-1785-056cf8103f18}">
           <p14:sldIdLst>
             <p14:sldId id="264"/>
             <p14:sldId id="265"/>
@@ -161,7 +161,7 @@
             <p14:sldId id="268"/>
           </p14:sldIdLst>
         </p14:section>
-        <p14:section name="Scelte da prendere" id="{7ac91522-762e-148b-3756-2c7dbf672ccc}">
+        <p14:section name="Scelte da prendere" id="{f3cfbc14-ff56-e0a6-2b0c-35d1f6592e59}">
           <p14:sldIdLst>
             <p14:sldId id="269"/>
           </p14:sldIdLst>
@@ -570,7 +570,7 @@
           <a:p>
             <a:r>
               <a:rPr lang="en-US" dirty="0"/>
-              <a:t>Presentazione di riepilogo del portale, aggiornata al 20 ottobre 2026 (revisione 2.4): metodologia, funzioni realizzate, novità, punti aperti di sviluppo e scelte ancora da prendere. Si rigenera a ogni rilascio insieme agli altri documenti ed è disponibile agli Amministratori nella pagina Documentazione del portale.</a:t>
+              <a:t>Presentazione di riepilogo del portale, aggiornata al 20 ottobre 2026 (revisione 2.5): metodologia, funzioni realizzate, novità, punti aperti di sviluppo e scelte ancora da prendere. Si rigenera a ogni rilascio insieme agli altri documenti ed è disponibile agli Amministratori nella pagina Documentazione del portale.</a:t>
             </a:r>
             <a:endParaRPr lang="en-US" dirty="0"/>
           </a:p>
@@ -1362,7 +1362,7 @@
           <a:p>
             <a:r>
               <a:rPr lang="en-US" dirty="0"/>
-              <a:t>Pagina «effetto sorpresa»: nessuno si aspetta che il portale sia già online. Il sistema è stato realizzato da Luca Moretti con l'ausilio di Claude Code ed è quasi terminato; i servizi sono già in produzione: GitHub (codice), Vercel (pubblicazione del portale), Supabase (database, utenti, documenti, funzioni) e Resend (email). Il portale è pubblicato su portale-cwp.vercel.app e funziona con dati di prova: si può aprire durante la presentazione (collegamento cliccabile) o inquadrare il codice QR con il telefono. La pagina pubblica /programma mostra già gli 8 documenti ufficiali del Programma, la Metodologia approvata, la PEC e il soggetto promotore. Lo sviluppo del portale vero è partito il 17 ottobre 2026: da allora sono state pubblicate 117 versioni, 32 script del database e 6 funzioni sul server. Restano i punti aperti delle prossime slide (servizi a pagamento, sicurezza, dati da inserire, collaudo con un Comune). Suggerimento: aprire il portale dal vivo con un utente di prova e mostrare la pagina pubblica.</a:t>
+              <a:t>Pagina «effetto sorpresa»: nessuno si aspetta che il portale sia già online. Il sistema è stato realizzato da Luca Moretti con l'ausilio di Claude Code ed è quasi terminato; i servizi sono già in produzione: GitHub (codice), Vercel (pubblicazione del portale), Supabase (database, utenti, documenti, funzioni) e Resend (email). Il portale è pubblicato su portale-cwp.vercel.app e funziona con dati di prova: si può aprire durante la presentazione (collegamento cliccabile) o inquadrare il codice QR con il telefono. La pagina pubblica /programma mostra già gli 8 documenti ufficiali del Programma, la Metodologia approvata, la PEC e il soggetto promotore. Lo sviluppo del portale vero è partito il 17 ottobre 2026: da allora sono state pubblicate 118 versioni, 33 script del database e 6 funzioni sul server. Restano i punti aperti delle prossime slide (servizi a pagamento, sicurezza, dati da inserire, collaudo con un Comune). Suggerimento: aprire il portale dal vivo con un utente di prova e mostrare la pagina pubblica.</a:t>
             </a:r>
             <a:endParaRPr lang="en-US" dirty="0"/>
           </a:p>
@@ -1626,7 +1626,7 @@
           <a:p>
             <a:r>
               <a:rPr lang="en-US" dirty="0"/>
-              <a:t>Novità pubblicate il 19 ottobre pomeriggio, su richiesta di Luca. Dashboard (prima «Cruscotto»): per ogni pratica una barra di 7 luci, una per fase, accese le fasi completate e spente quelle da fare, la settima verde; la fase in corso ha il contorno. Ordinamento: ogni tabella del portale si ordina per qualsiasi colonna e gli elenchi a schede hanno il menu «Ordina per». Utenti: un Amministratore può nominare altri Amministratori, tutti con accesso completo; l'Amministratore principale luca.moretti@operate.it è protetto dal database (non si declassa, non si disattiva, non si cancella, nemmeno dal pannello di Supabase); si possono eliminare solo gli utenti che non hanno mai operato (nessuna voce nell'audit e nessun dato a loro nome). Email: il nuovo utente riceve indirizzo del portale, email e password temporanea, con l'obbligo di sceglierne una personale al primo accesso; finché il dominio operate.it non è verificato su Resend le email arrivano solo al titolare dell'account. Simulatore: oltre al bilancio del Comune c'è il metodo per utenza con le sole utenze virtuose (formula 32 con buffer), lo stesso delle stime dell'Allegato A dei contratti EsaCom; il buffer si calcola dalle Tabelle 15-16. Decisione: il portale non va qualificato ACN come servizio cloud per la PA, perché serve a qualificare il modello e il Comune vi riversa dati senza acquistare un servizio; restano GDPR, dati in UE e sicurezza; da confermare con un parere legale. Il 20 ottobre: utenti online per l'Amministratore principale (chi è collegato adesso, pagina aperta, da quanto, e chi è stato visto nelle ultime 24 ore; si conserva solo l'ultimo collegamento, gli utenti ne sono informati nel Manuale Utente); messaggi d'errore dell'assistente in italiano semplice, con la causa per gli Amministratori; simulatore con PDF impaginato in A4 orizzontale ed export Excel con i fogli Sintesi, Anni, Economia e Costi.</a:t>
+              <a:t>Novità pubblicate il 19 ottobre pomeriggio, su richiesta di Luca. Dashboard (prima «Cruscotto»): per ogni pratica una barra di 7 luci, una per fase, accese le fasi completate e spente quelle da fare, la settima verde; la fase in corso ha il contorno. Ordinamento: ogni tabella del portale si ordina per qualsiasi colonna e gli elenchi a schede hanno il menu «Ordina per». Utenti: un Amministratore può nominare altri Amministratori, tutti con accesso completo; l'Amministratore principale luca.moretti@operate.it è protetto dal database (non si declassa, non si disattiva, non si cancella, nemmeno dal pannello di Supabase); si possono eliminare solo gli utenti che non hanno mai operato (nessuna voce nell'audit e nessun dato a loro nome). Email: il nuovo utente riceve indirizzo del portale, email e password temporanea, con l'obbligo di sceglierne una personale al primo accesso; finché il dominio operate.it non è verificato su Resend le email arrivano solo al titolare dell'account. Simulatore: oltre al bilancio del Comune c'è il metodo per utenza con le sole utenze virtuose (formula 32 con buffer), lo stesso delle stime dell'Allegato A dei contratti EsaCom; il buffer si calcola dalle Tabelle 15-16. Decisione: il portale non va qualificato ACN come servizio cloud per la PA, perché serve a qualificare il modello e il Comune vi riversa dati senza acquistare un servizio; restano GDPR, dati in UE e sicurezza; da confermare con un parere legale. Il 20 ottobre: sezione «Audit trail user» per l'Amministratore principale, con tutti gli utenti online o no, il registro degli accessi (entrate, uscite, tentativi non riusciti, senza indirizzi IP) e le operazioni dell'audit trail per utente, compreso lo scaricamento dei documenti; utenti online per l'Amministratore principale (chi è collegato adesso, pagina aperta, da quanto, e chi è stato visto nelle ultime 24 ore; si conserva solo l'ultimo collegamento, gli utenti ne sono informati nel Manuale Utente); messaggi d'errore dell'assistente in italiano semplice, con la causa per gli Amministratori; simulatore con PDF impaginato in A4 orizzontale ed export Excel con i fogli Sintesi, Anni, Economia e Costi.</a:t>
             </a:r>
             <a:endParaRPr lang="en-US" dirty="0"/>
           </a:p>
@@ -2073,7 +2073,7 @@
                   <a:schemeClr val="accent6"/>
                 </a:solidFill>
               </a:rPr>
-              <a:t>Portale Carbon WastePrint · Stato dei lavori e recap · 20 ottobre 2026 · rev. 2.4</a:t>
+              <a:t>Portale Carbon WastePrint · Stato dei lavori e recap · 20 ottobre 2026 · rev. 2.5</a:t>
             </a:r>
             <a:endParaRPr lang="en-US" sz="1000" dirty="0"/>
           </a:p>
@@ -2571,7 +2571,7 @@
                   <a:schemeClr val="accent3"/>
                 </a:solidFill>
               </a:rPr>
-              <a:t>Stato dei lavori e recap: metodologia, funzioni, novità, punti aperti e scelte da prendere · aggiornata al 20 ottobre 2026 · rev. 2.4</a:t>
+              <a:t>Stato dei lavori e recap: metodologia, funzioni, novità, punti aperti e scelte da prendere · aggiornata al 20 ottobre 2026 · rev. 2.5</a:t>
             </a:r>
             <a:endParaRPr lang="en-US" sz="1800" dirty="0"/>
           </a:p>
@@ -12929,7 +12929,7 @@
                 <a:ea typeface="Cambria" pitchFamily="34" charset="-122"/>
                 <a:cs typeface="Cambria" pitchFamily="34" charset="-120"/>
               </a:rPr>
-              <a:t>32</a:t>
+              <a:t>33</a:t>
             </a:r>
             <a:endParaRPr lang="en-US" sz="3000" dirty="0"/>
           </a:p>
@@ -13235,7 +13235,7 @@
                 <a:ea typeface="Cambria" pitchFamily="34" charset="-122"/>
                 <a:cs typeface="Cambria" pitchFamily="34" charset="-120"/>
               </a:rPr>
-              <a:t>≈31.000</a:t>
+              <a:t>≈31.800</a:t>
             </a:r>
             <a:endParaRPr lang="en-US" sz="3000" dirty="0"/>
           </a:p>
@@ -14022,7 +14022,7 @@
                 <a:ea typeface="Cambria" pitchFamily="34" charset="-122"/>
                 <a:cs typeface="Cambria" pitchFamily="34" charset="-120"/>
               </a:rPr>
-              <a:t>117</a:t>
+              <a:t>118</a:t>
             </a:r>
             <a:endParaRPr lang="en-US" sz="2400" dirty="0"/>
           </a:p>
@@ -14075,7 +14075,7 @@
                 <a:ea typeface="Cambria" pitchFamily="34" charset="-122"/>
                 <a:cs typeface="Cambria" pitchFamily="34" charset="-120"/>
               </a:rPr>
-              <a:t>32</a:t>
+              <a:t>33</a:t>
             </a:r>
             <a:endParaRPr lang="en-US" sz="2400" dirty="0"/>
           </a:p>
@@ -14181,7 +14181,7 @@
                 <a:ea typeface="Cambria" pitchFamily="34" charset="-122"/>
                 <a:cs typeface="Cambria" pitchFamily="34" charset="-120"/>
               </a:rPr>
-              <a:t>≈31.000</a:t>
+              <a:t>≈31.800</a:t>
             </a:r>
             <a:endParaRPr lang="en-US" sz="2400" dirty="0"/>
           </a:p>
@@ -17455,7 +17455,7 @@
                   <a:schemeClr val="tx1"/>
                 </a:solidFill>
               </a:rPr>
-              <a:t>più amministratori; luca.moretti@operate.it è il principale, non si modifica né si cancella, e vede chi è online, su quale pagina e da quanto (20/10)</a:t>
+              <a:t>più amministratori; luca.moretti@operate.it è il principale e ha la sezione «Audit trail user»: chi è online, accessi e operazioni di ogni utente (20/10)</a:t>
             </a:r>
             <a:endParaRPr lang="en-US" sz="1350" dirty="0"/>
           </a:p>

--- a/public/documentazione/Presentazione_Portale_CWP.pptx
+++ b/public/documentazione/Presentazione_Portale_CWP.pptx
@@ -120,39 +120,39 @@
   <p:extLst>
     <p:ext uri="{521415D9-36F7-43E2-AB2F-B90AF26B5E84}">
       <p14:sectionLst xmlns:p14="http://schemas.microsoft.com/office/powerpoint/2010/main">
-        <p14:section name="Apertura" id="{d3283bdd-b4ed-302a-deb0-b9442ddeecd9}">
+        <p14:section name="Apertura" id="{7b5144d2-74f2-e3ab-cf0f-e7cddbd27c5e}">
           <p14:sldIdLst>
             <p14:sldId id="256"/>
           </p14:sldIdLst>
         </p14:section>
-        <p14:section name="Metodologia" id="{42dcc5b8-6dc8-6780-6ab4-2522678b9a03}">
+        <p14:section name="Metodologia" id="{a0dc6646-49fd-2ee6-6290-d6726692d872}">
           <p14:sldIdLst>
             <p14:sldId id="257"/>
           </p14:sldIdLst>
         </p14:section>
-        <p14:section name="Analisi funzionale" id="{7e921f03-fbfc-167f-e7f9-fd38ad486983}">
+        <p14:section name="Analisi funzionale" id="{30ae77b1-4745-f38c-3e52-f65d4c537037}">
           <p14:sldIdLst>
             <p14:sldId id="258"/>
             <p14:sldId id="259"/>
           </p14:sldIdLst>
         </p14:section>
-        <p14:section name="Già realtà" id="{e467d7b6-0a51-6511-6496-3caa113fbce3}">
+        <p14:section name="Già realtà" id="{a794d5d6-764c-3997-d34b-f99339f21297}">
           <p14:sldIdLst>
             <p14:sldId id="260"/>
           </p14:sldIdLst>
         </p14:section>
-        <p14:section name="Architettura e ruoli" id="{ed1a7542-5e02-3ad9-391c-d5212335e3d9}">
+        <p14:section name="Architettura e ruoli" id="{a50949e0-a8bf-49ba-3a11-6fead275abdb}">
           <p14:sldIdLst>
             <p14:sldId id="261"/>
             <p14:sldId id="262"/>
           </p14:sldIdLst>
         </p14:section>
-        <p14:section name="Novità" id="{2a0def76-db1d-2765-11db-42c9c1a75aa4}">
+        <p14:section name="Novità" id="{3de1da05-bfe0-49c6-3ba1-003f910e3910}">
           <p14:sldIdLst>
             <p14:sldId id="263"/>
           </p14:sldIdLst>
         </p14:section>
-        <p14:section name="Punti aperti" id="{b1eb82c0-1da0-dfc7-1785-056cf8103f18}">
+        <p14:section name="Punti aperti" id="{7fb34208-b5ef-854d-f814-3d173e8a9a0a}">
           <p14:sldIdLst>
             <p14:sldId id="264"/>
             <p14:sldId id="265"/>
@@ -161,7 +161,7 @@
             <p14:sldId id="268"/>
           </p14:sldIdLst>
         </p14:section>
-        <p14:section name="Scelte da prendere" id="{f3cfbc14-ff56-e0a6-2b0c-35d1f6592e59}">
+        <p14:section name="Scelte da prendere" id="{1c1f436d-a61c-d96e-7ff0-dd60b7f3c82b}">
           <p14:sldIdLst>
             <p14:sldId id="269"/>
           </p14:sldIdLst>
@@ -1362,7 +1362,7 @@
           <a:p>
             <a:r>
               <a:rPr lang="en-US" dirty="0"/>
-              <a:t>Pagina «effetto sorpresa»: nessuno si aspetta che il portale sia già online. Il sistema è stato realizzato da Luca Moretti con l'ausilio di Claude Code ed è quasi terminato; i servizi sono già in produzione: GitHub (codice), Vercel (pubblicazione del portale), Supabase (database, utenti, documenti, funzioni) e Resend (email). Il portale è pubblicato su portale-cwp.vercel.app e funziona con dati di prova: si può aprire durante la presentazione (collegamento cliccabile) o inquadrare il codice QR con il telefono. La pagina pubblica /programma mostra già gli 8 documenti ufficiali del Programma, la Metodologia approvata, la PEC e il soggetto promotore. Lo sviluppo del portale vero è partito il 17 ottobre 2026: da allora sono state pubblicate 118 versioni, 33 script del database e 6 funzioni sul server. Restano i punti aperti delle prossime slide (servizi a pagamento, sicurezza, dati da inserire, collaudo con un Comune). Suggerimento: aprire il portale dal vivo con un utente di prova e mostrare la pagina pubblica.</a:t>
+              <a:t>Pagina «effetto sorpresa»: nessuno si aspetta che il portale sia già online. Il sistema è stato realizzato da Luca Moretti con l'ausilio di Claude Code ed è quasi terminato; i servizi sono già in produzione: GitHub (codice), Vercel (pubblicazione del portale), Supabase (database, utenti, documenti, funzioni) e Resend (email). Il portale è pubblicato su portale-cwp.vercel.app e funziona con dati di prova: si può aprire durante la presentazione (collegamento cliccabile) o inquadrare il codice QR con il telefono. La pagina pubblica /programma mostra già gli 8 documenti ufficiali del Programma, la Metodologia approvata, la PEC e il soggetto promotore. Lo sviluppo del portale vero è partito il 17 ottobre 2026: da allora sono state pubblicate 119 versioni, 33 script del database e 6 funzioni sul server. Restano i punti aperti delle prossime slide (servizi a pagamento, sicurezza, dati da inserire, collaudo con un Comune). Suggerimento: aprire il portale dal vivo con un utente di prova e mostrare la pagina pubblica.</a:t>
             </a:r>
             <a:endParaRPr lang="en-US" dirty="0"/>
           </a:p>
@@ -14022,7 +14022,7 @@
                 <a:ea typeface="Cambria" pitchFamily="34" charset="-122"/>
                 <a:cs typeface="Cambria" pitchFamily="34" charset="-120"/>
               </a:rPr>
-              <a:t>118</a:t>
+              <a:t>119</a:t>
             </a:r>
             <a:endParaRPr lang="en-US" sz="2400" dirty="0"/>
           </a:p>

--- a/public/documentazione/Presentazione_Portale_CWP.pptx
+++ b/public/documentazione/Presentazione_Portale_CWP.pptx
@@ -120,39 +120,39 @@
   <p:extLst>
     <p:ext uri="{521415D9-36F7-43E2-AB2F-B90AF26B5E84}">
       <p14:sectionLst xmlns:p14="http://schemas.microsoft.com/office/powerpoint/2010/main">
-        <p14:section name="Apertura" id="{7b5144d2-74f2-e3ab-cf0f-e7cddbd27c5e}">
+        <p14:section name="Apertura" id="{7badf330-8c82-931e-b6ea-c154d1688cc5}">
           <p14:sldIdLst>
             <p14:sldId id="256"/>
           </p14:sldIdLst>
         </p14:section>
-        <p14:section name="Metodologia" id="{a0dc6646-49fd-2ee6-6290-d6726692d872}">
+        <p14:section name="Metodologia" id="{ee330bf9-3fe7-0dfb-20cd-2468adbd0b7a}">
           <p14:sldIdLst>
             <p14:sldId id="257"/>
           </p14:sldIdLst>
         </p14:section>
-        <p14:section name="Analisi funzionale" id="{30ae77b1-4745-f38c-3e52-f65d4c537037}">
+        <p14:section name="Analisi funzionale" id="{8effcfb4-12e1-cb6f-337b-a39d3d85ab22}">
           <p14:sldIdLst>
             <p14:sldId id="258"/>
             <p14:sldId id="259"/>
           </p14:sldIdLst>
         </p14:section>
-        <p14:section name="Già realtà" id="{a794d5d6-764c-3997-d34b-f99339f21297}">
+        <p14:section name="Già realtà" id="{ff607424-2aa8-e681-db0d-c62bccc430f3}">
           <p14:sldIdLst>
             <p14:sldId id="260"/>
           </p14:sldIdLst>
         </p14:section>
-        <p14:section name="Architettura e ruoli" id="{a50949e0-a8bf-49ba-3a11-6fead275abdb}">
+        <p14:section name="Architettura e ruoli" id="{deada2b8-c2c2-a923-c19a-54e7363b41b3}">
           <p14:sldIdLst>
             <p14:sldId id="261"/>
             <p14:sldId id="262"/>
           </p14:sldIdLst>
         </p14:section>
-        <p14:section name="Novità" id="{3de1da05-bfe0-49c6-3ba1-003f910e3910}">
+        <p14:section name="Novità" id="{295c91df-45bb-2604-db48-ee18cbdb7b04}">
           <p14:sldIdLst>
             <p14:sldId id="263"/>
           </p14:sldIdLst>
         </p14:section>
-        <p14:section name="Punti aperti" id="{7fb34208-b5ef-854d-f814-3d173e8a9a0a}">
+        <p14:section name="Punti aperti" id="{547655a9-b4da-7483-8cae-df0562c11704}">
           <p14:sldIdLst>
             <p14:sldId id="264"/>
             <p14:sldId id="265"/>
@@ -161,7 +161,7 @@
             <p14:sldId id="268"/>
           </p14:sldIdLst>
         </p14:section>
-        <p14:section name="Scelte da prendere" id="{1c1f436d-a61c-d96e-7ff0-dd60b7f3c82b}">
+        <p14:section name="Scelte da prendere" id="{9dd471d7-9fbc-7fd6-7eff-8b51722599ef}">
           <p14:sldIdLst>
             <p14:sldId id="269"/>
           </p14:sldIdLst>
@@ -570,7 +570,7 @@
           <a:p>
             <a:r>
               <a:rPr lang="en-US" dirty="0"/>
-              <a:t>Presentazione di riepilogo del portale, aggiornata al 20 ottobre 2026 (revisione 2.5): metodologia, funzioni realizzate, novità, punti aperti di sviluppo e scelte ancora da prendere. Si rigenera a ogni rilascio insieme agli altri documenti ed è disponibile agli Amministratori nella pagina Documentazione del portale.</a:t>
+              <a:t>Presentazione di riepilogo del portale, aggiornata al 20 ottobre 2026 (revisione 2.6): metodologia, funzioni realizzate, novità, punti aperti di sviluppo e scelte ancora da prendere. Si rigenera a ogni rilascio insieme agli altri documenti ed è disponibile agli Amministratori nella pagina Documentazione del portale.</a:t>
             </a:r>
             <a:endParaRPr lang="en-US" dirty="0"/>
           </a:p>
@@ -1362,7 +1362,7 @@
           <a:p>
             <a:r>
               <a:rPr lang="en-US" dirty="0"/>
-              <a:t>Pagina «effetto sorpresa»: nessuno si aspetta che il portale sia già online. Il sistema è stato realizzato da Luca Moretti con l'ausilio di Claude Code ed è quasi terminato; i servizi sono già in produzione: GitHub (codice), Vercel (pubblicazione del portale), Supabase (database, utenti, documenti, funzioni) e Resend (email). Il portale è pubblicato su portale-cwp.vercel.app e funziona con dati di prova: si può aprire durante la presentazione (collegamento cliccabile) o inquadrare il codice QR con il telefono. La pagina pubblica /programma mostra già gli 8 documenti ufficiali del Programma, la Metodologia approvata, la PEC e il soggetto promotore. Lo sviluppo del portale vero è partito il 17 ottobre 2026: da allora sono state pubblicate 119 versioni, 33 script del database e 6 funzioni sul server. Restano i punti aperti delle prossime slide (servizi a pagamento, sicurezza, dati da inserire, collaudo con un Comune). Suggerimento: aprire il portale dal vivo con un utente di prova e mostrare la pagina pubblica.</a:t>
+              <a:t>Pagina «effetto sorpresa»: nessuno si aspetta che il portale sia già online. Il sistema è stato realizzato da Luca Moretti con l'ausilio di Claude Code ed è quasi terminato; i servizi sono già in produzione: GitHub (codice), Vercel (pubblicazione del portale), Supabase (database, utenti, documenti, funzioni) e Resend (email). Il portale è pubblicato su portale-cwp.vercel.app e funziona con dati di prova: si può aprire durante la presentazione (collegamento cliccabile) o inquadrare il codice QR con il telefono. La pagina pubblica /programma mostra già gli 8 documenti ufficiali del Programma, la Metodologia approvata, la PEC e il soggetto promotore. Lo sviluppo del portale vero è partito il 17 ottobre 2026: da allora sono state pubblicate 120 versioni, 33 script del database e 6 funzioni sul server. Restano i punti aperti delle prossime slide (servizi a pagamento, sicurezza, dati da inserire, collaudo con un Comune). Suggerimento: aprire il portale dal vivo con un utente di prova e mostrare la pagina pubblica.</a:t>
             </a:r>
             <a:endParaRPr lang="en-US" dirty="0"/>
           </a:p>
@@ -1626,7 +1626,7 @@
           <a:p>
             <a:r>
               <a:rPr lang="en-US" dirty="0"/>
-              <a:t>Novità pubblicate il 19 ottobre pomeriggio, su richiesta di Luca. Dashboard (prima «Cruscotto»): per ogni pratica una barra di 7 luci, una per fase, accese le fasi completate e spente quelle da fare, la settima verde; la fase in corso ha il contorno. Ordinamento: ogni tabella del portale si ordina per qualsiasi colonna e gli elenchi a schede hanno il menu «Ordina per». Utenti: un Amministratore può nominare altri Amministratori, tutti con accesso completo; l'Amministratore principale luca.moretti@operate.it è protetto dal database (non si declassa, non si disattiva, non si cancella, nemmeno dal pannello di Supabase); si possono eliminare solo gli utenti che non hanno mai operato (nessuna voce nell'audit e nessun dato a loro nome). Email: il nuovo utente riceve indirizzo del portale, email e password temporanea, con l'obbligo di sceglierne una personale al primo accesso; finché il dominio operate.it non è verificato su Resend le email arrivano solo al titolare dell'account. Simulatore: oltre al bilancio del Comune c'è il metodo per utenza con le sole utenze virtuose (formula 32 con buffer), lo stesso delle stime dell'Allegato A dei contratti EsaCom; il buffer si calcola dalle Tabelle 15-16. Decisione: il portale non va qualificato ACN come servizio cloud per la PA, perché serve a qualificare il modello e il Comune vi riversa dati senza acquistare un servizio; restano GDPR, dati in UE e sicurezza; da confermare con un parere legale. Il 20 ottobre: sezione «Audit trail user» per l'Amministratore principale, con tutti gli utenti online o no, il registro degli accessi (entrate, uscite, tentativi non riusciti, senza indirizzi IP) e le operazioni dell'audit trail per utente, compreso lo scaricamento dei documenti; utenti online per l'Amministratore principale (chi è collegato adesso, pagina aperta, da quanto, e chi è stato visto nelle ultime 24 ore; si conserva solo l'ultimo collegamento, gli utenti ne sono informati nel Manuale Utente); messaggi d'errore dell'assistente in italiano semplice, con la causa per gli Amministratori; simulatore con PDF impaginato in A4 orizzontale ed export Excel con i fogli Sintesi, Anni, Economia e Costi.</a:t>
+              <a:t>Novità pubblicate il 19 ottobre pomeriggio, su richiesta di Luca. Dashboard (prima «Cruscotto»): per ogni pratica una barra di 7 luci, una per fase, accese le fasi completate e spente quelle da fare, la settima verde; la fase in corso ha il contorno. Ordinamento: ogni tabella del portale si ordina per qualsiasi colonna e gli elenchi a schede hanno il menu «Ordina per». Utenti: un Amministratore può nominare altri Amministratori, tutti con accesso completo; l'Amministratore principale luca.moretti@operate.it è protetto dal database (non si declassa, non si disattiva, non si cancella, nemmeno dal pannello di Supabase); si possono eliminare solo gli utenti che non hanno mai operato (nessuna voce nell'audit e nessun dato a loro nome). Email: il nuovo utente riceve indirizzo del portale, email e password temporanea, con l'obbligo di sceglierne una personale al primo accesso; finché il dominio operate.it non è verificato su Resend le email arrivano solo al titolare dell'account. Simulatore: oltre al bilancio del Comune c'è il metodo per utenza con le sole utenze virtuose (formula 32 con buffer), lo stesso delle stime dell'Allegato A dei contratti EsaCom; il buffer si calcola dalle Tabelle 15-16. Decisione: il portale non va qualificato ACN come servizio cloud per la PA, perché serve a qualificare il modello e il Comune vi riversa dati senza acquistare un servizio; restano GDPR, dati in UE e sicurezza; da confermare con un parere legale. Il 20 ottobre: sezione «Audit User» per l'Amministratore principale, con tutti gli utenti online o no, il registro degli accessi (entrate, uscite, tentativi non riusciti, senza indirizzi IP) e le operazioni dell'audit trail per utente, compreso lo scaricamento dei documenti; utenti online per l'Amministratore principale (chi è collegato adesso, pagina aperta, da quanto, e chi è stato visto nelle ultime 24 ore; si conserva solo l'ultimo collegamento, gli utenti ne sono informati nel Manuale Utente); messaggi d'errore dell'assistente in italiano semplice, con la causa per gli Amministratori; simulatore con PDF impaginato in A4 orizzontale ed export Excel con i fogli Sintesi, Anni, Economia e Costi.</a:t>
             </a:r>
             <a:endParaRPr lang="en-US" dirty="0"/>
           </a:p>
@@ -2073,7 +2073,7 @@
                   <a:schemeClr val="accent6"/>
                 </a:solidFill>
               </a:rPr>
-              <a:t>Portale Carbon WastePrint · Stato dei lavori e recap · 20 ottobre 2026 · rev. 2.5</a:t>
+              <a:t>Portale Carbon WastePrint · Stato dei lavori e recap · 20 ottobre 2026 · rev. 2.6</a:t>
             </a:r>
             <a:endParaRPr lang="en-US" sz="1000" dirty="0"/>
           </a:p>
@@ -2571,7 +2571,7 @@
                   <a:schemeClr val="accent3"/>
                 </a:solidFill>
               </a:rPr>
-              <a:t>Stato dei lavori e recap: metodologia, funzioni, novità, punti aperti e scelte da prendere · aggiornata al 20 ottobre 2026 · rev. 2.5</a:t>
+              <a:t>Stato dei lavori e recap: metodologia, funzioni, novità, punti aperti e scelte da prendere · aggiornata al 20 ottobre 2026 · rev. 2.6</a:t>
             </a:r>
             <a:endParaRPr lang="en-US" sz="1800" dirty="0"/>
           </a:p>
@@ -13235,7 +13235,7 @@
                 <a:ea typeface="Cambria" pitchFamily="34" charset="-122"/>
                 <a:cs typeface="Cambria" pitchFamily="34" charset="-120"/>
               </a:rPr>
-              <a:t>≈31.800</a:t>
+              <a:t>≈31.900</a:t>
             </a:r>
             <a:endParaRPr lang="en-US" sz="3000" dirty="0"/>
           </a:p>
@@ -14022,7 +14022,7 @@
                 <a:ea typeface="Cambria" pitchFamily="34" charset="-122"/>
                 <a:cs typeface="Cambria" pitchFamily="34" charset="-120"/>
               </a:rPr>
-              <a:t>119</a:t>
+              <a:t>120</a:t>
             </a:r>
             <a:endParaRPr lang="en-US" sz="2400" dirty="0"/>
           </a:p>
@@ -14181,7 +14181,7 @@
                 <a:ea typeface="Cambria" pitchFamily="34" charset="-122"/>
                 <a:cs typeface="Cambria" pitchFamily="34" charset="-120"/>
               </a:rPr>
-              <a:t>≈31.800</a:t>
+              <a:t>≈31.900</a:t>
             </a:r>
             <a:endParaRPr lang="en-US" sz="2400" dirty="0"/>
           </a:p>
@@ -17455,7 +17455,7 @@
                   <a:schemeClr val="tx1"/>
                 </a:solidFill>
               </a:rPr>
-              <a:t>più amministratori; luca.moretti@operate.it è il principale e ha la sezione «Audit trail user»: chi è online, accessi e operazioni di ogni utente (20/10)</a:t>
+              <a:t>più amministratori; luca.moretti@operate.it è il principale e ha la sezione «Audit User»: chi è online, accessi e operazioni di ogni utente (20/10)</a:t>
             </a:r>
             <a:endParaRPr lang="en-US" sz="1350" dirty="0"/>
           </a:p>

--- a/public/documentazione/Presentazione_Portale_CWP.pptx
+++ b/public/documentazione/Presentazione_Portale_CWP.pptx
@@ -120,39 +120,39 @@
   <p:extLst>
     <p:ext uri="{521415D9-36F7-43E2-AB2F-B90AF26B5E84}">
       <p14:sectionLst xmlns:p14="http://schemas.microsoft.com/office/powerpoint/2010/main">
-        <p14:section name="Apertura" id="{7badf330-8c82-931e-b6ea-c154d1688cc5}">
+        <p14:section name="Apertura" id="{ad2d5afb-f8ed-3ce6-a5aa-40f860059c4c}">
           <p14:sldIdLst>
             <p14:sldId id="256"/>
           </p14:sldIdLst>
         </p14:section>
-        <p14:section name="Metodologia" id="{ee330bf9-3fe7-0dfb-20cd-2468adbd0b7a}">
+        <p14:section name="Metodologia" id="{ddb77900-f72e-8402-9c45-4de499384ba1}">
           <p14:sldIdLst>
             <p14:sldId id="257"/>
           </p14:sldIdLst>
         </p14:section>
-        <p14:section name="Analisi funzionale" id="{8effcfb4-12e1-cb6f-337b-a39d3d85ab22}">
+        <p14:section name="Analisi funzionale" id="{00922fe4-b224-0cf0-e05d-32d6a814251d}">
           <p14:sldIdLst>
             <p14:sldId id="258"/>
             <p14:sldId id="259"/>
           </p14:sldIdLst>
         </p14:section>
-        <p14:section name="Già realtà" id="{ff607424-2aa8-e681-db0d-c62bccc430f3}">
+        <p14:section name="Già realtà" id="{e295eebb-c702-6b17-e76d-270eaa1c86d6}">
           <p14:sldIdLst>
             <p14:sldId id="260"/>
           </p14:sldIdLst>
         </p14:section>
-        <p14:section name="Architettura e ruoli" id="{deada2b8-c2c2-a923-c19a-54e7363b41b3}">
+        <p14:section name="Architettura e ruoli" id="{0bb06659-4a27-0c9f-13d5-29b0968cdb29}">
           <p14:sldIdLst>
             <p14:sldId id="261"/>
             <p14:sldId id="262"/>
           </p14:sldIdLst>
         </p14:section>
-        <p14:section name="Novità" id="{295c91df-45bb-2604-db48-ee18cbdb7b04}">
+        <p14:section name="Novità" id="{2e182f74-96d2-2099-8183-8deb2d564a14}">
           <p14:sldIdLst>
             <p14:sldId id="263"/>
           </p14:sldIdLst>
         </p14:section>
-        <p14:section name="Punti aperti" id="{547655a9-b4da-7483-8cae-df0562c11704}">
+        <p14:section name="Punti aperti" id="{2b073e29-81e8-e57d-1771-e6cfd2680291}">
           <p14:sldIdLst>
             <p14:sldId id="264"/>
             <p14:sldId id="265"/>
@@ -161,7 +161,7 @@
             <p14:sldId id="268"/>
           </p14:sldIdLst>
         </p14:section>
-        <p14:section name="Scelte da prendere" id="{9dd471d7-9fbc-7fd6-7eff-8b51722599ef}">
+        <p14:section name="Scelte da prendere" id="{bd5d5a38-1213-1843-15bf-3d8cee1a3cc7}">
           <p14:sldIdLst>
             <p14:sldId id="269"/>
           </p14:sldIdLst>
@@ -570,7 +570,7 @@
           <a:p>
             <a:r>
               <a:rPr lang="en-US" dirty="0"/>
-              <a:t>Presentazione di riepilogo del portale, aggiornata al 20 ottobre 2026 (revisione 2.6): metodologia, funzioni realizzate, novità, punti aperti di sviluppo e scelte ancora da prendere. Si rigenera a ogni rilascio insieme agli altri documenti ed è disponibile agli Amministratori nella pagina Documentazione del portale.</a:t>
+              <a:t>Presentazione di riepilogo del portale, aggiornata al 20 ottobre 2026 (revisione 2.7): metodologia, funzioni realizzate, novità, punti aperti di sviluppo e scelte ancora da prendere. Si rigenera a ogni rilascio insieme agli altri documenti ed è disponibile agli Amministratori nella pagina Documentazione del portale.</a:t>
             </a:r>
             <a:endParaRPr lang="en-US" dirty="0"/>
           </a:p>
@@ -1362,7 +1362,7 @@
           <a:p>
             <a:r>
               <a:rPr lang="en-US" dirty="0"/>
-              <a:t>Pagina «effetto sorpresa»: nessuno si aspetta che il portale sia già online. Il sistema è stato realizzato da Luca Moretti con l'ausilio di Claude Code ed è quasi terminato; i servizi sono già in produzione: GitHub (codice), Vercel (pubblicazione del portale), Supabase (database, utenti, documenti, funzioni) e Resend (email). Il portale è pubblicato su portale-cwp.vercel.app e funziona con dati di prova: si può aprire durante la presentazione (collegamento cliccabile) o inquadrare il codice QR con il telefono. La pagina pubblica /programma mostra già gli 8 documenti ufficiali del Programma, la Metodologia approvata, la PEC e il soggetto promotore. Lo sviluppo del portale vero è partito il 17 ottobre 2026: da allora sono state pubblicate 120 versioni, 33 script del database e 6 funzioni sul server. Restano i punti aperti delle prossime slide (servizi a pagamento, sicurezza, dati da inserire, collaudo con un Comune). Suggerimento: aprire il portale dal vivo con un utente di prova e mostrare la pagina pubblica.</a:t>
+              <a:t>Pagina «effetto sorpresa»: nessuno si aspetta che il portale sia già online. Il sistema è stato realizzato da Luca Moretti con l'ausilio di Claude Code ed è quasi terminato; i servizi sono già in produzione: GitHub (codice), Vercel (pubblicazione del portale), Supabase (database, utenti, documenti, funzioni) e Resend (email). Il portale è pubblicato su portale-cwp.vercel.app e funziona con dati di prova: si può aprire durante la presentazione (collegamento cliccabile) o inquadrare il codice QR con il telefono. La pagina pubblica /programma mostra già gli 8 documenti ufficiali del Programma, la Metodologia approvata, la PEC e il soggetto promotore. Lo sviluppo del portale vero è partito il 17 ottobre 2026: da allora sono state pubblicate 121 versioni, 33 script del database e 6 funzioni sul server. Restano i punti aperti delle prossime slide (servizi a pagamento, sicurezza, dati da inserire, collaudo con un Comune). Suggerimento: aprire il portale dal vivo con un utente di prova e mostrare la pagina pubblica.</a:t>
             </a:r>
             <a:endParaRPr lang="en-US" dirty="0"/>
           </a:p>
@@ -1626,7 +1626,7 @@
           <a:p>
             <a:r>
               <a:rPr lang="en-US" dirty="0"/>
-              <a:t>Novità pubblicate il 19 ottobre pomeriggio, su richiesta di Luca. Dashboard (prima «Cruscotto»): per ogni pratica una barra di 7 luci, una per fase, accese le fasi completate e spente quelle da fare, la settima verde; la fase in corso ha il contorno. Ordinamento: ogni tabella del portale si ordina per qualsiasi colonna e gli elenchi a schede hanno il menu «Ordina per». Utenti: un Amministratore può nominare altri Amministratori, tutti con accesso completo; l'Amministratore principale luca.moretti@operate.it è protetto dal database (non si declassa, non si disattiva, non si cancella, nemmeno dal pannello di Supabase); si possono eliminare solo gli utenti che non hanno mai operato (nessuna voce nell'audit e nessun dato a loro nome). Email: il nuovo utente riceve indirizzo del portale, email e password temporanea, con l'obbligo di sceglierne una personale al primo accesso; finché il dominio operate.it non è verificato su Resend le email arrivano solo al titolare dell'account. Simulatore: oltre al bilancio del Comune c'è il metodo per utenza con le sole utenze virtuose (formula 32 con buffer), lo stesso delle stime dell'Allegato A dei contratti EsaCom; il buffer si calcola dalle Tabelle 15-16. Decisione: il portale non va qualificato ACN come servizio cloud per la PA, perché serve a qualificare il modello e il Comune vi riversa dati senza acquistare un servizio; restano GDPR, dati in UE e sicurezza; da confermare con un parere legale. Il 20 ottobre: sezione «Audit User» per l'Amministratore principale, con tutti gli utenti online o no, il registro degli accessi (entrate, uscite, tentativi non riusciti, senza indirizzi IP) e le operazioni dell'audit trail per utente, compreso lo scaricamento dei documenti; utenti online per l'Amministratore principale (chi è collegato adesso, pagina aperta, da quanto, e chi è stato visto nelle ultime 24 ore; si conserva solo l'ultimo collegamento, gli utenti ne sono informati nel Manuale Utente); messaggi d'errore dell'assistente in italiano semplice, con la causa per gli Amministratori; simulatore con PDF impaginato in A4 orizzontale ed export Excel con i fogli Sintesi, Anni, Economia e Costi.</a:t>
+              <a:t>Novità pubblicate il 19 ottobre pomeriggio, su richiesta di Luca. Dashboard (prima «Cruscotto»): per ogni pratica una barra di 7 luci, una per fase, accese le fasi completate e spente quelle da fare, la settima verde; la fase in corso ha il contorno. Ordinamento: ogni tabella del portale si ordina per qualsiasi colonna e gli elenchi a schede hanno il menu «Ordina per». Utenti: un Amministratore può nominare altri Amministratori, tutti con accesso completo; l'Amministratore principale luca.moretti@operate.it è protetto dal database (non si declassa, non si disattiva, non si cancella, nemmeno dal pannello di Supabase); si possono eliminare solo gli utenti che non hanno mai operato (nessuna voce nell'audit e nessun dato a loro nome). Email: il nuovo utente riceve indirizzo del portale, email e password temporanea, con l'obbligo di sceglierne una personale al primo accesso; finché il dominio operate.it non è verificato su Resend le email arrivano solo al titolare dell'account. Simulatore: oltre al bilancio del Comune c'è il metodo per utenza con le sole utenze virtuose (formula 32 con buffer), lo stesso delle stime dell'Allegato A dei contratti EsaCom; il buffer si calcola dalle Tabelle 15-16. Decisione: il portale non va qualificato ACN come servizio cloud per la PA, perché serve a qualificare il modello e il Comune vi riversa dati senza acquistare un servizio; restano GDPR, dati in UE e sicurezza; da confermare con un parere legale. Il 20 ottobre: sezione «Audit User» per l'Amministratore principale, con tutti gli utenti online o no, il registro degli accessi (entrate, uscite, tentativi non riusciti, senza indirizzi IP) e le operazioni dell'audit trail per utente, compreso lo scaricamento dei documenti; utenti online per l'Amministratore principale (chi è collegato adesso, pagina aperta, da quanto, e chi è stato visto nelle ultime 24 ore; si conserva solo l'ultimo collegamento, gli utenti ne sono informati nel Manuale Utente); messaggi d'errore dell'assistente in italiano semplice, con la causa per gli Amministratori; simulatore con PDF impaginato in A4 orizzontale ed export Excel con i fogli Sintesi, Anni, Economia e Costi. Menu riordinati da Luca il 20/10: Amministratori Dashboard, Anagrafiche, Simulatore, Pratiche, Reclami, Calcolo crediti, Crediti emessi, Impostazioni, Utenti, Audit, Audit User (solo il principale), Documentazione; enti Le mie pratiche, I tuoi documenti, Reclami, Formato dati, Il Programma CWP, Manuali; per entrambi la voce Marketplaces in grigio, sezione in arrivo da definire.</a:t>
             </a:r>
             <a:endParaRPr lang="en-US" dirty="0"/>
           </a:p>
@@ -2073,7 +2073,7 @@
                   <a:schemeClr val="accent6"/>
                 </a:solidFill>
               </a:rPr>
-              <a:t>Portale Carbon WastePrint · Stato dei lavori e recap · 20 ottobre 2026 · rev. 2.6</a:t>
+              <a:t>Portale Carbon WastePrint · Stato dei lavori e recap · 20 ottobre 2026 · rev. 2.7</a:t>
             </a:r>
             <a:endParaRPr lang="en-US" sz="1000" dirty="0"/>
           </a:p>
@@ -2571,7 +2571,7 @@
                   <a:schemeClr val="accent3"/>
                 </a:solidFill>
               </a:rPr>
-              <a:t>Stato dei lavori e recap: metodologia, funzioni, novità, punti aperti e scelte da prendere · aggiornata al 20 ottobre 2026 · rev. 2.6</a:t>
+              <a:t>Stato dei lavori e recap: metodologia, funzioni, novità, punti aperti e scelte da prendere · aggiornata al 20 ottobre 2026 · rev. 2.7</a:t>
             </a:r>
             <a:endParaRPr lang="en-US" sz="1800" dirty="0"/>
           </a:p>
@@ -14022,7 +14022,7 @@
                 <a:ea typeface="Cambria" pitchFamily="34" charset="-122"/>
                 <a:cs typeface="Cambria" pitchFamily="34" charset="-120"/>
               </a:rPr>
-              <a:t>120</a:t>
+              <a:t>121</a:t>
             </a:r>
             <a:endParaRPr lang="en-US" sz="2400" dirty="0"/>
           </a:p>
@@ -17574,7 +17574,7 @@
                   <a:schemeClr val="tx2"/>
                 </a:solidFill>
               </a:rPr>
-              <a:t>Documentazione</a:t>
+              <a:t>Menu e documenti</a:t>
             </a:r>
             <a:endParaRPr lang="en-US" sz="1350" dirty="0"/>
           </a:p>
@@ -17591,7 +17591,7 @@
                   <a:schemeClr val="tx1"/>
                 </a:solidFill>
               </a:rPr>
-              <a:t>gli 8 documenti ufficiali del Programma v1.2 e questa presentazione, per gli Amministratori</a:t>
+              <a:t>menu riordinati per ruolo, «Marketplaces» in arrivo; 8 documenti ufficiali v1.2 e questa presentazione per gli Amministratori</a:t>
             </a:r>
             <a:endParaRPr lang="en-US" sz="1350" dirty="0"/>
           </a:p>

--- a/public/documentazione/Presentazione_Portale_CWP.pptx
+++ b/public/documentazione/Presentazione_Portale_CWP.pptx
@@ -120,39 +120,39 @@
   <p:extLst>
     <p:ext uri="{521415D9-36F7-43E2-AB2F-B90AF26B5E84}">
       <p14:sectionLst xmlns:p14="http://schemas.microsoft.com/office/powerpoint/2010/main">
-        <p14:section name="Apertura" id="{ad2d5afb-f8ed-3ce6-a5aa-40f860059c4c}">
+        <p14:section name="Apertura" id="{88254153-624b-6dd5-9050-9b26aec9a4fc}">
           <p14:sldIdLst>
             <p14:sldId id="256"/>
           </p14:sldIdLst>
         </p14:section>
-        <p14:section name="Metodologia" id="{ddb77900-f72e-8402-9c45-4de499384ba1}">
+        <p14:section name="Metodologia" id="{f125ed4a-ee58-21e0-ece2-9e5403fbb52b}">
           <p14:sldIdLst>
             <p14:sldId id="257"/>
           </p14:sldIdLst>
         </p14:section>
-        <p14:section name="Analisi funzionale" id="{00922fe4-b224-0cf0-e05d-32d6a814251d}">
+        <p14:section name="Analisi funzionale" id="{c83395c9-64d0-9d18-6c54-c1f6a049e5b8}">
           <p14:sldIdLst>
             <p14:sldId id="258"/>
             <p14:sldId id="259"/>
           </p14:sldIdLst>
         </p14:section>
-        <p14:section name="Già realtà" id="{e295eebb-c702-6b17-e76d-270eaa1c86d6}">
+        <p14:section name="Già realtà" id="{0d8ece12-01b9-8d9c-2a94-04da554c68c7}">
           <p14:sldIdLst>
             <p14:sldId id="260"/>
           </p14:sldIdLst>
         </p14:section>
-        <p14:section name="Architettura e ruoli" id="{0bb06659-4a27-0c9f-13d5-29b0968cdb29}">
+        <p14:section name="Architettura e ruoli" id="{d3ac0727-ef34-b629-21f0-84233058cb3f}">
           <p14:sldIdLst>
             <p14:sldId id="261"/>
             <p14:sldId id="262"/>
           </p14:sldIdLst>
         </p14:section>
-        <p14:section name="Novità" id="{2e182f74-96d2-2099-8183-8deb2d564a14}">
+        <p14:section name="Novità" id="{c87d1bcf-1c12-3be8-b7f8-fee18b377f8d}">
           <p14:sldIdLst>
             <p14:sldId id="263"/>
           </p14:sldIdLst>
         </p14:section>
-        <p14:section name="Punti aperti" id="{2b073e29-81e8-e57d-1771-e6cfd2680291}">
+        <p14:section name="Punti aperti" id="{041e1814-a862-34e8-698a-a6dfb7987d48}">
           <p14:sldIdLst>
             <p14:sldId id="264"/>
             <p14:sldId id="265"/>
@@ -161,7 +161,7 @@
             <p14:sldId id="268"/>
           </p14:sldIdLst>
         </p14:section>
-        <p14:section name="Scelte da prendere" id="{bd5d5a38-1213-1843-15bf-3d8cee1a3cc7}">
+        <p14:section name="Scelte da prendere" id="{9ebeba5e-36ed-6eaa-3399-280f2f217a99}">
           <p14:sldIdLst>
             <p14:sldId id="269"/>
           </p14:sldIdLst>
@@ -570,7 +570,7 @@
           <a:p>
             <a:r>
               <a:rPr lang="en-US" dirty="0"/>
-              <a:t>Presentazione di riepilogo del portale, aggiornata al 20 ottobre 2026 (revisione 2.7): metodologia, funzioni realizzate, novità, punti aperti di sviluppo e scelte ancora da prendere. Si rigenera a ogni rilascio insieme agli altri documenti ed è disponibile agli Amministratori nella pagina Documentazione del portale.</a:t>
+              <a:t>Presentazione di riepilogo del portale, aggiornata al 20 ottobre 2026 (revisione 2.8): metodologia, funzioni realizzate, novità, punti aperti di sviluppo e scelte ancora da prendere. Si rigenera a ogni rilascio insieme agli altri documenti ed è disponibile agli Amministratori nella pagina Documentazione del portale.</a:t>
             </a:r>
             <a:endParaRPr lang="en-US" dirty="0"/>
           </a:p>
@@ -1362,7 +1362,7 @@
           <a:p>
             <a:r>
               <a:rPr lang="en-US" dirty="0"/>
-              <a:t>Pagina «effetto sorpresa»: nessuno si aspetta che il portale sia già online. Il sistema è stato realizzato da Luca Moretti con l'ausilio di Claude Code ed è quasi terminato; i servizi sono già in produzione: GitHub (codice), Vercel (pubblicazione del portale), Supabase (database, utenti, documenti, funzioni) e Resend (email). Il portale è pubblicato su portale-cwp.vercel.app e funziona con dati di prova: si può aprire durante la presentazione (collegamento cliccabile) o inquadrare il codice QR con il telefono. La pagina pubblica /programma mostra già gli 8 documenti ufficiali del Programma, la Metodologia approvata, la PEC e il soggetto promotore. Lo sviluppo del portale vero è partito il 17 ottobre 2026: da allora sono state pubblicate 121 versioni, 33 script del database e 6 funzioni sul server. Restano i punti aperti delle prossime slide (servizi a pagamento, sicurezza, dati da inserire, collaudo con un Comune). Suggerimento: aprire il portale dal vivo con un utente di prova e mostrare la pagina pubblica.</a:t>
+              <a:t>Pagina «effetto sorpresa»: nessuno si aspetta che il portale sia già online. Il sistema è stato realizzato da Luca Moretti con l'ausilio di Claude Code ed è quasi terminato; i servizi sono già in produzione: GitHub (codice), Vercel (pubblicazione del portale), Supabase (database, utenti, documenti, funzioni) e Resend (email). Il portale è pubblicato su portale-cwp.vercel.app e funziona con dati di prova: si può aprire durante la presentazione (collegamento cliccabile) o inquadrare il codice QR con il telefono. La pagina pubblica /programma mostra già gli 8 documenti ufficiali del Programma, la Metodologia approvata, la PEC e il soggetto promotore. Lo sviluppo del portale vero è partito il 17 ottobre 2026: da allora sono state pubblicate 123 versioni, 34 script del database e 6 funzioni sul server. Restano i punti aperti delle prossime slide (servizi a pagamento, sicurezza, dati da inserire, collaudo con un Comune). Suggerimento: aprire il portale dal vivo con un utente di prova e mostrare la pagina pubblica.</a:t>
             </a:r>
             <a:endParaRPr lang="en-US" dirty="0"/>
           </a:p>
@@ -2073,7 +2073,7 @@
                   <a:schemeClr val="accent6"/>
                 </a:solidFill>
               </a:rPr>
-              <a:t>Portale Carbon WastePrint · Stato dei lavori e recap · 20 ottobre 2026 · rev. 2.7</a:t>
+              <a:t>Portale Carbon WastePrint · Stato dei lavori e recap · 20 ottobre 2026 · rev. 2.8</a:t>
             </a:r>
             <a:endParaRPr lang="en-US" sz="1000" dirty="0"/>
           </a:p>
@@ -2571,7 +2571,7 @@
                   <a:schemeClr val="accent3"/>
                 </a:solidFill>
               </a:rPr>
-              <a:t>Stato dei lavori e recap: metodologia, funzioni, novità, punti aperti e scelte da prendere · aggiornata al 20 ottobre 2026 · rev. 2.7</a:t>
+              <a:t>Stato dei lavori e recap: metodologia, funzioni, novità, punti aperti e scelte da prendere · aggiornata al 20 ottobre 2026 · rev. 2.8</a:t>
             </a:r>
             <a:endParaRPr lang="en-US" sz="1800" dirty="0"/>
           </a:p>
@@ -12929,7 +12929,7 @@
                 <a:ea typeface="Cambria" pitchFamily="34" charset="-122"/>
                 <a:cs typeface="Cambria" pitchFamily="34" charset="-120"/>
               </a:rPr>
-              <a:t>33</a:t>
+              <a:t>34</a:t>
             </a:r>
             <a:endParaRPr lang="en-US" sz="3000" dirty="0"/>
           </a:p>
@@ -13235,7 +13235,7 @@
                 <a:ea typeface="Cambria" pitchFamily="34" charset="-122"/>
                 <a:cs typeface="Cambria" pitchFamily="34" charset="-120"/>
               </a:rPr>
-              <a:t>≈31.900</a:t>
+              <a:t>≈32.300</a:t>
             </a:r>
             <a:endParaRPr lang="en-US" sz="3000" dirty="0"/>
           </a:p>
@@ -14022,7 +14022,7 @@
                 <a:ea typeface="Cambria" pitchFamily="34" charset="-122"/>
                 <a:cs typeface="Cambria" pitchFamily="34" charset="-120"/>
               </a:rPr>
-              <a:t>121</a:t>
+              <a:t>123</a:t>
             </a:r>
             <a:endParaRPr lang="en-US" sz="2400" dirty="0"/>
           </a:p>
@@ -14075,7 +14075,7 @@
                 <a:ea typeface="Cambria" pitchFamily="34" charset="-122"/>
                 <a:cs typeface="Cambria" pitchFamily="34" charset="-120"/>
               </a:rPr>
-              <a:t>33</a:t>
+              <a:t>34</a:t>
             </a:r>
             <a:endParaRPr lang="en-US" sz="2400" dirty="0"/>
           </a:p>
@@ -14181,7 +14181,7 @@
                 <a:ea typeface="Cambria" pitchFamily="34" charset="-122"/>
                 <a:cs typeface="Cambria" pitchFamily="34" charset="-120"/>
               </a:rPr>
-              <a:t>≈31.900</a:t>
+              <a:t>≈32.300</a:t>
             </a:r>
             <a:endParaRPr lang="en-US" sz="2400" dirty="0"/>
           </a:p>
@@ -17888,7 +17888,7 @@
                   <a:schemeClr val="tx1"/>
                 </a:solidFill>
               </a:rPr>
-              <a:t>Registro di sicurezza: accessi, tentativi falliti, cambi di permessi</a:t>
+              <a:t>Fatto il 20/10: registro degli accessi e avvisi di sicurezza, uscita per inattività, intestazioni del sito, librerie aggiornate (0 vulnerabilità)</a:t>
             </a:r>
             <a:endParaRPr lang="en-US" sz="1350" dirty="0"/>
           </a:p>
@@ -17906,7 +17906,7 @@
                   <a:schemeClr val="tx1"/>
                 </a:solidFill>
               </a:rPr>
-              <a:t>Verifica in due passaggi per lo staff (pronta, spenta) e scadenza delle sessioni</a:t>
+              <a:t>Verifica in due passaggi per lo staff (pronta, spenta); CAPTCHA sulle pagine pubbliche</a:t>
             </a:r>
             <a:endParaRPr lang="en-US" sz="1350" dirty="0"/>
           </a:p>
@@ -17924,7 +17924,7 @@
                   <a:schemeClr val="tx1"/>
                 </a:solidFill>
               </a:rPr>
-              <a:t>Antivirus sui file; verifica OWASP, test di intrusione, librerie aggiornate</a:t>
+              <a:t>Antivirus sui file; verifica OWASP, test di intrusione a fine sviluppo</a:t>
             </a:r>
             <a:endParaRPr lang="en-US" sz="1350" dirty="0"/>
           </a:p>
@@ -18408,7 +18408,7 @@
                   <a:schemeClr val="tx1"/>
                 </a:solidFill>
               </a:rPr>
-              <a:t>Nuovi moduli: simulatore (online, due metodi), assistente virtuale (attivo dal 19/10; poi messaggi d'errore in italiano, Operatori e aiuto sulla pratica); utenti online per l'amministratore principale (in sviluppo)</a:t>
+              <a:t>Nuovi moduli: simulatore con PDF ed Excel, assistente virtuale (poi Operatori e aiuto sulla pratica), Audit User e utenti online (fatti il 20/10); Marketplaces da definire</a:t>
             </a:r>
             <a:endParaRPr lang="en-US" sz="1350" dirty="0"/>
           </a:p>

--- a/public/documentazione/Presentazione_Portale_CWP.pptx
+++ b/public/documentazione/Presentazione_Portale_CWP.pptx
@@ -120,39 +120,39 @@
   <p:extLst>
     <p:ext uri="{521415D9-36F7-43E2-AB2F-B90AF26B5E84}">
       <p14:sectionLst xmlns:p14="http://schemas.microsoft.com/office/powerpoint/2010/main">
-        <p14:section name="Apertura" id="{88254153-624b-6dd5-9050-9b26aec9a4fc}">
+        <p14:section name="Apertura" id="{08b5b8a3-577e-4694-29e7-d68217e0397e}">
           <p14:sldIdLst>
             <p14:sldId id="256"/>
           </p14:sldIdLst>
         </p14:section>
-        <p14:section name="Metodologia" id="{f125ed4a-ee58-21e0-ece2-9e5403fbb52b}">
+        <p14:section name="Metodologia" id="{71dd3b6a-d988-f802-58f8-780ca9a6d8a0}">
           <p14:sldIdLst>
             <p14:sldId id="257"/>
           </p14:sldIdLst>
         </p14:section>
-        <p14:section name="Analisi funzionale" id="{c83395c9-64d0-9d18-6c54-c1f6a049e5b8}">
+        <p14:section name="Analisi funzionale" id="{de280729-42a7-46eb-1e90-66910664146d}">
           <p14:sldIdLst>
             <p14:sldId id="258"/>
             <p14:sldId id="259"/>
           </p14:sldIdLst>
         </p14:section>
-        <p14:section name="Già realtà" id="{0d8ece12-01b9-8d9c-2a94-04da554c68c7}">
+        <p14:section name="Già realtà" id="{8faed5e3-c08c-f923-8f36-2040ea1e071e}">
           <p14:sldIdLst>
             <p14:sldId id="260"/>
           </p14:sldIdLst>
         </p14:section>
-        <p14:section name="Architettura e ruoli" id="{d3ac0727-ef34-b629-21f0-84233058cb3f}">
+        <p14:section name="Architettura e ruoli" id="{1792b304-afff-8fd4-d50c-751f2da792c1}">
           <p14:sldIdLst>
             <p14:sldId id="261"/>
             <p14:sldId id="262"/>
           </p14:sldIdLst>
         </p14:section>
-        <p14:section name="Novità" id="{c87d1bcf-1c12-3be8-b7f8-fee18b377f8d}">
+        <p14:section name="Novità" id="{70933325-4b36-24bc-0999-c50e391f4f37}">
           <p14:sldIdLst>
             <p14:sldId id="263"/>
           </p14:sldIdLst>
         </p14:section>
-        <p14:section name="Punti aperti" id="{041e1814-a862-34e8-698a-a6dfb7987d48}">
+        <p14:section name="Punti aperti" id="{b3562030-f347-b82b-6483-8bce1791db54}">
           <p14:sldIdLst>
             <p14:sldId id="264"/>
             <p14:sldId id="265"/>
@@ -161,7 +161,7 @@
             <p14:sldId id="268"/>
           </p14:sldIdLst>
         </p14:section>
-        <p14:section name="Scelte da prendere" id="{9ebeba5e-36ed-6eaa-3399-280f2f217a99}">
+        <p14:section name="Scelte da prendere" id="{5c501d7a-bb8c-dc65-eda5-e591f2e31d50}">
           <p14:sldIdLst>
             <p14:sldId id="269"/>
           </p14:sldIdLst>
@@ -570,7 +570,7 @@
           <a:p>
             <a:r>
               <a:rPr lang="en-US" dirty="0"/>
-              <a:t>Presentazione di riepilogo del portale, aggiornata al 20 ottobre 2026 (revisione 2.8): metodologia, funzioni realizzate, novità, punti aperti di sviluppo e scelte ancora da prendere. Si rigenera a ogni rilascio insieme agli altri documenti ed è disponibile agli Amministratori nella pagina Documentazione del portale.</a:t>
+              <a:t>Presentazione di riepilogo del portale, aggiornata al 21 ottobre 2026 (revisione 2.9): metodologia, funzioni realizzate, novità, punti aperti di sviluppo e scelte ancora da prendere. Si rigenera a ogni rilascio insieme agli altri documenti ed è disponibile agli Amministratori nella pagina Documentazione del portale.</a:t>
             </a:r>
             <a:endParaRPr lang="en-US" dirty="0"/>
           </a:p>
@@ -1362,7 +1362,7 @@
           <a:p>
             <a:r>
               <a:rPr lang="en-US" dirty="0"/>
-              <a:t>Pagina «effetto sorpresa»: nessuno si aspetta che il portale sia già online. Il sistema è stato realizzato da Luca Moretti con l'ausilio di Claude Code ed è quasi terminato; i servizi sono già in produzione: GitHub (codice), Vercel (pubblicazione del portale), Supabase (database, utenti, documenti, funzioni) e Resend (email). Il portale è pubblicato su portale-cwp.vercel.app e funziona con dati di prova: si può aprire durante la presentazione (collegamento cliccabile) o inquadrare il codice QR con il telefono. La pagina pubblica /programma mostra già gli 8 documenti ufficiali del Programma, la Metodologia approvata, la PEC e il soggetto promotore. Lo sviluppo del portale vero è partito il 17 ottobre 2026: da allora sono state pubblicate 123 versioni, 34 script del database e 6 funzioni sul server. Restano i punti aperti delle prossime slide (servizi a pagamento, sicurezza, dati da inserire, collaudo con un Comune). Suggerimento: aprire il portale dal vivo con un utente di prova e mostrare la pagina pubblica.</a:t>
+              <a:t>Pagina «effetto sorpresa»: nessuno si aspetta che il portale sia già online. Il sistema è stato realizzato da Luca Moretti con l'ausilio di Claude Code ed è quasi terminato; i servizi sono già in produzione: GitHub (codice), Vercel (pubblicazione del portale), Supabase (database, utenti, documenti, funzioni) e Resend (email). Il portale è pubblicato su portale-cwp.vercel.app e funziona con dati di prova: si può aprire durante la presentazione (collegamento cliccabile) o inquadrare il codice QR con il telefono. La pagina pubblica /programma mostra già gli 8 documenti ufficiali del Programma, la Metodologia approvata, la PEC e il soggetto promotore. Lo sviluppo del portale vero è partito il 17 ottobre 2026: da allora sono state pubblicate 130 versioni, 35 script del database e 6 funzioni sul server. Restano i punti aperti delle prossime slide (servizi a pagamento, sicurezza, dati da inserire, collaudo con un Comune). Suggerimento: aprire il portale dal vivo con un utente di prova e mostrare la pagina pubblica.</a:t>
             </a:r>
             <a:endParaRPr lang="en-US" dirty="0"/>
           </a:p>
@@ -2073,7 +2073,7 @@
                   <a:schemeClr val="accent6"/>
                 </a:solidFill>
               </a:rPr>
-              <a:t>Portale Carbon WastePrint · Stato dei lavori e recap · 20 ottobre 2026 · rev. 2.8</a:t>
+              <a:t>Portale Carbon WastePrint · Stato dei lavori e recap · 21 ottobre 2026 · rev. 2.9</a:t>
             </a:r>
             <a:endParaRPr lang="en-US" sz="1000" dirty="0"/>
           </a:p>
@@ -2571,7 +2571,7 @@
                   <a:schemeClr val="accent3"/>
                 </a:solidFill>
               </a:rPr>
-              <a:t>Stato dei lavori e recap: metodologia, funzioni, novità, punti aperti e scelte da prendere · aggiornata al 20 ottobre 2026 · rev. 2.8</a:t>
+              <a:t>Stato dei lavori e recap: metodologia, funzioni, novità, punti aperti e scelte da prendere · aggiornata al 21 ottobre 2026 · rev. 2.9</a:t>
             </a:r>
             <a:endParaRPr lang="en-US" sz="1800" dirty="0"/>
           </a:p>
@@ -12929,7 +12929,7 @@
                 <a:ea typeface="Cambria" pitchFamily="34" charset="-122"/>
                 <a:cs typeface="Cambria" pitchFamily="34" charset="-120"/>
               </a:rPr>
-              <a:t>34</a:t>
+              <a:t>35</a:t>
             </a:r>
             <a:endParaRPr lang="en-US" sz="3000" dirty="0"/>
           </a:p>
@@ -13235,7 +13235,7 @@
                 <a:ea typeface="Cambria" pitchFamily="34" charset="-122"/>
                 <a:cs typeface="Cambria" pitchFamily="34" charset="-120"/>
               </a:rPr>
-              <a:t>≈32.300</a:t>
+              <a:t>≈33.700</a:t>
             </a:r>
             <a:endParaRPr lang="en-US" sz="3000" dirty="0"/>
           </a:p>
@@ -14022,7 +14022,7 @@
                 <a:ea typeface="Cambria" pitchFamily="34" charset="-122"/>
                 <a:cs typeface="Cambria" pitchFamily="34" charset="-120"/>
               </a:rPr>
-              <a:t>123</a:t>
+              <a:t>130</a:t>
             </a:r>
             <a:endParaRPr lang="en-US" sz="2400" dirty="0"/>
           </a:p>
@@ -14075,7 +14075,7 @@
                 <a:ea typeface="Cambria" pitchFamily="34" charset="-122"/>
                 <a:cs typeface="Cambria" pitchFamily="34" charset="-120"/>
               </a:rPr>
-              <a:t>34</a:t>
+              <a:t>35</a:t>
             </a:r>
             <a:endParaRPr lang="en-US" sz="2400" dirty="0"/>
           </a:p>
@@ -14181,7 +14181,7 @@
                 <a:ea typeface="Cambria" pitchFamily="34" charset="-122"/>
                 <a:cs typeface="Cambria" pitchFamily="34" charset="-120"/>
               </a:rPr>
-              <a:t>≈32.300</a:t>
+              <a:t>≈33.700</a:t>
             </a:r>
             <a:endParaRPr lang="en-US" sz="2400" dirty="0"/>
           </a:p>
@@ -18184,7 +18184,7 @@
                   <a:schemeClr val="tx1"/>
                 </a:solidFill>
               </a:rPr>
-              <a:t>Collaudo completo delle nuove funzioni (crediti emessi, reclami, tariffe)</a:t>
+              <a:t>Collaudo in corso con 5 Amministratori: correzioni dei rapporti V01 e V05 in produzione il 20-21/10; restano le regole metodologiche da confermare</a:t>
             </a:r>
             <a:endParaRPr lang="en-US" sz="1350" dirty="0"/>
           </a:p>

--- a/public/documentazione/Presentazione_Portale_CWP.pptx
+++ b/public/documentazione/Presentazione_Portale_CWP.pptx
@@ -120,39 +120,39 @@
   <p:extLst>
     <p:ext uri="{521415D9-36F7-43E2-AB2F-B90AF26B5E84}">
       <p14:sectionLst xmlns:p14="http://schemas.microsoft.com/office/powerpoint/2010/main">
-        <p14:section name="Apertura" id="{08b5b8a3-577e-4694-29e7-d68217e0397e}">
+        <p14:section name="Apertura" id="{6202eb85-d8c3-ce69-b2e5-3f289672d84f}">
           <p14:sldIdLst>
             <p14:sldId id="256"/>
           </p14:sldIdLst>
         </p14:section>
-        <p14:section name="Metodologia" id="{71dd3b6a-d988-f802-58f8-780ca9a6d8a0}">
+        <p14:section name="Metodologia" id="{bd24c1bc-173b-a2e8-ffde-fb8cae318fa9}">
           <p14:sldIdLst>
             <p14:sldId id="257"/>
           </p14:sldIdLst>
         </p14:section>
-        <p14:section name="Analisi funzionale" id="{de280729-42a7-46eb-1e90-66910664146d}">
+        <p14:section name="Analisi funzionale" id="{df2e04a7-02ec-d846-ef84-9fc4154153e7}">
           <p14:sldIdLst>
             <p14:sldId id="258"/>
             <p14:sldId id="259"/>
           </p14:sldIdLst>
         </p14:section>
-        <p14:section name="Già realtà" id="{8faed5e3-c08c-f923-8f36-2040ea1e071e}">
+        <p14:section name="Già realtà" id="{2ae0751a-399c-447a-89ca-5155b5341819}">
           <p14:sldIdLst>
             <p14:sldId id="260"/>
           </p14:sldIdLst>
         </p14:section>
-        <p14:section name="Architettura e ruoli" id="{1792b304-afff-8fd4-d50c-751f2da792c1}">
+        <p14:section name="Architettura e ruoli" id="{9d864373-5df9-aab3-d0c4-6f5bbd212da5}">
           <p14:sldIdLst>
             <p14:sldId id="261"/>
             <p14:sldId id="262"/>
           </p14:sldIdLst>
         </p14:section>
-        <p14:section name="Novità" id="{70933325-4b36-24bc-0999-c50e391f4f37}">
+        <p14:section name="Novità" id="{2f75082e-3656-a624-a4fa-eed0fb408a26}">
           <p14:sldIdLst>
             <p14:sldId id="263"/>
           </p14:sldIdLst>
         </p14:section>
-        <p14:section name="Punti aperti" id="{b3562030-f347-b82b-6483-8bce1791db54}">
+        <p14:section name="Punti aperti" id="{b417c3ce-90b3-5746-dc07-2b3b12952897}">
           <p14:sldIdLst>
             <p14:sldId id="264"/>
             <p14:sldId id="265"/>
@@ -161,7 +161,7 @@
             <p14:sldId id="268"/>
           </p14:sldIdLst>
         </p14:section>
-        <p14:section name="Scelte da prendere" id="{5c501d7a-bb8c-dc65-eda5-e591f2e31d50}">
+        <p14:section name="Scelte da prendere" id="{7ec79774-36da-2bd9-db7a-2d095fa8c686}">
           <p14:sldIdLst>
             <p14:sldId id="269"/>
           </p14:sldIdLst>
@@ -570,7 +570,7 @@
           <a:p>
             <a:r>
               <a:rPr lang="en-US" dirty="0"/>
-              <a:t>Presentazione di riepilogo del portale, aggiornata al 21 ottobre 2026 (revisione 2.9): metodologia, funzioni realizzate, novità, punti aperti di sviluppo e scelte ancora da prendere. Si rigenera a ogni rilascio insieme agli altri documenti ed è disponibile agli Amministratori nella pagina Documentazione del portale.</a:t>
+              <a:t>Presentazione di riepilogo del portale, aggiornata al 21 ottobre 2026 (revisione 3.0): metodologia, funzioni realizzate, novità, punti aperti di sviluppo e scelte ancora da prendere. Si rigenera a ogni rilascio insieme agli altri documenti ed è disponibile agli Amministratori nella pagina Documentazione del portale.</a:t>
             </a:r>
             <a:endParaRPr lang="en-US" dirty="0"/>
           </a:p>
@@ -1362,7 +1362,7 @@
           <a:p>
             <a:r>
               <a:rPr lang="en-US" dirty="0"/>
-              <a:t>Pagina «effetto sorpresa»: nessuno si aspetta che il portale sia già online. Il sistema è stato realizzato da Luca Moretti con l'ausilio di Claude Code ed è quasi terminato; i servizi sono già in produzione: GitHub (codice), Vercel (pubblicazione del portale), Supabase (database, utenti, documenti, funzioni) e Resend (email). Il portale è pubblicato su portale-cwp.vercel.app e funziona con dati di prova: si può aprire durante la presentazione (collegamento cliccabile) o inquadrare il codice QR con il telefono. La pagina pubblica /programma mostra già gli 8 documenti ufficiali del Programma, la Metodologia approvata, la PEC e il soggetto promotore. Lo sviluppo del portale vero è partito il 17 ottobre 2026: da allora sono state pubblicate 130 versioni, 35 script del database e 6 funzioni sul server. Restano i punti aperti delle prossime slide (servizi a pagamento, sicurezza, dati da inserire, collaudo con un Comune). Suggerimento: aprire il portale dal vivo con un utente di prova e mostrare la pagina pubblica.</a:t>
+              <a:t>Pagina «effetto sorpresa»: nessuno si aspetta che il portale sia già online. Il sistema è stato realizzato da Luca Moretti con l'ausilio di Claude Code ed è quasi terminato; i servizi sono già in produzione: GitHub (codice), Vercel (pubblicazione del portale), Supabase (database, utenti, documenti, funzioni) e Resend (email). Il portale è pubblicato su portale-cwp.vercel.app e funziona con dati di prova: si può aprire durante la presentazione (collegamento cliccabile) o inquadrare il codice QR con il telefono. La pagina pubblica /programma mostra già gli 8 documenti ufficiali del Programma, la Metodologia approvata, la PEC e il soggetto promotore. Lo sviluppo del portale vero è partito il 17 ottobre 2026: da allora sono state pubblicate 133 versioni, 35 script del database e 6 funzioni sul server. Restano i punti aperti delle prossime slide (servizi a pagamento, sicurezza, dati da inserire, collaudo con un Comune). Suggerimento: aprire il portale dal vivo con un utente di prova e mostrare la pagina pubblica.</a:t>
             </a:r>
             <a:endParaRPr lang="en-US" dirty="0"/>
           </a:p>
@@ -2073,7 +2073,7 @@
                   <a:schemeClr val="accent6"/>
                 </a:solidFill>
               </a:rPr>
-              <a:t>Portale Carbon WastePrint · Stato dei lavori e recap · 21 ottobre 2026 · rev. 2.9</a:t>
+              <a:t>Portale Carbon WastePrint · Stato dei lavori e recap · 21 ottobre 2026 · rev. 3.0</a:t>
             </a:r>
             <a:endParaRPr lang="en-US" sz="1000" dirty="0"/>
           </a:p>
@@ -2571,7 +2571,7 @@
                   <a:schemeClr val="accent3"/>
                 </a:solidFill>
               </a:rPr>
-              <a:t>Stato dei lavori e recap: metodologia, funzioni, novità, punti aperti e scelte da prendere · aggiornata al 21 ottobre 2026 · rev. 2.9</a:t>
+              <a:t>Stato dei lavori e recap: metodologia, funzioni, novità, punti aperti e scelte da prendere · aggiornata al 21 ottobre 2026 · rev. 3.0</a:t>
             </a:r>
             <a:endParaRPr lang="en-US" sz="1800" dirty="0"/>
           </a:p>
@@ -13235,7 +13235,7 @@
                 <a:ea typeface="Cambria" pitchFamily="34" charset="-122"/>
                 <a:cs typeface="Cambria" pitchFamily="34" charset="-120"/>
               </a:rPr>
-              <a:t>≈33.700</a:t>
+              <a:t>≈33.900</a:t>
             </a:r>
             <a:endParaRPr lang="en-US" sz="3000" dirty="0"/>
           </a:p>
@@ -14022,7 +14022,7 @@
                 <a:ea typeface="Cambria" pitchFamily="34" charset="-122"/>
                 <a:cs typeface="Cambria" pitchFamily="34" charset="-120"/>
               </a:rPr>
-              <a:t>130</a:t>
+              <a:t>133</a:t>
             </a:r>
             <a:endParaRPr lang="en-US" sz="2400" dirty="0"/>
           </a:p>
@@ -14181,7 +14181,7 @@
                 <a:ea typeface="Cambria" pitchFamily="34" charset="-122"/>
                 <a:cs typeface="Cambria" pitchFamily="34" charset="-120"/>
               </a:rPr>
-              <a:t>≈33.700</a:t>
+              <a:t>≈33.900</a:t>
             </a:r>
             <a:endParaRPr lang="en-US" sz="2400" dirty="0"/>
           </a:p>
@@ -17942,7 +17942,7 @@
                   <a:schemeClr val="tx1"/>
                 </a:solidFill>
               </a:rPr>
-              <a:t>Backup: archivio completo e istruzioni di ripristino fatti (19/10); da attivare copie automatiche di database e file, ambiente di prova, monitoraggio errori</a:t>
+              <a:t>Backup automatico completo su Google Drive alle 13 e alle 21 (pronto dal 21/10, da installare) e istruzioni di ripristino provate; da fare ambiente di prova e monitoraggio errori</a:t>
             </a:r>
             <a:endParaRPr lang="en-US" sz="1350" dirty="0"/>
           </a:p>

--- a/public/documentazione/Presentazione_Portale_CWP.pptx
+++ b/public/documentazione/Presentazione_Portale_CWP.pptx
@@ -120,39 +120,39 @@
   <p:extLst>
     <p:ext uri="{521415D9-36F7-43E2-AB2F-B90AF26B5E84}">
       <p14:sectionLst xmlns:p14="http://schemas.microsoft.com/office/powerpoint/2010/main">
-        <p14:section name="Apertura" id="{6202eb85-d8c3-ce69-b2e5-3f289672d84f}">
+        <p14:section name="Apertura" id="{87b6d574-915f-13af-8c85-ada9343d9c69}">
           <p14:sldIdLst>
             <p14:sldId id="256"/>
           </p14:sldIdLst>
         </p14:section>
-        <p14:section name="Metodologia" id="{bd24c1bc-173b-a2e8-ffde-fb8cae318fa9}">
+        <p14:section name="Metodologia" id="{b6654f39-dfd0-c9b9-1c38-1284a961a780}">
           <p14:sldIdLst>
             <p14:sldId id="257"/>
           </p14:sldIdLst>
         </p14:section>
-        <p14:section name="Analisi funzionale" id="{df2e04a7-02ec-d846-ef84-9fc4154153e7}">
+        <p14:section name="Analisi funzionale" id="{7bcafd94-acca-706a-b07d-6fc9306a2f54}">
           <p14:sldIdLst>
             <p14:sldId id="258"/>
             <p14:sldId id="259"/>
           </p14:sldIdLst>
         </p14:section>
-        <p14:section name="Già realtà" id="{2ae0751a-399c-447a-89ca-5155b5341819}">
+        <p14:section name="Già realtà" id="{e113a312-723a-cad1-ec84-5773ef8422ed}">
           <p14:sldIdLst>
             <p14:sldId id="260"/>
           </p14:sldIdLst>
         </p14:section>
-        <p14:section name="Architettura e ruoli" id="{9d864373-5df9-aab3-d0c4-6f5bbd212da5}">
+        <p14:section name="Architettura e ruoli" id="{c6186103-b632-987d-059b-3576da067abc}">
           <p14:sldIdLst>
             <p14:sldId id="261"/>
             <p14:sldId id="262"/>
           </p14:sldIdLst>
         </p14:section>
-        <p14:section name="Novità" id="{2f75082e-3656-a624-a4fa-eed0fb408a26}">
+        <p14:section name="Novità" id="{b5b2c17f-172b-55bf-23fd-3120716b3d9a}">
           <p14:sldIdLst>
             <p14:sldId id="263"/>
           </p14:sldIdLst>
         </p14:section>
-        <p14:section name="Punti aperti" id="{b417c3ce-90b3-5746-dc07-2b3b12952897}">
+        <p14:section name="Punti aperti" id="{4f087328-aa5e-45b0-64b4-70e70208df47}">
           <p14:sldIdLst>
             <p14:sldId id="264"/>
             <p14:sldId id="265"/>
@@ -161,7 +161,7 @@
             <p14:sldId id="268"/>
           </p14:sldIdLst>
         </p14:section>
-        <p14:section name="Scelte da prendere" id="{7ec79774-36da-2bd9-db7a-2d095fa8c686}">
+        <p14:section name="Scelte da prendere" id="{41e7538e-6cf0-c04f-b128-55ad44c66feb}">
           <p14:sldIdLst>
             <p14:sldId id="269"/>
           </p14:sldIdLst>
@@ -570,7 +570,7 @@
           <a:p>
             <a:r>
               <a:rPr lang="en-US" dirty="0"/>
-              <a:t>Presentazione di riepilogo del portale, aggiornata al 21 ottobre 2026 (revisione 3.0): metodologia, funzioni realizzate, novità, punti aperti di sviluppo e scelte ancora da prendere. Si rigenera a ogni rilascio insieme agli altri documenti ed è disponibile agli Amministratori nella pagina Documentazione del portale.</a:t>
+              <a:t>Presentazione di riepilogo del portale, aggiornata al 21 ottobre 2026 (revisione 3.1): metodologia, funzioni realizzate, novità, punti aperti di sviluppo e scelte ancora da prendere. Si rigenera a ogni rilascio insieme agli altri documenti ed è disponibile agli Amministratori nella pagina Documentazione del portale.</a:t>
             </a:r>
             <a:endParaRPr lang="en-US" dirty="0"/>
           </a:p>
@@ -1362,7 +1362,7 @@
           <a:p>
             <a:r>
               <a:rPr lang="en-US" dirty="0"/>
-              <a:t>Pagina «effetto sorpresa»: nessuno si aspetta che il portale sia già online. Il sistema è stato realizzato da Luca Moretti con l'ausilio di Claude Code ed è quasi terminato; i servizi sono già in produzione: GitHub (codice), Vercel (pubblicazione del portale), Supabase (database, utenti, documenti, funzioni) e Resend (email). Il portale è pubblicato su portale-cwp.vercel.app e funziona con dati di prova: si può aprire durante la presentazione (collegamento cliccabile) o inquadrare il codice QR con il telefono. La pagina pubblica /programma mostra già gli 8 documenti ufficiali del Programma, la Metodologia approvata, la PEC e il soggetto promotore. Lo sviluppo del portale vero è partito il 17 ottobre 2026: da allora sono state pubblicate 133 versioni, 35 script del database e 6 funzioni sul server. Restano i punti aperti delle prossime slide (servizi a pagamento, sicurezza, dati da inserire, collaudo con un Comune). Suggerimento: aprire il portale dal vivo con un utente di prova e mostrare la pagina pubblica.</a:t>
+              <a:t>Pagina «effetto sorpresa»: nessuno si aspetta che il portale sia già online. Il sistema è stato realizzato da Luca Moretti con l'ausilio di Claude Code ed è quasi terminato; i servizi sono già in produzione: GitHub (codice), Vercel (pubblicazione del portale), Supabase (database, utenti, documenti, funzioni) e Resend (email). Il portale è pubblicato su portale-cwp.vercel.app e funziona con dati di prova: si può aprire durante la presentazione (collegamento cliccabile) o inquadrare il codice QR con il telefono. La pagina pubblica /programma mostra già gli 8 documenti ufficiali del Programma, la Metodologia approvata, la PEC e il soggetto promotore. Lo sviluppo del portale vero è partito il 17 ottobre 2026: da allora sono state pubblicate 135 versioni, 35 script del database e 6 funzioni sul server. Restano i punti aperti delle prossime slide (servizi a pagamento, sicurezza, dati da inserire, collaudo con un Comune). Suggerimento: aprire il portale dal vivo con un utente di prova e mostrare la pagina pubblica.</a:t>
             </a:r>
             <a:endParaRPr lang="en-US" dirty="0"/>
           </a:p>
@@ -2073,7 +2073,7 @@
                   <a:schemeClr val="accent6"/>
                 </a:solidFill>
               </a:rPr>
-              <a:t>Portale Carbon WastePrint · Stato dei lavori e recap · 21 ottobre 2026 · rev. 3.0</a:t>
+              <a:t>Portale Carbon WastePrint · Stato dei lavori e recap · 21 ottobre 2026 · rev. 3.1</a:t>
             </a:r>
             <a:endParaRPr lang="en-US" sz="1000" dirty="0"/>
           </a:p>
@@ -2571,7 +2571,7 @@
                   <a:schemeClr val="accent3"/>
                 </a:solidFill>
               </a:rPr>
-              <a:t>Stato dei lavori e recap: metodologia, funzioni, novità, punti aperti e scelte da prendere · aggiornata al 21 ottobre 2026 · rev. 3.0</a:t>
+              <a:t>Stato dei lavori e recap: metodologia, funzioni, novità, punti aperti e scelte da prendere · aggiornata al 21 ottobre 2026 · rev. 3.1</a:t>
             </a:r>
             <a:endParaRPr lang="en-US" sz="1800" dirty="0"/>
           </a:p>
@@ -13235,7 +13235,7 @@
                 <a:ea typeface="Cambria" pitchFamily="34" charset="-122"/>
                 <a:cs typeface="Cambria" pitchFamily="34" charset="-120"/>
               </a:rPr>
-              <a:t>≈33.900</a:t>
+              <a:t>≈34.700</a:t>
             </a:r>
             <a:endParaRPr lang="en-US" sz="3000" dirty="0"/>
           </a:p>
@@ -14022,7 +14022,7 @@
                 <a:ea typeface="Cambria" pitchFamily="34" charset="-122"/>
                 <a:cs typeface="Cambria" pitchFamily="34" charset="-120"/>
               </a:rPr>
-              <a:t>133</a:t>
+              <a:t>135</a:t>
             </a:r>
             <a:endParaRPr lang="en-US" sz="2400" dirty="0"/>
           </a:p>
@@ -14181,7 +14181,7 @@
                 <a:ea typeface="Cambria" pitchFamily="34" charset="-122"/>
                 <a:cs typeface="Cambria" pitchFamily="34" charset="-120"/>
               </a:rPr>
-              <a:t>≈33.900</a:t>
+              <a:t>≈34.700</a:t>
             </a:r>
             <a:endParaRPr lang="en-US" sz="2400" dirty="0"/>
           </a:p>
@@ -17557,7 +17557,7 @@
                   <a:schemeClr val="tx1"/>
                 </a:solidFill>
               </a:rPr>
-              <a:t>metodo «per utenza, solo utenze virtuose» come nell'Allegato A EsaCom; dal 20/10 PDF impaginato ed export Excel</a:t>
+              <a:t>metodo «per utenza, solo utenze virtuose» come nell'Allegato A EsaCom; dal 20/10 PDF impaginato ed export Excel; dal 21/10 il PDF riporta tutti i dati inseriti, i costi e quattro grafici</a:t>
             </a:r>
             <a:endParaRPr lang="en-US" sz="1350" dirty="0"/>
           </a:p>

--- a/public/documentazione/Presentazione_Portale_CWP.pptx
+++ b/public/documentazione/Presentazione_Portale_CWP.pptx
@@ -120,39 +120,39 @@
   <p:extLst>
     <p:ext uri="{521415D9-36F7-43E2-AB2F-B90AF26B5E84}">
       <p14:sectionLst xmlns:p14="http://schemas.microsoft.com/office/powerpoint/2010/main">
-        <p14:section name="Apertura" id="{87b6d574-915f-13af-8c85-ada9343d9c69}">
+        <p14:section name="Apertura" id="{6389c992-6cc9-d34d-778f-5e4370e25f31}">
           <p14:sldIdLst>
             <p14:sldId id="256"/>
           </p14:sldIdLst>
         </p14:section>
-        <p14:section name="Metodologia" id="{b6654f39-dfd0-c9b9-1c38-1284a961a780}">
+        <p14:section name="Metodologia" id="{8a64079c-436d-e523-2cd8-61fc500afe86}">
           <p14:sldIdLst>
             <p14:sldId id="257"/>
           </p14:sldIdLst>
         </p14:section>
-        <p14:section name="Analisi funzionale" id="{7bcafd94-acca-706a-b07d-6fc9306a2f54}">
+        <p14:section name="Analisi funzionale" id="{b7510797-6001-2773-eacb-9dd907ae4ea0}">
           <p14:sldIdLst>
             <p14:sldId id="258"/>
             <p14:sldId id="259"/>
           </p14:sldIdLst>
         </p14:section>
-        <p14:section name="Già realtà" id="{e113a312-723a-cad1-ec84-5773ef8422ed}">
+        <p14:section name="Già realtà" id="{3fff82dd-3c4d-7505-8c51-554cde44d35c}">
           <p14:sldIdLst>
             <p14:sldId id="260"/>
           </p14:sldIdLst>
         </p14:section>
-        <p14:section name="Architettura e ruoli" id="{c6186103-b632-987d-059b-3576da067abc}">
+        <p14:section name="Architettura e ruoli" id="{aa2fdb58-8960-7782-e6c1-10d0b6c334cb}">
           <p14:sldIdLst>
             <p14:sldId id="261"/>
             <p14:sldId id="262"/>
           </p14:sldIdLst>
         </p14:section>
-        <p14:section name="Novità" id="{b5b2c17f-172b-55bf-23fd-3120716b3d9a}">
+        <p14:section name="Novità" id="{2986b862-75d4-5f19-81e9-06b3814b90de}">
           <p14:sldIdLst>
             <p14:sldId id="263"/>
           </p14:sldIdLst>
         </p14:section>
-        <p14:section name="Punti aperti" id="{4f087328-aa5e-45b0-64b4-70e70208df47}">
+        <p14:section name="Punti aperti" id="{15fb2deb-a5ca-2361-14cb-46fd8a320fd5}">
           <p14:sldIdLst>
             <p14:sldId id="264"/>
             <p14:sldId id="265"/>
@@ -161,7 +161,7 @@
             <p14:sldId id="268"/>
           </p14:sldIdLst>
         </p14:section>
-        <p14:section name="Scelte da prendere" id="{41e7538e-6cf0-c04f-b128-55ad44c66feb}">
+        <p14:section name="Scelte da prendere" id="{4a283d3e-d59a-fc2f-5b51-e8cdbc984ba3}">
           <p14:sldIdLst>
             <p14:sldId id="269"/>
           </p14:sldIdLst>
@@ -570,7 +570,7 @@
           <a:p>
             <a:r>
               <a:rPr lang="en-US" dirty="0"/>
-              <a:t>Presentazione di riepilogo del portale, aggiornata al 21 ottobre 2026 (revisione 3.1): metodologia, funzioni realizzate, novità, punti aperti di sviluppo e scelte ancora da prendere. Si rigenera a ogni rilascio insieme agli altri documenti ed è disponibile agli Amministratori nella pagina Documentazione del portale.</a:t>
+              <a:t>Presentazione di riepilogo del portale, aggiornata al 21 ottobre 2026 (revisione 3.2): metodologia, funzioni realizzate, novità, punti aperti di sviluppo e scelte ancora da prendere. Si rigenera a ogni rilascio insieme agli altri documenti ed è disponibile agli Amministratori nella pagina Documentazione del portale.</a:t>
             </a:r>
             <a:endParaRPr lang="en-US" dirty="0"/>
           </a:p>
@@ -1362,7 +1362,7 @@
           <a:p>
             <a:r>
               <a:rPr lang="en-US" dirty="0"/>
-              <a:t>Pagina «effetto sorpresa»: nessuno si aspetta che il portale sia già online. Il sistema è stato realizzato da Luca Moretti con l'ausilio di Claude Code ed è quasi terminato; i servizi sono già in produzione: GitHub (codice), Vercel (pubblicazione del portale), Supabase (database, utenti, documenti, funzioni) e Resend (email). Il portale è pubblicato su portale-cwp.vercel.app e funziona con dati di prova: si può aprire durante la presentazione (collegamento cliccabile) o inquadrare il codice QR con il telefono. La pagina pubblica /programma mostra già gli 8 documenti ufficiali del Programma, la Metodologia approvata, la PEC e il soggetto promotore. Lo sviluppo del portale vero è partito il 17 ottobre 2026: da allora sono state pubblicate 135 versioni, 35 script del database e 6 funzioni sul server. Restano i punti aperti delle prossime slide (servizi a pagamento, sicurezza, dati da inserire, collaudo con un Comune). Suggerimento: aprire il portale dal vivo con un utente di prova e mostrare la pagina pubblica.</a:t>
+              <a:t>Pagina «effetto sorpresa»: nessuno si aspetta che il portale sia già online. Il sistema è stato realizzato da Luca Moretti con l'ausilio di Claude Code ed è quasi terminato; i servizi sono già in produzione: GitHub (codice), Vercel (pubblicazione del portale), Supabase (database, utenti, documenti, funzioni) e Resend (email). Il portale è pubblicato su portale-cwp.vercel.app e funziona con dati di prova: si può aprire durante la presentazione (collegamento cliccabile) o inquadrare il codice QR con il telefono. La pagina pubblica /programma mostra già gli 8 documenti ufficiali del Programma, la Metodologia approvata, la PEC e il soggetto promotore. Lo sviluppo del portale vero è partito il 17 ottobre 2026: da allora sono state pubblicate 138 versioni, 36 script del database e 7 funzioni sul server. Restano i punti aperti delle prossime slide (servizi a pagamento, sicurezza, dati da inserire, collaudo con un Comune). Suggerimento: aprire il portale dal vivo con un utente di prova e mostrare la pagina pubblica.</a:t>
             </a:r>
             <a:endParaRPr lang="en-US" dirty="0"/>
           </a:p>
@@ -2073,7 +2073,7 @@
                   <a:schemeClr val="accent6"/>
                 </a:solidFill>
               </a:rPr>
-              <a:t>Portale Carbon WastePrint · Stato dei lavori e recap · 21 ottobre 2026 · rev. 3.1</a:t>
+              <a:t>Portale Carbon WastePrint · Stato dei lavori e recap · 21 ottobre 2026 · rev. 3.2</a:t>
             </a:r>
             <a:endParaRPr lang="en-US" sz="1000" dirty="0"/>
           </a:p>
@@ -2571,7 +2571,7 @@
                   <a:schemeClr val="accent3"/>
                 </a:solidFill>
               </a:rPr>
-              <a:t>Stato dei lavori e recap: metodologia, funzioni, novità, punti aperti e scelte da prendere · aggiornata al 21 ottobre 2026 · rev. 3.1</a:t>
+              <a:t>Stato dei lavori e recap: metodologia, funzioni, novità, punti aperti e scelte da prendere · aggiornata al 21 ottobre 2026 · rev. 3.2</a:t>
             </a:r>
             <a:endParaRPr lang="en-US" sz="1800" dirty="0"/>
           </a:p>
@@ -12929,7 +12929,7 @@
                 <a:ea typeface="Cambria" pitchFamily="34" charset="-122"/>
                 <a:cs typeface="Cambria" pitchFamily="34" charset="-120"/>
               </a:rPr>
-              <a:t>35</a:t>
+              <a:t>36</a:t>
             </a:r>
             <a:endParaRPr lang="en-US" sz="3000" dirty="0"/>
           </a:p>
@@ -13031,7 +13031,7 @@
                 <a:ea typeface="Cambria" pitchFamily="34" charset="-122"/>
                 <a:cs typeface="Cambria" pitchFamily="34" charset="-120"/>
               </a:rPr>
-              <a:t>6</a:t>
+              <a:t>7</a:t>
             </a:r>
             <a:endParaRPr lang="en-US" sz="3000" dirty="0"/>
           </a:p>
@@ -13235,7 +13235,7 @@
                 <a:ea typeface="Cambria" pitchFamily="34" charset="-122"/>
                 <a:cs typeface="Cambria" pitchFamily="34" charset="-120"/>
               </a:rPr>
-              <a:t>≈34.700</a:t>
+              <a:t>≈36.000</a:t>
             </a:r>
             <a:endParaRPr lang="en-US" sz="3000" dirty="0"/>
           </a:p>
@@ -14022,7 +14022,7 @@
                 <a:ea typeface="Cambria" pitchFamily="34" charset="-122"/>
                 <a:cs typeface="Cambria" pitchFamily="34" charset="-120"/>
               </a:rPr>
-              <a:t>135</a:t>
+              <a:t>138</a:t>
             </a:r>
             <a:endParaRPr lang="en-US" sz="2400" dirty="0"/>
           </a:p>
@@ -14075,7 +14075,7 @@
                 <a:ea typeface="Cambria" pitchFamily="34" charset="-122"/>
                 <a:cs typeface="Cambria" pitchFamily="34" charset="-120"/>
               </a:rPr>
-              <a:t>35</a:t>
+              <a:t>36</a:t>
             </a:r>
             <a:endParaRPr lang="en-US" sz="2400" dirty="0"/>
           </a:p>
@@ -14128,7 +14128,7 @@
                 <a:ea typeface="Cambria" pitchFamily="34" charset="-122"/>
                 <a:cs typeface="Cambria" pitchFamily="34" charset="-120"/>
               </a:rPr>
-              <a:t>6</a:t>
+              <a:t>7</a:t>
             </a:r>
             <a:endParaRPr lang="en-US" sz="2400" dirty="0"/>
           </a:p>
@@ -14181,7 +14181,7 @@
                 <a:ea typeface="Cambria" pitchFamily="34" charset="-122"/>
                 <a:cs typeface="Cambria" pitchFamily="34" charset="-120"/>
               </a:rPr>
-              <a:t>≈34.700</a:t>
+              <a:t>≈36.000</a:t>
             </a:r>
             <a:endParaRPr lang="en-US" sz="2400" dirty="0"/>
           </a:p>
@@ -17007,7 +17007,7 @@
                 <a:ea typeface="Cambria" pitchFamily="34" charset="-122"/>
                 <a:cs typeface="Cambria" pitchFamily="34" charset="-120"/>
               </a:rPr>
-              <a:t>Novità del 19 e 20 ottobre</a:t>
+              <a:t>Novità dal 19 al 21 ottobre</a:t>
             </a:r>
             <a:endParaRPr lang="en-US" sz="3000" dirty="0"/>
           </a:p>
@@ -17591,7 +17591,7 @@
                   <a:schemeClr val="tx1"/>
                 </a:solidFill>
               </a:rPr>
-              <a:t>menu riordinati per ruolo, «Marketplaces» in arrivo; 8 documenti ufficiali v1.2 e questa presentazione per gli Amministratori</a:t>
+              <a:t>menu per ruolo; dal 21/10 «News», osservatorio sui crediti volontari aggiornato ogni 2 ore (Admin); «Marketplaces» in arrivo; 8 documenti ufficiali v1.2</a:t>
             </a:r>
             <a:endParaRPr lang="en-US" sz="1350" dirty="0"/>
           </a:p>

--- a/public/documentazione/Presentazione_Portale_CWP.pptx
+++ b/public/documentazione/Presentazione_Portale_CWP.pptx
@@ -120,39 +120,39 @@
   <p:extLst>
     <p:ext uri="{521415D9-36F7-43E2-AB2F-B90AF26B5E84}">
       <p14:sectionLst xmlns:p14="http://schemas.microsoft.com/office/powerpoint/2010/main">
-        <p14:section name="Apertura" id="{6389c992-6cc9-d34d-778f-5e4370e25f31}">
+        <p14:section name="Apertura" id="{8c186372-ac22-ff2b-dc4b-cf9d21190fd0}">
           <p14:sldIdLst>
             <p14:sldId id="256"/>
           </p14:sldIdLst>
         </p14:section>
-        <p14:section name="Metodologia" id="{8a64079c-436d-e523-2cd8-61fc500afe86}">
+        <p14:section name="Metodologia" id="{d2bb5d5b-f899-a864-a9d8-fcd1840de7d7}">
           <p14:sldIdLst>
             <p14:sldId id="257"/>
           </p14:sldIdLst>
         </p14:section>
-        <p14:section name="Analisi funzionale" id="{b7510797-6001-2773-eacb-9dd907ae4ea0}">
+        <p14:section name="Analisi funzionale" id="{6ec54255-d0b1-b40a-c6ff-e22088acb207}">
           <p14:sldIdLst>
             <p14:sldId id="258"/>
             <p14:sldId id="259"/>
           </p14:sldIdLst>
         </p14:section>
-        <p14:section name="Già realtà" id="{3fff82dd-3c4d-7505-8c51-554cde44d35c}">
+        <p14:section name="Già realtà" id="{2bdcd5a0-e4fc-5729-6e0e-78cb0ea5019e}">
           <p14:sldIdLst>
             <p14:sldId id="260"/>
           </p14:sldIdLst>
         </p14:section>
-        <p14:section name="Architettura e ruoli" id="{aa2fdb58-8960-7782-e6c1-10d0b6c334cb}">
+        <p14:section name="Architettura e ruoli" id="{6b1b5d48-6b27-830e-d810-a1a78aed5b70}">
           <p14:sldIdLst>
             <p14:sldId id="261"/>
             <p14:sldId id="262"/>
           </p14:sldIdLst>
         </p14:section>
-        <p14:section name="Novità" id="{2986b862-75d4-5f19-81e9-06b3814b90de}">
+        <p14:section name="Novità" id="{8d31823d-6079-a709-c411-eb9e91400385}">
           <p14:sldIdLst>
             <p14:sldId id="263"/>
           </p14:sldIdLst>
         </p14:section>
-        <p14:section name="Punti aperti" id="{15fb2deb-a5ca-2361-14cb-46fd8a320fd5}">
+        <p14:section name="Punti aperti" id="{97f1e8dd-1e32-6472-6057-4ff4becdfd6c}">
           <p14:sldIdLst>
             <p14:sldId id="264"/>
             <p14:sldId id="265"/>
@@ -161,7 +161,7 @@
             <p14:sldId id="268"/>
           </p14:sldIdLst>
         </p14:section>
-        <p14:section name="Scelte da prendere" id="{4a283d3e-d59a-fc2f-5b51-e8cdbc984ba3}">
+        <p14:section name="Scelte da prendere" id="{bfdb0f5f-3e0c-4cea-d213-b74ee28bf8a1}">
           <p14:sldIdLst>
             <p14:sldId id="269"/>
           </p14:sldIdLst>
@@ -570,7 +570,7 @@
           <a:p>
             <a:r>
               <a:rPr lang="en-US" dirty="0"/>
-              <a:t>Presentazione di riepilogo del portale, aggiornata al 21 ottobre 2026 (revisione 3.2): metodologia, funzioni realizzate, novità, punti aperti di sviluppo e scelte ancora da prendere. Si rigenera a ogni rilascio insieme agli altri documenti ed è disponibile agli Amministratori nella pagina Documentazione del portale.</a:t>
+              <a:t>Presentazione di riepilogo del portale, aggiornata al 21 ottobre 2026 (revisione 3.3): metodologia, funzioni realizzate, novità, punti aperti di sviluppo e scelte ancora da prendere. Si rigenera a ogni rilascio insieme agli altri documenti ed è disponibile agli Amministratori nella pagina Documentazione del portale.</a:t>
             </a:r>
             <a:endParaRPr lang="en-US" dirty="0"/>
           </a:p>
@@ -1362,7 +1362,7 @@
           <a:p>
             <a:r>
               <a:rPr lang="en-US" dirty="0"/>
-              <a:t>Pagina «effetto sorpresa»: nessuno si aspetta che il portale sia già online. Il sistema è stato realizzato da Luca Moretti con l'ausilio di Claude Code ed è quasi terminato; i servizi sono già in produzione: GitHub (codice), Vercel (pubblicazione del portale), Supabase (database, utenti, documenti, funzioni) e Resend (email). Il portale è pubblicato su portale-cwp.vercel.app e funziona con dati di prova: si può aprire durante la presentazione (collegamento cliccabile) o inquadrare il codice QR con il telefono. La pagina pubblica /programma mostra già gli 8 documenti ufficiali del Programma, la Metodologia approvata, la PEC e il soggetto promotore. Lo sviluppo del portale vero è partito il 17 ottobre 2026: da allora sono state pubblicate 138 versioni, 36 script del database e 7 funzioni sul server. Restano i punti aperti delle prossime slide (servizi a pagamento, sicurezza, dati da inserire, collaudo con un Comune). Suggerimento: aprire il portale dal vivo con un utente di prova e mostrare la pagina pubblica.</a:t>
+              <a:t>Pagina «effetto sorpresa»: nessuno si aspetta che il portale sia già online. Il sistema è stato realizzato da Luca Moretti con l'ausilio di Claude Code ed è quasi terminato; i servizi sono già in produzione: GitHub (codice), Vercel (pubblicazione del portale), Supabase (database, utenti, documenti, funzioni) e Resend (email). Il portale è pubblicato su portale-cwp.vercel.app e funziona con dati di prova: si può aprire durante la presentazione (collegamento cliccabile) o inquadrare il codice QR con il telefono. La pagina pubblica /programma mostra già gli 8 documenti ufficiali del Programma, la Metodologia approvata, la PEC e il soggetto promotore. Lo sviluppo del portale vero è partito il 17 ottobre 2026: da allora sono state pubblicate 143 versioni, 36 script del database e 7 funzioni sul server. Restano i punti aperti delle prossime slide (servizi a pagamento, sicurezza, dati da inserire, collaudo con un Comune). Suggerimento: aprire il portale dal vivo con un utente di prova e mostrare la pagina pubblica.</a:t>
             </a:r>
             <a:endParaRPr lang="en-US" dirty="0"/>
           </a:p>
@@ -2073,7 +2073,7 @@
                   <a:schemeClr val="accent6"/>
                 </a:solidFill>
               </a:rPr>
-              <a:t>Portale Carbon WastePrint · Stato dei lavori e recap · 21 ottobre 2026 · rev. 3.2</a:t>
+              <a:t>Portale Carbon WastePrint · Stato dei lavori e recap · 21 ottobre 2026 · rev. 3.3</a:t>
             </a:r>
             <a:endParaRPr lang="en-US" sz="1000" dirty="0"/>
           </a:p>
@@ -2571,7 +2571,7 @@
                   <a:schemeClr val="accent3"/>
                 </a:solidFill>
               </a:rPr>
-              <a:t>Stato dei lavori e recap: metodologia, funzioni, novità, punti aperti e scelte da prendere · aggiornata al 21 ottobre 2026 · rev. 3.2</a:t>
+              <a:t>Stato dei lavori e recap: metodologia, funzioni, novità, punti aperti e scelte da prendere · aggiornata al 21 ottobre 2026 · rev. 3.3</a:t>
             </a:r>
             <a:endParaRPr lang="en-US" sz="1800" dirty="0"/>
           </a:p>
@@ -13235,7 +13235,7 @@
                 <a:ea typeface="Cambria" pitchFamily="34" charset="-122"/>
                 <a:cs typeface="Cambria" pitchFamily="34" charset="-120"/>
               </a:rPr>
-              <a:t>≈36.000</a:t>
+              <a:t>≈36.300</a:t>
             </a:r>
             <a:endParaRPr lang="en-US" sz="3000" dirty="0"/>
           </a:p>
@@ -14022,7 +14022,7 @@
                 <a:ea typeface="Cambria" pitchFamily="34" charset="-122"/>
                 <a:cs typeface="Cambria" pitchFamily="34" charset="-120"/>
               </a:rPr>
-              <a:t>138</a:t>
+              <a:t>143</a:t>
             </a:r>
             <a:endParaRPr lang="en-US" sz="2400" dirty="0"/>
           </a:p>
@@ -14181,7 +14181,7 @@
                 <a:ea typeface="Cambria" pitchFamily="34" charset="-122"/>
                 <a:cs typeface="Cambria" pitchFamily="34" charset="-120"/>
               </a:rPr>
-              <a:t>≈36.000</a:t>
+              <a:t>≈36.300</a:t>
             </a:r>
             <a:endParaRPr lang="en-US" sz="2400" dirty="0"/>
           </a:p>
@@ -17591,7 +17591,7 @@
                   <a:schemeClr val="tx1"/>
                 </a:solidFill>
               </a:rPr>
-              <a:t>menu per ruolo; dal 21/10 «News», osservatorio sui crediti volontari aggiornato ogni 2 ore (Admin); «Marketplaces» in arrivo; 8 documenti ufficiali v1.2</a:t>
+              <a:t>menu per ruolo; dal 21/10 «Notizie CO2», osservatorio sui crediti volontari aggiornato ogni 2 ore (Admin); «Marketplaces» in arrivo; 8 documenti ufficiali v1.2</a:t>
             </a:r>
             <a:endParaRPr lang="en-US" sz="1350" dirty="0"/>
           </a:p>

--- a/public/documentazione/Presentazione_Portale_CWP.pptx
+++ b/public/documentazione/Presentazione_Portale_CWP.pptx
@@ -120,39 +120,39 @@
   <p:extLst>
     <p:ext uri="{521415D9-36F7-43E2-AB2F-B90AF26B5E84}">
       <p14:sectionLst xmlns:p14="http://schemas.microsoft.com/office/powerpoint/2010/main">
-        <p14:section name="Apertura" id="{8c186372-ac22-ff2b-dc4b-cf9d21190fd0}">
+        <p14:section name="Apertura" id="{4a212da7-d221-630e-7220-f1fee0c7da03}">
           <p14:sldIdLst>
             <p14:sldId id="256"/>
           </p14:sldIdLst>
         </p14:section>
-        <p14:section name="Metodologia" id="{d2bb5d5b-f899-a864-a9d8-fcd1840de7d7}">
+        <p14:section name="Metodologia" id="{5b9d2488-e8d7-70c1-76f6-951a56f1ba52}">
           <p14:sldIdLst>
             <p14:sldId id="257"/>
           </p14:sldIdLst>
         </p14:section>
-        <p14:section name="Analisi funzionale" id="{6ec54255-d0b1-b40a-c6ff-e22088acb207}">
+        <p14:section name="Analisi funzionale" id="{25a870c3-928c-a5f1-7e40-83c1518f59e7}">
           <p14:sldIdLst>
             <p14:sldId id="258"/>
             <p14:sldId id="259"/>
           </p14:sldIdLst>
         </p14:section>
-        <p14:section name="Già realtà" id="{2bdcd5a0-e4fc-5729-6e0e-78cb0ea5019e}">
+        <p14:section name="Già realtà" id="{62511de9-31fd-9504-1c98-06bdaff5e8ff}">
           <p14:sldIdLst>
             <p14:sldId id="260"/>
           </p14:sldIdLst>
         </p14:section>
-        <p14:section name="Architettura e ruoli" id="{6b1b5d48-6b27-830e-d810-a1a78aed5b70}">
+        <p14:section name="Architettura e ruoli" id="{9412beb7-1b98-adb4-f50c-776da49f49d4}">
           <p14:sldIdLst>
             <p14:sldId id="261"/>
             <p14:sldId id="262"/>
           </p14:sldIdLst>
         </p14:section>
-        <p14:section name="Novità" id="{8d31823d-6079-a709-c411-eb9e91400385}">
+        <p14:section name="Novità" id="{c9a5a7f7-8fe8-9150-65e8-659fa4f040da}">
           <p14:sldIdLst>
             <p14:sldId id="263"/>
           </p14:sldIdLst>
         </p14:section>
-        <p14:section name="Punti aperti" id="{97f1e8dd-1e32-6472-6057-4ff4becdfd6c}">
+        <p14:section name="Punti aperti" id="{b71b4f52-6662-e2e7-0efd-648c6cd7445d}">
           <p14:sldIdLst>
             <p14:sldId id="264"/>
             <p14:sldId id="265"/>
@@ -161,7 +161,7 @@
             <p14:sldId id="268"/>
           </p14:sldIdLst>
         </p14:section>
-        <p14:section name="Scelte da prendere" id="{bfdb0f5f-3e0c-4cea-d213-b74ee28bf8a1}">
+        <p14:section name="Scelte da prendere" id="{54164ed9-bca7-fa62-3b73-f5d0259fa0a4}">
           <p14:sldIdLst>
             <p14:sldId id="269"/>
           </p14:sldIdLst>
@@ -570,7 +570,7 @@
           <a:p>
             <a:r>
               <a:rPr lang="en-US" dirty="0"/>
-              <a:t>Presentazione di riepilogo del portale, aggiornata al 21 ottobre 2026 (revisione 3.3): metodologia, funzioni realizzate, novità, punti aperti di sviluppo e scelte ancora da prendere. Si rigenera a ogni rilascio insieme agli altri documenti ed è disponibile agli Amministratori nella pagina Documentazione del portale.</a:t>
+              <a:t>Presentazione di riepilogo del portale, aggiornata al 21 ottobre 2026 (revisione 3.4): metodologia, funzioni realizzate, novità, punti aperti di sviluppo e scelte ancora da prendere. Si rigenera a ogni rilascio insieme agli altri documenti ed è disponibile agli Amministratori nella pagina Documentazione del portale.</a:t>
             </a:r>
             <a:endParaRPr lang="en-US" dirty="0"/>
           </a:p>
@@ -1362,7 +1362,7 @@
           <a:p>
             <a:r>
               <a:rPr lang="en-US" dirty="0"/>
-              <a:t>Pagina «effetto sorpresa»: nessuno si aspetta che il portale sia già online. Il sistema è stato realizzato da Luca Moretti con l'ausilio di Claude Code ed è quasi terminato; i servizi sono già in produzione: GitHub (codice), Vercel (pubblicazione del portale), Supabase (database, utenti, documenti, funzioni) e Resend (email). Il portale è pubblicato su portale-cwp.vercel.app e funziona con dati di prova: si può aprire durante la presentazione (collegamento cliccabile) o inquadrare il codice QR con il telefono. La pagina pubblica /programma mostra già gli 8 documenti ufficiali del Programma, la Metodologia approvata, la PEC e il soggetto promotore. Lo sviluppo del portale vero è partito il 17 ottobre 2026: da allora sono state pubblicate 143 versioni, 36 script del database e 7 funzioni sul server. Restano i punti aperti delle prossime slide (servizi a pagamento, sicurezza, dati da inserire, collaudo con un Comune). Suggerimento: aprire il portale dal vivo con un utente di prova e mostrare la pagina pubblica.</a:t>
+              <a:t>Pagina «effetto sorpresa»: nessuno si aspetta che il portale sia già online. Il sistema è stato realizzato da Luca Moretti con l'ausilio di Claude Code ed è quasi terminato; i servizi sono già in produzione: GitHub (codice), Vercel (pubblicazione del portale), Supabase (database, utenti, documenti, funzioni) e Resend (email). Il portale è pubblicato su portale-cwp.vercel.app e funziona con dati di prova: si può aprire durante la presentazione (collegamento cliccabile) o inquadrare il codice QR con il telefono. La pagina pubblica /programma mostra già gli 8 documenti ufficiali del Programma, la Metodologia approvata, la PEC e il soggetto promotore. Lo sviluppo del portale vero è partito il 17 ottobre 2026: da allora sono state pubblicate 154 versioni, 38 script del database e 7 funzioni sul server. Restano i punti aperti delle prossime slide (servizi a pagamento, sicurezza, dati da inserire, collaudo con un Comune). Suggerimento: aprire il portale dal vivo con un utente di prova e mostrare la pagina pubblica.</a:t>
             </a:r>
             <a:endParaRPr lang="en-US" dirty="0"/>
           </a:p>
@@ -2073,7 +2073,7 @@
                   <a:schemeClr val="accent6"/>
                 </a:solidFill>
               </a:rPr>
-              <a:t>Portale Carbon WastePrint · Stato dei lavori e recap · 21 ottobre 2026 · rev. 3.3</a:t>
+              <a:t>Portale Carbon WastePrint · Stato dei lavori e recap · 21 ottobre 2026 · rev. 3.4</a:t>
             </a:r>
             <a:endParaRPr lang="en-US" sz="1000" dirty="0"/>
           </a:p>
@@ -2571,7 +2571,7 @@
                   <a:schemeClr val="accent3"/>
                 </a:solidFill>
               </a:rPr>
-              <a:t>Stato dei lavori e recap: metodologia, funzioni, novità, punti aperti e scelte da prendere · aggiornata al 21 ottobre 2026 · rev. 3.3</a:t>
+              <a:t>Stato dei lavori e recap: metodologia, funzioni, novità, punti aperti e scelte da prendere · aggiornata al 21 ottobre 2026 · rev. 3.4</a:t>
             </a:r>
             <a:endParaRPr lang="en-US" sz="1800" dirty="0"/>
           </a:p>
@@ -12929,7 +12929,7 @@
                 <a:ea typeface="Cambria" pitchFamily="34" charset="-122"/>
                 <a:cs typeface="Cambria" pitchFamily="34" charset="-120"/>
               </a:rPr>
-              <a:t>36</a:t>
+              <a:t>38</a:t>
             </a:r>
             <a:endParaRPr lang="en-US" sz="3000" dirty="0"/>
           </a:p>
@@ -13235,7 +13235,7 @@
                 <a:ea typeface="Cambria" pitchFamily="34" charset="-122"/>
                 <a:cs typeface="Cambria" pitchFamily="34" charset="-120"/>
               </a:rPr>
-              <a:t>≈36.300</a:t>
+              <a:t>≈36.500</a:t>
             </a:r>
             <a:endParaRPr lang="en-US" sz="3000" dirty="0"/>
           </a:p>
@@ -14022,7 +14022,7 @@
                 <a:ea typeface="Cambria" pitchFamily="34" charset="-122"/>
                 <a:cs typeface="Cambria" pitchFamily="34" charset="-120"/>
               </a:rPr>
-              <a:t>143</a:t>
+              <a:t>154</a:t>
             </a:r>
             <a:endParaRPr lang="en-US" sz="2400" dirty="0"/>
           </a:p>
@@ -14075,7 +14075,7 @@
                 <a:ea typeface="Cambria" pitchFamily="34" charset="-122"/>
                 <a:cs typeface="Cambria" pitchFamily="34" charset="-120"/>
               </a:rPr>
-              <a:t>36</a:t>
+              <a:t>38</a:t>
             </a:r>
             <a:endParaRPr lang="en-US" sz="2400" dirty="0"/>
           </a:p>
@@ -14181,7 +14181,7 @@
                 <a:ea typeface="Cambria" pitchFamily="34" charset="-122"/>
                 <a:cs typeface="Cambria" pitchFamily="34" charset="-120"/>
               </a:rPr>
-              <a:t>≈36.300</a:t>
+              <a:t>≈36.500</a:t>
             </a:r>
             <a:endParaRPr lang="en-US" sz="2400" dirty="0"/>
           </a:p>
@@ -17942,7 +17942,7 @@
                   <a:schemeClr val="tx1"/>
                 </a:solidFill>
               </a:rPr>
-              <a:t>Backup automatico completo su Google Drive alle 13 e alle 21 (pronto dal 21/10, da installare) e istruzioni di ripristino provate; da fare ambiente di prova e monitoraggio errori</a:t>
+              <a:t>Backup automatico completo ogni giorno alle 20 dal Mac nella cartella Drive Cwp › backup (Google blocca Apps Script) e istruzioni di ripristino provate; da fare ambiente di prova e monitoraggio errori</a:t>
             </a:r>
             <a:endParaRPr lang="en-US" sz="1350" dirty="0"/>
           </a:p>

--- a/public/documentazione/Presentazione_Portale_CWP.pptx
+++ b/public/documentazione/Presentazione_Portale_CWP.pptx
@@ -120,39 +120,39 @@
   <p:extLst>
     <p:ext uri="{521415D9-36F7-43E2-AB2F-B90AF26B5E84}">
       <p14:sectionLst xmlns:p14="http://schemas.microsoft.com/office/powerpoint/2010/main">
-        <p14:section name="Apertura" id="{4a212da7-d221-630e-7220-f1fee0c7da03}">
+        <p14:section name="Apertura" id="{47daa843-f69f-22aa-f7f7-0848da1ad14d}">
           <p14:sldIdLst>
             <p14:sldId id="256"/>
           </p14:sldIdLst>
         </p14:section>
-        <p14:section name="Metodologia" id="{5b9d2488-e8d7-70c1-76f6-951a56f1ba52}">
+        <p14:section name="Metodologia" id="{b60a9904-f983-0acb-fff8-c4e7b9e025e4}">
           <p14:sldIdLst>
             <p14:sldId id="257"/>
           </p14:sldIdLst>
         </p14:section>
-        <p14:section name="Analisi funzionale" id="{25a870c3-928c-a5f1-7e40-83c1518f59e7}">
+        <p14:section name="Analisi funzionale" id="{eb8bda65-fc9a-eade-0826-4215074b7768}">
           <p14:sldIdLst>
             <p14:sldId id="258"/>
             <p14:sldId id="259"/>
           </p14:sldIdLst>
         </p14:section>
-        <p14:section name="Già realtà" id="{62511de9-31fd-9504-1c98-06bdaff5e8ff}">
+        <p14:section name="Già realtà" id="{c8457c7b-bb06-e627-456c-f32fd4086dfa}">
           <p14:sldIdLst>
             <p14:sldId id="260"/>
           </p14:sldIdLst>
         </p14:section>
-        <p14:section name="Architettura e ruoli" id="{9412beb7-1b98-adb4-f50c-776da49f49d4}">
+        <p14:section name="Architettura e ruoli" id="{ff2c561e-367d-9676-a552-6dce728c617c}">
           <p14:sldIdLst>
             <p14:sldId id="261"/>
             <p14:sldId id="262"/>
           </p14:sldIdLst>
         </p14:section>
-        <p14:section name="Novità" id="{c9a5a7f7-8fe8-9150-65e8-659fa4f040da}">
+        <p14:section name="Novità" id="{c4aa8a66-57ab-ef8c-0859-ebdcab55f222}">
           <p14:sldIdLst>
             <p14:sldId id="263"/>
           </p14:sldIdLst>
         </p14:section>
-        <p14:section name="Punti aperti" id="{b71b4f52-6662-e2e7-0efd-648c6cd7445d}">
+        <p14:section name="Punti aperti" id="{6280b062-8f54-ea35-3473-c1aaa3db0928}">
           <p14:sldIdLst>
             <p14:sldId id="264"/>
             <p14:sldId id="265"/>
@@ -161,7 +161,7 @@
             <p14:sldId id="268"/>
           </p14:sldIdLst>
         </p14:section>
-        <p14:section name="Scelte da prendere" id="{54164ed9-bca7-fa62-3b73-f5d0259fa0a4}">
+        <p14:section name="Scelte da prendere" id="{cfb92953-455b-ee86-4f74-996429d80801}">
           <p14:sldIdLst>
             <p14:sldId id="269"/>
           </p14:sldIdLst>
@@ -570,7 +570,7 @@
           <a:p>
             <a:r>
               <a:rPr lang="en-US" dirty="0"/>
-              <a:t>Presentazione di riepilogo del portale, aggiornata al 21 ottobre 2026 (revisione 3.4): metodologia, funzioni realizzate, novità, punti aperti di sviluppo e scelte ancora da prendere. Si rigenera a ogni rilascio insieme agli altri documenti ed è disponibile agli Amministratori nella pagina Documentazione del portale.</a:t>
+              <a:t>Presentazione di riepilogo del portale, aggiornata al 22 ottobre 2026 (revisione 3.5): metodologia, funzioni realizzate, novità, punti aperti di sviluppo e scelte ancora da prendere. Si rigenera a ogni rilascio insieme agli altri documenti ed è disponibile agli Amministratori nella pagina Documentazione del portale.</a:t>
             </a:r>
             <a:endParaRPr lang="en-US" dirty="0"/>
           </a:p>
@@ -1362,7 +1362,7 @@
           <a:p>
             <a:r>
               <a:rPr lang="en-US" dirty="0"/>
-              <a:t>Pagina «effetto sorpresa»: nessuno si aspetta che il portale sia già online. Il sistema è stato realizzato da Luca Moretti con l'ausilio di Claude Code ed è quasi terminato; i servizi sono già in produzione: GitHub (codice), Vercel (pubblicazione del portale), Supabase (database, utenti, documenti, funzioni) e Resend (email). Il portale è pubblicato su portale-cwp.vercel.app e funziona con dati di prova: si può aprire durante la presentazione (collegamento cliccabile) o inquadrare il codice QR con il telefono. La pagina pubblica /programma mostra già gli 8 documenti ufficiali del Programma, la Metodologia approvata, la PEC e il soggetto promotore. Lo sviluppo del portale vero è partito il 17 ottobre 2026: da allora sono state pubblicate 154 versioni, 38 script del database e 7 funzioni sul server. Restano i punti aperti delle prossime slide (servizi a pagamento, sicurezza, dati da inserire, collaudo con un Comune). Suggerimento: aprire il portale dal vivo con un utente di prova e mostrare la pagina pubblica.</a:t>
+              <a:t>Pagina «effetto sorpresa»: nessuno si aspetta che il portale sia già online. Il sistema è stato realizzato da Luca Moretti con l'ausilio di Claude Code ed è quasi terminato; i servizi sono già in produzione: GitHub (codice), Vercel (pubblicazione del portale), Supabase (database, utenti, documenti, funzioni) e Resend (email). Il portale è pubblicato su portale-cwp.vercel.app e funziona con dati di prova: si può aprire durante la presentazione (collegamento cliccabile) o inquadrare il codice QR con il telefono. La pagina pubblica /programma mostra già gli 8 documenti ufficiali del Programma, la Metodologia approvata, la PEC e il soggetto promotore. Lo sviluppo del portale vero è partito il 17 ottobre 2026: da allora sono state pubblicate 156 versioni, 39 script del database e 7 funzioni sul server. Restano i punti aperti delle prossime slide (servizi a pagamento, sicurezza, dati da inserire, collaudo con un Comune). Suggerimento: aprire il portale dal vivo con un utente di prova e mostrare la pagina pubblica.</a:t>
             </a:r>
             <a:endParaRPr lang="en-US" dirty="0"/>
           </a:p>
@@ -2073,7 +2073,7 @@
                   <a:schemeClr val="accent6"/>
                 </a:solidFill>
               </a:rPr>
-              <a:t>Portale Carbon WastePrint · Stato dei lavori e recap · 21 ottobre 2026 · rev. 3.4</a:t>
+              <a:t>Portale Carbon WastePrint · Stato dei lavori e recap · 22 ottobre 2026 · rev. 3.5</a:t>
             </a:r>
             <a:endParaRPr lang="en-US" sz="1000" dirty="0"/>
           </a:p>
@@ -2571,7 +2571,7 @@
                   <a:schemeClr val="accent3"/>
                 </a:solidFill>
               </a:rPr>
-              <a:t>Stato dei lavori e recap: metodologia, funzioni, novità, punti aperti e scelte da prendere · aggiornata al 21 ottobre 2026 · rev. 3.4</a:t>
+              <a:t>Stato dei lavori e recap: metodologia, funzioni, novità, punti aperti e scelte da prendere · aggiornata al 22 ottobre 2026 · rev. 3.5</a:t>
             </a:r>
             <a:endParaRPr lang="en-US" sz="1800" dirty="0"/>
           </a:p>
@@ -12929,7 +12929,7 @@
                 <a:ea typeface="Cambria" pitchFamily="34" charset="-122"/>
                 <a:cs typeface="Cambria" pitchFamily="34" charset="-120"/>
               </a:rPr>
-              <a:t>38</a:t>
+              <a:t>39</a:t>
             </a:r>
             <a:endParaRPr lang="en-US" sz="3000" dirty="0"/>
           </a:p>
@@ -13235,7 +13235,7 @@
                 <a:ea typeface="Cambria" pitchFamily="34" charset="-122"/>
                 <a:cs typeface="Cambria" pitchFamily="34" charset="-120"/>
               </a:rPr>
-              <a:t>≈36.500</a:t>
+              <a:t>≈37.100</a:t>
             </a:r>
             <a:endParaRPr lang="en-US" sz="3000" dirty="0"/>
           </a:p>
@@ -14022,7 +14022,7 @@
                 <a:ea typeface="Cambria" pitchFamily="34" charset="-122"/>
                 <a:cs typeface="Cambria" pitchFamily="34" charset="-120"/>
               </a:rPr>
-              <a:t>154</a:t>
+              <a:t>156</a:t>
             </a:r>
             <a:endParaRPr lang="en-US" sz="2400" dirty="0"/>
           </a:p>
@@ -14075,7 +14075,7 @@
                 <a:ea typeface="Cambria" pitchFamily="34" charset="-122"/>
                 <a:cs typeface="Cambria" pitchFamily="34" charset="-120"/>
               </a:rPr>
-              <a:t>38</a:t>
+              <a:t>39</a:t>
             </a:r>
             <a:endParaRPr lang="en-US" sz="2400" dirty="0"/>
           </a:p>
@@ -14181,7 +14181,7 @@
                 <a:ea typeface="Cambria" pitchFamily="34" charset="-122"/>
                 <a:cs typeface="Cambria" pitchFamily="34" charset="-120"/>
               </a:rPr>
-              <a:t>≈36.500</a:t>
+              <a:t>≈37.100</a:t>
             </a:r>
             <a:endParaRPr lang="en-US" sz="2400" dirty="0"/>
           </a:p>
@@ -18184,7 +18184,7 @@
                   <a:schemeClr val="tx1"/>
                 </a:solidFill>
               </a:rPr>
-              <a:t>Collaudo in corso con 5 Amministratori: correzioni dei rapporti V01 e V05 in produzione il 20-21/10; restano le regole metodologiche da confermare</a:t>
+              <a:t>Collaudo in corso con 5 Amministratori: correzioni dei rapporti V01 e V05 in produzione il 20-21/10; rilievi N01-N06 (22/10) corretti su un ramo da rilasciare; restano le regole metodologiche da confermare</a:t>
             </a:r>
             <a:endParaRPr lang="en-US" sz="1350" dirty="0"/>
           </a:p>

--- a/public/documentazione/Presentazione_Portale_CWP.pptx
+++ b/public/documentazione/Presentazione_Portale_CWP.pptx
@@ -120,39 +120,39 @@
   <p:extLst>
     <p:ext uri="{521415D9-36F7-43E2-AB2F-B90AF26B5E84}">
       <p14:sectionLst xmlns:p14="http://schemas.microsoft.com/office/powerpoint/2010/main">
-        <p14:section name="Apertura" id="{47daa843-f69f-22aa-f7f7-0848da1ad14d}">
+        <p14:section name="Apertura" id="{85e9868b-e0b4-7885-80df-cd364c70f8df}">
           <p14:sldIdLst>
             <p14:sldId id="256"/>
           </p14:sldIdLst>
         </p14:section>
-        <p14:section name="Metodologia" id="{b60a9904-f983-0acb-fff8-c4e7b9e025e4}">
+        <p14:section name="Metodologia" id="{1d8b734c-9c96-2e9b-2dd6-1d4b2da01bf2}">
           <p14:sldIdLst>
             <p14:sldId id="257"/>
           </p14:sldIdLst>
         </p14:section>
-        <p14:section name="Analisi funzionale" id="{eb8bda65-fc9a-eade-0826-4215074b7768}">
+        <p14:section name="Analisi funzionale" id="{755e2a8a-37f9-7fe0-9cdc-25d2a78a1602}">
           <p14:sldIdLst>
             <p14:sldId id="258"/>
             <p14:sldId id="259"/>
           </p14:sldIdLst>
         </p14:section>
-        <p14:section name="Già realtà" id="{c8457c7b-bb06-e627-456c-f32fd4086dfa}">
+        <p14:section name="Già realtà" id="{9f5e08a2-a28f-d1fb-bdd7-6a4ea925fdfe}">
           <p14:sldIdLst>
             <p14:sldId id="260"/>
           </p14:sldIdLst>
         </p14:section>
-        <p14:section name="Architettura e ruoli" id="{ff2c561e-367d-9676-a552-6dce728c617c}">
+        <p14:section name="Architettura e ruoli" id="{33fce3fb-f9a4-7bfb-a39b-59fe5a6ffa39}">
           <p14:sldIdLst>
             <p14:sldId id="261"/>
             <p14:sldId id="262"/>
           </p14:sldIdLst>
         </p14:section>
-        <p14:section name="Novità" id="{c4aa8a66-57ab-ef8c-0859-ebdcab55f222}">
+        <p14:section name="Novità" id="{06331929-8cc5-7233-e1ee-18f41cd60402}">
           <p14:sldIdLst>
             <p14:sldId id="263"/>
           </p14:sldIdLst>
         </p14:section>
-        <p14:section name="Punti aperti" id="{6280b062-8f54-ea35-3473-c1aaa3db0928}">
+        <p14:section name="Punti aperti" id="{9cc28a90-d165-2951-5877-409913f9e3d8}">
           <p14:sldIdLst>
             <p14:sldId id="264"/>
             <p14:sldId id="265"/>
@@ -161,7 +161,7 @@
             <p14:sldId id="268"/>
           </p14:sldIdLst>
         </p14:section>
-        <p14:section name="Scelte da prendere" id="{cfb92953-455b-ee86-4f74-996429d80801}">
+        <p14:section name="Scelte da prendere" id="{210268a0-f5c2-6777-6f7b-136941cb713a}">
           <p14:sldIdLst>
             <p14:sldId id="269"/>
           </p14:sldIdLst>
@@ -570,7 +570,7 @@
           <a:p>
             <a:r>
               <a:rPr lang="en-US" dirty="0"/>
-              <a:t>Presentazione di riepilogo del portale, aggiornata al 22 ottobre 2026 (revisione 3.5): metodologia, funzioni realizzate, novità, punti aperti di sviluppo e scelte ancora da prendere. Si rigenera a ogni rilascio insieme agli altri documenti ed è disponibile agli Amministratori nella pagina Documentazione del portale.</a:t>
+              <a:t>Presentazione di riepilogo del portale, aggiornata al 22 ottobre 2026 (revisione 3.6): metodologia, funzioni realizzate, novità, punti aperti di sviluppo e scelte ancora da prendere. Si rigenera a ogni rilascio insieme agli altri documenti ed è disponibile agli Amministratori nella pagina Documentazione del portale.</a:t>
             </a:r>
             <a:endParaRPr lang="en-US" dirty="0"/>
           </a:p>
@@ -1362,7 +1362,7 @@
           <a:p>
             <a:r>
               <a:rPr lang="en-US" dirty="0"/>
-              <a:t>Pagina «effetto sorpresa»: nessuno si aspetta che il portale sia già online. Il sistema è stato realizzato da Luca Moretti con l'ausilio di Claude Code ed è quasi terminato; i servizi sono già in produzione: GitHub (codice), Vercel (pubblicazione del portale), Supabase (database, utenti, documenti, funzioni) e Resend (email). Il portale è pubblicato su portale-cwp.vercel.app e funziona con dati di prova: si può aprire durante la presentazione (collegamento cliccabile) o inquadrare il codice QR con il telefono. La pagina pubblica /programma mostra già gli 8 documenti ufficiali del Programma, la Metodologia approvata, la PEC e il soggetto promotore. Lo sviluppo del portale vero è partito il 17 ottobre 2026: da allora sono state pubblicate 156 versioni, 39 script del database e 7 funzioni sul server. Restano i punti aperti delle prossime slide (servizi a pagamento, sicurezza, dati da inserire, collaudo con un Comune). Suggerimento: aprire il portale dal vivo con un utente di prova e mostrare la pagina pubblica.</a:t>
+              <a:t>Pagina «effetto sorpresa»: nessuno si aspetta che il portale sia già online. Il sistema è stato realizzato da Luca Moretti con l'ausilio di Claude Code ed è quasi terminato; i servizi sono già in produzione: GitHub (codice), Vercel (pubblicazione del portale), Supabase (database, utenti, documenti, funzioni) e Resend (email). Il portale è pubblicato su portale-cwp.vercel.app e funziona con dati di prova: si può aprire durante la presentazione (collegamento cliccabile) o inquadrare il codice QR con il telefono. La pagina pubblica /programma mostra già gli 8 documenti ufficiali del Programma, la Metodologia approvata, la PEC e il soggetto promotore. Lo sviluppo del portale vero è partito il 17 ottobre 2026: da allora sono state pubblicate 162 versioni, 39 script del database e 7 funzioni sul server. Restano i punti aperti delle prossime slide (servizi a pagamento, sicurezza, dati da inserire, collaudo con un Comune). Suggerimento: aprire il portale dal vivo con un utente di prova e mostrare la pagina pubblica.</a:t>
             </a:r>
             <a:endParaRPr lang="en-US" dirty="0"/>
           </a:p>
@@ -2073,7 +2073,7 @@
                   <a:schemeClr val="accent6"/>
                 </a:solidFill>
               </a:rPr>
-              <a:t>Portale Carbon WastePrint · Stato dei lavori e recap · 22 ottobre 2026 · rev. 3.5</a:t>
+              <a:t>Portale Carbon WastePrint · Stato dei lavori e recap · 22 ottobre 2026 · rev. 3.6</a:t>
             </a:r>
             <a:endParaRPr lang="en-US" sz="1000" dirty="0"/>
           </a:p>
@@ -2571,7 +2571,7 @@
                   <a:schemeClr val="accent3"/>
                 </a:solidFill>
               </a:rPr>
-              <a:t>Stato dei lavori e recap: metodologia, funzioni, novità, punti aperti e scelte da prendere · aggiornata al 22 ottobre 2026 · rev. 3.5</a:t>
+              <a:t>Stato dei lavori e recap: metodologia, funzioni, novità, punti aperti e scelte da prendere · aggiornata al 22 ottobre 2026 · rev. 3.6</a:t>
             </a:r>
             <a:endParaRPr lang="en-US" sz="1800" dirty="0"/>
           </a:p>
@@ -13235,7 +13235,7 @@
                 <a:ea typeface="Cambria" pitchFamily="34" charset="-122"/>
                 <a:cs typeface="Cambria" pitchFamily="34" charset="-120"/>
               </a:rPr>
-              <a:t>≈37.100</a:t>
+              <a:t>≈37.300</a:t>
             </a:r>
             <a:endParaRPr lang="en-US" sz="3000" dirty="0"/>
           </a:p>
@@ -14022,7 +14022,7 @@
                 <a:ea typeface="Cambria" pitchFamily="34" charset="-122"/>
                 <a:cs typeface="Cambria" pitchFamily="34" charset="-120"/>
               </a:rPr>
-              <a:t>156</a:t>
+              <a:t>162</a:t>
             </a:r>
             <a:endParaRPr lang="en-US" sz="2400" dirty="0"/>
           </a:p>
@@ -14181,7 +14181,7 @@
                 <a:ea typeface="Cambria" pitchFamily="34" charset="-122"/>
                 <a:cs typeface="Cambria" pitchFamily="34" charset="-120"/>
               </a:rPr>
-              <a:t>≈37.100</a:t>
+              <a:t>≈37.300</a:t>
             </a:r>
             <a:endParaRPr lang="en-US" sz="2400" dirty="0"/>
           </a:p>
@@ -17942,7 +17942,7 @@
                   <a:schemeClr val="tx1"/>
                 </a:solidFill>
               </a:rPr>
-              <a:t>Backup automatico completo ogni giorno alle 20 dal Mac nella cartella Drive Cwp › backup (Google blocca Apps Script) e istruzioni di ripristino provate; da fare ambiente di prova e monitoraggio errori</a:t>
+              <a:t>Backup automatico completo ogni giorno alle 20 dal Mac nella cartella Drive Cwp › backup (pronto, da installare sul Mac) e istruzioni di ripristino provate; da fare ambiente di prova e monitoraggio errori</a:t>
             </a:r>
             <a:endParaRPr lang="en-US" sz="1350" dirty="0"/>
           </a:p>
@@ -18184,7 +18184,7 @@
                   <a:schemeClr val="tx1"/>
                 </a:solidFill>
               </a:rPr>
-              <a:t>Collaudo in corso con 5 Amministratori: correzioni dei rapporti V01 e V05 in produzione il 20-21/10; rilievi N01-N06 (22/10) corretti su un ramo da rilasciare; restano le regole metodologiche da confermare</a:t>
+              <a:t>Collaudo in corso con 5 Amministratori: correzioni dei rapporti V01 e V05 in produzione il 20-21/10; rilievi N01-N06 (22/10) corretti e in produzione; restano le regole metodologiche da confermare</a:t>
             </a:r>
             <a:endParaRPr lang="en-US" sz="1350" dirty="0"/>
           </a:p>
@@ -18408,7 +18408,7 @@
                   <a:schemeClr val="tx1"/>
                 </a:solidFill>
               </a:rPr>
-              <a:t>Nuovi moduli: simulatore con PDF ed Excel, assistente virtuale (poi Operatori e aiuto sulla pratica), Audit User e utenti online (fatti il 20/10); Marketplaces da definire</a:t>
+              <a:t>Nuovi moduli: simulatore con PDF ed Excel, assistente virtuale (poi Operatori e aiuto sulla pratica), Audit User e utenti online (fatti il 20/10); navigazione da smartphone (22/10); Marketplaces da definire</a:t>
             </a:r>
             <a:endParaRPr lang="en-US" sz="1350" dirty="0"/>
           </a:p>

--- a/public/documentazione/Presentazione_Portale_CWP.pptx
+++ b/public/documentazione/Presentazione_Portale_CWP.pptx
@@ -120,39 +120,39 @@
   <p:extLst>
     <p:ext uri="{521415D9-36F7-43E2-AB2F-B90AF26B5E84}">
       <p14:sectionLst xmlns:p14="http://schemas.microsoft.com/office/powerpoint/2010/main">
-        <p14:section name="Apertura" id="{85e9868b-e0b4-7885-80df-cd364c70f8df}">
+        <p14:section name="Apertura" id="{00d9e01a-b2a9-5dbc-cce0-782323e649ee}">
           <p14:sldIdLst>
             <p14:sldId id="256"/>
           </p14:sldIdLst>
         </p14:section>
-        <p14:section name="Metodologia" id="{1d8b734c-9c96-2e9b-2dd6-1d4b2da01bf2}">
+        <p14:section name="Metodologia" id="{31b25c3f-281e-41e6-63c8-58de32924162}">
           <p14:sldIdLst>
             <p14:sldId id="257"/>
           </p14:sldIdLst>
         </p14:section>
-        <p14:section name="Analisi funzionale" id="{755e2a8a-37f9-7fe0-9cdc-25d2a78a1602}">
+        <p14:section name="Analisi funzionale" id="{03598c86-10c2-a810-35bb-83a9ac1ed199}">
           <p14:sldIdLst>
             <p14:sldId id="258"/>
             <p14:sldId id="259"/>
           </p14:sldIdLst>
         </p14:section>
-        <p14:section name="Già realtà" id="{9f5e08a2-a28f-d1fb-bdd7-6a4ea925fdfe}">
+        <p14:section name="Già realtà" id="{a47f6021-85b7-3b84-6eec-6a3b93ef03c9}">
           <p14:sldIdLst>
             <p14:sldId id="260"/>
           </p14:sldIdLst>
         </p14:section>
-        <p14:section name="Architettura e ruoli" id="{33fce3fb-f9a4-7bfb-a39b-59fe5a6ffa39}">
+        <p14:section name="Architettura e ruoli" id="{c84ca814-bc87-14e9-e05e-d568e61a1e0d}">
           <p14:sldIdLst>
             <p14:sldId id="261"/>
             <p14:sldId id="262"/>
           </p14:sldIdLst>
         </p14:section>
-        <p14:section name="Novità" id="{06331929-8cc5-7233-e1ee-18f41cd60402}">
+        <p14:section name="Novità" id="{f669aacf-977b-a789-ceae-e5a4a5d99b3c}">
           <p14:sldIdLst>
             <p14:sldId id="263"/>
           </p14:sldIdLst>
         </p14:section>
-        <p14:section name="Punti aperti" id="{9cc28a90-d165-2951-5877-409913f9e3d8}">
+        <p14:section name="Punti aperti" id="{62e6af7d-d6d0-5dbb-3a02-93a2c5813e78}">
           <p14:sldIdLst>
             <p14:sldId id="264"/>
             <p14:sldId id="265"/>
@@ -161,7 +161,7 @@
             <p14:sldId id="268"/>
           </p14:sldIdLst>
         </p14:section>
-        <p14:section name="Scelte da prendere" id="{210268a0-f5c2-6777-6f7b-136941cb713a}">
+        <p14:section name="Scelte da prendere" id="{7529474b-85b4-b1ae-a7e0-3ab9b9833f12}">
           <p14:sldIdLst>
             <p14:sldId id="269"/>
           </p14:sldIdLst>
@@ -570,7 +570,7 @@
           <a:p>
             <a:r>
               <a:rPr lang="en-US" dirty="0"/>
-              <a:t>Presentazione di riepilogo del portale, aggiornata al 22 ottobre 2026 (revisione 3.6): metodologia, funzioni realizzate, novità, punti aperti di sviluppo e scelte ancora da prendere. Si rigenera a ogni rilascio insieme agli altri documenti ed è disponibile agli Amministratori nella pagina Documentazione del portale.</a:t>
+              <a:t>Presentazione di riepilogo del portale, aggiornata al 23 ottobre 2026 (revisione 3.7): metodologia, funzioni realizzate, novità, punti aperti di sviluppo e scelte ancora da prendere. Si rigenera a ogni rilascio insieme agli altri documenti ed è disponibile agli Amministratori nella pagina Documentazione del portale.</a:t>
             </a:r>
             <a:endParaRPr lang="en-US" dirty="0"/>
           </a:p>
@@ -1362,7 +1362,7 @@
           <a:p>
             <a:r>
               <a:rPr lang="en-US" dirty="0"/>
-              <a:t>Pagina «effetto sorpresa»: nessuno si aspetta che il portale sia già online. Il sistema è stato realizzato da Luca Moretti con l'ausilio di Claude Code ed è quasi terminato; i servizi sono già in produzione: GitHub (codice), Vercel (pubblicazione del portale), Supabase (database, utenti, documenti, funzioni) e Resend (email). Il portale è pubblicato su portale-cwp.vercel.app e funziona con dati di prova: si può aprire durante la presentazione (collegamento cliccabile) o inquadrare il codice QR con il telefono. La pagina pubblica /programma mostra già gli 8 documenti ufficiali del Programma, la Metodologia approvata, la PEC e il soggetto promotore. Lo sviluppo del portale vero è partito il 17 ottobre 2026: da allora sono state pubblicate 162 versioni, 39 script del database e 7 funzioni sul server. Restano i punti aperti delle prossime slide (servizi a pagamento, sicurezza, dati da inserire, collaudo con un Comune). Suggerimento: aprire il portale dal vivo con un utente di prova e mostrare la pagina pubblica.</a:t>
+              <a:t>Pagina «effetto sorpresa»: nessuno si aspetta che il portale sia già online. Il sistema è stato realizzato da Luca Moretti con l'ausilio di Claude Code ed è quasi terminato; i servizi sono già in produzione: GitHub (codice), Vercel (pubblicazione del portale), Supabase (database, utenti, documenti, funzioni) e Resend (email). Il portale è pubblicato su portale-cwp.vercel.app e funziona con dati di prova: si può aprire durante la presentazione (collegamento cliccabile) o inquadrare il codice QR con il telefono. La pagina pubblica /programma mostra già gli 8 documenti ufficiali del Programma, la Metodologia approvata, la PEC e il soggetto promotore. Lo sviluppo del portale vero è partito il 17 ottobre 2026: da allora sono state pubblicate 168 versioni, 41 script del database e 7 funzioni sul server. Restano i punti aperti delle prossime slide (servizi a pagamento, sicurezza, dati da inserire, collaudo con un Comune). Suggerimento: aprire il portale dal vivo con un utente di prova e mostrare la pagina pubblica.</a:t>
             </a:r>
             <a:endParaRPr lang="en-US" dirty="0"/>
           </a:p>
@@ -2073,7 +2073,7 @@
                   <a:schemeClr val="accent6"/>
                 </a:solidFill>
               </a:rPr>
-              <a:t>Portale Carbon WastePrint · Stato dei lavori e recap · 22 ottobre 2026 · rev. 3.6</a:t>
+              <a:t>Portale Carbon WastePrint · Stato dei lavori e recap · 23 ottobre 2026 · rev. 3.7</a:t>
             </a:r>
             <a:endParaRPr lang="en-US" sz="1000" dirty="0"/>
           </a:p>
@@ -2571,7 +2571,7 @@
                   <a:schemeClr val="accent3"/>
                 </a:solidFill>
               </a:rPr>
-              <a:t>Stato dei lavori e recap: metodologia, funzioni, novità, punti aperti e scelte da prendere · aggiornata al 22 ottobre 2026 · rev. 3.6</a:t>
+              <a:t>Stato dei lavori e recap: metodologia, funzioni, novità, punti aperti e scelte da prendere · aggiornata al 23 ottobre 2026 · rev. 3.7</a:t>
             </a:r>
             <a:endParaRPr lang="en-US" sz="1800" dirty="0"/>
           </a:p>
@@ -9250,7 +9250,7 @@
                   <a:schemeClr val="tx1"/>
                 </a:solidFill>
               </a:rPr>
-              <a:t>Dai conferimenti misurati di ogni utenza (Banca Dati Utenze), ex post</a:t>
+              <a:t>Dai kg misurati di ogni utenza (Banca Dati Utenze dell'anno), ex post</a:t>
             </a:r>
             <a:endParaRPr lang="en-US" sz="1800" dirty="0"/>
           </a:p>
@@ -12929,7 +12929,7 @@
                 <a:ea typeface="Cambria" pitchFamily="34" charset="-122"/>
                 <a:cs typeface="Cambria" pitchFamily="34" charset="-120"/>
               </a:rPr>
-              <a:t>39</a:t>
+              <a:t>41</a:t>
             </a:r>
             <a:endParaRPr lang="en-US" sz="3000" dirty="0"/>
           </a:p>
@@ -13235,7 +13235,7 @@
                 <a:ea typeface="Cambria" pitchFamily="34" charset="-122"/>
                 <a:cs typeface="Cambria" pitchFamily="34" charset="-120"/>
               </a:rPr>
-              <a:t>≈37.300</a:t>
+              <a:t>≈39.500</a:t>
             </a:r>
             <a:endParaRPr lang="en-US" sz="3000" dirty="0"/>
           </a:p>
@@ -14022,7 +14022,7 @@
                 <a:ea typeface="Cambria" pitchFamily="34" charset="-122"/>
                 <a:cs typeface="Cambria" pitchFamily="34" charset="-120"/>
               </a:rPr>
-              <a:t>162</a:t>
+              <a:t>168</a:t>
             </a:r>
             <a:endParaRPr lang="en-US" sz="2400" dirty="0"/>
           </a:p>
@@ -14075,7 +14075,7 @@
                 <a:ea typeface="Cambria" pitchFamily="34" charset="-122"/>
                 <a:cs typeface="Cambria" pitchFamily="34" charset="-120"/>
               </a:rPr>
-              <a:t>39</a:t>
+              <a:t>41</a:t>
             </a:r>
             <a:endParaRPr lang="en-US" sz="2400" dirty="0"/>
           </a:p>
@@ -14181,7 +14181,7 @@
                 <a:ea typeface="Cambria" pitchFamily="34" charset="-122"/>
                 <a:cs typeface="Cambria" pitchFamily="34" charset="-120"/>
               </a:rPr>
-              <a:t>≈37.300</a:t>
+              <a:t>≈39.500</a:t>
             </a:r>
             <a:endParaRPr lang="en-US" sz="2400" dirty="0"/>
           </a:p>
@@ -15590,7 +15590,7 @@
                   <a:schemeClr val="tx1"/>
                 </a:solidFill>
               </a:rPr>
-              <a:t>Banca Dati Utenze solo con codici anonimi</a:t>
+              <a:t>Banca Dati Utenze: nomi visibili solo allo staff, ogni consultazione nell'audit</a:t>
             </a:r>
             <a:endParaRPr lang="en-US" sz="1200" dirty="0"/>
           </a:p>
@@ -18408,7 +18408,7 @@
                   <a:schemeClr val="tx1"/>
                 </a:solidFill>
               </a:rPr>
-              <a:t>Nuovi moduli: simulatore con PDF ed Excel, assistente virtuale (poi Operatori e aiuto sulla pratica), Audit User e utenti online (fatti il 20/10); navigazione da smartphone (22/10); Marketplaces da definire</a:t>
+              <a:t>Nuovi moduli: simulatore con PDF ed Excel, assistente virtuale (poi Operatori e aiuto sulla pratica), Audit User e utenti online (fatti il 20/10); navigazione da smartphone (22/10); Banca Dati Utenze per utenza nel calcolo (22-23/10); Marketplaces da definire</a:t>
             </a:r>
             <a:endParaRPr lang="en-US" sz="1350" dirty="0"/>
           </a:p>

--- a/public/documentazione/Presentazione_Portale_CWP.pptx
+++ b/public/documentazione/Presentazione_Portale_CWP.pptx
@@ -120,39 +120,39 @@
   <p:extLst>
     <p:ext uri="{521415D9-36F7-43E2-AB2F-B90AF26B5E84}">
       <p14:sectionLst xmlns:p14="http://schemas.microsoft.com/office/powerpoint/2010/main">
-        <p14:section name="Apertura" id="{00d9e01a-b2a9-5dbc-cce0-782323e649ee}">
+        <p14:section name="Apertura" id="{2f10fc11-3f19-a0fd-2fae-7751656cb15a}">
           <p14:sldIdLst>
             <p14:sldId id="256"/>
           </p14:sldIdLst>
         </p14:section>
-        <p14:section name="Metodologia" id="{31b25c3f-281e-41e6-63c8-58de32924162}">
+        <p14:section name="Metodologia" id="{65d0dc4b-f875-12e2-c0c9-5cc299a1027e}">
           <p14:sldIdLst>
             <p14:sldId id="257"/>
           </p14:sldIdLst>
         </p14:section>
-        <p14:section name="Analisi funzionale" id="{03598c86-10c2-a810-35bb-83a9ac1ed199}">
+        <p14:section name="Analisi funzionale" id="{42d85fcd-c7ef-9c32-039c-5dbff3bbe675}">
           <p14:sldIdLst>
             <p14:sldId id="258"/>
             <p14:sldId id="259"/>
           </p14:sldIdLst>
         </p14:section>
-        <p14:section name="Già realtà" id="{a47f6021-85b7-3b84-6eec-6a3b93ef03c9}">
+        <p14:section name="Già realtà" id="{a393900a-0a23-1111-4766-57a69911a0e9}">
           <p14:sldIdLst>
             <p14:sldId id="260"/>
           </p14:sldIdLst>
         </p14:section>
-        <p14:section name="Architettura e ruoli" id="{c84ca814-bc87-14e9-e05e-d568e61a1e0d}">
+        <p14:section name="Architettura e ruoli" id="{c131fd75-63c1-f8c9-ef25-a2f383bdaf16}">
           <p14:sldIdLst>
             <p14:sldId id="261"/>
             <p14:sldId id="262"/>
           </p14:sldIdLst>
         </p14:section>
-        <p14:section name="Novità" id="{f669aacf-977b-a789-ceae-e5a4a5d99b3c}">
+        <p14:section name="Novità" id="{86497412-54fc-7955-90be-c3e6a6b0fc94}">
           <p14:sldIdLst>
             <p14:sldId id="263"/>
           </p14:sldIdLst>
         </p14:section>
-        <p14:section name="Punti aperti" id="{62e6af7d-d6d0-5dbb-3a02-93a2c5813e78}">
+        <p14:section name="Punti aperti" id="{e73e0be0-ee22-5dfd-0bc1-1ac11e9858df}">
           <p14:sldIdLst>
             <p14:sldId id="264"/>
             <p14:sldId id="265"/>
@@ -161,7 +161,7 @@
             <p14:sldId id="268"/>
           </p14:sldIdLst>
         </p14:section>
-        <p14:section name="Scelte da prendere" id="{7529474b-85b4-b1ae-a7e0-3ab9b9833f12}">
+        <p14:section name="Scelte da prendere" id="{d43f38ea-4fbf-427d-414e-d2651163f101}">
           <p14:sldIdLst>
             <p14:sldId id="269"/>
           </p14:sldIdLst>
@@ -570,7 +570,7 @@
           <a:p>
             <a:r>
               <a:rPr lang="en-US" dirty="0"/>
-              <a:t>Presentazione di riepilogo del portale, aggiornata al 23 ottobre 2026 (revisione 3.7): metodologia, funzioni realizzate, novità, punti aperti di sviluppo e scelte ancora da prendere. Si rigenera a ogni rilascio insieme agli altri documenti ed è disponibile agli Amministratori nella pagina Documentazione del portale.</a:t>
+              <a:t>Presentazione di riepilogo del portale, aggiornata al 23 ottobre 2026 (revisione 3.8): metodologia, funzioni realizzate, novità, punti aperti di sviluppo e scelte ancora da prendere. Si rigenera a ogni rilascio insieme agli altri documenti ed è disponibile agli Amministratori nella pagina Documentazione del portale.</a:t>
             </a:r>
             <a:endParaRPr lang="en-US" dirty="0"/>
           </a:p>
@@ -1362,7 +1362,7 @@
           <a:p>
             <a:r>
               <a:rPr lang="en-US" dirty="0"/>
-              <a:t>Pagina «effetto sorpresa»: nessuno si aspetta che il portale sia già online. Il sistema è stato realizzato da Luca Moretti con l'ausilio di Claude Code ed è quasi terminato; i servizi sono già in produzione: GitHub (codice), Vercel (pubblicazione del portale), Supabase (database, utenti, documenti, funzioni) e Resend (email). Il portale è pubblicato su portale-cwp.vercel.app e funziona con dati di prova: si può aprire durante la presentazione (collegamento cliccabile) o inquadrare il codice QR con il telefono. La pagina pubblica /programma mostra già gli 8 documenti ufficiali del Programma, la Metodologia approvata, la PEC e il soggetto promotore. Lo sviluppo del portale vero è partito il 17 ottobre 2026: da allora sono state pubblicate 168 versioni, 41 script del database e 7 funzioni sul server. Restano i punti aperti delle prossime slide (servizi a pagamento, sicurezza, dati da inserire, collaudo con un Comune). Suggerimento: aprire il portale dal vivo con un utente di prova e mostrare la pagina pubblica.</a:t>
+              <a:t>Pagina «effetto sorpresa»: nessuno si aspetta che il portale sia già online. Il sistema è stato realizzato da Luca Moretti con l'ausilio di Claude Code ed è quasi terminato; i servizi sono già in produzione: GitHub (codice), Vercel (pubblicazione del portale), Supabase (database, utenti, documenti, funzioni) e Resend (email). Il portale è pubblicato su portale-cwp.vercel.app e funziona con dati di prova: si può aprire durante la presentazione (collegamento cliccabile) o inquadrare il codice QR con il telefono. La pagina pubblica /programma mostra già gli 8 documenti ufficiali del Programma, la Metodologia approvata, la PEC e il soggetto promotore. Lo sviluppo del portale vero è partito il 17 ottobre 2026: da allora sono state pubblicate 172 versioni, 42 script del database e 7 funzioni sul server. Restano i punti aperti delle prossime slide (servizi a pagamento, sicurezza, dati da inserire, collaudo con un Comune). Suggerimento: aprire il portale dal vivo con un utente di prova e mostrare la pagina pubblica.</a:t>
             </a:r>
             <a:endParaRPr lang="en-US" dirty="0"/>
           </a:p>
@@ -2073,7 +2073,7 @@
                   <a:schemeClr val="accent6"/>
                 </a:solidFill>
               </a:rPr>
-              <a:t>Portale Carbon WastePrint · Stato dei lavori e recap · 23 ottobre 2026 · rev. 3.7</a:t>
+              <a:t>Portale Carbon WastePrint · Stato dei lavori e recap · 23 ottobre 2026 · rev. 3.8</a:t>
             </a:r>
             <a:endParaRPr lang="en-US" sz="1000" dirty="0"/>
           </a:p>
@@ -2571,7 +2571,7 @@
                   <a:schemeClr val="accent3"/>
                 </a:solidFill>
               </a:rPr>
-              <a:t>Stato dei lavori e recap: metodologia, funzioni, novità, punti aperti e scelte da prendere · aggiornata al 23 ottobre 2026 · rev. 3.7</a:t>
+              <a:t>Stato dei lavori e recap: metodologia, funzioni, novità, punti aperti e scelte da prendere · aggiornata al 23 ottobre 2026 · rev. 3.8</a:t>
             </a:r>
             <a:endParaRPr lang="en-US" sz="1800" dirty="0"/>
           </a:p>
@@ -12929,7 +12929,7 @@
                 <a:ea typeface="Cambria" pitchFamily="34" charset="-122"/>
                 <a:cs typeface="Cambria" pitchFamily="34" charset="-120"/>
               </a:rPr>
-              <a:t>41</a:t>
+              <a:t>42</a:t>
             </a:r>
             <a:endParaRPr lang="en-US" sz="3000" dirty="0"/>
           </a:p>
@@ -13235,7 +13235,7 @@
                 <a:ea typeface="Cambria" pitchFamily="34" charset="-122"/>
                 <a:cs typeface="Cambria" pitchFamily="34" charset="-120"/>
               </a:rPr>
-              <a:t>≈39.500</a:t>
+              <a:t>≈39.900</a:t>
             </a:r>
             <a:endParaRPr lang="en-US" sz="3000" dirty="0"/>
           </a:p>
@@ -14022,7 +14022,7 @@
                 <a:ea typeface="Cambria" pitchFamily="34" charset="-122"/>
                 <a:cs typeface="Cambria" pitchFamily="34" charset="-120"/>
               </a:rPr>
-              <a:t>168</a:t>
+              <a:t>172</a:t>
             </a:r>
             <a:endParaRPr lang="en-US" sz="2400" dirty="0"/>
           </a:p>
@@ -14075,7 +14075,7 @@
                 <a:ea typeface="Cambria" pitchFamily="34" charset="-122"/>
                 <a:cs typeface="Cambria" pitchFamily="34" charset="-120"/>
               </a:rPr>
-              <a:t>41</a:t>
+              <a:t>42</a:t>
             </a:r>
             <a:endParaRPr lang="en-US" sz="2400" dirty="0"/>
           </a:p>
@@ -14181,7 +14181,7 @@
                 <a:ea typeface="Cambria" pitchFamily="34" charset="-122"/>
                 <a:cs typeface="Cambria" pitchFamily="34" charset="-120"/>
               </a:rPr>
-              <a:t>≈39.500</a:t>
+              <a:t>≈39.900</a:t>
             </a:r>
             <a:endParaRPr lang="en-US" sz="2400" dirty="0"/>
           </a:p>
@@ -18408,7 +18408,7 @@
                   <a:schemeClr val="tx1"/>
                 </a:solidFill>
               </a:rPr>
-              <a:t>Nuovi moduli: simulatore con PDF ed Excel, assistente virtuale (poi Operatori e aiuto sulla pratica), Audit User e utenti online (fatti il 20/10); navigazione da smartphone (22/10); Banca Dati Utenze per utenza nel calcolo (22-23/10); Marketplaces da definire</a:t>
+              <a:t>Nuovi moduli: simulatore con PDF ed Excel, assistente virtuale (poi Operatori e aiuto sulla pratica), Audit User e utenti online (fatti il 20/10); navigazione da smartphone (22/10); Banca Dati Utenze per utenza nel calcolo (22-23/10); valore dei crediti in Dashboard (23/10); Marketplaces da definire</a:t>
             </a:r>
             <a:endParaRPr lang="en-US" sz="1350" dirty="0"/>
           </a:p>

--- a/public/documentazione/Presentazione_Portale_CWP.pptx
+++ b/public/documentazione/Presentazione_Portale_CWP.pptx
@@ -19,9 +19,10 @@
     <p:sldId id="267" r:id="rId13"/>
     <p:sldId id="268" r:id="rId14"/>
     <p:sldId id="269" r:id="rId15"/>
+    <p:sldId id="270" r:id="rId16"/>
   </p:sldIdLst>
   <p:notesMasterIdLst>
-    <p:notesMasterId r:id="rId16"/>
+    <p:notesMasterId r:id="rId17"/>
   </p:notesMasterIdLst>
   <p:sldSz cx="12192000" cy="6858000"/>
   <p:notesSz cx="6858000" cy="12192000"/>
@@ -120,50 +121,51 @@
   <p:extLst>
     <p:ext uri="{521415D9-36F7-43E2-AB2F-B90AF26B5E84}">
       <p14:sectionLst xmlns:p14="http://schemas.microsoft.com/office/powerpoint/2010/main">
-        <p14:section name="Apertura" id="{2f10fc11-3f19-a0fd-2fae-7751656cb15a}">
+        <p14:section name="Apertura" id="{c764f858-4a5a-cbcf-bbff-53ca1659af27}">
           <p14:sldIdLst>
             <p14:sldId id="256"/>
           </p14:sldIdLst>
         </p14:section>
-        <p14:section name="Metodologia" id="{65d0dc4b-f875-12e2-c0c9-5cc299a1027e}">
+        <p14:section name="Metodologia" id="{3ca88c82-d409-4ff8-8c0b-c0ecb883c577}">
           <p14:sldIdLst>
             <p14:sldId id="257"/>
           </p14:sldIdLst>
         </p14:section>
-        <p14:section name="Analisi funzionale" id="{42d85fcd-c7ef-9c32-039c-5dbff3bbe675}">
+        <p14:section name="Analisi funzionale" id="{bbcfda94-a260-b3d0-505b-ee8a3d6d6090}">
           <p14:sldIdLst>
             <p14:sldId id="258"/>
             <p14:sldId id="259"/>
           </p14:sldIdLst>
         </p14:section>
-        <p14:section name="Già realtà" id="{a393900a-0a23-1111-4766-57a69911a0e9}">
+        <p14:section name="Già realtà" id="{43986d8e-6acf-ed87-8fcc-2a110d69635b}">
           <p14:sldIdLst>
             <p14:sldId id="260"/>
           </p14:sldIdLst>
         </p14:section>
-        <p14:section name="Architettura e ruoli" id="{c131fd75-63c1-f8c9-ef25-a2f383bdaf16}">
+        <p14:section name="Architettura e ruoli" id="{0d8cd8b9-9e97-a6ef-7cc5-ed3579b81464}">
           <p14:sldIdLst>
             <p14:sldId id="261"/>
             <p14:sldId id="262"/>
           </p14:sldIdLst>
         </p14:section>
-        <p14:section name="Novità" id="{86497412-54fc-7955-90be-c3e6a6b0fc94}">
+        <p14:section name="Novità" id="{39a78928-7fc8-384a-90d6-d3b0de56b63c}">
           <p14:sldIdLst>
             <p14:sldId id="263"/>
+            <p14:sldId id="264"/>
           </p14:sldIdLst>
         </p14:section>
-        <p14:section name="Punti aperti" id="{e73e0be0-ee22-5dfd-0bc1-1ac11e9858df}">
+        <p14:section name="Punti aperti" id="{86fb6a3f-d7cd-7057-ae3e-fde3dd5ab4e1}">
           <p14:sldIdLst>
-            <p14:sldId id="264"/>
             <p14:sldId id="265"/>
             <p14:sldId id="266"/>
             <p14:sldId id="267"/>
             <p14:sldId id="268"/>
+            <p14:sldId id="269"/>
           </p14:sldIdLst>
         </p14:section>
-        <p14:section name="Scelte da prendere" id="{d43f38ea-4fbf-427d-414e-d2651163f101}">
+        <p14:section name="Scelte da prendere" id="{d21a8fa7-dcda-c6be-5f4e-588fc6abe770}">
           <p14:sldIdLst>
-            <p14:sldId id="269"/>
+            <p14:sldId id="270"/>
           </p14:sldIdLst>
         </p14:section>
       </p14:sectionLst>
@@ -570,7 +572,7 @@
           <a:p>
             <a:r>
               <a:rPr lang="en-US" dirty="0"/>
-              <a:t>Presentazione di riepilogo del portale, aggiornata al 23 ottobre 2026 (revisione 3.8): metodologia, funzioni realizzate, novità, punti aperti di sviluppo e scelte ancora da prendere. Si rigenera a ogni rilascio insieme agli altri documenti ed è disponibile agli Amministratori nella pagina Documentazione del portale.</a:t>
+              <a:t>Presentazione di riepilogo del portale, aggiornata al 23 ottobre 2026 (revisione 3.9): metodologia, funzioni realizzate, novità, punti aperti di sviluppo e scelte ancora da prendere. Si rigenera a ogni rilascio insieme agli altri documenti ed è disponibile agli Amministratori nella pagina Documentazione del portale.</a:t>
             </a:r>
             <a:endParaRPr lang="en-US" dirty="0"/>
           </a:p>
@@ -658,7 +660,7 @@
           <a:p>
             <a:r>
               <a:rPr lang="en-US" dirty="0"/>
-              <a:t>Due nuovi moduli entrano nel progetto e in tutti i documenti (Registro, backlog punti 37 e 21). Simulatore di scenari, richiesto da Luca il 19/10: per ogni Comune si creano più scenari; la durata si sceglie da un menu a tendina tra 7, 10 e 21 anni (Standard 4.3.8: periodo di 10 anni oppure 7 rinnovabili fino a 21); si acquisiscono i dati dell'anno base (popolazione, produzione totale e pro capite, raccolta differenziata, ripartizione per frazione, parametri del calcolo); per ogni anno si inseriscono gli obiettivi di produzione totale e pro capite e di secco residuo pro capite; il simulatore ricalcola la percentuale di differenziata e stima anno per anno i crediti che il Comune potrebbe generare, con due metodi: il bilancio del Comune (tutte le utenze insieme, il più prudente) e il metodo per utenza con le sole utenze virtuose e il buffer del Capitolo 7, lo stesso delle stime dell'Allegato A dei contratti EsaCom. È una stima ex ante utile a presentare il Programma ai Comuni: il modello semplificato va confermato dalla Fondazione. Assistente virtuale (prima versione del 19/10, attiva dallo stesso giorno): pulsante «✦ Assistente» per Amministratori e utenti degli enti; risponde in italiano solo dalla base di conoscenza (Manuale Utente e tariffe per gli enti, in più Manuale Amministratore e note sul calcolo per gli Amministratori), non vede le pratiche, non salva i testi, limite di 40 domande al giorno per utente. Funziona con Claude Haiku 5.5 tramite la funzione del server «assistente»; la base di conoscenza resta nella cache dei prompt, quindi una domanda costa di solito meno di un centesimo di dollaro. Funziona con una chiave della Claude Console, legata a un solo spazio di lavoro, inserita da Luca nei segreti di Supabase: l'uso API è fatturato a parte rispetto ai piani claude.ai; Luca ha collegato i crediti API mensili del piano Max e acquistato 100 dollari di crediti. Prova dal vivo del 19/10: risposte corrette su creazione utenti e costi del Caso 1. Passi successivi: Operatori e aiuto sulla singola pratica.</a:t>
+              <a:t>La parte funzionale dei requisiti del 15/09 è chiusa e dal 18/10 sera il portale segue anche i documenti ufficiali del Programma. Restano tre gruppi. 1) Requisiti tecnici e di sicurezza (sezioni 13-15 dei requisiti); il 19/10 sono stati fatti l'archivio di backup completo e le Istruzioni di ripristino, mancano le copie automatiche di database e file. 2) Avvio della piattaforma pubblica (Guida 3.7): la pagina /programma è attiva e pubblica già gli otto documenti ufficiali v1.2 (Guida, Definizioni, Normativa, Standard, Metodologia, Politica di reclamo, Schema tariffario, Gestione qualità dei dati) e la Metodologia approvata; la PEC del Programma per i reclami è operate@pec.it; vanno aggiunti gli enti di validazione e verifica e i registri riconosciuti e la modulistica quando disponibile. L'accesso con SPID, CIE o CNS (Guida 3.9) richiede l'adesione della Fondazione come fornitore di servizi (AgID o aggregatore accreditato): fino ad allora resta l'email confermata. 3) Qualità dei dati e completamenti: i controlli del documento Gestione della qualità dei dati sono nel calcolo (Tabella 3 dello Standard ±30% con motivazione obbligatoria, completezza, unicità, letture a buon fine, tempestività) e servono popolazione e cluster SOSE ufficiali di ogni Comune; poi privacy, accessibilità, collaudo con dati reali. L'assistente AI resta un supporto al back-office, come previsto dai requisiti (sezione 17). Da fare subito (19/10 sera). Azioni di Luca: ripubblicare le funzioni crea-utente e reimposta-password (email delle credenziali), rieseguire la funzione utente_mai_attivo dello script 30, verificare il dominio email su Resend, decidere se intestare alla Fondazione la fatturazione dell'assistente. Sviluppo: utenti online per l'amministratore principale, messaggi d'errore dell'assistente in italiano (proposta), stampa PDF del simulatore, sicurezza e piani a pagamento, collaudo con dati reali.</a:t>
             </a:r>
             <a:endParaRPr lang="en-US" dirty="0"/>
           </a:p>
@@ -746,7 +748,7 @@
           <a:p>
             <a:r>
               <a:rPr lang="en-US" dirty="0"/>
-              <a:t>Il simulatore è già nel portale (menu Simulatore, per Operatori e Amministratori) ed è conforme al modello CWP: scenario di riferimento dello Standard 4.8.1 (anno in cui il Comune ha raggiunto il 65% di differenziata oppure valori medi del cluster SOSE della Tabella 3 × popolazione ISPRA 2022), durata 7, 10 o 21 anni (Standard 4.3.8), stima ex ante a livello di Comune ammessa dalla Metodologia (Capitoli 6.1 e 6.2), fattori di emissione e formule della Metodologia v1.2, buffer. L'esempio usa dati di prova: un Comune di 12.500 abitanti del cluster 4 (riferimento 445 kg/ab, 78,7% di differenziata), oggi a 430 kg/ab con 90 kg/ab di secco, obiettivo al 2036 di 380 kg/ab e 50 kg/ab di secco. Il simulatore ricalcola ogni anno la differenziata (fino all'87%) e stima circa 11.500 tCO₂eq di crediti netti in 10 anni dopo un buffer del 20%. Da sapere: i crediti nascono dai rifiuti evitati rispetto al riferimento (qui 1 t in meno vale circa 2,7 tCO₂eq); spostare rifiuti dal secco alla differenziata a parità di totale non genera crediti. È una stima ex ante, non certificabile; il modello va confermato dalla Fondazione.</a:t>
+              <a:t>Due nuovi moduli entrano nel progetto e in tutti i documenti (Registro, backlog punti 37 e 21). Simulatore di scenari, richiesto da Luca il 19/10: per ogni Comune si creano più scenari; la durata si sceglie da un menu a tendina tra 7, 10 e 21 anni (Standard 4.3.8: periodo di 10 anni oppure 7 rinnovabili fino a 21); si acquisiscono i dati dell'anno base (popolazione, produzione totale e pro capite, raccolta differenziata, ripartizione per frazione, parametri del calcolo); per ogni anno si inseriscono gli obiettivi di produzione totale e pro capite e di secco residuo pro capite; il simulatore ricalcola la percentuale di differenziata e stima anno per anno i crediti che il Comune potrebbe generare, con due metodi: il bilancio del Comune (tutte le utenze insieme, il più prudente) e il metodo per utenza con le sole utenze virtuose e il buffer del Capitolo 7, lo stesso delle stime dell'Allegato A dei contratti EsaCom. È una stima ex ante utile a presentare il Programma ai Comuni: il modello semplificato va confermato dalla Fondazione. Assistente virtuale (prima versione del 19/10, attiva dallo stesso giorno): pulsante «✦ Assistente» per Amministratori e utenti degli enti; risponde in italiano solo dalla base di conoscenza (Manuale Utente e tariffe per gli enti, in più Manuale Amministratore e note sul calcolo per gli Amministratori), non vede le pratiche, non salva i testi, limite di 40 domande al giorno per utente. Funziona con Claude Haiku 5.5 tramite la funzione del server «assistente»; la base di conoscenza resta nella cache dei prompt, quindi una domanda costa di solito meno di un centesimo di dollaro. Funziona con una chiave della Claude Console, legata a un solo spazio di lavoro, inserita da Luca nei segreti di Supabase: l'uso API è fatturato a parte rispetto ai piani claude.ai; Luca ha collegato i crediti API mensili del piano Max e acquistato 100 dollari di crediti. Prova dal vivo del 19/10: risposte corrette su creazione utenti e costi del Caso 1. Passi successivi: Operatori e aiuto sulla singola pratica.</a:t>
             </a:r>
             <a:endParaRPr lang="en-US" dirty="0"/>
           </a:p>
@@ -834,7 +836,7 @@
           <a:p>
             <a:r>
               <a:rPr lang="en-US" dirty="0"/>
-              <a:t>Il simulatore stima anche la parte economica per il Comune o il gestore. Ricavi: crediti netti stimati per anno × valore del credito, digitato anno per anno (proposto 32 €). Costi: il simulatore chiede se usare il Caso 1 (progetto volontario) o il Caso 2 (progetto obbligatorio, per esempio da bando di gara di un Comune che ha inserito il CWP come metodo), con le tabelle «Costi per il Soggetto Promotore» di Fondazione Operate del 28/07/2026: sei voci (Progetto, Rapporto di Monitoraggio, registrazione del Progetto, dei crediti del Progetto, del Rapporto e dei crediti del Rapporto), costo per abitante per fascia di popolazione con interpolazione e arrotondamento per eccesso, minimo e massimo annuo, una tantum ammortizzati in 10 anni; validazione dell'ente esclusa. Esempio con i dati ISPRA 2021 di Bovisio-Masciago (16.735 abitanti), obiettivo 400 kg/ab e 50 kg/ab di secco al 2036, 32 € a credito. Con il metodo per utenza (solo utenze virtuose, secco e organico misurati, tariffa puntuale, variabilità tra utenze 30%, buffer 30%): 34.188 crediti netti in 10 anni (0,20 per abitante all'anno, nell'intervallo 0,19-0,23 dell'Allegato A EsaCom), ricavi 1.093.792 €; Caso 1 costi 162.330 € (9,70 € per abitante) e margine +931.463 €; Caso 2 costi 242.658 € e margine +851.135 €. Con il bilancio del Comune (il metodo più prudente): 6.707 crediti, ricavi 214.464 €, Caso 1 +52.134 € (rientro nel 2034), Caso 2 −28.193 €. La differenza viene soprattutto dal fatto che Bovisio ha già l'84% di differenziata: il secco delle utenze è molto sotto il riferimento al 65%. Il Caso 1 con 154.247 abitanti riproduce le cifre dei contratti tipo EsaCom. L'Allegato A indica 6,08 € per abitante di costo contro 5,36 delle tabelle: la differenza potrebbe essere l'ente di validazione e verifica. Stima indicativa, non un piano finanziario.</a:t>
+              <a:t>Il simulatore è già nel portale (menu Simulatore, per Operatori e Amministratori) ed è conforme al modello CWP: scenario di riferimento dello Standard 4.8.1 (anno in cui il Comune ha raggiunto il 65% di differenziata oppure valori medi del cluster SOSE della Tabella 3 × popolazione ISPRA 2022), durata 7, 10 o 21 anni (Standard 4.3.8), stima ex ante a livello di Comune ammessa dalla Metodologia (Capitoli 6.1 e 6.2), fattori di emissione e formule della Metodologia v1.2, buffer. L'esempio usa dati di prova: un Comune di 12.500 abitanti del cluster 4 (riferimento 445 kg/ab, 78,7% di differenziata), oggi a 430 kg/ab con 90 kg/ab di secco, obiettivo al 2036 di 380 kg/ab e 50 kg/ab di secco. Il simulatore ricalcola ogni anno la differenziata (fino all'87%) e stima circa 11.500 tCO₂eq di crediti netti in 10 anni dopo un buffer del 20%. Da sapere: i crediti nascono dai rifiuti evitati rispetto al riferimento (qui 1 t in meno vale circa 2,7 tCO₂eq); spostare rifiuti dal secco alla differenziata a parità di totale non genera crediti. È una stima ex ante, non certificabile; il modello va confermato dalla Fondazione.</a:t>
             </a:r>
             <a:endParaRPr lang="en-US" dirty="0"/>
           </a:p>
@@ -922,7 +924,7 @@
           <a:p>
             <a:r>
               <a:rPr lang="en-US" dirty="0"/>
-              <a:t>Oggi tutti i servizi sono sui piani gratuiti, che non vanno bene per l'esercizio (attenzione: le copie giornaliere di Supabase Pro non comprendono i file caricati, che si copiano a parte come spiegato nelle Istruzioni di ripristino): Vercel Hobby è solo per uso non commerciale, i progetti Supabase gratuiti non hanno backup e si sospendono dopo una settimana di inattività, Resend gratuito invia al massimo 100 email al giorno, e il repository GitHub è pubblico. Indispensabili (circa 74 dollari al mese): GitHub Team (4 dollari per utente) con un'organizzazione intestata alla Fondazione, repository privato e regole sul ramo main (revisione obbligatoria); Vercel Pro (20 dollari per utente, banda 1 TB, uso commerciale, controllo della spesa); Supabase Pro (25 dollari, comprende 10 dollari di calcolo Micro: backup giornalieri conservati 7 giorni, progetto mai sospeso, 8 GB di database, 100 GB di file, 100.000 utenti attivi al mese) più il passaggio al calcolo Small (15 dollari, 2 GB di memoria, differenza 5 dollari); Resend Pro (20 dollari, 50.000 email al mese, nessun limite giornaliero). Consigliati (circa 130 dollari in più): Point-in-Time Recovery di Supabase (100 dollari al mese, ripristino al minuto degli ultimi 7 giorni), ambiente di prova con branching Supabase (0,01344 dollari l'ora, circa 10 dollari al mese se sempre attivo), GitHub Secret Protection (19 dollari per committer attivo). Sentry Developer è gratuito (1 utente, 5.000 errori al mese). Il piano Supabase Team (599 dollari al mese, certificazioni SOC 2 e ISO 27001, backup 14 giorni) oggi non serve. A costo zero: verifica in due passaggi sugli account dei fornitori, chiavi solo nelle variabili d'ambiente, dominio operate.it per portale ed email (SPF, DKIM, DMARC).</a:t>
+              <a:t>Il simulatore stima anche la parte economica per il Comune o il gestore. Ricavi: crediti netti stimati per anno × valore del credito, digitato anno per anno (proposto 32 €). Costi: il simulatore chiede se usare il Caso 1 (progetto volontario) o il Caso 2 (progetto obbligatorio, per esempio da bando di gara di un Comune che ha inserito il CWP come metodo), con le tabelle «Costi per il Soggetto Promotore» di Fondazione Operate del 28/07/2026: sei voci (Progetto, Rapporto di Monitoraggio, registrazione del Progetto, dei crediti del Progetto, del Rapporto e dei crediti del Rapporto), costo per abitante per fascia di popolazione con interpolazione e arrotondamento per eccesso, minimo e massimo annuo, una tantum ammortizzati in 10 anni; validazione dell'ente esclusa. Esempio con i dati ISPRA 2021 di Bovisio-Masciago (16.735 abitanti), obiettivo 400 kg/ab e 50 kg/ab di secco al 2036, 32 € a credito. Con il metodo per utenza (solo utenze virtuose, secco e organico misurati, tariffa puntuale, variabilità tra utenze 30%, buffer 30%): 34.188 crediti netti in 10 anni (0,20 per abitante all'anno, nell'intervallo 0,19-0,23 dell'Allegato A EsaCom), ricavi 1.093.792 €; Caso 1 costi 162.330 € (9,70 € per abitante) e margine +931.463 €; Caso 2 costi 242.658 € e margine +851.135 €. Con il bilancio del Comune (il metodo più prudente): 6.707 crediti, ricavi 214.464 €, Caso 1 +52.134 € (rientro nel 2034), Caso 2 −28.193 €. La differenza viene soprattutto dal fatto che Bovisio ha già l'84% di differenziata: il secco delle utenze è molto sotto il riferimento al 65%. Il Caso 1 con 154.247 abitanti riproduce le cifre dei contratti tipo EsaCom. L'Allegato A indica 6,08 € per abitante di costo contro 5,36 delle tabelle: la differenza potrebbe essere l'ente di validazione e verifica. Stima indicativa, non un piano finanziario.</a:t>
             </a:r>
             <a:endParaRPr lang="en-US" dirty="0"/>
           </a:p>
@@ -1010,7 +1012,7 @@
           <a:p>
             <a:r>
               <a:rPr lang="en-US" dirty="0"/>
-              <a:t>Il 18 ottobre sera sono state prese e realizzate le scelte di allineamento ai documenti ufficiali: Rapporto a 7 fasi con feedback di 20 giorni (Guida 6.3.1), conservazione 12 anni (Guida 6.2.1 e 6.5.1), un solo account per Organizzazione con fino a 2 delegati (Guida 7.2), periodo di 10 anni o 7 rinnovabili (Standard 4.3.8), stati e ID della Guida, ritiro e rientro, un solo progetto per territorio, tariffe e sospensione fino al saldo, piattaforma pubblica, crediti emessi con registro esterno, reclami, qualità dei dati. Il ruolo di soggetto promotore del programma è definito: Wastelab ha conferito in esclusiva a Fondazione Operate la gestione commerciale e tecnologica (portale CWP). Restano aperte quelle in tabella. Lo Standard 4.14 chiede al promotore del progetto di conservare i documenti almeno 2 anni dopo la fine del progetto, i registri 5 anni dopo la vendita (Standard 6.3). Scelte prese prima (Registro, capitolo Decisioni): A (una nuova versione non fa ripartire il termine), B (errata corrige: ripartenza decisa caso per caso), D (commentatori esterni con email confermata, in attesa di SPID), durate modificabili dall'Admin, pagamenti visibili al Comune, chiusura manuale della pratica, documenti richiesti non bloccanti, audit leggibile dallo staff. Le scelte interpretative del calcolo sono sette (docs/crediti-cwp.md). Il 19 ottobre: più amministratori con uno principale protetto; qualificazione ACN valutata non necessaria (da confermare con un parere legale).</a:t>
+              <a:t>Oggi tutti i servizi sono sui piani gratuiti, che non vanno bene per l'esercizio (attenzione: le copie giornaliere di Supabase Pro non comprendono i file caricati, che si copiano a parte come spiegato nelle Istruzioni di ripristino): Vercel Hobby è solo per uso non commerciale, i progetti Supabase gratuiti non hanno backup e si sospendono dopo una settimana di inattività, Resend gratuito invia al massimo 100 email al giorno, e il repository GitHub è pubblico. Indispensabili (circa 74 dollari al mese): GitHub Team (4 dollari per utente) con un'organizzazione intestata alla Fondazione, repository privato e regole sul ramo main (revisione obbligatoria); Vercel Pro (20 dollari per utente, banda 1 TB, uso commerciale, controllo della spesa); Supabase Pro (25 dollari, comprende 10 dollari di calcolo Micro: backup giornalieri conservati 7 giorni, progetto mai sospeso, 8 GB di database, 100 GB di file, 100.000 utenti attivi al mese) più il passaggio al calcolo Small (15 dollari, 2 GB di memoria, differenza 5 dollari); Resend Pro (20 dollari, 50.000 email al mese, nessun limite giornaliero). Consigliati (circa 130 dollari in più): Point-in-Time Recovery di Supabase (100 dollari al mese, ripristino al minuto degli ultimi 7 giorni), ambiente di prova con branching Supabase (0,01344 dollari l'ora, circa 10 dollari al mese se sempre attivo), GitHub Secret Protection (19 dollari per committer attivo). Sentry Developer è gratuito (1 utente, 5.000 errori al mese). Il piano Supabase Team (599 dollari al mese, certificazioni SOC 2 e ISO 27001, backup 14 giorni) oggi non serve. A costo zero: verifica in due passaggi sugli account dei fornitori, chiavi solo nelle variabili d'ambiente, dominio operate.it per portale ed email (SPF, DKIM, DMARC).</a:t>
             </a:r>
             <a:endParaRPr lang="en-US" dirty="0"/>
           </a:p>
@@ -1034,6 +1036,94 @@
             <a:fld id="{F7021451-1387-4CA6-816F-3879F97B5CBC}" type="slidenum">
               <a:rPr lang="en-US"/>
               <a:t>14</a:t>
+            </a:fld>
+            <a:endParaRPr lang="en-US"/>
+          </a:p>
+        </p:txBody>
+      </p:sp>
+    </p:spTree>
+    <p:extLst>
+      <p:ext uri="{BB962C8B-B14F-4D97-AF65-F5344CB8AC3E}">
+        <p14:creationId xmlns:p14="http://schemas.microsoft.com/office/powerpoint/2010/main" val="1024086991"/>
+      </p:ext>
+    </p:extLst>
+  </p:cSld>
+  <p:clrMapOvr>
+    <a:masterClrMapping/>
+  </p:clrMapOvr>
+</p:notes>
+</file>
+
+<file path=ppt/notesSlides/notesSlide15.xml><?xml version="1.0" encoding="utf-8"?>
+<p:notes xmlns:a="http://schemas.openxmlformats.org/drawingml/2006/main" xmlns:r="http://schemas.openxmlformats.org/officeDocument/2006/relationships" xmlns:p="http://schemas.openxmlformats.org/presentationml/2006/main">
+  <p:cSld>
+    <p:spTree>
+      <p:nvGrpSpPr>
+        <p:cNvPr id="1" name=""/>
+        <p:cNvGrpSpPr/>
+        <p:nvPr/>
+      </p:nvGrpSpPr>
+      <p:grpSpPr>
+        <a:xfrm>
+          <a:off x="0" y="0"/>
+          <a:ext cx="0" cy="0"/>
+          <a:chOff x="0" y="0"/>
+          <a:chExt cx="0" cy="0"/>
+        </a:xfrm>
+      </p:grpSpPr>
+      <p:sp>
+        <p:nvSpPr>
+          <p:cNvPr id="2" name="Slide Image Placeholder 1"/>
+          <p:cNvSpPr>
+            <a:spLocks noGrp="1" noRot="1" noChangeAspect="1"/>
+          </p:cNvSpPr>
+          <p:nvPr>
+            <p:ph type="sldImg"/>
+          </p:nvPr>
+        </p:nvSpPr>
+        <p:spPr/>
+      </p:sp>
+      <p:sp>
+        <p:nvSpPr>
+          <p:cNvPr id="3" name="Notes Placeholder 2"/>
+          <p:cNvSpPr>
+            <a:spLocks noGrp="1"/>
+          </p:cNvSpPr>
+          <p:nvPr>
+            <p:ph type="body" idx="1"/>
+          </p:nvPr>
+        </p:nvSpPr>
+        <p:spPr/>
+        <p:txBody>
+          <a:bodyPr/>
+          <a:lstStyle/>
+          <a:p>
+            <a:r>
+              <a:rPr lang="en-US" dirty="0"/>
+              <a:t>Il 18 ottobre sera sono state prese e realizzate le scelte di allineamento ai documenti ufficiali: Rapporto a 7 fasi con feedback di 20 giorni (Guida 6.3.1), conservazione 12 anni (Guida 6.2.1 e 6.5.1), un solo account per Organizzazione con fino a 2 delegati (Guida 7.2), periodo di 10 anni o 7 rinnovabili (Standard 4.3.8), stati e ID della Guida, ritiro e rientro, un solo progetto per territorio, tariffe e sospensione fino al saldo, piattaforma pubblica, crediti emessi con registro esterno, reclami, qualità dei dati. Il ruolo di soggetto promotore del programma è definito: Wastelab ha conferito in esclusiva a Fondazione Operate la gestione commerciale e tecnologica (portale CWP). Restano aperte quelle in tabella. Lo Standard 4.14 chiede al promotore del progetto di conservare i documenti almeno 2 anni dopo la fine del progetto, i registri 5 anni dopo la vendita (Standard 6.3). Scelte prese prima (Registro, capitolo Decisioni): A (una nuova versione non fa ripartire il termine), B (errata corrige: ripartenza decisa caso per caso), D (commentatori esterni con email confermata, in attesa di SPID), durate modificabili dall'Admin, pagamenti visibili al Comune, chiusura manuale della pratica, documenti richiesti non bloccanti, audit leggibile dallo staff. Le scelte interpretative del calcolo sono sette (docs/crediti-cwp.md). Il 19 ottobre: più amministratori con uno principale protetto; qualificazione ACN valutata non necessaria (da confermare con un parere legale).</a:t>
+            </a:r>
+            <a:endParaRPr lang="en-US" dirty="0"/>
+          </a:p>
+        </p:txBody>
+      </p:sp>
+      <p:sp>
+        <p:nvSpPr>
+          <p:cNvPr id="4" name="Slide Number Placeholder 3"/>
+          <p:cNvSpPr>
+            <a:spLocks noGrp="1"/>
+          </p:cNvSpPr>
+          <p:nvPr>
+            <p:ph type="sldNum" sz="quarter" idx="10"/>
+          </p:nvPr>
+        </p:nvSpPr>
+        <p:spPr/>
+        <p:txBody>
+          <a:bodyPr/>
+          <a:lstStyle/>
+          <a:p>
+            <a:fld id="{F7021451-1387-4CA6-816F-3879F97B5CBC}" type="slidenum">
+              <a:rPr lang="en-US"/>
+              <a:t>15</a:t>
             </a:fld>
             <a:endParaRPr lang="en-US"/>
           </a:p>
@@ -1362,7 +1452,7 @@
           <a:p>
             <a:r>
               <a:rPr lang="en-US" dirty="0"/>
-              <a:t>Pagina «effetto sorpresa»: nessuno si aspetta che il portale sia già online. Il sistema è stato realizzato da Luca Moretti con l'ausilio di Claude Code ed è quasi terminato; i servizi sono già in produzione: GitHub (codice), Vercel (pubblicazione del portale), Supabase (database, utenti, documenti, funzioni) e Resend (email). Il portale è pubblicato su portale-cwp.vercel.app e funziona con dati di prova: si può aprire durante la presentazione (collegamento cliccabile) o inquadrare il codice QR con il telefono. La pagina pubblica /programma mostra già gli 8 documenti ufficiali del Programma, la Metodologia approvata, la PEC e il soggetto promotore. Lo sviluppo del portale vero è partito il 17 ottobre 2026: da allora sono state pubblicate 172 versioni, 42 script del database e 7 funzioni sul server. Restano i punti aperti delle prossime slide (servizi a pagamento, sicurezza, dati da inserire, collaudo con un Comune). Suggerimento: aprire il portale dal vivo con un utente di prova e mostrare la pagina pubblica.</a:t>
+              <a:t>Pagina «effetto sorpresa»: nessuno si aspetta che il portale sia già online. Il sistema è stato realizzato da Luca Moretti con l'ausilio di Claude Code ed è quasi terminato; i servizi sono già in produzione: GitHub (codice), Vercel (pubblicazione del portale), Supabase (database, utenti, documenti, funzioni) e Resend (email). Il portale è pubblicato su portale-cwp.vercel.app e funziona con dati di prova: si può aprire durante la presentazione (collegamento cliccabile) o inquadrare il codice QR con il telefono. La pagina pubblica /programma mostra già gli 8 documenti ufficiali del Programma, la Metodologia approvata, la PEC e il soggetto promotore. Lo sviluppo del portale vero è partito il 17 ottobre 2026: da allora sono state pubblicate 175 versioni, 42 script del database e 7 funzioni sul server. Restano i punti aperti delle prossime slide (servizi a pagamento, sicurezza, dati da inserire, collaudo con un Comune). Suggerimento: aprire il portale dal vivo con un utente di prova e mostrare la pagina pubblica.</a:t>
             </a:r>
             <a:endParaRPr lang="en-US" dirty="0"/>
           </a:p>
@@ -1714,7 +1804,7 @@
           <a:p>
             <a:r>
               <a:rPr lang="en-US" dirty="0"/>
-              <a:t>La parte funzionale dei requisiti del 15/09 è chiusa e dal 18/10 sera il portale segue anche i documenti ufficiali del Programma. Restano tre gruppi. 1) Requisiti tecnici e di sicurezza (sezioni 13-15 dei requisiti); il 19/10 sono stati fatti l'archivio di backup completo e le Istruzioni di ripristino, mancano le copie automatiche di database e file. 2) Avvio della piattaforma pubblica (Guida 3.7): la pagina /programma è attiva e pubblica già gli otto documenti ufficiali v1.2 (Guida, Definizioni, Normativa, Standard, Metodologia, Politica di reclamo, Schema tariffario, Gestione qualità dei dati) e la Metodologia approvata; la PEC del Programma per i reclami è operate@pec.it; vanno aggiunti gli enti di validazione e verifica e i registri riconosciuti e la modulistica quando disponibile. L'accesso con SPID, CIE o CNS (Guida 3.9) richiede l'adesione della Fondazione come fornitore di servizi (AgID o aggregatore accreditato): fino ad allora resta l'email confermata. 3) Qualità dei dati e completamenti: i controlli del documento Gestione della qualità dei dati sono nel calcolo (Tabella 3 dello Standard ±30% con motivazione obbligatoria, completezza, unicità, letture a buon fine, tempestività) e servono popolazione e cluster SOSE ufficiali di ogni Comune; poi privacy, accessibilità, collaudo con dati reali. L'assistente AI resta un supporto al back-office, come previsto dai requisiti (sezione 17). Da fare subito (19/10 sera). Azioni di Luca: ripubblicare le funzioni crea-utente e reimposta-password (email delle credenziali), rieseguire la funzione utente_mai_attivo dello script 30, verificare il dominio email su Resend, decidere se intestare alla Fondazione la fatturazione dell'assistente. Sviluppo: utenti online per l'amministratore principale, messaggi d'errore dell'assistente in italiano (proposta), stampa PDF del simulatore, sicurezza e piani a pagamento, collaudo con dati reali.</a:t>
+              <a:t>Novità del 22 e 23 ottobre 2026. Collaudo: i rilievi N01-N04 della terza sessione sono corretti e in produzione dal 22/10 alle 14:30 (script 39); N05 e N06 aspettano una regola della Fondazione. Smartphone: fino a 760 px l'intestazione è compatta con il pulsante Menu, Dashboard e Audit diventano schede, le pratiche si aprono una alla volta e l'assistente occupa lo schermo. Banca Dati Utenze per utenza (script 40, 22/10): ogni anno il Comune o il gestore compila il modello Excel con l'elenco completo delle utenze, domestiche e non domestiche, con kg e svuotamenti per frazione e categoria tariffaria; il portale propone la categoria di simulazione uguale alla tariffaria e la si può cambiare da un modulo per ogni utenza. Dal 23/10 (script 41) «Calcola» usa le utenze: la categoria di simulazione decide la classe della delibera e quindi i rifiuti attesi, i kg sono i rifiuti prodotti, le frazioni lasciate vuote non entrano nel calcolo di quell'utenza; utenze senza categoria o con categoria fuori delibera restano fuori e bloccano la conferma. Nomi e indirizzi sono visibili solo allo staff, con ogni consultazione nell'Audit; servono DPIA e accordo art. 28 con i Comuni prima dei dati reali. Dashboard (script 42, 23/10): valore complessivo dei crediti in simulazione (ultimo scenario per Comune, crediti ed euro del periodo) e in fase esecutiva (calcoli ex post confermati, lotti emessi, vendite), con prezzo di riferimento di 32 € modificabile in Impostazioni; gli utenti dei Comuni vedono gli stessi riquadri con i soli propri dati.</a:t>
             </a:r>
             <a:endParaRPr lang="en-US" dirty="0"/>
           </a:p>
@@ -2073,7 +2163,7 @@
                   <a:schemeClr val="accent6"/>
                 </a:solidFill>
               </a:rPr>
-              <a:t>Portale Carbon WastePrint · Stato dei lavori e recap · 23 ottobre 2026 · rev. 3.8</a:t>
+              <a:t>Portale Carbon WastePrint · Stato dei lavori e recap · 23 ottobre 2026 · rev. 3.9</a:t>
             </a:r>
             <a:endParaRPr lang="en-US" sz="1000" dirty="0"/>
           </a:p>
@@ -2571,7 +2661,7 @@
                   <a:schemeClr val="accent3"/>
                 </a:solidFill>
               </a:rPr>
-              <a:t>Stato dei lavori e recap: metodologia, funzioni, novità, punti aperti e scelte da prendere · aggiornata al 23 ottobre 2026 · rev. 3.8</a:t>
+              <a:t>Stato dei lavori e recap: metodologia, funzioni, novità, punti aperti e scelte da prendere · aggiornata al 23 ottobre 2026 · rev. 3.9</a:t>
             </a:r>
             <a:endParaRPr lang="en-US" sz="1800" dirty="0"/>
           </a:p>
@@ -2721,7 +2811,7 @@
                 <a:ea typeface="Cambria" pitchFamily="34" charset="-122"/>
                 <a:cs typeface="Cambria" pitchFamily="34" charset="-120"/>
               </a:rPr>
-              <a:t>Nuovi moduli: simulatore e assistente virtuale</a:t>
+              <a:t>Punti aperti: sviluppo e servizi da attivare</a:t>
             </a:r>
             <a:endParaRPr lang="en-US" sz="3000" dirty="0"/>
           </a:p>
@@ -2729,18 +2819,18 @@
       </p:sp>
       <p:sp>
         <p:nvSpPr>
-          <p:cNvPr id="3" name="Riquadro simulatore"/>
+          <p:cNvPr id="3" name="Colonna Sicurezza e infrastruttura"/>
           <p:cNvSpPr/>
           <p:nvPr/>
         </p:nvSpPr>
         <p:spPr>
           <a:xfrm>
-            <a:off x="548640" y="1234440"/>
-            <a:ext cx="7086600" cy="5029200"/>
+            <a:off x="548640" y="1325880"/>
+            <a:ext cx="3505200" cy="4846320"/>
           </a:xfrm>
           <a:prstGeom prst="roundRect">
             <a:avLst>
-              <a:gd name="adj" fmla="val 2182"/>
+              <a:gd name="adj" fmla="val 3130"/>
             </a:avLst>
           </a:prstGeom>
           <a:solidFill>
@@ -2756,13 +2846,237 @@
       </p:sp>
       <p:sp>
         <p:nvSpPr>
-          <p:cNvPr id="4" name="Simulatore cerchio"/>
+          <p:cNvPr id="4" name="Sicurezza e infrastruttura cerchio"/>
           <p:cNvSpPr/>
           <p:nvPr/>
         </p:nvSpPr>
         <p:spPr>
           <a:xfrm>
-            <a:off x="777240" y="1417320"/>
+            <a:off x="777240" y="1554480"/>
+            <a:ext cx="548640" cy="548640"/>
+          </a:xfrm>
+          <a:prstGeom prst="ellipse">
+            <a:avLst/>
+          </a:prstGeom>
+          <a:solidFill>
+            <a:schemeClr val="tx2"/>
+          </a:solidFill>
+          <a:ln w="12700">
+            <a:solidFill>
+              <a:schemeClr val="tx2"/>
+            </a:solidFill>
+            <a:prstDash val="solid"/>
+          </a:ln>
+        </p:spPr>
+      </p:sp>
+      <p:pic>
+        <p:nvPicPr>
+          <p:cNvPr id="5" name="Sicurezza e infrastruttura icona" descr="preencoded.png">    </p:cNvPr>
+          <p:cNvPicPr>
+            <a:picLocks noChangeAspect="1"/>
+          </p:cNvPicPr>
+          <p:nvPr/>
+        </p:nvPicPr>
+        <p:blipFill>
+          <a:blip r:embed="rId1"/>
+          <a:stretch>
+            <a:fillRect/>
+          </a:stretch>
+        </p:blipFill>
+        <p:spPr>
+          <a:xfrm>
+            <a:off x="914400" y="1691640"/>
+            <a:ext cx="274320" cy="274320"/>
+          </a:xfrm>
+          <a:prstGeom prst="rect">
+            <a:avLst/>
+          </a:prstGeom>
+        </p:spPr>
+      </p:pic>
+      <p:sp>
+        <p:nvSpPr>
+          <p:cNvPr id="6" name="Text 3"/>
+          <p:cNvSpPr txBox="1"/>
+          <p:nvPr/>
+        </p:nvSpPr>
+        <p:spPr>
+          <a:xfrm>
+            <a:off x="1463040" y="1508760"/>
+            <a:ext cx="2453640" cy="640080"/>
+          </a:xfrm>
+          <a:prstGeom prst="rect">
+            <a:avLst/>
+          </a:prstGeom>
+          <a:noFill/>
+          <a:ln/>
+        </p:spPr>
+        <p:txBody>
+          <a:bodyPr wrap="square" lIns="0" tIns="0" rIns="0" bIns="0" rtlCol="0" anchor="ctr"/>
+          <a:lstStyle/>
+          <a:p>
+            <a:pPr indent="0" marL="0">
+              <a:buNone/>
+            </a:pPr>
+            <a:r>
+              <a:rPr lang="en-US" sz="1700" b="1" dirty="0">
+                <a:solidFill>
+                  <a:schemeClr val="tx2"/>
+                </a:solidFill>
+              </a:rPr>
+              <a:t>Sicurezza e infrastruttura</a:t>
+            </a:r>
+            <a:endParaRPr lang="en-US" sz="1700" dirty="0"/>
+          </a:p>
+        </p:txBody>
+      </p:sp>
+      <p:sp>
+        <p:nvSpPr>
+          <p:cNvPr id="7" name="Text 4"/>
+          <p:cNvSpPr txBox="1"/>
+          <p:nvPr/>
+        </p:nvSpPr>
+        <p:spPr>
+          <a:xfrm>
+            <a:off x="822960" y="2286000"/>
+            <a:ext cx="3048000" cy="3749040"/>
+          </a:xfrm>
+          <a:prstGeom prst="rect">
+            <a:avLst/>
+          </a:prstGeom>
+          <a:noFill/>
+          <a:ln/>
+        </p:spPr>
+        <p:txBody>
+          <a:bodyPr wrap="square" lIns="0" tIns="0" rIns="0" bIns="0" rtlCol="0" anchor="t"/>
+          <a:lstStyle/>
+          <a:p>
+            <a:pPr marL="342900" indent="-342900">
+              <a:spcAft>
+                <a:spcPts val="700"/>
+              </a:spcAft>
+              <a:buSzPct val="100000"/>
+              <a:buChar char="•"/>
+            </a:pPr>
+            <a:r>
+              <a:rPr lang="en-US" sz="1350" dirty="0">
+                <a:solidFill>
+                  <a:schemeClr val="tx1"/>
+                </a:solidFill>
+              </a:rPr>
+              <a:t>Fatto il 20/10: registro degli accessi e avvisi di sicurezza, uscita per inattività, intestazioni del sito, librerie aggiornate (0 vulnerabilità)</a:t>
+            </a:r>
+            <a:endParaRPr lang="en-US" sz="1350" dirty="0"/>
+          </a:p>
+          <a:p>
+            <a:pPr marL="342900" indent="-342900">
+              <a:spcAft>
+                <a:spcPts val="700"/>
+              </a:spcAft>
+              <a:buSzPct val="100000"/>
+              <a:buChar char="•"/>
+            </a:pPr>
+            <a:r>
+              <a:rPr lang="en-US" sz="1350" dirty="0">
+                <a:solidFill>
+                  <a:schemeClr val="tx1"/>
+                </a:solidFill>
+              </a:rPr>
+              <a:t>Verifica in due passaggi per lo staff (pronta, spenta); CAPTCHA sulle pagine pubbliche</a:t>
+            </a:r>
+            <a:endParaRPr lang="en-US" sz="1350" dirty="0"/>
+          </a:p>
+          <a:p>
+            <a:pPr marL="342900" indent="-342900">
+              <a:spcAft>
+                <a:spcPts val="700"/>
+              </a:spcAft>
+              <a:buSzPct val="100000"/>
+              <a:buChar char="•"/>
+            </a:pPr>
+            <a:r>
+              <a:rPr lang="en-US" sz="1350" dirty="0">
+                <a:solidFill>
+                  <a:schemeClr val="tx1"/>
+                </a:solidFill>
+              </a:rPr>
+              <a:t>Antivirus sui file; verifica OWASP, test di intrusione a fine sviluppo</a:t>
+            </a:r>
+            <a:endParaRPr lang="en-US" sz="1350" dirty="0"/>
+          </a:p>
+          <a:p>
+            <a:pPr marL="342900" indent="-342900">
+              <a:spcAft>
+                <a:spcPts val="700"/>
+              </a:spcAft>
+              <a:buSzPct val="100000"/>
+              <a:buChar char="•"/>
+            </a:pPr>
+            <a:r>
+              <a:rPr lang="en-US" sz="1350" dirty="0">
+                <a:solidFill>
+                  <a:schemeClr val="tx1"/>
+                </a:solidFill>
+              </a:rPr>
+              <a:t>Backup automatico completo ogni giorno alle 20 dal Mac nella cartella Drive Cwp › backup (pronto, da installare sul Mac) e istruzioni di ripristino provate; da fare ambiente di prova e monitoraggio errori</a:t>
+            </a:r>
+            <a:endParaRPr lang="en-US" sz="1350" dirty="0"/>
+          </a:p>
+          <a:p>
+            <a:pPr marL="342900" indent="-342900">
+              <a:spcAft>
+                <a:spcPts val="700"/>
+              </a:spcAft>
+              <a:buSzPct val="100000"/>
+              <a:buChar char="•"/>
+            </a:pPr>
+            <a:r>
+              <a:rPr lang="en-US" sz="1350" dirty="0">
+                <a:solidFill>
+                  <a:schemeClr val="tx1"/>
+                </a:solidFill>
+              </a:rPr>
+              <a:t>Piani a pagamento e repository privato (slide «Piani a pagamento»); dominio email verificato, che serve anche alle email con le credenziali</a:t>
+            </a:r>
+            <a:endParaRPr lang="en-US" sz="1350" dirty="0"/>
+          </a:p>
+        </p:txBody>
+      </p:sp>
+      <p:sp>
+        <p:nvSpPr>
+          <p:cNvPr id="8" name="Colonna Avvio della piattaforma pubblica"/>
+          <p:cNvSpPr/>
+          <p:nvPr/>
+        </p:nvSpPr>
+        <p:spPr>
+          <a:xfrm>
+            <a:off x="4328160" y="1325880"/>
+            <a:ext cx="3505200" cy="4846320"/>
+          </a:xfrm>
+          <a:prstGeom prst="roundRect">
+            <a:avLst>
+              <a:gd name="adj" fmla="val 3130"/>
+            </a:avLst>
+          </a:prstGeom>
+          <a:solidFill>
+            <a:schemeClr val="bg2"/>
+          </a:solidFill>
+          <a:ln w="12700">
+            <a:solidFill>
+              <a:schemeClr val="bg2"/>
+            </a:solidFill>
+            <a:prstDash val="solid"/>
+          </a:ln>
+        </p:spPr>
+      </p:sp>
+      <p:sp>
+        <p:nvSpPr>
+          <p:cNvPr id="9" name="Avvio della piattaforma pubblica cerchio"/>
+          <p:cNvSpPr/>
+          <p:nvPr/>
+        </p:nvSpPr>
+        <p:spPr>
+          <a:xfrm>
+            <a:off x="4556760" y="1554480"/>
             <a:ext cx="548640" cy="548640"/>
           </a:xfrm>
           <a:prstGeom prst="ellipse">
@@ -2781,21 +3095,21 @@
       </p:sp>
       <p:pic>
         <p:nvPicPr>
-          <p:cNvPr id="5" name="Simulatore icona" descr="preencoded.png">    </p:cNvPr>
+          <p:cNvPr id="10" name="Avvio della piattaforma pubblica icona" descr="preencoded.png">    </p:cNvPr>
           <p:cNvPicPr>
             <a:picLocks noChangeAspect="1"/>
           </p:cNvPicPr>
           <p:nvPr/>
         </p:nvPicPr>
         <p:blipFill>
-          <a:blip r:embed="rId1"/>
+          <a:blip r:embed="rId2"/>
           <a:stretch>
             <a:fillRect/>
           </a:stretch>
         </p:blipFill>
         <p:spPr>
           <a:xfrm>
-            <a:off x="914400" y="1554480"/>
+            <a:off x="4693920" y="1691640"/>
             <a:ext cx="274320" cy="274320"/>
           </a:xfrm>
           <a:prstGeom prst="rect">
@@ -2805,14 +3119,14 @@
       </p:pic>
       <p:sp>
         <p:nvSpPr>
-          <p:cNvPr id="6" name="Text 3"/>
+          <p:cNvPr id="11" name="Text 7"/>
           <p:cNvSpPr txBox="1"/>
           <p:nvPr/>
         </p:nvSpPr>
         <p:spPr>
           <a:xfrm>
-            <a:off x="1463040" y="1371600"/>
-            <a:ext cx="3840480" cy="365760"/>
+            <a:off x="5242560" y="1508760"/>
+            <a:ext cx="2453640" cy="640080"/>
           </a:xfrm>
           <a:prstGeom prst="rect">
             <a:avLst/>
@@ -2828,27 +3142,27 @@
               <a:buNone/>
             </a:pPr>
             <a:r>
-              <a:rPr lang="en-US" sz="1800" b="1" dirty="0">
+              <a:rPr lang="en-US" sz="1700" b="1" dirty="0">
                 <a:solidFill>
                   <a:schemeClr val="tx2"/>
                 </a:solidFill>
               </a:rPr>
-              <a:t>Simulatore di scenari</a:t>
-            </a:r>
-            <a:endParaRPr lang="en-US" sz="1800" dirty="0"/>
-          </a:p>
-        </p:txBody>
-      </p:sp>
-      <p:sp>
-        <p:nvSpPr>
-          <p:cNvPr id="7" name="Text 4"/>
+              <a:t>Avvio della piattaforma pubblica</a:t>
+            </a:r>
+            <a:endParaRPr lang="en-US" sz="1700" dirty="0"/>
+          </a:p>
+        </p:txBody>
+      </p:sp>
+      <p:sp>
+        <p:nvSpPr>
+          <p:cNvPr id="12" name="Text 8"/>
           <p:cNvSpPr txBox="1"/>
           <p:nvPr/>
         </p:nvSpPr>
         <p:spPr>
           <a:xfrm>
-            <a:off x="1463040" y="1737360"/>
-            <a:ext cx="3931920" cy="457200"/>
+            <a:off x="4602480" y="2286000"/>
+            <a:ext cx="3048000" cy="3749040"/>
           </a:xfrm>
           <a:prstGeom prst="rect">
             <a:avLst/>
@@ -2857,46 +3171,122 @@
           <a:ln/>
         </p:spPr>
         <p:txBody>
-          <a:bodyPr wrap="square" lIns="0" tIns="0" rIns="0" bIns="0" rtlCol="0" anchor="ctr"/>
+          <a:bodyPr wrap="square" lIns="0" tIns="0" rIns="0" bIns="0" rtlCol="0" anchor="t"/>
           <a:lstStyle/>
           <a:p>
-            <a:pPr indent="0" marL="0">
-              <a:buNone/>
-            </a:pPr>
-            <a:r>
-              <a:rPr lang="en-US" sz="1200" dirty="0">
-                <a:solidFill>
-                  <a:schemeClr val="accent6"/>
-                </a:solidFill>
-              </a:rPr>
-              <a:t>Quanti crediti potrebbe generare un Comune? Una stima anno per anno, prima di aderire.</a:t>
-            </a:r>
-            <a:endParaRPr lang="en-US" sz="1200" dirty="0"/>
-          </a:p>
-        </p:txBody>
-      </p:sp>
-      <p:sp>
-        <p:nvSpPr>
-          <p:cNvPr id="8" name="Badge online"/>
+            <a:pPr marL="342900" indent="-342900">
+              <a:spcAft>
+                <a:spcPts val="700"/>
+              </a:spcAft>
+              <a:buSzPct val="100000"/>
+              <a:buChar char="•"/>
+            </a:pPr>
+            <a:r>
+              <a:rPr lang="en-US" sz="1350" dirty="0">
+                <a:solidFill>
+                  <a:schemeClr val="tx1"/>
+                </a:solidFill>
+              </a:rPr>
+              <a:t>Pagina /programma attiva con gli 8 documenti ufficiali v1.2 e la Metodologia approvata</a:t>
+            </a:r>
+            <a:endParaRPr lang="en-US" sz="1350" dirty="0"/>
+          </a:p>
+          <a:p>
+            <a:pPr marL="342900" indent="-342900">
+              <a:spcAft>
+                <a:spcPts val="700"/>
+              </a:spcAft>
+              <a:buSzPct val="100000"/>
+              <a:buChar char="•"/>
+            </a:pPr>
+            <a:r>
+              <a:rPr lang="en-US" sz="1350" dirty="0">
+                <a:solidFill>
+                  <a:schemeClr val="tx1"/>
+                </a:solidFill>
+              </a:rPr>
+              <a:t>PEC del Programma per i reclami: operate@pec.it</a:t>
+            </a:r>
+            <a:endParaRPr lang="en-US" sz="1350" dirty="0"/>
+          </a:p>
+          <a:p>
+            <a:pPr marL="342900" indent="-342900">
+              <a:spcAft>
+                <a:spcPts val="700"/>
+              </a:spcAft>
+              <a:buSzPct val="100000"/>
+              <a:buChar char="•"/>
+            </a:pPr>
+            <a:r>
+              <a:rPr lang="en-US" sz="1350" dirty="0">
+                <a:solidFill>
+                  <a:schemeClr val="tx1"/>
+                </a:solidFill>
+              </a:rPr>
+              <a:t>Da inserire: enti di validazione e verifica e registri riconosciuti, modulistica</a:t>
+            </a:r>
+            <a:endParaRPr lang="en-US" sz="1350" dirty="0"/>
+          </a:p>
+          <a:p>
+            <a:pPr marL="342900" indent="-342900">
+              <a:spcAft>
+                <a:spcPts val="700"/>
+              </a:spcAft>
+              <a:buSzPct val="100000"/>
+              <a:buChar char="•"/>
+            </a:pPr>
+            <a:r>
+              <a:rPr lang="en-US" sz="1350" dirty="0">
+                <a:solidFill>
+                  <a:schemeClr val="tx1"/>
+                </a:solidFill>
+              </a:rPr>
+              <a:t>Accesso con SPID, CIE o CNS al feedback pubblico (adesione come fornitore di servizi)</a:t>
+            </a:r>
+            <a:endParaRPr lang="en-US" sz="1350" dirty="0"/>
+          </a:p>
+          <a:p>
+            <a:pPr marL="342900" indent="-342900">
+              <a:spcAft>
+                <a:spcPts val="700"/>
+              </a:spcAft>
+              <a:buSzPct val="100000"/>
+              <a:buChar char="•"/>
+            </a:pPr>
+            <a:r>
+              <a:rPr lang="en-US" sz="1350" dirty="0">
+                <a:solidFill>
+                  <a:schemeClr val="tx1"/>
+                </a:solidFill>
+              </a:rPr>
+              <a:t>Collaudo in corso con 5 Amministratori: correzioni dei rapporti V01 e V05 in produzione il 20-21/10; rilievi N01-N06 (22/10) corretti e in produzione; restano le regole metodologiche da confermare</a:t>
+            </a:r>
+            <a:endParaRPr lang="en-US" sz="1350" dirty="0"/>
+          </a:p>
+        </p:txBody>
+      </p:sp>
+      <p:sp>
+        <p:nvSpPr>
+          <p:cNvPr id="13" name="Colonna Qualità dei dati e completamenti"/>
           <p:cNvSpPr/>
           <p:nvPr/>
         </p:nvSpPr>
         <p:spPr>
           <a:xfrm>
-            <a:off x="1463040" y="2212848"/>
-            <a:ext cx="2148840" cy="274320"/>
+            <a:off x="8107680" y="1325880"/>
+            <a:ext cx="3505200" cy="4846320"/>
           </a:xfrm>
           <a:prstGeom prst="roundRect">
             <a:avLst>
-              <a:gd name="adj" fmla="val 50000"/>
+              <a:gd name="adj" fmla="val 3130"/>
             </a:avLst>
           </a:prstGeom>
           <a:solidFill>
-            <a:schemeClr val="accent2"/>
+            <a:schemeClr val="bg2"/>
           </a:solidFill>
           <a:ln w="12700">
             <a:solidFill>
-              <a:schemeClr val="accent2"/>
+              <a:schemeClr val="bg2"/>
             </a:solidFill>
             <a:prstDash val="solid"/>
           </a:ln>
@@ -2904,185 +3294,14 @@
       </p:sp>
       <p:sp>
         <p:nvSpPr>
-          <p:cNvPr id="9" name="Text 6"/>
-          <p:cNvSpPr txBox="1"/>
-          <p:nvPr/>
-        </p:nvSpPr>
-        <p:spPr>
-          <a:xfrm>
-            <a:off x="1463040" y="2212848"/>
-            <a:ext cx="2148840" cy="274320"/>
-          </a:xfrm>
-          <a:prstGeom prst="rect">
-            <a:avLst/>
-          </a:prstGeom>
-          <a:noFill/>
-          <a:ln/>
-        </p:spPr>
-        <p:txBody>
-          <a:bodyPr wrap="square" lIns="0" tIns="0" rIns="0" bIns="0" rtlCol="0" anchor="ctr"/>
-          <a:lstStyle/>
-          <a:p>
-            <a:pPr algn="ctr" indent="0" marL="0">
-              <a:buNone/>
-            </a:pPr>
-            <a:r>
-              <a:rPr lang="en-US" sz="1000" b="1" spc="100" kern="0" dirty="0">
-                <a:solidFill>
-                  <a:schemeClr val="bg1"/>
-                </a:solidFill>
-              </a:rPr>
-              <a:t>PRIMA VERSIONE ONLINE</a:t>
-            </a:r>
-            <a:endParaRPr lang="en-US" sz="1000" dirty="0"/>
-          </a:p>
-        </p:txBody>
-      </p:sp>
-      <p:sp>
-        <p:nvSpPr>
-          <p:cNvPr id="10" name="Menu durata"/>
+          <p:cNvPr id="14" name="Qualità dei dati e completamenti cerchio"/>
           <p:cNvSpPr/>
           <p:nvPr/>
         </p:nvSpPr>
         <p:spPr>
           <a:xfrm>
-            <a:off x="5532120" y="1417320"/>
-            <a:ext cx="1920240" cy="384048"/>
-          </a:xfrm>
-          <a:prstGeom prst="roundRect">
-            <a:avLst>
-              <a:gd name="adj" fmla="val 14286"/>
-            </a:avLst>
-          </a:prstGeom>
-          <a:solidFill>
-            <a:schemeClr val="bg1"/>
-          </a:solidFill>
-          <a:ln w="15875">
-            <a:solidFill>
-              <a:srgbClr val="2F5D3A"/>
-            </a:solidFill>
-            <a:prstDash val="solid"/>
-          </a:ln>
-        </p:spPr>
-      </p:sp>
-      <p:sp>
-        <p:nvSpPr>
-          <p:cNvPr id="11" name="Text 8"/>
-          <p:cNvSpPr txBox="1"/>
-          <p:nvPr/>
-        </p:nvSpPr>
-        <p:spPr>
-          <a:xfrm>
-            <a:off x="5623560" y="1417320"/>
-            <a:ext cx="1783080" cy="384048"/>
-          </a:xfrm>
-          <a:prstGeom prst="rect">
-            <a:avLst/>
-          </a:prstGeom>
-          <a:noFill/>
-          <a:ln/>
-        </p:spPr>
-        <p:txBody>
-          <a:bodyPr wrap="square" lIns="0" tIns="0" rIns="0" bIns="0" rtlCol="0" anchor="ctr"/>
-          <a:lstStyle/>
-          <a:p>
-            <a:pPr indent="0" marL="0">
-              <a:buNone/>
-            </a:pPr>
-            <a:r>
-              <a:rPr lang="en-US" sz="1200" dirty="0">
-                <a:solidFill>
-                  <a:schemeClr val="accent6"/>
-                </a:solidFill>
-              </a:rPr>
-              <a:t>Durata: </a:t>
-            </a:r>
-            <a:pPr indent="0" marL="0">
-              <a:buNone/>
-            </a:pPr>
-            <a:r>
-              <a:rPr lang="en-US" sz="1200" b="1" dirty="0">
-                <a:solidFill>
-                  <a:schemeClr val="tx2"/>
-                </a:solidFill>
-              </a:rPr>
-              <a:t>10 anni  ▾</a:t>
-            </a:r>
-            <a:endParaRPr lang="en-US" sz="1200" dirty="0"/>
-          </a:p>
-        </p:txBody>
-      </p:sp>
-      <p:sp>
-        <p:nvSpPr>
-          <p:cNvPr id="12" name="Opzioni durata"/>
-          <p:cNvSpPr/>
-          <p:nvPr/>
-        </p:nvSpPr>
-        <p:spPr>
-          <a:xfrm>
-            <a:off x="5532120" y="1819656"/>
-            <a:ext cx="1920240" cy="603504"/>
-          </a:xfrm>
-          <a:prstGeom prst="rect">
-            <a:avLst/>
-          </a:prstGeom>
-          <a:solidFill>
-            <a:schemeClr val="bg1"/>
-          </a:solidFill>
-          <a:ln w="9525">
-            <a:solidFill>
-              <a:srgbClr val="D9D4C5"/>
-            </a:solidFill>
-            <a:prstDash val="solid"/>
-          </a:ln>
-        </p:spPr>
-      </p:sp>
-      <p:sp>
-        <p:nvSpPr>
-          <p:cNvPr id="13" name="Text 10"/>
-          <p:cNvSpPr txBox="1"/>
-          <p:nvPr/>
-        </p:nvSpPr>
-        <p:spPr>
-          <a:xfrm>
-            <a:off x="5532120" y="1819656"/>
-            <a:ext cx="1920240" cy="603504"/>
-          </a:xfrm>
-          <a:prstGeom prst="rect">
-            <a:avLst/>
-          </a:prstGeom>
-          <a:noFill/>
-          <a:ln/>
-        </p:spPr>
-        <p:txBody>
-          <a:bodyPr wrap="square" lIns="0" tIns="0" rIns="0" bIns="0" rtlCol="0" anchor="ctr"/>
-          <a:lstStyle/>
-          <a:p>
-            <a:pPr algn="ctr" indent="0" marL="0">
-              <a:buNone/>
-            </a:pPr>
-            <a:r>
-              <a:rPr lang="en-US" sz="1100" dirty="0">
-                <a:solidFill>
-                  <a:schemeClr val="tx1"/>
-                </a:solidFill>
-              </a:rPr>
-              <a:t>7 anni  ·  10 anni  ·  21 anni</a:t>
-            </a:r>
-            <a:endParaRPr lang="en-US" sz="1100" dirty="0"/>
-          </a:p>
-        </p:txBody>
-      </p:sp>
-      <p:sp>
-        <p:nvSpPr>
-          <p:cNvPr id="14" name="Passo 1"/>
-          <p:cNvSpPr/>
-          <p:nvPr/>
-        </p:nvSpPr>
-        <p:spPr>
-          <a:xfrm>
-            <a:off x="822960" y="2633472"/>
-            <a:ext cx="420624" cy="420624"/>
+            <a:off x="8336280" y="1554480"/>
+            <a:ext cx="548640" cy="548640"/>
           </a:xfrm>
           <a:prstGeom prst="ellipse">
             <a:avLst/>
@@ -3098,641 +3317,23 @@
           </a:ln>
         </p:spPr>
       </p:sp>
-      <p:sp>
-        <p:nvSpPr>
-          <p:cNvPr id="15" name="Text 12"/>
-          <p:cNvSpPr txBox="1"/>
-          <p:nvPr/>
-        </p:nvSpPr>
-        <p:spPr>
-          <a:xfrm>
-            <a:off x="822960" y="2633472"/>
-            <a:ext cx="420624" cy="420624"/>
-          </a:xfrm>
-          <a:prstGeom prst="rect">
-            <a:avLst/>
-          </a:prstGeom>
-          <a:noFill/>
-          <a:ln/>
-        </p:spPr>
-        <p:txBody>
-          <a:bodyPr wrap="square" lIns="0" tIns="0" rIns="0" bIns="0" rtlCol="0" anchor="ctr"/>
-          <a:lstStyle/>
-          <a:p>
-            <a:pPr algn="ctr" indent="0" marL="0">
-              <a:buNone/>
-            </a:pPr>
-            <a:r>
-              <a:rPr lang="en-US" sz="1400" b="1" dirty="0">
-                <a:solidFill>
-                  <a:schemeClr val="bg1"/>
-                </a:solidFill>
-              </a:rPr>
-              <a:t>1</a:t>
-            </a:r>
-            <a:endParaRPr lang="en-US" sz="1400" dirty="0"/>
-          </a:p>
-        </p:txBody>
-      </p:sp>
-      <p:sp>
-        <p:nvSpPr>
-          <p:cNvPr id="16" name="Text 13"/>
-          <p:cNvSpPr txBox="1"/>
-          <p:nvPr/>
-        </p:nvSpPr>
-        <p:spPr>
-          <a:xfrm>
-            <a:off x="1417320" y="2560320"/>
-            <a:ext cx="6035040" cy="603504"/>
-          </a:xfrm>
-          <a:prstGeom prst="rect">
-            <a:avLst/>
-          </a:prstGeom>
-          <a:noFill/>
-          <a:ln/>
-        </p:spPr>
-        <p:txBody>
-          <a:bodyPr wrap="square" lIns="0" tIns="0" rIns="0" bIns="0" rtlCol="0" anchor="ctr"/>
-          <a:lstStyle/>
-          <a:p>
-            <a:pPr indent="0" marL="0">
-              <a:buNone/>
-            </a:pPr>
-            <a:r>
-              <a:rPr lang="en-US" sz="1350" b="1" dirty="0">
-                <a:solidFill>
-                  <a:schemeClr val="tx2"/>
-                </a:solidFill>
-              </a:rPr>
-              <a:t>Scenari per Comune</a:t>
-            </a:r>
-            <a:endParaRPr lang="en-US" sz="1350" dirty="0"/>
-          </a:p>
-          <a:p>
-            <a:pPr indent="0" marL="0">
-              <a:buNone/>
-            </a:pPr>
-            <a:r>
-              <a:rPr lang="en-US" sz="1150" dirty="0">
-                <a:solidFill>
-                  <a:schemeClr val="tx1"/>
-                </a:solidFill>
-              </a:rPr>
-              <a:t>Più scenari per ogni Comune («prudente», «obiettivo»…), durata 7, 10 o 21 anni</a:t>
-            </a:r>
-            <a:endParaRPr lang="en-US" sz="1350" dirty="0"/>
-          </a:p>
-        </p:txBody>
-      </p:sp>
-      <p:sp>
-        <p:nvSpPr>
-          <p:cNvPr id="17" name="Passo 2"/>
-          <p:cNvSpPr/>
-          <p:nvPr/>
-        </p:nvSpPr>
-        <p:spPr>
-          <a:xfrm>
-            <a:off x="822960" y="3346704"/>
-            <a:ext cx="420624" cy="420624"/>
-          </a:xfrm>
-          <a:prstGeom prst="ellipse">
-            <a:avLst/>
-          </a:prstGeom>
-          <a:solidFill>
-            <a:schemeClr val="tx2"/>
-          </a:solidFill>
-          <a:ln w="12700">
-            <a:solidFill>
-              <a:schemeClr val="tx2"/>
-            </a:solidFill>
-            <a:prstDash val="solid"/>
-          </a:ln>
-        </p:spPr>
-      </p:sp>
-      <p:sp>
-        <p:nvSpPr>
-          <p:cNvPr id="18" name="Text 15"/>
-          <p:cNvSpPr txBox="1"/>
-          <p:nvPr/>
-        </p:nvSpPr>
-        <p:spPr>
-          <a:xfrm>
-            <a:off x="822960" y="3346704"/>
-            <a:ext cx="420624" cy="420624"/>
-          </a:xfrm>
-          <a:prstGeom prst="rect">
-            <a:avLst/>
-          </a:prstGeom>
-          <a:noFill/>
-          <a:ln/>
-        </p:spPr>
-        <p:txBody>
-          <a:bodyPr wrap="square" lIns="0" tIns="0" rIns="0" bIns="0" rtlCol="0" anchor="ctr"/>
-          <a:lstStyle/>
-          <a:p>
-            <a:pPr algn="ctr" indent="0" marL="0">
-              <a:buNone/>
-            </a:pPr>
-            <a:r>
-              <a:rPr lang="en-US" sz="1400" b="1" dirty="0">
-                <a:solidFill>
-                  <a:schemeClr val="bg1"/>
-                </a:solidFill>
-              </a:rPr>
-              <a:t>2</a:t>
-            </a:r>
-            <a:endParaRPr lang="en-US" sz="1400" dirty="0"/>
-          </a:p>
-        </p:txBody>
-      </p:sp>
-      <p:sp>
-        <p:nvSpPr>
-          <p:cNvPr id="19" name="Text 16"/>
-          <p:cNvSpPr txBox="1"/>
-          <p:nvPr/>
-        </p:nvSpPr>
-        <p:spPr>
-          <a:xfrm>
-            <a:off x="1417320" y="3273552"/>
-            <a:ext cx="6035040" cy="603504"/>
-          </a:xfrm>
-          <a:prstGeom prst="rect">
-            <a:avLst/>
-          </a:prstGeom>
-          <a:noFill/>
-          <a:ln/>
-        </p:spPr>
-        <p:txBody>
-          <a:bodyPr wrap="square" lIns="0" tIns="0" rIns="0" bIns="0" rtlCol="0" anchor="ctr"/>
-          <a:lstStyle/>
-          <a:p>
-            <a:pPr indent="0" marL="0">
-              <a:buNone/>
-            </a:pPr>
-            <a:r>
-              <a:rPr lang="en-US" sz="1350" b="1" dirty="0">
-                <a:solidFill>
-                  <a:schemeClr val="tx2"/>
-                </a:solidFill>
-              </a:rPr>
-              <a:t>Scenario di riferimento (Standard 4.8.1)</a:t>
-            </a:r>
-            <a:endParaRPr lang="en-US" sz="1350" dirty="0"/>
-          </a:p>
-          <a:p>
-            <a:pPr indent="0" marL="0">
-              <a:buNone/>
-            </a:pPr>
-            <a:r>
-              <a:rPr lang="en-US" sz="1150" dirty="0">
-                <a:solidFill>
-                  <a:schemeClr val="tx1"/>
-                </a:solidFill>
-              </a:rPr>
-              <a:t>Anno con il 65% di differenziata o valori medi del cluster SOSE; situazione attuale come partenza</a:t>
-            </a:r>
-            <a:endParaRPr lang="en-US" sz="1350" dirty="0"/>
-          </a:p>
-        </p:txBody>
-      </p:sp>
-      <p:sp>
-        <p:nvSpPr>
-          <p:cNvPr id="20" name="Passo 3"/>
-          <p:cNvSpPr/>
-          <p:nvPr/>
-        </p:nvSpPr>
-        <p:spPr>
-          <a:xfrm>
-            <a:off x="822960" y="4059936"/>
-            <a:ext cx="420624" cy="420624"/>
-          </a:xfrm>
-          <a:prstGeom prst="ellipse">
-            <a:avLst/>
-          </a:prstGeom>
-          <a:solidFill>
-            <a:schemeClr val="tx2"/>
-          </a:solidFill>
-          <a:ln w="12700">
-            <a:solidFill>
-              <a:schemeClr val="tx2"/>
-            </a:solidFill>
-            <a:prstDash val="solid"/>
-          </a:ln>
-        </p:spPr>
-      </p:sp>
-      <p:sp>
-        <p:nvSpPr>
-          <p:cNvPr id="21" name="Text 18"/>
-          <p:cNvSpPr txBox="1"/>
-          <p:nvPr/>
-        </p:nvSpPr>
-        <p:spPr>
-          <a:xfrm>
-            <a:off x="822960" y="4059936"/>
-            <a:ext cx="420624" cy="420624"/>
-          </a:xfrm>
-          <a:prstGeom prst="rect">
-            <a:avLst/>
-          </a:prstGeom>
-          <a:noFill/>
-          <a:ln/>
-        </p:spPr>
-        <p:txBody>
-          <a:bodyPr wrap="square" lIns="0" tIns="0" rIns="0" bIns="0" rtlCol="0" anchor="ctr"/>
-          <a:lstStyle/>
-          <a:p>
-            <a:pPr algn="ctr" indent="0" marL="0">
-              <a:buNone/>
-            </a:pPr>
-            <a:r>
-              <a:rPr lang="en-US" sz="1400" b="1" dirty="0">
-                <a:solidFill>
-                  <a:schemeClr val="bg1"/>
-                </a:solidFill>
-              </a:rPr>
-              <a:t>3</a:t>
-            </a:r>
-            <a:endParaRPr lang="en-US" sz="1400" dirty="0"/>
-          </a:p>
-        </p:txBody>
-      </p:sp>
-      <p:sp>
-        <p:nvSpPr>
-          <p:cNvPr id="22" name="Text 19"/>
-          <p:cNvSpPr txBox="1"/>
-          <p:nvPr/>
-        </p:nvSpPr>
-        <p:spPr>
-          <a:xfrm>
-            <a:off x="1417320" y="3986784"/>
-            <a:ext cx="6035040" cy="603504"/>
-          </a:xfrm>
-          <a:prstGeom prst="rect">
-            <a:avLst/>
-          </a:prstGeom>
-          <a:noFill/>
-          <a:ln/>
-        </p:spPr>
-        <p:txBody>
-          <a:bodyPr wrap="square" lIns="0" tIns="0" rIns="0" bIns="0" rtlCol="0" anchor="ctr"/>
-          <a:lstStyle/>
-          <a:p>
-            <a:pPr indent="0" marL="0">
-              <a:buNone/>
-            </a:pPr>
-            <a:r>
-              <a:rPr lang="en-US" sz="1350" b="1" dirty="0">
-                <a:solidFill>
-                  <a:schemeClr val="tx2"/>
-                </a:solidFill>
-              </a:rPr>
-              <a:t>Obiettivi anno per anno</a:t>
-            </a:r>
-            <a:endParaRPr lang="en-US" sz="1350" dirty="0"/>
-          </a:p>
-          <a:p>
-            <a:pPr indent="0" marL="0">
-              <a:buNone/>
-            </a:pPr>
-            <a:r>
-              <a:rPr lang="en-US" sz="1150" dirty="0">
-                <a:solidFill>
-                  <a:schemeClr val="tx1"/>
-                </a:solidFill>
-              </a:rPr>
-              <a:t>Produzione totale e pro capite prevista, secco residuo pro capite obiettivo</a:t>
-            </a:r>
-            <a:endParaRPr lang="en-US" sz="1350" dirty="0"/>
-          </a:p>
-        </p:txBody>
-      </p:sp>
-      <p:sp>
-        <p:nvSpPr>
-          <p:cNvPr id="23" name="Passo 4"/>
-          <p:cNvSpPr/>
-          <p:nvPr/>
-        </p:nvSpPr>
-        <p:spPr>
-          <a:xfrm>
-            <a:off x="822960" y="4773168"/>
-            <a:ext cx="420624" cy="420624"/>
-          </a:xfrm>
-          <a:prstGeom prst="ellipse">
-            <a:avLst/>
-          </a:prstGeom>
-          <a:solidFill>
-            <a:schemeClr val="tx2"/>
-          </a:solidFill>
-          <a:ln w="12700">
-            <a:solidFill>
-              <a:schemeClr val="tx2"/>
-            </a:solidFill>
-            <a:prstDash val="solid"/>
-          </a:ln>
-        </p:spPr>
-      </p:sp>
-      <p:sp>
-        <p:nvSpPr>
-          <p:cNvPr id="24" name="Text 21"/>
-          <p:cNvSpPr txBox="1"/>
-          <p:nvPr/>
-        </p:nvSpPr>
-        <p:spPr>
-          <a:xfrm>
-            <a:off x="822960" y="4773168"/>
-            <a:ext cx="420624" cy="420624"/>
-          </a:xfrm>
-          <a:prstGeom prst="rect">
-            <a:avLst/>
-          </a:prstGeom>
-          <a:noFill/>
-          <a:ln/>
-        </p:spPr>
-        <p:txBody>
-          <a:bodyPr wrap="square" lIns="0" tIns="0" rIns="0" bIns="0" rtlCol="0" anchor="ctr"/>
-          <a:lstStyle/>
-          <a:p>
-            <a:pPr algn="ctr" indent="0" marL="0">
-              <a:buNone/>
-            </a:pPr>
-            <a:r>
-              <a:rPr lang="en-US" sz="1400" b="1" dirty="0">
-                <a:solidFill>
-                  <a:schemeClr val="bg1"/>
-                </a:solidFill>
-              </a:rPr>
-              <a:t>4</a:t>
-            </a:r>
-            <a:endParaRPr lang="en-US" sz="1400" dirty="0"/>
-          </a:p>
-        </p:txBody>
-      </p:sp>
-      <p:sp>
-        <p:nvSpPr>
-          <p:cNvPr id="25" name="Text 22"/>
-          <p:cNvSpPr txBox="1"/>
-          <p:nvPr/>
-        </p:nvSpPr>
-        <p:spPr>
-          <a:xfrm>
-            <a:off x="1417320" y="4700016"/>
-            <a:ext cx="6035040" cy="603504"/>
-          </a:xfrm>
-          <a:prstGeom prst="rect">
-            <a:avLst/>
-          </a:prstGeom>
-          <a:noFill/>
-          <a:ln/>
-        </p:spPr>
-        <p:txBody>
-          <a:bodyPr wrap="square" lIns="0" tIns="0" rIns="0" bIns="0" rtlCol="0" anchor="ctr"/>
-          <a:lstStyle/>
-          <a:p>
-            <a:pPr indent="0" marL="0">
-              <a:buNone/>
-            </a:pPr>
-            <a:r>
-              <a:rPr lang="en-US" sz="1350" b="1" dirty="0">
-                <a:solidFill>
-                  <a:schemeClr val="tx2"/>
-                </a:solidFill>
-              </a:rPr>
-              <a:t>% di differenziata</a:t>
-            </a:r>
-            <a:endParaRPr lang="en-US" sz="1350" dirty="0"/>
-          </a:p>
-          <a:p>
-            <a:pPr indent="0" marL="0">
-              <a:buNone/>
-            </a:pPr>
-            <a:r>
-              <a:rPr lang="en-US" sz="1150" dirty="0">
-                <a:solidFill>
-                  <a:schemeClr val="tx1"/>
-                </a:solidFill>
-              </a:rPr>
-              <a:t>Ricalcolata ogni anno: (totale − secco) / totale</a:t>
-            </a:r>
-            <a:endParaRPr lang="en-US" sz="1350" dirty="0"/>
-          </a:p>
-        </p:txBody>
-      </p:sp>
-      <p:sp>
-        <p:nvSpPr>
-          <p:cNvPr id="26" name="Passo 5"/>
-          <p:cNvSpPr/>
-          <p:nvPr/>
-        </p:nvSpPr>
-        <p:spPr>
-          <a:xfrm>
-            <a:off x="822960" y="5486400"/>
-            <a:ext cx="420624" cy="420624"/>
-          </a:xfrm>
-          <a:prstGeom prst="ellipse">
-            <a:avLst/>
-          </a:prstGeom>
-          <a:solidFill>
-            <a:schemeClr val="accent2"/>
-          </a:solidFill>
-          <a:ln w="12700">
-            <a:solidFill>
-              <a:schemeClr val="accent2"/>
-            </a:solidFill>
-            <a:prstDash val="solid"/>
-          </a:ln>
-        </p:spPr>
-      </p:sp>
-      <p:sp>
-        <p:nvSpPr>
-          <p:cNvPr id="27" name="Text 24"/>
-          <p:cNvSpPr txBox="1"/>
-          <p:nvPr/>
-        </p:nvSpPr>
-        <p:spPr>
-          <a:xfrm>
-            <a:off x="822960" y="5486400"/>
-            <a:ext cx="420624" cy="420624"/>
-          </a:xfrm>
-          <a:prstGeom prst="rect">
-            <a:avLst/>
-          </a:prstGeom>
-          <a:noFill/>
-          <a:ln/>
-        </p:spPr>
-        <p:txBody>
-          <a:bodyPr wrap="square" lIns="0" tIns="0" rIns="0" bIns="0" rtlCol="0" anchor="ctr"/>
-          <a:lstStyle/>
-          <a:p>
-            <a:pPr algn="ctr" indent="0" marL="0">
-              <a:buNone/>
-            </a:pPr>
-            <a:r>
-              <a:rPr lang="en-US" sz="1400" b="1" dirty="0">
-                <a:solidFill>
-                  <a:schemeClr val="bg1"/>
-                </a:solidFill>
-              </a:rPr>
-              <a:t>5</a:t>
-            </a:r>
-            <a:endParaRPr lang="en-US" sz="1400" dirty="0"/>
-          </a:p>
-        </p:txBody>
-      </p:sp>
-      <p:sp>
-        <p:nvSpPr>
-          <p:cNvPr id="28" name="Text 25"/>
-          <p:cNvSpPr txBox="1"/>
-          <p:nvPr/>
-        </p:nvSpPr>
-        <p:spPr>
-          <a:xfrm>
-            <a:off x="1417320" y="5413248"/>
-            <a:ext cx="6035040" cy="603504"/>
-          </a:xfrm>
-          <a:prstGeom prst="rect">
-            <a:avLst/>
-          </a:prstGeom>
-          <a:noFill/>
-          <a:ln/>
-        </p:spPr>
-        <p:txBody>
-          <a:bodyPr wrap="square" lIns="0" tIns="0" rIns="0" bIns="0" rtlCol="0" anchor="ctr"/>
-          <a:lstStyle/>
-          <a:p>
-            <a:pPr indent="0" marL="0">
-              <a:buNone/>
-            </a:pPr>
-            <a:r>
-              <a:rPr lang="en-US" sz="1350" b="1" dirty="0">
-                <a:solidFill>
-                  <a:schemeClr val="tx2"/>
-                </a:solidFill>
-              </a:rPr>
-              <a:t>Crediti e conti economici</a:t>
-            </a:r>
-            <a:endParaRPr lang="en-US" sz="1350" dirty="0"/>
-          </a:p>
-          <a:p>
-            <a:pPr indent="0" marL="0">
-              <a:buNone/>
-            </a:pPr>
-            <a:r>
-              <a:rPr lang="en-US" sz="1150" dirty="0">
-                <a:solidFill>
-                  <a:schemeClr val="tx1"/>
-                </a:solidFill>
-              </a:rPr>
-              <a:t>Bilancio del Comune o per utenza (come l'Allegato A EsaCom); ricavi a 32 € anno per anno; costi Caso 1 o 2; margine</a:t>
-            </a:r>
-            <a:endParaRPr lang="en-US" sz="1350" dirty="0"/>
-          </a:p>
-        </p:txBody>
-      </p:sp>
-      <p:sp>
-        <p:nvSpPr>
-          <p:cNvPr id="29" name="Text 26"/>
-          <p:cNvSpPr txBox="1"/>
-          <p:nvPr/>
-        </p:nvSpPr>
-        <p:spPr>
-          <a:xfrm>
-            <a:off x="822960" y="6035040"/>
-            <a:ext cx="6675120" cy="228600"/>
-          </a:xfrm>
-          <a:prstGeom prst="rect">
-            <a:avLst/>
-          </a:prstGeom>
-          <a:noFill/>
-          <a:ln/>
-        </p:spPr>
-        <p:txBody>
-          <a:bodyPr wrap="square" lIns="0" tIns="0" rIns="0" bIns="0" rtlCol="0" anchor="ctr"/>
-          <a:lstStyle/>
-          <a:p>
-            <a:pPr indent="0" marL="0">
-              <a:buNone/>
-            </a:pPr>
-            <a:r>
-              <a:rPr lang="en-US" sz="1000" i="1" dirty="0">
-                <a:solidFill>
-                  <a:schemeClr val="accent6"/>
-                </a:solidFill>
-              </a:rPr>
-              <a:t>Stima ex ante a scopo di pianificazione: i crediti veri si calcolano ex post con la Banca Dati Utenze.</a:t>
-            </a:r>
-            <a:endParaRPr lang="en-US" sz="1000" dirty="0"/>
-          </a:p>
-        </p:txBody>
-      </p:sp>
-      <p:sp>
-        <p:nvSpPr>
-          <p:cNvPr id="30" name="Riquadro assistente"/>
-          <p:cNvSpPr/>
-          <p:nvPr/>
-        </p:nvSpPr>
-        <p:spPr>
-          <a:xfrm>
-            <a:off x="7863840" y="1234440"/>
-            <a:ext cx="3749040" cy="5029200"/>
-          </a:xfrm>
-          <a:prstGeom prst="roundRect">
-            <a:avLst>
-              <a:gd name="adj" fmla="val 2927"/>
-            </a:avLst>
-          </a:prstGeom>
-          <a:solidFill>
-            <a:schemeClr val="accent3"/>
-          </a:solidFill>
-          <a:ln w="12700">
-            <a:solidFill>
-              <a:schemeClr val="accent3"/>
-            </a:solidFill>
-            <a:prstDash val="solid"/>
-          </a:ln>
-        </p:spPr>
-      </p:sp>
-      <p:sp>
-        <p:nvSpPr>
-          <p:cNvPr id="31" name="Assistente cerchio"/>
-          <p:cNvSpPr/>
-          <p:nvPr/>
-        </p:nvSpPr>
-        <p:spPr>
-          <a:xfrm>
-            <a:off x="8092440" y="1417320"/>
-            <a:ext cx="548640" cy="548640"/>
-          </a:xfrm>
-          <a:prstGeom prst="ellipse">
-            <a:avLst/>
-          </a:prstGeom>
-          <a:solidFill>
-            <a:schemeClr val="tx2"/>
-          </a:solidFill>
-          <a:ln w="12700">
-            <a:solidFill>
-              <a:schemeClr val="tx2"/>
-            </a:solidFill>
-            <a:prstDash val="solid"/>
-          </a:ln>
-        </p:spPr>
-      </p:sp>
       <p:pic>
         <p:nvPicPr>
-          <p:cNvPr id="32" name="Assistente icona" descr="preencoded.png">    </p:cNvPr>
+          <p:cNvPr id="15" name="Qualità dei dati e completamenti icona" descr="preencoded.png">    </p:cNvPr>
           <p:cNvPicPr>
             <a:picLocks noChangeAspect="1"/>
           </p:cNvPicPr>
           <p:nvPr/>
         </p:nvPicPr>
         <p:blipFill>
-          <a:blip r:embed="rId2"/>
+          <a:blip r:embed="rId3"/>
           <a:stretch>
             <a:fillRect/>
           </a:stretch>
         </p:blipFill>
         <p:spPr>
           <a:xfrm>
-            <a:off x="8229600" y="1554480"/>
+            <a:off x="8473440" y="1691640"/>
             <a:ext cx="274320" cy="274320"/>
           </a:xfrm>
           <a:prstGeom prst="rect">
@@ -3742,14 +3343,14 @@
       </p:pic>
       <p:sp>
         <p:nvSpPr>
-          <p:cNvPr id="33" name="Text 29"/>
+          <p:cNvPr id="16" name="Text 11"/>
           <p:cNvSpPr txBox="1"/>
           <p:nvPr/>
         </p:nvSpPr>
         <p:spPr>
           <a:xfrm>
-            <a:off x="8778240" y="1371600"/>
-            <a:ext cx="2743200" cy="685800"/>
+            <a:off x="9022080" y="1508760"/>
+            <a:ext cx="2453640" cy="640080"/>
           </a:xfrm>
           <a:prstGeom prst="rect">
             <a:avLst/>
@@ -3765,54 +3366,27 @@
               <a:buNone/>
             </a:pPr>
             <a:r>
-              <a:rPr lang="en-US" sz="1800" b="1" dirty="0">
+              <a:rPr lang="en-US" sz="1700" b="1" dirty="0">
                 <a:solidFill>
                   <a:schemeClr val="tx2"/>
                 </a:solidFill>
               </a:rPr>
-              <a:t>Assistente virtuale Claude</a:t>
-            </a:r>
-            <a:endParaRPr lang="en-US" sz="1800" dirty="0"/>
-          </a:p>
-        </p:txBody>
-      </p:sp>
-      <p:sp>
-        <p:nvSpPr>
-          <p:cNvPr id="34" name="Badge attivo"/>
-          <p:cNvSpPr/>
-          <p:nvPr/>
-        </p:nvSpPr>
-        <p:spPr>
-          <a:xfrm>
-            <a:off x="8778240" y="2029968"/>
-            <a:ext cx="2194560" cy="256032"/>
-          </a:xfrm>
-          <a:prstGeom prst="roundRect">
-            <a:avLst>
-              <a:gd name="adj" fmla="val 50000"/>
-            </a:avLst>
-          </a:prstGeom>
-          <a:solidFill>
-            <a:schemeClr val="bg1"/>
-          </a:solidFill>
-          <a:ln w="9525">
-            <a:solidFill>
-              <a:schemeClr val="tx2"/>
-            </a:solidFill>
-            <a:prstDash val="solid"/>
-          </a:ln>
-        </p:spPr>
-      </p:sp>
-      <p:sp>
-        <p:nvSpPr>
-          <p:cNvPr id="35" name="Text 31"/>
+              <a:t>Qualità dei dati e completamenti</a:t>
+            </a:r>
+            <a:endParaRPr lang="en-US" sz="1700" dirty="0"/>
+          </a:p>
+        </p:txBody>
+      </p:sp>
+      <p:sp>
+        <p:nvSpPr>
+          <p:cNvPr id="17" name="Text 12"/>
           <p:cNvSpPr txBox="1"/>
           <p:nvPr/>
         </p:nvSpPr>
         <p:spPr>
           <a:xfrm>
-            <a:off x="8778240" y="2029968"/>
-            <a:ext cx="2194560" cy="256032"/>
+            <a:off x="8382000" y="2286000"/>
+            <a:ext cx="3048000" cy="3749040"/>
           </a:xfrm>
           <a:prstGeom prst="rect">
             <a:avLst/>
@@ -3821,179 +3395,97 @@
           <a:ln/>
         </p:spPr>
         <p:txBody>
-          <a:bodyPr wrap="square" lIns="0" tIns="0" rIns="0" bIns="0" rtlCol="0" anchor="ctr"/>
-          <a:lstStyle/>
-          <a:p>
-            <a:pPr algn="ctr" indent="0" marL="0">
-              <a:buNone/>
-            </a:pPr>
-            <a:r>
-              <a:rPr lang="en-US" sz="950" b="1" spc="100" kern="0" dirty="0">
-                <a:solidFill>
-                  <a:schemeClr val="tx2"/>
-                </a:solidFill>
-              </a:rPr>
-              <a:t>ATTIVO DAL 19/10</a:t>
-            </a:r>
-            <a:endParaRPr lang="en-US" sz="950" dirty="0"/>
-          </a:p>
-        </p:txBody>
-      </p:sp>
-      <p:sp>
-        <p:nvSpPr>
-          <p:cNvPr id="36" name="Text 32"/>
-          <p:cNvSpPr txBox="1"/>
-          <p:nvPr/>
-        </p:nvSpPr>
-        <p:spPr>
-          <a:xfrm>
-            <a:off x="8092440" y="2423160"/>
-            <a:ext cx="3337560" cy="3703320"/>
-          </a:xfrm>
-          <a:prstGeom prst="rect">
-            <a:avLst/>
-          </a:prstGeom>
-          <a:noFill/>
-          <a:ln/>
-        </p:spPr>
-        <p:txBody>
           <a:bodyPr wrap="square" lIns="0" tIns="0" rIns="0" bIns="0" rtlCol="0" anchor="t"/>
           <a:lstStyle/>
           <a:p>
-            <a:pPr indent="0" marL="0">
+            <a:pPr marL="342900" indent="-342900">
               <a:spcAft>
-                <a:spcPts val="600"/>
+                <a:spcPts val="700"/>
               </a:spcAft>
-              <a:buNone/>
-            </a:pPr>
-            <a:r>
-              <a:rPr lang="en-US" sz="1250" b="1" dirty="0">
-                <a:solidFill>
-                  <a:schemeClr val="tx2"/>
-                </a:solidFill>
-              </a:rPr>
-              <a:t>Per enti e Amministratori</a:t>
-            </a:r>
-            <a:endParaRPr lang="en-US" sz="1250" dirty="0"/>
-          </a:p>
-          <a:p>
-            <a:pPr indent="0" marL="0">
+              <a:buSzPct val="100000"/>
+              <a:buChar char="•"/>
+            </a:pPr>
+            <a:r>
+              <a:rPr lang="en-US" sz="1350" dirty="0">
+                <a:solidFill>
+                  <a:schemeClr val="tx1"/>
+                </a:solidFill>
+              </a:rPr>
+              <a:t>Dati ufficiali per i controlli: popolazione e cluster SOSE di ogni Comune</a:t>
+            </a:r>
+            <a:endParaRPr lang="en-US" sz="1350" dirty="0"/>
+          </a:p>
+          <a:p>
+            <a:pPr marL="342900" indent="-342900">
               <a:spcAft>
-                <a:spcPts val="600"/>
+                <a:spcPts val="700"/>
               </a:spcAft>
-              <a:buNone/>
-            </a:pPr>
-            <a:r>
-              <a:rPr lang="en-US" sz="1250" dirty="0">
+              <a:buSzPct val="100000"/>
+              <a:buChar char="•"/>
+            </a:pPr>
+            <a:r>
+              <a:rPr lang="en-US" sz="1350" dirty="0">
                 <a:solidFill>
                   <a:schemeClr val="tx1"/>
                 </a:solidFill>
               </a:rPr>
-              <a:t>pulsante «✦ Assistente»: come si fa un'operazione, fasi, costi; risponde dai manuali e dalle tariffe</a:t>
-            </a:r>
-            <a:endParaRPr lang="en-US" sz="1250" dirty="0"/>
-          </a:p>
-          <a:p>
-            <a:pPr indent="0" marL="0">
+              <a:t>Conferma delle scelte interpretative del calcolo con l'ente</a:t>
+            </a:r>
+            <a:endParaRPr lang="en-US" sz="1350" dirty="0"/>
+          </a:p>
+          <a:p>
+            <a:pPr marL="342900" indent="-342900">
               <a:spcAft>
-                <a:spcPts val="600"/>
+                <a:spcPts val="700"/>
               </a:spcAft>
-              <a:buNone/>
-            </a:pPr>
-            <a:r>
-              <a:rPr lang="en-US" sz="1250" b="1" dirty="0">
-                <a:solidFill>
-                  <a:schemeClr val="tx2"/>
-                </a:solidFill>
-              </a:rPr>
-              <a:t>Garanzie</a:t>
-            </a:r>
-            <a:endParaRPr lang="en-US" sz="1250" dirty="0"/>
-          </a:p>
-          <a:p>
-            <a:pPr indent="0" marL="0">
+              <a:buSzPct val="100000"/>
+              <a:buChar char="•"/>
+            </a:pPr>
+            <a:r>
+              <a:rPr lang="en-US" sz="1350" dirty="0">
+                <a:solidFill>
+                  <a:schemeClr val="tx1"/>
+                </a:solidFill>
+              </a:rPr>
+              <a:t>Privacy: DPIA, registro dei trattamenti; accessibilità WCAG 2.1 AA</a:t>
+            </a:r>
+            <a:endParaRPr lang="en-US" sz="1350" dirty="0"/>
+          </a:p>
+          <a:p>
+            <a:pPr marL="342900" indent="-342900">
               <a:spcAft>
-                <a:spcPts val="600"/>
+                <a:spcPts val="700"/>
               </a:spcAft>
-              <a:buNone/>
-            </a:pPr>
-            <a:r>
-              <a:rPr lang="en-US" sz="1250" dirty="0">
+              <a:buSzPct val="100000"/>
+              <a:buChar char="•"/>
+            </a:pPr>
+            <a:r>
+              <a:rPr lang="en-US" sz="1350" dirty="0">
                 <a:solidFill>
                   <a:schemeClr val="tx1"/>
                 </a:solidFill>
               </a:rPr>
-              <a:t>non vede le pratiche e non decide; nessun testo salvato; limite di domande al giorno</a:t>
-            </a:r>
-            <a:endParaRPr lang="en-US" sz="1250" dirty="0"/>
-          </a:p>
-          <a:p>
-            <a:pPr indent="0" marL="0">
+              <a:t>Collaudo con i dati reali di un Comune</a:t>
+            </a:r>
+            <a:endParaRPr lang="en-US" sz="1350" dirty="0"/>
+          </a:p>
+          <a:p>
+            <a:pPr marL="342900" indent="-342900">
               <a:spcAft>
-                <a:spcPts val="600"/>
+                <a:spcPts val="700"/>
               </a:spcAft>
-              <a:buNone/>
-            </a:pPr>
-            <a:r>
-              <a:rPr lang="en-US" sz="1250" b="1" dirty="0">
-                <a:solidFill>
-                  <a:schemeClr val="tx2"/>
-                </a:solidFill>
-              </a:rPr>
-              <a:t>Come funziona</a:t>
-            </a:r>
-            <a:endParaRPr lang="en-US" sz="1250" dirty="0"/>
-          </a:p>
-          <a:p>
-            <a:pPr indent="0" marL="0">
-              <a:spcAft>
-                <a:spcPts val="600"/>
-              </a:spcAft>
-              <a:buNone/>
-            </a:pPr>
-            <a:r>
-              <a:rPr lang="en-US" sz="1250" dirty="0">
+              <a:buSzPct val="100000"/>
+              <a:buChar char="•"/>
+            </a:pPr>
+            <a:r>
+              <a:rPr lang="en-US" sz="1350" dirty="0">
                 <a:solidFill>
                   <a:schemeClr val="tx1"/>
                 </a:solidFill>
               </a:rPr>
-              <a:t>Claude Haiku 5.5 tramite una funzione sul server; la chiave resta in Supabase; meno di un centesimo a domanda</a:t>
-            </a:r>
-            <a:endParaRPr lang="en-US" sz="1250" dirty="0"/>
-          </a:p>
-          <a:p>
-            <a:pPr indent="0" marL="0">
-              <a:spcAft>
-                <a:spcPts val="600"/>
-              </a:spcAft>
-              <a:buNone/>
-            </a:pPr>
-            <a:r>
-              <a:rPr lang="en-US" sz="1250" b="1" dirty="0">
-                <a:solidFill>
-                  <a:schemeClr val="tx2"/>
-                </a:solidFill>
-              </a:rPr>
-              <a:t>Prossimi passi</a:t>
-            </a:r>
-            <a:endParaRPr lang="en-US" sz="1250" dirty="0"/>
-          </a:p>
-          <a:p>
-            <a:pPr indent="0" marL="0">
-              <a:spcAft>
-                <a:spcPts val="600"/>
-              </a:spcAft>
-              <a:buNone/>
-            </a:pPr>
-            <a:r>
-              <a:rPr lang="en-US" sz="1250" dirty="0">
-                <a:solidFill>
-                  <a:schemeClr val="tx1"/>
-                </a:solidFill>
-              </a:rPr>
-              <a:t>estensione agli Operatori e aiuto sulla singola pratica, con regole sulla privacy</a:t>
-            </a:r>
-            <a:endParaRPr lang="en-US" sz="1250" dirty="0"/>
+              <a:t>Nuovi moduli: simulatore con PDF ed Excel, assistente virtuale (poi Operatori e aiuto sulla pratica), Audit User e utenti online (fatti il 20/10); navigazione da smartphone (22/10); Banca Dati Utenze per utenza nel calcolo (22-23/10); valore dei crediti in Dashboard (23/10); Marketplaces da definire</a:t>
+            </a:r>
+            <a:endParaRPr lang="en-US" sz="1350" dirty="0"/>
           </a:p>
         </p:txBody>
       </p:sp>
@@ -4102,7 +3594,7 @@
                 <a:ea typeface="Cambria" pitchFamily="34" charset="-122"/>
                 <a:cs typeface="Cambria" pitchFamily="34" charset="-120"/>
               </a:rPr>
-              <a:t>Il simulatore in pratica</a:t>
+              <a:t>Nuovi moduli: simulatore e assistente virtuale</a:t>
             </a:r>
             <a:endParaRPr lang="en-US" sz="3000" dirty="0"/>
           </a:p>
@@ -4110,54 +3602,59 @@
       </p:sp>
       <p:sp>
         <p:nvSpPr>
-          <p:cNvPr id="3" name="Text 1"/>
-          <p:cNvSpPr txBox="1"/>
-          <p:nvPr/>
-        </p:nvSpPr>
-        <p:spPr>
-          <a:xfrm>
-            <a:off x="548640" y="1097280"/>
-            <a:ext cx="11064240" cy="365760"/>
-          </a:xfrm>
-          <a:prstGeom prst="rect">
-            <a:avLst/>
-          </a:prstGeom>
-          <a:noFill/>
-          <a:ln/>
-        </p:spPr>
-        <p:txBody>
-          <a:bodyPr wrap="square" lIns="0" tIns="0" rIns="0" bIns="0" rtlCol="0" anchor="ctr"/>
-          <a:lstStyle/>
-          <a:p>
-            <a:pPr indent="0" marL="0">
-              <a:buNone/>
-            </a:pPr>
-            <a:r>
-              <a:rPr lang="en-US" sz="1300" b="1" dirty="0">
-                <a:solidFill>
-                  <a:schemeClr val="tx2"/>
-                </a:solidFill>
-              </a:rPr>
-              <a:t>Portale → menu Simulatore. </a:t>
-            </a:r>
-            <a:pPr indent="0" marL="0">
-              <a:buNone/>
-            </a:pPr>
-            <a:r>
-              <a:rPr lang="en-US" sz="1300" dirty="0">
-                <a:solidFill>
-                  <a:schemeClr val="accent6"/>
-                </a:solidFill>
-              </a:rPr>
-              <a:t>Esempio con dati di prova: Comune di 12.500 abitanti (cluster 4), oggi 430 kg/ab e 90 kg/ab di secco, obiettivo 2036: 380 e 50 kg/ab.</a:t>
-            </a:r>
-            <a:endParaRPr lang="en-US" sz="1300" dirty="0"/>
-          </a:p>
-        </p:txBody>
+          <p:cNvPr id="3" name="Riquadro simulatore"/>
+          <p:cNvSpPr/>
+          <p:nvPr/>
+        </p:nvSpPr>
+        <p:spPr>
+          <a:xfrm>
+            <a:off x="548640" y="1234440"/>
+            <a:ext cx="7086600" cy="5029200"/>
+          </a:xfrm>
+          <a:prstGeom prst="roundRect">
+            <a:avLst>
+              <a:gd name="adj" fmla="val 2182"/>
+            </a:avLst>
+          </a:prstGeom>
+          <a:solidFill>
+            <a:schemeClr val="bg2"/>
+          </a:solidFill>
+          <a:ln w="12700">
+            <a:solidFill>
+              <a:schemeClr val="bg2"/>
+            </a:solidFill>
+            <a:prstDash val="solid"/>
+          </a:ln>
+        </p:spPr>
+      </p:sp>
+      <p:sp>
+        <p:nvSpPr>
+          <p:cNvPr id="4" name="Simulatore cerchio"/>
+          <p:cNvSpPr/>
+          <p:nvPr/>
+        </p:nvSpPr>
+        <p:spPr>
+          <a:xfrm>
+            <a:off x="777240" y="1417320"/>
+            <a:ext cx="548640" cy="548640"/>
+          </a:xfrm>
+          <a:prstGeom prst="ellipse">
+            <a:avLst/>
+          </a:prstGeom>
+          <a:solidFill>
+            <a:schemeClr val="accent2"/>
+          </a:solidFill>
+          <a:ln w="12700">
+            <a:solidFill>
+              <a:schemeClr val="accent2"/>
+            </a:solidFill>
+            <a:prstDash val="solid"/>
+          </a:ln>
+        </p:spPr>
       </p:sp>
       <p:pic>
         <p:nvPicPr>
-          <p:cNvPr id="4" name="Schermata simulatore" descr="Risultati del simulatore: crediti netti per anno e raccolta differenziata">    </p:cNvPr>
+          <p:cNvPr id="5" name="Simulatore icona" descr="preencoded.png">    </p:cNvPr>
           <p:cNvPicPr>
             <a:picLocks noChangeAspect="1"/>
           </p:cNvPicPr>
@@ -4171,8 +3668,8 @@
         </p:blipFill>
         <p:spPr>
           <a:xfrm>
-            <a:off x="548640" y="1572768"/>
-            <a:ext cx="11064240" cy="3955466"/>
+            <a:off x="914400" y="1554480"/>
+            <a:ext cx="274320" cy="274320"/>
           </a:xfrm>
           <a:prstGeom prst="rect">
             <a:avLst/>
@@ -4181,18 +3678,879 @@
       </p:pic>
       <p:sp>
         <p:nvSpPr>
-          <p:cNvPr id="5" name="Passo simulatore 1"/>
+          <p:cNvPr id="6" name="Text 3"/>
+          <p:cNvSpPr txBox="1"/>
+          <p:nvPr/>
+        </p:nvSpPr>
+        <p:spPr>
+          <a:xfrm>
+            <a:off x="1463040" y="1371600"/>
+            <a:ext cx="3840480" cy="365760"/>
+          </a:xfrm>
+          <a:prstGeom prst="rect">
+            <a:avLst/>
+          </a:prstGeom>
+          <a:noFill/>
+          <a:ln/>
+        </p:spPr>
+        <p:txBody>
+          <a:bodyPr wrap="square" lIns="0" tIns="0" rIns="0" bIns="0" rtlCol="0" anchor="ctr"/>
+          <a:lstStyle/>
+          <a:p>
+            <a:pPr indent="0" marL="0">
+              <a:buNone/>
+            </a:pPr>
+            <a:r>
+              <a:rPr lang="en-US" sz="1800" b="1" dirty="0">
+                <a:solidFill>
+                  <a:schemeClr val="tx2"/>
+                </a:solidFill>
+              </a:rPr>
+              <a:t>Simulatore di scenari</a:t>
+            </a:r>
+            <a:endParaRPr lang="en-US" sz="1800" dirty="0"/>
+          </a:p>
+        </p:txBody>
+      </p:sp>
+      <p:sp>
+        <p:nvSpPr>
+          <p:cNvPr id="7" name="Text 4"/>
+          <p:cNvSpPr txBox="1"/>
+          <p:nvPr/>
+        </p:nvSpPr>
+        <p:spPr>
+          <a:xfrm>
+            <a:off x="1463040" y="1737360"/>
+            <a:ext cx="3931920" cy="457200"/>
+          </a:xfrm>
+          <a:prstGeom prst="rect">
+            <a:avLst/>
+          </a:prstGeom>
+          <a:noFill/>
+          <a:ln/>
+        </p:spPr>
+        <p:txBody>
+          <a:bodyPr wrap="square" lIns="0" tIns="0" rIns="0" bIns="0" rtlCol="0" anchor="ctr"/>
+          <a:lstStyle/>
+          <a:p>
+            <a:pPr indent="0" marL="0">
+              <a:buNone/>
+            </a:pPr>
+            <a:r>
+              <a:rPr lang="en-US" sz="1200" dirty="0">
+                <a:solidFill>
+                  <a:schemeClr val="accent6"/>
+                </a:solidFill>
+              </a:rPr>
+              <a:t>Quanti crediti potrebbe generare un Comune? Una stima anno per anno, prima di aderire.</a:t>
+            </a:r>
+            <a:endParaRPr lang="en-US" sz="1200" dirty="0"/>
+          </a:p>
+        </p:txBody>
+      </p:sp>
+      <p:sp>
+        <p:nvSpPr>
+          <p:cNvPr id="8" name="Badge online"/>
           <p:cNvSpPr/>
           <p:nvPr/>
         </p:nvSpPr>
         <p:spPr>
           <a:xfrm>
-            <a:off x="548640" y="5669280"/>
-            <a:ext cx="2103120" cy="566928"/>
+            <a:off x="1463040" y="2212848"/>
+            <a:ext cx="2148840" cy="274320"/>
           </a:xfrm>
           <a:prstGeom prst="roundRect">
             <a:avLst>
-              <a:gd name="adj" fmla="val 19355"/>
+              <a:gd name="adj" fmla="val 50000"/>
+            </a:avLst>
+          </a:prstGeom>
+          <a:solidFill>
+            <a:schemeClr val="accent2"/>
+          </a:solidFill>
+          <a:ln w="12700">
+            <a:solidFill>
+              <a:schemeClr val="accent2"/>
+            </a:solidFill>
+            <a:prstDash val="solid"/>
+          </a:ln>
+        </p:spPr>
+      </p:sp>
+      <p:sp>
+        <p:nvSpPr>
+          <p:cNvPr id="9" name="Text 6"/>
+          <p:cNvSpPr txBox="1"/>
+          <p:nvPr/>
+        </p:nvSpPr>
+        <p:spPr>
+          <a:xfrm>
+            <a:off x="1463040" y="2212848"/>
+            <a:ext cx="2148840" cy="274320"/>
+          </a:xfrm>
+          <a:prstGeom prst="rect">
+            <a:avLst/>
+          </a:prstGeom>
+          <a:noFill/>
+          <a:ln/>
+        </p:spPr>
+        <p:txBody>
+          <a:bodyPr wrap="square" lIns="0" tIns="0" rIns="0" bIns="0" rtlCol="0" anchor="ctr"/>
+          <a:lstStyle/>
+          <a:p>
+            <a:pPr algn="ctr" indent="0" marL="0">
+              <a:buNone/>
+            </a:pPr>
+            <a:r>
+              <a:rPr lang="en-US" sz="1000" b="1" spc="100" kern="0" dirty="0">
+                <a:solidFill>
+                  <a:schemeClr val="bg1"/>
+                </a:solidFill>
+              </a:rPr>
+              <a:t>PRIMA VERSIONE ONLINE</a:t>
+            </a:r>
+            <a:endParaRPr lang="en-US" sz="1000" dirty="0"/>
+          </a:p>
+        </p:txBody>
+      </p:sp>
+      <p:sp>
+        <p:nvSpPr>
+          <p:cNvPr id="10" name="Menu durata"/>
+          <p:cNvSpPr/>
+          <p:nvPr/>
+        </p:nvSpPr>
+        <p:spPr>
+          <a:xfrm>
+            <a:off x="5532120" y="1417320"/>
+            <a:ext cx="1920240" cy="384048"/>
+          </a:xfrm>
+          <a:prstGeom prst="roundRect">
+            <a:avLst>
+              <a:gd name="adj" fmla="val 14286"/>
+            </a:avLst>
+          </a:prstGeom>
+          <a:solidFill>
+            <a:schemeClr val="bg1"/>
+          </a:solidFill>
+          <a:ln w="15875">
+            <a:solidFill>
+              <a:srgbClr val="2F5D3A"/>
+            </a:solidFill>
+            <a:prstDash val="solid"/>
+          </a:ln>
+        </p:spPr>
+      </p:sp>
+      <p:sp>
+        <p:nvSpPr>
+          <p:cNvPr id="11" name="Text 8"/>
+          <p:cNvSpPr txBox="1"/>
+          <p:nvPr/>
+        </p:nvSpPr>
+        <p:spPr>
+          <a:xfrm>
+            <a:off x="5623560" y="1417320"/>
+            <a:ext cx="1783080" cy="384048"/>
+          </a:xfrm>
+          <a:prstGeom prst="rect">
+            <a:avLst/>
+          </a:prstGeom>
+          <a:noFill/>
+          <a:ln/>
+        </p:spPr>
+        <p:txBody>
+          <a:bodyPr wrap="square" lIns="0" tIns="0" rIns="0" bIns="0" rtlCol="0" anchor="ctr"/>
+          <a:lstStyle/>
+          <a:p>
+            <a:pPr indent="0" marL="0">
+              <a:buNone/>
+            </a:pPr>
+            <a:r>
+              <a:rPr lang="en-US" sz="1200" dirty="0">
+                <a:solidFill>
+                  <a:schemeClr val="accent6"/>
+                </a:solidFill>
+              </a:rPr>
+              <a:t>Durata: </a:t>
+            </a:r>
+            <a:pPr indent="0" marL="0">
+              <a:buNone/>
+            </a:pPr>
+            <a:r>
+              <a:rPr lang="en-US" sz="1200" b="1" dirty="0">
+                <a:solidFill>
+                  <a:schemeClr val="tx2"/>
+                </a:solidFill>
+              </a:rPr>
+              <a:t>10 anni  ▾</a:t>
+            </a:r>
+            <a:endParaRPr lang="en-US" sz="1200" dirty="0"/>
+          </a:p>
+        </p:txBody>
+      </p:sp>
+      <p:sp>
+        <p:nvSpPr>
+          <p:cNvPr id="12" name="Opzioni durata"/>
+          <p:cNvSpPr/>
+          <p:nvPr/>
+        </p:nvSpPr>
+        <p:spPr>
+          <a:xfrm>
+            <a:off x="5532120" y="1819656"/>
+            <a:ext cx="1920240" cy="603504"/>
+          </a:xfrm>
+          <a:prstGeom prst="rect">
+            <a:avLst/>
+          </a:prstGeom>
+          <a:solidFill>
+            <a:schemeClr val="bg1"/>
+          </a:solidFill>
+          <a:ln w="9525">
+            <a:solidFill>
+              <a:srgbClr val="D9D4C5"/>
+            </a:solidFill>
+            <a:prstDash val="solid"/>
+          </a:ln>
+        </p:spPr>
+      </p:sp>
+      <p:sp>
+        <p:nvSpPr>
+          <p:cNvPr id="13" name="Text 10"/>
+          <p:cNvSpPr txBox="1"/>
+          <p:nvPr/>
+        </p:nvSpPr>
+        <p:spPr>
+          <a:xfrm>
+            <a:off x="5532120" y="1819656"/>
+            <a:ext cx="1920240" cy="603504"/>
+          </a:xfrm>
+          <a:prstGeom prst="rect">
+            <a:avLst/>
+          </a:prstGeom>
+          <a:noFill/>
+          <a:ln/>
+        </p:spPr>
+        <p:txBody>
+          <a:bodyPr wrap="square" lIns="0" tIns="0" rIns="0" bIns="0" rtlCol="0" anchor="ctr"/>
+          <a:lstStyle/>
+          <a:p>
+            <a:pPr algn="ctr" indent="0" marL="0">
+              <a:buNone/>
+            </a:pPr>
+            <a:r>
+              <a:rPr lang="en-US" sz="1100" dirty="0">
+                <a:solidFill>
+                  <a:schemeClr val="tx1"/>
+                </a:solidFill>
+              </a:rPr>
+              <a:t>7 anni  ·  10 anni  ·  21 anni</a:t>
+            </a:r>
+            <a:endParaRPr lang="en-US" sz="1100" dirty="0"/>
+          </a:p>
+        </p:txBody>
+      </p:sp>
+      <p:sp>
+        <p:nvSpPr>
+          <p:cNvPr id="14" name="Passo 1"/>
+          <p:cNvSpPr/>
+          <p:nvPr/>
+        </p:nvSpPr>
+        <p:spPr>
+          <a:xfrm>
+            <a:off x="822960" y="2633472"/>
+            <a:ext cx="420624" cy="420624"/>
+          </a:xfrm>
+          <a:prstGeom prst="ellipse">
+            <a:avLst/>
+          </a:prstGeom>
+          <a:solidFill>
+            <a:schemeClr val="tx2"/>
+          </a:solidFill>
+          <a:ln w="12700">
+            <a:solidFill>
+              <a:schemeClr val="tx2"/>
+            </a:solidFill>
+            <a:prstDash val="solid"/>
+          </a:ln>
+        </p:spPr>
+      </p:sp>
+      <p:sp>
+        <p:nvSpPr>
+          <p:cNvPr id="15" name="Text 12"/>
+          <p:cNvSpPr txBox="1"/>
+          <p:nvPr/>
+        </p:nvSpPr>
+        <p:spPr>
+          <a:xfrm>
+            <a:off x="822960" y="2633472"/>
+            <a:ext cx="420624" cy="420624"/>
+          </a:xfrm>
+          <a:prstGeom prst="rect">
+            <a:avLst/>
+          </a:prstGeom>
+          <a:noFill/>
+          <a:ln/>
+        </p:spPr>
+        <p:txBody>
+          <a:bodyPr wrap="square" lIns="0" tIns="0" rIns="0" bIns="0" rtlCol="0" anchor="ctr"/>
+          <a:lstStyle/>
+          <a:p>
+            <a:pPr algn="ctr" indent="0" marL="0">
+              <a:buNone/>
+            </a:pPr>
+            <a:r>
+              <a:rPr lang="en-US" sz="1400" b="1" dirty="0">
+                <a:solidFill>
+                  <a:schemeClr val="bg1"/>
+                </a:solidFill>
+              </a:rPr>
+              <a:t>1</a:t>
+            </a:r>
+            <a:endParaRPr lang="en-US" sz="1400" dirty="0"/>
+          </a:p>
+        </p:txBody>
+      </p:sp>
+      <p:sp>
+        <p:nvSpPr>
+          <p:cNvPr id="16" name="Text 13"/>
+          <p:cNvSpPr txBox="1"/>
+          <p:nvPr/>
+        </p:nvSpPr>
+        <p:spPr>
+          <a:xfrm>
+            <a:off x="1417320" y="2560320"/>
+            <a:ext cx="6035040" cy="603504"/>
+          </a:xfrm>
+          <a:prstGeom prst="rect">
+            <a:avLst/>
+          </a:prstGeom>
+          <a:noFill/>
+          <a:ln/>
+        </p:spPr>
+        <p:txBody>
+          <a:bodyPr wrap="square" lIns="0" tIns="0" rIns="0" bIns="0" rtlCol="0" anchor="ctr"/>
+          <a:lstStyle/>
+          <a:p>
+            <a:pPr indent="0" marL="0">
+              <a:buNone/>
+            </a:pPr>
+            <a:r>
+              <a:rPr lang="en-US" sz="1350" b="1" dirty="0">
+                <a:solidFill>
+                  <a:schemeClr val="tx2"/>
+                </a:solidFill>
+              </a:rPr>
+              <a:t>Scenari per Comune</a:t>
+            </a:r>
+            <a:endParaRPr lang="en-US" sz="1350" dirty="0"/>
+          </a:p>
+          <a:p>
+            <a:pPr indent="0" marL="0">
+              <a:buNone/>
+            </a:pPr>
+            <a:r>
+              <a:rPr lang="en-US" sz="1150" dirty="0">
+                <a:solidFill>
+                  <a:schemeClr val="tx1"/>
+                </a:solidFill>
+              </a:rPr>
+              <a:t>Più scenari per ogni Comune («prudente», «obiettivo»…), durata 7, 10 o 21 anni</a:t>
+            </a:r>
+            <a:endParaRPr lang="en-US" sz="1350" dirty="0"/>
+          </a:p>
+        </p:txBody>
+      </p:sp>
+      <p:sp>
+        <p:nvSpPr>
+          <p:cNvPr id="17" name="Passo 2"/>
+          <p:cNvSpPr/>
+          <p:nvPr/>
+        </p:nvSpPr>
+        <p:spPr>
+          <a:xfrm>
+            <a:off x="822960" y="3346704"/>
+            <a:ext cx="420624" cy="420624"/>
+          </a:xfrm>
+          <a:prstGeom prst="ellipse">
+            <a:avLst/>
+          </a:prstGeom>
+          <a:solidFill>
+            <a:schemeClr val="tx2"/>
+          </a:solidFill>
+          <a:ln w="12700">
+            <a:solidFill>
+              <a:schemeClr val="tx2"/>
+            </a:solidFill>
+            <a:prstDash val="solid"/>
+          </a:ln>
+        </p:spPr>
+      </p:sp>
+      <p:sp>
+        <p:nvSpPr>
+          <p:cNvPr id="18" name="Text 15"/>
+          <p:cNvSpPr txBox="1"/>
+          <p:nvPr/>
+        </p:nvSpPr>
+        <p:spPr>
+          <a:xfrm>
+            <a:off x="822960" y="3346704"/>
+            <a:ext cx="420624" cy="420624"/>
+          </a:xfrm>
+          <a:prstGeom prst="rect">
+            <a:avLst/>
+          </a:prstGeom>
+          <a:noFill/>
+          <a:ln/>
+        </p:spPr>
+        <p:txBody>
+          <a:bodyPr wrap="square" lIns="0" tIns="0" rIns="0" bIns="0" rtlCol="0" anchor="ctr"/>
+          <a:lstStyle/>
+          <a:p>
+            <a:pPr algn="ctr" indent="0" marL="0">
+              <a:buNone/>
+            </a:pPr>
+            <a:r>
+              <a:rPr lang="en-US" sz="1400" b="1" dirty="0">
+                <a:solidFill>
+                  <a:schemeClr val="bg1"/>
+                </a:solidFill>
+              </a:rPr>
+              <a:t>2</a:t>
+            </a:r>
+            <a:endParaRPr lang="en-US" sz="1400" dirty="0"/>
+          </a:p>
+        </p:txBody>
+      </p:sp>
+      <p:sp>
+        <p:nvSpPr>
+          <p:cNvPr id="19" name="Text 16"/>
+          <p:cNvSpPr txBox="1"/>
+          <p:nvPr/>
+        </p:nvSpPr>
+        <p:spPr>
+          <a:xfrm>
+            <a:off x="1417320" y="3273552"/>
+            <a:ext cx="6035040" cy="603504"/>
+          </a:xfrm>
+          <a:prstGeom prst="rect">
+            <a:avLst/>
+          </a:prstGeom>
+          <a:noFill/>
+          <a:ln/>
+        </p:spPr>
+        <p:txBody>
+          <a:bodyPr wrap="square" lIns="0" tIns="0" rIns="0" bIns="0" rtlCol="0" anchor="ctr"/>
+          <a:lstStyle/>
+          <a:p>
+            <a:pPr indent="0" marL="0">
+              <a:buNone/>
+            </a:pPr>
+            <a:r>
+              <a:rPr lang="en-US" sz="1350" b="1" dirty="0">
+                <a:solidFill>
+                  <a:schemeClr val="tx2"/>
+                </a:solidFill>
+              </a:rPr>
+              <a:t>Scenario di riferimento (Standard 4.8.1)</a:t>
+            </a:r>
+            <a:endParaRPr lang="en-US" sz="1350" dirty="0"/>
+          </a:p>
+          <a:p>
+            <a:pPr indent="0" marL="0">
+              <a:buNone/>
+            </a:pPr>
+            <a:r>
+              <a:rPr lang="en-US" sz="1150" dirty="0">
+                <a:solidFill>
+                  <a:schemeClr val="tx1"/>
+                </a:solidFill>
+              </a:rPr>
+              <a:t>Anno con il 65% di differenziata o valori medi del cluster SOSE; situazione attuale come partenza</a:t>
+            </a:r>
+            <a:endParaRPr lang="en-US" sz="1350" dirty="0"/>
+          </a:p>
+        </p:txBody>
+      </p:sp>
+      <p:sp>
+        <p:nvSpPr>
+          <p:cNvPr id="20" name="Passo 3"/>
+          <p:cNvSpPr/>
+          <p:nvPr/>
+        </p:nvSpPr>
+        <p:spPr>
+          <a:xfrm>
+            <a:off x="822960" y="4059936"/>
+            <a:ext cx="420624" cy="420624"/>
+          </a:xfrm>
+          <a:prstGeom prst="ellipse">
+            <a:avLst/>
+          </a:prstGeom>
+          <a:solidFill>
+            <a:schemeClr val="tx2"/>
+          </a:solidFill>
+          <a:ln w="12700">
+            <a:solidFill>
+              <a:schemeClr val="tx2"/>
+            </a:solidFill>
+            <a:prstDash val="solid"/>
+          </a:ln>
+        </p:spPr>
+      </p:sp>
+      <p:sp>
+        <p:nvSpPr>
+          <p:cNvPr id="21" name="Text 18"/>
+          <p:cNvSpPr txBox="1"/>
+          <p:nvPr/>
+        </p:nvSpPr>
+        <p:spPr>
+          <a:xfrm>
+            <a:off x="822960" y="4059936"/>
+            <a:ext cx="420624" cy="420624"/>
+          </a:xfrm>
+          <a:prstGeom prst="rect">
+            <a:avLst/>
+          </a:prstGeom>
+          <a:noFill/>
+          <a:ln/>
+        </p:spPr>
+        <p:txBody>
+          <a:bodyPr wrap="square" lIns="0" tIns="0" rIns="0" bIns="0" rtlCol="0" anchor="ctr"/>
+          <a:lstStyle/>
+          <a:p>
+            <a:pPr algn="ctr" indent="0" marL="0">
+              <a:buNone/>
+            </a:pPr>
+            <a:r>
+              <a:rPr lang="en-US" sz="1400" b="1" dirty="0">
+                <a:solidFill>
+                  <a:schemeClr val="bg1"/>
+                </a:solidFill>
+              </a:rPr>
+              <a:t>3</a:t>
+            </a:r>
+            <a:endParaRPr lang="en-US" sz="1400" dirty="0"/>
+          </a:p>
+        </p:txBody>
+      </p:sp>
+      <p:sp>
+        <p:nvSpPr>
+          <p:cNvPr id="22" name="Text 19"/>
+          <p:cNvSpPr txBox="1"/>
+          <p:nvPr/>
+        </p:nvSpPr>
+        <p:spPr>
+          <a:xfrm>
+            <a:off x="1417320" y="3986784"/>
+            <a:ext cx="6035040" cy="603504"/>
+          </a:xfrm>
+          <a:prstGeom prst="rect">
+            <a:avLst/>
+          </a:prstGeom>
+          <a:noFill/>
+          <a:ln/>
+        </p:spPr>
+        <p:txBody>
+          <a:bodyPr wrap="square" lIns="0" tIns="0" rIns="0" bIns="0" rtlCol="0" anchor="ctr"/>
+          <a:lstStyle/>
+          <a:p>
+            <a:pPr indent="0" marL="0">
+              <a:buNone/>
+            </a:pPr>
+            <a:r>
+              <a:rPr lang="en-US" sz="1350" b="1" dirty="0">
+                <a:solidFill>
+                  <a:schemeClr val="tx2"/>
+                </a:solidFill>
+              </a:rPr>
+              <a:t>Obiettivi anno per anno</a:t>
+            </a:r>
+            <a:endParaRPr lang="en-US" sz="1350" dirty="0"/>
+          </a:p>
+          <a:p>
+            <a:pPr indent="0" marL="0">
+              <a:buNone/>
+            </a:pPr>
+            <a:r>
+              <a:rPr lang="en-US" sz="1150" dirty="0">
+                <a:solidFill>
+                  <a:schemeClr val="tx1"/>
+                </a:solidFill>
+              </a:rPr>
+              <a:t>Produzione totale e pro capite prevista, secco residuo pro capite obiettivo</a:t>
+            </a:r>
+            <a:endParaRPr lang="en-US" sz="1350" dirty="0"/>
+          </a:p>
+        </p:txBody>
+      </p:sp>
+      <p:sp>
+        <p:nvSpPr>
+          <p:cNvPr id="23" name="Passo 4"/>
+          <p:cNvSpPr/>
+          <p:nvPr/>
+        </p:nvSpPr>
+        <p:spPr>
+          <a:xfrm>
+            <a:off x="822960" y="4773168"/>
+            <a:ext cx="420624" cy="420624"/>
+          </a:xfrm>
+          <a:prstGeom prst="ellipse">
+            <a:avLst/>
+          </a:prstGeom>
+          <a:solidFill>
+            <a:schemeClr val="tx2"/>
+          </a:solidFill>
+          <a:ln w="12700">
+            <a:solidFill>
+              <a:schemeClr val="tx2"/>
+            </a:solidFill>
+            <a:prstDash val="solid"/>
+          </a:ln>
+        </p:spPr>
+      </p:sp>
+      <p:sp>
+        <p:nvSpPr>
+          <p:cNvPr id="24" name="Text 21"/>
+          <p:cNvSpPr txBox="1"/>
+          <p:nvPr/>
+        </p:nvSpPr>
+        <p:spPr>
+          <a:xfrm>
+            <a:off x="822960" y="4773168"/>
+            <a:ext cx="420624" cy="420624"/>
+          </a:xfrm>
+          <a:prstGeom prst="rect">
+            <a:avLst/>
+          </a:prstGeom>
+          <a:noFill/>
+          <a:ln/>
+        </p:spPr>
+        <p:txBody>
+          <a:bodyPr wrap="square" lIns="0" tIns="0" rIns="0" bIns="0" rtlCol="0" anchor="ctr"/>
+          <a:lstStyle/>
+          <a:p>
+            <a:pPr algn="ctr" indent="0" marL="0">
+              <a:buNone/>
+            </a:pPr>
+            <a:r>
+              <a:rPr lang="en-US" sz="1400" b="1" dirty="0">
+                <a:solidFill>
+                  <a:schemeClr val="bg1"/>
+                </a:solidFill>
+              </a:rPr>
+              <a:t>4</a:t>
+            </a:r>
+            <a:endParaRPr lang="en-US" sz="1400" dirty="0"/>
+          </a:p>
+        </p:txBody>
+      </p:sp>
+      <p:sp>
+        <p:nvSpPr>
+          <p:cNvPr id="25" name="Text 22"/>
+          <p:cNvSpPr txBox="1"/>
+          <p:nvPr/>
+        </p:nvSpPr>
+        <p:spPr>
+          <a:xfrm>
+            <a:off x="1417320" y="4700016"/>
+            <a:ext cx="6035040" cy="603504"/>
+          </a:xfrm>
+          <a:prstGeom prst="rect">
+            <a:avLst/>
+          </a:prstGeom>
+          <a:noFill/>
+          <a:ln/>
+        </p:spPr>
+        <p:txBody>
+          <a:bodyPr wrap="square" lIns="0" tIns="0" rIns="0" bIns="0" rtlCol="0" anchor="ctr"/>
+          <a:lstStyle/>
+          <a:p>
+            <a:pPr indent="0" marL="0">
+              <a:buNone/>
+            </a:pPr>
+            <a:r>
+              <a:rPr lang="en-US" sz="1350" b="1" dirty="0">
+                <a:solidFill>
+                  <a:schemeClr val="tx2"/>
+                </a:solidFill>
+              </a:rPr>
+              <a:t>% di differenziata</a:t>
+            </a:r>
+            <a:endParaRPr lang="en-US" sz="1350" dirty="0"/>
+          </a:p>
+          <a:p>
+            <a:pPr indent="0" marL="0">
+              <a:buNone/>
+            </a:pPr>
+            <a:r>
+              <a:rPr lang="en-US" sz="1150" dirty="0">
+                <a:solidFill>
+                  <a:schemeClr val="tx1"/>
+                </a:solidFill>
+              </a:rPr>
+              <a:t>Ricalcolata ogni anno: (totale − secco) / totale</a:t>
+            </a:r>
+            <a:endParaRPr lang="en-US" sz="1350" dirty="0"/>
+          </a:p>
+        </p:txBody>
+      </p:sp>
+      <p:sp>
+        <p:nvSpPr>
+          <p:cNvPr id="26" name="Passo 5"/>
+          <p:cNvSpPr/>
+          <p:nvPr/>
+        </p:nvSpPr>
+        <p:spPr>
+          <a:xfrm>
+            <a:off x="822960" y="5486400"/>
+            <a:ext cx="420624" cy="420624"/>
+          </a:xfrm>
+          <a:prstGeom prst="ellipse">
+            <a:avLst/>
+          </a:prstGeom>
+          <a:solidFill>
+            <a:schemeClr val="accent2"/>
+          </a:solidFill>
+          <a:ln w="12700">
+            <a:solidFill>
+              <a:schemeClr val="accent2"/>
+            </a:solidFill>
+            <a:prstDash val="solid"/>
+          </a:ln>
+        </p:spPr>
+      </p:sp>
+      <p:sp>
+        <p:nvSpPr>
+          <p:cNvPr id="27" name="Text 24"/>
+          <p:cNvSpPr txBox="1"/>
+          <p:nvPr/>
+        </p:nvSpPr>
+        <p:spPr>
+          <a:xfrm>
+            <a:off x="822960" y="5486400"/>
+            <a:ext cx="420624" cy="420624"/>
+          </a:xfrm>
+          <a:prstGeom prst="rect">
+            <a:avLst/>
+          </a:prstGeom>
+          <a:noFill/>
+          <a:ln/>
+        </p:spPr>
+        <p:txBody>
+          <a:bodyPr wrap="square" lIns="0" tIns="0" rIns="0" bIns="0" rtlCol="0" anchor="ctr"/>
+          <a:lstStyle/>
+          <a:p>
+            <a:pPr algn="ctr" indent="0" marL="0">
+              <a:buNone/>
+            </a:pPr>
+            <a:r>
+              <a:rPr lang="en-US" sz="1400" b="1" dirty="0">
+                <a:solidFill>
+                  <a:schemeClr val="bg1"/>
+                </a:solidFill>
+              </a:rPr>
+              <a:t>5</a:t>
+            </a:r>
+            <a:endParaRPr lang="en-US" sz="1400" dirty="0"/>
+          </a:p>
+        </p:txBody>
+      </p:sp>
+      <p:sp>
+        <p:nvSpPr>
+          <p:cNvPr id="28" name="Text 25"/>
+          <p:cNvSpPr txBox="1"/>
+          <p:nvPr/>
+        </p:nvSpPr>
+        <p:spPr>
+          <a:xfrm>
+            <a:off x="1417320" y="5413248"/>
+            <a:ext cx="6035040" cy="603504"/>
+          </a:xfrm>
+          <a:prstGeom prst="rect">
+            <a:avLst/>
+          </a:prstGeom>
+          <a:noFill/>
+          <a:ln/>
+        </p:spPr>
+        <p:txBody>
+          <a:bodyPr wrap="square" lIns="0" tIns="0" rIns="0" bIns="0" rtlCol="0" anchor="ctr"/>
+          <a:lstStyle/>
+          <a:p>
+            <a:pPr indent="0" marL="0">
+              <a:buNone/>
+            </a:pPr>
+            <a:r>
+              <a:rPr lang="en-US" sz="1350" b="1" dirty="0">
+                <a:solidFill>
+                  <a:schemeClr val="tx2"/>
+                </a:solidFill>
+              </a:rPr>
+              <a:t>Crediti e conti economici</a:t>
+            </a:r>
+            <a:endParaRPr lang="en-US" sz="1350" dirty="0"/>
+          </a:p>
+          <a:p>
+            <a:pPr indent="0" marL="0">
+              <a:buNone/>
+            </a:pPr>
+            <a:r>
+              <a:rPr lang="en-US" sz="1150" dirty="0">
+                <a:solidFill>
+                  <a:schemeClr val="tx1"/>
+                </a:solidFill>
+              </a:rPr>
+              <a:t>Bilancio del Comune o per utenza (come l'Allegato A EsaCom); ricavi a 32 € anno per anno; costi Caso 1 o 2; margine</a:t>
+            </a:r>
+            <a:endParaRPr lang="en-US" sz="1350" dirty="0"/>
+          </a:p>
+        </p:txBody>
+      </p:sp>
+      <p:sp>
+        <p:nvSpPr>
+          <p:cNvPr id="29" name="Text 26"/>
+          <p:cNvSpPr txBox="1"/>
+          <p:nvPr/>
+        </p:nvSpPr>
+        <p:spPr>
+          <a:xfrm>
+            <a:off x="822960" y="6035040"/>
+            <a:ext cx="6675120" cy="228600"/>
+          </a:xfrm>
+          <a:prstGeom prst="rect">
+            <a:avLst/>
+          </a:prstGeom>
+          <a:noFill/>
+          <a:ln/>
+        </p:spPr>
+        <p:txBody>
+          <a:bodyPr wrap="square" lIns="0" tIns="0" rIns="0" bIns="0" rtlCol="0" anchor="ctr"/>
+          <a:lstStyle/>
+          <a:p>
+            <a:pPr indent="0" marL="0">
+              <a:buNone/>
+            </a:pPr>
+            <a:r>
+              <a:rPr lang="en-US" sz="1000" i="1" dirty="0">
+                <a:solidFill>
+                  <a:schemeClr val="accent6"/>
+                </a:solidFill>
+              </a:rPr>
+              <a:t>Stima ex ante a scopo di pianificazione: i crediti veri si calcolano ex post con la Banca Dati Utenze.</a:t>
+            </a:r>
+            <a:endParaRPr lang="en-US" sz="1000" dirty="0"/>
+          </a:p>
+        </p:txBody>
+      </p:sp>
+      <p:sp>
+        <p:nvSpPr>
+          <p:cNvPr id="30" name="Riquadro assistente"/>
+          <p:cNvSpPr/>
+          <p:nvPr/>
+        </p:nvSpPr>
+        <p:spPr>
+          <a:xfrm>
+            <a:off x="7863840" y="1234440"/>
+            <a:ext cx="3749040" cy="5029200"/>
+          </a:xfrm>
+          <a:prstGeom prst="roundRect">
+            <a:avLst>
+              <a:gd name="adj" fmla="val 2927"/>
             </a:avLst>
           </a:prstGeom>
           <a:solidFill>
@@ -4208,77 +4566,63 @@
       </p:sp>
       <p:sp>
         <p:nvSpPr>
-          <p:cNvPr id="6" name="Text 3"/>
-          <p:cNvSpPr txBox="1"/>
-          <p:nvPr/>
-        </p:nvSpPr>
-        <p:spPr>
-          <a:xfrm>
-            <a:off x="640080" y="5669280"/>
-            <a:ext cx="1920240" cy="566928"/>
-          </a:xfrm>
-          <a:prstGeom prst="rect">
-            <a:avLst/>
-          </a:prstGeom>
-          <a:noFill/>
-          <a:ln/>
-        </p:spPr>
-        <p:txBody>
-          <a:bodyPr wrap="square" lIns="0" tIns="0" rIns="0" bIns="0" rtlCol="0" anchor="ctr"/>
-          <a:lstStyle/>
-          <a:p>
-            <a:pPr algn="ctr" indent="0" marL="0">
-              <a:buNone/>
-            </a:pPr>
-            <a:r>
-              <a:rPr lang="en-US" sz="1150" b="1" dirty="0">
-                <a:solidFill>
-                  <a:schemeClr val="tx2"/>
-                </a:solidFill>
-              </a:rPr>
-              <a:t>Durata 7 · 10 · 21 anni</a:t>
-            </a:r>
-            <a:endParaRPr lang="en-US" sz="1150" dirty="0"/>
-          </a:p>
-        </p:txBody>
-      </p:sp>
-      <p:sp>
-        <p:nvSpPr>
-          <p:cNvPr id="7" name="Passo simulatore 2"/>
+          <p:cNvPr id="31" name="Assistente cerchio"/>
           <p:cNvSpPr/>
           <p:nvPr/>
         </p:nvSpPr>
         <p:spPr>
           <a:xfrm>
-            <a:off x="2798064" y="5669280"/>
-            <a:ext cx="2103120" cy="566928"/>
-          </a:xfrm>
-          <a:prstGeom prst="roundRect">
-            <a:avLst>
-              <a:gd name="adj" fmla="val 19355"/>
-            </a:avLst>
+            <a:off x="8092440" y="1417320"/>
+            <a:ext cx="548640" cy="548640"/>
+          </a:xfrm>
+          <a:prstGeom prst="ellipse">
+            <a:avLst/>
           </a:prstGeom>
           <a:solidFill>
-            <a:schemeClr val="accent3"/>
+            <a:schemeClr val="tx2"/>
           </a:solidFill>
           <a:ln w="12700">
             <a:solidFill>
-              <a:schemeClr val="accent3"/>
+              <a:schemeClr val="tx2"/>
             </a:solidFill>
             <a:prstDash val="solid"/>
           </a:ln>
         </p:spPr>
       </p:sp>
-      <p:sp>
-        <p:nvSpPr>
-          <p:cNvPr id="8" name="Text 5"/>
+      <p:pic>
+        <p:nvPicPr>
+          <p:cNvPr id="32" name="Assistente icona" descr="preencoded.png">    </p:cNvPr>
+          <p:cNvPicPr>
+            <a:picLocks noChangeAspect="1"/>
+          </p:cNvPicPr>
+          <p:nvPr/>
+        </p:nvPicPr>
+        <p:blipFill>
+          <a:blip r:embed="rId2"/>
+          <a:stretch>
+            <a:fillRect/>
+          </a:stretch>
+        </p:blipFill>
+        <p:spPr>
+          <a:xfrm>
+            <a:off x="8229600" y="1554480"/>
+            <a:ext cx="274320" cy="274320"/>
+          </a:xfrm>
+          <a:prstGeom prst="rect">
+            <a:avLst/>
+          </a:prstGeom>
+        </p:spPr>
+      </p:pic>
+      <p:sp>
+        <p:nvSpPr>
+          <p:cNvPr id="33" name="Text 29"/>
           <p:cNvSpPr txBox="1"/>
           <p:nvPr/>
         </p:nvSpPr>
         <p:spPr>
           <a:xfrm>
-            <a:off x="2889504" y="5669280"/>
-            <a:ext cx="1920240" cy="566928"/>
+            <a:off x="8778240" y="1371600"/>
+            <a:ext cx="2743200" cy="685800"/>
           </a:xfrm>
           <a:prstGeom prst="rect">
             <a:avLst/>
@@ -4290,43 +4634,43 @@
           <a:bodyPr wrap="square" lIns="0" tIns="0" rIns="0" bIns="0" rtlCol="0" anchor="ctr"/>
           <a:lstStyle/>
           <a:p>
-            <a:pPr algn="ctr" indent="0" marL="0">
-              <a:buNone/>
-            </a:pPr>
-            <a:r>
-              <a:rPr lang="en-US" sz="1150" b="1" dirty="0">
+            <a:pPr indent="0" marL="0">
+              <a:buNone/>
+            </a:pPr>
+            <a:r>
+              <a:rPr lang="en-US" sz="1800" b="1" dirty="0">
                 <a:solidFill>
                   <a:schemeClr val="tx2"/>
                 </a:solidFill>
               </a:rPr>
-              <a:t>Riferimento Standard 4.8.1: anno al 65% o cluster</a:t>
-            </a:r>
-            <a:endParaRPr lang="en-US" sz="1150" dirty="0"/>
-          </a:p>
-        </p:txBody>
-      </p:sp>
-      <p:sp>
-        <p:nvSpPr>
-          <p:cNvPr id="9" name="Passo simulatore 3"/>
+              <a:t>Assistente virtuale Claude</a:t>
+            </a:r>
+            <a:endParaRPr lang="en-US" sz="1800" dirty="0"/>
+          </a:p>
+        </p:txBody>
+      </p:sp>
+      <p:sp>
+        <p:nvSpPr>
+          <p:cNvPr id="34" name="Badge attivo"/>
           <p:cNvSpPr/>
           <p:nvPr/>
         </p:nvSpPr>
         <p:spPr>
           <a:xfrm>
-            <a:off x="5047488" y="5669280"/>
-            <a:ext cx="2103120" cy="566928"/>
+            <a:off x="8778240" y="2029968"/>
+            <a:ext cx="2194560" cy="256032"/>
           </a:xfrm>
           <a:prstGeom prst="roundRect">
             <a:avLst>
-              <a:gd name="adj" fmla="val 19355"/>
+              <a:gd name="adj" fmla="val 50000"/>
             </a:avLst>
           </a:prstGeom>
           <a:solidFill>
-            <a:schemeClr val="accent3"/>
+            <a:schemeClr val="bg1"/>
           </a:solidFill>
-          <a:ln w="12700">
+          <a:ln w="9525">
             <a:solidFill>
-              <a:schemeClr val="accent3"/>
+              <a:schemeClr val="tx2"/>
             </a:solidFill>
             <a:prstDash val="solid"/>
           </a:ln>
@@ -4334,14 +4678,14 @@
       </p:sp>
       <p:sp>
         <p:nvSpPr>
-          <p:cNvPr id="10" name="Text 7"/>
+          <p:cNvPr id="35" name="Text 31"/>
           <p:cNvSpPr txBox="1"/>
           <p:nvPr/>
         </p:nvSpPr>
         <p:spPr>
           <a:xfrm>
-            <a:off x="5138928" y="5669280"/>
-            <a:ext cx="1920240" cy="566928"/>
+            <a:off x="8778240" y="2029968"/>
+            <a:ext cx="2194560" cy="256032"/>
           </a:xfrm>
           <a:prstGeom prst="rect">
             <a:avLst/>
@@ -4357,54 +4701,27 @@
               <a:buNone/>
             </a:pPr>
             <a:r>
-              <a:rPr lang="en-US" sz="1150" b="1" dirty="0">
+              <a:rPr lang="en-US" sz="950" b="1" spc="100" kern="0" dirty="0">
                 <a:solidFill>
                   <a:schemeClr val="tx2"/>
                 </a:solidFill>
               </a:rPr>
-              <a:t>Obiettivi annui e traiettoria automatica</a:t>
-            </a:r>
-            <a:endParaRPr lang="en-US" sz="1150" dirty="0"/>
-          </a:p>
-        </p:txBody>
-      </p:sp>
-      <p:sp>
-        <p:nvSpPr>
-          <p:cNvPr id="11" name="Passo simulatore 4"/>
-          <p:cNvSpPr/>
-          <p:nvPr/>
-        </p:nvSpPr>
-        <p:spPr>
-          <a:xfrm>
-            <a:off x="7296912" y="5669280"/>
-            <a:ext cx="2103120" cy="566928"/>
-          </a:xfrm>
-          <a:prstGeom prst="roundRect">
-            <a:avLst>
-              <a:gd name="adj" fmla="val 19355"/>
-            </a:avLst>
-          </a:prstGeom>
-          <a:solidFill>
-            <a:schemeClr val="accent3"/>
-          </a:solidFill>
-          <a:ln w="12700">
-            <a:solidFill>
-              <a:schemeClr val="accent3"/>
-            </a:solidFill>
-            <a:prstDash val="solid"/>
-          </a:ln>
-        </p:spPr>
-      </p:sp>
-      <p:sp>
-        <p:nvSpPr>
-          <p:cNvPr id="12" name="Text 9"/>
+              <a:t>ATTIVO DAL 19/10</a:t>
+            </a:r>
+            <a:endParaRPr lang="en-US" sz="950" dirty="0"/>
+          </a:p>
+        </p:txBody>
+      </p:sp>
+      <p:sp>
+        <p:nvSpPr>
+          <p:cNvPr id="36" name="Text 32"/>
           <p:cNvSpPr txBox="1"/>
           <p:nvPr/>
         </p:nvSpPr>
         <p:spPr>
           <a:xfrm>
-            <a:off x="7388352" y="5669280"/>
-            <a:ext cx="1920240" cy="566928"/>
+            <a:off x="8092440" y="2423160"/>
+            <a:ext cx="3337560" cy="3703320"/>
           </a:xfrm>
           <a:prstGeom prst="rect">
             <a:avLst/>
@@ -4413,84 +4730,143 @@
           <a:ln/>
         </p:spPr>
         <p:txBody>
-          <a:bodyPr wrap="square" lIns="0" tIns="0" rIns="0" bIns="0" rtlCol="0" anchor="ctr"/>
+          <a:bodyPr wrap="square" lIns="0" tIns="0" rIns="0" bIns="0" rtlCol="0" anchor="t"/>
           <a:lstStyle/>
           <a:p>
-            <a:pPr algn="ctr" indent="0" marL="0">
-              <a:buNone/>
-            </a:pPr>
-            <a:r>
-              <a:rPr lang="en-US" sz="1150" b="1" dirty="0">
+            <a:pPr indent="0" marL="0">
+              <a:spcAft>
+                <a:spcPts val="600"/>
+              </a:spcAft>
+              <a:buNone/>
+            </a:pPr>
+            <a:r>
+              <a:rPr lang="en-US" sz="1250" b="1" dirty="0">
                 <a:solidFill>
                   <a:schemeClr val="tx2"/>
                 </a:solidFill>
               </a:rPr>
-              <a:t>% differenziata ricalcolata</a:t>
-            </a:r>
-            <a:endParaRPr lang="en-US" sz="1150" dirty="0"/>
-          </a:p>
-        </p:txBody>
-      </p:sp>
-      <p:sp>
-        <p:nvSpPr>
-          <p:cNvPr id="13" name="Passo simulatore 5"/>
-          <p:cNvSpPr/>
-          <p:nvPr/>
-        </p:nvSpPr>
-        <p:spPr>
-          <a:xfrm>
-            <a:off x="9546336" y="5669280"/>
-            <a:ext cx="2103120" cy="566928"/>
-          </a:xfrm>
-          <a:prstGeom prst="roundRect">
-            <a:avLst>
-              <a:gd name="adj" fmla="val 19355"/>
-            </a:avLst>
-          </a:prstGeom>
-          <a:solidFill>
-            <a:schemeClr val="accent4"/>
-          </a:solidFill>
-          <a:ln w="12700">
-            <a:solidFill>
-              <a:schemeClr val="accent4"/>
-            </a:solidFill>
-            <a:prstDash val="solid"/>
-          </a:ln>
-        </p:spPr>
-      </p:sp>
-      <p:sp>
-        <p:nvSpPr>
-          <p:cNvPr id="14" name="Text 11"/>
-          <p:cNvSpPr txBox="1"/>
-          <p:nvPr/>
-        </p:nvSpPr>
-        <p:spPr>
-          <a:xfrm>
-            <a:off x="9637776" y="5669280"/>
-            <a:ext cx="1920240" cy="566928"/>
-          </a:xfrm>
-          <a:prstGeom prst="rect">
-            <a:avLst/>
-          </a:prstGeom>
-          <a:noFill/>
-          <a:ln/>
-        </p:spPr>
-        <p:txBody>
-          <a:bodyPr wrap="square" lIns="0" tIns="0" rIns="0" bIns="0" rtlCol="0" anchor="ctr"/>
-          <a:lstStyle/>
-          <a:p>
-            <a:pPr algn="ctr" indent="0" marL="0">
-              <a:buNone/>
-            </a:pPr>
-            <a:r>
-              <a:rPr lang="en-US" sz="1150" b="1" dirty="0">
+              <a:t>Per enti e Amministratori</a:t>
+            </a:r>
+            <a:endParaRPr lang="en-US" sz="1250" dirty="0"/>
+          </a:p>
+          <a:p>
+            <a:pPr indent="0" marL="0">
+              <a:spcAft>
+                <a:spcPts val="600"/>
+              </a:spcAft>
+              <a:buNone/>
+            </a:pPr>
+            <a:r>
+              <a:rPr lang="en-US" sz="1250" dirty="0">
+                <a:solidFill>
+                  <a:schemeClr val="tx1"/>
+                </a:solidFill>
+              </a:rPr>
+              <a:t>pulsante «✦ Assistente»: come si fa un'operazione, fasi, costi; risponde dai manuali e dalle tariffe</a:t>
+            </a:r>
+            <a:endParaRPr lang="en-US" sz="1250" dirty="0"/>
+          </a:p>
+          <a:p>
+            <a:pPr indent="0" marL="0">
+              <a:spcAft>
+                <a:spcPts val="600"/>
+              </a:spcAft>
+              <a:buNone/>
+            </a:pPr>
+            <a:r>
+              <a:rPr lang="en-US" sz="1250" b="1" dirty="0">
                 <a:solidFill>
                   <a:schemeClr val="tx2"/>
                 </a:solidFill>
               </a:rPr>
-              <a:t>Crediti per anno, confronto, CSV e stampa</a:t>
-            </a:r>
-            <a:endParaRPr lang="en-US" sz="1150" dirty="0"/>
+              <a:t>Garanzie</a:t>
+            </a:r>
+            <a:endParaRPr lang="en-US" sz="1250" dirty="0"/>
+          </a:p>
+          <a:p>
+            <a:pPr indent="0" marL="0">
+              <a:spcAft>
+                <a:spcPts val="600"/>
+              </a:spcAft>
+              <a:buNone/>
+            </a:pPr>
+            <a:r>
+              <a:rPr lang="en-US" sz="1250" dirty="0">
+                <a:solidFill>
+                  <a:schemeClr val="tx1"/>
+                </a:solidFill>
+              </a:rPr>
+              <a:t>non vede le pratiche e non decide; nessun testo salvato; limite di domande al giorno</a:t>
+            </a:r>
+            <a:endParaRPr lang="en-US" sz="1250" dirty="0"/>
+          </a:p>
+          <a:p>
+            <a:pPr indent="0" marL="0">
+              <a:spcAft>
+                <a:spcPts val="600"/>
+              </a:spcAft>
+              <a:buNone/>
+            </a:pPr>
+            <a:r>
+              <a:rPr lang="en-US" sz="1250" b="1" dirty="0">
+                <a:solidFill>
+                  <a:schemeClr val="tx2"/>
+                </a:solidFill>
+              </a:rPr>
+              <a:t>Come funziona</a:t>
+            </a:r>
+            <a:endParaRPr lang="en-US" sz="1250" dirty="0"/>
+          </a:p>
+          <a:p>
+            <a:pPr indent="0" marL="0">
+              <a:spcAft>
+                <a:spcPts val="600"/>
+              </a:spcAft>
+              <a:buNone/>
+            </a:pPr>
+            <a:r>
+              <a:rPr lang="en-US" sz="1250" dirty="0">
+                <a:solidFill>
+                  <a:schemeClr val="tx1"/>
+                </a:solidFill>
+              </a:rPr>
+              <a:t>Claude Haiku 5.5 tramite una funzione sul server; la chiave resta in Supabase; meno di un centesimo a domanda</a:t>
+            </a:r>
+            <a:endParaRPr lang="en-US" sz="1250" dirty="0"/>
+          </a:p>
+          <a:p>
+            <a:pPr indent="0" marL="0">
+              <a:spcAft>
+                <a:spcPts val="600"/>
+              </a:spcAft>
+              <a:buNone/>
+            </a:pPr>
+            <a:r>
+              <a:rPr lang="en-US" sz="1250" b="1" dirty="0">
+                <a:solidFill>
+                  <a:schemeClr val="tx2"/>
+                </a:solidFill>
+              </a:rPr>
+              <a:t>Prossimi passi</a:t>
+            </a:r>
+            <a:endParaRPr lang="en-US" sz="1250" dirty="0"/>
+          </a:p>
+          <a:p>
+            <a:pPr indent="0" marL="0">
+              <a:spcAft>
+                <a:spcPts val="600"/>
+              </a:spcAft>
+              <a:buNone/>
+            </a:pPr>
+            <a:r>
+              <a:rPr lang="en-US" sz="1250" dirty="0">
+                <a:solidFill>
+                  <a:schemeClr val="tx1"/>
+                </a:solidFill>
+              </a:rPr>
+              <a:t>estensione agli Operatori e aiuto sulla singola pratica, con regole sulla privacy</a:t>
+            </a:r>
+            <a:endParaRPr lang="en-US" sz="1250" dirty="0"/>
           </a:p>
         </p:txBody>
       </p:sp>
@@ -4599,15 +4975,62 @@
                 <a:ea typeface="Cambria" pitchFamily="34" charset="-122"/>
                 <a:cs typeface="Cambria" pitchFamily="34" charset="-120"/>
               </a:rPr>
-              <a:t>Simulazione economica: ricavi e costi per il Comune</a:t>
+              <a:t>Il simulatore in pratica</a:t>
             </a:r>
             <a:endParaRPr lang="en-US" sz="3000" dirty="0"/>
+          </a:p>
+        </p:txBody>
+      </p:sp>
+      <p:sp>
+        <p:nvSpPr>
+          <p:cNvPr id="3" name="Text 1"/>
+          <p:cNvSpPr txBox="1"/>
+          <p:nvPr/>
+        </p:nvSpPr>
+        <p:spPr>
+          <a:xfrm>
+            <a:off x="548640" y="1097280"/>
+            <a:ext cx="11064240" cy="365760"/>
+          </a:xfrm>
+          <a:prstGeom prst="rect">
+            <a:avLst/>
+          </a:prstGeom>
+          <a:noFill/>
+          <a:ln/>
+        </p:spPr>
+        <p:txBody>
+          <a:bodyPr wrap="square" lIns="0" tIns="0" rIns="0" bIns="0" rtlCol="0" anchor="ctr"/>
+          <a:lstStyle/>
+          <a:p>
+            <a:pPr indent="0" marL="0">
+              <a:buNone/>
+            </a:pPr>
+            <a:r>
+              <a:rPr lang="en-US" sz="1300" b="1" dirty="0">
+                <a:solidFill>
+                  <a:schemeClr val="tx2"/>
+                </a:solidFill>
+              </a:rPr>
+              <a:t>Portale → menu Simulatore. </a:t>
+            </a:r>
+            <a:pPr indent="0" marL="0">
+              <a:buNone/>
+            </a:pPr>
+            <a:r>
+              <a:rPr lang="en-US" sz="1300" dirty="0">
+                <a:solidFill>
+                  <a:schemeClr val="accent6"/>
+                </a:solidFill>
+              </a:rPr>
+              <a:t>Esempio con dati di prova: Comune di 12.500 abitanti (cluster 4), oggi 430 kg/ab e 90 kg/ab di secco, obiettivo 2036: 380 e 50 kg/ab.</a:t>
+            </a:r>
+            <a:endParaRPr lang="en-US" sz="1300" dirty="0"/>
           </a:p>
         </p:txBody>
       </p:sp>
       <p:pic>
         <p:nvPicPr>
-          <p:cNvPr id="3" name="Schermata costi" descr="Simulatore, metodo per utenza: costi Caso 1 per 16.735 abitanti, ricavi, margine e margine netto per anno">    </p:cNvPr>
+          <p:cNvPr id="4" name="Schermata simulatore" descr="Risultati del simulatore: crediti netti per anno e raccolta differenziata">    </p:cNvPr>
           <p:cNvPicPr>
             <a:picLocks noChangeAspect="1"/>
           </p:cNvPicPr>
@@ -4621,8 +5044,8 @@
         </p:blipFill>
         <p:spPr>
           <a:xfrm>
-            <a:off x="548640" y="1188720"/>
-            <a:ext cx="6242333" cy="5029200"/>
+            <a:off x="548640" y="1572768"/>
+            <a:ext cx="11064240" cy="3955466"/>
           </a:xfrm>
           <a:prstGeom prst="rect">
             <a:avLst/>
@@ -4631,26 +5054,26 @@
       </p:pic>
       <p:sp>
         <p:nvSpPr>
-          <p:cNvPr id="4" name="Riquadro economia"/>
+          <p:cNvPr id="5" name="Passo simulatore 1"/>
           <p:cNvSpPr/>
           <p:nvPr/>
         </p:nvSpPr>
         <p:spPr>
           <a:xfrm>
-            <a:off x="7452360" y="1188720"/>
-            <a:ext cx="4160520" cy="5001768"/>
+            <a:off x="548640" y="5669280"/>
+            <a:ext cx="2103120" cy="566928"/>
           </a:xfrm>
           <a:prstGeom prst="roundRect">
             <a:avLst>
-              <a:gd name="adj" fmla="val 2637"/>
+              <a:gd name="adj" fmla="val 19355"/>
             </a:avLst>
           </a:prstGeom>
           <a:solidFill>
-            <a:schemeClr val="bg2"/>
+            <a:schemeClr val="accent3"/>
           </a:solidFill>
           <a:ln w="12700">
             <a:solidFill>
-              <a:schemeClr val="bg2"/>
+              <a:schemeClr val="accent3"/>
             </a:solidFill>
             <a:prstDash val="solid"/>
           </a:ln>
@@ -4658,14 +5081,14 @@
       </p:sp>
       <p:sp>
         <p:nvSpPr>
-          <p:cNvPr id="5" name="Text 2"/>
+          <p:cNvPr id="6" name="Text 3"/>
           <p:cNvSpPr txBox="1"/>
           <p:nvPr/>
         </p:nvSpPr>
         <p:spPr>
           <a:xfrm>
-            <a:off x="7635240" y="1298448"/>
-            <a:ext cx="3794760" cy="4800600"/>
+            <a:off x="640080" y="5669280"/>
+            <a:ext cx="1920240" cy="566928"/>
           </a:xfrm>
           <a:prstGeom prst="rect">
             <a:avLst/>
@@ -4674,284 +5097,273 @@
           <a:ln/>
         </p:spPr>
         <p:txBody>
-          <a:bodyPr wrap="square" lIns="0" tIns="0" rIns="0" bIns="0" rtlCol="0" anchor="t"/>
+          <a:bodyPr wrap="square" lIns="0" tIns="0" rIns="0" bIns="0" rtlCol="0" anchor="ctr"/>
           <a:lstStyle/>
           <a:p>
-            <a:pPr indent="0" marL="0">
-              <a:spcAft>
-                <a:spcPts val="300"/>
-              </a:spcAft>
-              <a:buNone/>
-            </a:pPr>
-            <a:r>
-              <a:rPr lang="en-US" sz="1400" b="1" dirty="0">
+            <a:pPr algn="ctr" indent="0" marL="0">
+              <a:buNone/>
+            </a:pPr>
+            <a:r>
+              <a:rPr lang="en-US" sz="1150" b="1" dirty="0">
                 <a:solidFill>
                   <a:schemeClr val="tx2"/>
                 </a:solidFill>
               </a:rPr>
-              <a:t>Ricavi</a:t>
-            </a:r>
-            <a:endParaRPr lang="en-US" sz="1200" dirty="0"/>
-          </a:p>
-          <a:p>
-            <a:pPr indent="0" marL="0">
-              <a:spcAft>
-                <a:spcPts val="300"/>
-              </a:spcAft>
-              <a:buNone/>
-            </a:pPr>
-            <a:r>
-              <a:rPr lang="en-US" sz="1200" dirty="0">
-                <a:solidFill>
-                  <a:schemeClr val="tx1"/>
-                </a:solidFill>
-              </a:rPr>
-              <a:t>Valore del credito digitato anno per anno (proposto 32 €).</a:t>
-            </a:r>
-            <a:endParaRPr lang="en-US" sz="1200" dirty="0"/>
-          </a:p>
-          <a:p>
-            <a:pPr indent="0" marL="0">
-              <a:spcAft>
-                <a:spcPts val="300"/>
-              </a:spcAft>
-              <a:buNone/>
-            </a:pPr>
-            <a:r>
-              <a:rPr lang="en-US" sz="600" dirty="0">
-                <a:solidFill>
-                  <a:schemeClr val="tx1"/>
-                </a:solidFill>
-              </a:rPr>
-              <a:t> </a:t>
-            </a:r>
-            <a:endParaRPr lang="en-US" sz="1200" dirty="0"/>
-          </a:p>
-          <a:p>
-            <a:pPr indent="0" marL="0">
-              <a:spcAft>
-                <a:spcPts val="300"/>
-              </a:spcAft>
-              <a:buNone/>
-            </a:pPr>
-            <a:r>
-              <a:rPr lang="en-US" sz="1400" b="1" dirty="0">
+              <a:t>Durata 7 · 10 · 21 anni</a:t>
+            </a:r>
+            <a:endParaRPr lang="en-US" sz="1150" dirty="0"/>
+          </a:p>
+        </p:txBody>
+      </p:sp>
+      <p:sp>
+        <p:nvSpPr>
+          <p:cNvPr id="7" name="Passo simulatore 2"/>
+          <p:cNvSpPr/>
+          <p:nvPr/>
+        </p:nvSpPr>
+        <p:spPr>
+          <a:xfrm>
+            <a:off x="2798064" y="5669280"/>
+            <a:ext cx="2103120" cy="566928"/>
+          </a:xfrm>
+          <a:prstGeom prst="roundRect">
+            <a:avLst>
+              <a:gd name="adj" fmla="val 19355"/>
+            </a:avLst>
+          </a:prstGeom>
+          <a:solidFill>
+            <a:schemeClr val="accent3"/>
+          </a:solidFill>
+          <a:ln w="12700">
+            <a:solidFill>
+              <a:schemeClr val="accent3"/>
+            </a:solidFill>
+            <a:prstDash val="solid"/>
+          </a:ln>
+        </p:spPr>
+      </p:sp>
+      <p:sp>
+        <p:nvSpPr>
+          <p:cNvPr id="8" name="Text 5"/>
+          <p:cNvSpPr txBox="1"/>
+          <p:nvPr/>
+        </p:nvSpPr>
+        <p:spPr>
+          <a:xfrm>
+            <a:off x="2889504" y="5669280"/>
+            <a:ext cx="1920240" cy="566928"/>
+          </a:xfrm>
+          <a:prstGeom prst="rect">
+            <a:avLst/>
+          </a:prstGeom>
+          <a:noFill/>
+          <a:ln/>
+        </p:spPr>
+        <p:txBody>
+          <a:bodyPr wrap="square" lIns="0" tIns="0" rIns="0" bIns="0" rtlCol="0" anchor="ctr"/>
+          <a:lstStyle/>
+          <a:p>
+            <a:pPr algn="ctr" indent="0" marL="0">
+              <a:buNone/>
+            </a:pPr>
+            <a:r>
+              <a:rPr lang="en-US" sz="1150" b="1" dirty="0">
                 <a:solidFill>
                   <a:schemeClr val="tx2"/>
                 </a:solidFill>
               </a:rPr>
-              <a:t>Costi per il Comune: Caso 1 o Caso 2?</a:t>
-            </a:r>
-            <a:endParaRPr lang="en-US" sz="1200" dirty="0"/>
-          </a:p>
-          <a:p>
-            <a:pPr indent="0" marL="0">
-              <a:spcAft>
-                <a:spcPts val="300"/>
-              </a:spcAft>
-              <a:buNone/>
-            </a:pPr>
-            <a:r>
-              <a:rPr lang="en-US" sz="1200" dirty="0">
-                <a:solidFill>
-                  <a:schemeClr val="tx1"/>
-                </a:solidFill>
-              </a:rPr>
-              <a:t>Caso 1 progetto volontario, Caso 2 progetto obbligatorio da bando di gara. Sei voci (Progetto, Rapporto, registrazioni) in € per abitante interpolati per popolazione, con minimo e massimo annuo (tabelle del 28/07/2026).</a:t>
-            </a:r>
-            <a:endParaRPr lang="en-US" sz="1200" dirty="0"/>
-          </a:p>
-          <a:p>
-            <a:pPr indent="0" marL="0">
-              <a:spcAft>
-                <a:spcPts val="300"/>
-              </a:spcAft>
-              <a:buNone/>
-            </a:pPr>
-            <a:r>
-              <a:rPr lang="en-US" sz="600" dirty="0">
-                <a:solidFill>
-                  <a:schemeClr val="tx1"/>
-                </a:solidFill>
-              </a:rPr>
-              <a:t> </a:t>
-            </a:r>
-            <a:endParaRPr lang="en-US" sz="1200" dirty="0"/>
-          </a:p>
-          <a:p>
-            <a:pPr indent="0" marL="0">
-              <a:spcAft>
-                <a:spcPts val="300"/>
-              </a:spcAft>
-              <a:buNone/>
-            </a:pPr>
-            <a:r>
-              <a:rPr lang="en-US" sz="1400" b="1" dirty="0">
+              <a:t>Riferimento Standard 4.8.1: anno al 65% o cluster</a:t>
+            </a:r>
+            <a:endParaRPr lang="en-US" sz="1150" dirty="0"/>
+          </a:p>
+        </p:txBody>
+      </p:sp>
+      <p:sp>
+        <p:nvSpPr>
+          <p:cNvPr id="9" name="Passo simulatore 3"/>
+          <p:cNvSpPr/>
+          <p:nvPr/>
+        </p:nvSpPr>
+        <p:spPr>
+          <a:xfrm>
+            <a:off x="5047488" y="5669280"/>
+            <a:ext cx="2103120" cy="566928"/>
+          </a:xfrm>
+          <a:prstGeom prst="roundRect">
+            <a:avLst>
+              <a:gd name="adj" fmla="val 19355"/>
+            </a:avLst>
+          </a:prstGeom>
+          <a:solidFill>
+            <a:schemeClr val="accent3"/>
+          </a:solidFill>
+          <a:ln w="12700">
+            <a:solidFill>
+              <a:schemeClr val="accent3"/>
+            </a:solidFill>
+            <a:prstDash val="solid"/>
+          </a:ln>
+        </p:spPr>
+      </p:sp>
+      <p:sp>
+        <p:nvSpPr>
+          <p:cNvPr id="10" name="Text 7"/>
+          <p:cNvSpPr txBox="1"/>
+          <p:nvPr/>
+        </p:nvSpPr>
+        <p:spPr>
+          <a:xfrm>
+            <a:off x="5138928" y="5669280"/>
+            <a:ext cx="1920240" cy="566928"/>
+          </a:xfrm>
+          <a:prstGeom prst="rect">
+            <a:avLst/>
+          </a:prstGeom>
+          <a:noFill/>
+          <a:ln/>
+        </p:spPr>
+        <p:txBody>
+          <a:bodyPr wrap="square" lIns="0" tIns="0" rIns="0" bIns="0" rtlCol="0" anchor="ctr"/>
+          <a:lstStyle/>
+          <a:p>
+            <a:pPr algn="ctr" indent="0" marL="0">
+              <a:buNone/>
+            </a:pPr>
+            <a:r>
+              <a:rPr lang="en-US" sz="1150" b="1" dirty="0">
                 <a:solidFill>
                   <a:schemeClr val="tx2"/>
                 </a:solidFill>
               </a:rPr>
-              <a:t>Bovisio-Masciago, 10 anni, 32 €/credito</a:t>
-            </a:r>
-            <a:endParaRPr lang="en-US" sz="1200" dirty="0"/>
-          </a:p>
-          <a:p>
-            <a:pPr indent="0" marL="0">
-              <a:spcAft>
-                <a:spcPts val="300"/>
-              </a:spcAft>
-              <a:buNone/>
-            </a:pPr>
-            <a:r>
-              <a:rPr lang="en-US" sz="1200" b="1" dirty="0">
-                <a:solidFill>
-                  <a:schemeClr val="tx1"/>
-                </a:solidFill>
-              </a:rPr>
-              <a:t>Per utenza (come Allegato A): </a:t>
-            </a:r>
-            <a:pPr indent="0" marL="0">
-              <a:spcAft>
-                <a:spcPts val="300"/>
-              </a:spcAft>
-              <a:buNone/>
-            </a:pPr>
-            <a:r>
-              <a:rPr lang="en-US" sz="1200" dirty="0">
-                <a:solidFill>
-                  <a:schemeClr val="tx1"/>
-                </a:solidFill>
-              </a:rPr>
-              <a:t>34.188 crediti, ricavi € 1.093.792</a:t>
-            </a:r>
-            <a:endParaRPr lang="en-US" sz="1200" dirty="0"/>
-          </a:p>
-          <a:p>
-            <a:pPr indent="0" marL="0">
-              <a:spcAft>
-                <a:spcPts val="300"/>
-              </a:spcAft>
-              <a:buNone/>
-            </a:pPr>
-            <a:r>
-              <a:rPr lang="en-US" sz="1200" dirty="0">
-                <a:solidFill>
-                  <a:schemeClr val="tx1"/>
-                </a:solidFill>
-              </a:rPr>
-              <a:t>Caso 1 costi € 162.330 → </a:t>
-            </a:r>
-            <a:pPr indent="0" marL="0">
-              <a:spcAft>
-                <a:spcPts val="300"/>
-              </a:spcAft>
-              <a:buNone/>
-            </a:pPr>
-            <a:r>
-              <a:rPr lang="en-US" sz="1200" b="1" dirty="0">
+              <a:t>Obiettivi annui e traiettoria automatica</a:t>
+            </a:r>
+            <a:endParaRPr lang="en-US" sz="1150" dirty="0"/>
+          </a:p>
+        </p:txBody>
+      </p:sp>
+      <p:sp>
+        <p:nvSpPr>
+          <p:cNvPr id="11" name="Passo simulatore 4"/>
+          <p:cNvSpPr/>
+          <p:nvPr/>
+        </p:nvSpPr>
+        <p:spPr>
+          <a:xfrm>
+            <a:off x="7296912" y="5669280"/>
+            <a:ext cx="2103120" cy="566928"/>
+          </a:xfrm>
+          <a:prstGeom prst="roundRect">
+            <a:avLst>
+              <a:gd name="adj" fmla="val 19355"/>
+            </a:avLst>
+          </a:prstGeom>
+          <a:solidFill>
+            <a:schemeClr val="accent3"/>
+          </a:solidFill>
+          <a:ln w="12700">
+            <a:solidFill>
+              <a:schemeClr val="accent3"/>
+            </a:solidFill>
+            <a:prstDash val="solid"/>
+          </a:ln>
+        </p:spPr>
+      </p:sp>
+      <p:sp>
+        <p:nvSpPr>
+          <p:cNvPr id="12" name="Text 9"/>
+          <p:cNvSpPr txBox="1"/>
+          <p:nvPr/>
+        </p:nvSpPr>
+        <p:spPr>
+          <a:xfrm>
+            <a:off x="7388352" y="5669280"/>
+            <a:ext cx="1920240" cy="566928"/>
+          </a:xfrm>
+          <a:prstGeom prst="rect">
+            <a:avLst/>
+          </a:prstGeom>
+          <a:noFill/>
+          <a:ln/>
+        </p:spPr>
+        <p:txBody>
+          <a:bodyPr wrap="square" lIns="0" tIns="0" rIns="0" bIns="0" rtlCol="0" anchor="ctr"/>
+          <a:lstStyle/>
+          <a:p>
+            <a:pPr algn="ctr" indent="0" marL="0">
+              <a:buNone/>
+            </a:pPr>
+            <a:r>
+              <a:rPr lang="en-US" sz="1150" b="1" dirty="0">
                 <a:solidFill>
                   <a:schemeClr val="tx2"/>
                 </a:solidFill>
               </a:rPr>
-              <a:t>+€ 931.463</a:t>
-            </a:r>
-            <a:endParaRPr lang="en-US" sz="1200" dirty="0"/>
-          </a:p>
-          <a:p>
-            <a:pPr indent="0" marL="0">
-              <a:spcAft>
-                <a:spcPts val="300"/>
-              </a:spcAft>
-              <a:buNone/>
-            </a:pPr>
-            <a:r>
-              <a:rPr lang="en-US" sz="1200" dirty="0">
-                <a:solidFill>
-                  <a:schemeClr val="tx1"/>
-                </a:solidFill>
-              </a:rPr>
-              <a:t>Caso 2 costi € 242.658 → </a:t>
-            </a:r>
-            <a:pPr indent="0" marL="0">
-              <a:spcAft>
-                <a:spcPts val="300"/>
-              </a:spcAft>
-              <a:buNone/>
-            </a:pPr>
-            <a:r>
-              <a:rPr lang="en-US" sz="1200" b="1" dirty="0">
+              <a:t>% differenziata ricalcolata</a:t>
+            </a:r>
+            <a:endParaRPr lang="en-US" sz="1150" dirty="0"/>
+          </a:p>
+        </p:txBody>
+      </p:sp>
+      <p:sp>
+        <p:nvSpPr>
+          <p:cNvPr id="13" name="Passo simulatore 5"/>
+          <p:cNvSpPr/>
+          <p:nvPr/>
+        </p:nvSpPr>
+        <p:spPr>
+          <a:xfrm>
+            <a:off x="9546336" y="5669280"/>
+            <a:ext cx="2103120" cy="566928"/>
+          </a:xfrm>
+          <a:prstGeom prst="roundRect">
+            <a:avLst>
+              <a:gd name="adj" fmla="val 19355"/>
+            </a:avLst>
+          </a:prstGeom>
+          <a:solidFill>
+            <a:schemeClr val="accent4"/>
+          </a:solidFill>
+          <a:ln w="12700">
+            <a:solidFill>
+              <a:schemeClr val="accent4"/>
+            </a:solidFill>
+            <a:prstDash val="solid"/>
+          </a:ln>
+        </p:spPr>
+      </p:sp>
+      <p:sp>
+        <p:nvSpPr>
+          <p:cNvPr id="14" name="Text 11"/>
+          <p:cNvSpPr txBox="1"/>
+          <p:nvPr/>
+        </p:nvSpPr>
+        <p:spPr>
+          <a:xfrm>
+            <a:off x="9637776" y="5669280"/>
+            <a:ext cx="1920240" cy="566928"/>
+          </a:xfrm>
+          <a:prstGeom prst="rect">
+            <a:avLst/>
+          </a:prstGeom>
+          <a:noFill/>
+          <a:ln/>
+        </p:spPr>
+        <p:txBody>
+          <a:bodyPr wrap="square" lIns="0" tIns="0" rIns="0" bIns="0" rtlCol="0" anchor="ctr"/>
+          <a:lstStyle/>
+          <a:p>
+            <a:pPr algn="ctr" indent="0" marL="0">
+              <a:buNone/>
+            </a:pPr>
+            <a:r>
+              <a:rPr lang="en-US" sz="1150" b="1" dirty="0">
                 <a:solidFill>
                   <a:schemeClr val="tx2"/>
                 </a:solidFill>
               </a:rPr>
-              <a:t>+€ 851.135</a:t>
-            </a:r>
-            <a:endParaRPr lang="en-US" sz="1200" dirty="0"/>
-          </a:p>
-          <a:p>
-            <a:pPr indent="0" marL="0">
-              <a:spcAft>
-                <a:spcPts val="300"/>
-              </a:spcAft>
-              <a:buNone/>
-            </a:pPr>
-            <a:r>
-              <a:rPr lang="en-US" sz="1200" b="1" dirty="0">
-                <a:solidFill>
-                  <a:schemeClr val="tx1"/>
-                </a:solidFill>
-              </a:rPr>
-              <a:t>Bilancio del Comune: </a:t>
-            </a:r>
-            <a:pPr indent="0" marL="0">
-              <a:spcAft>
-                <a:spcPts val="300"/>
-              </a:spcAft>
-              <a:buNone/>
-            </a:pPr>
-            <a:r>
-              <a:rPr lang="en-US" sz="1200" dirty="0">
-                <a:solidFill>
-                  <a:schemeClr val="tx1"/>
-                </a:solidFill>
-              </a:rPr>
-              <a:t>6.707 crediti, € 214.464; Caso 1 +€ 52.134, Caso 2 −€ 28.193</a:t>
-            </a:r>
-            <a:endParaRPr lang="en-US" sz="1200" dirty="0"/>
-          </a:p>
-          <a:p>
-            <a:pPr indent="0" marL="0">
-              <a:spcAft>
-                <a:spcPts val="300"/>
-              </a:spcAft>
-              <a:buNone/>
-            </a:pPr>
-            <a:r>
-              <a:rPr lang="en-US" sz="600" dirty="0">
-                <a:solidFill>
-                  <a:schemeClr val="tx1"/>
-                </a:solidFill>
-              </a:rPr>
-              <a:t> </a:t>
-            </a:r>
-            <a:endParaRPr lang="en-US" sz="1200" dirty="0"/>
-          </a:p>
-          <a:p>
-            <a:pPr indent="0" marL="0">
-              <a:spcAft>
-                <a:spcPts val="300"/>
-              </a:spcAft>
-              <a:buNone/>
-            </a:pPr>
-            <a:r>
-              <a:rPr lang="en-US" sz="1200" i="1" dirty="0">
-                <a:solidFill>
-                  <a:schemeClr val="accent6"/>
-                </a:solidFill>
-              </a:rPr>
-              <a:t>Il Caso 1 riproduce i costi dei contratti EsaCom, il metodo per utenza le loro stime (0,19-0,23 crediti per abitante all'anno).</a:t>
-            </a:r>
-            <a:endParaRPr lang="en-US" sz="1200" dirty="0"/>
+              <a:t>Crediti per anno, confronto, CSV e stampa</a:t>
+            </a:r>
+            <a:endParaRPr lang="en-US" sz="1150" dirty="0"/>
           </a:p>
         </p:txBody>
       </p:sp>
@@ -5060,6 +5472,467 @@
                 <a:ea typeface="Cambria" pitchFamily="34" charset="-122"/>
                 <a:cs typeface="Cambria" pitchFamily="34" charset="-120"/>
               </a:rPr>
+              <a:t>Simulazione economica: ricavi e costi per il Comune</a:t>
+            </a:r>
+            <a:endParaRPr lang="en-US" sz="3000" dirty="0"/>
+          </a:p>
+        </p:txBody>
+      </p:sp>
+      <p:pic>
+        <p:nvPicPr>
+          <p:cNvPr id="3" name="Schermata costi" descr="Simulatore, metodo per utenza: costi Caso 1 per 16.735 abitanti, ricavi, margine e margine netto per anno">    </p:cNvPr>
+          <p:cNvPicPr>
+            <a:picLocks noChangeAspect="1"/>
+          </p:cNvPicPr>
+          <p:nvPr/>
+        </p:nvPicPr>
+        <p:blipFill>
+          <a:blip r:embed="rId1"/>
+          <a:stretch>
+            <a:fillRect/>
+          </a:stretch>
+        </p:blipFill>
+        <p:spPr>
+          <a:xfrm>
+            <a:off x="548640" y="1188720"/>
+            <a:ext cx="6242333" cy="5029200"/>
+          </a:xfrm>
+          <a:prstGeom prst="rect">
+            <a:avLst/>
+          </a:prstGeom>
+        </p:spPr>
+      </p:pic>
+      <p:sp>
+        <p:nvSpPr>
+          <p:cNvPr id="4" name="Riquadro economia"/>
+          <p:cNvSpPr/>
+          <p:nvPr/>
+        </p:nvSpPr>
+        <p:spPr>
+          <a:xfrm>
+            <a:off x="7452360" y="1188720"/>
+            <a:ext cx="4160520" cy="5001768"/>
+          </a:xfrm>
+          <a:prstGeom prst="roundRect">
+            <a:avLst>
+              <a:gd name="adj" fmla="val 2637"/>
+            </a:avLst>
+          </a:prstGeom>
+          <a:solidFill>
+            <a:schemeClr val="bg2"/>
+          </a:solidFill>
+          <a:ln w="12700">
+            <a:solidFill>
+              <a:schemeClr val="bg2"/>
+            </a:solidFill>
+            <a:prstDash val="solid"/>
+          </a:ln>
+        </p:spPr>
+      </p:sp>
+      <p:sp>
+        <p:nvSpPr>
+          <p:cNvPr id="5" name="Text 2"/>
+          <p:cNvSpPr txBox="1"/>
+          <p:nvPr/>
+        </p:nvSpPr>
+        <p:spPr>
+          <a:xfrm>
+            <a:off x="7635240" y="1298448"/>
+            <a:ext cx="3794760" cy="4800600"/>
+          </a:xfrm>
+          <a:prstGeom prst="rect">
+            <a:avLst/>
+          </a:prstGeom>
+          <a:noFill/>
+          <a:ln/>
+        </p:spPr>
+        <p:txBody>
+          <a:bodyPr wrap="square" lIns="0" tIns="0" rIns="0" bIns="0" rtlCol="0" anchor="t"/>
+          <a:lstStyle/>
+          <a:p>
+            <a:pPr indent="0" marL="0">
+              <a:spcAft>
+                <a:spcPts val="300"/>
+              </a:spcAft>
+              <a:buNone/>
+            </a:pPr>
+            <a:r>
+              <a:rPr lang="en-US" sz="1400" b="1" dirty="0">
+                <a:solidFill>
+                  <a:schemeClr val="tx2"/>
+                </a:solidFill>
+              </a:rPr>
+              <a:t>Ricavi</a:t>
+            </a:r>
+            <a:endParaRPr lang="en-US" sz="1200" dirty="0"/>
+          </a:p>
+          <a:p>
+            <a:pPr indent="0" marL="0">
+              <a:spcAft>
+                <a:spcPts val="300"/>
+              </a:spcAft>
+              <a:buNone/>
+            </a:pPr>
+            <a:r>
+              <a:rPr lang="en-US" sz="1200" dirty="0">
+                <a:solidFill>
+                  <a:schemeClr val="tx1"/>
+                </a:solidFill>
+              </a:rPr>
+              <a:t>Valore del credito digitato anno per anno (proposto 32 €).</a:t>
+            </a:r>
+            <a:endParaRPr lang="en-US" sz="1200" dirty="0"/>
+          </a:p>
+          <a:p>
+            <a:pPr indent="0" marL="0">
+              <a:spcAft>
+                <a:spcPts val="300"/>
+              </a:spcAft>
+              <a:buNone/>
+            </a:pPr>
+            <a:r>
+              <a:rPr lang="en-US" sz="600" dirty="0">
+                <a:solidFill>
+                  <a:schemeClr val="tx1"/>
+                </a:solidFill>
+              </a:rPr>
+              <a:t> </a:t>
+            </a:r>
+            <a:endParaRPr lang="en-US" sz="1200" dirty="0"/>
+          </a:p>
+          <a:p>
+            <a:pPr indent="0" marL="0">
+              <a:spcAft>
+                <a:spcPts val="300"/>
+              </a:spcAft>
+              <a:buNone/>
+            </a:pPr>
+            <a:r>
+              <a:rPr lang="en-US" sz="1400" b="1" dirty="0">
+                <a:solidFill>
+                  <a:schemeClr val="tx2"/>
+                </a:solidFill>
+              </a:rPr>
+              <a:t>Costi per il Comune: Caso 1 o Caso 2?</a:t>
+            </a:r>
+            <a:endParaRPr lang="en-US" sz="1200" dirty="0"/>
+          </a:p>
+          <a:p>
+            <a:pPr indent="0" marL="0">
+              <a:spcAft>
+                <a:spcPts val="300"/>
+              </a:spcAft>
+              <a:buNone/>
+            </a:pPr>
+            <a:r>
+              <a:rPr lang="en-US" sz="1200" dirty="0">
+                <a:solidFill>
+                  <a:schemeClr val="tx1"/>
+                </a:solidFill>
+              </a:rPr>
+              <a:t>Caso 1 progetto volontario, Caso 2 progetto obbligatorio da bando di gara. Sei voci (Progetto, Rapporto, registrazioni) in € per abitante interpolati per popolazione, con minimo e massimo annuo (tabelle del 28/07/2026).</a:t>
+            </a:r>
+            <a:endParaRPr lang="en-US" sz="1200" dirty="0"/>
+          </a:p>
+          <a:p>
+            <a:pPr indent="0" marL="0">
+              <a:spcAft>
+                <a:spcPts val="300"/>
+              </a:spcAft>
+              <a:buNone/>
+            </a:pPr>
+            <a:r>
+              <a:rPr lang="en-US" sz="600" dirty="0">
+                <a:solidFill>
+                  <a:schemeClr val="tx1"/>
+                </a:solidFill>
+              </a:rPr>
+              <a:t> </a:t>
+            </a:r>
+            <a:endParaRPr lang="en-US" sz="1200" dirty="0"/>
+          </a:p>
+          <a:p>
+            <a:pPr indent="0" marL="0">
+              <a:spcAft>
+                <a:spcPts val="300"/>
+              </a:spcAft>
+              <a:buNone/>
+            </a:pPr>
+            <a:r>
+              <a:rPr lang="en-US" sz="1400" b="1" dirty="0">
+                <a:solidFill>
+                  <a:schemeClr val="tx2"/>
+                </a:solidFill>
+              </a:rPr>
+              <a:t>Bovisio-Masciago, 10 anni, 32 €/credito</a:t>
+            </a:r>
+            <a:endParaRPr lang="en-US" sz="1200" dirty="0"/>
+          </a:p>
+          <a:p>
+            <a:pPr indent="0" marL="0">
+              <a:spcAft>
+                <a:spcPts val="300"/>
+              </a:spcAft>
+              <a:buNone/>
+            </a:pPr>
+            <a:r>
+              <a:rPr lang="en-US" sz="1200" b="1" dirty="0">
+                <a:solidFill>
+                  <a:schemeClr val="tx1"/>
+                </a:solidFill>
+              </a:rPr>
+              <a:t>Per utenza (come Allegato A): </a:t>
+            </a:r>
+            <a:pPr indent="0" marL="0">
+              <a:spcAft>
+                <a:spcPts val="300"/>
+              </a:spcAft>
+              <a:buNone/>
+            </a:pPr>
+            <a:r>
+              <a:rPr lang="en-US" sz="1200" dirty="0">
+                <a:solidFill>
+                  <a:schemeClr val="tx1"/>
+                </a:solidFill>
+              </a:rPr>
+              <a:t>34.188 crediti, ricavi € 1.093.792</a:t>
+            </a:r>
+            <a:endParaRPr lang="en-US" sz="1200" dirty="0"/>
+          </a:p>
+          <a:p>
+            <a:pPr indent="0" marL="0">
+              <a:spcAft>
+                <a:spcPts val="300"/>
+              </a:spcAft>
+              <a:buNone/>
+            </a:pPr>
+            <a:r>
+              <a:rPr lang="en-US" sz="1200" dirty="0">
+                <a:solidFill>
+                  <a:schemeClr val="tx1"/>
+                </a:solidFill>
+              </a:rPr>
+              <a:t>Caso 1 costi € 162.330 → </a:t>
+            </a:r>
+            <a:pPr indent="0" marL="0">
+              <a:spcAft>
+                <a:spcPts val="300"/>
+              </a:spcAft>
+              <a:buNone/>
+            </a:pPr>
+            <a:r>
+              <a:rPr lang="en-US" sz="1200" b="1" dirty="0">
+                <a:solidFill>
+                  <a:schemeClr val="tx2"/>
+                </a:solidFill>
+              </a:rPr>
+              <a:t>+€ 931.463</a:t>
+            </a:r>
+            <a:endParaRPr lang="en-US" sz="1200" dirty="0"/>
+          </a:p>
+          <a:p>
+            <a:pPr indent="0" marL="0">
+              <a:spcAft>
+                <a:spcPts val="300"/>
+              </a:spcAft>
+              <a:buNone/>
+            </a:pPr>
+            <a:r>
+              <a:rPr lang="en-US" sz="1200" dirty="0">
+                <a:solidFill>
+                  <a:schemeClr val="tx1"/>
+                </a:solidFill>
+              </a:rPr>
+              <a:t>Caso 2 costi € 242.658 → </a:t>
+            </a:r>
+            <a:pPr indent="0" marL="0">
+              <a:spcAft>
+                <a:spcPts val="300"/>
+              </a:spcAft>
+              <a:buNone/>
+            </a:pPr>
+            <a:r>
+              <a:rPr lang="en-US" sz="1200" b="1" dirty="0">
+                <a:solidFill>
+                  <a:schemeClr val="tx2"/>
+                </a:solidFill>
+              </a:rPr>
+              <a:t>+€ 851.135</a:t>
+            </a:r>
+            <a:endParaRPr lang="en-US" sz="1200" dirty="0"/>
+          </a:p>
+          <a:p>
+            <a:pPr indent="0" marL="0">
+              <a:spcAft>
+                <a:spcPts val="300"/>
+              </a:spcAft>
+              <a:buNone/>
+            </a:pPr>
+            <a:r>
+              <a:rPr lang="en-US" sz="1200" b="1" dirty="0">
+                <a:solidFill>
+                  <a:schemeClr val="tx1"/>
+                </a:solidFill>
+              </a:rPr>
+              <a:t>Bilancio del Comune: </a:t>
+            </a:r>
+            <a:pPr indent="0" marL="0">
+              <a:spcAft>
+                <a:spcPts val="300"/>
+              </a:spcAft>
+              <a:buNone/>
+            </a:pPr>
+            <a:r>
+              <a:rPr lang="en-US" sz="1200" dirty="0">
+                <a:solidFill>
+                  <a:schemeClr val="tx1"/>
+                </a:solidFill>
+              </a:rPr>
+              <a:t>6.707 crediti, € 214.464; Caso 1 +€ 52.134, Caso 2 −€ 28.193</a:t>
+            </a:r>
+            <a:endParaRPr lang="en-US" sz="1200" dirty="0"/>
+          </a:p>
+          <a:p>
+            <a:pPr indent="0" marL="0">
+              <a:spcAft>
+                <a:spcPts val="300"/>
+              </a:spcAft>
+              <a:buNone/>
+            </a:pPr>
+            <a:r>
+              <a:rPr lang="en-US" sz="600" dirty="0">
+                <a:solidFill>
+                  <a:schemeClr val="tx1"/>
+                </a:solidFill>
+              </a:rPr>
+              <a:t> </a:t>
+            </a:r>
+            <a:endParaRPr lang="en-US" sz="1200" dirty="0"/>
+          </a:p>
+          <a:p>
+            <a:pPr indent="0" marL="0">
+              <a:spcAft>
+                <a:spcPts val="300"/>
+              </a:spcAft>
+              <a:buNone/>
+            </a:pPr>
+            <a:r>
+              <a:rPr lang="en-US" sz="1200" i="1" dirty="0">
+                <a:solidFill>
+                  <a:schemeClr val="accent6"/>
+                </a:solidFill>
+              </a:rPr>
+              <a:t>Il Caso 1 riproduce i costi dei contratti EsaCom, il metodo per utenza le loro stime (0,19-0,23 crediti per abitante all'anno).</a:t>
+            </a:r>
+            <a:endParaRPr lang="en-US" sz="1200" dirty="0"/>
+          </a:p>
+        </p:txBody>
+      </p:sp>
+      <p:sp>
+        <p:nvSpPr>
+          <p:cNvPr id="25" name="Slide Number Placeholder 0"/>
+          <p:cNvSpPr>
+            <a:spLocks noGrp="1"/>
+          </p:cNvSpPr>
+          <p:nvPr>
+            <p:ph type="sldNum" sz="quarter" idx="4294967295"/>
+          </p:nvPr>
+        </p:nvSpPr>
+        <p:spPr>
+          <a:xfrm>
+            <a:off x="11155680" y="6400800"/>
+            <a:ext cx="457200" cy="274320"/>
+          </a:xfrm>
+          <a:prstGeom prst="rect">
+            <a:avLst/>
+          </a:prstGeom>
+          <a:extLst>
+            <a:ext uri="{C572A759-6A51-4108-AA02-DFA0A04FC94B}">
+              <ma14:wrappingTextBoxFlag xmlns:ma14="http://schemas.microsoft.com/office/mac/drawingml/2011/main" val="0"/>
+            </a:ext>
+          </a:extLst>
+        </p:spPr>
+        <p:txBody>
+          <a:bodyPr/>
+          <a:lstStyle>
+            <a:lvl1pPr>
+              <a:defRPr sz="1000">
+                <a:solidFill>
+                  <a:schemeClr val="accent6"/>
+                </a:solidFill>
+              </a:defRPr>
+            </a:lvl1pPr>
+          </a:lstStyle>
+          <a:p>
+            <a:pPr algn="r"/>
+            <a:fld id="{F7021451-1387-4CA6-816F-3879F97B5CBC}" type="slidenum">
+              <a:rPr b="0" lang="en-US"/>
+              <a:t>13</a:t>
+            </a:fld>
+            <a:endParaRPr lang="en-US"/>
+          </a:p>
+        </p:txBody>
+      </p:sp>
+    </p:spTree>
+  </p:cSld>
+  <p:clrMapOvr>
+    <a:masterClrMapping/>
+  </p:clrMapOvr>
+</p:sld>
+</file>
+
+<file path=ppt/slides/slide14.xml><?xml version="1.0" encoding="utf-8"?>
+<p:sld xmlns:a="http://schemas.openxmlformats.org/drawingml/2006/main" xmlns:r="http://schemas.openxmlformats.org/officeDocument/2006/relationships" xmlns:p="http://schemas.openxmlformats.org/presentationml/2006/main">
+  <p:cSld name="Slide 14">
+    <p:spTree>
+      <p:nvGrpSpPr>
+        <p:cNvPr id="1" name=""/>
+        <p:cNvGrpSpPr/>
+        <p:nvPr/>
+      </p:nvGrpSpPr>
+      <p:grpSpPr>
+        <a:xfrm>
+          <a:off x="0" y="0"/>
+          <a:ext cx="0" cy="0"/>
+          <a:chOff x="0" y="0"/>
+          <a:chExt cx="0" cy="0"/>
+        </a:xfrm>
+      </p:grpSpPr>
+      <p:sp>
+        <p:nvSpPr>
+          <p:cNvPr id="2" name="Text 0"/>
+          <p:cNvSpPr/>
+          <p:nvPr>
+            <p:ph idx="100" type="title" hasCustomPrompt="1"/>
+          </p:nvPr>
+        </p:nvSpPr>
+        <p:spPr>
+          <a:xfrm>
+            <a:off x="548640" y="320040"/>
+            <a:ext cx="9144000" cy="731520"/>
+          </a:xfrm>
+          <a:prstGeom prst="rect">
+            <a:avLst/>
+          </a:prstGeom>
+          <a:noFill/>
+          <a:ln/>
+        </p:spPr>
+        <p:txBody>
+          <a:bodyPr wrap="square" lIns="0" tIns="0" rIns="0" bIns="0" rtlCol="0" anchor="ctr"/>
+          <a:lstStyle/>
+          <a:p>
+            <a:pPr algn="l" indent="0" marL="0">
+              <a:buNone/>
+            </a:pPr>
+            <a:r>
+              <a:rPr lang="en-US" sz="3000" b="1" dirty="0">
+                <a:solidFill>
+                  <a:schemeClr val="tx2"/>
+                </a:solidFill>
+                <a:latin typeface="Cambria" pitchFamily="34" charset="0"/>
+                <a:ea typeface="Cambria" pitchFamily="34" charset="-122"/>
+                <a:cs typeface="Cambria" pitchFamily="34" charset="-120"/>
+              </a:rPr>
               <a:t>Piani a pagamento: sicurezza e stabilità</a:t>
             </a:r>
             <a:endParaRPr lang="en-US" sz="3000" dirty="0"/>
@@ -5068,7 +5941,7 @@
       </p:sp>
       <p:graphicFrame>
         <p:nvGraphicFramePr>
-          <p:cNvPr id="14" name="Table 0"/>
+          <p:cNvPr id="15" name="Table 0"/>
           <p:cNvGraphicFramePr>
             <a:graphicFrameLocks noGrp="1"/>
           </p:cNvGraphicFramePr>
@@ -7175,7 +8048,7 @@
             <a:pPr algn="r"/>
             <a:fld id="{F7021451-1387-4CA6-816F-3879F97B5CBC}" type="slidenum">
               <a:rPr b="0" lang="en-US"/>
-              <a:t>13</a:t>
+              <a:t>14</a:t>
             </a:fld>
             <a:endParaRPr lang="en-US"/>
           </a:p>
@@ -7189,9 +8062,9 @@
 </p:sld>
 </file>
 
-<file path=ppt/slides/slide14.xml><?xml version="1.0" encoding="utf-8"?>
+<file path=ppt/slides/slide15.xml><?xml version="1.0" encoding="utf-8"?>
 <p:sld xmlns:a="http://schemas.openxmlformats.org/drawingml/2006/main" xmlns:r="http://schemas.openxmlformats.org/officeDocument/2006/relationships" xmlns:p="http://schemas.openxmlformats.org/presentationml/2006/main">
-  <p:cSld name="Slide 14">
+  <p:cSld name="Slide 15">
     <p:spTree>
       <p:nvGrpSpPr>
         <p:cNvPr id="1" name=""/>
@@ -7249,7 +8122,7 @@
       </p:sp>
       <p:graphicFrame>
         <p:nvGraphicFramePr>
-          <p:cNvPr id="15" name="Table 0"/>
+          <p:cNvPr id="16" name="Table 0"/>
           <p:cNvGraphicFramePr>
             <a:graphicFrameLocks noGrp="1"/>
           </p:cNvGraphicFramePr>
@@ -8029,7 +8902,7 @@
                             <a:schemeClr val="tx1"/>
                           </a:solidFill>
                         </a:rPr>
-                        <a:t>Scelte interpretative del calcolo (FEdes, segno del riuso, buffer, Tabella 16)</a:t>
+                        <a:t>Scelte interpretative del calcolo (FEdes, segno del riuso, buffer, Tabella 16, frazioni vuote per utenza)</a:t>
                       </a:r>
                       <a:endParaRPr lang="en-US" sz="1300" dirty="0"/>
                     </a:p>
@@ -8769,7 +9642,7 @@
                             <a:schemeClr val="tx1"/>
                           </a:solidFill>
                         </a:rPr>
-                        <a:t>Servizi: dominio operate.it, piani a pagamento, verifica in due passaggi, antivirus, Comune per il collaudo</a:t>
+                        <a:t>Servizi: dominio operate.it, piani a pagamento, verifica in due passaggi, antivirus, DPIA e accordo art. 28 per i dati delle utenze, Comune per il collaudo</a:t>
                       </a:r>
                       <a:endParaRPr lang="en-US" sz="1300" dirty="0"/>
                     </a:p>
@@ -8982,7 +9855,7 @@
             <a:pPr algn="r"/>
             <a:fld id="{F7021451-1387-4CA6-816F-3879F97B5CBC}" type="slidenum">
               <a:rPr b="0" lang="en-US"/>
-              <a:t>14</a:t>
+              <a:t>15</a:t>
             </a:fld>
             <a:endParaRPr lang="en-US"/>
           </a:p>
@@ -13235,7 +14108,7 @@
                 <a:ea typeface="Cambria" pitchFamily="34" charset="-122"/>
                 <a:cs typeface="Cambria" pitchFamily="34" charset="-120"/>
               </a:rPr>
-              <a:t>≈39.900</a:t>
+              <a:t>≈40.000</a:t>
             </a:r>
             <a:endParaRPr lang="en-US" sz="3000" dirty="0"/>
           </a:p>
@@ -14022,7 +14895,7 @@
                 <a:ea typeface="Cambria" pitchFamily="34" charset="-122"/>
                 <a:cs typeface="Cambria" pitchFamily="34" charset="-120"/>
               </a:rPr>
-              <a:t>172</a:t>
+              <a:t>175</a:t>
             </a:r>
             <a:endParaRPr lang="en-US" sz="2400" dirty="0"/>
           </a:p>
@@ -14181,7 +15054,7 @@
                 <a:ea typeface="Cambria" pitchFamily="34" charset="-122"/>
                 <a:cs typeface="Cambria" pitchFamily="34" charset="-120"/>
               </a:rPr>
-              <a:t>≈39.900</a:t>
+              <a:t>≈40.000</a:t>
             </a:r>
             <a:endParaRPr lang="en-US" sz="2400" dirty="0"/>
           </a:p>
@@ -17736,26 +18609,163 @@
                 <a:ea typeface="Cambria" pitchFamily="34" charset="-122"/>
                 <a:cs typeface="Cambria" pitchFamily="34" charset="-120"/>
               </a:rPr>
-              <a:t>Punti aperti: sviluppo e servizi da attivare</a:t>
+              <a:t>Novità del 22 e 23 ottobre</a:t>
             </a:r>
             <a:endParaRPr lang="en-US" sz="3000" dirty="0"/>
           </a:p>
         </p:txBody>
       </p:sp>
-      <p:sp>
-        <p:nvSpPr>
-          <p:cNvPr id="3" name="Colonna Sicurezza e infrastruttura"/>
+      <p:pic>
+        <p:nvPicPr>
+          <p:cNvPr id="3" name="Schermata valore dei crediti" descr="Dashboard: riquadri del valore dei crediti in simulazione e in fase esecutiva (dati di prova)">    </p:cNvPr>
+          <p:cNvPicPr>
+            <a:picLocks noChangeAspect="1"/>
+          </p:cNvPicPr>
+          <p:nvPr/>
+        </p:nvPicPr>
+        <p:blipFill>
+          <a:blip r:embed="rId1"/>
+          <a:stretch>
+            <a:fillRect/>
+          </a:stretch>
+        </p:blipFill>
+        <p:spPr>
+          <a:xfrm>
+            <a:off x="548640" y="1188720"/>
+            <a:ext cx="6949440" cy="1493268"/>
+          </a:xfrm>
+          <a:prstGeom prst="rect">
+            <a:avLst/>
+          </a:prstGeom>
+        </p:spPr>
+      </p:pic>
+      <p:sp>
+        <p:nvSpPr>
+          <p:cNvPr id="4" name="Text 1"/>
+          <p:cNvSpPr txBox="1"/>
+          <p:nvPr/>
+        </p:nvSpPr>
+        <p:spPr>
+          <a:xfrm>
+            <a:off x="548640" y="2727708"/>
+            <a:ext cx="6949440" cy="228600"/>
+          </a:xfrm>
+          <a:prstGeom prst="rect">
+            <a:avLst/>
+          </a:prstGeom>
+          <a:noFill/>
+          <a:ln/>
+        </p:spPr>
+        <p:txBody>
+          <a:bodyPr wrap="square" lIns="0" tIns="0" rIns="0" bIns="0" rtlCol="0" anchor="ctr"/>
+          <a:lstStyle/>
+          <a:p>
+            <a:pPr indent="0" marL="0">
+              <a:buNone/>
+            </a:pPr>
+            <a:r>
+              <a:rPr lang="en-US" sz="1000" i="1" dirty="0">
+                <a:solidFill>
+                  <a:schemeClr val="accent6"/>
+                </a:solidFill>
+              </a:rPr>
+              <a:t>Dashboard: valore dei crediti, dati di prova</a:t>
+            </a:r>
+            <a:endParaRPr lang="en-US" sz="1000" dirty="0"/>
+          </a:p>
+        </p:txBody>
+      </p:sp>
+      <p:sp>
+        <p:nvSpPr>
+          <p:cNvPr id="5" name="Valore crediti In simulazione"/>
           <p:cNvSpPr/>
           <p:nvPr/>
         </p:nvSpPr>
         <p:spPr>
           <a:xfrm>
-            <a:off x="548640" y="1325880"/>
-            <a:ext cx="3505200" cy="4846320"/>
+            <a:off x="548640" y="3063240"/>
+            <a:ext cx="2194560" cy="960120"/>
           </a:xfrm>
           <a:prstGeom prst="roundRect">
             <a:avLst>
-              <a:gd name="adj" fmla="val 3130"/>
+              <a:gd name="adj" fmla="val 11429"/>
+            </a:avLst>
+          </a:prstGeom>
+          <a:solidFill>
+            <a:schemeClr val="accent3"/>
+          </a:solidFill>
+          <a:ln w="12700">
+            <a:solidFill>
+              <a:schemeClr val="accent3"/>
+            </a:solidFill>
+            <a:prstDash val="solid"/>
+          </a:ln>
+        </p:spPr>
+      </p:sp>
+      <p:sp>
+        <p:nvSpPr>
+          <p:cNvPr id="6" name="Text 3"/>
+          <p:cNvSpPr txBox="1"/>
+          <p:nvPr/>
+        </p:nvSpPr>
+        <p:spPr>
+          <a:xfrm>
+            <a:off x="685800" y="3063240"/>
+            <a:ext cx="1920240" cy="960120"/>
+          </a:xfrm>
+          <a:prstGeom prst="rect">
+            <a:avLst/>
+          </a:prstGeom>
+          <a:noFill/>
+          <a:ln/>
+        </p:spPr>
+        <p:txBody>
+          <a:bodyPr wrap="square" lIns="0" tIns="0" rIns="0" bIns="0" rtlCol="0" anchor="ctr"/>
+          <a:lstStyle/>
+          <a:p>
+            <a:pPr indent="0" marL="0">
+              <a:buNone/>
+            </a:pPr>
+            <a:r>
+              <a:rPr lang="en-US" sz="1300" b="1" dirty="0">
+                <a:solidFill>
+                  <a:schemeClr val="tx2"/>
+                </a:solidFill>
+              </a:rPr>
+              <a:t>In simulazione</a:t>
+            </a:r>
+            <a:endParaRPr lang="en-US" sz="1300" dirty="0"/>
+          </a:p>
+          <a:p>
+            <a:pPr indent="0" marL="0">
+              <a:buNone/>
+            </a:pPr>
+            <a:r>
+              <a:rPr lang="en-US" sz="1150" dirty="0">
+                <a:solidFill>
+                  <a:schemeClr val="tx1"/>
+                </a:solidFill>
+              </a:rPr>
+              <a:t>ultimo scenario per Comune, crediti ed euro del periodo</a:t>
+            </a:r>
+            <a:endParaRPr lang="en-US" sz="1300" dirty="0"/>
+          </a:p>
+        </p:txBody>
+      </p:sp>
+      <p:sp>
+        <p:nvSpPr>
+          <p:cNvPr id="7" name="Valore crediti In fase esecutiva"/>
+          <p:cNvSpPr/>
+          <p:nvPr/>
+        </p:nvSpPr>
+        <p:spPr>
+          <a:xfrm>
+            <a:off x="2926080" y="3063240"/>
+            <a:ext cx="2194560" cy="960120"/>
+          </a:xfrm>
+          <a:prstGeom prst="roundRect">
+            <a:avLst>
+              <a:gd name="adj" fmla="val 11429"/>
             </a:avLst>
           </a:prstGeom>
           <a:solidFill>
@@ -17771,63 +18781,14 @@
       </p:sp>
       <p:sp>
         <p:nvSpPr>
-          <p:cNvPr id="4" name="Sicurezza e infrastruttura cerchio"/>
-          <p:cNvSpPr/>
-          <p:nvPr/>
-        </p:nvSpPr>
-        <p:spPr>
-          <a:xfrm>
-            <a:off x="777240" y="1554480"/>
-            <a:ext cx="548640" cy="548640"/>
-          </a:xfrm>
-          <a:prstGeom prst="ellipse">
-            <a:avLst/>
-          </a:prstGeom>
-          <a:solidFill>
-            <a:schemeClr val="tx2"/>
-          </a:solidFill>
-          <a:ln w="12700">
-            <a:solidFill>
-              <a:schemeClr val="tx2"/>
-            </a:solidFill>
-            <a:prstDash val="solid"/>
-          </a:ln>
-        </p:spPr>
-      </p:sp>
-      <p:pic>
-        <p:nvPicPr>
-          <p:cNvPr id="5" name="Sicurezza e infrastruttura icona" descr="preencoded.png">    </p:cNvPr>
-          <p:cNvPicPr>
-            <a:picLocks noChangeAspect="1"/>
-          </p:cNvPicPr>
-          <p:nvPr/>
-        </p:nvPicPr>
-        <p:blipFill>
-          <a:blip r:embed="rId1"/>
-          <a:stretch>
-            <a:fillRect/>
-          </a:stretch>
-        </p:blipFill>
-        <p:spPr>
-          <a:xfrm>
-            <a:off x="914400" y="1691640"/>
-            <a:ext cx="274320" cy="274320"/>
-          </a:xfrm>
-          <a:prstGeom prst="rect">
-            <a:avLst/>
-          </a:prstGeom>
-        </p:spPr>
-      </p:pic>
-      <p:sp>
-        <p:nvSpPr>
-          <p:cNvPr id="6" name="Text 3"/>
+          <p:cNvPr id="8" name="Text 5"/>
           <p:cNvSpPr txBox="1"/>
           <p:nvPr/>
         </p:nvSpPr>
         <p:spPr>
           <a:xfrm>
-            <a:off x="1463040" y="1508760"/>
-            <a:ext cx="2453640" cy="640080"/>
+            <a:off x="3063240" y="3063240"/>
+            <a:ext cx="1920240" cy="960120"/>
           </a:xfrm>
           <a:prstGeom prst="rect">
             <a:avLst/>
@@ -17843,143 +18804,45 @@
               <a:buNone/>
             </a:pPr>
             <a:r>
-              <a:rPr lang="en-US" sz="1700" b="1" dirty="0">
+              <a:rPr lang="en-US" sz="1300" b="1" dirty="0">
                 <a:solidFill>
                   <a:schemeClr val="tx2"/>
                 </a:solidFill>
               </a:rPr>
-              <a:t>Sicurezza e infrastruttura</a:t>
-            </a:r>
-            <a:endParaRPr lang="en-US" sz="1700" dirty="0"/>
-          </a:p>
-        </p:txBody>
-      </p:sp>
-      <p:sp>
-        <p:nvSpPr>
-          <p:cNvPr id="7" name="Text 4"/>
-          <p:cNvSpPr txBox="1"/>
-          <p:nvPr/>
-        </p:nvSpPr>
-        <p:spPr>
-          <a:xfrm>
-            <a:off x="822960" y="2286000"/>
-            <a:ext cx="3048000" cy="3749040"/>
-          </a:xfrm>
-          <a:prstGeom prst="rect">
-            <a:avLst/>
-          </a:prstGeom>
-          <a:noFill/>
-          <a:ln/>
-        </p:spPr>
-        <p:txBody>
-          <a:bodyPr wrap="square" lIns="0" tIns="0" rIns="0" bIns="0" rtlCol="0" anchor="t"/>
-          <a:lstStyle/>
-          <a:p>
-            <a:pPr marL="342900" indent="-342900">
-              <a:spcAft>
-                <a:spcPts val="700"/>
-              </a:spcAft>
-              <a:buSzPct val="100000"/>
-              <a:buChar char="•"/>
-            </a:pPr>
-            <a:r>
-              <a:rPr lang="en-US" sz="1350" dirty="0">
+              <a:t>In fase esecutiva</a:t>
+            </a:r>
+            <a:endParaRPr lang="en-US" sz="1300" dirty="0"/>
+          </a:p>
+          <a:p>
+            <a:pPr indent="0" marL="0">
+              <a:buNone/>
+            </a:pPr>
+            <a:r>
+              <a:rPr lang="en-US" sz="1150" dirty="0">
                 <a:solidFill>
                   <a:schemeClr val="tx1"/>
                 </a:solidFill>
               </a:rPr>
-              <a:t>Fatto il 20/10: registro degli accessi e avvisi di sicurezza, uscita per inattività, intestazioni del sito, librerie aggiornate (0 vulnerabilità)</a:t>
-            </a:r>
-            <a:endParaRPr lang="en-US" sz="1350" dirty="0"/>
-          </a:p>
-          <a:p>
-            <a:pPr marL="342900" indent="-342900">
-              <a:spcAft>
-                <a:spcPts val="700"/>
-              </a:spcAft>
-              <a:buSzPct val="100000"/>
-              <a:buChar char="•"/>
-            </a:pPr>
-            <a:r>
-              <a:rPr lang="en-US" sz="1350" dirty="0">
-                <a:solidFill>
-                  <a:schemeClr val="tx1"/>
-                </a:solidFill>
-              </a:rPr>
-              <a:t>Verifica in due passaggi per lo staff (pronta, spenta); CAPTCHA sulle pagine pubbliche</a:t>
-            </a:r>
-            <a:endParaRPr lang="en-US" sz="1350" dirty="0"/>
-          </a:p>
-          <a:p>
-            <a:pPr marL="342900" indent="-342900">
-              <a:spcAft>
-                <a:spcPts val="700"/>
-              </a:spcAft>
-              <a:buSzPct val="100000"/>
-              <a:buChar char="•"/>
-            </a:pPr>
-            <a:r>
-              <a:rPr lang="en-US" sz="1350" dirty="0">
-                <a:solidFill>
-                  <a:schemeClr val="tx1"/>
-                </a:solidFill>
-              </a:rPr>
-              <a:t>Antivirus sui file; verifica OWASP, test di intrusione a fine sviluppo</a:t>
-            </a:r>
-            <a:endParaRPr lang="en-US" sz="1350" dirty="0"/>
-          </a:p>
-          <a:p>
-            <a:pPr marL="342900" indent="-342900">
-              <a:spcAft>
-                <a:spcPts val="700"/>
-              </a:spcAft>
-              <a:buSzPct val="100000"/>
-              <a:buChar char="•"/>
-            </a:pPr>
-            <a:r>
-              <a:rPr lang="en-US" sz="1350" dirty="0">
-                <a:solidFill>
-                  <a:schemeClr val="tx1"/>
-                </a:solidFill>
-              </a:rPr>
-              <a:t>Backup automatico completo ogni giorno alle 20 dal Mac nella cartella Drive Cwp › backup (pronto, da installare sul Mac) e istruzioni di ripristino provate; da fare ambiente di prova e monitoraggio errori</a:t>
-            </a:r>
-            <a:endParaRPr lang="en-US" sz="1350" dirty="0"/>
-          </a:p>
-          <a:p>
-            <a:pPr marL="342900" indent="-342900">
-              <a:spcAft>
-                <a:spcPts val="700"/>
-              </a:spcAft>
-              <a:buSzPct val="100000"/>
-              <a:buChar char="•"/>
-            </a:pPr>
-            <a:r>
-              <a:rPr lang="en-US" sz="1350" dirty="0">
-                <a:solidFill>
-                  <a:schemeClr val="tx1"/>
-                </a:solidFill>
-              </a:rPr>
-              <a:t>Piani a pagamento e repository privato (slide «Piani a pagamento»); dominio email verificato, che serve anche alle email con le credenziali</a:t>
-            </a:r>
-            <a:endParaRPr lang="en-US" sz="1350" dirty="0"/>
-          </a:p>
-        </p:txBody>
-      </p:sp>
-      <p:sp>
-        <p:nvSpPr>
-          <p:cNvPr id="8" name="Colonna Avvio della piattaforma pubblica"/>
+              <a:t>calcolati, emessi e venduti; prezzo di riferimento 32 €</a:t>
+            </a:r>
+            <a:endParaRPr lang="en-US" sz="1300" dirty="0"/>
+          </a:p>
+        </p:txBody>
+      </p:sp>
+      <p:sp>
+        <p:nvSpPr>
+          <p:cNvPr id="9" name="Valore crediti Chi vede"/>
           <p:cNvSpPr/>
           <p:nvPr/>
         </p:nvSpPr>
         <p:spPr>
           <a:xfrm>
-            <a:off x="4328160" y="1325880"/>
-            <a:ext cx="3505200" cy="4846320"/>
+            <a:off x="5303520" y="3063240"/>
+            <a:ext cx="2194560" cy="960120"/>
           </a:xfrm>
           <a:prstGeom prst="roundRect">
             <a:avLst>
-              <a:gd name="adj" fmla="val 3130"/>
+              <a:gd name="adj" fmla="val 11429"/>
             </a:avLst>
           </a:prstGeom>
           <a:solidFill>
@@ -17995,63 +18858,91 @@
       </p:sp>
       <p:sp>
         <p:nvSpPr>
-          <p:cNvPr id="9" name="Avvio della piattaforma pubblica cerchio"/>
+          <p:cNvPr id="10" name="Text 7"/>
+          <p:cNvSpPr txBox="1"/>
+          <p:nvPr/>
+        </p:nvSpPr>
+        <p:spPr>
+          <a:xfrm>
+            <a:off x="5440680" y="3063240"/>
+            <a:ext cx="1920240" cy="960120"/>
+          </a:xfrm>
+          <a:prstGeom prst="rect">
+            <a:avLst/>
+          </a:prstGeom>
+          <a:noFill/>
+          <a:ln/>
+        </p:spPr>
+        <p:txBody>
+          <a:bodyPr wrap="square" lIns="0" tIns="0" rIns="0" bIns="0" rtlCol="0" anchor="ctr"/>
+          <a:lstStyle/>
+          <a:p>
+            <a:pPr indent="0" marL="0">
+              <a:buNone/>
+            </a:pPr>
+            <a:r>
+              <a:rPr lang="en-US" sz="1300" b="1" dirty="0">
+                <a:solidFill>
+                  <a:schemeClr val="tx2"/>
+                </a:solidFill>
+              </a:rPr>
+              <a:t>Chi vede</a:t>
+            </a:r>
+            <a:endParaRPr lang="en-US" sz="1300" dirty="0"/>
+          </a:p>
+          <a:p>
+            <a:pPr indent="0" marL="0">
+              <a:buNone/>
+            </a:pPr>
+            <a:r>
+              <a:rPr lang="en-US" sz="1150" dirty="0">
+                <a:solidFill>
+                  <a:schemeClr val="tx1"/>
+                </a:solidFill>
+              </a:rPr>
+              <a:t>staff: tutto; Comuni: solo i propri dati</a:t>
+            </a:r>
+            <a:endParaRPr lang="en-US" sz="1300" dirty="0"/>
+          </a:p>
+        </p:txBody>
+      </p:sp>
+      <p:sp>
+        <p:nvSpPr>
+          <p:cNvPr id="11" name="Banca Dati Utenze per utenza"/>
           <p:cNvSpPr/>
           <p:nvPr/>
         </p:nvSpPr>
         <p:spPr>
           <a:xfrm>
-            <a:off x="4556760" y="1554480"/>
-            <a:ext cx="548640" cy="548640"/>
-          </a:xfrm>
-          <a:prstGeom prst="ellipse">
-            <a:avLst/>
+            <a:off x="548640" y="4206240"/>
+            <a:ext cx="6949440" cy="2057400"/>
+          </a:xfrm>
+          <a:prstGeom prst="roundRect">
+            <a:avLst>
+              <a:gd name="adj" fmla="val 5333"/>
+            </a:avLst>
           </a:prstGeom>
           <a:solidFill>
-            <a:schemeClr val="accent2"/>
+            <a:schemeClr val="accent4"/>
           </a:solidFill>
           <a:ln w="12700">
             <a:solidFill>
-              <a:schemeClr val="accent2"/>
+              <a:schemeClr val="accent4"/>
             </a:solidFill>
             <a:prstDash val="solid"/>
           </a:ln>
         </p:spPr>
       </p:sp>
-      <p:pic>
-        <p:nvPicPr>
-          <p:cNvPr id="10" name="Avvio della piattaforma pubblica icona" descr="preencoded.png">    </p:cNvPr>
-          <p:cNvPicPr>
-            <a:picLocks noChangeAspect="1"/>
-          </p:cNvPicPr>
-          <p:nvPr/>
-        </p:nvPicPr>
-        <p:blipFill>
-          <a:blip r:embed="rId2"/>
-          <a:stretch>
-            <a:fillRect/>
-          </a:stretch>
-        </p:blipFill>
-        <p:spPr>
-          <a:xfrm>
-            <a:off x="4693920" y="1691640"/>
-            <a:ext cx="274320" cy="274320"/>
-          </a:xfrm>
-          <a:prstGeom prst="rect">
-            <a:avLst/>
-          </a:prstGeom>
-        </p:spPr>
-      </p:pic>
-      <p:sp>
-        <p:nvSpPr>
-          <p:cNvPr id="11" name="Text 7"/>
+      <p:sp>
+        <p:nvSpPr>
+          <p:cNvPr id="12" name="Text 9"/>
           <p:cNvSpPr txBox="1"/>
           <p:nvPr/>
         </p:nvSpPr>
         <p:spPr>
           <a:xfrm>
-            <a:off x="5242560" y="1508760"/>
-            <a:ext cx="2453640" cy="640080"/>
+            <a:off x="731520" y="4251960"/>
+            <a:ext cx="6583680" cy="1965960"/>
           </a:xfrm>
           <a:prstGeom prst="rect">
             <a:avLst/>
@@ -18067,143 +18958,45 @@
               <a:buNone/>
             </a:pPr>
             <a:r>
-              <a:rPr lang="en-US" sz="1700" b="1" dirty="0">
+              <a:rPr lang="en-US" sz="1350" b="1" dirty="0">
                 <a:solidFill>
                   <a:schemeClr val="tx2"/>
                 </a:solidFill>
               </a:rPr>
-              <a:t>Avvio della piattaforma pubblica</a:t>
-            </a:r>
-            <a:endParaRPr lang="en-US" sz="1700" dirty="0"/>
-          </a:p>
-        </p:txBody>
-      </p:sp>
-      <p:sp>
-        <p:nvSpPr>
-          <p:cNvPr id="12" name="Text 8"/>
-          <p:cNvSpPr txBox="1"/>
-          <p:nvPr/>
-        </p:nvSpPr>
-        <p:spPr>
-          <a:xfrm>
-            <a:off x="4602480" y="2286000"/>
-            <a:ext cx="3048000" cy="3749040"/>
-          </a:xfrm>
-          <a:prstGeom prst="rect">
-            <a:avLst/>
-          </a:prstGeom>
-          <a:noFill/>
-          <a:ln/>
-        </p:spPr>
-        <p:txBody>
-          <a:bodyPr wrap="square" lIns="0" tIns="0" rIns="0" bIns="0" rtlCol="0" anchor="t"/>
-          <a:lstStyle/>
-          <a:p>
-            <a:pPr marL="342900" indent="-342900">
-              <a:spcAft>
-                <a:spcPts val="700"/>
-              </a:spcAft>
-              <a:buSzPct val="100000"/>
-              <a:buChar char="•"/>
-            </a:pPr>
-            <a:r>
-              <a:rPr lang="en-US" sz="1350" dirty="0">
+              <a:t>Banca Dati Utenze per utenza (calcolo dei crediti)</a:t>
+            </a:r>
+            <a:endParaRPr lang="en-US" sz="1350" dirty="0"/>
+          </a:p>
+          <a:p>
+            <a:pPr indent="0" marL="0">
+              <a:buNone/>
+            </a:pPr>
+            <a:r>
+              <a:rPr lang="en-US" sz="1200" dirty="0">
                 <a:solidFill>
                   <a:schemeClr val="tx1"/>
                 </a:solidFill>
               </a:rPr>
-              <a:t>Pagina /programma attiva con gli 8 documenti ufficiali v1.2 e la Metodologia approvata</a:t>
+              <a:t>Ogni anno l'elenco completo delle utenze, domestiche e non domestiche, dal modello Excel: kg e svuotamenti per frazione, categoria tariffaria e di simulazione. Passo «5a» con schede, ricerca e un modulo per ogni utenza; «Calcola» usa le utenze (classe = categoria di simulazione, kg misurati). Nomi visibili solo allo staff, ogni consultazione nell'Audit.</a:t>
             </a:r>
             <a:endParaRPr lang="en-US" sz="1350" dirty="0"/>
           </a:p>
-          <a:p>
-            <a:pPr marL="342900" indent="-342900">
-              <a:spcAft>
-                <a:spcPts val="700"/>
-              </a:spcAft>
-              <a:buSzPct val="100000"/>
-              <a:buChar char="•"/>
-            </a:pPr>
-            <a:r>
-              <a:rPr lang="en-US" sz="1350" dirty="0">
-                <a:solidFill>
-                  <a:schemeClr val="tx1"/>
-                </a:solidFill>
-              </a:rPr>
-              <a:t>PEC del Programma per i reclami: operate@pec.it</a:t>
-            </a:r>
-            <a:endParaRPr lang="en-US" sz="1350" dirty="0"/>
-          </a:p>
-          <a:p>
-            <a:pPr marL="342900" indent="-342900">
-              <a:spcAft>
-                <a:spcPts val="700"/>
-              </a:spcAft>
-              <a:buSzPct val="100000"/>
-              <a:buChar char="•"/>
-            </a:pPr>
-            <a:r>
-              <a:rPr lang="en-US" sz="1350" dirty="0">
-                <a:solidFill>
-                  <a:schemeClr val="tx1"/>
-                </a:solidFill>
-              </a:rPr>
-              <a:t>Da inserire: enti di validazione e verifica e registri riconosciuti, modulistica</a:t>
-            </a:r>
-            <a:endParaRPr lang="en-US" sz="1350" dirty="0"/>
-          </a:p>
-          <a:p>
-            <a:pPr marL="342900" indent="-342900">
-              <a:spcAft>
-                <a:spcPts val="700"/>
-              </a:spcAft>
-              <a:buSzPct val="100000"/>
-              <a:buChar char="•"/>
-            </a:pPr>
-            <a:r>
-              <a:rPr lang="en-US" sz="1350" dirty="0">
-                <a:solidFill>
-                  <a:schemeClr val="tx1"/>
-                </a:solidFill>
-              </a:rPr>
-              <a:t>Accesso con SPID, CIE o CNS al feedback pubblico (adesione come fornitore di servizi)</a:t>
-            </a:r>
-            <a:endParaRPr lang="en-US" sz="1350" dirty="0"/>
-          </a:p>
-          <a:p>
-            <a:pPr marL="342900" indent="-342900">
-              <a:spcAft>
-                <a:spcPts val="700"/>
-              </a:spcAft>
-              <a:buSzPct val="100000"/>
-              <a:buChar char="•"/>
-            </a:pPr>
-            <a:r>
-              <a:rPr lang="en-US" sz="1350" dirty="0">
-                <a:solidFill>
-                  <a:schemeClr val="tx1"/>
-                </a:solidFill>
-              </a:rPr>
-              <a:t>Collaudo in corso con 5 Amministratori: correzioni dei rapporti V01 e V05 in produzione il 20-21/10; rilievi N01-N06 (22/10) corretti e in produzione; restano le regole metodologiche da confermare</a:t>
-            </a:r>
-            <a:endParaRPr lang="en-US" sz="1350" dirty="0"/>
-          </a:p>
-        </p:txBody>
-      </p:sp>
-      <p:sp>
-        <p:nvSpPr>
-          <p:cNvPr id="13" name="Colonna Qualità dei dati e completamenti"/>
+        </p:txBody>
+      </p:sp>
+      <p:sp>
+        <p:nvSpPr>
+          <p:cNvPr id="13" name="Elenco novità 22-23 ottobre"/>
           <p:cNvSpPr/>
           <p:nvPr/>
         </p:nvSpPr>
         <p:spPr>
           <a:xfrm>
-            <a:off x="8107680" y="1325880"/>
-            <a:ext cx="3505200" cy="4846320"/>
+            <a:off x="7726680" y="1188720"/>
+            <a:ext cx="3886200" cy="5074920"/>
           </a:xfrm>
           <a:prstGeom prst="roundRect">
             <a:avLst>
-              <a:gd name="adj" fmla="val 3130"/>
+              <a:gd name="adj" fmla="val 2824"/>
             </a:avLst>
           </a:prstGeom>
           <a:solidFill>
@@ -18219,63 +19012,14 @@
       </p:sp>
       <p:sp>
         <p:nvSpPr>
-          <p:cNvPr id="14" name="Qualità dei dati e completamenti cerchio"/>
-          <p:cNvSpPr/>
-          <p:nvPr/>
-        </p:nvSpPr>
-        <p:spPr>
-          <a:xfrm>
-            <a:off x="8336280" y="1554480"/>
-            <a:ext cx="548640" cy="548640"/>
-          </a:xfrm>
-          <a:prstGeom prst="ellipse">
-            <a:avLst/>
-          </a:prstGeom>
-          <a:solidFill>
-            <a:schemeClr val="tx2"/>
-          </a:solidFill>
-          <a:ln w="12700">
-            <a:solidFill>
-              <a:schemeClr val="tx2"/>
-            </a:solidFill>
-            <a:prstDash val="solid"/>
-          </a:ln>
-        </p:spPr>
-      </p:sp>
-      <p:pic>
-        <p:nvPicPr>
-          <p:cNvPr id="15" name="Qualità dei dati e completamenti icona" descr="preencoded.png">    </p:cNvPr>
-          <p:cNvPicPr>
-            <a:picLocks noChangeAspect="1"/>
-          </p:cNvPicPr>
-          <p:nvPr/>
-        </p:nvPicPr>
-        <p:blipFill>
-          <a:blip r:embed="rId3"/>
-          <a:stretch>
-            <a:fillRect/>
-          </a:stretch>
-        </p:blipFill>
-        <p:spPr>
-          <a:xfrm>
-            <a:off x="8473440" y="1691640"/>
-            <a:ext cx="274320" cy="274320"/>
-          </a:xfrm>
-          <a:prstGeom prst="rect">
-            <a:avLst/>
-          </a:prstGeom>
-        </p:spPr>
-      </p:pic>
-      <p:sp>
-        <p:nvSpPr>
-          <p:cNvPr id="16" name="Text 11"/>
+          <p:cNvPr id="14" name="Text 11"/>
           <p:cNvSpPr txBox="1"/>
           <p:nvPr/>
         </p:nvSpPr>
         <p:spPr>
           <a:xfrm>
-            <a:off x="9022080" y="1508760"/>
-            <a:ext cx="2453640" cy="640080"/>
+            <a:off x="7909560" y="1325880"/>
+            <a:ext cx="3566160" cy="4846320"/>
           </a:xfrm>
           <a:prstGeom prst="rect">
             <a:avLst/>
@@ -18284,131 +19028,175 @@
           <a:ln/>
         </p:spPr>
         <p:txBody>
-          <a:bodyPr wrap="square" lIns="0" tIns="0" rIns="0" bIns="0" rtlCol="0" anchor="ctr"/>
-          <a:lstStyle/>
-          <a:p>
-            <a:pPr indent="0" marL="0">
-              <a:buNone/>
-            </a:pPr>
-            <a:r>
-              <a:rPr lang="en-US" sz="1700" b="1" dirty="0">
-                <a:solidFill>
-                  <a:schemeClr val="tx2"/>
-                </a:solidFill>
-              </a:rPr>
-              <a:t>Qualità dei dati e completamenti</a:t>
-            </a:r>
-            <a:endParaRPr lang="en-US" sz="1700" dirty="0"/>
-          </a:p>
-        </p:txBody>
-      </p:sp>
-      <p:sp>
-        <p:nvSpPr>
-          <p:cNvPr id="17" name="Text 12"/>
-          <p:cNvSpPr txBox="1"/>
-          <p:nvPr/>
-        </p:nvSpPr>
-        <p:spPr>
-          <a:xfrm>
-            <a:off x="8382000" y="2286000"/>
-            <a:ext cx="3048000" cy="3749040"/>
-          </a:xfrm>
-          <a:prstGeom prst="rect">
-            <a:avLst/>
-          </a:prstGeom>
-          <a:noFill/>
-          <a:ln/>
-        </p:spPr>
-        <p:txBody>
           <a:bodyPr wrap="square" lIns="0" tIns="0" rIns="0" bIns="0" rtlCol="0" anchor="t"/>
           <a:lstStyle/>
           <a:p>
-            <a:pPr marL="342900" indent="-342900">
+            <a:pPr indent="0" marL="0">
               <a:spcAft>
-                <a:spcPts val="700"/>
+                <a:spcPts val="500"/>
               </a:spcAft>
-              <a:buSzPct val="100000"/>
-              <a:buChar char="•"/>
-            </a:pPr>
-            <a:r>
-              <a:rPr lang="en-US" sz="1350" dirty="0">
+              <a:buNone/>
+            </a:pPr>
+            <a:r>
+              <a:rPr lang="en-US" sz="1350" b="1" dirty="0">
+                <a:solidFill>
+                  <a:schemeClr val="tx2"/>
+                </a:solidFill>
+              </a:rPr>
+              <a:t>Collaudo</a:t>
+            </a:r>
+            <a:endParaRPr lang="en-US" sz="1350" dirty="0"/>
+          </a:p>
+          <a:p>
+            <a:pPr indent="0" marL="0">
+              <a:spcAft>
+                <a:spcPts val="500"/>
+              </a:spcAft>
+              <a:buNone/>
+            </a:pPr>
+            <a:r>
+              <a:rPr lang="en-US" sz="1200" dirty="0">
                 <a:solidFill>
                   <a:schemeClr val="tx1"/>
                 </a:solidFill>
               </a:rPr>
-              <a:t>Dati ufficiali per i controlli: popolazione e cluster SOSE di ogni Comune</a:t>
+              <a:t>rilievi N01-N04 corretti e in produzione (22/10); N05 e N06 in attesa della regola della Fondazione</a:t>
             </a:r>
             <a:endParaRPr lang="en-US" sz="1350" dirty="0"/>
           </a:p>
           <a:p>
-            <a:pPr marL="342900" indent="-342900">
+            <a:pPr indent="0" marL="0">
               <a:spcAft>
-                <a:spcPts val="700"/>
+                <a:spcPts val="500"/>
               </a:spcAft>
-              <a:buSzPct val="100000"/>
-              <a:buChar char="•"/>
-            </a:pPr>
-            <a:r>
-              <a:rPr lang="en-US" sz="1350" dirty="0">
+              <a:buNone/>
+            </a:pPr>
+            <a:r>
+              <a:rPr lang="en-US" sz="1350" b="1" dirty="0">
+                <a:solidFill>
+                  <a:schemeClr val="tx2"/>
+                </a:solidFill>
+              </a:rPr>
+              <a:t>Smartphone</a:t>
+            </a:r>
+            <a:endParaRPr lang="en-US" sz="1350" dirty="0"/>
+          </a:p>
+          <a:p>
+            <a:pPr indent="0" marL="0">
+              <a:spcAft>
+                <a:spcPts val="500"/>
+              </a:spcAft>
+              <a:buNone/>
+            </a:pPr>
+            <a:r>
+              <a:rPr lang="en-US" sz="1200" dirty="0">
                 <a:solidFill>
                   <a:schemeClr val="tx1"/>
                 </a:solidFill>
               </a:rPr>
-              <a:t>Conferma delle scelte interpretative del calcolo con l'ente</a:t>
+              <a:t>menu a pannello, schede al posto delle tabelle, pratiche una alla volta, assistente a schermo intero (22/10)</a:t>
             </a:r>
             <a:endParaRPr lang="en-US" sz="1350" dirty="0"/>
           </a:p>
           <a:p>
-            <a:pPr marL="342900" indent="-342900">
+            <a:pPr indent="0" marL="0">
               <a:spcAft>
-                <a:spcPts val="700"/>
+                <a:spcPts val="500"/>
               </a:spcAft>
-              <a:buSzPct val="100000"/>
-              <a:buChar char="•"/>
-            </a:pPr>
-            <a:r>
-              <a:rPr lang="en-US" sz="1350" dirty="0">
+              <a:buNone/>
+            </a:pPr>
+            <a:r>
+              <a:rPr lang="en-US" sz="1350" b="1" dirty="0">
+                <a:solidFill>
+                  <a:schemeClr val="tx2"/>
+                </a:solidFill>
+              </a:rPr>
+              <a:t>Dashboard</a:t>
+            </a:r>
+            <a:endParaRPr lang="en-US" sz="1350" dirty="0"/>
+          </a:p>
+          <a:p>
+            <a:pPr indent="0" marL="0">
+              <a:spcAft>
+                <a:spcPts val="500"/>
+              </a:spcAft>
+              <a:buNone/>
+            </a:pPr>
+            <a:r>
+              <a:rPr lang="en-US" sz="1200" dirty="0">
                 <a:solidFill>
                   <a:schemeClr val="tx1"/>
                 </a:solidFill>
               </a:rPr>
-              <a:t>Privacy: DPIA, registro dei trattamenti; accessibilità WCAG 2.1 AA</a:t>
+              <a:t>fasi aperte senza scadenza (22/10); valore dei crediti in simulazione e in fase esecutiva, anche per i Comuni (23/10)</a:t>
             </a:r>
             <a:endParaRPr lang="en-US" sz="1350" dirty="0"/>
           </a:p>
           <a:p>
-            <a:pPr marL="342900" indent="-342900">
+            <a:pPr indent="0" marL="0">
               <a:spcAft>
-                <a:spcPts val="700"/>
+                <a:spcPts val="500"/>
               </a:spcAft>
-              <a:buSzPct val="100000"/>
-              <a:buChar char="•"/>
-            </a:pPr>
-            <a:r>
-              <a:rPr lang="en-US" sz="1350" dirty="0">
+              <a:buNone/>
+            </a:pPr>
+            <a:r>
+              <a:rPr lang="en-US" sz="1350" b="1" dirty="0">
+                <a:solidFill>
+                  <a:schemeClr val="tx2"/>
+                </a:solidFill>
+              </a:rPr>
+              <a:t>Calcolo crediti</a:t>
+            </a:r>
+            <a:endParaRPr lang="en-US" sz="1350" dirty="0"/>
+          </a:p>
+          <a:p>
+            <a:pPr indent="0" marL="0">
+              <a:spcAft>
+                <a:spcPts val="500"/>
+              </a:spcAft>
+              <a:buNone/>
+            </a:pPr>
+            <a:r>
+              <a:rPr lang="en-US" sz="1200" dirty="0">
                 <a:solidFill>
                   <a:schemeClr val="tx1"/>
                 </a:solidFill>
               </a:rPr>
-              <a:t>Collaudo con i dati reali di un Comune</a:t>
+              <a:t>Banca Dati Utenze per utenza e collegamento al motore; calcolo di prova con 20 + 20 utenze inventate (22-23/10)</a:t>
             </a:r>
             <a:endParaRPr lang="en-US" sz="1350" dirty="0"/>
           </a:p>
           <a:p>
-            <a:pPr marL="342900" indent="-342900">
+            <a:pPr indent="0" marL="0">
               <a:spcAft>
-                <a:spcPts val="700"/>
+                <a:spcPts val="500"/>
               </a:spcAft>
-              <a:buSzPct val="100000"/>
-              <a:buChar char="•"/>
-            </a:pPr>
-            <a:r>
-              <a:rPr lang="en-US" sz="1350" dirty="0">
+              <a:buNone/>
+            </a:pPr>
+            <a:r>
+              <a:rPr lang="en-US" sz="1350" b="1" dirty="0">
+                <a:solidFill>
+                  <a:schemeClr val="tx2"/>
+                </a:solidFill>
+              </a:rPr>
+              <a:t>Notizie CO2 e backup</a:t>
+            </a:r>
+            <a:endParaRPr lang="en-US" sz="1350" dirty="0"/>
+          </a:p>
+          <a:p>
+            <a:pPr indent="0" marL="0">
+              <a:spcAft>
+                <a:spcPts val="500"/>
+              </a:spcAft>
+              <a:buNone/>
+            </a:pPr>
+            <a:r>
+              <a:rPr lang="en-US" sz="1200" dirty="0">
                 <a:solidFill>
                   <a:schemeClr val="tx1"/>
                 </a:solidFill>
               </a:rPr>
-              <a:t>Nuovi moduli: simulatore con PDF ed Excel, assistente virtuale (poi Operatori e aiuto sulla pratica), Audit User e utenti online (fatti il 20/10); navigazione da smartphone (22/10); Banca Dati Utenze per utenza nel calcolo (22-23/10); valore dei crediti in Dashboard (23/10); Marketplaces da definire</a:t>
+              <a:t>14 siti verificati; backup giornaliero dal Mac pronto da installare</a:t>
             </a:r>
             <a:endParaRPr lang="en-US" sz="1350" dirty="0"/>
           </a:p>

--- a/public/documentazione/Presentazione_Portale_CWP.pptx
+++ b/public/documentazione/Presentazione_Portale_CWP.pptx
@@ -121,40 +121,40 @@
   <p:extLst>
     <p:ext uri="{521415D9-36F7-43E2-AB2F-B90AF26B5E84}">
       <p14:sectionLst xmlns:p14="http://schemas.microsoft.com/office/powerpoint/2010/main">
-        <p14:section name="Apertura" id="{c764f858-4a5a-cbcf-bbff-53ca1659af27}">
+        <p14:section name="Apertura" id="{72dcf85d-d1b3-032d-7c76-5762c9d9b1f2}">
           <p14:sldIdLst>
             <p14:sldId id="256"/>
           </p14:sldIdLst>
         </p14:section>
-        <p14:section name="Metodologia" id="{3ca88c82-d409-4ff8-8c0b-c0ecb883c577}">
+        <p14:section name="Metodologia" id="{704cd747-cd24-4d94-fc55-a5156337ede7}">
           <p14:sldIdLst>
             <p14:sldId id="257"/>
           </p14:sldIdLst>
         </p14:section>
-        <p14:section name="Analisi funzionale" id="{bbcfda94-a260-b3d0-505b-ee8a3d6d6090}">
+        <p14:section name="Analisi funzionale" id="{7aea13a9-ba6d-b47b-7275-2fbdacd2e1a8}">
           <p14:sldIdLst>
             <p14:sldId id="258"/>
             <p14:sldId id="259"/>
           </p14:sldIdLst>
         </p14:section>
-        <p14:section name="Già realtà" id="{43986d8e-6acf-ed87-8fcc-2a110d69635b}">
+        <p14:section name="Già realtà" id="{f8fa33dd-19da-1cb8-c46b-644204232470}">
           <p14:sldIdLst>
             <p14:sldId id="260"/>
           </p14:sldIdLst>
         </p14:section>
-        <p14:section name="Architettura e ruoli" id="{0d8cd8b9-9e97-a6ef-7cc5-ed3579b81464}">
+        <p14:section name="Architettura e ruoli" id="{c391fc6a-bae1-76c8-05c0-3d7eab2e638b}">
           <p14:sldIdLst>
             <p14:sldId id="261"/>
             <p14:sldId id="262"/>
           </p14:sldIdLst>
         </p14:section>
-        <p14:section name="Novità" id="{39a78928-7fc8-384a-90d6-d3b0de56b63c}">
+        <p14:section name="Novità" id="{e8151675-4c11-0eda-fb5b-a4fe0bb7e986}">
           <p14:sldIdLst>
             <p14:sldId id="263"/>
             <p14:sldId id="264"/>
           </p14:sldIdLst>
         </p14:section>
-        <p14:section name="Punti aperti" id="{86fb6a3f-d7cd-7057-ae3e-fde3dd5ab4e1}">
+        <p14:section name="Punti aperti" id="{23d060e4-995d-e197-4ee6-318309b81da3}">
           <p14:sldIdLst>
             <p14:sldId id="265"/>
             <p14:sldId id="266"/>
@@ -163,7 +163,7 @@
             <p14:sldId id="269"/>
           </p14:sldIdLst>
         </p14:section>
-        <p14:section name="Scelte da prendere" id="{d21a8fa7-dcda-c6be-5f4e-588fc6abe770}">
+        <p14:section name="Scelte da prendere" id="{f234ab9a-4333-25d8-2094-c4a115f64894}">
           <p14:sldIdLst>
             <p14:sldId id="270"/>
           </p14:sldIdLst>
@@ -572,7 +572,7 @@
           <a:p>
             <a:r>
               <a:rPr lang="en-US" dirty="0"/>
-              <a:t>Presentazione di riepilogo del portale, aggiornata al 23 ottobre 2026 (revisione 3.9): metodologia, funzioni realizzate, novità, punti aperti di sviluppo e scelte ancora da prendere. Si rigenera a ogni rilascio insieme agli altri documenti ed è disponibile agli Amministratori nella pagina Documentazione del portale.</a:t>
+              <a:t>Presentazione di riepilogo del portale, aggiornata al 23 ottobre 2026 (revisione 4.0): metodologia, funzioni realizzate, novità, punti aperti di sviluppo e scelte ancora da prendere. Si rigenera a ogni rilascio insieme agli altri documenti ed è disponibile agli Amministratori nella pagina Documentazione del portale.</a:t>
             </a:r>
             <a:endParaRPr lang="en-US" dirty="0"/>
           </a:p>
@@ -1452,7 +1452,7 @@
           <a:p>
             <a:r>
               <a:rPr lang="en-US" dirty="0"/>
-              <a:t>Pagina «effetto sorpresa»: nessuno si aspetta che il portale sia già online. Il sistema è stato realizzato da Luca Moretti con l'ausilio di Claude Code ed è quasi terminato; i servizi sono già in produzione: GitHub (codice), Vercel (pubblicazione del portale), Supabase (database, utenti, documenti, funzioni) e Resend (email). Il portale è pubblicato su portale-cwp.vercel.app e funziona con dati di prova: si può aprire durante la presentazione (collegamento cliccabile) o inquadrare il codice QR con il telefono. La pagina pubblica /programma mostra già gli 8 documenti ufficiali del Programma, la Metodologia approvata, la PEC e il soggetto promotore. Lo sviluppo del portale vero è partito il 17 ottobre 2026: da allora sono state pubblicate 175 versioni, 42 script del database e 7 funzioni sul server. Restano i punti aperti delle prossime slide (servizi a pagamento, sicurezza, dati da inserire, collaudo con un Comune). Suggerimento: aprire il portale dal vivo con un utente di prova e mostrare la pagina pubblica.</a:t>
+              <a:t>Pagina «effetto sorpresa»: nessuno si aspetta che il portale sia già online. Il sistema è stato realizzato da Luca Moretti con l'ausilio di Claude Code ed è quasi terminato; i servizi sono già in produzione: GitHub (codice), Vercel (pubblicazione del portale), Supabase (database, utenti, documenti, funzioni) e Resend (email). Il portale è pubblicato su portale-cwp.vercel.app e funziona con dati di prova: si può aprire durante la presentazione (collegamento cliccabile) o inquadrare il codice QR con il telefono. La pagina pubblica /programma mostra già gli 8 documenti ufficiali del Programma, la Metodologia approvata, la PEC e il soggetto promotore. Lo sviluppo del portale vero è partito il 17 ottobre 2026: da allora sono state pubblicate 177 versioni, 43 script del database e 7 funzioni sul server. Restano i punti aperti delle prossime slide (servizi a pagamento, sicurezza, dati da inserire, collaudo con un Comune). Suggerimento: aprire il portale dal vivo con un utente di prova e mostrare la pagina pubblica.</a:t>
             </a:r>
             <a:endParaRPr lang="en-US" dirty="0"/>
           </a:p>
@@ -2163,7 +2163,7 @@
                   <a:schemeClr val="accent6"/>
                 </a:solidFill>
               </a:rPr>
-              <a:t>Portale Carbon WastePrint · Stato dei lavori e recap · 23 ottobre 2026 · rev. 3.9</a:t>
+              <a:t>Portale Carbon WastePrint · Stato dei lavori e recap · 23 ottobre 2026 · rev. 4.0</a:t>
             </a:r>
             <a:endParaRPr lang="en-US" sz="1000" dirty="0"/>
           </a:p>
@@ -2661,7 +2661,7 @@
                   <a:schemeClr val="accent3"/>
                 </a:solidFill>
               </a:rPr>
-              <a:t>Stato dei lavori e recap: metodologia, funzioni, novità, punti aperti e scelte da prendere · aggiornata al 23 ottobre 2026 · rev. 3.9</a:t>
+              <a:t>Stato dei lavori e recap: metodologia, funzioni, novità, punti aperti e scelte da prendere · aggiornata al 23 ottobre 2026 · rev. 4.0</a:t>
             </a:r>
             <a:endParaRPr lang="en-US" sz="1800" dirty="0"/>
           </a:p>
@@ -13802,7 +13802,7 @@
                 <a:ea typeface="Cambria" pitchFamily="34" charset="-122"/>
                 <a:cs typeface="Cambria" pitchFamily="34" charset="-120"/>
               </a:rPr>
-              <a:t>42</a:t>
+              <a:t>43</a:t>
             </a:r>
             <a:endParaRPr lang="en-US" sz="3000" dirty="0"/>
           </a:p>
@@ -14108,7 +14108,7 @@
                 <a:ea typeface="Cambria" pitchFamily="34" charset="-122"/>
                 <a:cs typeface="Cambria" pitchFamily="34" charset="-120"/>
               </a:rPr>
-              <a:t>≈40.000</a:t>
+              <a:t>≈40.400</a:t>
             </a:r>
             <a:endParaRPr lang="en-US" sz="3000" dirty="0"/>
           </a:p>
@@ -14895,7 +14895,7 @@
                 <a:ea typeface="Cambria" pitchFamily="34" charset="-122"/>
                 <a:cs typeface="Cambria" pitchFamily="34" charset="-120"/>
               </a:rPr>
-              <a:t>175</a:t>
+              <a:t>177</a:t>
             </a:r>
             <a:endParaRPr lang="en-US" sz="2400" dirty="0"/>
           </a:p>
@@ -14948,7 +14948,7 @@
                 <a:ea typeface="Cambria" pitchFamily="34" charset="-122"/>
                 <a:cs typeface="Cambria" pitchFamily="34" charset="-120"/>
               </a:rPr>
-              <a:t>42</a:t>
+              <a:t>43</a:t>
             </a:r>
             <a:endParaRPr lang="en-US" sz="2400" dirty="0"/>
           </a:p>
@@ -15054,7 +15054,7 @@
                 <a:ea typeface="Cambria" pitchFamily="34" charset="-122"/>
                 <a:cs typeface="Cambria" pitchFamily="34" charset="-120"/>
               </a:rPr>
-              <a:t>≈40.000</a:t>
+              <a:t>≈40.400</a:t>
             </a:r>
             <a:endParaRPr lang="en-US" sz="2400" dirty="0"/>
           </a:p>
@@ -18831,7 +18831,7 @@
       </p:sp>
       <p:sp>
         <p:nvSpPr>
-          <p:cNvPr id="9" name="Valore crediti Chi vede"/>
+          <p:cNvPr id="9" name="Valore crediti Valore progetti"/>
           <p:cNvSpPr/>
           <p:nvPr/>
         </p:nvSpPr>
@@ -18886,7 +18886,7 @@
                   <a:schemeClr val="tx2"/>
                 </a:solidFill>
               </a:rPr>
-              <a:t>Chi vede</a:t>
+              <a:t>Valore progetti</a:t>
             </a:r>
             <a:endParaRPr lang="en-US" sz="1300" dirty="0"/>
           </a:p>
@@ -18900,7 +18900,7 @@
                   <a:schemeClr val="tx1"/>
                 </a:solidFill>
               </a:rPr>
-              <a:t>staff: tutto; Comuni: solo i propri dati</a:t>
+              <a:t>quanto paga il cliente, listino Caso 1 o Caso 2 scelto sul Progetto</a:t>
             </a:r>
             <a:endParaRPr lang="en-US" sz="1300" dirty="0"/>
           </a:p>
@@ -19128,7 +19128,7 @@
                   <a:schemeClr val="tx1"/>
                 </a:solidFill>
               </a:rPr>
-              <a:t>fasi aperte senza scadenza (22/10); valore dei crediti in simulazione e in fase esecutiva, anche per i Comuni (23/10)</a:t>
+              <a:t>fasi aperte senza scadenza (22/10); valore dei crediti in simulazione e in fase esecutiva e valore dei progetti per il cliente (Caso 1 / Caso 2), anche per i Comuni (23/10)</a:t>
             </a:r>
             <a:endParaRPr lang="en-US" sz="1350" dirty="0"/>
           </a:p>

--- a/public/documentazione/Presentazione_Portale_CWP.pptx
+++ b/public/documentazione/Presentazione_Portale_CWP.pptx
@@ -121,40 +121,40 @@
   <p:extLst>
     <p:ext uri="{521415D9-36F7-43E2-AB2F-B90AF26B5E84}">
       <p14:sectionLst xmlns:p14="http://schemas.microsoft.com/office/powerpoint/2010/main">
-        <p14:section name="Apertura" id="{72dcf85d-d1b3-032d-7c76-5762c9d9b1f2}">
+        <p14:section name="Apertura" id="{ab7f772b-eaa9-c682-a236-5bf276f299e1}">
           <p14:sldIdLst>
             <p14:sldId id="256"/>
           </p14:sldIdLst>
         </p14:section>
-        <p14:section name="Metodologia" id="{704cd747-cd24-4d94-fc55-a5156337ede7}">
+        <p14:section name="Metodologia" id="{db415f9e-c6ef-3617-8ea1-15d7a68210d0}">
           <p14:sldIdLst>
             <p14:sldId id="257"/>
           </p14:sldIdLst>
         </p14:section>
-        <p14:section name="Analisi funzionale" id="{7aea13a9-ba6d-b47b-7275-2fbdacd2e1a8}">
+        <p14:section name="Analisi funzionale" id="{fd7457d8-2871-2021-c028-e33cb683b963}">
           <p14:sldIdLst>
             <p14:sldId id="258"/>
             <p14:sldId id="259"/>
           </p14:sldIdLst>
         </p14:section>
-        <p14:section name="Già realtà" id="{f8fa33dd-19da-1cb8-c46b-644204232470}">
+        <p14:section name="Già realtà" id="{483d5720-a03f-6822-61aa-be8002a18705}">
           <p14:sldIdLst>
             <p14:sldId id="260"/>
           </p14:sldIdLst>
         </p14:section>
-        <p14:section name="Architettura e ruoli" id="{c391fc6a-bae1-76c8-05c0-3d7eab2e638b}">
+        <p14:section name="Architettura e ruoli" id="{622658ce-dfb4-d77d-0d88-4d5cf0c943ce}">
           <p14:sldIdLst>
             <p14:sldId id="261"/>
             <p14:sldId id="262"/>
           </p14:sldIdLst>
         </p14:section>
-        <p14:section name="Novità" id="{e8151675-4c11-0eda-fb5b-a4fe0bb7e986}">
+        <p14:section name="Novità" id="{e7ed4f45-2a0d-1eec-3955-d5b8be70ee41}">
           <p14:sldIdLst>
             <p14:sldId id="263"/>
             <p14:sldId id="264"/>
           </p14:sldIdLst>
         </p14:section>
-        <p14:section name="Punti aperti" id="{23d060e4-995d-e197-4ee6-318309b81da3}">
+        <p14:section name="Punti aperti" id="{8fca7313-d2cc-8321-10de-3d8f603bdbf0}">
           <p14:sldIdLst>
             <p14:sldId id="265"/>
             <p14:sldId id="266"/>
@@ -163,7 +163,7 @@
             <p14:sldId id="269"/>
           </p14:sldIdLst>
         </p14:section>
-        <p14:section name="Scelte da prendere" id="{f234ab9a-4333-25d8-2094-c4a115f64894}">
+        <p14:section name="Scelte da prendere" id="{31621a20-137b-afe1-dc45-c04d392925ad}">
           <p14:sldIdLst>
             <p14:sldId id="270"/>
           </p14:sldIdLst>
@@ -1452,7 +1452,7 @@
           <a:p>
             <a:r>
               <a:rPr lang="en-US" dirty="0"/>
-              <a:t>Pagina «effetto sorpresa»: nessuno si aspetta che il portale sia già online. Il sistema è stato realizzato da Luca Moretti con l'ausilio di Claude Code ed è quasi terminato; i servizi sono già in produzione: GitHub (codice), Vercel (pubblicazione del portale), Supabase (database, utenti, documenti, funzioni) e Resend (email). Il portale è pubblicato su portale-cwp.vercel.app e funziona con dati di prova: si può aprire durante la presentazione (collegamento cliccabile) o inquadrare il codice QR con il telefono. La pagina pubblica /programma mostra già gli 8 documenti ufficiali del Programma, la Metodologia approvata, la PEC e il soggetto promotore. Lo sviluppo del portale vero è partito il 17 ottobre 2026: da allora sono state pubblicate 177 versioni, 43 script del database e 7 funzioni sul server. Restano i punti aperti delle prossime slide (servizi a pagamento, sicurezza, dati da inserire, collaudo con un Comune). Suggerimento: aprire il portale dal vivo con un utente di prova e mostrare la pagina pubblica.</a:t>
+              <a:t>Pagina «effetto sorpresa»: nessuno si aspetta che il portale sia già online. Il sistema è stato realizzato da Luca Moretti con l'ausilio di Claude Code ed è quasi terminato; i servizi sono già in produzione: GitHub (codice), Vercel (pubblicazione del portale), Supabase (database, utenti, documenti, funzioni) e Resend (email). Il portale è pubblicato su portale-cwp.vercel.app e funziona con dati di prova: si può aprire durante la presentazione (collegamento cliccabile) o inquadrare il codice QR con il telefono. La pagina pubblica /programma mostra già gli 8 documenti ufficiali del Programma, la Metodologia approvata, la PEC e il soggetto promotore. Lo sviluppo del portale vero è partito il 17 ottobre 2026: da allora sono state pubblicate 182 versioni, 43 script del database e 7 funzioni sul server. Restano i punti aperti delle prossime slide (servizi a pagamento, sicurezza, dati da inserire, collaudo con un Comune). Suggerimento: aprire il portale dal vivo con un utente di prova e mostrare la pagina pubblica.</a:t>
             </a:r>
             <a:endParaRPr lang="en-US" dirty="0"/>
           </a:p>
@@ -14895,7 +14895,7 @@
                 <a:ea typeface="Cambria" pitchFamily="34" charset="-122"/>
                 <a:cs typeface="Cambria" pitchFamily="34" charset="-120"/>
               </a:rPr>
-              <a:t>177</a:t>
+              <a:t>182</a:t>
             </a:r>
             <a:endParaRPr lang="en-US" sz="2400" dirty="0"/>
           </a:p>

--- a/public/documentazione/Presentazione_Portale_CWP.pptx
+++ b/public/documentazione/Presentazione_Portale_CWP.pptx
@@ -20,9 +20,10 @@
     <p:sldId id="268" r:id="rId14"/>
     <p:sldId id="269" r:id="rId15"/>
     <p:sldId id="270" r:id="rId16"/>
+    <p:sldId id="271" r:id="rId17"/>
   </p:sldIdLst>
   <p:notesMasterIdLst>
-    <p:notesMasterId r:id="rId17"/>
+    <p:notesMasterId r:id="rId18"/>
   </p:notesMasterIdLst>
   <p:sldSz cx="12192000" cy="6858000"/>
   <p:notesSz cx="6858000" cy="12192000"/>
@@ -121,51 +122,52 @@
   <p:extLst>
     <p:ext uri="{521415D9-36F7-43E2-AB2F-B90AF26B5E84}">
       <p14:sectionLst xmlns:p14="http://schemas.microsoft.com/office/powerpoint/2010/main">
-        <p14:section name="Apertura" id="{ab7f772b-eaa9-c682-a236-5bf276f299e1}">
+        <p14:section name="Apertura" id="{f103ac4f-330f-8b9a-6a33-6bf452a07465}">
           <p14:sldIdLst>
             <p14:sldId id="256"/>
           </p14:sldIdLst>
         </p14:section>
-        <p14:section name="Metodologia" id="{db415f9e-c6ef-3617-8ea1-15d7a68210d0}">
+        <p14:section name="Metodologia" id="{bb27aa64-3b49-3a30-d8b8-47b0b77dd9a0}">
           <p14:sldIdLst>
             <p14:sldId id="257"/>
           </p14:sldIdLst>
         </p14:section>
-        <p14:section name="Analisi funzionale" id="{fd7457d8-2871-2021-c028-e33cb683b963}">
+        <p14:section name="Analisi funzionale" id="{23e48304-e601-6c43-a5da-16576dc01039}">
           <p14:sldIdLst>
             <p14:sldId id="258"/>
             <p14:sldId id="259"/>
           </p14:sldIdLst>
         </p14:section>
-        <p14:section name="Già realtà" id="{483d5720-a03f-6822-61aa-be8002a18705}">
+        <p14:section name="Già realtà" id="{f6af8de7-3c6a-c460-0512-f6d8dca2b699}">
           <p14:sldIdLst>
             <p14:sldId id="260"/>
           </p14:sldIdLst>
         </p14:section>
-        <p14:section name="Architettura e ruoli" id="{622658ce-dfb4-d77d-0d88-4d5cf0c943ce}">
+        <p14:section name="Architettura e ruoli" id="{e99a87d7-9d68-2c42-a284-9388b3179635}">
           <p14:sldIdLst>
             <p14:sldId id="261"/>
             <p14:sldId id="262"/>
           </p14:sldIdLst>
         </p14:section>
-        <p14:section name="Novità" id="{e7ed4f45-2a0d-1eec-3955-d5b8be70ee41}">
+        <p14:section name="Novità" id="{6c762d9e-0e45-61c9-c5a5-8ae9aff5ecfa}">
           <p14:sldIdLst>
             <p14:sldId id="263"/>
             <p14:sldId id="264"/>
+            <p14:sldId id="265"/>
           </p14:sldIdLst>
         </p14:section>
-        <p14:section name="Punti aperti" id="{8fca7313-d2cc-8321-10de-3d8f603bdbf0}">
+        <p14:section name="Punti aperti" id="{117c4e4a-8f3b-c2bd-5126-b6675b037cf7}">
           <p14:sldIdLst>
-            <p14:sldId id="265"/>
             <p14:sldId id="266"/>
             <p14:sldId id="267"/>
             <p14:sldId id="268"/>
             <p14:sldId id="269"/>
+            <p14:sldId id="270"/>
           </p14:sldIdLst>
         </p14:section>
-        <p14:section name="Scelte da prendere" id="{31621a20-137b-afe1-dc45-c04d392925ad}">
+        <p14:section name="Scelte da prendere" id="{a64c973e-abd3-e1a4-989f-28d492098501}">
           <p14:sldIdLst>
-            <p14:sldId id="270"/>
+            <p14:sldId id="271"/>
           </p14:sldIdLst>
         </p14:section>
       </p14:sectionLst>
@@ -572,7 +574,7 @@
           <a:p>
             <a:r>
               <a:rPr lang="en-US" dirty="0"/>
-              <a:t>Presentazione di riepilogo del portale, aggiornata al 23 ottobre 2026 (revisione 4.0): metodologia, funzioni realizzate, novità, punti aperti di sviluppo e scelte ancora da prendere. Si rigenera a ogni rilascio insieme agli altri documenti ed è disponibile agli Amministratori nella pagina Documentazione del portale.</a:t>
+              <a:t>Presentazione di riepilogo del portale, aggiornata al 23 ottobre 2026 (revisione 4.1): metodologia, funzioni realizzate, novità, punti aperti di sviluppo e scelte ancora da prendere. Si rigenera a ogni rilascio insieme agli altri documenti ed è disponibile agli Amministratori nella pagina Documentazione del portale.</a:t>
             </a:r>
             <a:endParaRPr lang="en-US" dirty="0"/>
           </a:p>
@@ -660,7 +662,7 @@
           <a:p>
             <a:r>
               <a:rPr lang="en-US" dirty="0"/>
-              <a:t>La parte funzionale dei requisiti del 15/09 è chiusa e dal 18/10 sera il portale segue anche i documenti ufficiali del Programma. Restano tre gruppi. 1) Requisiti tecnici e di sicurezza (sezioni 13-15 dei requisiti); il 19/10 sono stati fatti l'archivio di backup completo e le Istruzioni di ripristino, mancano le copie automatiche di database e file. 2) Avvio della piattaforma pubblica (Guida 3.7): la pagina /programma è attiva e pubblica già gli otto documenti ufficiali v1.2 (Guida, Definizioni, Normativa, Standard, Metodologia, Politica di reclamo, Schema tariffario, Gestione qualità dei dati) e la Metodologia approvata; la PEC del Programma per i reclami è operate@pec.it; vanno aggiunti gli enti di validazione e verifica e i registri riconosciuti e la modulistica quando disponibile. L'accesso con SPID, CIE o CNS (Guida 3.9) richiede l'adesione della Fondazione come fornitore di servizi (AgID o aggregatore accreditato): fino ad allora resta l'email confermata. 3) Qualità dei dati e completamenti: i controlli del documento Gestione della qualità dei dati sono nel calcolo (Tabella 3 dello Standard ±30% con motivazione obbligatoria, completezza, unicità, letture a buon fine, tempestività) e servono popolazione e cluster SOSE ufficiali di ogni Comune; poi privacy, accessibilità, collaudo con dati reali. L'assistente AI resta un supporto al back-office, come previsto dai requisiti (sezione 17). Da fare subito (19/10 sera). Azioni di Luca: ripubblicare le funzioni crea-utente e reimposta-password (email delle credenziali), rieseguire la funzione utente_mai_attivo dello script 30, verificare il dominio email su Resend, decidere se intestare alla Fondazione la fatturazione dell'assistente. Sviluppo: utenti online per l'amministratore principale, messaggi d'errore dell'assistente in italiano (proposta), stampa PDF del simulatore, sicurezza e piani a pagamento, collaudo con dati reali.</a:t>
+              <a:t>Sezione Marketing, richiesta di Luca del 23 ottobre 2026, solo Amministratori. Banche dati: tutti i Comuni italiani (elenco ISTAT con abitanti, poi dall'Indice dei domicili digitali della PA, IndicePA, PEC, email generica, sito, sindaco e responsabili degli uffici tributi, ambiente, finanziario e tecnico) e i gestori iscritti all'Albo Nazionale Gestori Ambientali in categoria 1 ordinaria, sezione per sezione, con verifica sui siti delle attività di raccolta e di gestione della tariffa e dei referenti. Campagne: testo con grafica, invito a scoprire le risorse economiche per 7, 10 o 21 anni; per ogni campagna si scelgono i destinatari (Comuni e gestori, regioni, abitanti, attività); invio solo agli indirizzi email generici, mai alle PEC, con informativa e collegamento per non ricevere altre comunicazioni. Il pulsante «Approfondisci» porta alla pagina pubblica /scopri: il Comune inserisce abitanti, rifiuti totali e secco residuo, durata e listino e vede crediti, ricavi, costi e margine anno per anno con il motore del simulatore; può scaricare il fascicolo informativo e chiedere la registrazione, che arriva a tutti gli Amministratori. Prima degli invii reali: dominio email verificato su Resend e verifica legale delle comunicazioni promozionali via email.</a:t>
             </a:r>
             <a:endParaRPr lang="en-US" dirty="0"/>
           </a:p>
@@ -748,7 +750,7 @@
           <a:p>
             <a:r>
               <a:rPr lang="en-US" dirty="0"/>
-              <a:t>Due nuovi moduli entrano nel progetto e in tutti i documenti (Registro, backlog punti 37 e 21). Simulatore di scenari, richiesto da Luca il 19/10: per ogni Comune si creano più scenari; la durata si sceglie da un menu a tendina tra 7, 10 e 21 anni (Standard 4.3.8: periodo di 10 anni oppure 7 rinnovabili fino a 21); si acquisiscono i dati dell'anno base (popolazione, produzione totale e pro capite, raccolta differenziata, ripartizione per frazione, parametri del calcolo); per ogni anno si inseriscono gli obiettivi di produzione totale e pro capite e di secco residuo pro capite; il simulatore ricalcola la percentuale di differenziata e stima anno per anno i crediti che il Comune potrebbe generare, con due metodi: il bilancio del Comune (tutte le utenze insieme, il più prudente) e il metodo per utenza con le sole utenze virtuose e il buffer del Capitolo 7, lo stesso delle stime dell'Allegato A dei contratti EsaCom. È una stima ex ante utile a presentare il Programma ai Comuni: il modello semplificato va confermato dalla Fondazione. Assistente virtuale (prima versione del 19/10, attiva dallo stesso giorno): pulsante «✦ Assistente» per Amministratori e utenti degli enti; risponde in italiano solo dalla base di conoscenza (Manuale Utente e tariffe per gli enti, in più Manuale Amministratore e note sul calcolo per gli Amministratori), non vede le pratiche, non salva i testi, limite di 40 domande al giorno per utente. Funziona con Claude Haiku 5.5 tramite la funzione del server «assistente»; la base di conoscenza resta nella cache dei prompt, quindi una domanda costa di solito meno di un centesimo di dollaro. Funziona con una chiave della Claude Console, legata a un solo spazio di lavoro, inserita da Luca nei segreti di Supabase: l'uso API è fatturato a parte rispetto ai piani claude.ai; Luca ha collegato i crediti API mensili del piano Max e acquistato 100 dollari di crediti. Prova dal vivo del 19/10: risposte corrette su creazione utenti e costi del Caso 1. Passi successivi: Operatori e aiuto sulla singola pratica.</a:t>
+              <a:t>La parte funzionale dei requisiti del 15/09 è chiusa e dal 18/10 sera il portale segue anche i documenti ufficiali del Programma. Restano tre gruppi. 1) Requisiti tecnici e di sicurezza (sezioni 13-15 dei requisiti); il 19/10 sono stati fatti l'archivio di backup completo e le Istruzioni di ripristino, mancano le copie automatiche di database e file. 2) Avvio della piattaforma pubblica (Guida 3.7): la pagina /programma è attiva e pubblica già gli otto documenti ufficiali v1.2 (Guida, Definizioni, Normativa, Standard, Metodologia, Politica di reclamo, Schema tariffario, Gestione qualità dei dati) e la Metodologia approvata; la PEC del Programma per i reclami è operate@pec.it; vanno aggiunti gli enti di validazione e verifica e i registri riconosciuti e la modulistica quando disponibile. L'accesso con SPID, CIE o CNS (Guida 3.9) richiede l'adesione della Fondazione come fornitore di servizi (AgID o aggregatore accreditato): fino ad allora resta l'email confermata. 3) Qualità dei dati e completamenti: i controlli del documento Gestione della qualità dei dati sono nel calcolo (Tabella 3 dello Standard ±30% con motivazione obbligatoria, completezza, unicità, letture a buon fine, tempestività) e servono popolazione e cluster SOSE ufficiali di ogni Comune; poi privacy, accessibilità, collaudo con dati reali. L'assistente AI resta un supporto al back-office, come previsto dai requisiti (sezione 17). Da fare subito (19/10 sera). Azioni di Luca: ripubblicare le funzioni crea-utente e reimposta-password (email delle credenziali), rieseguire la funzione utente_mai_attivo dello script 30, verificare il dominio email su Resend, decidere se intestare alla Fondazione la fatturazione dell'assistente. Sviluppo: utenti online per l'amministratore principale, messaggi d'errore dell'assistente in italiano (proposta), stampa PDF del simulatore, sicurezza e piani a pagamento, collaudo con dati reali.</a:t>
             </a:r>
             <a:endParaRPr lang="en-US" dirty="0"/>
           </a:p>
@@ -836,7 +838,7 @@
           <a:p>
             <a:r>
               <a:rPr lang="en-US" dirty="0"/>
-              <a:t>Il simulatore è già nel portale (menu Simulatore, per Operatori e Amministratori) ed è conforme al modello CWP: scenario di riferimento dello Standard 4.8.1 (anno in cui il Comune ha raggiunto il 65% di differenziata oppure valori medi del cluster SOSE della Tabella 3 × popolazione ISPRA 2022), durata 7, 10 o 21 anni (Standard 4.3.8), stima ex ante a livello di Comune ammessa dalla Metodologia (Capitoli 6.1 e 6.2), fattori di emissione e formule della Metodologia v1.2, buffer. L'esempio usa dati di prova: un Comune di 12.500 abitanti del cluster 4 (riferimento 445 kg/ab, 78,7% di differenziata), oggi a 430 kg/ab con 90 kg/ab di secco, obiettivo al 2036 di 380 kg/ab e 50 kg/ab di secco. Il simulatore ricalcola ogni anno la differenziata (fino all'87%) e stima circa 11.500 tCO₂eq di crediti netti in 10 anni dopo un buffer del 20%. Da sapere: i crediti nascono dai rifiuti evitati rispetto al riferimento (qui 1 t in meno vale circa 2,7 tCO₂eq); spostare rifiuti dal secco alla differenziata a parità di totale non genera crediti. È una stima ex ante, non certificabile; il modello va confermato dalla Fondazione.</a:t>
+              <a:t>Due nuovi moduli entrano nel progetto e in tutti i documenti (Registro, backlog punti 37 e 21). Simulatore di scenari, richiesto da Luca il 19/10: per ogni Comune si creano più scenari; la durata si sceglie da un menu a tendina tra 7, 10 e 21 anni (Standard 4.3.8: periodo di 10 anni oppure 7 rinnovabili fino a 21); si acquisiscono i dati dell'anno base (popolazione, produzione totale e pro capite, raccolta differenziata, ripartizione per frazione, parametri del calcolo); per ogni anno si inseriscono gli obiettivi di produzione totale e pro capite e di secco residuo pro capite; il simulatore ricalcola la percentuale di differenziata e stima anno per anno i crediti che il Comune potrebbe generare, con due metodi: il bilancio del Comune (tutte le utenze insieme, il più prudente) e il metodo per utenza con le sole utenze virtuose e il buffer del Capitolo 7, lo stesso delle stime dell'Allegato A dei contratti EsaCom. È una stima ex ante utile a presentare il Programma ai Comuni: il modello semplificato va confermato dalla Fondazione. Assistente virtuale (prima versione del 19/10, attiva dallo stesso giorno): pulsante «✦ Assistente» per Amministratori e utenti degli enti; risponde in italiano solo dalla base di conoscenza (Manuale Utente e tariffe per gli enti, in più Manuale Amministratore e note sul calcolo per gli Amministratori), non vede le pratiche, non salva i testi, limite di 40 domande al giorno per utente. Funziona con Claude Haiku 5.5 tramite la funzione del server «assistente»; la base di conoscenza resta nella cache dei prompt, quindi una domanda costa di solito meno di un centesimo di dollaro. Funziona con una chiave della Claude Console, legata a un solo spazio di lavoro, inserita da Luca nei segreti di Supabase: l'uso API è fatturato a parte rispetto ai piani claude.ai; Luca ha collegato i crediti API mensili del piano Max e acquistato 100 dollari di crediti. Prova dal vivo del 19/10: risposte corrette su creazione utenti e costi del Caso 1. Passi successivi: Operatori e aiuto sulla singola pratica.</a:t>
             </a:r>
             <a:endParaRPr lang="en-US" dirty="0"/>
           </a:p>
@@ -924,7 +926,7 @@
           <a:p>
             <a:r>
               <a:rPr lang="en-US" dirty="0"/>
-              <a:t>Il simulatore stima anche la parte economica per il Comune o il gestore. Ricavi: crediti netti stimati per anno × valore del credito, digitato anno per anno (proposto 32 €). Costi: il simulatore chiede se usare il Caso 1 (progetto volontario) o il Caso 2 (progetto obbligatorio, per esempio da bando di gara di un Comune che ha inserito il CWP come metodo), con le tabelle «Costi per il Soggetto Promotore» di Fondazione Operate del 28/07/2026: sei voci (Progetto, Rapporto di Monitoraggio, registrazione del Progetto, dei crediti del Progetto, del Rapporto e dei crediti del Rapporto), costo per abitante per fascia di popolazione con interpolazione e arrotondamento per eccesso, minimo e massimo annuo, una tantum ammortizzati in 10 anni; validazione dell'ente esclusa. Esempio con i dati ISPRA 2021 di Bovisio-Masciago (16.735 abitanti), obiettivo 400 kg/ab e 50 kg/ab di secco al 2036, 32 € a credito. Con il metodo per utenza (solo utenze virtuose, secco e organico misurati, tariffa puntuale, variabilità tra utenze 30%, buffer 30%): 34.188 crediti netti in 10 anni (0,20 per abitante all'anno, nell'intervallo 0,19-0,23 dell'Allegato A EsaCom), ricavi 1.093.792 €; Caso 1 costi 162.330 € (9,70 € per abitante) e margine +931.463 €; Caso 2 costi 242.658 € e margine +851.135 €. Con il bilancio del Comune (il metodo più prudente): 6.707 crediti, ricavi 214.464 €, Caso 1 +52.134 € (rientro nel 2034), Caso 2 −28.193 €. La differenza viene soprattutto dal fatto che Bovisio ha già l'84% di differenziata: il secco delle utenze è molto sotto il riferimento al 65%. Il Caso 1 con 154.247 abitanti riproduce le cifre dei contratti tipo EsaCom. L'Allegato A indica 6,08 € per abitante di costo contro 5,36 delle tabelle: la differenza potrebbe essere l'ente di validazione e verifica. Stima indicativa, non un piano finanziario.</a:t>
+              <a:t>Il simulatore è già nel portale (menu Simulatore, per Operatori e Amministratori) ed è conforme al modello CWP: scenario di riferimento dello Standard 4.8.1 (anno in cui il Comune ha raggiunto il 65% di differenziata oppure valori medi del cluster SOSE della Tabella 3 × popolazione ISPRA 2022), durata 7, 10 o 21 anni (Standard 4.3.8), stima ex ante a livello di Comune ammessa dalla Metodologia (Capitoli 6.1 e 6.2), fattori di emissione e formule della Metodologia v1.2, buffer. L'esempio usa dati di prova: un Comune di 12.500 abitanti del cluster 4 (riferimento 445 kg/ab, 78,7% di differenziata), oggi a 430 kg/ab con 90 kg/ab di secco, obiettivo al 2036 di 380 kg/ab e 50 kg/ab di secco. Il simulatore ricalcola ogni anno la differenziata (fino all'87%) e stima circa 11.500 tCO₂eq di crediti netti in 10 anni dopo un buffer del 20%. Da sapere: i crediti nascono dai rifiuti evitati rispetto al riferimento (qui 1 t in meno vale circa 2,7 tCO₂eq); spostare rifiuti dal secco alla differenziata a parità di totale non genera crediti. È una stima ex ante, non certificabile; il modello va confermato dalla Fondazione.</a:t>
             </a:r>
             <a:endParaRPr lang="en-US" dirty="0"/>
           </a:p>
@@ -1012,7 +1014,7 @@
           <a:p>
             <a:r>
               <a:rPr lang="en-US" dirty="0"/>
-              <a:t>Oggi tutti i servizi sono sui piani gratuiti, che non vanno bene per l'esercizio (attenzione: le copie giornaliere di Supabase Pro non comprendono i file caricati, che si copiano a parte come spiegato nelle Istruzioni di ripristino): Vercel Hobby è solo per uso non commerciale, i progetti Supabase gratuiti non hanno backup e si sospendono dopo una settimana di inattività, Resend gratuito invia al massimo 100 email al giorno, e il repository GitHub è pubblico. Indispensabili (circa 74 dollari al mese): GitHub Team (4 dollari per utente) con un'organizzazione intestata alla Fondazione, repository privato e regole sul ramo main (revisione obbligatoria); Vercel Pro (20 dollari per utente, banda 1 TB, uso commerciale, controllo della spesa); Supabase Pro (25 dollari, comprende 10 dollari di calcolo Micro: backup giornalieri conservati 7 giorni, progetto mai sospeso, 8 GB di database, 100 GB di file, 100.000 utenti attivi al mese) più il passaggio al calcolo Small (15 dollari, 2 GB di memoria, differenza 5 dollari); Resend Pro (20 dollari, 50.000 email al mese, nessun limite giornaliero). Consigliati (circa 130 dollari in più): Point-in-Time Recovery di Supabase (100 dollari al mese, ripristino al minuto degli ultimi 7 giorni), ambiente di prova con branching Supabase (0,01344 dollari l'ora, circa 10 dollari al mese se sempre attivo), GitHub Secret Protection (19 dollari per committer attivo). Sentry Developer è gratuito (1 utente, 5.000 errori al mese). Il piano Supabase Team (599 dollari al mese, certificazioni SOC 2 e ISO 27001, backup 14 giorni) oggi non serve. A costo zero: verifica in due passaggi sugli account dei fornitori, chiavi solo nelle variabili d'ambiente, dominio operate.it per portale ed email (SPF, DKIM, DMARC).</a:t>
+              <a:t>Il simulatore stima anche la parte economica per il Comune o il gestore. Ricavi: crediti netti stimati per anno × valore del credito, digitato anno per anno (proposto 32 €). Costi: il simulatore chiede se usare il Caso 1 (progetto volontario) o il Caso 2 (progetto obbligatorio, per esempio da bando di gara di un Comune che ha inserito il CWP come metodo), con le tabelle «Costi per il Soggetto Promotore» di Fondazione Operate del 28/07/2026: sei voci (Progetto, Rapporto di Monitoraggio, registrazione del Progetto, dei crediti del Progetto, del Rapporto e dei crediti del Rapporto), costo per abitante per fascia di popolazione con interpolazione e arrotondamento per eccesso, minimo e massimo annuo, una tantum ammortizzati in 10 anni; validazione dell'ente esclusa. Esempio con i dati ISPRA 2021 di Bovisio-Masciago (16.735 abitanti), obiettivo 400 kg/ab e 50 kg/ab di secco al 2036, 32 € a credito. Con il metodo per utenza (solo utenze virtuose, secco e organico misurati, tariffa puntuale, variabilità tra utenze 30%, buffer 30%): 34.188 crediti netti in 10 anni (0,20 per abitante all'anno, nell'intervallo 0,19-0,23 dell'Allegato A EsaCom), ricavi 1.093.792 €; Caso 1 costi 162.330 € (9,70 € per abitante) e margine +931.463 €; Caso 2 costi 242.658 € e margine +851.135 €. Con il bilancio del Comune (il metodo più prudente): 6.707 crediti, ricavi 214.464 €, Caso 1 +52.134 € (rientro nel 2034), Caso 2 −28.193 €. La differenza viene soprattutto dal fatto che Bovisio ha già l'84% di differenziata: il secco delle utenze è molto sotto il riferimento al 65%. Il Caso 1 con 154.247 abitanti riproduce le cifre dei contratti tipo EsaCom. L'Allegato A indica 6,08 € per abitante di costo contro 5,36 delle tabelle: la differenza potrebbe essere l'ente di validazione e verifica. Stima indicativa, non un piano finanziario.</a:t>
             </a:r>
             <a:endParaRPr lang="en-US" dirty="0"/>
           </a:p>
@@ -1100,7 +1102,7 @@
           <a:p>
             <a:r>
               <a:rPr lang="en-US" dirty="0"/>
-              <a:t>Il 18 ottobre sera sono state prese e realizzate le scelte di allineamento ai documenti ufficiali: Rapporto a 7 fasi con feedback di 20 giorni (Guida 6.3.1), conservazione 12 anni (Guida 6.2.1 e 6.5.1), un solo account per Organizzazione con fino a 2 delegati (Guida 7.2), periodo di 10 anni o 7 rinnovabili (Standard 4.3.8), stati e ID della Guida, ritiro e rientro, un solo progetto per territorio, tariffe e sospensione fino al saldo, piattaforma pubblica, crediti emessi con registro esterno, reclami, qualità dei dati. Il ruolo di soggetto promotore del programma è definito: Wastelab ha conferito in esclusiva a Fondazione Operate la gestione commerciale e tecnologica (portale CWP). Restano aperte quelle in tabella. Lo Standard 4.14 chiede al promotore del progetto di conservare i documenti almeno 2 anni dopo la fine del progetto, i registri 5 anni dopo la vendita (Standard 6.3). Scelte prese prima (Registro, capitolo Decisioni): A (una nuova versione non fa ripartire il termine), B (errata corrige: ripartenza decisa caso per caso), D (commentatori esterni con email confermata, in attesa di SPID), durate modificabili dall'Admin, pagamenti visibili al Comune, chiusura manuale della pratica, documenti richiesti non bloccanti, audit leggibile dallo staff. Le scelte interpretative del calcolo sono sette (docs/crediti-cwp.md). Il 19 ottobre: più amministratori con uno principale protetto; qualificazione ACN valutata non necessaria (da confermare con un parere legale).</a:t>
+              <a:t>Oggi tutti i servizi sono sui piani gratuiti, che non vanno bene per l'esercizio (attenzione: le copie giornaliere di Supabase Pro non comprendono i file caricati, che si copiano a parte come spiegato nelle Istruzioni di ripristino): Vercel Hobby è solo per uso non commerciale, i progetti Supabase gratuiti non hanno backup e si sospendono dopo una settimana di inattività, Resend gratuito invia al massimo 100 email al giorno, e il repository GitHub è pubblico. Indispensabili (circa 74 dollari al mese): GitHub Team (4 dollari per utente) con un'organizzazione intestata alla Fondazione, repository privato e regole sul ramo main (revisione obbligatoria); Vercel Pro (20 dollari per utente, banda 1 TB, uso commerciale, controllo della spesa); Supabase Pro (25 dollari, comprende 10 dollari di calcolo Micro: backup giornalieri conservati 7 giorni, progetto mai sospeso, 8 GB di database, 100 GB di file, 100.000 utenti attivi al mese) più il passaggio al calcolo Small (15 dollari, 2 GB di memoria, differenza 5 dollari); Resend Pro (20 dollari, 50.000 email al mese, nessun limite giornaliero). Consigliati (circa 130 dollari in più): Point-in-Time Recovery di Supabase (100 dollari al mese, ripristino al minuto degli ultimi 7 giorni), ambiente di prova con branching Supabase (0,01344 dollari l'ora, circa 10 dollari al mese se sempre attivo), GitHub Secret Protection (19 dollari per committer attivo). Sentry Developer è gratuito (1 utente, 5.000 errori al mese). Il piano Supabase Team (599 dollari al mese, certificazioni SOC 2 e ISO 27001, backup 14 giorni) oggi non serve. A costo zero: verifica in due passaggi sugli account dei fornitori, chiavi solo nelle variabili d'ambiente, dominio operate.it per portale ed email (SPF, DKIM, DMARC).</a:t>
             </a:r>
             <a:endParaRPr lang="en-US" dirty="0"/>
           </a:p>
@@ -1124,6 +1126,94 @@
             <a:fld id="{F7021451-1387-4CA6-816F-3879F97B5CBC}" type="slidenum">
               <a:rPr lang="en-US"/>
               <a:t>15</a:t>
+            </a:fld>
+            <a:endParaRPr lang="en-US"/>
+          </a:p>
+        </p:txBody>
+      </p:sp>
+    </p:spTree>
+    <p:extLst>
+      <p:ext uri="{BB962C8B-B14F-4D97-AF65-F5344CB8AC3E}">
+        <p14:creationId xmlns:p14="http://schemas.microsoft.com/office/powerpoint/2010/main" val="1024086991"/>
+      </p:ext>
+    </p:extLst>
+  </p:cSld>
+  <p:clrMapOvr>
+    <a:masterClrMapping/>
+  </p:clrMapOvr>
+</p:notes>
+</file>
+
+<file path=ppt/notesSlides/notesSlide16.xml><?xml version="1.0" encoding="utf-8"?>
+<p:notes xmlns:a="http://schemas.openxmlformats.org/drawingml/2006/main" xmlns:r="http://schemas.openxmlformats.org/officeDocument/2006/relationships" xmlns:p="http://schemas.openxmlformats.org/presentationml/2006/main">
+  <p:cSld>
+    <p:spTree>
+      <p:nvGrpSpPr>
+        <p:cNvPr id="1" name=""/>
+        <p:cNvGrpSpPr/>
+        <p:nvPr/>
+      </p:nvGrpSpPr>
+      <p:grpSpPr>
+        <a:xfrm>
+          <a:off x="0" y="0"/>
+          <a:ext cx="0" cy="0"/>
+          <a:chOff x="0" y="0"/>
+          <a:chExt cx="0" cy="0"/>
+        </a:xfrm>
+      </p:grpSpPr>
+      <p:sp>
+        <p:nvSpPr>
+          <p:cNvPr id="2" name="Slide Image Placeholder 1"/>
+          <p:cNvSpPr>
+            <a:spLocks noGrp="1" noRot="1" noChangeAspect="1"/>
+          </p:cNvSpPr>
+          <p:nvPr>
+            <p:ph type="sldImg"/>
+          </p:nvPr>
+        </p:nvSpPr>
+        <p:spPr/>
+      </p:sp>
+      <p:sp>
+        <p:nvSpPr>
+          <p:cNvPr id="3" name="Notes Placeholder 2"/>
+          <p:cNvSpPr>
+            <a:spLocks noGrp="1"/>
+          </p:cNvSpPr>
+          <p:nvPr>
+            <p:ph type="body" idx="1"/>
+          </p:nvPr>
+        </p:nvSpPr>
+        <p:spPr/>
+        <p:txBody>
+          <a:bodyPr/>
+          <a:lstStyle/>
+          <a:p>
+            <a:r>
+              <a:rPr lang="en-US" dirty="0"/>
+              <a:t>Il 18 ottobre sera sono state prese e realizzate le scelte di allineamento ai documenti ufficiali: Rapporto a 7 fasi con feedback di 20 giorni (Guida 6.3.1), conservazione 12 anni (Guida 6.2.1 e 6.5.1), un solo account per Organizzazione con fino a 2 delegati (Guida 7.2), periodo di 10 anni o 7 rinnovabili (Standard 4.3.8), stati e ID della Guida, ritiro e rientro, un solo progetto per territorio, tariffe e sospensione fino al saldo, piattaforma pubblica, crediti emessi con registro esterno, reclami, qualità dei dati. Il ruolo di soggetto promotore del programma è definito: Wastelab ha conferito in esclusiva a Fondazione Operate la gestione commerciale e tecnologica (portale CWP). Restano aperte quelle in tabella. Lo Standard 4.14 chiede al promotore del progetto di conservare i documenti almeno 2 anni dopo la fine del progetto, i registri 5 anni dopo la vendita (Standard 6.3). Scelte prese prima (Registro, capitolo Decisioni): A (una nuova versione non fa ripartire il termine), B (errata corrige: ripartenza decisa caso per caso), D (commentatori esterni con email confermata, in attesa di SPID), durate modificabili dall'Admin, pagamenti visibili al Comune, chiusura manuale della pratica, documenti richiesti non bloccanti, audit leggibile dallo staff. Le scelte interpretative del calcolo sono sette (docs/crediti-cwp.md). Il 19 ottobre: più amministratori con uno principale protetto; qualificazione ACN valutata non necessaria (da confermare con un parere legale).</a:t>
+            </a:r>
+            <a:endParaRPr lang="en-US" dirty="0"/>
+          </a:p>
+        </p:txBody>
+      </p:sp>
+      <p:sp>
+        <p:nvSpPr>
+          <p:cNvPr id="4" name="Slide Number Placeholder 3"/>
+          <p:cNvSpPr>
+            <a:spLocks noGrp="1"/>
+          </p:cNvSpPr>
+          <p:nvPr>
+            <p:ph type="sldNum" sz="quarter" idx="10"/>
+          </p:nvPr>
+        </p:nvSpPr>
+        <p:spPr/>
+        <p:txBody>
+          <a:bodyPr/>
+          <a:lstStyle/>
+          <a:p>
+            <a:fld id="{F7021451-1387-4CA6-816F-3879F97B5CBC}" type="slidenum">
+              <a:rPr lang="en-US"/>
+              <a:t>16</a:t>
             </a:fld>
             <a:endParaRPr lang="en-US"/>
           </a:p>
@@ -1452,7 +1542,7 @@
           <a:p>
             <a:r>
               <a:rPr lang="en-US" dirty="0"/>
-              <a:t>Pagina «effetto sorpresa»: nessuno si aspetta che il portale sia già online. Il sistema è stato realizzato da Luca Moretti con l'ausilio di Claude Code ed è quasi terminato; i servizi sono già in produzione: GitHub (codice), Vercel (pubblicazione del portale), Supabase (database, utenti, documenti, funzioni) e Resend (email). Il portale è pubblicato su portale-cwp.vercel.app e funziona con dati di prova: si può aprire durante la presentazione (collegamento cliccabile) o inquadrare il codice QR con il telefono. La pagina pubblica /programma mostra già gli 8 documenti ufficiali del Programma, la Metodologia approvata, la PEC e il soggetto promotore. Lo sviluppo del portale vero è partito il 17 ottobre 2026: da allora sono state pubblicate 182 versioni, 43 script del database e 7 funzioni sul server. Restano i punti aperti delle prossime slide (servizi a pagamento, sicurezza, dati da inserire, collaudo con un Comune). Suggerimento: aprire il portale dal vivo con un utente di prova e mostrare la pagina pubblica.</a:t>
+              <a:t>Pagina «effetto sorpresa»: nessuno si aspetta che il portale sia già online. Il sistema è stato realizzato da Luca Moretti con l'ausilio di Claude Code ed è quasi terminato; i servizi sono già in produzione: GitHub (codice), Vercel (pubblicazione del portale), Supabase (database, utenti, documenti, funzioni) e Resend (email). Il portale è pubblicato su portale-cwp.vercel.app e funziona con dati di prova: si può aprire durante la presentazione (collegamento cliccabile) o inquadrare il codice QR con il telefono. La pagina pubblica /programma mostra già gli 8 documenti ufficiali del Programma, la Metodologia approvata, la PEC e il soggetto promotore. Lo sviluppo del portale vero è partito il 17 ottobre 2026: da allora sono state pubblicate 184 versioni, 44 script del database e 8 funzioni sul server. Restano i punti aperti delle prossime slide (servizi a pagamento, sicurezza, dati da inserire, collaudo con un Comune). Suggerimento: aprire il portale dal vivo con un utente di prova e mostrare la pagina pubblica.</a:t>
             </a:r>
             <a:endParaRPr lang="en-US" dirty="0"/>
           </a:p>
@@ -2163,7 +2253,7 @@
                   <a:schemeClr val="accent6"/>
                 </a:solidFill>
               </a:rPr>
-              <a:t>Portale Carbon WastePrint · Stato dei lavori e recap · 23 ottobre 2026 · rev. 4.0</a:t>
+              <a:t>Portale Carbon WastePrint · Stato dei lavori e recap · 23 ottobre 2026 · rev. 4.1</a:t>
             </a:r>
             <a:endParaRPr lang="en-US" sz="1000" dirty="0"/>
           </a:p>
@@ -2661,7 +2751,7 @@
                   <a:schemeClr val="accent3"/>
                 </a:solidFill>
               </a:rPr>
-              <a:t>Stato dei lavori e recap: metodologia, funzioni, novità, punti aperti e scelte da prendere · aggiornata al 23 ottobre 2026 · rev. 4.0</a:t>
+              <a:t>Stato dei lavori e recap: metodologia, funzioni, novità, punti aperti e scelte da prendere · aggiornata al 23 ottobre 2026 · rev. 4.1</a:t>
             </a:r>
             <a:endParaRPr lang="en-US" sz="1800" dirty="0"/>
           </a:p>
@@ -2811,26 +2901,86 @@
                 <a:ea typeface="Cambria" pitchFamily="34" charset="-122"/>
                 <a:cs typeface="Cambria" pitchFamily="34" charset="-120"/>
               </a:rPr>
-              <a:t>Punti aperti: sviluppo e servizi da attivare</a:t>
+              <a:t>Marketing: Comuni, gestori e campagne</a:t>
             </a:r>
             <a:endParaRPr lang="en-US" sz="3000" dirty="0"/>
           </a:p>
         </p:txBody>
       </p:sp>
-      <p:sp>
-        <p:nvSpPr>
-          <p:cNvPr id="3" name="Colonna Sicurezza e infrastruttura"/>
+      <p:pic>
+        <p:nvPicPr>
+          <p:cNvPr id="3" name="Schermata micro simulazione" descr="Pagina Approfondisci: micro simulazione di un Comune con margine, ricavi, costi e grafico per anno (dati di prova)">    </p:cNvPr>
+          <p:cNvPicPr>
+            <a:picLocks noChangeAspect="1"/>
+          </p:cNvPicPr>
+          <p:nvPr/>
+        </p:nvPicPr>
+        <p:blipFill>
+          <a:blip r:embed="rId1"/>
+          <a:stretch>
+            <a:fillRect/>
+          </a:stretch>
+        </p:blipFill>
+        <p:spPr>
+          <a:xfrm>
+            <a:off x="548640" y="1188720"/>
+            <a:ext cx="6949440" cy="3817298"/>
+          </a:xfrm>
+          <a:prstGeom prst="rect">
+            <a:avLst/>
+          </a:prstGeom>
+        </p:spPr>
+      </p:pic>
+      <p:sp>
+        <p:nvSpPr>
+          <p:cNvPr id="4" name="Text 1"/>
+          <p:cNvSpPr txBox="1"/>
+          <p:nvPr/>
+        </p:nvSpPr>
+        <p:spPr>
+          <a:xfrm>
+            <a:off x="548640" y="5051738"/>
+            <a:ext cx="6949440" cy="228600"/>
+          </a:xfrm>
+          <a:prstGeom prst="rect">
+            <a:avLst/>
+          </a:prstGeom>
+          <a:noFill/>
+          <a:ln/>
+        </p:spPr>
+        <p:txBody>
+          <a:bodyPr wrap="square" lIns="0" tIns="0" rIns="0" bIns="0" rtlCol="0" anchor="ctr"/>
+          <a:lstStyle/>
+          <a:p>
+            <a:pPr indent="0" marL="0">
+              <a:buNone/>
+            </a:pPr>
+            <a:r>
+              <a:rPr lang="en-US" sz="1000" i="1" dirty="0">
+                <a:solidFill>
+                  <a:schemeClr val="accent6"/>
+                </a:solidFill>
+              </a:rPr>
+              <a:t>Pagina «Approfondisci»: micro simulazione di un Comune di 16.735 abitanti, 10 anni, Caso 1</a:t>
+            </a:r>
+            <a:endParaRPr lang="en-US" sz="1000" dirty="0"/>
+          </a:p>
+        </p:txBody>
+      </p:sp>
+      <p:sp>
+        <p:nvSpPr>
+          <p:cNvPr id="5" name="Sezione Marketing"/>
           <p:cNvSpPr/>
           <p:nvPr/>
         </p:nvSpPr>
         <p:spPr>
           <a:xfrm>
-            <a:off x="548640" y="1325880"/>
-            <a:ext cx="3505200" cy="4846320"/>
+            <a:off x="7726680" y="1188720"/>
+            <a:ext cx="3886200" cy="5074920"/>
           </a:xfrm>
           <a:prstGeom prst="roundRect">
             <a:avLst>
-              <a:gd name="adj" fmla="val 3130"/>
+              <a:gd name="adj" fmla="val 2824"/>
             </a:avLst>
           </a:prstGeom>
           <a:solidFill>
@@ -2846,63 +2996,14 @@
       </p:sp>
       <p:sp>
         <p:nvSpPr>
-          <p:cNvPr id="4" name="Sicurezza e infrastruttura cerchio"/>
-          <p:cNvSpPr/>
-          <p:nvPr/>
-        </p:nvSpPr>
-        <p:spPr>
-          <a:xfrm>
-            <a:off x="777240" y="1554480"/>
-            <a:ext cx="548640" cy="548640"/>
-          </a:xfrm>
-          <a:prstGeom prst="ellipse">
-            <a:avLst/>
-          </a:prstGeom>
-          <a:solidFill>
-            <a:schemeClr val="tx2"/>
-          </a:solidFill>
-          <a:ln w="12700">
-            <a:solidFill>
-              <a:schemeClr val="tx2"/>
-            </a:solidFill>
-            <a:prstDash val="solid"/>
-          </a:ln>
-        </p:spPr>
-      </p:sp>
-      <p:pic>
-        <p:nvPicPr>
-          <p:cNvPr id="5" name="Sicurezza e infrastruttura icona" descr="preencoded.png">    </p:cNvPr>
-          <p:cNvPicPr>
-            <a:picLocks noChangeAspect="1"/>
-          </p:cNvPicPr>
-          <p:nvPr/>
-        </p:nvPicPr>
-        <p:blipFill>
-          <a:blip r:embed="rId1"/>
-          <a:stretch>
-            <a:fillRect/>
-          </a:stretch>
-        </p:blipFill>
-        <p:spPr>
-          <a:xfrm>
-            <a:off x="914400" y="1691640"/>
-            <a:ext cx="274320" cy="274320"/>
-          </a:xfrm>
-          <a:prstGeom prst="rect">
-            <a:avLst/>
-          </a:prstGeom>
-        </p:spPr>
-      </p:pic>
-      <p:sp>
-        <p:nvSpPr>
           <p:cNvPr id="6" name="Text 3"/>
           <p:cNvSpPr txBox="1"/>
           <p:nvPr/>
         </p:nvSpPr>
         <p:spPr>
           <a:xfrm>
-            <a:off x="1463040" y="1508760"/>
-            <a:ext cx="2453640" cy="640080"/>
+            <a:off x="7909560" y="1325880"/>
+            <a:ext cx="3566160" cy="4846320"/>
           </a:xfrm>
           <a:prstGeom prst="rect">
             <a:avLst/>
@@ -2911,579 +3012,141 @@
           <a:ln/>
         </p:spPr>
         <p:txBody>
-          <a:bodyPr wrap="square" lIns="0" tIns="0" rIns="0" bIns="0" rtlCol="0" anchor="ctr"/>
-          <a:lstStyle/>
-          <a:p>
-            <a:pPr indent="0" marL="0">
-              <a:buNone/>
-            </a:pPr>
-            <a:r>
-              <a:rPr lang="en-US" sz="1700" b="1" dirty="0">
+          <a:bodyPr wrap="square" lIns="0" tIns="0" rIns="0" bIns="0" rtlCol="0" anchor="t"/>
+          <a:lstStyle/>
+          <a:p>
+            <a:pPr indent="0" marL="0">
+              <a:spcAft>
+                <a:spcPts val="500"/>
+              </a:spcAft>
+              <a:buNone/>
+            </a:pPr>
+            <a:r>
+              <a:rPr lang="en-US" sz="1350" b="1" dirty="0">
                 <a:solidFill>
                   <a:schemeClr val="tx2"/>
                 </a:solidFill>
               </a:rPr>
-              <a:t>Sicurezza e infrastruttura</a:t>
-            </a:r>
-            <a:endParaRPr lang="en-US" sz="1700" dirty="0"/>
-          </a:p>
-        </p:txBody>
-      </p:sp>
-      <p:sp>
-        <p:nvSpPr>
-          <p:cNvPr id="7" name="Text 4"/>
-          <p:cNvSpPr txBox="1"/>
-          <p:nvPr/>
-        </p:nvSpPr>
-        <p:spPr>
-          <a:xfrm>
-            <a:off x="822960" y="2286000"/>
-            <a:ext cx="3048000" cy="3749040"/>
-          </a:xfrm>
-          <a:prstGeom prst="rect">
-            <a:avLst/>
-          </a:prstGeom>
-          <a:noFill/>
-          <a:ln/>
-        </p:spPr>
-        <p:txBody>
-          <a:bodyPr wrap="square" lIns="0" tIns="0" rIns="0" bIns="0" rtlCol="0" anchor="t"/>
-          <a:lstStyle/>
-          <a:p>
-            <a:pPr marL="342900" indent="-342900">
+              <a:t>Comuni</a:t>
+            </a:r>
+            <a:endParaRPr lang="en-US" sz="1350" dirty="0"/>
+          </a:p>
+          <a:p>
+            <a:pPr indent="0" marL="0">
               <a:spcAft>
-                <a:spcPts val="700"/>
+                <a:spcPts val="500"/>
               </a:spcAft>
-              <a:buSzPct val="100000"/>
-              <a:buChar char="•"/>
-            </a:pPr>
-            <a:r>
-              <a:rPr lang="en-US" sz="1350" dirty="0">
+              <a:buNone/>
+            </a:pPr>
+            <a:r>
+              <a:rPr lang="en-US" sz="1200" dirty="0">
                 <a:solidFill>
                   <a:schemeClr val="tx1"/>
                 </a:solidFill>
               </a:rPr>
-              <a:t>Fatto il 20/10: registro degli accessi e avvisi di sicurezza, uscita per inattività, intestazioni del sito, librerie aggiornate (0 vulnerabilità)</a:t>
+              <a:t>tutti i 7.904 Comuni per regione e provincia (ISTAT), con PEC, email generica, sito, sindaco e responsabili di tributi e ambiente (IndicePA)</a:t>
             </a:r>
             <a:endParaRPr lang="en-US" sz="1350" dirty="0"/>
           </a:p>
           <a:p>
-            <a:pPr marL="342900" indent="-342900">
+            <a:pPr indent="0" marL="0">
               <a:spcAft>
-                <a:spcPts val="700"/>
+                <a:spcPts val="500"/>
               </a:spcAft>
-              <a:buSzPct val="100000"/>
-              <a:buChar char="•"/>
-            </a:pPr>
-            <a:r>
-              <a:rPr lang="en-US" sz="1350" dirty="0">
+              <a:buNone/>
+            </a:pPr>
+            <a:r>
+              <a:rPr lang="en-US" sz="1350" b="1" dirty="0">
+                <a:solidFill>
+                  <a:schemeClr val="tx2"/>
+                </a:solidFill>
+              </a:rPr>
+              <a:t>Gestori</a:t>
+            </a:r>
+            <a:endParaRPr lang="en-US" sz="1350" dirty="0"/>
+          </a:p>
+          <a:p>
+            <a:pPr indent="0" marL="0">
+              <a:spcAft>
+                <a:spcPts val="500"/>
+              </a:spcAft>
+              <a:buNone/>
+            </a:pPr>
+            <a:r>
+              <a:rPr lang="en-US" sz="1200" dirty="0">
                 <a:solidFill>
                   <a:schemeClr val="tx1"/>
                 </a:solidFill>
               </a:rPr>
-              <a:t>Verifica in due passaggi per lo staff (pronta, spenta); CAPTCHA sulle pagine pubbliche</a:t>
+              <a:t>imprese dell'Albo Gestori Ambientali in categoria 1, con attività di raccolta e tariffa, PEC, email e referenti</a:t>
             </a:r>
             <a:endParaRPr lang="en-US" sz="1350" dirty="0"/>
           </a:p>
           <a:p>
-            <a:pPr marL="342900" indent="-342900">
+            <a:pPr indent="0" marL="0">
               <a:spcAft>
-                <a:spcPts val="700"/>
+                <a:spcPts val="500"/>
               </a:spcAft>
-              <a:buSzPct val="100000"/>
-              <a:buChar char="•"/>
-            </a:pPr>
-            <a:r>
-              <a:rPr lang="en-US" sz="1350" dirty="0">
+              <a:buNone/>
+            </a:pPr>
+            <a:r>
+              <a:rPr lang="en-US" sz="1350" b="1" dirty="0">
+                <a:solidFill>
+                  <a:schemeClr val="tx2"/>
+                </a:solidFill>
+              </a:rPr>
+              <a:t>Campagne</a:t>
+            </a:r>
+            <a:endParaRPr lang="en-US" sz="1350" dirty="0"/>
+          </a:p>
+          <a:p>
+            <a:pPr indent="0" marL="0">
+              <a:spcAft>
+                <a:spcPts val="500"/>
+              </a:spcAft>
+              <a:buNone/>
+            </a:pPr>
+            <a:r>
+              <a:rPr lang="en-US" sz="1200" dirty="0">
                 <a:solidFill>
                   <a:schemeClr val="tx1"/>
                 </a:solidFill>
               </a:rPr>
-              <a:t>Antivirus sui file; verifica OWASP, test di intrusione a fine sviluppo</a:t>
+              <a:t>testo e grafica, destinatari scelti per ogni campagna, solo email generiche (mai PEC), disiscrizione e informativa</a:t>
             </a:r>
             <a:endParaRPr lang="en-US" sz="1350" dirty="0"/>
           </a:p>
           <a:p>
-            <a:pPr marL="342900" indent="-342900">
+            <a:pPr indent="0" marL="0">
               <a:spcAft>
-                <a:spcPts val="700"/>
+                <a:spcPts val="500"/>
               </a:spcAft>
-              <a:buSzPct val="100000"/>
-              <a:buChar char="•"/>
-            </a:pPr>
-            <a:r>
-              <a:rPr lang="en-US" sz="1350" dirty="0">
+              <a:buNone/>
+            </a:pPr>
+            <a:r>
+              <a:rPr lang="en-US" sz="1350" b="1" dirty="0">
+                <a:solidFill>
+                  <a:schemeClr val="tx2"/>
+                </a:solidFill>
+              </a:rPr>
+              <a:t>Approfondisci</a:t>
+            </a:r>
+            <a:endParaRPr lang="en-US" sz="1350" dirty="0"/>
+          </a:p>
+          <a:p>
+            <a:pPr indent="0" marL="0">
+              <a:spcAft>
+                <a:spcPts val="500"/>
+              </a:spcAft>
+              <a:buNone/>
+            </a:pPr>
+            <a:r>
+              <a:rPr lang="en-US" sz="1200" dirty="0">
                 <a:solidFill>
                   <a:schemeClr val="tx1"/>
                 </a:solidFill>
               </a:rPr>
-              <a:t>Backup automatico completo ogni giorno alle 20 dal Mac nella cartella Drive Cwp › backup (pronto, da installare sul Mac) e istruzioni di ripristino provate; da fare ambiente di prova e monitoraggio errori</a:t>
-            </a:r>
-            <a:endParaRPr lang="en-US" sz="1350" dirty="0"/>
-          </a:p>
-          <a:p>
-            <a:pPr marL="342900" indent="-342900">
-              <a:spcAft>
-                <a:spcPts val="700"/>
-              </a:spcAft>
-              <a:buSzPct val="100000"/>
-              <a:buChar char="•"/>
-            </a:pPr>
-            <a:r>
-              <a:rPr lang="en-US" sz="1350" dirty="0">
-                <a:solidFill>
-                  <a:schemeClr val="tx1"/>
-                </a:solidFill>
-              </a:rPr>
-              <a:t>Piani a pagamento e repository privato (slide «Piani a pagamento»); dominio email verificato, che serve anche alle email con le credenziali</a:t>
-            </a:r>
-            <a:endParaRPr lang="en-US" sz="1350" dirty="0"/>
-          </a:p>
-        </p:txBody>
-      </p:sp>
-      <p:sp>
-        <p:nvSpPr>
-          <p:cNvPr id="8" name="Colonna Avvio della piattaforma pubblica"/>
-          <p:cNvSpPr/>
-          <p:nvPr/>
-        </p:nvSpPr>
-        <p:spPr>
-          <a:xfrm>
-            <a:off x="4328160" y="1325880"/>
-            <a:ext cx="3505200" cy="4846320"/>
-          </a:xfrm>
-          <a:prstGeom prst="roundRect">
-            <a:avLst>
-              <a:gd name="adj" fmla="val 3130"/>
-            </a:avLst>
-          </a:prstGeom>
-          <a:solidFill>
-            <a:schemeClr val="bg2"/>
-          </a:solidFill>
-          <a:ln w="12700">
-            <a:solidFill>
-              <a:schemeClr val="bg2"/>
-            </a:solidFill>
-            <a:prstDash val="solid"/>
-          </a:ln>
-        </p:spPr>
-      </p:sp>
-      <p:sp>
-        <p:nvSpPr>
-          <p:cNvPr id="9" name="Avvio della piattaforma pubblica cerchio"/>
-          <p:cNvSpPr/>
-          <p:nvPr/>
-        </p:nvSpPr>
-        <p:spPr>
-          <a:xfrm>
-            <a:off x="4556760" y="1554480"/>
-            <a:ext cx="548640" cy="548640"/>
-          </a:xfrm>
-          <a:prstGeom prst="ellipse">
-            <a:avLst/>
-          </a:prstGeom>
-          <a:solidFill>
-            <a:schemeClr val="accent2"/>
-          </a:solidFill>
-          <a:ln w="12700">
-            <a:solidFill>
-              <a:schemeClr val="accent2"/>
-            </a:solidFill>
-            <a:prstDash val="solid"/>
-          </a:ln>
-        </p:spPr>
-      </p:sp>
-      <p:pic>
-        <p:nvPicPr>
-          <p:cNvPr id="10" name="Avvio della piattaforma pubblica icona" descr="preencoded.png">    </p:cNvPr>
-          <p:cNvPicPr>
-            <a:picLocks noChangeAspect="1"/>
-          </p:cNvPicPr>
-          <p:nvPr/>
-        </p:nvPicPr>
-        <p:blipFill>
-          <a:blip r:embed="rId2"/>
-          <a:stretch>
-            <a:fillRect/>
-          </a:stretch>
-        </p:blipFill>
-        <p:spPr>
-          <a:xfrm>
-            <a:off x="4693920" y="1691640"/>
-            <a:ext cx="274320" cy="274320"/>
-          </a:xfrm>
-          <a:prstGeom prst="rect">
-            <a:avLst/>
-          </a:prstGeom>
-        </p:spPr>
-      </p:pic>
-      <p:sp>
-        <p:nvSpPr>
-          <p:cNvPr id="11" name="Text 7"/>
-          <p:cNvSpPr txBox="1"/>
-          <p:nvPr/>
-        </p:nvSpPr>
-        <p:spPr>
-          <a:xfrm>
-            <a:off x="5242560" y="1508760"/>
-            <a:ext cx="2453640" cy="640080"/>
-          </a:xfrm>
-          <a:prstGeom prst="rect">
-            <a:avLst/>
-          </a:prstGeom>
-          <a:noFill/>
-          <a:ln/>
-        </p:spPr>
-        <p:txBody>
-          <a:bodyPr wrap="square" lIns="0" tIns="0" rIns="0" bIns="0" rtlCol="0" anchor="ctr"/>
-          <a:lstStyle/>
-          <a:p>
-            <a:pPr indent="0" marL="0">
-              <a:buNone/>
-            </a:pPr>
-            <a:r>
-              <a:rPr lang="en-US" sz="1700" b="1" dirty="0">
-                <a:solidFill>
-                  <a:schemeClr val="tx2"/>
-                </a:solidFill>
-              </a:rPr>
-              <a:t>Avvio della piattaforma pubblica</a:t>
-            </a:r>
-            <a:endParaRPr lang="en-US" sz="1700" dirty="0"/>
-          </a:p>
-        </p:txBody>
-      </p:sp>
-      <p:sp>
-        <p:nvSpPr>
-          <p:cNvPr id="12" name="Text 8"/>
-          <p:cNvSpPr txBox="1"/>
-          <p:nvPr/>
-        </p:nvSpPr>
-        <p:spPr>
-          <a:xfrm>
-            <a:off x="4602480" y="2286000"/>
-            <a:ext cx="3048000" cy="3749040"/>
-          </a:xfrm>
-          <a:prstGeom prst="rect">
-            <a:avLst/>
-          </a:prstGeom>
-          <a:noFill/>
-          <a:ln/>
-        </p:spPr>
-        <p:txBody>
-          <a:bodyPr wrap="square" lIns="0" tIns="0" rIns="0" bIns="0" rtlCol="0" anchor="t"/>
-          <a:lstStyle/>
-          <a:p>
-            <a:pPr marL="342900" indent="-342900">
-              <a:spcAft>
-                <a:spcPts val="700"/>
-              </a:spcAft>
-              <a:buSzPct val="100000"/>
-              <a:buChar char="•"/>
-            </a:pPr>
-            <a:r>
-              <a:rPr lang="en-US" sz="1350" dirty="0">
-                <a:solidFill>
-                  <a:schemeClr val="tx1"/>
-                </a:solidFill>
-              </a:rPr>
-              <a:t>Pagina /programma attiva con gli 8 documenti ufficiali v1.2 e la Metodologia approvata</a:t>
-            </a:r>
-            <a:endParaRPr lang="en-US" sz="1350" dirty="0"/>
-          </a:p>
-          <a:p>
-            <a:pPr marL="342900" indent="-342900">
-              <a:spcAft>
-                <a:spcPts val="700"/>
-              </a:spcAft>
-              <a:buSzPct val="100000"/>
-              <a:buChar char="•"/>
-            </a:pPr>
-            <a:r>
-              <a:rPr lang="en-US" sz="1350" dirty="0">
-                <a:solidFill>
-                  <a:schemeClr val="tx1"/>
-                </a:solidFill>
-              </a:rPr>
-              <a:t>PEC del Programma per i reclami: operate@pec.it</a:t>
-            </a:r>
-            <a:endParaRPr lang="en-US" sz="1350" dirty="0"/>
-          </a:p>
-          <a:p>
-            <a:pPr marL="342900" indent="-342900">
-              <a:spcAft>
-                <a:spcPts val="700"/>
-              </a:spcAft>
-              <a:buSzPct val="100000"/>
-              <a:buChar char="•"/>
-            </a:pPr>
-            <a:r>
-              <a:rPr lang="en-US" sz="1350" dirty="0">
-                <a:solidFill>
-                  <a:schemeClr val="tx1"/>
-                </a:solidFill>
-              </a:rPr>
-              <a:t>Da inserire: enti di validazione e verifica e registri riconosciuti, modulistica</a:t>
-            </a:r>
-            <a:endParaRPr lang="en-US" sz="1350" dirty="0"/>
-          </a:p>
-          <a:p>
-            <a:pPr marL="342900" indent="-342900">
-              <a:spcAft>
-                <a:spcPts val="700"/>
-              </a:spcAft>
-              <a:buSzPct val="100000"/>
-              <a:buChar char="•"/>
-            </a:pPr>
-            <a:r>
-              <a:rPr lang="en-US" sz="1350" dirty="0">
-                <a:solidFill>
-                  <a:schemeClr val="tx1"/>
-                </a:solidFill>
-              </a:rPr>
-              <a:t>Accesso con SPID, CIE o CNS al feedback pubblico (adesione come fornitore di servizi)</a:t>
-            </a:r>
-            <a:endParaRPr lang="en-US" sz="1350" dirty="0"/>
-          </a:p>
-          <a:p>
-            <a:pPr marL="342900" indent="-342900">
-              <a:spcAft>
-                <a:spcPts val="700"/>
-              </a:spcAft>
-              <a:buSzPct val="100000"/>
-              <a:buChar char="•"/>
-            </a:pPr>
-            <a:r>
-              <a:rPr lang="en-US" sz="1350" dirty="0">
-                <a:solidFill>
-                  <a:schemeClr val="tx1"/>
-                </a:solidFill>
-              </a:rPr>
-              <a:t>Collaudo in corso con 5 Amministratori: correzioni dei rapporti V01 e V05 in produzione il 20-21/10; rilievi N01-N06 (22/10) corretti e in produzione; restano le regole metodologiche da confermare</a:t>
-            </a:r>
-            <a:endParaRPr lang="en-US" sz="1350" dirty="0"/>
-          </a:p>
-        </p:txBody>
-      </p:sp>
-      <p:sp>
-        <p:nvSpPr>
-          <p:cNvPr id="13" name="Colonna Qualità dei dati e completamenti"/>
-          <p:cNvSpPr/>
-          <p:nvPr/>
-        </p:nvSpPr>
-        <p:spPr>
-          <a:xfrm>
-            <a:off x="8107680" y="1325880"/>
-            <a:ext cx="3505200" cy="4846320"/>
-          </a:xfrm>
-          <a:prstGeom prst="roundRect">
-            <a:avLst>
-              <a:gd name="adj" fmla="val 3130"/>
-            </a:avLst>
-          </a:prstGeom>
-          <a:solidFill>
-            <a:schemeClr val="bg2"/>
-          </a:solidFill>
-          <a:ln w="12700">
-            <a:solidFill>
-              <a:schemeClr val="bg2"/>
-            </a:solidFill>
-            <a:prstDash val="solid"/>
-          </a:ln>
-        </p:spPr>
-      </p:sp>
-      <p:sp>
-        <p:nvSpPr>
-          <p:cNvPr id="14" name="Qualità dei dati e completamenti cerchio"/>
-          <p:cNvSpPr/>
-          <p:nvPr/>
-        </p:nvSpPr>
-        <p:spPr>
-          <a:xfrm>
-            <a:off x="8336280" y="1554480"/>
-            <a:ext cx="548640" cy="548640"/>
-          </a:xfrm>
-          <a:prstGeom prst="ellipse">
-            <a:avLst/>
-          </a:prstGeom>
-          <a:solidFill>
-            <a:schemeClr val="tx2"/>
-          </a:solidFill>
-          <a:ln w="12700">
-            <a:solidFill>
-              <a:schemeClr val="tx2"/>
-            </a:solidFill>
-            <a:prstDash val="solid"/>
-          </a:ln>
-        </p:spPr>
-      </p:sp>
-      <p:pic>
-        <p:nvPicPr>
-          <p:cNvPr id="15" name="Qualità dei dati e completamenti icona" descr="preencoded.png">    </p:cNvPr>
-          <p:cNvPicPr>
-            <a:picLocks noChangeAspect="1"/>
-          </p:cNvPicPr>
-          <p:nvPr/>
-        </p:nvPicPr>
-        <p:blipFill>
-          <a:blip r:embed="rId3"/>
-          <a:stretch>
-            <a:fillRect/>
-          </a:stretch>
-        </p:blipFill>
-        <p:spPr>
-          <a:xfrm>
-            <a:off x="8473440" y="1691640"/>
-            <a:ext cx="274320" cy="274320"/>
-          </a:xfrm>
-          <a:prstGeom prst="rect">
-            <a:avLst/>
-          </a:prstGeom>
-        </p:spPr>
-      </p:pic>
-      <p:sp>
-        <p:nvSpPr>
-          <p:cNvPr id="16" name="Text 11"/>
-          <p:cNvSpPr txBox="1"/>
-          <p:nvPr/>
-        </p:nvSpPr>
-        <p:spPr>
-          <a:xfrm>
-            <a:off x="9022080" y="1508760"/>
-            <a:ext cx="2453640" cy="640080"/>
-          </a:xfrm>
-          <a:prstGeom prst="rect">
-            <a:avLst/>
-          </a:prstGeom>
-          <a:noFill/>
-          <a:ln/>
-        </p:spPr>
-        <p:txBody>
-          <a:bodyPr wrap="square" lIns="0" tIns="0" rIns="0" bIns="0" rtlCol="0" anchor="ctr"/>
-          <a:lstStyle/>
-          <a:p>
-            <a:pPr indent="0" marL="0">
-              <a:buNone/>
-            </a:pPr>
-            <a:r>
-              <a:rPr lang="en-US" sz="1700" b="1" dirty="0">
-                <a:solidFill>
-                  <a:schemeClr val="tx2"/>
-                </a:solidFill>
-              </a:rPr>
-              <a:t>Qualità dei dati e completamenti</a:t>
-            </a:r>
-            <a:endParaRPr lang="en-US" sz="1700" dirty="0"/>
-          </a:p>
-        </p:txBody>
-      </p:sp>
-      <p:sp>
-        <p:nvSpPr>
-          <p:cNvPr id="17" name="Text 12"/>
-          <p:cNvSpPr txBox="1"/>
-          <p:nvPr/>
-        </p:nvSpPr>
-        <p:spPr>
-          <a:xfrm>
-            <a:off x="8382000" y="2286000"/>
-            <a:ext cx="3048000" cy="3749040"/>
-          </a:xfrm>
-          <a:prstGeom prst="rect">
-            <a:avLst/>
-          </a:prstGeom>
-          <a:noFill/>
-          <a:ln/>
-        </p:spPr>
-        <p:txBody>
-          <a:bodyPr wrap="square" lIns="0" tIns="0" rIns="0" bIns="0" rtlCol="0" anchor="t"/>
-          <a:lstStyle/>
-          <a:p>
-            <a:pPr marL="342900" indent="-342900">
-              <a:spcAft>
-                <a:spcPts val="700"/>
-              </a:spcAft>
-              <a:buSzPct val="100000"/>
-              <a:buChar char="•"/>
-            </a:pPr>
-            <a:r>
-              <a:rPr lang="en-US" sz="1350" dirty="0">
-                <a:solidFill>
-                  <a:schemeClr val="tx1"/>
-                </a:solidFill>
-              </a:rPr>
-              <a:t>Dati ufficiali per i controlli: popolazione e cluster SOSE di ogni Comune</a:t>
-            </a:r>
-            <a:endParaRPr lang="en-US" sz="1350" dirty="0"/>
-          </a:p>
-          <a:p>
-            <a:pPr marL="342900" indent="-342900">
-              <a:spcAft>
-                <a:spcPts val="700"/>
-              </a:spcAft>
-              <a:buSzPct val="100000"/>
-              <a:buChar char="•"/>
-            </a:pPr>
-            <a:r>
-              <a:rPr lang="en-US" sz="1350" dirty="0">
-                <a:solidFill>
-                  <a:schemeClr val="tx1"/>
-                </a:solidFill>
-              </a:rPr>
-              <a:t>Conferma delle scelte interpretative del calcolo con l'ente</a:t>
-            </a:r>
-            <a:endParaRPr lang="en-US" sz="1350" dirty="0"/>
-          </a:p>
-          <a:p>
-            <a:pPr marL="342900" indent="-342900">
-              <a:spcAft>
-                <a:spcPts val="700"/>
-              </a:spcAft>
-              <a:buSzPct val="100000"/>
-              <a:buChar char="•"/>
-            </a:pPr>
-            <a:r>
-              <a:rPr lang="en-US" sz="1350" dirty="0">
-                <a:solidFill>
-                  <a:schemeClr val="tx1"/>
-                </a:solidFill>
-              </a:rPr>
-              <a:t>Privacy: DPIA, registro dei trattamenti; accessibilità WCAG 2.1 AA</a:t>
-            </a:r>
-            <a:endParaRPr lang="en-US" sz="1350" dirty="0"/>
-          </a:p>
-          <a:p>
-            <a:pPr marL="342900" indent="-342900">
-              <a:spcAft>
-                <a:spcPts val="700"/>
-              </a:spcAft>
-              <a:buSzPct val="100000"/>
-              <a:buChar char="•"/>
-            </a:pPr>
-            <a:r>
-              <a:rPr lang="en-US" sz="1350" dirty="0">
-                <a:solidFill>
-                  <a:schemeClr val="tx1"/>
-                </a:solidFill>
-              </a:rPr>
-              <a:t>Collaudo con i dati reali di un Comune</a:t>
-            </a:r>
-            <a:endParaRPr lang="en-US" sz="1350" dirty="0"/>
-          </a:p>
-          <a:p>
-            <a:pPr marL="342900" indent="-342900">
-              <a:spcAft>
-                <a:spcPts val="700"/>
-              </a:spcAft>
-              <a:buSzPct val="100000"/>
-              <a:buChar char="•"/>
-            </a:pPr>
-            <a:r>
-              <a:rPr lang="en-US" sz="1350" dirty="0">
-                <a:solidFill>
-                  <a:schemeClr val="tx1"/>
-                </a:solidFill>
-              </a:rPr>
-              <a:t>Nuovi moduli: simulatore con PDF ed Excel, assistente virtuale (poi Operatori e aiuto sulla pratica), Audit User e utenti online (fatti il 20/10); navigazione da smartphone (22/10); Banca Dati Utenze per utenza nel calcolo (22-23/10); valore dei crediti in Dashboard (23/10); Marketplaces da definire</a:t>
+              <a:t>simulazione di costi e ricavi per 7, 10 o 21 anni, fascicolo PDF, richiesta di registrazione a tutti gli Amministratori</a:t>
             </a:r>
             <a:endParaRPr lang="en-US" sz="1350" dirty="0"/>
           </a:p>
@@ -3594,7 +3257,7 @@
                 <a:ea typeface="Cambria" pitchFamily="34" charset="-122"/>
                 <a:cs typeface="Cambria" pitchFamily="34" charset="-120"/>
               </a:rPr>
-              <a:t>Nuovi moduli: simulatore e assistente virtuale</a:t>
+              <a:t>Punti aperti: sviluppo e servizi da attivare</a:t>
             </a:r>
             <a:endParaRPr lang="en-US" sz="3000" dirty="0"/>
           </a:p>
@@ -3602,18 +3265,18 @@
       </p:sp>
       <p:sp>
         <p:nvSpPr>
-          <p:cNvPr id="3" name="Riquadro simulatore"/>
+          <p:cNvPr id="3" name="Colonna Sicurezza e infrastruttura"/>
           <p:cNvSpPr/>
           <p:nvPr/>
         </p:nvSpPr>
         <p:spPr>
           <a:xfrm>
-            <a:off x="548640" y="1234440"/>
-            <a:ext cx="7086600" cy="5029200"/>
+            <a:off x="548640" y="1325880"/>
+            <a:ext cx="3505200" cy="4846320"/>
           </a:xfrm>
           <a:prstGeom prst="roundRect">
             <a:avLst>
-              <a:gd name="adj" fmla="val 2182"/>
+              <a:gd name="adj" fmla="val 3130"/>
             </a:avLst>
           </a:prstGeom>
           <a:solidFill>
@@ -3629,13 +3292,237 @@
       </p:sp>
       <p:sp>
         <p:nvSpPr>
-          <p:cNvPr id="4" name="Simulatore cerchio"/>
+          <p:cNvPr id="4" name="Sicurezza e infrastruttura cerchio"/>
           <p:cNvSpPr/>
           <p:nvPr/>
         </p:nvSpPr>
         <p:spPr>
           <a:xfrm>
-            <a:off x="777240" y="1417320"/>
+            <a:off x="777240" y="1554480"/>
+            <a:ext cx="548640" cy="548640"/>
+          </a:xfrm>
+          <a:prstGeom prst="ellipse">
+            <a:avLst/>
+          </a:prstGeom>
+          <a:solidFill>
+            <a:schemeClr val="tx2"/>
+          </a:solidFill>
+          <a:ln w="12700">
+            <a:solidFill>
+              <a:schemeClr val="tx2"/>
+            </a:solidFill>
+            <a:prstDash val="solid"/>
+          </a:ln>
+        </p:spPr>
+      </p:sp>
+      <p:pic>
+        <p:nvPicPr>
+          <p:cNvPr id="5" name="Sicurezza e infrastruttura icona" descr="preencoded.png">    </p:cNvPr>
+          <p:cNvPicPr>
+            <a:picLocks noChangeAspect="1"/>
+          </p:cNvPicPr>
+          <p:nvPr/>
+        </p:nvPicPr>
+        <p:blipFill>
+          <a:blip r:embed="rId1"/>
+          <a:stretch>
+            <a:fillRect/>
+          </a:stretch>
+        </p:blipFill>
+        <p:spPr>
+          <a:xfrm>
+            <a:off x="914400" y="1691640"/>
+            <a:ext cx="274320" cy="274320"/>
+          </a:xfrm>
+          <a:prstGeom prst="rect">
+            <a:avLst/>
+          </a:prstGeom>
+        </p:spPr>
+      </p:pic>
+      <p:sp>
+        <p:nvSpPr>
+          <p:cNvPr id="6" name="Text 3"/>
+          <p:cNvSpPr txBox="1"/>
+          <p:nvPr/>
+        </p:nvSpPr>
+        <p:spPr>
+          <a:xfrm>
+            <a:off x="1463040" y="1508760"/>
+            <a:ext cx="2453640" cy="640080"/>
+          </a:xfrm>
+          <a:prstGeom prst="rect">
+            <a:avLst/>
+          </a:prstGeom>
+          <a:noFill/>
+          <a:ln/>
+        </p:spPr>
+        <p:txBody>
+          <a:bodyPr wrap="square" lIns="0" tIns="0" rIns="0" bIns="0" rtlCol="0" anchor="ctr"/>
+          <a:lstStyle/>
+          <a:p>
+            <a:pPr indent="0" marL="0">
+              <a:buNone/>
+            </a:pPr>
+            <a:r>
+              <a:rPr lang="en-US" sz="1700" b="1" dirty="0">
+                <a:solidFill>
+                  <a:schemeClr val="tx2"/>
+                </a:solidFill>
+              </a:rPr>
+              <a:t>Sicurezza e infrastruttura</a:t>
+            </a:r>
+            <a:endParaRPr lang="en-US" sz="1700" dirty="0"/>
+          </a:p>
+        </p:txBody>
+      </p:sp>
+      <p:sp>
+        <p:nvSpPr>
+          <p:cNvPr id="7" name="Text 4"/>
+          <p:cNvSpPr txBox="1"/>
+          <p:nvPr/>
+        </p:nvSpPr>
+        <p:spPr>
+          <a:xfrm>
+            <a:off x="822960" y="2286000"/>
+            <a:ext cx="3048000" cy="3749040"/>
+          </a:xfrm>
+          <a:prstGeom prst="rect">
+            <a:avLst/>
+          </a:prstGeom>
+          <a:noFill/>
+          <a:ln/>
+        </p:spPr>
+        <p:txBody>
+          <a:bodyPr wrap="square" lIns="0" tIns="0" rIns="0" bIns="0" rtlCol="0" anchor="t"/>
+          <a:lstStyle/>
+          <a:p>
+            <a:pPr marL="342900" indent="-342900">
+              <a:spcAft>
+                <a:spcPts val="700"/>
+              </a:spcAft>
+              <a:buSzPct val="100000"/>
+              <a:buChar char="•"/>
+            </a:pPr>
+            <a:r>
+              <a:rPr lang="en-US" sz="1350" dirty="0">
+                <a:solidFill>
+                  <a:schemeClr val="tx1"/>
+                </a:solidFill>
+              </a:rPr>
+              <a:t>Fatto il 20/10: registro degli accessi e avvisi di sicurezza, uscita per inattività, intestazioni del sito, librerie aggiornate (0 vulnerabilità)</a:t>
+            </a:r>
+            <a:endParaRPr lang="en-US" sz="1350" dirty="0"/>
+          </a:p>
+          <a:p>
+            <a:pPr marL="342900" indent="-342900">
+              <a:spcAft>
+                <a:spcPts val="700"/>
+              </a:spcAft>
+              <a:buSzPct val="100000"/>
+              <a:buChar char="•"/>
+            </a:pPr>
+            <a:r>
+              <a:rPr lang="en-US" sz="1350" dirty="0">
+                <a:solidFill>
+                  <a:schemeClr val="tx1"/>
+                </a:solidFill>
+              </a:rPr>
+              <a:t>Verifica in due passaggi per lo staff (pronta, spenta); CAPTCHA sulle pagine pubbliche</a:t>
+            </a:r>
+            <a:endParaRPr lang="en-US" sz="1350" dirty="0"/>
+          </a:p>
+          <a:p>
+            <a:pPr marL="342900" indent="-342900">
+              <a:spcAft>
+                <a:spcPts val="700"/>
+              </a:spcAft>
+              <a:buSzPct val="100000"/>
+              <a:buChar char="•"/>
+            </a:pPr>
+            <a:r>
+              <a:rPr lang="en-US" sz="1350" dirty="0">
+                <a:solidFill>
+                  <a:schemeClr val="tx1"/>
+                </a:solidFill>
+              </a:rPr>
+              <a:t>Antivirus sui file; verifica OWASP, test di intrusione a fine sviluppo</a:t>
+            </a:r>
+            <a:endParaRPr lang="en-US" sz="1350" dirty="0"/>
+          </a:p>
+          <a:p>
+            <a:pPr marL="342900" indent="-342900">
+              <a:spcAft>
+                <a:spcPts val="700"/>
+              </a:spcAft>
+              <a:buSzPct val="100000"/>
+              <a:buChar char="•"/>
+            </a:pPr>
+            <a:r>
+              <a:rPr lang="en-US" sz="1350" dirty="0">
+                <a:solidFill>
+                  <a:schemeClr val="tx1"/>
+                </a:solidFill>
+              </a:rPr>
+              <a:t>Backup automatico completo ogni giorno alle 20 dal Mac nella cartella Drive Cwp › backup (pronto, da installare sul Mac) e istruzioni di ripristino provate; da fare ambiente di prova e monitoraggio errori</a:t>
+            </a:r>
+            <a:endParaRPr lang="en-US" sz="1350" dirty="0"/>
+          </a:p>
+          <a:p>
+            <a:pPr marL="342900" indent="-342900">
+              <a:spcAft>
+                <a:spcPts val="700"/>
+              </a:spcAft>
+              <a:buSzPct val="100000"/>
+              <a:buChar char="•"/>
+            </a:pPr>
+            <a:r>
+              <a:rPr lang="en-US" sz="1350" dirty="0">
+                <a:solidFill>
+                  <a:schemeClr val="tx1"/>
+                </a:solidFill>
+              </a:rPr>
+              <a:t>Piani a pagamento e repository privato (slide «Piani a pagamento»); dominio email verificato, che serve anche alle email con le credenziali</a:t>
+            </a:r>
+            <a:endParaRPr lang="en-US" sz="1350" dirty="0"/>
+          </a:p>
+        </p:txBody>
+      </p:sp>
+      <p:sp>
+        <p:nvSpPr>
+          <p:cNvPr id="8" name="Colonna Avvio della piattaforma pubblica"/>
+          <p:cNvSpPr/>
+          <p:nvPr/>
+        </p:nvSpPr>
+        <p:spPr>
+          <a:xfrm>
+            <a:off x="4328160" y="1325880"/>
+            <a:ext cx="3505200" cy="4846320"/>
+          </a:xfrm>
+          <a:prstGeom prst="roundRect">
+            <a:avLst>
+              <a:gd name="adj" fmla="val 3130"/>
+            </a:avLst>
+          </a:prstGeom>
+          <a:solidFill>
+            <a:schemeClr val="bg2"/>
+          </a:solidFill>
+          <a:ln w="12700">
+            <a:solidFill>
+              <a:schemeClr val="bg2"/>
+            </a:solidFill>
+            <a:prstDash val="solid"/>
+          </a:ln>
+        </p:spPr>
+      </p:sp>
+      <p:sp>
+        <p:nvSpPr>
+          <p:cNvPr id="9" name="Avvio della piattaforma pubblica cerchio"/>
+          <p:cNvSpPr/>
+          <p:nvPr/>
+        </p:nvSpPr>
+        <p:spPr>
+          <a:xfrm>
+            <a:off x="4556760" y="1554480"/>
             <a:ext cx="548640" cy="548640"/>
           </a:xfrm>
           <a:prstGeom prst="ellipse">
@@ -3654,21 +3541,21 @@
       </p:sp>
       <p:pic>
         <p:nvPicPr>
-          <p:cNvPr id="5" name="Simulatore icona" descr="preencoded.png">    </p:cNvPr>
+          <p:cNvPr id="10" name="Avvio della piattaforma pubblica icona" descr="preencoded.png">    </p:cNvPr>
           <p:cNvPicPr>
             <a:picLocks noChangeAspect="1"/>
           </p:cNvPicPr>
           <p:nvPr/>
         </p:nvPicPr>
         <p:blipFill>
-          <a:blip r:embed="rId1"/>
+          <a:blip r:embed="rId2"/>
           <a:stretch>
             <a:fillRect/>
           </a:stretch>
         </p:blipFill>
         <p:spPr>
           <a:xfrm>
-            <a:off x="914400" y="1554480"/>
+            <a:off x="4693920" y="1691640"/>
             <a:ext cx="274320" cy="274320"/>
           </a:xfrm>
           <a:prstGeom prst="rect">
@@ -3678,14 +3565,14 @@
       </p:pic>
       <p:sp>
         <p:nvSpPr>
-          <p:cNvPr id="6" name="Text 3"/>
+          <p:cNvPr id="11" name="Text 7"/>
           <p:cNvSpPr txBox="1"/>
           <p:nvPr/>
         </p:nvSpPr>
         <p:spPr>
           <a:xfrm>
-            <a:off x="1463040" y="1371600"/>
-            <a:ext cx="3840480" cy="365760"/>
+            <a:off x="5242560" y="1508760"/>
+            <a:ext cx="2453640" cy="640080"/>
           </a:xfrm>
           <a:prstGeom prst="rect">
             <a:avLst/>
@@ -3701,27 +3588,27 @@
               <a:buNone/>
             </a:pPr>
             <a:r>
-              <a:rPr lang="en-US" sz="1800" b="1" dirty="0">
+              <a:rPr lang="en-US" sz="1700" b="1" dirty="0">
                 <a:solidFill>
                   <a:schemeClr val="tx2"/>
                 </a:solidFill>
               </a:rPr>
-              <a:t>Simulatore di scenari</a:t>
-            </a:r>
-            <a:endParaRPr lang="en-US" sz="1800" dirty="0"/>
-          </a:p>
-        </p:txBody>
-      </p:sp>
-      <p:sp>
-        <p:nvSpPr>
-          <p:cNvPr id="7" name="Text 4"/>
+              <a:t>Avvio della piattaforma pubblica</a:t>
+            </a:r>
+            <a:endParaRPr lang="en-US" sz="1700" dirty="0"/>
+          </a:p>
+        </p:txBody>
+      </p:sp>
+      <p:sp>
+        <p:nvSpPr>
+          <p:cNvPr id="12" name="Text 8"/>
           <p:cNvSpPr txBox="1"/>
           <p:nvPr/>
         </p:nvSpPr>
         <p:spPr>
           <a:xfrm>
-            <a:off x="1463040" y="1737360"/>
-            <a:ext cx="3931920" cy="457200"/>
+            <a:off x="4602480" y="2286000"/>
+            <a:ext cx="3048000" cy="3749040"/>
           </a:xfrm>
           <a:prstGeom prst="rect">
             <a:avLst/>
@@ -3730,46 +3617,122 @@
           <a:ln/>
         </p:spPr>
         <p:txBody>
-          <a:bodyPr wrap="square" lIns="0" tIns="0" rIns="0" bIns="0" rtlCol="0" anchor="ctr"/>
-          <a:lstStyle/>
-          <a:p>
-            <a:pPr indent="0" marL="0">
-              <a:buNone/>
-            </a:pPr>
-            <a:r>
-              <a:rPr lang="en-US" sz="1200" dirty="0">
-                <a:solidFill>
-                  <a:schemeClr val="accent6"/>
-                </a:solidFill>
-              </a:rPr>
-              <a:t>Quanti crediti potrebbe generare un Comune? Una stima anno per anno, prima di aderire.</a:t>
-            </a:r>
-            <a:endParaRPr lang="en-US" sz="1200" dirty="0"/>
-          </a:p>
-        </p:txBody>
-      </p:sp>
-      <p:sp>
-        <p:nvSpPr>
-          <p:cNvPr id="8" name="Badge online"/>
+          <a:bodyPr wrap="square" lIns="0" tIns="0" rIns="0" bIns="0" rtlCol="0" anchor="t"/>
+          <a:lstStyle/>
+          <a:p>
+            <a:pPr marL="342900" indent="-342900">
+              <a:spcAft>
+                <a:spcPts val="700"/>
+              </a:spcAft>
+              <a:buSzPct val="100000"/>
+              <a:buChar char="•"/>
+            </a:pPr>
+            <a:r>
+              <a:rPr lang="en-US" sz="1350" dirty="0">
+                <a:solidFill>
+                  <a:schemeClr val="tx1"/>
+                </a:solidFill>
+              </a:rPr>
+              <a:t>Pagina /programma attiva con gli 8 documenti ufficiali v1.2 e la Metodologia approvata</a:t>
+            </a:r>
+            <a:endParaRPr lang="en-US" sz="1350" dirty="0"/>
+          </a:p>
+          <a:p>
+            <a:pPr marL="342900" indent="-342900">
+              <a:spcAft>
+                <a:spcPts val="700"/>
+              </a:spcAft>
+              <a:buSzPct val="100000"/>
+              <a:buChar char="•"/>
+            </a:pPr>
+            <a:r>
+              <a:rPr lang="en-US" sz="1350" dirty="0">
+                <a:solidFill>
+                  <a:schemeClr val="tx1"/>
+                </a:solidFill>
+              </a:rPr>
+              <a:t>PEC del Programma per i reclami: operate@pec.it</a:t>
+            </a:r>
+            <a:endParaRPr lang="en-US" sz="1350" dirty="0"/>
+          </a:p>
+          <a:p>
+            <a:pPr marL="342900" indent="-342900">
+              <a:spcAft>
+                <a:spcPts val="700"/>
+              </a:spcAft>
+              <a:buSzPct val="100000"/>
+              <a:buChar char="•"/>
+            </a:pPr>
+            <a:r>
+              <a:rPr lang="en-US" sz="1350" dirty="0">
+                <a:solidFill>
+                  <a:schemeClr val="tx1"/>
+                </a:solidFill>
+              </a:rPr>
+              <a:t>Da inserire: enti di validazione e verifica e registri riconosciuti, modulistica</a:t>
+            </a:r>
+            <a:endParaRPr lang="en-US" sz="1350" dirty="0"/>
+          </a:p>
+          <a:p>
+            <a:pPr marL="342900" indent="-342900">
+              <a:spcAft>
+                <a:spcPts val="700"/>
+              </a:spcAft>
+              <a:buSzPct val="100000"/>
+              <a:buChar char="•"/>
+            </a:pPr>
+            <a:r>
+              <a:rPr lang="en-US" sz="1350" dirty="0">
+                <a:solidFill>
+                  <a:schemeClr val="tx1"/>
+                </a:solidFill>
+              </a:rPr>
+              <a:t>Accesso con SPID, CIE o CNS al feedback pubblico (adesione come fornitore di servizi)</a:t>
+            </a:r>
+            <a:endParaRPr lang="en-US" sz="1350" dirty="0"/>
+          </a:p>
+          <a:p>
+            <a:pPr marL="342900" indent="-342900">
+              <a:spcAft>
+                <a:spcPts val="700"/>
+              </a:spcAft>
+              <a:buSzPct val="100000"/>
+              <a:buChar char="•"/>
+            </a:pPr>
+            <a:r>
+              <a:rPr lang="en-US" sz="1350" dirty="0">
+                <a:solidFill>
+                  <a:schemeClr val="tx1"/>
+                </a:solidFill>
+              </a:rPr>
+              <a:t>Collaudo in corso con 5 Amministratori: correzioni dei rapporti V01 e V05 in produzione il 20-21/10; rilievi N01-N06 (22/10) corretti e in produzione; restano le regole metodologiche da confermare</a:t>
+            </a:r>
+            <a:endParaRPr lang="en-US" sz="1350" dirty="0"/>
+          </a:p>
+        </p:txBody>
+      </p:sp>
+      <p:sp>
+        <p:nvSpPr>
+          <p:cNvPr id="13" name="Colonna Qualità dei dati e completamenti"/>
           <p:cNvSpPr/>
           <p:nvPr/>
         </p:nvSpPr>
         <p:spPr>
           <a:xfrm>
-            <a:off x="1463040" y="2212848"/>
-            <a:ext cx="2148840" cy="274320"/>
+            <a:off x="8107680" y="1325880"/>
+            <a:ext cx="3505200" cy="4846320"/>
           </a:xfrm>
           <a:prstGeom prst="roundRect">
             <a:avLst>
-              <a:gd name="adj" fmla="val 50000"/>
+              <a:gd name="adj" fmla="val 3130"/>
             </a:avLst>
           </a:prstGeom>
           <a:solidFill>
-            <a:schemeClr val="accent2"/>
+            <a:schemeClr val="bg2"/>
           </a:solidFill>
           <a:ln w="12700">
             <a:solidFill>
-              <a:schemeClr val="accent2"/>
+              <a:schemeClr val="bg2"/>
             </a:solidFill>
             <a:prstDash val="solid"/>
           </a:ln>
@@ -3777,185 +3740,14 @@
       </p:sp>
       <p:sp>
         <p:nvSpPr>
-          <p:cNvPr id="9" name="Text 6"/>
-          <p:cNvSpPr txBox="1"/>
-          <p:nvPr/>
-        </p:nvSpPr>
-        <p:spPr>
-          <a:xfrm>
-            <a:off x="1463040" y="2212848"/>
-            <a:ext cx="2148840" cy="274320"/>
-          </a:xfrm>
-          <a:prstGeom prst="rect">
-            <a:avLst/>
-          </a:prstGeom>
-          <a:noFill/>
-          <a:ln/>
-        </p:spPr>
-        <p:txBody>
-          <a:bodyPr wrap="square" lIns="0" tIns="0" rIns="0" bIns="0" rtlCol="0" anchor="ctr"/>
-          <a:lstStyle/>
-          <a:p>
-            <a:pPr algn="ctr" indent="0" marL="0">
-              <a:buNone/>
-            </a:pPr>
-            <a:r>
-              <a:rPr lang="en-US" sz="1000" b="1" spc="100" kern="0" dirty="0">
-                <a:solidFill>
-                  <a:schemeClr val="bg1"/>
-                </a:solidFill>
-              </a:rPr>
-              <a:t>PRIMA VERSIONE ONLINE</a:t>
-            </a:r>
-            <a:endParaRPr lang="en-US" sz="1000" dirty="0"/>
-          </a:p>
-        </p:txBody>
-      </p:sp>
-      <p:sp>
-        <p:nvSpPr>
-          <p:cNvPr id="10" name="Menu durata"/>
+          <p:cNvPr id="14" name="Qualità dei dati e completamenti cerchio"/>
           <p:cNvSpPr/>
           <p:nvPr/>
         </p:nvSpPr>
         <p:spPr>
           <a:xfrm>
-            <a:off x="5532120" y="1417320"/>
-            <a:ext cx="1920240" cy="384048"/>
-          </a:xfrm>
-          <a:prstGeom prst="roundRect">
-            <a:avLst>
-              <a:gd name="adj" fmla="val 14286"/>
-            </a:avLst>
-          </a:prstGeom>
-          <a:solidFill>
-            <a:schemeClr val="bg1"/>
-          </a:solidFill>
-          <a:ln w="15875">
-            <a:solidFill>
-              <a:srgbClr val="2F5D3A"/>
-            </a:solidFill>
-            <a:prstDash val="solid"/>
-          </a:ln>
-        </p:spPr>
-      </p:sp>
-      <p:sp>
-        <p:nvSpPr>
-          <p:cNvPr id="11" name="Text 8"/>
-          <p:cNvSpPr txBox="1"/>
-          <p:nvPr/>
-        </p:nvSpPr>
-        <p:spPr>
-          <a:xfrm>
-            <a:off x="5623560" y="1417320"/>
-            <a:ext cx="1783080" cy="384048"/>
-          </a:xfrm>
-          <a:prstGeom prst="rect">
-            <a:avLst/>
-          </a:prstGeom>
-          <a:noFill/>
-          <a:ln/>
-        </p:spPr>
-        <p:txBody>
-          <a:bodyPr wrap="square" lIns="0" tIns="0" rIns="0" bIns="0" rtlCol="0" anchor="ctr"/>
-          <a:lstStyle/>
-          <a:p>
-            <a:pPr indent="0" marL="0">
-              <a:buNone/>
-            </a:pPr>
-            <a:r>
-              <a:rPr lang="en-US" sz="1200" dirty="0">
-                <a:solidFill>
-                  <a:schemeClr val="accent6"/>
-                </a:solidFill>
-              </a:rPr>
-              <a:t>Durata: </a:t>
-            </a:r>
-            <a:pPr indent="0" marL="0">
-              <a:buNone/>
-            </a:pPr>
-            <a:r>
-              <a:rPr lang="en-US" sz="1200" b="1" dirty="0">
-                <a:solidFill>
-                  <a:schemeClr val="tx2"/>
-                </a:solidFill>
-              </a:rPr>
-              <a:t>10 anni  ▾</a:t>
-            </a:r>
-            <a:endParaRPr lang="en-US" sz="1200" dirty="0"/>
-          </a:p>
-        </p:txBody>
-      </p:sp>
-      <p:sp>
-        <p:nvSpPr>
-          <p:cNvPr id="12" name="Opzioni durata"/>
-          <p:cNvSpPr/>
-          <p:nvPr/>
-        </p:nvSpPr>
-        <p:spPr>
-          <a:xfrm>
-            <a:off x="5532120" y="1819656"/>
-            <a:ext cx="1920240" cy="603504"/>
-          </a:xfrm>
-          <a:prstGeom prst="rect">
-            <a:avLst/>
-          </a:prstGeom>
-          <a:solidFill>
-            <a:schemeClr val="bg1"/>
-          </a:solidFill>
-          <a:ln w="9525">
-            <a:solidFill>
-              <a:srgbClr val="D9D4C5"/>
-            </a:solidFill>
-            <a:prstDash val="solid"/>
-          </a:ln>
-        </p:spPr>
-      </p:sp>
-      <p:sp>
-        <p:nvSpPr>
-          <p:cNvPr id="13" name="Text 10"/>
-          <p:cNvSpPr txBox="1"/>
-          <p:nvPr/>
-        </p:nvSpPr>
-        <p:spPr>
-          <a:xfrm>
-            <a:off x="5532120" y="1819656"/>
-            <a:ext cx="1920240" cy="603504"/>
-          </a:xfrm>
-          <a:prstGeom prst="rect">
-            <a:avLst/>
-          </a:prstGeom>
-          <a:noFill/>
-          <a:ln/>
-        </p:spPr>
-        <p:txBody>
-          <a:bodyPr wrap="square" lIns="0" tIns="0" rIns="0" bIns="0" rtlCol="0" anchor="ctr"/>
-          <a:lstStyle/>
-          <a:p>
-            <a:pPr algn="ctr" indent="0" marL="0">
-              <a:buNone/>
-            </a:pPr>
-            <a:r>
-              <a:rPr lang="en-US" sz="1100" dirty="0">
-                <a:solidFill>
-                  <a:schemeClr val="tx1"/>
-                </a:solidFill>
-              </a:rPr>
-              <a:t>7 anni  ·  10 anni  ·  21 anni</a:t>
-            </a:r>
-            <a:endParaRPr lang="en-US" sz="1100" dirty="0"/>
-          </a:p>
-        </p:txBody>
-      </p:sp>
-      <p:sp>
-        <p:nvSpPr>
-          <p:cNvPr id="14" name="Passo 1"/>
-          <p:cNvSpPr/>
-          <p:nvPr/>
-        </p:nvSpPr>
-        <p:spPr>
-          <a:xfrm>
-            <a:off x="822960" y="2633472"/>
-            <a:ext cx="420624" cy="420624"/>
+            <a:off x="8336280" y="1554480"/>
+            <a:ext cx="548640" cy="548640"/>
           </a:xfrm>
           <a:prstGeom prst="ellipse">
             <a:avLst/>
@@ -3971,641 +3763,23 @@
           </a:ln>
         </p:spPr>
       </p:sp>
-      <p:sp>
-        <p:nvSpPr>
-          <p:cNvPr id="15" name="Text 12"/>
-          <p:cNvSpPr txBox="1"/>
-          <p:nvPr/>
-        </p:nvSpPr>
-        <p:spPr>
-          <a:xfrm>
-            <a:off x="822960" y="2633472"/>
-            <a:ext cx="420624" cy="420624"/>
-          </a:xfrm>
-          <a:prstGeom prst="rect">
-            <a:avLst/>
-          </a:prstGeom>
-          <a:noFill/>
-          <a:ln/>
-        </p:spPr>
-        <p:txBody>
-          <a:bodyPr wrap="square" lIns="0" tIns="0" rIns="0" bIns="0" rtlCol="0" anchor="ctr"/>
-          <a:lstStyle/>
-          <a:p>
-            <a:pPr algn="ctr" indent="0" marL="0">
-              <a:buNone/>
-            </a:pPr>
-            <a:r>
-              <a:rPr lang="en-US" sz="1400" b="1" dirty="0">
-                <a:solidFill>
-                  <a:schemeClr val="bg1"/>
-                </a:solidFill>
-              </a:rPr>
-              <a:t>1</a:t>
-            </a:r>
-            <a:endParaRPr lang="en-US" sz="1400" dirty="0"/>
-          </a:p>
-        </p:txBody>
-      </p:sp>
-      <p:sp>
-        <p:nvSpPr>
-          <p:cNvPr id="16" name="Text 13"/>
-          <p:cNvSpPr txBox="1"/>
-          <p:nvPr/>
-        </p:nvSpPr>
-        <p:spPr>
-          <a:xfrm>
-            <a:off x="1417320" y="2560320"/>
-            <a:ext cx="6035040" cy="603504"/>
-          </a:xfrm>
-          <a:prstGeom prst="rect">
-            <a:avLst/>
-          </a:prstGeom>
-          <a:noFill/>
-          <a:ln/>
-        </p:spPr>
-        <p:txBody>
-          <a:bodyPr wrap="square" lIns="0" tIns="0" rIns="0" bIns="0" rtlCol="0" anchor="ctr"/>
-          <a:lstStyle/>
-          <a:p>
-            <a:pPr indent="0" marL="0">
-              <a:buNone/>
-            </a:pPr>
-            <a:r>
-              <a:rPr lang="en-US" sz="1350" b="1" dirty="0">
-                <a:solidFill>
-                  <a:schemeClr val="tx2"/>
-                </a:solidFill>
-              </a:rPr>
-              <a:t>Scenari per Comune</a:t>
-            </a:r>
-            <a:endParaRPr lang="en-US" sz="1350" dirty="0"/>
-          </a:p>
-          <a:p>
-            <a:pPr indent="0" marL="0">
-              <a:buNone/>
-            </a:pPr>
-            <a:r>
-              <a:rPr lang="en-US" sz="1150" dirty="0">
-                <a:solidFill>
-                  <a:schemeClr val="tx1"/>
-                </a:solidFill>
-              </a:rPr>
-              <a:t>Più scenari per ogni Comune («prudente», «obiettivo»…), durata 7, 10 o 21 anni</a:t>
-            </a:r>
-            <a:endParaRPr lang="en-US" sz="1350" dirty="0"/>
-          </a:p>
-        </p:txBody>
-      </p:sp>
-      <p:sp>
-        <p:nvSpPr>
-          <p:cNvPr id="17" name="Passo 2"/>
-          <p:cNvSpPr/>
-          <p:nvPr/>
-        </p:nvSpPr>
-        <p:spPr>
-          <a:xfrm>
-            <a:off x="822960" y="3346704"/>
-            <a:ext cx="420624" cy="420624"/>
-          </a:xfrm>
-          <a:prstGeom prst="ellipse">
-            <a:avLst/>
-          </a:prstGeom>
-          <a:solidFill>
-            <a:schemeClr val="tx2"/>
-          </a:solidFill>
-          <a:ln w="12700">
-            <a:solidFill>
-              <a:schemeClr val="tx2"/>
-            </a:solidFill>
-            <a:prstDash val="solid"/>
-          </a:ln>
-        </p:spPr>
-      </p:sp>
-      <p:sp>
-        <p:nvSpPr>
-          <p:cNvPr id="18" name="Text 15"/>
-          <p:cNvSpPr txBox="1"/>
-          <p:nvPr/>
-        </p:nvSpPr>
-        <p:spPr>
-          <a:xfrm>
-            <a:off x="822960" y="3346704"/>
-            <a:ext cx="420624" cy="420624"/>
-          </a:xfrm>
-          <a:prstGeom prst="rect">
-            <a:avLst/>
-          </a:prstGeom>
-          <a:noFill/>
-          <a:ln/>
-        </p:spPr>
-        <p:txBody>
-          <a:bodyPr wrap="square" lIns="0" tIns="0" rIns="0" bIns="0" rtlCol="0" anchor="ctr"/>
-          <a:lstStyle/>
-          <a:p>
-            <a:pPr algn="ctr" indent="0" marL="0">
-              <a:buNone/>
-            </a:pPr>
-            <a:r>
-              <a:rPr lang="en-US" sz="1400" b="1" dirty="0">
-                <a:solidFill>
-                  <a:schemeClr val="bg1"/>
-                </a:solidFill>
-              </a:rPr>
-              <a:t>2</a:t>
-            </a:r>
-            <a:endParaRPr lang="en-US" sz="1400" dirty="0"/>
-          </a:p>
-        </p:txBody>
-      </p:sp>
-      <p:sp>
-        <p:nvSpPr>
-          <p:cNvPr id="19" name="Text 16"/>
-          <p:cNvSpPr txBox="1"/>
-          <p:nvPr/>
-        </p:nvSpPr>
-        <p:spPr>
-          <a:xfrm>
-            <a:off x="1417320" y="3273552"/>
-            <a:ext cx="6035040" cy="603504"/>
-          </a:xfrm>
-          <a:prstGeom prst="rect">
-            <a:avLst/>
-          </a:prstGeom>
-          <a:noFill/>
-          <a:ln/>
-        </p:spPr>
-        <p:txBody>
-          <a:bodyPr wrap="square" lIns="0" tIns="0" rIns="0" bIns="0" rtlCol="0" anchor="ctr"/>
-          <a:lstStyle/>
-          <a:p>
-            <a:pPr indent="0" marL="0">
-              <a:buNone/>
-            </a:pPr>
-            <a:r>
-              <a:rPr lang="en-US" sz="1350" b="1" dirty="0">
-                <a:solidFill>
-                  <a:schemeClr val="tx2"/>
-                </a:solidFill>
-              </a:rPr>
-              <a:t>Scenario di riferimento (Standard 4.8.1)</a:t>
-            </a:r>
-            <a:endParaRPr lang="en-US" sz="1350" dirty="0"/>
-          </a:p>
-          <a:p>
-            <a:pPr indent="0" marL="0">
-              <a:buNone/>
-            </a:pPr>
-            <a:r>
-              <a:rPr lang="en-US" sz="1150" dirty="0">
-                <a:solidFill>
-                  <a:schemeClr val="tx1"/>
-                </a:solidFill>
-              </a:rPr>
-              <a:t>Anno con il 65% di differenziata o valori medi del cluster SOSE; situazione attuale come partenza</a:t>
-            </a:r>
-            <a:endParaRPr lang="en-US" sz="1350" dirty="0"/>
-          </a:p>
-        </p:txBody>
-      </p:sp>
-      <p:sp>
-        <p:nvSpPr>
-          <p:cNvPr id="20" name="Passo 3"/>
-          <p:cNvSpPr/>
-          <p:nvPr/>
-        </p:nvSpPr>
-        <p:spPr>
-          <a:xfrm>
-            <a:off x="822960" y="4059936"/>
-            <a:ext cx="420624" cy="420624"/>
-          </a:xfrm>
-          <a:prstGeom prst="ellipse">
-            <a:avLst/>
-          </a:prstGeom>
-          <a:solidFill>
-            <a:schemeClr val="tx2"/>
-          </a:solidFill>
-          <a:ln w="12700">
-            <a:solidFill>
-              <a:schemeClr val="tx2"/>
-            </a:solidFill>
-            <a:prstDash val="solid"/>
-          </a:ln>
-        </p:spPr>
-      </p:sp>
-      <p:sp>
-        <p:nvSpPr>
-          <p:cNvPr id="21" name="Text 18"/>
-          <p:cNvSpPr txBox="1"/>
-          <p:nvPr/>
-        </p:nvSpPr>
-        <p:spPr>
-          <a:xfrm>
-            <a:off x="822960" y="4059936"/>
-            <a:ext cx="420624" cy="420624"/>
-          </a:xfrm>
-          <a:prstGeom prst="rect">
-            <a:avLst/>
-          </a:prstGeom>
-          <a:noFill/>
-          <a:ln/>
-        </p:spPr>
-        <p:txBody>
-          <a:bodyPr wrap="square" lIns="0" tIns="0" rIns="0" bIns="0" rtlCol="0" anchor="ctr"/>
-          <a:lstStyle/>
-          <a:p>
-            <a:pPr algn="ctr" indent="0" marL="0">
-              <a:buNone/>
-            </a:pPr>
-            <a:r>
-              <a:rPr lang="en-US" sz="1400" b="1" dirty="0">
-                <a:solidFill>
-                  <a:schemeClr val="bg1"/>
-                </a:solidFill>
-              </a:rPr>
-              <a:t>3</a:t>
-            </a:r>
-            <a:endParaRPr lang="en-US" sz="1400" dirty="0"/>
-          </a:p>
-        </p:txBody>
-      </p:sp>
-      <p:sp>
-        <p:nvSpPr>
-          <p:cNvPr id="22" name="Text 19"/>
-          <p:cNvSpPr txBox="1"/>
-          <p:nvPr/>
-        </p:nvSpPr>
-        <p:spPr>
-          <a:xfrm>
-            <a:off x="1417320" y="3986784"/>
-            <a:ext cx="6035040" cy="603504"/>
-          </a:xfrm>
-          <a:prstGeom prst="rect">
-            <a:avLst/>
-          </a:prstGeom>
-          <a:noFill/>
-          <a:ln/>
-        </p:spPr>
-        <p:txBody>
-          <a:bodyPr wrap="square" lIns="0" tIns="0" rIns="0" bIns="0" rtlCol="0" anchor="ctr"/>
-          <a:lstStyle/>
-          <a:p>
-            <a:pPr indent="0" marL="0">
-              <a:buNone/>
-            </a:pPr>
-            <a:r>
-              <a:rPr lang="en-US" sz="1350" b="1" dirty="0">
-                <a:solidFill>
-                  <a:schemeClr val="tx2"/>
-                </a:solidFill>
-              </a:rPr>
-              <a:t>Obiettivi anno per anno</a:t>
-            </a:r>
-            <a:endParaRPr lang="en-US" sz="1350" dirty="0"/>
-          </a:p>
-          <a:p>
-            <a:pPr indent="0" marL="0">
-              <a:buNone/>
-            </a:pPr>
-            <a:r>
-              <a:rPr lang="en-US" sz="1150" dirty="0">
-                <a:solidFill>
-                  <a:schemeClr val="tx1"/>
-                </a:solidFill>
-              </a:rPr>
-              <a:t>Produzione totale e pro capite prevista, secco residuo pro capite obiettivo</a:t>
-            </a:r>
-            <a:endParaRPr lang="en-US" sz="1350" dirty="0"/>
-          </a:p>
-        </p:txBody>
-      </p:sp>
-      <p:sp>
-        <p:nvSpPr>
-          <p:cNvPr id="23" name="Passo 4"/>
-          <p:cNvSpPr/>
-          <p:nvPr/>
-        </p:nvSpPr>
-        <p:spPr>
-          <a:xfrm>
-            <a:off x="822960" y="4773168"/>
-            <a:ext cx="420624" cy="420624"/>
-          </a:xfrm>
-          <a:prstGeom prst="ellipse">
-            <a:avLst/>
-          </a:prstGeom>
-          <a:solidFill>
-            <a:schemeClr val="tx2"/>
-          </a:solidFill>
-          <a:ln w="12700">
-            <a:solidFill>
-              <a:schemeClr val="tx2"/>
-            </a:solidFill>
-            <a:prstDash val="solid"/>
-          </a:ln>
-        </p:spPr>
-      </p:sp>
-      <p:sp>
-        <p:nvSpPr>
-          <p:cNvPr id="24" name="Text 21"/>
-          <p:cNvSpPr txBox="1"/>
-          <p:nvPr/>
-        </p:nvSpPr>
-        <p:spPr>
-          <a:xfrm>
-            <a:off x="822960" y="4773168"/>
-            <a:ext cx="420624" cy="420624"/>
-          </a:xfrm>
-          <a:prstGeom prst="rect">
-            <a:avLst/>
-          </a:prstGeom>
-          <a:noFill/>
-          <a:ln/>
-        </p:spPr>
-        <p:txBody>
-          <a:bodyPr wrap="square" lIns="0" tIns="0" rIns="0" bIns="0" rtlCol="0" anchor="ctr"/>
-          <a:lstStyle/>
-          <a:p>
-            <a:pPr algn="ctr" indent="0" marL="0">
-              <a:buNone/>
-            </a:pPr>
-            <a:r>
-              <a:rPr lang="en-US" sz="1400" b="1" dirty="0">
-                <a:solidFill>
-                  <a:schemeClr val="bg1"/>
-                </a:solidFill>
-              </a:rPr>
-              <a:t>4</a:t>
-            </a:r>
-            <a:endParaRPr lang="en-US" sz="1400" dirty="0"/>
-          </a:p>
-        </p:txBody>
-      </p:sp>
-      <p:sp>
-        <p:nvSpPr>
-          <p:cNvPr id="25" name="Text 22"/>
-          <p:cNvSpPr txBox="1"/>
-          <p:nvPr/>
-        </p:nvSpPr>
-        <p:spPr>
-          <a:xfrm>
-            <a:off x="1417320" y="4700016"/>
-            <a:ext cx="6035040" cy="603504"/>
-          </a:xfrm>
-          <a:prstGeom prst="rect">
-            <a:avLst/>
-          </a:prstGeom>
-          <a:noFill/>
-          <a:ln/>
-        </p:spPr>
-        <p:txBody>
-          <a:bodyPr wrap="square" lIns="0" tIns="0" rIns="0" bIns="0" rtlCol="0" anchor="ctr"/>
-          <a:lstStyle/>
-          <a:p>
-            <a:pPr indent="0" marL="0">
-              <a:buNone/>
-            </a:pPr>
-            <a:r>
-              <a:rPr lang="en-US" sz="1350" b="1" dirty="0">
-                <a:solidFill>
-                  <a:schemeClr val="tx2"/>
-                </a:solidFill>
-              </a:rPr>
-              <a:t>% di differenziata</a:t>
-            </a:r>
-            <a:endParaRPr lang="en-US" sz="1350" dirty="0"/>
-          </a:p>
-          <a:p>
-            <a:pPr indent="0" marL="0">
-              <a:buNone/>
-            </a:pPr>
-            <a:r>
-              <a:rPr lang="en-US" sz="1150" dirty="0">
-                <a:solidFill>
-                  <a:schemeClr val="tx1"/>
-                </a:solidFill>
-              </a:rPr>
-              <a:t>Ricalcolata ogni anno: (totale − secco) / totale</a:t>
-            </a:r>
-            <a:endParaRPr lang="en-US" sz="1350" dirty="0"/>
-          </a:p>
-        </p:txBody>
-      </p:sp>
-      <p:sp>
-        <p:nvSpPr>
-          <p:cNvPr id="26" name="Passo 5"/>
-          <p:cNvSpPr/>
-          <p:nvPr/>
-        </p:nvSpPr>
-        <p:spPr>
-          <a:xfrm>
-            <a:off x="822960" y="5486400"/>
-            <a:ext cx="420624" cy="420624"/>
-          </a:xfrm>
-          <a:prstGeom prst="ellipse">
-            <a:avLst/>
-          </a:prstGeom>
-          <a:solidFill>
-            <a:schemeClr val="accent2"/>
-          </a:solidFill>
-          <a:ln w="12700">
-            <a:solidFill>
-              <a:schemeClr val="accent2"/>
-            </a:solidFill>
-            <a:prstDash val="solid"/>
-          </a:ln>
-        </p:spPr>
-      </p:sp>
-      <p:sp>
-        <p:nvSpPr>
-          <p:cNvPr id="27" name="Text 24"/>
-          <p:cNvSpPr txBox="1"/>
-          <p:nvPr/>
-        </p:nvSpPr>
-        <p:spPr>
-          <a:xfrm>
-            <a:off x="822960" y="5486400"/>
-            <a:ext cx="420624" cy="420624"/>
-          </a:xfrm>
-          <a:prstGeom prst="rect">
-            <a:avLst/>
-          </a:prstGeom>
-          <a:noFill/>
-          <a:ln/>
-        </p:spPr>
-        <p:txBody>
-          <a:bodyPr wrap="square" lIns="0" tIns="0" rIns="0" bIns="0" rtlCol="0" anchor="ctr"/>
-          <a:lstStyle/>
-          <a:p>
-            <a:pPr algn="ctr" indent="0" marL="0">
-              <a:buNone/>
-            </a:pPr>
-            <a:r>
-              <a:rPr lang="en-US" sz="1400" b="1" dirty="0">
-                <a:solidFill>
-                  <a:schemeClr val="bg1"/>
-                </a:solidFill>
-              </a:rPr>
-              <a:t>5</a:t>
-            </a:r>
-            <a:endParaRPr lang="en-US" sz="1400" dirty="0"/>
-          </a:p>
-        </p:txBody>
-      </p:sp>
-      <p:sp>
-        <p:nvSpPr>
-          <p:cNvPr id="28" name="Text 25"/>
-          <p:cNvSpPr txBox="1"/>
-          <p:nvPr/>
-        </p:nvSpPr>
-        <p:spPr>
-          <a:xfrm>
-            <a:off x="1417320" y="5413248"/>
-            <a:ext cx="6035040" cy="603504"/>
-          </a:xfrm>
-          <a:prstGeom prst="rect">
-            <a:avLst/>
-          </a:prstGeom>
-          <a:noFill/>
-          <a:ln/>
-        </p:spPr>
-        <p:txBody>
-          <a:bodyPr wrap="square" lIns="0" tIns="0" rIns="0" bIns="0" rtlCol="0" anchor="ctr"/>
-          <a:lstStyle/>
-          <a:p>
-            <a:pPr indent="0" marL="0">
-              <a:buNone/>
-            </a:pPr>
-            <a:r>
-              <a:rPr lang="en-US" sz="1350" b="1" dirty="0">
-                <a:solidFill>
-                  <a:schemeClr val="tx2"/>
-                </a:solidFill>
-              </a:rPr>
-              <a:t>Crediti e conti economici</a:t>
-            </a:r>
-            <a:endParaRPr lang="en-US" sz="1350" dirty="0"/>
-          </a:p>
-          <a:p>
-            <a:pPr indent="0" marL="0">
-              <a:buNone/>
-            </a:pPr>
-            <a:r>
-              <a:rPr lang="en-US" sz="1150" dirty="0">
-                <a:solidFill>
-                  <a:schemeClr val="tx1"/>
-                </a:solidFill>
-              </a:rPr>
-              <a:t>Bilancio del Comune o per utenza (come l'Allegato A EsaCom); ricavi a 32 € anno per anno; costi Caso 1 o 2; margine</a:t>
-            </a:r>
-            <a:endParaRPr lang="en-US" sz="1350" dirty="0"/>
-          </a:p>
-        </p:txBody>
-      </p:sp>
-      <p:sp>
-        <p:nvSpPr>
-          <p:cNvPr id="29" name="Text 26"/>
-          <p:cNvSpPr txBox="1"/>
-          <p:nvPr/>
-        </p:nvSpPr>
-        <p:spPr>
-          <a:xfrm>
-            <a:off x="822960" y="6035040"/>
-            <a:ext cx="6675120" cy="228600"/>
-          </a:xfrm>
-          <a:prstGeom prst="rect">
-            <a:avLst/>
-          </a:prstGeom>
-          <a:noFill/>
-          <a:ln/>
-        </p:spPr>
-        <p:txBody>
-          <a:bodyPr wrap="square" lIns="0" tIns="0" rIns="0" bIns="0" rtlCol="0" anchor="ctr"/>
-          <a:lstStyle/>
-          <a:p>
-            <a:pPr indent="0" marL="0">
-              <a:buNone/>
-            </a:pPr>
-            <a:r>
-              <a:rPr lang="en-US" sz="1000" i="1" dirty="0">
-                <a:solidFill>
-                  <a:schemeClr val="accent6"/>
-                </a:solidFill>
-              </a:rPr>
-              <a:t>Stima ex ante a scopo di pianificazione: i crediti veri si calcolano ex post con la Banca Dati Utenze.</a:t>
-            </a:r>
-            <a:endParaRPr lang="en-US" sz="1000" dirty="0"/>
-          </a:p>
-        </p:txBody>
-      </p:sp>
-      <p:sp>
-        <p:nvSpPr>
-          <p:cNvPr id="30" name="Riquadro assistente"/>
-          <p:cNvSpPr/>
-          <p:nvPr/>
-        </p:nvSpPr>
-        <p:spPr>
-          <a:xfrm>
-            <a:off x="7863840" y="1234440"/>
-            <a:ext cx="3749040" cy="5029200"/>
-          </a:xfrm>
-          <a:prstGeom prst="roundRect">
-            <a:avLst>
-              <a:gd name="adj" fmla="val 2927"/>
-            </a:avLst>
-          </a:prstGeom>
-          <a:solidFill>
-            <a:schemeClr val="accent3"/>
-          </a:solidFill>
-          <a:ln w="12700">
-            <a:solidFill>
-              <a:schemeClr val="accent3"/>
-            </a:solidFill>
-            <a:prstDash val="solid"/>
-          </a:ln>
-        </p:spPr>
-      </p:sp>
-      <p:sp>
-        <p:nvSpPr>
-          <p:cNvPr id="31" name="Assistente cerchio"/>
-          <p:cNvSpPr/>
-          <p:nvPr/>
-        </p:nvSpPr>
-        <p:spPr>
-          <a:xfrm>
-            <a:off x="8092440" y="1417320"/>
-            <a:ext cx="548640" cy="548640"/>
-          </a:xfrm>
-          <a:prstGeom prst="ellipse">
-            <a:avLst/>
-          </a:prstGeom>
-          <a:solidFill>
-            <a:schemeClr val="tx2"/>
-          </a:solidFill>
-          <a:ln w="12700">
-            <a:solidFill>
-              <a:schemeClr val="tx2"/>
-            </a:solidFill>
-            <a:prstDash val="solid"/>
-          </a:ln>
-        </p:spPr>
-      </p:sp>
       <p:pic>
         <p:nvPicPr>
-          <p:cNvPr id="32" name="Assistente icona" descr="preencoded.png">    </p:cNvPr>
+          <p:cNvPr id="15" name="Qualità dei dati e completamenti icona" descr="preencoded.png">    </p:cNvPr>
           <p:cNvPicPr>
             <a:picLocks noChangeAspect="1"/>
           </p:cNvPicPr>
           <p:nvPr/>
         </p:nvPicPr>
         <p:blipFill>
-          <a:blip r:embed="rId2"/>
+          <a:blip r:embed="rId3"/>
           <a:stretch>
             <a:fillRect/>
           </a:stretch>
         </p:blipFill>
         <p:spPr>
           <a:xfrm>
-            <a:off x="8229600" y="1554480"/>
+            <a:off x="8473440" y="1691640"/>
             <a:ext cx="274320" cy="274320"/>
           </a:xfrm>
           <a:prstGeom prst="rect">
@@ -4615,14 +3789,14 @@
       </p:pic>
       <p:sp>
         <p:nvSpPr>
-          <p:cNvPr id="33" name="Text 29"/>
+          <p:cNvPr id="16" name="Text 11"/>
           <p:cNvSpPr txBox="1"/>
           <p:nvPr/>
         </p:nvSpPr>
         <p:spPr>
           <a:xfrm>
-            <a:off x="8778240" y="1371600"/>
-            <a:ext cx="2743200" cy="685800"/>
+            <a:off x="9022080" y="1508760"/>
+            <a:ext cx="2453640" cy="640080"/>
           </a:xfrm>
           <a:prstGeom prst="rect">
             <a:avLst/>
@@ -4638,54 +3812,27 @@
               <a:buNone/>
             </a:pPr>
             <a:r>
-              <a:rPr lang="en-US" sz="1800" b="1" dirty="0">
+              <a:rPr lang="en-US" sz="1700" b="1" dirty="0">
                 <a:solidFill>
                   <a:schemeClr val="tx2"/>
                 </a:solidFill>
               </a:rPr>
-              <a:t>Assistente virtuale Claude</a:t>
-            </a:r>
-            <a:endParaRPr lang="en-US" sz="1800" dirty="0"/>
-          </a:p>
-        </p:txBody>
-      </p:sp>
-      <p:sp>
-        <p:nvSpPr>
-          <p:cNvPr id="34" name="Badge attivo"/>
-          <p:cNvSpPr/>
-          <p:nvPr/>
-        </p:nvSpPr>
-        <p:spPr>
-          <a:xfrm>
-            <a:off x="8778240" y="2029968"/>
-            <a:ext cx="2194560" cy="256032"/>
-          </a:xfrm>
-          <a:prstGeom prst="roundRect">
-            <a:avLst>
-              <a:gd name="adj" fmla="val 50000"/>
-            </a:avLst>
-          </a:prstGeom>
-          <a:solidFill>
-            <a:schemeClr val="bg1"/>
-          </a:solidFill>
-          <a:ln w="9525">
-            <a:solidFill>
-              <a:schemeClr val="tx2"/>
-            </a:solidFill>
-            <a:prstDash val="solid"/>
-          </a:ln>
-        </p:spPr>
-      </p:sp>
-      <p:sp>
-        <p:nvSpPr>
-          <p:cNvPr id="35" name="Text 31"/>
+              <a:t>Qualità dei dati e completamenti</a:t>
+            </a:r>
+            <a:endParaRPr lang="en-US" sz="1700" dirty="0"/>
+          </a:p>
+        </p:txBody>
+      </p:sp>
+      <p:sp>
+        <p:nvSpPr>
+          <p:cNvPr id="17" name="Text 12"/>
           <p:cNvSpPr txBox="1"/>
           <p:nvPr/>
         </p:nvSpPr>
         <p:spPr>
           <a:xfrm>
-            <a:off x="8778240" y="2029968"/>
-            <a:ext cx="2194560" cy="256032"/>
+            <a:off x="8382000" y="2286000"/>
+            <a:ext cx="3048000" cy="3749040"/>
           </a:xfrm>
           <a:prstGeom prst="rect">
             <a:avLst/>
@@ -4694,179 +3841,97 @@
           <a:ln/>
         </p:spPr>
         <p:txBody>
-          <a:bodyPr wrap="square" lIns="0" tIns="0" rIns="0" bIns="0" rtlCol="0" anchor="ctr"/>
-          <a:lstStyle/>
-          <a:p>
-            <a:pPr algn="ctr" indent="0" marL="0">
-              <a:buNone/>
-            </a:pPr>
-            <a:r>
-              <a:rPr lang="en-US" sz="950" b="1" spc="100" kern="0" dirty="0">
-                <a:solidFill>
-                  <a:schemeClr val="tx2"/>
-                </a:solidFill>
-              </a:rPr>
-              <a:t>ATTIVO DAL 19/10</a:t>
-            </a:r>
-            <a:endParaRPr lang="en-US" sz="950" dirty="0"/>
-          </a:p>
-        </p:txBody>
-      </p:sp>
-      <p:sp>
-        <p:nvSpPr>
-          <p:cNvPr id="36" name="Text 32"/>
-          <p:cNvSpPr txBox="1"/>
-          <p:nvPr/>
-        </p:nvSpPr>
-        <p:spPr>
-          <a:xfrm>
-            <a:off x="8092440" y="2423160"/>
-            <a:ext cx="3337560" cy="3703320"/>
-          </a:xfrm>
-          <a:prstGeom prst="rect">
-            <a:avLst/>
-          </a:prstGeom>
-          <a:noFill/>
-          <a:ln/>
-        </p:spPr>
-        <p:txBody>
           <a:bodyPr wrap="square" lIns="0" tIns="0" rIns="0" bIns="0" rtlCol="0" anchor="t"/>
           <a:lstStyle/>
           <a:p>
-            <a:pPr indent="0" marL="0">
+            <a:pPr marL="342900" indent="-342900">
               <a:spcAft>
-                <a:spcPts val="600"/>
+                <a:spcPts val="700"/>
               </a:spcAft>
-              <a:buNone/>
-            </a:pPr>
-            <a:r>
-              <a:rPr lang="en-US" sz="1250" b="1" dirty="0">
-                <a:solidFill>
-                  <a:schemeClr val="tx2"/>
-                </a:solidFill>
-              </a:rPr>
-              <a:t>Per enti e Amministratori</a:t>
-            </a:r>
-            <a:endParaRPr lang="en-US" sz="1250" dirty="0"/>
-          </a:p>
-          <a:p>
-            <a:pPr indent="0" marL="0">
+              <a:buSzPct val="100000"/>
+              <a:buChar char="•"/>
+            </a:pPr>
+            <a:r>
+              <a:rPr lang="en-US" sz="1350" dirty="0">
+                <a:solidFill>
+                  <a:schemeClr val="tx1"/>
+                </a:solidFill>
+              </a:rPr>
+              <a:t>Dati ufficiali per i controlli: popolazione e cluster SOSE di ogni Comune</a:t>
+            </a:r>
+            <a:endParaRPr lang="en-US" sz="1350" dirty="0"/>
+          </a:p>
+          <a:p>
+            <a:pPr marL="342900" indent="-342900">
               <a:spcAft>
-                <a:spcPts val="600"/>
+                <a:spcPts val="700"/>
               </a:spcAft>
-              <a:buNone/>
-            </a:pPr>
-            <a:r>
-              <a:rPr lang="en-US" sz="1250" dirty="0">
+              <a:buSzPct val="100000"/>
+              <a:buChar char="•"/>
+            </a:pPr>
+            <a:r>
+              <a:rPr lang="en-US" sz="1350" dirty="0">
                 <a:solidFill>
                   <a:schemeClr val="tx1"/>
                 </a:solidFill>
               </a:rPr>
-              <a:t>pulsante «✦ Assistente»: come si fa un'operazione, fasi, costi; risponde dai manuali e dalle tariffe</a:t>
-            </a:r>
-            <a:endParaRPr lang="en-US" sz="1250" dirty="0"/>
-          </a:p>
-          <a:p>
-            <a:pPr indent="0" marL="0">
+              <a:t>Conferma delle scelte interpretative del calcolo con l'ente</a:t>
+            </a:r>
+            <a:endParaRPr lang="en-US" sz="1350" dirty="0"/>
+          </a:p>
+          <a:p>
+            <a:pPr marL="342900" indent="-342900">
               <a:spcAft>
-                <a:spcPts val="600"/>
+                <a:spcPts val="700"/>
               </a:spcAft>
-              <a:buNone/>
-            </a:pPr>
-            <a:r>
-              <a:rPr lang="en-US" sz="1250" b="1" dirty="0">
-                <a:solidFill>
-                  <a:schemeClr val="tx2"/>
-                </a:solidFill>
-              </a:rPr>
-              <a:t>Garanzie</a:t>
-            </a:r>
-            <a:endParaRPr lang="en-US" sz="1250" dirty="0"/>
-          </a:p>
-          <a:p>
-            <a:pPr indent="0" marL="0">
+              <a:buSzPct val="100000"/>
+              <a:buChar char="•"/>
+            </a:pPr>
+            <a:r>
+              <a:rPr lang="en-US" sz="1350" dirty="0">
+                <a:solidFill>
+                  <a:schemeClr val="tx1"/>
+                </a:solidFill>
+              </a:rPr>
+              <a:t>Privacy: DPIA, registro dei trattamenti; accessibilità WCAG 2.1 AA</a:t>
+            </a:r>
+            <a:endParaRPr lang="en-US" sz="1350" dirty="0"/>
+          </a:p>
+          <a:p>
+            <a:pPr marL="342900" indent="-342900">
               <a:spcAft>
-                <a:spcPts val="600"/>
+                <a:spcPts val="700"/>
               </a:spcAft>
-              <a:buNone/>
-            </a:pPr>
-            <a:r>
-              <a:rPr lang="en-US" sz="1250" dirty="0">
+              <a:buSzPct val="100000"/>
+              <a:buChar char="•"/>
+            </a:pPr>
+            <a:r>
+              <a:rPr lang="en-US" sz="1350" dirty="0">
                 <a:solidFill>
                   <a:schemeClr val="tx1"/>
                 </a:solidFill>
               </a:rPr>
-              <a:t>non vede le pratiche e non decide; nessun testo salvato; limite di domande al giorno</a:t>
-            </a:r>
-            <a:endParaRPr lang="en-US" sz="1250" dirty="0"/>
-          </a:p>
-          <a:p>
-            <a:pPr indent="0" marL="0">
+              <a:t>Collaudo con i dati reali di un Comune</a:t>
+            </a:r>
+            <a:endParaRPr lang="en-US" sz="1350" dirty="0"/>
+          </a:p>
+          <a:p>
+            <a:pPr marL="342900" indent="-342900">
               <a:spcAft>
-                <a:spcPts val="600"/>
+                <a:spcPts val="700"/>
               </a:spcAft>
-              <a:buNone/>
-            </a:pPr>
-            <a:r>
-              <a:rPr lang="en-US" sz="1250" b="1" dirty="0">
-                <a:solidFill>
-                  <a:schemeClr val="tx2"/>
-                </a:solidFill>
-              </a:rPr>
-              <a:t>Come funziona</a:t>
-            </a:r>
-            <a:endParaRPr lang="en-US" sz="1250" dirty="0"/>
-          </a:p>
-          <a:p>
-            <a:pPr indent="0" marL="0">
-              <a:spcAft>
-                <a:spcPts val="600"/>
-              </a:spcAft>
-              <a:buNone/>
-            </a:pPr>
-            <a:r>
-              <a:rPr lang="en-US" sz="1250" dirty="0">
+              <a:buSzPct val="100000"/>
+              <a:buChar char="•"/>
+            </a:pPr>
+            <a:r>
+              <a:rPr lang="en-US" sz="1350" dirty="0">
                 <a:solidFill>
                   <a:schemeClr val="tx1"/>
                 </a:solidFill>
               </a:rPr>
-              <a:t>Claude Haiku 5.5 tramite una funzione sul server; la chiave resta in Supabase; meno di un centesimo a domanda</a:t>
-            </a:r>
-            <a:endParaRPr lang="en-US" sz="1250" dirty="0"/>
-          </a:p>
-          <a:p>
-            <a:pPr indent="0" marL="0">
-              <a:spcAft>
-                <a:spcPts val="600"/>
-              </a:spcAft>
-              <a:buNone/>
-            </a:pPr>
-            <a:r>
-              <a:rPr lang="en-US" sz="1250" b="1" dirty="0">
-                <a:solidFill>
-                  <a:schemeClr val="tx2"/>
-                </a:solidFill>
-              </a:rPr>
-              <a:t>Prossimi passi</a:t>
-            </a:r>
-            <a:endParaRPr lang="en-US" sz="1250" dirty="0"/>
-          </a:p>
-          <a:p>
-            <a:pPr indent="0" marL="0">
-              <a:spcAft>
-                <a:spcPts val="600"/>
-              </a:spcAft>
-              <a:buNone/>
-            </a:pPr>
-            <a:r>
-              <a:rPr lang="en-US" sz="1250" dirty="0">
-                <a:solidFill>
-                  <a:schemeClr val="tx1"/>
-                </a:solidFill>
-              </a:rPr>
-              <a:t>estensione agli Operatori e aiuto sulla singola pratica, con regole sulla privacy</a:t>
-            </a:r>
-            <a:endParaRPr lang="en-US" sz="1250" dirty="0"/>
+              <a:t>Nuovi moduli: simulatore con PDF ed Excel, assistente virtuale (poi Operatori e aiuto sulla pratica), Audit User e utenti online (fatti il 20/10); navigazione da smartphone (22/10); Banca Dati Utenze per utenza nel calcolo (22-23/10); valore dei crediti in Dashboard (23/10); Marketplaces da definire</a:t>
+            </a:r>
+            <a:endParaRPr lang="en-US" sz="1350" dirty="0"/>
           </a:p>
         </p:txBody>
       </p:sp>
@@ -4975,7 +4040,7 @@
                 <a:ea typeface="Cambria" pitchFamily="34" charset="-122"/>
                 <a:cs typeface="Cambria" pitchFamily="34" charset="-120"/>
               </a:rPr>
-              <a:t>Il simulatore in pratica</a:t>
+              <a:t>Nuovi moduli: simulatore e assistente virtuale</a:t>
             </a:r>
             <a:endParaRPr lang="en-US" sz="3000" dirty="0"/>
           </a:p>
@@ -4983,54 +4048,59 @@
       </p:sp>
       <p:sp>
         <p:nvSpPr>
-          <p:cNvPr id="3" name="Text 1"/>
-          <p:cNvSpPr txBox="1"/>
-          <p:nvPr/>
-        </p:nvSpPr>
-        <p:spPr>
-          <a:xfrm>
-            <a:off x="548640" y="1097280"/>
-            <a:ext cx="11064240" cy="365760"/>
-          </a:xfrm>
-          <a:prstGeom prst="rect">
-            <a:avLst/>
-          </a:prstGeom>
-          <a:noFill/>
-          <a:ln/>
-        </p:spPr>
-        <p:txBody>
-          <a:bodyPr wrap="square" lIns="0" tIns="0" rIns="0" bIns="0" rtlCol="0" anchor="ctr"/>
-          <a:lstStyle/>
-          <a:p>
-            <a:pPr indent="0" marL="0">
-              <a:buNone/>
-            </a:pPr>
-            <a:r>
-              <a:rPr lang="en-US" sz="1300" b="1" dirty="0">
-                <a:solidFill>
-                  <a:schemeClr val="tx2"/>
-                </a:solidFill>
-              </a:rPr>
-              <a:t>Portale → menu Simulatore. </a:t>
-            </a:r>
-            <a:pPr indent="0" marL="0">
-              <a:buNone/>
-            </a:pPr>
-            <a:r>
-              <a:rPr lang="en-US" sz="1300" dirty="0">
-                <a:solidFill>
-                  <a:schemeClr val="accent6"/>
-                </a:solidFill>
-              </a:rPr>
-              <a:t>Esempio con dati di prova: Comune di 12.500 abitanti (cluster 4), oggi 430 kg/ab e 90 kg/ab di secco, obiettivo 2036: 380 e 50 kg/ab.</a:t>
-            </a:r>
-            <a:endParaRPr lang="en-US" sz="1300" dirty="0"/>
-          </a:p>
-        </p:txBody>
+          <p:cNvPr id="3" name="Riquadro simulatore"/>
+          <p:cNvSpPr/>
+          <p:nvPr/>
+        </p:nvSpPr>
+        <p:spPr>
+          <a:xfrm>
+            <a:off x="548640" y="1234440"/>
+            <a:ext cx="7086600" cy="5029200"/>
+          </a:xfrm>
+          <a:prstGeom prst="roundRect">
+            <a:avLst>
+              <a:gd name="adj" fmla="val 2182"/>
+            </a:avLst>
+          </a:prstGeom>
+          <a:solidFill>
+            <a:schemeClr val="bg2"/>
+          </a:solidFill>
+          <a:ln w="12700">
+            <a:solidFill>
+              <a:schemeClr val="bg2"/>
+            </a:solidFill>
+            <a:prstDash val="solid"/>
+          </a:ln>
+        </p:spPr>
+      </p:sp>
+      <p:sp>
+        <p:nvSpPr>
+          <p:cNvPr id="4" name="Simulatore cerchio"/>
+          <p:cNvSpPr/>
+          <p:nvPr/>
+        </p:nvSpPr>
+        <p:spPr>
+          <a:xfrm>
+            <a:off x="777240" y="1417320"/>
+            <a:ext cx="548640" cy="548640"/>
+          </a:xfrm>
+          <a:prstGeom prst="ellipse">
+            <a:avLst/>
+          </a:prstGeom>
+          <a:solidFill>
+            <a:schemeClr val="accent2"/>
+          </a:solidFill>
+          <a:ln w="12700">
+            <a:solidFill>
+              <a:schemeClr val="accent2"/>
+            </a:solidFill>
+            <a:prstDash val="solid"/>
+          </a:ln>
+        </p:spPr>
       </p:sp>
       <p:pic>
         <p:nvPicPr>
-          <p:cNvPr id="4" name="Schermata simulatore" descr="Risultati del simulatore: crediti netti per anno e raccolta differenziata">    </p:cNvPr>
+          <p:cNvPr id="5" name="Simulatore icona" descr="preencoded.png">    </p:cNvPr>
           <p:cNvPicPr>
             <a:picLocks noChangeAspect="1"/>
           </p:cNvPicPr>
@@ -5044,8 +4114,8 @@
         </p:blipFill>
         <p:spPr>
           <a:xfrm>
-            <a:off x="548640" y="1572768"/>
-            <a:ext cx="11064240" cy="3955466"/>
+            <a:off x="914400" y="1554480"/>
+            <a:ext cx="274320" cy="274320"/>
           </a:xfrm>
           <a:prstGeom prst="rect">
             <a:avLst/>
@@ -5054,18 +4124,879 @@
       </p:pic>
       <p:sp>
         <p:nvSpPr>
-          <p:cNvPr id="5" name="Passo simulatore 1"/>
+          <p:cNvPr id="6" name="Text 3"/>
+          <p:cNvSpPr txBox="1"/>
+          <p:nvPr/>
+        </p:nvSpPr>
+        <p:spPr>
+          <a:xfrm>
+            <a:off x="1463040" y="1371600"/>
+            <a:ext cx="3840480" cy="365760"/>
+          </a:xfrm>
+          <a:prstGeom prst="rect">
+            <a:avLst/>
+          </a:prstGeom>
+          <a:noFill/>
+          <a:ln/>
+        </p:spPr>
+        <p:txBody>
+          <a:bodyPr wrap="square" lIns="0" tIns="0" rIns="0" bIns="0" rtlCol="0" anchor="ctr"/>
+          <a:lstStyle/>
+          <a:p>
+            <a:pPr indent="0" marL="0">
+              <a:buNone/>
+            </a:pPr>
+            <a:r>
+              <a:rPr lang="en-US" sz="1800" b="1" dirty="0">
+                <a:solidFill>
+                  <a:schemeClr val="tx2"/>
+                </a:solidFill>
+              </a:rPr>
+              <a:t>Simulatore di scenari</a:t>
+            </a:r>
+            <a:endParaRPr lang="en-US" sz="1800" dirty="0"/>
+          </a:p>
+        </p:txBody>
+      </p:sp>
+      <p:sp>
+        <p:nvSpPr>
+          <p:cNvPr id="7" name="Text 4"/>
+          <p:cNvSpPr txBox="1"/>
+          <p:nvPr/>
+        </p:nvSpPr>
+        <p:spPr>
+          <a:xfrm>
+            <a:off x="1463040" y="1737360"/>
+            <a:ext cx="3931920" cy="457200"/>
+          </a:xfrm>
+          <a:prstGeom prst="rect">
+            <a:avLst/>
+          </a:prstGeom>
+          <a:noFill/>
+          <a:ln/>
+        </p:spPr>
+        <p:txBody>
+          <a:bodyPr wrap="square" lIns="0" tIns="0" rIns="0" bIns="0" rtlCol="0" anchor="ctr"/>
+          <a:lstStyle/>
+          <a:p>
+            <a:pPr indent="0" marL="0">
+              <a:buNone/>
+            </a:pPr>
+            <a:r>
+              <a:rPr lang="en-US" sz="1200" dirty="0">
+                <a:solidFill>
+                  <a:schemeClr val="accent6"/>
+                </a:solidFill>
+              </a:rPr>
+              <a:t>Quanti crediti potrebbe generare un Comune? Una stima anno per anno, prima di aderire.</a:t>
+            </a:r>
+            <a:endParaRPr lang="en-US" sz="1200" dirty="0"/>
+          </a:p>
+        </p:txBody>
+      </p:sp>
+      <p:sp>
+        <p:nvSpPr>
+          <p:cNvPr id="8" name="Badge online"/>
           <p:cNvSpPr/>
           <p:nvPr/>
         </p:nvSpPr>
         <p:spPr>
           <a:xfrm>
-            <a:off x="548640" y="5669280"/>
-            <a:ext cx="2103120" cy="566928"/>
+            <a:off x="1463040" y="2212848"/>
+            <a:ext cx="2148840" cy="274320"/>
           </a:xfrm>
           <a:prstGeom prst="roundRect">
             <a:avLst>
-              <a:gd name="adj" fmla="val 19355"/>
+              <a:gd name="adj" fmla="val 50000"/>
+            </a:avLst>
+          </a:prstGeom>
+          <a:solidFill>
+            <a:schemeClr val="accent2"/>
+          </a:solidFill>
+          <a:ln w="12700">
+            <a:solidFill>
+              <a:schemeClr val="accent2"/>
+            </a:solidFill>
+            <a:prstDash val="solid"/>
+          </a:ln>
+        </p:spPr>
+      </p:sp>
+      <p:sp>
+        <p:nvSpPr>
+          <p:cNvPr id="9" name="Text 6"/>
+          <p:cNvSpPr txBox="1"/>
+          <p:nvPr/>
+        </p:nvSpPr>
+        <p:spPr>
+          <a:xfrm>
+            <a:off x="1463040" y="2212848"/>
+            <a:ext cx="2148840" cy="274320"/>
+          </a:xfrm>
+          <a:prstGeom prst="rect">
+            <a:avLst/>
+          </a:prstGeom>
+          <a:noFill/>
+          <a:ln/>
+        </p:spPr>
+        <p:txBody>
+          <a:bodyPr wrap="square" lIns="0" tIns="0" rIns="0" bIns="0" rtlCol="0" anchor="ctr"/>
+          <a:lstStyle/>
+          <a:p>
+            <a:pPr algn="ctr" indent="0" marL="0">
+              <a:buNone/>
+            </a:pPr>
+            <a:r>
+              <a:rPr lang="en-US" sz="1000" b="1" spc="100" kern="0" dirty="0">
+                <a:solidFill>
+                  <a:schemeClr val="bg1"/>
+                </a:solidFill>
+              </a:rPr>
+              <a:t>PRIMA VERSIONE ONLINE</a:t>
+            </a:r>
+            <a:endParaRPr lang="en-US" sz="1000" dirty="0"/>
+          </a:p>
+        </p:txBody>
+      </p:sp>
+      <p:sp>
+        <p:nvSpPr>
+          <p:cNvPr id="10" name="Menu durata"/>
+          <p:cNvSpPr/>
+          <p:nvPr/>
+        </p:nvSpPr>
+        <p:spPr>
+          <a:xfrm>
+            <a:off x="5532120" y="1417320"/>
+            <a:ext cx="1920240" cy="384048"/>
+          </a:xfrm>
+          <a:prstGeom prst="roundRect">
+            <a:avLst>
+              <a:gd name="adj" fmla="val 14286"/>
+            </a:avLst>
+          </a:prstGeom>
+          <a:solidFill>
+            <a:schemeClr val="bg1"/>
+          </a:solidFill>
+          <a:ln w="15875">
+            <a:solidFill>
+              <a:srgbClr val="2F5D3A"/>
+            </a:solidFill>
+            <a:prstDash val="solid"/>
+          </a:ln>
+        </p:spPr>
+      </p:sp>
+      <p:sp>
+        <p:nvSpPr>
+          <p:cNvPr id="11" name="Text 8"/>
+          <p:cNvSpPr txBox="1"/>
+          <p:nvPr/>
+        </p:nvSpPr>
+        <p:spPr>
+          <a:xfrm>
+            <a:off x="5623560" y="1417320"/>
+            <a:ext cx="1783080" cy="384048"/>
+          </a:xfrm>
+          <a:prstGeom prst="rect">
+            <a:avLst/>
+          </a:prstGeom>
+          <a:noFill/>
+          <a:ln/>
+        </p:spPr>
+        <p:txBody>
+          <a:bodyPr wrap="square" lIns="0" tIns="0" rIns="0" bIns="0" rtlCol="0" anchor="ctr"/>
+          <a:lstStyle/>
+          <a:p>
+            <a:pPr indent="0" marL="0">
+              <a:buNone/>
+            </a:pPr>
+            <a:r>
+              <a:rPr lang="en-US" sz="1200" dirty="0">
+                <a:solidFill>
+                  <a:schemeClr val="accent6"/>
+                </a:solidFill>
+              </a:rPr>
+              <a:t>Durata: </a:t>
+            </a:r>
+            <a:pPr indent="0" marL="0">
+              <a:buNone/>
+            </a:pPr>
+            <a:r>
+              <a:rPr lang="en-US" sz="1200" b="1" dirty="0">
+                <a:solidFill>
+                  <a:schemeClr val="tx2"/>
+                </a:solidFill>
+              </a:rPr>
+              <a:t>10 anni  ▾</a:t>
+            </a:r>
+            <a:endParaRPr lang="en-US" sz="1200" dirty="0"/>
+          </a:p>
+        </p:txBody>
+      </p:sp>
+      <p:sp>
+        <p:nvSpPr>
+          <p:cNvPr id="12" name="Opzioni durata"/>
+          <p:cNvSpPr/>
+          <p:nvPr/>
+        </p:nvSpPr>
+        <p:spPr>
+          <a:xfrm>
+            <a:off x="5532120" y="1819656"/>
+            <a:ext cx="1920240" cy="603504"/>
+          </a:xfrm>
+          <a:prstGeom prst="rect">
+            <a:avLst/>
+          </a:prstGeom>
+          <a:solidFill>
+            <a:schemeClr val="bg1"/>
+          </a:solidFill>
+          <a:ln w="9525">
+            <a:solidFill>
+              <a:srgbClr val="D9D4C5"/>
+            </a:solidFill>
+            <a:prstDash val="solid"/>
+          </a:ln>
+        </p:spPr>
+      </p:sp>
+      <p:sp>
+        <p:nvSpPr>
+          <p:cNvPr id="13" name="Text 10"/>
+          <p:cNvSpPr txBox="1"/>
+          <p:nvPr/>
+        </p:nvSpPr>
+        <p:spPr>
+          <a:xfrm>
+            <a:off x="5532120" y="1819656"/>
+            <a:ext cx="1920240" cy="603504"/>
+          </a:xfrm>
+          <a:prstGeom prst="rect">
+            <a:avLst/>
+          </a:prstGeom>
+          <a:noFill/>
+          <a:ln/>
+        </p:spPr>
+        <p:txBody>
+          <a:bodyPr wrap="square" lIns="0" tIns="0" rIns="0" bIns="0" rtlCol="0" anchor="ctr"/>
+          <a:lstStyle/>
+          <a:p>
+            <a:pPr algn="ctr" indent="0" marL="0">
+              <a:buNone/>
+            </a:pPr>
+            <a:r>
+              <a:rPr lang="en-US" sz="1100" dirty="0">
+                <a:solidFill>
+                  <a:schemeClr val="tx1"/>
+                </a:solidFill>
+              </a:rPr>
+              <a:t>7 anni  ·  10 anni  ·  21 anni</a:t>
+            </a:r>
+            <a:endParaRPr lang="en-US" sz="1100" dirty="0"/>
+          </a:p>
+        </p:txBody>
+      </p:sp>
+      <p:sp>
+        <p:nvSpPr>
+          <p:cNvPr id="14" name="Passo 1"/>
+          <p:cNvSpPr/>
+          <p:nvPr/>
+        </p:nvSpPr>
+        <p:spPr>
+          <a:xfrm>
+            <a:off x="822960" y="2633472"/>
+            <a:ext cx="420624" cy="420624"/>
+          </a:xfrm>
+          <a:prstGeom prst="ellipse">
+            <a:avLst/>
+          </a:prstGeom>
+          <a:solidFill>
+            <a:schemeClr val="tx2"/>
+          </a:solidFill>
+          <a:ln w="12700">
+            <a:solidFill>
+              <a:schemeClr val="tx2"/>
+            </a:solidFill>
+            <a:prstDash val="solid"/>
+          </a:ln>
+        </p:spPr>
+      </p:sp>
+      <p:sp>
+        <p:nvSpPr>
+          <p:cNvPr id="15" name="Text 12"/>
+          <p:cNvSpPr txBox="1"/>
+          <p:nvPr/>
+        </p:nvSpPr>
+        <p:spPr>
+          <a:xfrm>
+            <a:off x="822960" y="2633472"/>
+            <a:ext cx="420624" cy="420624"/>
+          </a:xfrm>
+          <a:prstGeom prst="rect">
+            <a:avLst/>
+          </a:prstGeom>
+          <a:noFill/>
+          <a:ln/>
+        </p:spPr>
+        <p:txBody>
+          <a:bodyPr wrap="square" lIns="0" tIns="0" rIns="0" bIns="0" rtlCol="0" anchor="ctr"/>
+          <a:lstStyle/>
+          <a:p>
+            <a:pPr algn="ctr" indent="0" marL="0">
+              <a:buNone/>
+            </a:pPr>
+            <a:r>
+              <a:rPr lang="en-US" sz="1400" b="1" dirty="0">
+                <a:solidFill>
+                  <a:schemeClr val="bg1"/>
+                </a:solidFill>
+              </a:rPr>
+              <a:t>1</a:t>
+            </a:r>
+            <a:endParaRPr lang="en-US" sz="1400" dirty="0"/>
+          </a:p>
+        </p:txBody>
+      </p:sp>
+      <p:sp>
+        <p:nvSpPr>
+          <p:cNvPr id="16" name="Text 13"/>
+          <p:cNvSpPr txBox="1"/>
+          <p:nvPr/>
+        </p:nvSpPr>
+        <p:spPr>
+          <a:xfrm>
+            <a:off x="1417320" y="2560320"/>
+            <a:ext cx="6035040" cy="603504"/>
+          </a:xfrm>
+          <a:prstGeom prst="rect">
+            <a:avLst/>
+          </a:prstGeom>
+          <a:noFill/>
+          <a:ln/>
+        </p:spPr>
+        <p:txBody>
+          <a:bodyPr wrap="square" lIns="0" tIns="0" rIns="0" bIns="0" rtlCol="0" anchor="ctr"/>
+          <a:lstStyle/>
+          <a:p>
+            <a:pPr indent="0" marL="0">
+              <a:buNone/>
+            </a:pPr>
+            <a:r>
+              <a:rPr lang="en-US" sz="1350" b="1" dirty="0">
+                <a:solidFill>
+                  <a:schemeClr val="tx2"/>
+                </a:solidFill>
+              </a:rPr>
+              <a:t>Scenari per Comune</a:t>
+            </a:r>
+            <a:endParaRPr lang="en-US" sz="1350" dirty="0"/>
+          </a:p>
+          <a:p>
+            <a:pPr indent="0" marL="0">
+              <a:buNone/>
+            </a:pPr>
+            <a:r>
+              <a:rPr lang="en-US" sz="1150" dirty="0">
+                <a:solidFill>
+                  <a:schemeClr val="tx1"/>
+                </a:solidFill>
+              </a:rPr>
+              <a:t>Più scenari per ogni Comune («prudente», «obiettivo»…), durata 7, 10 o 21 anni</a:t>
+            </a:r>
+            <a:endParaRPr lang="en-US" sz="1350" dirty="0"/>
+          </a:p>
+        </p:txBody>
+      </p:sp>
+      <p:sp>
+        <p:nvSpPr>
+          <p:cNvPr id="17" name="Passo 2"/>
+          <p:cNvSpPr/>
+          <p:nvPr/>
+        </p:nvSpPr>
+        <p:spPr>
+          <a:xfrm>
+            <a:off x="822960" y="3346704"/>
+            <a:ext cx="420624" cy="420624"/>
+          </a:xfrm>
+          <a:prstGeom prst="ellipse">
+            <a:avLst/>
+          </a:prstGeom>
+          <a:solidFill>
+            <a:schemeClr val="tx2"/>
+          </a:solidFill>
+          <a:ln w="12700">
+            <a:solidFill>
+              <a:schemeClr val="tx2"/>
+            </a:solidFill>
+            <a:prstDash val="solid"/>
+          </a:ln>
+        </p:spPr>
+      </p:sp>
+      <p:sp>
+        <p:nvSpPr>
+          <p:cNvPr id="18" name="Text 15"/>
+          <p:cNvSpPr txBox="1"/>
+          <p:nvPr/>
+        </p:nvSpPr>
+        <p:spPr>
+          <a:xfrm>
+            <a:off x="822960" y="3346704"/>
+            <a:ext cx="420624" cy="420624"/>
+          </a:xfrm>
+          <a:prstGeom prst="rect">
+            <a:avLst/>
+          </a:prstGeom>
+          <a:noFill/>
+          <a:ln/>
+        </p:spPr>
+        <p:txBody>
+          <a:bodyPr wrap="square" lIns="0" tIns="0" rIns="0" bIns="0" rtlCol="0" anchor="ctr"/>
+          <a:lstStyle/>
+          <a:p>
+            <a:pPr algn="ctr" indent="0" marL="0">
+              <a:buNone/>
+            </a:pPr>
+            <a:r>
+              <a:rPr lang="en-US" sz="1400" b="1" dirty="0">
+                <a:solidFill>
+                  <a:schemeClr val="bg1"/>
+                </a:solidFill>
+              </a:rPr>
+              <a:t>2</a:t>
+            </a:r>
+            <a:endParaRPr lang="en-US" sz="1400" dirty="0"/>
+          </a:p>
+        </p:txBody>
+      </p:sp>
+      <p:sp>
+        <p:nvSpPr>
+          <p:cNvPr id="19" name="Text 16"/>
+          <p:cNvSpPr txBox="1"/>
+          <p:nvPr/>
+        </p:nvSpPr>
+        <p:spPr>
+          <a:xfrm>
+            <a:off x="1417320" y="3273552"/>
+            <a:ext cx="6035040" cy="603504"/>
+          </a:xfrm>
+          <a:prstGeom prst="rect">
+            <a:avLst/>
+          </a:prstGeom>
+          <a:noFill/>
+          <a:ln/>
+        </p:spPr>
+        <p:txBody>
+          <a:bodyPr wrap="square" lIns="0" tIns="0" rIns="0" bIns="0" rtlCol="0" anchor="ctr"/>
+          <a:lstStyle/>
+          <a:p>
+            <a:pPr indent="0" marL="0">
+              <a:buNone/>
+            </a:pPr>
+            <a:r>
+              <a:rPr lang="en-US" sz="1350" b="1" dirty="0">
+                <a:solidFill>
+                  <a:schemeClr val="tx2"/>
+                </a:solidFill>
+              </a:rPr>
+              <a:t>Scenario di riferimento (Standard 4.8.1)</a:t>
+            </a:r>
+            <a:endParaRPr lang="en-US" sz="1350" dirty="0"/>
+          </a:p>
+          <a:p>
+            <a:pPr indent="0" marL="0">
+              <a:buNone/>
+            </a:pPr>
+            <a:r>
+              <a:rPr lang="en-US" sz="1150" dirty="0">
+                <a:solidFill>
+                  <a:schemeClr val="tx1"/>
+                </a:solidFill>
+              </a:rPr>
+              <a:t>Anno con il 65% di differenziata o valori medi del cluster SOSE; situazione attuale come partenza</a:t>
+            </a:r>
+            <a:endParaRPr lang="en-US" sz="1350" dirty="0"/>
+          </a:p>
+        </p:txBody>
+      </p:sp>
+      <p:sp>
+        <p:nvSpPr>
+          <p:cNvPr id="20" name="Passo 3"/>
+          <p:cNvSpPr/>
+          <p:nvPr/>
+        </p:nvSpPr>
+        <p:spPr>
+          <a:xfrm>
+            <a:off x="822960" y="4059936"/>
+            <a:ext cx="420624" cy="420624"/>
+          </a:xfrm>
+          <a:prstGeom prst="ellipse">
+            <a:avLst/>
+          </a:prstGeom>
+          <a:solidFill>
+            <a:schemeClr val="tx2"/>
+          </a:solidFill>
+          <a:ln w="12700">
+            <a:solidFill>
+              <a:schemeClr val="tx2"/>
+            </a:solidFill>
+            <a:prstDash val="solid"/>
+          </a:ln>
+        </p:spPr>
+      </p:sp>
+      <p:sp>
+        <p:nvSpPr>
+          <p:cNvPr id="21" name="Text 18"/>
+          <p:cNvSpPr txBox="1"/>
+          <p:nvPr/>
+        </p:nvSpPr>
+        <p:spPr>
+          <a:xfrm>
+            <a:off x="822960" y="4059936"/>
+            <a:ext cx="420624" cy="420624"/>
+          </a:xfrm>
+          <a:prstGeom prst="rect">
+            <a:avLst/>
+          </a:prstGeom>
+          <a:noFill/>
+          <a:ln/>
+        </p:spPr>
+        <p:txBody>
+          <a:bodyPr wrap="square" lIns="0" tIns="0" rIns="0" bIns="0" rtlCol="0" anchor="ctr"/>
+          <a:lstStyle/>
+          <a:p>
+            <a:pPr algn="ctr" indent="0" marL="0">
+              <a:buNone/>
+            </a:pPr>
+            <a:r>
+              <a:rPr lang="en-US" sz="1400" b="1" dirty="0">
+                <a:solidFill>
+                  <a:schemeClr val="bg1"/>
+                </a:solidFill>
+              </a:rPr>
+              <a:t>3</a:t>
+            </a:r>
+            <a:endParaRPr lang="en-US" sz="1400" dirty="0"/>
+          </a:p>
+        </p:txBody>
+      </p:sp>
+      <p:sp>
+        <p:nvSpPr>
+          <p:cNvPr id="22" name="Text 19"/>
+          <p:cNvSpPr txBox="1"/>
+          <p:nvPr/>
+        </p:nvSpPr>
+        <p:spPr>
+          <a:xfrm>
+            <a:off x="1417320" y="3986784"/>
+            <a:ext cx="6035040" cy="603504"/>
+          </a:xfrm>
+          <a:prstGeom prst="rect">
+            <a:avLst/>
+          </a:prstGeom>
+          <a:noFill/>
+          <a:ln/>
+        </p:spPr>
+        <p:txBody>
+          <a:bodyPr wrap="square" lIns="0" tIns="0" rIns="0" bIns="0" rtlCol="0" anchor="ctr"/>
+          <a:lstStyle/>
+          <a:p>
+            <a:pPr indent="0" marL="0">
+              <a:buNone/>
+            </a:pPr>
+            <a:r>
+              <a:rPr lang="en-US" sz="1350" b="1" dirty="0">
+                <a:solidFill>
+                  <a:schemeClr val="tx2"/>
+                </a:solidFill>
+              </a:rPr>
+              <a:t>Obiettivi anno per anno</a:t>
+            </a:r>
+            <a:endParaRPr lang="en-US" sz="1350" dirty="0"/>
+          </a:p>
+          <a:p>
+            <a:pPr indent="0" marL="0">
+              <a:buNone/>
+            </a:pPr>
+            <a:r>
+              <a:rPr lang="en-US" sz="1150" dirty="0">
+                <a:solidFill>
+                  <a:schemeClr val="tx1"/>
+                </a:solidFill>
+              </a:rPr>
+              <a:t>Produzione totale e pro capite prevista, secco residuo pro capite obiettivo</a:t>
+            </a:r>
+            <a:endParaRPr lang="en-US" sz="1350" dirty="0"/>
+          </a:p>
+        </p:txBody>
+      </p:sp>
+      <p:sp>
+        <p:nvSpPr>
+          <p:cNvPr id="23" name="Passo 4"/>
+          <p:cNvSpPr/>
+          <p:nvPr/>
+        </p:nvSpPr>
+        <p:spPr>
+          <a:xfrm>
+            <a:off x="822960" y="4773168"/>
+            <a:ext cx="420624" cy="420624"/>
+          </a:xfrm>
+          <a:prstGeom prst="ellipse">
+            <a:avLst/>
+          </a:prstGeom>
+          <a:solidFill>
+            <a:schemeClr val="tx2"/>
+          </a:solidFill>
+          <a:ln w="12700">
+            <a:solidFill>
+              <a:schemeClr val="tx2"/>
+            </a:solidFill>
+            <a:prstDash val="solid"/>
+          </a:ln>
+        </p:spPr>
+      </p:sp>
+      <p:sp>
+        <p:nvSpPr>
+          <p:cNvPr id="24" name="Text 21"/>
+          <p:cNvSpPr txBox="1"/>
+          <p:nvPr/>
+        </p:nvSpPr>
+        <p:spPr>
+          <a:xfrm>
+            <a:off x="822960" y="4773168"/>
+            <a:ext cx="420624" cy="420624"/>
+          </a:xfrm>
+          <a:prstGeom prst="rect">
+            <a:avLst/>
+          </a:prstGeom>
+          <a:noFill/>
+          <a:ln/>
+        </p:spPr>
+        <p:txBody>
+          <a:bodyPr wrap="square" lIns="0" tIns="0" rIns="0" bIns="0" rtlCol="0" anchor="ctr"/>
+          <a:lstStyle/>
+          <a:p>
+            <a:pPr algn="ctr" indent="0" marL="0">
+              <a:buNone/>
+            </a:pPr>
+            <a:r>
+              <a:rPr lang="en-US" sz="1400" b="1" dirty="0">
+                <a:solidFill>
+                  <a:schemeClr val="bg1"/>
+                </a:solidFill>
+              </a:rPr>
+              <a:t>4</a:t>
+            </a:r>
+            <a:endParaRPr lang="en-US" sz="1400" dirty="0"/>
+          </a:p>
+        </p:txBody>
+      </p:sp>
+      <p:sp>
+        <p:nvSpPr>
+          <p:cNvPr id="25" name="Text 22"/>
+          <p:cNvSpPr txBox="1"/>
+          <p:nvPr/>
+        </p:nvSpPr>
+        <p:spPr>
+          <a:xfrm>
+            <a:off x="1417320" y="4700016"/>
+            <a:ext cx="6035040" cy="603504"/>
+          </a:xfrm>
+          <a:prstGeom prst="rect">
+            <a:avLst/>
+          </a:prstGeom>
+          <a:noFill/>
+          <a:ln/>
+        </p:spPr>
+        <p:txBody>
+          <a:bodyPr wrap="square" lIns="0" tIns="0" rIns="0" bIns="0" rtlCol="0" anchor="ctr"/>
+          <a:lstStyle/>
+          <a:p>
+            <a:pPr indent="0" marL="0">
+              <a:buNone/>
+            </a:pPr>
+            <a:r>
+              <a:rPr lang="en-US" sz="1350" b="1" dirty="0">
+                <a:solidFill>
+                  <a:schemeClr val="tx2"/>
+                </a:solidFill>
+              </a:rPr>
+              <a:t>% di differenziata</a:t>
+            </a:r>
+            <a:endParaRPr lang="en-US" sz="1350" dirty="0"/>
+          </a:p>
+          <a:p>
+            <a:pPr indent="0" marL="0">
+              <a:buNone/>
+            </a:pPr>
+            <a:r>
+              <a:rPr lang="en-US" sz="1150" dirty="0">
+                <a:solidFill>
+                  <a:schemeClr val="tx1"/>
+                </a:solidFill>
+              </a:rPr>
+              <a:t>Ricalcolata ogni anno: (totale − secco) / totale</a:t>
+            </a:r>
+            <a:endParaRPr lang="en-US" sz="1350" dirty="0"/>
+          </a:p>
+        </p:txBody>
+      </p:sp>
+      <p:sp>
+        <p:nvSpPr>
+          <p:cNvPr id="26" name="Passo 5"/>
+          <p:cNvSpPr/>
+          <p:nvPr/>
+        </p:nvSpPr>
+        <p:spPr>
+          <a:xfrm>
+            <a:off x="822960" y="5486400"/>
+            <a:ext cx="420624" cy="420624"/>
+          </a:xfrm>
+          <a:prstGeom prst="ellipse">
+            <a:avLst/>
+          </a:prstGeom>
+          <a:solidFill>
+            <a:schemeClr val="accent2"/>
+          </a:solidFill>
+          <a:ln w="12700">
+            <a:solidFill>
+              <a:schemeClr val="accent2"/>
+            </a:solidFill>
+            <a:prstDash val="solid"/>
+          </a:ln>
+        </p:spPr>
+      </p:sp>
+      <p:sp>
+        <p:nvSpPr>
+          <p:cNvPr id="27" name="Text 24"/>
+          <p:cNvSpPr txBox="1"/>
+          <p:nvPr/>
+        </p:nvSpPr>
+        <p:spPr>
+          <a:xfrm>
+            <a:off x="822960" y="5486400"/>
+            <a:ext cx="420624" cy="420624"/>
+          </a:xfrm>
+          <a:prstGeom prst="rect">
+            <a:avLst/>
+          </a:prstGeom>
+          <a:noFill/>
+          <a:ln/>
+        </p:spPr>
+        <p:txBody>
+          <a:bodyPr wrap="square" lIns="0" tIns="0" rIns="0" bIns="0" rtlCol="0" anchor="ctr"/>
+          <a:lstStyle/>
+          <a:p>
+            <a:pPr algn="ctr" indent="0" marL="0">
+              <a:buNone/>
+            </a:pPr>
+            <a:r>
+              <a:rPr lang="en-US" sz="1400" b="1" dirty="0">
+                <a:solidFill>
+                  <a:schemeClr val="bg1"/>
+                </a:solidFill>
+              </a:rPr>
+              <a:t>5</a:t>
+            </a:r>
+            <a:endParaRPr lang="en-US" sz="1400" dirty="0"/>
+          </a:p>
+        </p:txBody>
+      </p:sp>
+      <p:sp>
+        <p:nvSpPr>
+          <p:cNvPr id="28" name="Text 25"/>
+          <p:cNvSpPr txBox="1"/>
+          <p:nvPr/>
+        </p:nvSpPr>
+        <p:spPr>
+          <a:xfrm>
+            <a:off x="1417320" y="5413248"/>
+            <a:ext cx="6035040" cy="603504"/>
+          </a:xfrm>
+          <a:prstGeom prst="rect">
+            <a:avLst/>
+          </a:prstGeom>
+          <a:noFill/>
+          <a:ln/>
+        </p:spPr>
+        <p:txBody>
+          <a:bodyPr wrap="square" lIns="0" tIns="0" rIns="0" bIns="0" rtlCol="0" anchor="ctr"/>
+          <a:lstStyle/>
+          <a:p>
+            <a:pPr indent="0" marL="0">
+              <a:buNone/>
+            </a:pPr>
+            <a:r>
+              <a:rPr lang="en-US" sz="1350" b="1" dirty="0">
+                <a:solidFill>
+                  <a:schemeClr val="tx2"/>
+                </a:solidFill>
+              </a:rPr>
+              <a:t>Crediti e conti economici</a:t>
+            </a:r>
+            <a:endParaRPr lang="en-US" sz="1350" dirty="0"/>
+          </a:p>
+          <a:p>
+            <a:pPr indent="0" marL="0">
+              <a:buNone/>
+            </a:pPr>
+            <a:r>
+              <a:rPr lang="en-US" sz="1150" dirty="0">
+                <a:solidFill>
+                  <a:schemeClr val="tx1"/>
+                </a:solidFill>
+              </a:rPr>
+              <a:t>Bilancio del Comune o per utenza (come l'Allegato A EsaCom); ricavi a 32 € anno per anno; costi Caso 1 o 2; margine</a:t>
+            </a:r>
+            <a:endParaRPr lang="en-US" sz="1350" dirty="0"/>
+          </a:p>
+        </p:txBody>
+      </p:sp>
+      <p:sp>
+        <p:nvSpPr>
+          <p:cNvPr id="29" name="Text 26"/>
+          <p:cNvSpPr txBox="1"/>
+          <p:nvPr/>
+        </p:nvSpPr>
+        <p:spPr>
+          <a:xfrm>
+            <a:off x="822960" y="6035040"/>
+            <a:ext cx="6675120" cy="228600"/>
+          </a:xfrm>
+          <a:prstGeom prst="rect">
+            <a:avLst/>
+          </a:prstGeom>
+          <a:noFill/>
+          <a:ln/>
+        </p:spPr>
+        <p:txBody>
+          <a:bodyPr wrap="square" lIns="0" tIns="0" rIns="0" bIns="0" rtlCol="0" anchor="ctr"/>
+          <a:lstStyle/>
+          <a:p>
+            <a:pPr indent="0" marL="0">
+              <a:buNone/>
+            </a:pPr>
+            <a:r>
+              <a:rPr lang="en-US" sz="1000" i="1" dirty="0">
+                <a:solidFill>
+                  <a:schemeClr val="accent6"/>
+                </a:solidFill>
+              </a:rPr>
+              <a:t>Stima ex ante a scopo di pianificazione: i crediti veri si calcolano ex post con la Banca Dati Utenze.</a:t>
+            </a:r>
+            <a:endParaRPr lang="en-US" sz="1000" dirty="0"/>
+          </a:p>
+        </p:txBody>
+      </p:sp>
+      <p:sp>
+        <p:nvSpPr>
+          <p:cNvPr id="30" name="Riquadro assistente"/>
+          <p:cNvSpPr/>
+          <p:nvPr/>
+        </p:nvSpPr>
+        <p:spPr>
+          <a:xfrm>
+            <a:off x="7863840" y="1234440"/>
+            <a:ext cx="3749040" cy="5029200"/>
+          </a:xfrm>
+          <a:prstGeom prst="roundRect">
+            <a:avLst>
+              <a:gd name="adj" fmla="val 2927"/>
             </a:avLst>
           </a:prstGeom>
           <a:solidFill>
@@ -5081,77 +5012,63 @@
       </p:sp>
       <p:sp>
         <p:nvSpPr>
-          <p:cNvPr id="6" name="Text 3"/>
-          <p:cNvSpPr txBox="1"/>
-          <p:nvPr/>
-        </p:nvSpPr>
-        <p:spPr>
-          <a:xfrm>
-            <a:off x="640080" y="5669280"/>
-            <a:ext cx="1920240" cy="566928"/>
-          </a:xfrm>
-          <a:prstGeom prst="rect">
-            <a:avLst/>
-          </a:prstGeom>
-          <a:noFill/>
-          <a:ln/>
-        </p:spPr>
-        <p:txBody>
-          <a:bodyPr wrap="square" lIns="0" tIns="0" rIns="0" bIns="0" rtlCol="0" anchor="ctr"/>
-          <a:lstStyle/>
-          <a:p>
-            <a:pPr algn="ctr" indent="0" marL="0">
-              <a:buNone/>
-            </a:pPr>
-            <a:r>
-              <a:rPr lang="en-US" sz="1150" b="1" dirty="0">
-                <a:solidFill>
-                  <a:schemeClr val="tx2"/>
-                </a:solidFill>
-              </a:rPr>
-              <a:t>Durata 7 · 10 · 21 anni</a:t>
-            </a:r>
-            <a:endParaRPr lang="en-US" sz="1150" dirty="0"/>
-          </a:p>
-        </p:txBody>
-      </p:sp>
-      <p:sp>
-        <p:nvSpPr>
-          <p:cNvPr id="7" name="Passo simulatore 2"/>
+          <p:cNvPr id="31" name="Assistente cerchio"/>
           <p:cNvSpPr/>
           <p:nvPr/>
         </p:nvSpPr>
         <p:spPr>
           <a:xfrm>
-            <a:off x="2798064" y="5669280"/>
-            <a:ext cx="2103120" cy="566928"/>
-          </a:xfrm>
-          <a:prstGeom prst="roundRect">
-            <a:avLst>
-              <a:gd name="adj" fmla="val 19355"/>
-            </a:avLst>
+            <a:off x="8092440" y="1417320"/>
+            <a:ext cx="548640" cy="548640"/>
+          </a:xfrm>
+          <a:prstGeom prst="ellipse">
+            <a:avLst/>
           </a:prstGeom>
           <a:solidFill>
-            <a:schemeClr val="accent3"/>
+            <a:schemeClr val="tx2"/>
           </a:solidFill>
           <a:ln w="12700">
             <a:solidFill>
-              <a:schemeClr val="accent3"/>
+              <a:schemeClr val="tx2"/>
             </a:solidFill>
             <a:prstDash val="solid"/>
           </a:ln>
         </p:spPr>
       </p:sp>
-      <p:sp>
-        <p:nvSpPr>
-          <p:cNvPr id="8" name="Text 5"/>
+      <p:pic>
+        <p:nvPicPr>
+          <p:cNvPr id="32" name="Assistente icona" descr="preencoded.png">    </p:cNvPr>
+          <p:cNvPicPr>
+            <a:picLocks noChangeAspect="1"/>
+          </p:cNvPicPr>
+          <p:nvPr/>
+        </p:nvPicPr>
+        <p:blipFill>
+          <a:blip r:embed="rId2"/>
+          <a:stretch>
+            <a:fillRect/>
+          </a:stretch>
+        </p:blipFill>
+        <p:spPr>
+          <a:xfrm>
+            <a:off x="8229600" y="1554480"/>
+            <a:ext cx="274320" cy="274320"/>
+          </a:xfrm>
+          <a:prstGeom prst="rect">
+            <a:avLst/>
+          </a:prstGeom>
+        </p:spPr>
+      </p:pic>
+      <p:sp>
+        <p:nvSpPr>
+          <p:cNvPr id="33" name="Text 29"/>
           <p:cNvSpPr txBox="1"/>
           <p:nvPr/>
         </p:nvSpPr>
         <p:spPr>
           <a:xfrm>
-            <a:off x="2889504" y="5669280"/>
-            <a:ext cx="1920240" cy="566928"/>
+            <a:off x="8778240" y="1371600"/>
+            <a:ext cx="2743200" cy="685800"/>
           </a:xfrm>
           <a:prstGeom prst="rect">
             <a:avLst/>
@@ -5163,43 +5080,43 @@
           <a:bodyPr wrap="square" lIns="0" tIns="0" rIns="0" bIns="0" rtlCol="0" anchor="ctr"/>
           <a:lstStyle/>
           <a:p>
-            <a:pPr algn="ctr" indent="0" marL="0">
-              <a:buNone/>
-            </a:pPr>
-            <a:r>
-              <a:rPr lang="en-US" sz="1150" b="1" dirty="0">
+            <a:pPr indent="0" marL="0">
+              <a:buNone/>
+            </a:pPr>
+            <a:r>
+              <a:rPr lang="en-US" sz="1800" b="1" dirty="0">
                 <a:solidFill>
                   <a:schemeClr val="tx2"/>
                 </a:solidFill>
               </a:rPr>
-              <a:t>Riferimento Standard 4.8.1: anno al 65% o cluster</a:t>
-            </a:r>
-            <a:endParaRPr lang="en-US" sz="1150" dirty="0"/>
-          </a:p>
-        </p:txBody>
-      </p:sp>
-      <p:sp>
-        <p:nvSpPr>
-          <p:cNvPr id="9" name="Passo simulatore 3"/>
+              <a:t>Assistente virtuale Claude</a:t>
+            </a:r>
+            <a:endParaRPr lang="en-US" sz="1800" dirty="0"/>
+          </a:p>
+        </p:txBody>
+      </p:sp>
+      <p:sp>
+        <p:nvSpPr>
+          <p:cNvPr id="34" name="Badge attivo"/>
           <p:cNvSpPr/>
           <p:nvPr/>
         </p:nvSpPr>
         <p:spPr>
           <a:xfrm>
-            <a:off x="5047488" y="5669280"/>
-            <a:ext cx="2103120" cy="566928"/>
+            <a:off x="8778240" y="2029968"/>
+            <a:ext cx="2194560" cy="256032"/>
           </a:xfrm>
           <a:prstGeom prst="roundRect">
             <a:avLst>
-              <a:gd name="adj" fmla="val 19355"/>
+              <a:gd name="adj" fmla="val 50000"/>
             </a:avLst>
           </a:prstGeom>
           <a:solidFill>
-            <a:schemeClr val="accent3"/>
+            <a:schemeClr val="bg1"/>
           </a:solidFill>
-          <a:ln w="12700">
+          <a:ln w="9525">
             <a:solidFill>
-              <a:schemeClr val="accent3"/>
+              <a:schemeClr val="tx2"/>
             </a:solidFill>
             <a:prstDash val="solid"/>
           </a:ln>
@@ -5207,14 +5124,14 @@
       </p:sp>
       <p:sp>
         <p:nvSpPr>
-          <p:cNvPr id="10" name="Text 7"/>
+          <p:cNvPr id="35" name="Text 31"/>
           <p:cNvSpPr txBox="1"/>
           <p:nvPr/>
         </p:nvSpPr>
         <p:spPr>
           <a:xfrm>
-            <a:off x="5138928" y="5669280"/>
-            <a:ext cx="1920240" cy="566928"/>
+            <a:off x="8778240" y="2029968"/>
+            <a:ext cx="2194560" cy="256032"/>
           </a:xfrm>
           <a:prstGeom prst="rect">
             <a:avLst/>
@@ -5230,54 +5147,27 @@
               <a:buNone/>
             </a:pPr>
             <a:r>
-              <a:rPr lang="en-US" sz="1150" b="1" dirty="0">
+              <a:rPr lang="en-US" sz="950" b="1" spc="100" kern="0" dirty="0">
                 <a:solidFill>
                   <a:schemeClr val="tx2"/>
                 </a:solidFill>
               </a:rPr>
-              <a:t>Obiettivi annui e traiettoria automatica</a:t>
-            </a:r>
-            <a:endParaRPr lang="en-US" sz="1150" dirty="0"/>
-          </a:p>
-        </p:txBody>
-      </p:sp>
-      <p:sp>
-        <p:nvSpPr>
-          <p:cNvPr id="11" name="Passo simulatore 4"/>
-          <p:cNvSpPr/>
-          <p:nvPr/>
-        </p:nvSpPr>
-        <p:spPr>
-          <a:xfrm>
-            <a:off x="7296912" y="5669280"/>
-            <a:ext cx="2103120" cy="566928"/>
-          </a:xfrm>
-          <a:prstGeom prst="roundRect">
-            <a:avLst>
-              <a:gd name="adj" fmla="val 19355"/>
-            </a:avLst>
-          </a:prstGeom>
-          <a:solidFill>
-            <a:schemeClr val="accent3"/>
-          </a:solidFill>
-          <a:ln w="12700">
-            <a:solidFill>
-              <a:schemeClr val="accent3"/>
-            </a:solidFill>
-            <a:prstDash val="solid"/>
-          </a:ln>
-        </p:spPr>
-      </p:sp>
-      <p:sp>
-        <p:nvSpPr>
-          <p:cNvPr id="12" name="Text 9"/>
+              <a:t>ATTIVO DAL 19/10</a:t>
+            </a:r>
+            <a:endParaRPr lang="en-US" sz="950" dirty="0"/>
+          </a:p>
+        </p:txBody>
+      </p:sp>
+      <p:sp>
+        <p:nvSpPr>
+          <p:cNvPr id="36" name="Text 32"/>
           <p:cNvSpPr txBox="1"/>
           <p:nvPr/>
         </p:nvSpPr>
         <p:spPr>
           <a:xfrm>
-            <a:off x="7388352" y="5669280"/>
-            <a:ext cx="1920240" cy="566928"/>
+            <a:off x="8092440" y="2423160"/>
+            <a:ext cx="3337560" cy="3703320"/>
           </a:xfrm>
           <a:prstGeom prst="rect">
             <a:avLst/>
@@ -5286,84 +5176,143 @@
           <a:ln/>
         </p:spPr>
         <p:txBody>
-          <a:bodyPr wrap="square" lIns="0" tIns="0" rIns="0" bIns="0" rtlCol="0" anchor="ctr"/>
-          <a:lstStyle/>
-          <a:p>
-            <a:pPr algn="ctr" indent="0" marL="0">
-              <a:buNone/>
-            </a:pPr>
-            <a:r>
-              <a:rPr lang="en-US" sz="1150" b="1" dirty="0">
+          <a:bodyPr wrap="square" lIns="0" tIns="0" rIns="0" bIns="0" rtlCol="0" anchor="t"/>
+          <a:lstStyle/>
+          <a:p>
+            <a:pPr indent="0" marL="0">
+              <a:spcAft>
+                <a:spcPts val="600"/>
+              </a:spcAft>
+              <a:buNone/>
+            </a:pPr>
+            <a:r>
+              <a:rPr lang="en-US" sz="1250" b="1" dirty="0">
                 <a:solidFill>
                   <a:schemeClr val="tx2"/>
                 </a:solidFill>
               </a:rPr>
-              <a:t>% differenziata ricalcolata</a:t>
-            </a:r>
-            <a:endParaRPr lang="en-US" sz="1150" dirty="0"/>
-          </a:p>
-        </p:txBody>
-      </p:sp>
-      <p:sp>
-        <p:nvSpPr>
-          <p:cNvPr id="13" name="Passo simulatore 5"/>
-          <p:cNvSpPr/>
-          <p:nvPr/>
-        </p:nvSpPr>
-        <p:spPr>
-          <a:xfrm>
-            <a:off x="9546336" y="5669280"/>
-            <a:ext cx="2103120" cy="566928"/>
-          </a:xfrm>
-          <a:prstGeom prst="roundRect">
-            <a:avLst>
-              <a:gd name="adj" fmla="val 19355"/>
-            </a:avLst>
-          </a:prstGeom>
-          <a:solidFill>
-            <a:schemeClr val="accent4"/>
-          </a:solidFill>
-          <a:ln w="12700">
-            <a:solidFill>
-              <a:schemeClr val="accent4"/>
-            </a:solidFill>
-            <a:prstDash val="solid"/>
-          </a:ln>
-        </p:spPr>
-      </p:sp>
-      <p:sp>
-        <p:nvSpPr>
-          <p:cNvPr id="14" name="Text 11"/>
-          <p:cNvSpPr txBox="1"/>
-          <p:nvPr/>
-        </p:nvSpPr>
-        <p:spPr>
-          <a:xfrm>
-            <a:off x="9637776" y="5669280"/>
-            <a:ext cx="1920240" cy="566928"/>
-          </a:xfrm>
-          <a:prstGeom prst="rect">
-            <a:avLst/>
-          </a:prstGeom>
-          <a:noFill/>
-          <a:ln/>
-        </p:spPr>
-        <p:txBody>
-          <a:bodyPr wrap="square" lIns="0" tIns="0" rIns="0" bIns="0" rtlCol="0" anchor="ctr"/>
-          <a:lstStyle/>
-          <a:p>
-            <a:pPr algn="ctr" indent="0" marL="0">
-              <a:buNone/>
-            </a:pPr>
-            <a:r>
-              <a:rPr lang="en-US" sz="1150" b="1" dirty="0">
+              <a:t>Per enti e Amministratori</a:t>
+            </a:r>
+            <a:endParaRPr lang="en-US" sz="1250" dirty="0"/>
+          </a:p>
+          <a:p>
+            <a:pPr indent="0" marL="0">
+              <a:spcAft>
+                <a:spcPts val="600"/>
+              </a:spcAft>
+              <a:buNone/>
+            </a:pPr>
+            <a:r>
+              <a:rPr lang="en-US" sz="1250" dirty="0">
+                <a:solidFill>
+                  <a:schemeClr val="tx1"/>
+                </a:solidFill>
+              </a:rPr>
+              <a:t>pulsante «✦ Assistente»: come si fa un'operazione, fasi, costi; risponde dai manuali e dalle tariffe</a:t>
+            </a:r>
+            <a:endParaRPr lang="en-US" sz="1250" dirty="0"/>
+          </a:p>
+          <a:p>
+            <a:pPr indent="0" marL="0">
+              <a:spcAft>
+                <a:spcPts val="600"/>
+              </a:spcAft>
+              <a:buNone/>
+            </a:pPr>
+            <a:r>
+              <a:rPr lang="en-US" sz="1250" b="1" dirty="0">
                 <a:solidFill>
                   <a:schemeClr val="tx2"/>
                 </a:solidFill>
               </a:rPr>
-              <a:t>Crediti per anno, confronto, CSV e stampa</a:t>
-            </a:r>
-            <a:endParaRPr lang="en-US" sz="1150" dirty="0"/>
+              <a:t>Garanzie</a:t>
+            </a:r>
+            <a:endParaRPr lang="en-US" sz="1250" dirty="0"/>
+          </a:p>
+          <a:p>
+            <a:pPr indent="0" marL="0">
+              <a:spcAft>
+                <a:spcPts val="600"/>
+              </a:spcAft>
+              <a:buNone/>
+            </a:pPr>
+            <a:r>
+              <a:rPr lang="en-US" sz="1250" dirty="0">
+                <a:solidFill>
+                  <a:schemeClr val="tx1"/>
+                </a:solidFill>
+              </a:rPr>
+              <a:t>non vede le pratiche e non decide; nessun testo salvato; limite di domande al giorno</a:t>
+            </a:r>
+            <a:endParaRPr lang="en-US" sz="1250" dirty="0"/>
+          </a:p>
+          <a:p>
+            <a:pPr indent="0" marL="0">
+              <a:spcAft>
+                <a:spcPts val="600"/>
+              </a:spcAft>
+              <a:buNone/>
+            </a:pPr>
+            <a:r>
+              <a:rPr lang="en-US" sz="1250" b="1" dirty="0">
+                <a:solidFill>
+                  <a:schemeClr val="tx2"/>
+                </a:solidFill>
+              </a:rPr>
+              <a:t>Come funziona</a:t>
+            </a:r>
+            <a:endParaRPr lang="en-US" sz="1250" dirty="0"/>
+          </a:p>
+          <a:p>
+            <a:pPr indent="0" marL="0">
+              <a:spcAft>
+                <a:spcPts val="600"/>
+              </a:spcAft>
+              <a:buNone/>
+            </a:pPr>
+            <a:r>
+              <a:rPr lang="en-US" sz="1250" dirty="0">
+                <a:solidFill>
+                  <a:schemeClr val="tx1"/>
+                </a:solidFill>
+              </a:rPr>
+              <a:t>Claude Haiku 5.5 tramite una funzione sul server; la chiave resta in Supabase; meno di un centesimo a domanda</a:t>
+            </a:r>
+            <a:endParaRPr lang="en-US" sz="1250" dirty="0"/>
+          </a:p>
+          <a:p>
+            <a:pPr indent="0" marL="0">
+              <a:spcAft>
+                <a:spcPts val="600"/>
+              </a:spcAft>
+              <a:buNone/>
+            </a:pPr>
+            <a:r>
+              <a:rPr lang="en-US" sz="1250" b="1" dirty="0">
+                <a:solidFill>
+                  <a:schemeClr val="tx2"/>
+                </a:solidFill>
+              </a:rPr>
+              <a:t>Prossimi passi</a:t>
+            </a:r>
+            <a:endParaRPr lang="en-US" sz="1250" dirty="0"/>
+          </a:p>
+          <a:p>
+            <a:pPr indent="0" marL="0">
+              <a:spcAft>
+                <a:spcPts val="600"/>
+              </a:spcAft>
+              <a:buNone/>
+            </a:pPr>
+            <a:r>
+              <a:rPr lang="en-US" sz="1250" dirty="0">
+                <a:solidFill>
+                  <a:schemeClr val="tx1"/>
+                </a:solidFill>
+              </a:rPr>
+              <a:t>estensione agli Operatori e aiuto sulla singola pratica, con regole sulla privacy</a:t>
+            </a:r>
+            <a:endParaRPr lang="en-US" sz="1250" dirty="0"/>
           </a:p>
         </p:txBody>
       </p:sp>
@@ -5472,15 +5421,62 @@
                 <a:ea typeface="Cambria" pitchFamily="34" charset="-122"/>
                 <a:cs typeface="Cambria" pitchFamily="34" charset="-120"/>
               </a:rPr>
-              <a:t>Simulazione economica: ricavi e costi per il Comune</a:t>
+              <a:t>Il simulatore in pratica</a:t>
             </a:r>
             <a:endParaRPr lang="en-US" sz="3000" dirty="0"/>
+          </a:p>
+        </p:txBody>
+      </p:sp>
+      <p:sp>
+        <p:nvSpPr>
+          <p:cNvPr id="3" name="Text 1"/>
+          <p:cNvSpPr txBox="1"/>
+          <p:nvPr/>
+        </p:nvSpPr>
+        <p:spPr>
+          <a:xfrm>
+            <a:off x="548640" y="1097280"/>
+            <a:ext cx="11064240" cy="365760"/>
+          </a:xfrm>
+          <a:prstGeom prst="rect">
+            <a:avLst/>
+          </a:prstGeom>
+          <a:noFill/>
+          <a:ln/>
+        </p:spPr>
+        <p:txBody>
+          <a:bodyPr wrap="square" lIns="0" tIns="0" rIns="0" bIns="0" rtlCol="0" anchor="ctr"/>
+          <a:lstStyle/>
+          <a:p>
+            <a:pPr indent="0" marL="0">
+              <a:buNone/>
+            </a:pPr>
+            <a:r>
+              <a:rPr lang="en-US" sz="1300" b="1" dirty="0">
+                <a:solidFill>
+                  <a:schemeClr val="tx2"/>
+                </a:solidFill>
+              </a:rPr>
+              <a:t>Portale → menu Simulatore. </a:t>
+            </a:r>
+            <a:pPr indent="0" marL="0">
+              <a:buNone/>
+            </a:pPr>
+            <a:r>
+              <a:rPr lang="en-US" sz="1300" dirty="0">
+                <a:solidFill>
+                  <a:schemeClr val="accent6"/>
+                </a:solidFill>
+              </a:rPr>
+              <a:t>Esempio con dati di prova: Comune di 12.500 abitanti (cluster 4), oggi 430 kg/ab e 90 kg/ab di secco, obiettivo 2036: 380 e 50 kg/ab.</a:t>
+            </a:r>
+            <a:endParaRPr lang="en-US" sz="1300" dirty="0"/>
           </a:p>
         </p:txBody>
       </p:sp>
       <p:pic>
         <p:nvPicPr>
-          <p:cNvPr id="3" name="Schermata costi" descr="Simulatore, metodo per utenza: costi Caso 1 per 16.735 abitanti, ricavi, margine e margine netto per anno">    </p:cNvPr>
+          <p:cNvPr id="4" name="Schermata simulatore" descr="Risultati del simulatore: crediti netti per anno e raccolta differenziata">    </p:cNvPr>
           <p:cNvPicPr>
             <a:picLocks noChangeAspect="1"/>
           </p:cNvPicPr>
@@ -5494,8 +5490,8 @@
         </p:blipFill>
         <p:spPr>
           <a:xfrm>
-            <a:off x="548640" y="1188720"/>
-            <a:ext cx="6242333" cy="5029200"/>
+            <a:off x="548640" y="1572768"/>
+            <a:ext cx="11064240" cy="3955466"/>
           </a:xfrm>
           <a:prstGeom prst="rect">
             <a:avLst/>
@@ -5504,26 +5500,26 @@
       </p:pic>
       <p:sp>
         <p:nvSpPr>
-          <p:cNvPr id="4" name="Riquadro economia"/>
+          <p:cNvPr id="5" name="Passo simulatore 1"/>
           <p:cNvSpPr/>
           <p:nvPr/>
         </p:nvSpPr>
         <p:spPr>
           <a:xfrm>
-            <a:off x="7452360" y="1188720"/>
-            <a:ext cx="4160520" cy="5001768"/>
+            <a:off x="548640" y="5669280"/>
+            <a:ext cx="2103120" cy="566928"/>
           </a:xfrm>
           <a:prstGeom prst="roundRect">
             <a:avLst>
-              <a:gd name="adj" fmla="val 2637"/>
+              <a:gd name="adj" fmla="val 19355"/>
             </a:avLst>
           </a:prstGeom>
           <a:solidFill>
-            <a:schemeClr val="bg2"/>
+            <a:schemeClr val="accent3"/>
           </a:solidFill>
           <a:ln w="12700">
             <a:solidFill>
-              <a:schemeClr val="bg2"/>
+              <a:schemeClr val="accent3"/>
             </a:solidFill>
             <a:prstDash val="solid"/>
           </a:ln>
@@ -5531,14 +5527,14 @@
       </p:sp>
       <p:sp>
         <p:nvSpPr>
-          <p:cNvPr id="5" name="Text 2"/>
+          <p:cNvPr id="6" name="Text 3"/>
           <p:cNvSpPr txBox="1"/>
           <p:nvPr/>
         </p:nvSpPr>
         <p:spPr>
           <a:xfrm>
-            <a:off x="7635240" y="1298448"/>
-            <a:ext cx="3794760" cy="4800600"/>
+            <a:off x="640080" y="5669280"/>
+            <a:ext cx="1920240" cy="566928"/>
           </a:xfrm>
           <a:prstGeom prst="rect">
             <a:avLst/>
@@ -5547,284 +5543,273 @@
           <a:ln/>
         </p:spPr>
         <p:txBody>
-          <a:bodyPr wrap="square" lIns="0" tIns="0" rIns="0" bIns="0" rtlCol="0" anchor="t"/>
-          <a:lstStyle/>
-          <a:p>
-            <a:pPr indent="0" marL="0">
-              <a:spcAft>
-                <a:spcPts val="300"/>
-              </a:spcAft>
-              <a:buNone/>
-            </a:pPr>
-            <a:r>
-              <a:rPr lang="en-US" sz="1400" b="1" dirty="0">
+          <a:bodyPr wrap="square" lIns="0" tIns="0" rIns="0" bIns="0" rtlCol="0" anchor="ctr"/>
+          <a:lstStyle/>
+          <a:p>
+            <a:pPr algn="ctr" indent="0" marL="0">
+              <a:buNone/>
+            </a:pPr>
+            <a:r>
+              <a:rPr lang="en-US" sz="1150" b="1" dirty="0">
                 <a:solidFill>
                   <a:schemeClr val="tx2"/>
                 </a:solidFill>
               </a:rPr>
-              <a:t>Ricavi</a:t>
-            </a:r>
-            <a:endParaRPr lang="en-US" sz="1200" dirty="0"/>
-          </a:p>
-          <a:p>
-            <a:pPr indent="0" marL="0">
-              <a:spcAft>
-                <a:spcPts val="300"/>
-              </a:spcAft>
-              <a:buNone/>
-            </a:pPr>
-            <a:r>
-              <a:rPr lang="en-US" sz="1200" dirty="0">
-                <a:solidFill>
-                  <a:schemeClr val="tx1"/>
-                </a:solidFill>
-              </a:rPr>
-              <a:t>Valore del credito digitato anno per anno (proposto 32 €).</a:t>
-            </a:r>
-            <a:endParaRPr lang="en-US" sz="1200" dirty="0"/>
-          </a:p>
-          <a:p>
-            <a:pPr indent="0" marL="0">
-              <a:spcAft>
-                <a:spcPts val="300"/>
-              </a:spcAft>
-              <a:buNone/>
-            </a:pPr>
-            <a:r>
-              <a:rPr lang="en-US" sz="600" dirty="0">
-                <a:solidFill>
-                  <a:schemeClr val="tx1"/>
-                </a:solidFill>
-              </a:rPr>
-              <a:t> </a:t>
-            </a:r>
-            <a:endParaRPr lang="en-US" sz="1200" dirty="0"/>
-          </a:p>
-          <a:p>
-            <a:pPr indent="0" marL="0">
-              <a:spcAft>
-                <a:spcPts val="300"/>
-              </a:spcAft>
-              <a:buNone/>
-            </a:pPr>
-            <a:r>
-              <a:rPr lang="en-US" sz="1400" b="1" dirty="0">
+              <a:t>Durata 7 · 10 · 21 anni</a:t>
+            </a:r>
+            <a:endParaRPr lang="en-US" sz="1150" dirty="0"/>
+          </a:p>
+        </p:txBody>
+      </p:sp>
+      <p:sp>
+        <p:nvSpPr>
+          <p:cNvPr id="7" name="Passo simulatore 2"/>
+          <p:cNvSpPr/>
+          <p:nvPr/>
+        </p:nvSpPr>
+        <p:spPr>
+          <a:xfrm>
+            <a:off x="2798064" y="5669280"/>
+            <a:ext cx="2103120" cy="566928"/>
+          </a:xfrm>
+          <a:prstGeom prst="roundRect">
+            <a:avLst>
+              <a:gd name="adj" fmla="val 19355"/>
+            </a:avLst>
+          </a:prstGeom>
+          <a:solidFill>
+            <a:schemeClr val="accent3"/>
+          </a:solidFill>
+          <a:ln w="12700">
+            <a:solidFill>
+              <a:schemeClr val="accent3"/>
+            </a:solidFill>
+            <a:prstDash val="solid"/>
+          </a:ln>
+        </p:spPr>
+      </p:sp>
+      <p:sp>
+        <p:nvSpPr>
+          <p:cNvPr id="8" name="Text 5"/>
+          <p:cNvSpPr txBox="1"/>
+          <p:nvPr/>
+        </p:nvSpPr>
+        <p:spPr>
+          <a:xfrm>
+            <a:off x="2889504" y="5669280"/>
+            <a:ext cx="1920240" cy="566928"/>
+          </a:xfrm>
+          <a:prstGeom prst="rect">
+            <a:avLst/>
+          </a:prstGeom>
+          <a:noFill/>
+          <a:ln/>
+        </p:spPr>
+        <p:txBody>
+          <a:bodyPr wrap="square" lIns="0" tIns="0" rIns="0" bIns="0" rtlCol="0" anchor="ctr"/>
+          <a:lstStyle/>
+          <a:p>
+            <a:pPr algn="ctr" indent="0" marL="0">
+              <a:buNone/>
+            </a:pPr>
+            <a:r>
+              <a:rPr lang="en-US" sz="1150" b="1" dirty="0">
                 <a:solidFill>
                   <a:schemeClr val="tx2"/>
                 </a:solidFill>
               </a:rPr>
-              <a:t>Costi per il Comune: Caso 1 o Caso 2?</a:t>
-            </a:r>
-            <a:endParaRPr lang="en-US" sz="1200" dirty="0"/>
-          </a:p>
-          <a:p>
-            <a:pPr indent="0" marL="0">
-              <a:spcAft>
-                <a:spcPts val="300"/>
-              </a:spcAft>
-              <a:buNone/>
-            </a:pPr>
-            <a:r>
-              <a:rPr lang="en-US" sz="1200" dirty="0">
-                <a:solidFill>
-                  <a:schemeClr val="tx1"/>
-                </a:solidFill>
-              </a:rPr>
-              <a:t>Caso 1 progetto volontario, Caso 2 progetto obbligatorio da bando di gara. Sei voci (Progetto, Rapporto, registrazioni) in € per abitante interpolati per popolazione, con minimo e massimo annuo (tabelle del 28/07/2026).</a:t>
-            </a:r>
-            <a:endParaRPr lang="en-US" sz="1200" dirty="0"/>
-          </a:p>
-          <a:p>
-            <a:pPr indent="0" marL="0">
-              <a:spcAft>
-                <a:spcPts val="300"/>
-              </a:spcAft>
-              <a:buNone/>
-            </a:pPr>
-            <a:r>
-              <a:rPr lang="en-US" sz="600" dirty="0">
-                <a:solidFill>
-                  <a:schemeClr val="tx1"/>
-                </a:solidFill>
-              </a:rPr>
-              <a:t> </a:t>
-            </a:r>
-            <a:endParaRPr lang="en-US" sz="1200" dirty="0"/>
-          </a:p>
-          <a:p>
-            <a:pPr indent="0" marL="0">
-              <a:spcAft>
-                <a:spcPts val="300"/>
-              </a:spcAft>
-              <a:buNone/>
-            </a:pPr>
-            <a:r>
-              <a:rPr lang="en-US" sz="1400" b="1" dirty="0">
+              <a:t>Riferimento Standard 4.8.1: anno al 65% o cluster</a:t>
+            </a:r>
+            <a:endParaRPr lang="en-US" sz="1150" dirty="0"/>
+          </a:p>
+        </p:txBody>
+      </p:sp>
+      <p:sp>
+        <p:nvSpPr>
+          <p:cNvPr id="9" name="Passo simulatore 3"/>
+          <p:cNvSpPr/>
+          <p:nvPr/>
+        </p:nvSpPr>
+        <p:spPr>
+          <a:xfrm>
+            <a:off x="5047488" y="5669280"/>
+            <a:ext cx="2103120" cy="566928"/>
+          </a:xfrm>
+          <a:prstGeom prst="roundRect">
+            <a:avLst>
+              <a:gd name="adj" fmla="val 19355"/>
+            </a:avLst>
+          </a:prstGeom>
+          <a:solidFill>
+            <a:schemeClr val="accent3"/>
+          </a:solidFill>
+          <a:ln w="12700">
+            <a:solidFill>
+              <a:schemeClr val="accent3"/>
+            </a:solidFill>
+            <a:prstDash val="solid"/>
+          </a:ln>
+        </p:spPr>
+      </p:sp>
+      <p:sp>
+        <p:nvSpPr>
+          <p:cNvPr id="10" name="Text 7"/>
+          <p:cNvSpPr txBox="1"/>
+          <p:nvPr/>
+        </p:nvSpPr>
+        <p:spPr>
+          <a:xfrm>
+            <a:off x="5138928" y="5669280"/>
+            <a:ext cx="1920240" cy="566928"/>
+          </a:xfrm>
+          <a:prstGeom prst="rect">
+            <a:avLst/>
+          </a:prstGeom>
+          <a:noFill/>
+          <a:ln/>
+        </p:spPr>
+        <p:txBody>
+          <a:bodyPr wrap="square" lIns="0" tIns="0" rIns="0" bIns="0" rtlCol="0" anchor="ctr"/>
+          <a:lstStyle/>
+          <a:p>
+            <a:pPr algn="ctr" indent="0" marL="0">
+              <a:buNone/>
+            </a:pPr>
+            <a:r>
+              <a:rPr lang="en-US" sz="1150" b="1" dirty="0">
                 <a:solidFill>
                   <a:schemeClr val="tx2"/>
                 </a:solidFill>
               </a:rPr>
-              <a:t>Bovisio-Masciago, 10 anni, 32 €/credito</a:t>
-            </a:r>
-            <a:endParaRPr lang="en-US" sz="1200" dirty="0"/>
-          </a:p>
-          <a:p>
-            <a:pPr indent="0" marL="0">
-              <a:spcAft>
-                <a:spcPts val="300"/>
-              </a:spcAft>
-              <a:buNone/>
-            </a:pPr>
-            <a:r>
-              <a:rPr lang="en-US" sz="1200" b="1" dirty="0">
-                <a:solidFill>
-                  <a:schemeClr val="tx1"/>
-                </a:solidFill>
-              </a:rPr>
-              <a:t>Per utenza (come Allegato A): </a:t>
-            </a:r>
-            <a:pPr indent="0" marL="0">
-              <a:spcAft>
-                <a:spcPts val="300"/>
-              </a:spcAft>
-              <a:buNone/>
-            </a:pPr>
-            <a:r>
-              <a:rPr lang="en-US" sz="1200" dirty="0">
-                <a:solidFill>
-                  <a:schemeClr val="tx1"/>
-                </a:solidFill>
-              </a:rPr>
-              <a:t>34.188 crediti, ricavi € 1.093.792</a:t>
-            </a:r>
-            <a:endParaRPr lang="en-US" sz="1200" dirty="0"/>
-          </a:p>
-          <a:p>
-            <a:pPr indent="0" marL="0">
-              <a:spcAft>
-                <a:spcPts val="300"/>
-              </a:spcAft>
-              <a:buNone/>
-            </a:pPr>
-            <a:r>
-              <a:rPr lang="en-US" sz="1200" dirty="0">
-                <a:solidFill>
-                  <a:schemeClr val="tx1"/>
-                </a:solidFill>
-              </a:rPr>
-              <a:t>Caso 1 costi € 162.330 → </a:t>
-            </a:r>
-            <a:pPr indent="0" marL="0">
-              <a:spcAft>
-                <a:spcPts val="300"/>
-              </a:spcAft>
-              <a:buNone/>
-            </a:pPr>
-            <a:r>
-              <a:rPr lang="en-US" sz="1200" b="1" dirty="0">
+              <a:t>Obiettivi annui e traiettoria automatica</a:t>
+            </a:r>
+            <a:endParaRPr lang="en-US" sz="1150" dirty="0"/>
+          </a:p>
+        </p:txBody>
+      </p:sp>
+      <p:sp>
+        <p:nvSpPr>
+          <p:cNvPr id="11" name="Passo simulatore 4"/>
+          <p:cNvSpPr/>
+          <p:nvPr/>
+        </p:nvSpPr>
+        <p:spPr>
+          <a:xfrm>
+            <a:off x="7296912" y="5669280"/>
+            <a:ext cx="2103120" cy="566928"/>
+          </a:xfrm>
+          <a:prstGeom prst="roundRect">
+            <a:avLst>
+              <a:gd name="adj" fmla="val 19355"/>
+            </a:avLst>
+          </a:prstGeom>
+          <a:solidFill>
+            <a:schemeClr val="accent3"/>
+          </a:solidFill>
+          <a:ln w="12700">
+            <a:solidFill>
+              <a:schemeClr val="accent3"/>
+            </a:solidFill>
+            <a:prstDash val="solid"/>
+          </a:ln>
+        </p:spPr>
+      </p:sp>
+      <p:sp>
+        <p:nvSpPr>
+          <p:cNvPr id="12" name="Text 9"/>
+          <p:cNvSpPr txBox="1"/>
+          <p:nvPr/>
+        </p:nvSpPr>
+        <p:spPr>
+          <a:xfrm>
+            <a:off x="7388352" y="5669280"/>
+            <a:ext cx="1920240" cy="566928"/>
+          </a:xfrm>
+          <a:prstGeom prst="rect">
+            <a:avLst/>
+          </a:prstGeom>
+          <a:noFill/>
+          <a:ln/>
+        </p:spPr>
+        <p:txBody>
+          <a:bodyPr wrap="square" lIns="0" tIns="0" rIns="0" bIns="0" rtlCol="0" anchor="ctr"/>
+          <a:lstStyle/>
+          <a:p>
+            <a:pPr algn="ctr" indent="0" marL="0">
+              <a:buNone/>
+            </a:pPr>
+            <a:r>
+              <a:rPr lang="en-US" sz="1150" b="1" dirty="0">
                 <a:solidFill>
                   <a:schemeClr val="tx2"/>
                 </a:solidFill>
               </a:rPr>
-              <a:t>+€ 931.463</a:t>
-            </a:r>
-            <a:endParaRPr lang="en-US" sz="1200" dirty="0"/>
-          </a:p>
-          <a:p>
-            <a:pPr indent="0" marL="0">
-              <a:spcAft>
-                <a:spcPts val="300"/>
-              </a:spcAft>
-              <a:buNone/>
-            </a:pPr>
-            <a:r>
-              <a:rPr lang="en-US" sz="1200" dirty="0">
-                <a:solidFill>
-                  <a:schemeClr val="tx1"/>
-                </a:solidFill>
-              </a:rPr>
-              <a:t>Caso 2 costi € 242.658 → </a:t>
-            </a:r>
-            <a:pPr indent="0" marL="0">
-              <a:spcAft>
-                <a:spcPts val="300"/>
-              </a:spcAft>
-              <a:buNone/>
-            </a:pPr>
-            <a:r>
-              <a:rPr lang="en-US" sz="1200" b="1" dirty="0">
+              <a:t>% differenziata ricalcolata</a:t>
+            </a:r>
+            <a:endParaRPr lang="en-US" sz="1150" dirty="0"/>
+          </a:p>
+        </p:txBody>
+      </p:sp>
+      <p:sp>
+        <p:nvSpPr>
+          <p:cNvPr id="13" name="Passo simulatore 5"/>
+          <p:cNvSpPr/>
+          <p:nvPr/>
+        </p:nvSpPr>
+        <p:spPr>
+          <a:xfrm>
+            <a:off x="9546336" y="5669280"/>
+            <a:ext cx="2103120" cy="566928"/>
+          </a:xfrm>
+          <a:prstGeom prst="roundRect">
+            <a:avLst>
+              <a:gd name="adj" fmla="val 19355"/>
+            </a:avLst>
+          </a:prstGeom>
+          <a:solidFill>
+            <a:schemeClr val="accent4"/>
+          </a:solidFill>
+          <a:ln w="12700">
+            <a:solidFill>
+              <a:schemeClr val="accent4"/>
+            </a:solidFill>
+            <a:prstDash val="solid"/>
+          </a:ln>
+        </p:spPr>
+      </p:sp>
+      <p:sp>
+        <p:nvSpPr>
+          <p:cNvPr id="14" name="Text 11"/>
+          <p:cNvSpPr txBox="1"/>
+          <p:nvPr/>
+        </p:nvSpPr>
+        <p:spPr>
+          <a:xfrm>
+            <a:off x="9637776" y="5669280"/>
+            <a:ext cx="1920240" cy="566928"/>
+          </a:xfrm>
+          <a:prstGeom prst="rect">
+            <a:avLst/>
+          </a:prstGeom>
+          <a:noFill/>
+          <a:ln/>
+        </p:spPr>
+        <p:txBody>
+          <a:bodyPr wrap="square" lIns="0" tIns="0" rIns="0" bIns="0" rtlCol="0" anchor="ctr"/>
+          <a:lstStyle/>
+          <a:p>
+            <a:pPr algn="ctr" indent="0" marL="0">
+              <a:buNone/>
+            </a:pPr>
+            <a:r>
+              <a:rPr lang="en-US" sz="1150" b="1" dirty="0">
                 <a:solidFill>
                   <a:schemeClr val="tx2"/>
                 </a:solidFill>
               </a:rPr>
-              <a:t>+€ 851.135</a:t>
-            </a:r>
-            <a:endParaRPr lang="en-US" sz="1200" dirty="0"/>
-          </a:p>
-          <a:p>
-            <a:pPr indent="0" marL="0">
-              <a:spcAft>
-                <a:spcPts val="300"/>
-              </a:spcAft>
-              <a:buNone/>
-            </a:pPr>
-            <a:r>
-              <a:rPr lang="en-US" sz="1200" b="1" dirty="0">
-                <a:solidFill>
-                  <a:schemeClr val="tx1"/>
-                </a:solidFill>
-              </a:rPr>
-              <a:t>Bilancio del Comune: </a:t>
-            </a:r>
-            <a:pPr indent="0" marL="0">
-              <a:spcAft>
-                <a:spcPts val="300"/>
-              </a:spcAft>
-              <a:buNone/>
-            </a:pPr>
-            <a:r>
-              <a:rPr lang="en-US" sz="1200" dirty="0">
-                <a:solidFill>
-                  <a:schemeClr val="tx1"/>
-                </a:solidFill>
-              </a:rPr>
-              <a:t>6.707 crediti, € 214.464; Caso 1 +€ 52.134, Caso 2 −€ 28.193</a:t>
-            </a:r>
-            <a:endParaRPr lang="en-US" sz="1200" dirty="0"/>
-          </a:p>
-          <a:p>
-            <a:pPr indent="0" marL="0">
-              <a:spcAft>
-                <a:spcPts val="300"/>
-              </a:spcAft>
-              <a:buNone/>
-            </a:pPr>
-            <a:r>
-              <a:rPr lang="en-US" sz="600" dirty="0">
-                <a:solidFill>
-                  <a:schemeClr val="tx1"/>
-                </a:solidFill>
-              </a:rPr>
-              <a:t> </a:t>
-            </a:r>
-            <a:endParaRPr lang="en-US" sz="1200" dirty="0"/>
-          </a:p>
-          <a:p>
-            <a:pPr indent="0" marL="0">
-              <a:spcAft>
-                <a:spcPts val="300"/>
-              </a:spcAft>
-              <a:buNone/>
-            </a:pPr>
-            <a:r>
-              <a:rPr lang="en-US" sz="1200" i="1" dirty="0">
-                <a:solidFill>
-                  <a:schemeClr val="accent6"/>
-                </a:solidFill>
-              </a:rPr>
-              <a:t>Il Caso 1 riproduce i costi dei contratti EsaCom, il metodo per utenza le loro stime (0,19-0,23 crediti per abitante all'anno).</a:t>
-            </a:r>
-            <a:endParaRPr lang="en-US" sz="1200" dirty="0"/>
+              <a:t>Crediti per anno, confronto, CSV e stampa</a:t>
+            </a:r>
+            <a:endParaRPr lang="en-US" sz="1150" dirty="0"/>
           </a:p>
         </p:txBody>
       </p:sp>
@@ -5933,6 +5918,467 @@
                 <a:ea typeface="Cambria" pitchFamily="34" charset="-122"/>
                 <a:cs typeface="Cambria" pitchFamily="34" charset="-120"/>
               </a:rPr>
+              <a:t>Simulazione economica: ricavi e costi per il Comune</a:t>
+            </a:r>
+            <a:endParaRPr lang="en-US" sz="3000" dirty="0"/>
+          </a:p>
+        </p:txBody>
+      </p:sp>
+      <p:pic>
+        <p:nvPicPr>
+          <p:cNvPr id="3" name="Schermata costi" descr="Simulatore, metodo per utenza: costi Caso 1 per 16.735 abitanti, ricavi, margine e margine netto per anno">    </p:cNvPr>
+          <p:cNvPicPr>
+            <a:picLocks noChangeAspect="1"/>
+          </p:cNvPicPr>
+          <p:nvPr/>
+        </p:nvPicPr>
+        <p:blipFill>
+          <a:blip r:embed="rId1"/>
+          <a:stretch>
+            <a:fillRect/>
+          </a:stretch>
+        </p:blipFill>
+        <p:spPr>
+          <a:xfrm>
+            <a:off x="548640" y="1188720"/>
+            <a:ext cx="6242333" cy="5029200"/>
+          </a:xfrm>
+          <a:prstGeom prst="rect">
+            <a:avLst/>
+          </a:prstGeom>
+        </p:spPr>
+      </p:pic>
+      <p:sp>
+        <p:nvSpPr>
+          <p:cNvPr id="4" name="Riquadro economia"/>
+          <p:cNvSpPr/>
+          <p:nvPr/>
+        </p:nvSpPr>
+        <p:spPr>
+          <a:xfrm>
+            <a:off x="7452360" y="1188720"/>
+            <a:ext cx="4160520" cy="5001768"/>
+          </a:xfrm>
+          <a:prstGeom prst="roundRect">
+            <a:avLst>
+              <a:gd name="adj" fmla="val 2637"/>
+            </a:avLst>
+          </a:prstGeom>
+          <a:solidFill>
+            <a:schemeClr val="bg2"/>
+          </a:solidFill>
+          <a:ln w="12700">
+            <a:solidFill>
+              <a:schemeClr val="bg2"/>
+            </a:solidFill>
+            <a:prstDash val="solid"/>
+          </a:ln>
+        </p:spPr>
+      </p:sp>
+      <p:sp>
+        <p:nvSpPr>
+          <p:cNvPr id="5" name="Text 2"/>
+          <p:cNvSpPr txBox="1"/>
+          <p:nvPr/>
+        </p:nvSpPr>
+        <p:spPr>
+          <a:xfrm>
+            <a:off x="7635240" y="1298448"/>
+            <a:ext cx="3794760" cy="4800600"/>
+          </a:xfrm>
+          <a:prstGeom prst="rect">
+            <a:avLst/>
+          </a:prstGeom>
+          <a:noFill/>
+          <a:ln/>
+        </p:spPr>
+        <p:txBody>
+          <a:bodyPr wrap="square" lIns="0" tIns="0" rIns="0" bIns="0" rtlCol="0" anchor="t"/>
+          <a:lstStyle/>
+          <a:p>
+            <a:pPr indent="0" marL="0">
+              <a:spcAft>
+                <a:spcPts val="300"/>
+              </a:spcAft>
+              <a:buNone/>
+            </a:pPr>
+            <a:r>
+              <a:rPr lang="en-US" sz="1400" b="1" dirty="0">
+                <a:solidFill>
+                  <a:schemeClr val="tx2"/>
+                </a:solidFill>
+              </a:rPr>
+              <a:t>Ricavi</a:t>
+            </a:r>
+            <a:endParaRPr lang="en-US" sz="1200" dirty="0"/>
+          </a:p>
+          <a:p>
+            <a:pPr indent="0" marL="0">
+              <a:spcAft>
+                <a:spcPts val="300"/>
+              </a:spcAft>
+              <a:buNone/>
+            </a:pPr>
+            <a:r>
+              <a:rPr lang="en-US" sz="1200" dirty="0">
+                <a:solidFill>
+                  <a:schemeClr val="tx1"/>
+                </a:solidFill>
+              </a:rPr>
+              <a:t>Valore del credito digitato anno per anno (proposto 32 €).</a:t>
+            </a:r>
+            <a:endParaRPr lang="en-US" sz="1200" dirty="0"/>
+          </a:p>
+          <a:p>
+            <a:pPr indent="0" marL="0">
+              <a:spcAft>
+                <a:spcPts val="300"/>
+              </a:spcAft>
+              <a:buNone/>
+            </a:pPr>
+            <a:r>
+              <a:rPr lang="en-US" sz="600" dirty="0">
+                <a:solidFill>
+                  <a:schemeClr val="tx1"/>
+                </a:solidFill>
+              </a:rPr>
+              <a:t> </a:t>
+            </a:r>
+            <a:endParaRPr lang="en-US" sz="1200" dirty="0"/>
+          </a:p>
+          <a:p>
+            <a:pPr indent="0" marL="0">
+              <a:spcAft>
+                <a:spcPts val="300"/>
+              </a:spcAft>
+              <a:buNone/>
+            </a:pPr>
+            <a:r>
+              <a:rPr lang="en-US" sz="1400" b="1" dirty="0">
+                <a:solidFill>
+                  <a:schemeClr val="tx2"/>
+                </a:solidFill>
+              </a:rPr>
+              <a:t>Costi per il Comune: Caso 1 o Caso 2?</a:t>
+            </a:r>
+            <a:endParaRPr lang="en-US" sz="1200" dirty="0"/>
+          </a:p>
+          <a:p>
+            <a:pPr indent="0" marL="0">
+              <a:spcAft>
+                <a:spcPts val="300"/>
+              </a:spcAft>
+              <a:buNone/>
+            </a:pPr>
+            <a:r>
+              <a:rPr lang="en-US" sz="1200" dirty="0">
+                <a:solidFill>
+                  <a:schemeClr val="tx1"/>
+                </a:solidFill>
+              </a:rPr>
+              <a:t>Caso 1 progetto volontario, Caso 2 progetto obbligatorio da bando di gara. Sei voci (Progetto, Rapporto, registrazioni) in € per abitante interpolati per popolazione, con minimo e massimo annuo (tabelle del 28/07/2026).</a:t>
+            </a:r>
+            <a:endParaRPr lang="en-US" sz="1200" dirty="0"/>
+          </a:p>
+          <a:p>
+            <a:pPr indent="0" marL="0">
+              <a:spcAft>
+                <a:spcPts val="300"/>
+              </a:spcAft>
+              <a:buNone/>
+            </a:pPr>
+            <a:r>
+              <a:rPr lang="en-US" sz="600" dirty="0">
+                <a:solidFill>
+                  <a:schemeClr val="tx1"/>
+                </a:solidFill>
+              </a:rPr>
+              <a:t> </a:t>
+            </a:r>
+            <a:endParaRPr lang="en-US" sz="1200" dirty="0"/>
+          </a:p>
+          <a:p>
+            <a:pPr indent="0" marL="0">
+              <a:spcAft>
+                <a:spcPts val="300"/>
+              </a:spcAft>
+              <a:buNone/>
+            </a:pPr>
+            <a:r>
+              <a:rPr lang="en-US" sz="1400" b="1" dirty="0">
+                <a:solidFill>
+                  <a:schemeClr val="tx2"/>
+                </a:solidFill>
+              </a:rPr>
+              <a:t>Bovisio-Masciago, 10 anni, 32 €/credito</a:t>
+            </a:r>
+            <a:endParaRPr lang="en-US" sz="1200" dirty="0"/>
+          </a:p>
+          <a:p>
+            <a:pPr indent="0" marL="0">
+              <a:spcAft>
+                <a:spcPts val="300"/>
+              </a:spcAft>
+              <a:buNone/>
+            </a:pPr>
+            <a:r>
+              <a:rPr lang="en-US" sz="1200" b="1" dirty="0">
+                <a:solidFill>
+                  <a:schemeClr val="tx1"/>
+                </a:solidFill>
+              </a:rPr>
+              <a:t>Per utenza (come Allegato A): </a:t>
+            </a:r>
+            <a:pPr indent="0" marL="0">
+              <a:spcAft>
+                <a:spcPts val="300"/>
+              </a:spcAft>
+              <a:buNone/>
+            </a:pPr>
+            <a:r>
+              <a:rPr lang="en-US" sz="1200" dirty="0">
+                <a:solidFill>
+                  <a:schemeClr val="tx1"/>
+                </a:solidFill>
+              </a:rPr>
+              <a:t>34.188 crediti, ricavi € 1.093.792</a:t>
+            </a:r>
+            <a:endParaRPr lang="en-US" sz="1200" dirty="0"/>
+          </a:p>
+          <a:p>
+            <a:pPr indent="0" marL="0">
+              <a:spcAft>
+                <a:spcPts val="300"/>
+              </a:spcAft>
+              <a:buNone/>
+            </a:pPr>
+            <a:r>
+              <a:rPr lang="en-US" sz="1200" dirty="0">
+                <a:solidFill>
+                  <a:schemeClr val="tx1"/>
+                </a:solidFill>
+              </a:rPr>
+              <a:t>Caso 1 costi € 162.330 → </a:t>
+            </a:r>
+            <a:pPr indent="0" marL="0">
+              <a:spcAft>
+                <a:spcPts val="300"/>
+              </a:spcAft>
+              <a:buNone/>
+            </a:pPr>
+            <a:r>
+              <a:rPr lang="en-US" sz="1200" b="1" dirty="0">
+                <a:solidFill>
+                  <a:schemeClr val="tx2"/>
+                </a:solidFill>
+              </a:rPr>
+              <a:t>+€ 931.463</a:t>
+            </a:r>
+            <a:endParaRPr lang="en-US" sz="1200" dirty="0"/>
+          </a:p>
+          <a:p>
+            <a:pPr indent="0" marL="0">
+              <a:spcAft>
+                <a:spcPts val="300"/>
+              </a:spcAft>
+              <a:buNone/>
+            </a:pPr>
+            <a:r>
+              <a:rPr lang="en-US" sz="1200" dirty="0">
+                <a:solidFill>
+                  <a:schemeClr val="tx1"/>
+                </a:solidFill>
+              </a:rPr>
+              <a:t>Caso 2 costi € 242.658 → </a:t>
+            </a:r>
+            <a:pPr indent="0" marL="0">
+              <a:spcAft>
+                <a:spcPts val="300"/>
+              </a:spcAft>
+              <a:buNone/>
+            </a:pPr>
+            <a:r>
+              <a:rPr lang="en-US" sz="1200" b="1" dirty="0">
+                <a:solidFill>
+                  <a:schemeClr val="tx2"/>
+                </a:solidFill>
+              </a:rPr>
+              <a:t>+€ 851.135</a:t>
+            </a:r>
+            <a:endParaRPr lang="en-US" sz="1200" dirty="0"/>
+          </a:p>
+          <a:p>
+            <a:pPr indent="0" marL="0">
+              <a:spcAft>
+                <a:spcPts val="300"/>
+              </a:spcAft>
+              <a:buNone/>
+            </a:pPr>
+            <a:r>
+              <a:rPr lang="en-US" sz="1200" b="1" dirty="0">
+                <a:solidFill>
+                  <a:schemeClr val="tx1"/>
+                </a:solidFill>
+              </a:rPr>
+              <a:t>Bilancio del Comune: </a:t>
+            </a:r>
+            <a:pPr indent="0" marL="0">
+              <a:spcAft>
+                <a:spcPts val="300"/>
+              </a:spcAft>
+              <a:buNone/>
+            </a:pPr>
+            <a:r>
+              <a:rPr lang="en-US" sz="1200" dirty="0">
+                <a:solidFill>
+                  <a:schemeClr val="tx1"/>
+                </a:solidFill>
+              </a:rPr>
+              <a:t>6.707 crediti, € 214.464; Caso 1 +€ 52.134, Caso 2 −€ 28.193</a:t>
+            </a:r>
+            <a:endParaRPr lang="en-US" sz="1200" dirty="0"/>
+          </a:p>
+          <a:p>
+            <a:pPr indent="0" marL="0">
+              <a:spcAft>
+                <a:spcPts val="300"/>
+              </a:spcAft>
+              <a:buNone/>
+            </a:pPr>
+            <a:r>
+              <a:rPr lang="en-US" sz="600" dirty="0">
+                <a:solidFill>
+                  <a:schemeClr val="tx1"/>
+                </a:solidFill>
+              </a:rPr>
+              <a:t> </a:t>
+            </a:r>
+            <a:endParaRPr lang="en-US" sz="1200" dirty="0"/>
+          </a:p>
+          <a:p>
+            <a:pPr indent="0" marL="0">
+              <a:spcAft>
+                <a:spcPts val="300"/>
+              </a:spcAft>
+              <a:buNone/>
+            </a:pPr>
+            <a:r>
+              <a:rPr lang="en-US" sz="1200" i="1" dirty="0">
+                <a:solidFill>
+                  <a:schemeClr val="accent6"/>
+                </a:solidFill>
+              </a:rPr>
+              <a:t>Il Caso 1 riproduce i costi dei contratti EsaCom, il metodo per utenza le loro stime (0,19-0,23 crediti per abitante all'anno).</a:t>
+            </a:r>
+            <a:endParaRPr lang="en-US" sz="1200" dirty="0"/>
+          </a:p>
+        </p:txBody>
+      </p:sp>
+      <p:sp>
+        <p:nvSpPr>
+          <p:cNvPr id="25" name="Slide Number Placeholder 0"/>
+          <p:cNvSpPr>
+            <a:spLocks noGrp="1"/>
+          </p:cNvSpPr>
+          <p:nvPr>
+            <p:ph type="sldNum" sz="quarter" idx="4294967295"/>
+          </p:nvPr>
+        </p:nvSpPr>
+        <p:spPr>
+          <a:xfrm>
+            <a:off x="11155680" y="6400800"/>
+            <a:ext cx="457200" cy="274320"/>
+          </a:xfrm>
+          <a:prstGeom prst="rect">
+            <a:avLst/>
+          </a:prstGeom>
+          <a:extLst>
+            <a:ext uri="{C572A759-6A51-4108-AA02-DFA0A04FC94B}">
+              <ma14:wrappingTextBoxFlag xmlns:ma14="http://schemas.microsoft.com/office/mac/drawingml/2011/main" val="0"/>
+            </a:ext>
+          </a:extLst>
+        </p:spPr>
+        <p:txBody>
+          <a:bodyPr/>
+          <a:lstStyle>
+            <a:lvl1pPr>
+              <a:defRPr sz="1000">
+                <a:solidFill>
+                  <a:schemeClr val="accent6"/>
+                </a:solidFill>
+              </a:defRPr>
+            </a:lvl1pPr>
+          </a:lstStyle>
+          <a:p>
+            <a:pPr algn="r"/>
+            <a:fld id="{F7021451-1387-4CA6-816F-3879F97B5CBC}" type="slidenum">
+              <a:rPr b="0" lang="en-US"/>
+              <a:t>14</a:t>
+            </a:fld>
+            <a:endParaRPr lang="en-US"/>
+          </a:p>
+        </p:txBody>
+      </p:sp>
+    </p:spTree>
+  </p:cSld>
+  <p:clrMapOvr>
+    <a:masterClrMapping/>
+  </p:clrMapOvr>
+</p:sld>
+</file>
+
+<file path=ppt/slides/slide15.xml><?xml version="1.0" encoding="utf-8"?>
+<p:sld xmlns:a="http://schemas.openxmlformats.org/drawingml/2006/main" xmlns:r="http://schemas.openxmlformats.org/officeDocument/2006/relationships" xmlns:p="http://schemas.openxmlformats.org/presentationml/2006/main">
+  <p:cSld name="Slide 15">
+    <p:spTree>
+      <p:nvGrpSpPr>
+        <p:cNvPr id="1" name=""/>
+        <p:cNvGrpSpPr/>
+        <p:nvPr/>
+      </p:nvGrpSpPr>
+      <p:grpSpPr>
+        <a:xfrm>
+          <a:off x="0" y="0"/>
+          <a:ext cx="0" cy="0"/>
+          <a:chOff x="0" y="0"/>
+          <a:chExt cx="0" cy="0"/>
+        </a:xfrm>
+      </p:grpSpPr>
+      <p:sp>
+        <p:nvSpPr>
+          <p:cNvPr id="2" name="Text 0"/>
+          <p:cNvSpPr/>
+          <p:nvPr>
+            <p:ph idx="100" type="title" hasCustomPrompt="1"/>
+          </p:nvPr>
+        </p:nvSpPr>
+        <p:spPr>
+          <a:xfrm>
+            <a:off x="548640" y="320040"/>
+            <a:ext cx="9144000" cy="731520"/>
+          </a:xfrm>
+          <a:prstGeom prst="rect">
+            <a:avLst/>
+          </a:prstGeom>
+          <a:noFill/>
+          <a:ln/>
+        </p:spPr>
+        <p:txBody>
+          <a:bodyPr wrap="square" lIns="0" tIns="0" rIns="0" bIns="0" rtlCol="0" anchor="ctr"/>
+          <a:lstStyle/>
+          <a:p>
+            <a:pPr algn="l" indent="0" marL="0">
+              <a:buNone/>
+            </a:pPr>
+            <a:r>
+              <a:rPr lang="en-US" sz="3000" b="1" dirty="0">
+                <a:solidFill>
+                  <a:schemeClr val="tx2"/>
+                </a:solidFill>
+                <a:latin typeface="Cambria" pitchFamily="34" charset="0"/>
+                <a:ea typeface="Cambria" pitchFamily="34" charset="-122"/>
+                <a:cs typeface="Cambria" pitchFamily="34" charset="-120"/>
+              </a:rPr>
               <a:t>Piani a pagamento: sicurezza e stabilità</a:t>
             </a:r>
             <a:endParaRPr lang="en-US" sz="3000" dirty="0"/>
@@ -5941,7 +6387,7 @@
       </p:sp>
       <p:graphicFrame>
         <p:nvGraphicFramePr>
-          <p:cNvPr id="15" name="Table 0"/>
+          <p:cNvPr id="16" name="Table 0"/>
           <p:cNvGraphicFramePr>
             <a:graphicFrameLocks noGrp="1"/>
           </p:cNvGraphicFramePr>
@@ -8048,7 +8494,7 @@
             <a:pPr algn="r"/>
             <a:fld id="{F7021451-1387-4CA6-816F-3879F97B5CBC}" type="slidenum">
               <a:rPr b="0" lang="en-US"/>
-              <a:t>14</a:t>
+              <a:t>15</a:t>
             </a:fld>
             <a:endParaRPr lang="en-US"/>
           </a:p>
@@ -8062,9 +8508,9 @@
 </p:sld>
 </file>
 
-<file path=ppt/slides/slide15.xml><?xml version="1.0" encoding="utf-8"?>
+<file path=ppt/slides/slide16.xml><?xml version="1.0" encoding="utf-8"?>
 <p:sld xmlns:a="http://schemas.openxmlformats.org/drawingml/2006/main" xmlns:r="http://schemas.openxmlformats.org/officeDocument/2006/relationships" xmlns:p="http://schemas.openxmlformats.org/presentationml/2006/main">
-  <p:cSld name="Slide 15">
+  <p:cSld name="Slide 16">
     <p:spTree>
       <p:nvGrpSpPr>
         <p:cNvPr id="1" name=""/>
@@ -8122,7 +8568,7 @@
       </p:sp>
       <p:graphicFrame>
         <p:nvGraphicFramePr>
-          <p:cNvPr id="16" name="Table 0"/>
+          <p:cNvPr id="17" name="Table 0"/>
           <p:cNvGraphicFramePr>
             <a:graphicFrameLocks noGrp="1"/>
           </p:cNvGraphicFramePr>
@@ -9855,7 +10301,7 @@
             <a:pPr algn="r"/>
             <a:fld id="{F7021451-1387-4CA6-816F-3879F97B5CBC}" type="slidenum">
               <a:rPr b="0" lang="en-US"/>
-              <a:t>15</a:t>
+              <a:t>16</a:t>
             </a:fld>
             <a:endParaRPr lang="en-US"/>
           </a:p>
@@ -13802,7 +14248,7 @@
                 <a:ea typeface="Cambria" pitchFamily="34" charset="-122"/>
                 <a:cs typeface="Cambria" pitchFamily="34" charset="-120"/>
               </a:rPr>
-              <a:t>43</a:t>
+              <a:t>44</a:t>
             </a:r>
             <a:endParaRPr lang="en-US" sz="3000" dirty="0"/>
           </a:p>
@@ -13904,7 +14350,7 @@
                 <a:ea typeface="Cambria" pitchFamily="34" charset="-122"/>
                 <a:cs typeface="Cambria" pitchFamily="34" charset="-120"/>
               </a:rPr>
-              <a:t>7</a:t>
+              <a:t>8</a:t>
             </a:r>
             <a:endParaRPr lang="en-US" sz="3000" dirty="0"/>
           </a:p>
@@ -14108,7 +14554,7 @@
                 <a:ea typeface="Cambria" pitchFamily="34" charset="-122"/>
                 <a:cs typeface="Cambria" pitchFamily="34" charset="-120"/>
               </a:rPr>
-              <a:t>≈40.400</a:t>
+              <a:t>≈42.900</a:t>
             </a:r>
             <a:endParaRPr lang="en-US" sz="3000" dirty="0"/>
           </a:p>
@@ -14895,7 +15341,7 @@
                 <a:ea typeface="Cambria" pitchFamily="34" charset="-122"/>
                 <a:cs typeface="Cambria" pitchFamily="34" charset="-120"/>
               </a:rPr>
-              <a:t>182</a:t>
+              <a:t>184</a:t>
             </a:r>
             <a:endParaRPr lang="en-US" sz="2400" dirty="0"/>
           </a:p>
@@ -14948,7 +15394,7 @@
                 <a:ea typeface="Cambria" pitchFamily="34" charset="-122"/>
                 <a:cs typeface="Cambria" pitchFamily="34" charset="-120"/>
               </a:rPr>
-              <a:t>43</a:t>
+              <a:t>44</a:t>
             </a:r>
             <a:endParaRPr lang="en-US" sz="2400" dirty="0"/>
           </a:p>
@@ -15001,7 +15447,7 @@
                 <a:ea typeface="Cambria" pitchFamily="34" charset="-122"/>
                 <a:cs typeface="Cambria" pitchFamily="34" charset="-120"/>
               </a:rPr>
-              <a:t>7</a:t>
+              <a:t>8</a:t>
             </a:r>
             <a:endParaRPr lang="en-US" sz="2400" dirty="0"/>
           </a:p>
@@ -15054,7 +15500,7 @@
                 <a:ea typeface="Cambria" pitchFamily="34" charset="-122"/>
                 <a:cs typeface="Cambria" pitchFamily="34" charset="-120"/>
               </a:rPr>
-              <a:t>≈40.400</a:t>
+              <a:t>≈42.900</a:t>
             </a:r>
             <a:endParaRPr lang="en-US" sz="2400" dirty="0"/>
           </a:p>

--- a/public/documentazione/Presentazione_Portale_CWP.pptx
+++ b/public/documentazione/Presentazione_Portale_CWP.pptx
@@ -122,41 +122,41 @@
   <p:extLst>
     <p:ext uri="{521415D9-36F7-43E2-AB2F-B90AF26B5E84}">
       <p14:sectionLst xmlns:p14="http://schemas.microsoft.com/office/powerpoint/2010/main">
-        <p14:section name="Apertura" id="{f103ac4f-330f-8b9a-6a33-6bf452a07465}">
+        <p14:section name="Apertura" id="{ffc84a41-0759-46c6-cfb0-e646a4743456}">
           <p14:sldIdLst>
             <p14:sldId id="256"/>
           </p14:sldIdLst>
         </p14:section>
-        <p14:section name="Metodologia" id="{bb27aa64-3b49-3a30-d8b8-47b0b77dd9a0}">
+        <p14:section name="Metodologia" id="{86a7953c-9bf7-6359-6ae0-ac8f5fc69c79}">
           <p14:sldIdLst>
             <p14:sldId id="257"/>
           </p14:sldIdLst>
         </p14:section>
-        <p14:section name="Analisi funzionale" id="{23e48304-e601-6c43-a5da-16576dc01039}">
+        <p14:section name="Analisi funzionale" id="{09b1036f-fe66-5ea3-4ca0-b6acbd336499}">
           <p14:sldIdLst>
             <p14:sldId id="258"/>
             <p14:sldId id="259"/>
           </p14:sldIdLst>
         </p14:section>
-        <p14:section name="Già realtà" id="{f6af8de7-3c6a-c460-0512-f6d8dca2b699}">
+        <p14:section name="Già realtà" id="{2f735003-5174-9e82-df6c-e87b764d6476}">
           <p14:sldIdLst>
             <p14:sldId id="260"/>
           </p14:sldIdLst>
         </p14:section>
-        <p14:section name="Architettura e ruoli" id="{e99a87d7-9d68-2c42-a284-9388b3179635}">
+        <p14:section name="Architettura e ruoli" id="{c1337424-0e3b-529c-518d-b7e24061ef5b}">
           <p14:sldIdLst>
             <p14:sldId id="261"/>
             <p14:sldId id="262"/>
           </p14:sldIdLst>
         </p14:section>
-        <p14:section name="Novità" id="{6c762d9e-0e45-61c9-c5a5-8ae9aff5ecfa}">
+        <p14:section name="Novità" id="{0dbbb492-fb8f-ba6c-9932-e492b9995047}">
           <p14:sldIdLst>
             <p14:sldId id="263"/>
             <p14:sldId id="264"/>
             <p14:sldId id="265"/>
           </p14:sldIdLst>
         </p14:section>
-        <p14:section name="Punti aperti" id="{117c4e4a-8f3b-c2bd-5126-b6675b037cf7}">
+        <p14:section name="Punti aperti" id="{f70e330d-7b20-31a9-631c-185d2e099f7b}">
           <p14:sldIdLst>
             <p14:sldId id="266"/>
             <p14:sldId id="267"/>
@@ -165,7 +165,7 @@
             <p14:sldId id="270"/>
           </p14:sldIdLst>
         </p14:section>
-        <p14:section name="Scelte da prendere" id="{a64c973e-abd3-e1a4-989f-28d492098501}">
+        <p14:section name="Scelte da prendere" id="{ab9ef203-faad-135c-47f6-2e14a39efa46}">
           <p14:sldIdLst>
             <p14:sldId id="271"/>
           </p14:sldIdLst>
@@ -574,7 +574,7 @@
           <a:p>
             <a:r>
               <a:rPr lang="en-US" dirty="0"/>
-              <a:t>Presentazione di riepilogo del portale, aggiornata al 23 ottobre 2026 (revisione 4.1): metodologia, funzioni realizzate, novità, punti aperti di sviluppo e scelte ancora da prendere. Si rigenera a ogni rilascio insieme agli altri documenti ed è disponibile agli Amministratori nella pagina Documentazione del portale.</a:t>
+              <a:t>Presentazione di riepilogo del portale, aggiornata al 25 ottobre 2026 (revisione 4.2): metodologia, funzioni realizzate, novità, punti aperti di sviluppo e scelte ancora da prendere. Si rigenera a ogni rilascio insieme agli altri documenti ed è disponibile agli Amministratori nella pagina Documentazione del portale.</a:t>
             </a:r>
             <a:endParaRPr lang="en-US" dirty="0"/>
           </a:p>
@@ -662,7 +662,7 @@
           <a:p>
             <a:r>
               <a:rPr lang="en-US" dirty="0"/>
-              <a:t>Sezione Marketing, richiesta di Luca del 23 ottobre 2026, solo Amministratori. Banche dati: tutti i Comuni italiani (elenco ISTAT con abitanti, poi dall'Indice dei domicili digitali della PA, IndicePA, PEC, email generica, sito, sindaco e responsabili degli uffici tributi, ambiente, finanziario e tecnico) e i gestori iscritti all'Albo Nazionale Gestori Ambientali in categoria 1 ordinaria, sezione per sezione, con verifica sui siti delle attività di raccolta e di gestione della tariffa e dei referenti. Campagne: testo con grafica, invito a scoprire le risorse economiche per 7, 10 o 21 anni; per ogni campagna si scelgono i destinatari (Comuni e gestori, regioni, abitanti, attività); invio solo agli indirizzi email generici, mai alle PEC, con informativa e collegamento per non ricevere altre comunicazioni. Il pulsante «Approfondisci» porta alla pagina pubblica /scopri: il Comune inserisce abitanti, rifiuti totali e secco residuo, durata e listino e vede crediti, ricavi, costi e margine anno per anno con il motore del simulatore; può scaricare il fascicolo informativo e chiedere la registrazione, che arriva a tutti gli Amministratori. Prima degli invii reali: dominio email verificato su Resend e verifica legale delle comunicazioni promozionali via email.</a:t>
+              <a:t>Sezione Marketing, richiesta di Luca del 23 ottobre 2026, solo Amministratori. Banche dati: tutti i Comuni italiani (elenco ISTAT con abitanti, poi dall'Indice dei domicili digitali della PA, IndicePA, PEC, email generica, sito, sindaco e responsabili degli uffici tributi, ambiente, finanziario e tecnico) e i gestori iscritti all'Albo Nazionale Gestori Ambientali in categoria 1 ordinaria, sezione per sezione, con verifica sui siti delle attività di raccolta e di gestione della tariffa e dei referenti. Campagne: testo con grafica, invito a scoprire le risorse economiche per 7, 10 o 21 anni; per ogni campagna si scelgono i destinatari (Comuni e gestori, regioni, abitanti, attività); invio solo agli indirizzi email generici, mai alle PEC, con informativa e collegamento per non ricevere altre comunicazioni. Il pulsante «Approfondisci» porta alla pagina pubblica /scopri: il Comune inserisce abitanti, rifiuti totali e secco residuo, durata e listino e vede crediti, ricavi, costi e margine anno per anno con il motore del simulatore; può scaricare il fascicolo informativo e chiedere la registrazione, che arriva a tutti gli Amministratori. Dal 25 ottobre il portale legge da solo i siti di Comuni e gestori (contatti, uffici, amministrazione trasparente, organigramma) e completa email generica, PEC, telefono, uffici tributi e ambiente e amministratori, con la pagina di provenienza: regole fisse nel codice, nessun servizio a pagamento. Prima degli invii reali: dominio email verificato su Resend e verifica legale delle comunicazioni promozionali via email.</a:t>
             </a:r>
             <a:endParaRPr lang="en-US" dirty="0"/>
           </a:p>
@@ -1542,7 +1542,7 @@
           <a:p>
             <a:r>
               <a:rPr lang="en-US" dirty="0"/>
-              <a:t>Pagina «effetto sorpresa»: nessuno si aspetta che il portale sia già online. Il sistema è stato realizzato da Luca Moretti con l'ausilio di Claude Code ed è quasi terminato; i servizi sono già in produzione: GitHub (codice), Vercel (pubblicazione del portale), Supabase (database, utenti, documenti, funzioni) e Resend (email). Il portale è pubblicato su portale-cwp.vercel.app e funziona con dati di prova: si può aprire durante la presentazione (collegamento cliccabile) o inquadrare il codice QR con il telefono. La pagina pubblica /programma mostra già gli 8 documenti ufficiali del Programma, la Metodologia approvata, la PEC e il soggetto promotore. Lo sviluppo del portale vero è partito il 17 ottobre 2026: da allora sono state pubblicate 184 versioni, 44 script del database e 8 funzioni sul server. Restano i punti aperti delle prossime slide (servizi a pagamento, sicurezza, dati da inserire, collaudo con un Comune). Suggerimento: aprire il portale dal vivo con un utente di prova e mostrare la pagina pubblica.</a:t>
+              <a:t>Pagina «effetto sorpresa»: nessuno si aspetta che il portale sia già online. Il sistema è stato realizzato da Luca Moretti con l'ausilio di Claude Code ed è quasi terminato; i servizi sono già in produzione: GitHub (codice), Vercel (pubblicazione del portale), Supabase (database, utenti, documenti, funzioni) e Resend (email). Il portale è pubblicato su portale-cwp.vercel.app e funziona con dati di prova: si può aprire durante la presentazione (collegamento cliccabile) o inquadrare il codice QR con il telefono. La pagina pubblica /programma mostra già gli 8 documenti ufficiali del Programma, la Metodologia approvata, la PEC e il soggetto promotore. Lo sviluppo del portale vero è partito il 17 ottobre 2026: da allora sono state pubblicate 204 versioni, 46 script del database e 8 funzioni sul server. Restano i punti aperti delle prossime slide (servizi a pagamento, sicurezza, dati da inserire, collaudo con un Comune). Suggerimento: aprire il portale dal vivo con un utente di prova e mostrare la pagina pubblica.</a:t>
             </a:r>
             <a:endParaRPr lang="en-US" dirty="0"/>
           </a:p>
@@ -2253,7 +2253,7 @@
                   <a:schemeClr val="accent6"/>
                 </a:solidFill>
               </a:rPr>
-              <a:t>Portale Carbon WastePrint · Stato dei lavori e recap · 23 ottobre 2026 · rev. 4.1</a:t>
+              <a:t>Portale Carbon WastePrint · Stato dei lavori e recap · 25 ottobre 2026 · rev. 4.2</a:t>
             </a:r>
             <a:endParaRPr lang="en-US" sz="1000" dirty="0"/>
           </a:p>
@@ -2751,7 +2751,7 @@
                   <a:schemeClr val="accent3"/>
                 </a:solidFill>
               </a:rPr>
-              <a:t>Stato dei lavori e recap: metodologia, funzioni, novità, punti aperti e scelte da prendere · aggiornata al 23 ottobre 2026 · rev. 4.1</a:t>
+              <a:t>Stato dei lavori e recap: metodologia, funzioni, novità, punti aperti e scelte da prendere · aggiornata al 25 ottobre 2026 · rev. 4.2</a:t>
             </a:r>
             <a:endParaRPr lang="en-US" sz="1800" dirty="0"/>
           </a:p>
@@ -3079,6 +3079,40 @@
                 </a:solidFill>
               </a:rPr>
               <a:t>imprese dell'Albo Gestori Ambientali in categoria 1, con attività di raccolta e tariffa, PEC, email e referenti</a:t>
+            </a:r>
+            <a:endParaRPr lang="en-US" sz="1350" dirty="0"/>
+          </a:p>
+          <a:p>
+            <a:pPr indent="0" marL="0">
+              <a:spcAft>
+                <a:spcPts val="500"/>
+              </a:spcAft>
+              <a:buNone/>
+            </a:pPr>
+            <a:r>
+              <a:rPr lang="en-US" sz="1350" b="1" dirty="0">
+                <a:solidFill>
+                  <a:schemeClr val="tx2"/>
+                </a:solidFill>
+              </a:rPr>
+              <a:t>Lettura dei siti</a:t>
+            </a:r>
+            <a:endParaRPr lang="en-US" sz="1350" dirty="0"/>
+          </a:p>
+          <a:p>
+            <a:pPr indent="0" marL="0">
+              <a:spcAft>
+                <a:spcPts val="500"/>
+              </a:spcAft>
+              <a:buNone/>
+            </a:pPr>
+            <a:r>
+              <a:rPr lang="en-US" sz="1200" dirty="0">
+                <a:solidFill>
+                  <a:schemeClr val="tx1"/>
+                </a:solidFill>
+              </a:rPr>
+              <a:t>il portale legge da solo i siti di Comuni e gestori e completa recapiti e uffici, con la fonte (regole fisse, gratuito)</a:t>
             </a:r>
             <a:endParaRPr lang="en-US" sz="1350" dirty="0"/>
           </a:p>
@@ -14248,7 +14282,7 @@
                 <a:ea typeface="Cambria" pitchFamily="34" charset="-122"/>
                 <a:cs typeface="Cambria" pitchFamily="34" charset="-120"/>
               </a:rPr>
-              <a:t>44</a:t>
+              <a:t>46</a:t>
             </a:r>
             <a:endParaRPr lang="en-US" sz="3000" dirty="0"/>
           </a:p>
@@ -14554,7 +14588,7 @@
                 <a:ea typeface="Cambria" pitchFamily="34" charset="-122"/>
                 <a:cs typeface="Cambria" pitchFamily="34" charset="-120"/>
               </a:rPr>
-              <a:t>≈42.900</a:t>
+              <a:t>≈44.400</a:t>
             </a:r>
             <a:endParaRPr lang="en-US" sz="3000" dirty="0"/>
           </a:p>
@@ -15341,7 +15375,7 @@
                 <a:ea typeface="Cambria" pitchFamily="34" charset="-122"/>
                 <a:cs typeface="Cambria" pitchFamily="34" charset="-120"/>
               </a:rPr>
-              <a:t>184</a:t>
+              <a:t>204</a:t>
             </a:r>
             <a:endParaRPr lang="en-US" sz="2400" dirty="0"/>
           </a:p>
@@ -15394,7 +15428,7 @@
                 <a:ea typeface="Cambria" pitchFamily="34" charset="-122"/>
                 <a:cs typeface="Cambria" pitchFamily="34" charset="-120"/>
               </a:rPr>
-              <a:t>44</a:t>
+              <a:t>46</a:t>
             </a:r>
             <a:endParaRPr lang="en-US" sz="2400" dirty="0"/>
           </a:p>
@@ -15500,7 +15534,7 @@
                 <a:ea typeface="Cambria" pitchFamily="34" charset="-122"/>
                 <a:cs typeface="Cambria" pitchFamily="34" charset="-120"/>
               </a:rPr>
-              <a:t>≈42.900</a:t>
+              <a:t>≈44.400</a:t>
             </a:r>
             <a:endParaRPr lang="en-US" sz="2400" dirty="0"/>
           </a:p>

--- a/public/documentazione/Presentazione_Portale_CWP.pptx
+++ b/public/documentazione/Presentazione_Portale_CWP.pptx
@@ -21,9 +21,10 @@
     <p:sldId id="269" r:id="rId15"/>
     <p:sldId id="270" r:id="rId16"/>
     <p:sldId id="271" r:id="rId17"/>
+    <p:sldId id="272" r:id="rId18"/>
   </p:sldIdLst>
   <p:notesMasterIdLst>
-    <p:notesMasterId r:id="rId18"/>
+    <p:notesMasterId r:id="rId19"/>
   </p:notesMasterIdLst>
   <p:sldSz cx="12192000" cy="6858000"/>
   <p:notesSz cx="6858000" cy="12192000"/>
@@ -122,52 +123,53 @@
   <p:extLst>
     <p:ext uri="{521415D9-36F7-43E2-AB2F-B90AF26B5E84}">
       <p14:sectionLst xmlns:p14="http://schemas.microsoft.com/office/powerpoint/2010/main">
-        <p14:section name="Apertura" id="{ffc84a41-0759-46c6-cfb0-e646a4743456}">
+        <p14:section name="Apertura" id="{7da20ac0-d03a-a5c3-40b2-3ab2798de5aa}">
           <p14:sldIdLst>
             <p14:sldId id="256"/>
           </p14:sldIdLst>
         </p14:section>
-        <p14:section name="Metodologia" id="{86a7953c-9bf7-6359-6ae0-ac8f5fc69c79}">
+        <p14:section name="Metodologia" id="{8f98600f-1c8c-7b18-ba77-9121aa41e473}">
           <p14:sldIdLst>
             <p14:sldId id="257"/>
           </p14:sldIdLst>
         </p14:section>
-        <p14:section name="Analisi funzionale" id="{09b1036f-fe66-5ea3-4ca0-b6acbd336499}">
+        <p14:section name="Analisi funzionale" id="{140d3ef0-8407-bd94-3320-8a095b0aa0a2}">
           <p14:sldIdLst>
             <p14:sldId id="258"/>
             <p14:sldId id="259"/>
           </p14:sldIdLst>
         </p14:section>
-        <p14:section name="Già realtà" id="{2f735003-5174-9e82-df6c-e87b764d6476}">
+        <p14:section name="Già realtà" id="{f1b685e6-1c2d-4d4b-50c7-8bdb029bdbba}">
           <p14:sldIdLst>
             <p14:sldId id="260"/>
           </p14:sldIdLst>
         </p14:section>
-        <p14:section name="Architettura e ruoli" id="{c1337424-0e3b-529c-518d-b7e24061ef5b}">
+        <p14:section name="Architettura e ruoli" id="{8771927b-0f33-7a12-b483-b9293a00953a}">
           <p14:sldIdLst>
             <p14:sldId id="261"/>
             <p14:sldId id="262"/>
           </p14:sldIdLst>
         </p14:section>
-        <p14:section name="Novità" id="{0dbbb492-fb8f-ba6c-9932-e492b9995047}">
+        <p14:section name="Novità" id="{606f21dd-ff25-da0a-34bd-c57ef5f8ef71}">
           <p14:sldIdLst>
             <p14:sldId id="263"/>
             <p14:sldId id="264"/>
             <p14:sldId id="265"/>
+            <p14:sldId id="266"/>
           </p14:sldIdLst>
         </p14:section>
-        <p14:section name="Punti aperti" id="{f70e330d-7b20-31a9-631c-185d2e099f7b}">
+        <p14:section name="Punti aperti" id="{3becb8ee-9210-68fd-608b-cf965e01752b}">
           <p14:sldIdLst>
-            <p14:sldId id="266"/>
             <p14:sldId id="267"/>
             <p14:sldId id="268"/>
             <p14:sldId id="269"/>
             <p14:sldId id="270"/>
+            <p14:sldId id="271"/>
           </p14:sldIdLst>
         </p14:section>
-        <p14:section name="Scelte da prendere" id="{ab9ef203-faad-135c-47f6-2e14a39efa46}">
+        <p14:section name="Scelte da prendere" id="{50087bd3-b351-ed7b-97f1-696de3ce7ed0}">
           <p14:sldIdLst>
-            <p14:sldId id="271"/>
+            <p14:sldId id="272"/>
           </p14:sldIdLst>
         </p14:section>
       </p14:sectionLst>
@@ -574,7 +576,7 @@
           <a:p>
             <a:r>
               <a:rPr lang="en-US" dirty="0"/>
-              <a:t>Presentazione di riepilogo del portale, aggiornata al 25 ottobre 2026 (revisione 4.2): metodologia, funzioni realizzate, novità, punti aperti di sviluppo e scelte ancora da prendere. Si rigenera a ogni rilascio insieme agli altri documenti ed è disponibile agli Amministratori nella pagina Documentazione del portale.</a:t>
+              <a:t>Presentazione di riepilogo del portale, aggiornata al 26 ottobre 2026 (revisione 4.3): metodologia, funzioni realizzate, novità, punti aperti di sviluppo e scelte ancora da prendere. Si rigenera a ogni rilascio insieme agli altri documenti ed è disponibile agli Amministratori nella pagina Documentazione del portale.</a:t>
             </a:r>
             <a:endParaRPr lang="en-US" dirty="0"/>
           </a:p>
@@ -750,7 +752,7 @@
           <a:p>
             <a:r>
               <a:rPr lang="en-US" dirty="0"/>
-              <a:t>La parte funzionale dei requisiti del 15/09 è chiusa e dal 18/10 sera il portale segue anche i documenti ufficiali del Programma. Restano tre gruppi. 1) Requisiti tecnici e di sicurezza (sezioni 13-15 dei requisiti); il 19/10 sono stati fatti l'archivio di backup completo e le Istruzioni di ripristino, mancano le copie automatiche di database e file. 2) Avvio della piattaforma pubblica (Guida 3.7): la pagina /programma è attiva e pubblica già gli otto documenti ufficiali v1.2 (Guida, Definizioni, Normativa, Standard, Metodologia, Politica di reclamo, Schema tariffario, Gestione qualità dei dati) e la Metodologia approvata; la PEC del Programma per i reclami è operate@pec.it; vanno aggiunti gli enti di validazione e verifica e i registri riconosciuti e la modulistica quando disponibile. L'accesso con SPID, CIE o CNS (Guida 3.9) richiede l'adesione della Fondazione come fornitore di servizi (AgID o aggregatore accreditato): fino ad allora resta l'email confermata. 3) Qualità dei dati e completamenti: i controlli del documento Gestione della qualità dei dati sono nel calcolo (Tabella 3 dello Standard ±30% con motivazione obbligatoria, completezza, unicità, letture a buon fine, tempestività) e servono popolazione e cluster SOSE ufficiali di ogni Comune; poi privacy, accessibilità, collaudo con dati reali. L'assistente AI resta un supporto al back-office, come previsto dai requisiti (sezione 17). Da fare subito (19/10 sera). Azioni di Luca: ripubblicare le funzioni crea-utente e reimposta-password (email delle credenziali), rieseguire la funzione utente_mai_attivo dello script 30, verificare il dominio email su Resend, decidere se intestare alla Fondazione la fatturazione dell'assistente. Sviluppo: utenti online per l'amministratore principale, messaggi d'errore dell'assistente in italiano (proposta), stampa PDF del simulatore, sicurezza e piani a pagamento, collaudo con dati reali.</a:t>
+              <a:t>Novità del 25 e 26 ottobre 2026. Pratiche: un Rapporto di Monitoraggio si crea solo per un Progetto registrato, cioè con la fase 6 completata (script 45). Listino: ogni Progetto ha sempre il Caso 1 o il Caso 2 (script 47); i 5 Progetti esistenti sono passati a Caso 1 con la voce nell'audit e hanno gli abitanti, quindi la Dashboard mostra il valore dei progetti. Simulatore: scenari di stima per i 5 Comuni dei Progetti con i valori medi del cluster SOSE 4 della Tabella 3, perché sono Comuni di prova senza dati ISPRA; con il metodo bilancio del Comune i ricavi risultano inferiori al costo del Caso 1, da discutere con la Fondazione. Marketing: l'elenco dei Comuni senza filtri ora si carica subito (regole di accesso più veloci); il portale legge in automatico e gratis i siti di Comuni e gestori: nel primo giro 5.535 siti letti, 985 rifiutano i programmi automatici; 6.182 Comuni con email generica e 3.092 con l'email dell'ufficio tributi o ambiente. Per i gestori senza sito conosciuto il sito va prima trovato con una ricerca, a giri di circa 90 imprese.</a:t>
             </a:r>
             <a:endParaRPr lang="en-US" dirty="0"/>
           </a:p>
@@ -838,7 +840,7 @@
           <a:p>
             <a:r>
               <a:rPr lang="en-US" dirty="0"/>
-              <a:t>Due nuovi moduli entrano nel progetto e in tutti i documenti (Registro, backlog punti 37 e 21). Simulatore di scenari, richiesto da Luca il 19/10: per ogni Comune si creano più scenari; la durata si sceglie da un menu a tendina tra 7, 10 e 21 anni (Standard 4.3.8: periodo di 10 anni oppure 7 rinnovabili fino a 21); si acquisiscono i dati dell'anno base (popolazione, produzione totale e pro capite, raccolta differenziata, ripartizione per frazione, parametri del calcolo); per ogni anno si inseriscono gli obiettivi di produzione totale e pro capite e di secco residuo pro capite; il simulatore ricalcola la percentuale di differenziata e stima anno per anno i crediti che il Comune potrebbe generare, con due metodi: il bilancio del Comune (tutte le utenze insieme, il più prudente) e il metodo per utenza con le sole utenze virtuose e il buffer del Capitolo 7, lo stesso delle stime dell'Allegato A dei contratti EsaCom. È una stima ex ante utile a presentare il Programma ai Comuni: il modello semplificato va confermato dalla Fondazione. Assistente virtuale (prima versione del 19/10, attiva dallo stesso giorno): pulsante «✦ Assistente» per Amministratori e utenti degli enti; risponde in italiano solo dalla base di conoscenza (Manuale Utente e tariffe per gli enti, in più Manuale Amministratore e note sul calcolo per gli Amministratori), non vede le pratiche, non salva i testi, limite di 40 domande al giorno per utente. Funziona con Claude Haiku 5.5 tramite la funzione del server «assistente»; la base di conoscenza resta nella cache dei prompt, quindi una domanda costa di solito meno di un centesimo di dollaro. Funziona con una chiave della Claude Console, legata a un solo spazio di lavoro, inserita da Luca nei segreti di Supabase: l'uso API è fatturato a parte rispetto ai piani claude.ai; Luca ha collegato i crediti API mensili del piano Max e acquistato 100 dollari di crediti. Prova dal vivo del 19/10: risposte corrette su creazione utenti e costi del Caso 1. Passi successivi: Operatori e aiuto sulla singola pratica.</a:t>
+              <a:t>La parte funzionale dei requisiti del 15/09 è chiusa e dal 18/10 sera il portale segue anche i documenti ufficiali del Programma. Restano tre gruppi. 1) Requisiti tecnici e di sicurezza (sezioni 13-15 dei requisiti); il 19/10 sono stati fatti l'archivio di backup completo e le Istruzioni di ripristino, mancano le copie automatiche di database e file. 2) Avvio della piattaforma pubblica (Guida 3.7): la pagina /programma è attiva e pubblica già gli otto documenti ufficiali v1.2 (Guida, Definizioni, Normativa, Standard, Metodologia, Politica di reclamo, Schema tariffario, Gestione qualità dei dati) e la Metodologia approvata; la PEC del Programma per i reclami è operate@pec.it; vanno aggiunti gli enti di validazione e verifica e i registri riconosciuti e la modulistica quando disponibile. L'accesso con SPID, CIE o CNS (Guida 3.9) richiede l'adesione della Fondazione come fornitore di servizi (AgID o aggregatore accreditato): fino ad allora resta l'email confermata. 3) Qualità dei dati e completamenti: i controlli del documento Gestione della qualità dei dati sono nel calcolo (Tabella 3 dello Standard ±30% con motivazione obbligatoria, completezza, unicità, letture a buon fine, tempestività) e servono popolazione e cluster SOSE ufficiali di ogni Comune; poi privacy, accessibilità, collaudo con dati reali. L'assistente AI resta un supporto al back-office, come previsto dai requisiti (sezione 17). Da fare subito (19/10 sera). Azioni di Luca: ripubblicare le funzioni crea-utente e reimposta-password (email delle credenziali), rieseguire la funzione utente_mai_attivo dello script 30, verificare il dominio email su Resend, decidere se intestare alla Fondazione la fatturazione dell'assistente. Sviluppo: utenti online per l'amministratore principale, messaggi d'errore dell'assistente in italiano (proposta), stampa PDF del simulatore, sicurezza e piani a pagamento, collaudo con dati reali.</a:t>
             </a:r>
             <a:endParaRPr lang="en-US" dirty="0"/>
           </a:p>
@@ -926,7 +928,7 @@
           <a:p>
             <a:r>
               <a:rPr lang="en-US" dirty="0"/>
-              <a:t>Il simulatore è già nel portale (menu Simulatore, per Operatori e Amministratori) ed è conforme al modello CWP: scenario di riferimento dello Standard 4.8.1 (anno in cui il Comune ha raggiunto il 65% di differenziata oppure valori medi del cluster SOSE della Tabella 3 × popolazione ISPRA 2022), durata 7, 10 o 21 anni (Standard 4.3.8), stima ex ante a livello di Comune ammessa dalla Metodologia (Capitoli 6.1 e 6.2), fattori di emissione e formule della Metodologia v1.2, buffer. L'esempio usa dati di prova: un Comune di 12.500 abitanti del cluster 4 (riferimento 445 kg/ab, 78,7% di differenziata), oggi a 430 kg/ab con 90 kg/ab di secco, obiettivo al 2036 di 380 kg/ab e 50 kg/ab di secco. Il simulatore ricalcola ogni anno la differenziata (fino all'87%) e stima circa 11.500 tCO₂eq di crediti netti in 10 anni dopo un buffer del 20%. Da sapere: i crediti nascono dai rifiuti evitati rispetto al riferimento (qui 1 t in meno vale circa 2,7 tCO₂eq); spostare rifiuti dal secco alla differenziata a parità di totale non genera crediti. È una stima ex ante, non certificabile; il modello va confermato dalla Fondazione.</a:t>
+              <a:t>Due nuovi moduli entrano nel progetto e in tutti i documenti (Registro, backlog punti 37 e 21). Simulatore di scenari, richiesto da Luca il 19/10: per ogni Comune si creano più scenari; la durata si sceglie da un menu a tendina tra 7, 10 e 21 anni (Standard 4.3.8: periodo di 10 anni oppure 7 rinnovabili fino a 21); si acquisiscono i dati dell'anno base (popolazione, produzione totale e pro capite, raccolta differenziata, ripartizione per frazione, parametri del calcolo); per ogni anno si inseriscono gli obiettivi di produzione totale e pro capite e di secco residuo pro capite; il simulatore ricalcola la percentuale di differenziata e stima anno per anno i crediti che il Comune potrebbe generare, con due metodi: il bilancio del Comune (tutte le utenze insieme, il più prudente) e il metodo per utenza con le sole utenze virtuose e il buffer del Capitolo 7, lo stesso delle stime dell'Allegato A dei contratti EsaCom. È una stima ex ante utile a presentare il Programma ai Comuni: il modello semplificato va confermato dalla Fondazione. Assistente virtuale (prima versione del 19/10, attiva dallo stesso giorno): pulsante «✦ Assistente» per Amministratori e utenti degli enti; risponde in italiano solo dalla base di conoscenza (Manuale Utente e tariffe per gli enti, in più Manuale Amministratore e note sul calcolo per gli Amministratori), non vede le pratiche, non salva i testi, limite di 40 domande al giorno per utente. Funziona con Claude Haiku 5.5 tramite la funzione del server «assistente»; la base di conoscenza resta nella cache dei prompt, quindi una domanda costa di solito meno di un centesimo di dollaro. Funziona con una chiave della Claude Console, legata a un solo spazio di lavoro, inserita da Luca nei segreti di Supabase: l'uso API è fatturato a parte rispetto ai piani claude.ai; Luca ha collegato i crediti API mensili del piano Max e acquistato 100 dollari di crediti. Prova dal vivo del 19/10: risposte corrette su creazione utenti e costi del Caso 1. Passi successivi: Operatori e aiuto sulla singola pratica.</a:t>
             </a:r>
             <a:endParaRPr lang="en-US" dirty="0"/>
           </a:p>
@@ -1014,7 +1016,7 @@
           <a:p>
             <a:r>
               <a:rPr lang="en-US" dirty="0"/>
-              <a:t>Il simulatore stima anche la parte economica per il Comune o il gestore. Ricavi: crediti netti stimati per anno × valore del credito, digitato anno per anno (proposto 32 €). Costi: il simulatore chiede se usare il Caso 1 (progetto volontario) o il Caso 2 (progetto obbligatorio, per esempio da bando di gara di un Comune che ha inserito il CWP come metodo), con le tabelle «Costi per il Soggetto Promotore» di Fondazione Operate del 28/07/2026: sei voci (Progetto, Rapporto di Monitoraggio, registrazione del Progetto, dei crediti del Progetto, del Rapporto e dei crediti del Rapporto), costo per abitante per fascia di popolazione con interpolazione e arrotondamento per eccesso, minimo e massimo annuo, una tantum ammortizzati in 10 anni; validazione dell'ente esclusa. Esempio con i dati ISPRA 2021 di Bovisio-Masciago (16.735 abitanti), obiettivo 400 kg/ab e 50 kg/ab di secco al 2036, 32 € a credito. Con il metodo per utenza (solo utenze virtuose, secco e organico misurati, tariffa puntuale, variabilità tra utenze 30%, buffer 30%): 34.188 crediti netti in 10 anni (0,20 per abitante all'anno, nell'intervallo 0,19-0,23 dell'Allegato A EsaCom), ricavi 1.093.792 €; Caso 1 costi 162.330 € (9,70 € per abitante) e margine +931.463 €; Caso 2 costi 242.658 € e margine +851.135 €. Con il bilancio del Comune (il metodo più prudente): 6.707 crediti, ricavi 214.464 €, Caso 1 +52.134 € (rientro nel 2034), Caso 2 −28.193 €. La differenza viene soprattutto dal fatto che Bovisio ha già l'84% di differenziata: il secco delle utenze è molto sotto il riferimento al 65%. Il Caso 1 con 154.247 abitanti riproduce le cifre dei contratti tipo EsaCom. L'Allegato A indica 6,08 € per abitante di costo contro 5,36 delle tabelle: la differenza potrebbe essere l'ente di validazione e verifica. Stima indicativa, non un piano finanziario.</a:t>
+              <a:t>Il simulatore è già nel portale (menu Simulatore, per Operatori e Amministratori) ed è conforme al modello CWP: scenario di riferimento dello Standard 4.8.1 (anno in cui il Comune ha raggiunto il 65% di differenziata oppure valori medi del cluster SOSE della Tabella 3 × popolazione ISPRA 2022), durata 7, 10 o 21 anni (Standard 4.3.8), stima ex ante a livello di Comune ammessa dalla Metodologia (Capitoli 6.1 e 6.2), fattori di emissione e formule della Metodologia v1.2, buffer. L'esempio usa dati di prova: un Comune di 12.500 abitanti del cluster 4 (riferimento 445 kg/ab, 78,7% di differenziata), oggi a 430 kg/ab con 90 kg/ab di secco, obiettivo al 2036 di 380 kg/ab e 50 kg/ab di secco. Il simulatore ricalcola ogni anno la differenziata (fino all'87%) e stima circa 11.500 tCO₂eq di crediti netti in 10 anni dopo un buffer del 20%. Da sapere: i crediti nascono dai rifiuti evitati rispetto al riferimento (qui 1 t in meno vale circa 2,7 tCO₂eq); spostare rifiuti dal secco alla differenziata a parità di totale non genera crediti. È una stima ex ante, non certificabile; il modello va confermato dalla Fondazione.</a:t>
             </a:r>
             <a:endParaRPr lang="en-US" dirty="0"/>
           </a:p>
@@ -1102,7 +1104,7 @@
           <a:p>
             <a:r>
               <a:rPr lang="en-US" dirty="0"/>
-              <a:t>Oggi tutti i servizi sono sui piani gratuiti, che non vanno bene per l'esercizio (attenzione: le copie giornaliere di Supabase Pro non comprendono i file caricati, che si copiano a parte come spiegato nelle Istruzioni di ripristino): Vercel Hobby è solo per uso non commerciale, i progetti Supabase gratuiti non hanno backup e si sospendono dopo una settimana di inattività, Resend gratuito invia al massimo 100 email al giorno, e il repository GitHub è pubblico. Indispensabili (circa 74 dollari al mese): GitHub Team (4 dollari per utente) con un'organizzazione intestata alla Fondazione, repository privato e regole sul ramo main (revisione obbligatoria); Vercel Pro (20 dollari per utente, banda 1 TB, uso commerciale, controllo della spesa); Supabase Pro (25 dollari, comprende 10 dollari di calcolo Micro: backup giornalieri conservati 7 giorni, progetto mai sospeso, 8 GB di database, 100 GB di file, 100.000 utenti attivi al mese) più il passaggio al calcolo Small (15 dollari, 2 GB di memoria, differenza 5 dollari); Resend Pro (20 dollari, 50.000 email al mese, nessun limite giornaliero). Consigliati (circa 130 dollari in più): Point-in-Time Recovery di Supabase (100 dollari al mese, ripristino al minuto degli ultimi 7 giorni), ambiente di prova con branching Supabase (0,01344 dollari l'ora, circa 10 dollari al mese se sempre attivo), GitHub Secret Protection (19 dollari per committer attivo). Sentry Developer è gratuito (1 utente, 5.000 errori al mese). Il piano Supabase Team (599 dollari al mese, certificazioni SOC 2 e ISO 27001, backup 14 giorni) oggi non serve. A costo zero: verifica in due passaggi sugli account dei fornitori, chiavi solo nelle variabili d'ambiente, dominio operate.it per portale ed email (SPF, DKIM, DMARC).</a:t>
+              <a:t>Il simulatore stima anche la parte economica per il Comune o il gestore. Ricavi: crediti netti stimati per anno × valore del credito, digitato anno per anno (proposto 32 €). Costi: il simulatore chiede se usare il Caso 1 (progetto volontario) o il Caso 2 (progetto obbligatorio, per esempio da bando di gara di un Comune che ha inserito il CWP come metodo), con le tabelle «Costi per il Soggetto Promotore» di Fondazione Operate del 28/07/2026: sei voci (Progetto, Rapporto di Monitoraggio, registrazione del Progetto, dei crediti del Progetto, del Rapporto e dei crediti del Rapporto), costo per abitante per fascia di popolazione con interpolazione e arrotondamento per eccesso, minimo e massimo annuo, una tantum ammortizzati in 10 anni; validazione dell'ente esclusa. Esempio con i dati ISPRA 2021 di Bovisio-Masciago (16.735 abitanti), obiettivo 400 kg/ab e 50 kg/ab di secco al 2036, 32 € a credito. Con il metodo per utenza (solo utenze virtuose, secco e organico misurati, tariffa puntuale, variabilità tra utenze 30%, buffer 30%): 34.188 crediti netti in 10 anni (0,20 per abitante all'anno, nell'intervallo 0,19-0,23 dell'Allegato A EsaCom), ricavi 1.093.792 €; Caso 1 costi 162.330 € (9,70 € per abitante) e margine +931.463 €; Caso 2 costi 242.658 € e margine +851.135 €. Con il bilancio del Comune (il metodo più prudente): 6.707 crediti, ricavi 214.464 €, Caso 1 +52.134 € (rientro nel 2034), Caso 2 −28.193 €. La differenza viene soprattutto dal fatto che Bovisio ha già l'84% di differenziata: il secco delle utenze è molto sotto il riferimento al 65%. Il Caso 1 con 154.247 abitanti riproduce le cifre dei contratti tipo EsaCom. L'Allegato A indica 6,08 € per abitante di costo contro 5,36 delle tabelle: la differenza potrebbe essere l'ente di validazione e verifica. Stima indicativa, non un piano finanziario.</a:t>
             </a:r>
             <a:endParaRPr lang="en-US" dirty="0"/>
           </a:p>
@@ -1190,7 +1192,7 @@
           <a:p>
             <a:r>
               <a:rPr lang="en-US" dirty="0"/>
-              <a:t>Il 18 ottobre sera sono state prese e realizzate le scelte di allineamento ai documenti ufficiali: Rapporto a 7 fasi con feedback di 20 giorni (Guida 6.3.1), conservazione 12 anni (Guida 6.2.1 e 6.5.1), un solo account per Organizzazione con fino a 2 delegati (Guida 7.2), periodo di 10 anni o 7 rinnovabili (Standard 4.3.8), stati e ID della Guida, ritiro e rientro, un solo progetto per territorio, tariffe e sospensione fino al saldo, piattaforma pubblica, crediti emessi con registro esterno, reclami, qualità dei dati. Il ruolo di soggetto promotore del programma è definito: Wastelab ha conferito in esclusiva a Fondazione Operate la gestione commerciale e tecnologica (portale CWP). Restano aperte quelle in tabella. Lo Standard 4.14 chiede al promotore del progetto di conservare i documenti almeno 2 anni dopo la fine del progetto, i registri 5 anni dopo la vendita (Standard 6.3). Scelte prese prima (Registro, capitolo Decisioni): A (una nuova versione non fa ripartire il termine), B (errata corrige: ripartenza decisa caso per caso), D (commentatori esterni con email confermata, in attesa di SPID), durate modificabili dall'Admin, pagamenti visibili al Comune, chiusura manuale della pratica, documenti richiesti non bloccanti, audit leggibile dallo staff. Le scelte interpretative del calcolo sono sette (docs/crediti-cwp.md). Il 19 ottobre: più amministratori con uno principale protetto; qualificazione ACN valutata non necessaria (da confermare con un parere legale).</a:t>
+              <a:t>Oggi tutti i servizi sono sui piani gratuiti, che non vanno bene per l'esercizio (attenzione: le copie giornaliere di Supabase Pro non comprendono i file caricati, che si copiano a parte come spiegato nelle Istruzioni di ripristino): Vercel Hobby è solo per uso non commerciale, i progetti Supabase gratuiti non hanno backup e si sospendono dopo una settimana di inattività, Resend gratuito invia al massimo 100 email al giorno, e il repository GitHub è pubblico. Indispensabili (circa 74 dollari al mese): GitHub Team (4 dollari per utente) con un'organizzazione intestata alla Fondazione, repository privato e regole sul ramo main (revisione obbligatoria); Vercel Pro (20 dollari per utente, banda 1 TB, uso commerciale, controllo della spesa); Supabase Pro (25 dollari, comprende 10 dollari di calcolo Micro: backup giornalieri conservati 7 giorni, progetto mai sospeso, 8 GB di database, 100 GB di file, 100.000 utenti attivi al mese) più il passaggio al calcolo Small (15 dollari, 2 GB di memoria, differenza 5 dollari); Resend Pro (20 dollari, 50.000 email al mese, nessun limite giornaliero). Consigliati (circa 130 dollari in più): Point-in-Time Recovery di Supabase (100 dollari al mese, ripristino al minuto degli ultimi 7 giorni), ambiente di prova con branching Supabase (0,01344 dollari l'ora, circa 10 dollari al mese se sempre attivo), GitHub Secret Protection (19 dollari per committer attivo). Sentry Developer è gratuito (1 utente, 5.000 errori al mese). Il piano Supabase Team (599 dollari al mese, certificazioni SOC 2 e ISO 27001, backup 14 giorni) oggi non serve. A costo zero: verifica in due passaggi sugli account dei fornitori, chiavi solo nelle variabili d'ambiente, dominio operate.it per portale ed email (SPF, DKIM, DMARC).</a:t>
             </a:r>
             <a:endParaRPr lang="en-US" dirty="0"/>
           </a:p>
@@ -1214,6 +1216,94 @@
             <a:fld id="{F7021451-1387-4CA6-816F-3879F97B5CBC}" type="slidenum">
               <a:rPr lang="en-US"/>
               <a:t>16</a:t>
+            </a:fld>
+            <a:endParaRPr lang="en-US"/>
+          </a:p>
+        </p:txBody>
+      </p:sp>
+    </p:spTree>
+    <p:extLst>
+      <p:ext uri="{BB962C8B-B14F-4D97-AF65-F5344CB8AC3E}">
+        <p14:creationId xmlns:p14="http://schemas.microsoft.com/office/powerpoint/2010/main" val="1024086991"/>
+      </p:ext>
+    </p:extLst>
+  </p:cSld>
+  <p:clrMapOvr>
+    <a:masterClrMapping/>
+  </p:clrMapOvr>
+</p:notes>
+</file>
+
+<file path=ppt/notesSlides/notesSlide17.xml><?xml version="1.0" encoding="utf-8"?>
+<p:notes xmlns:a="http://schemas.openxmlformats.org/drawingml/2006/main" xmlns:r="http://schemas.openxmlformats.org/officeDocument/2006/relationships" xmlns:p="http://schemas.openxmlformats.org/presentationml/2006/main">
+  <p:cSld>
+    <p:spTree>
+      <p:nvGrpSpPr>
+        <p:cNvPr id="1" name=""/>
+        <p:cNvGrpSpPr/>
+        <p:nvPr/>
+      </p:nvGrpSpPr>
+      <p:grpSpPr>
+        <a:xfrm>
+          <a:off x="0" y="0"/>
+          <a:ext cx="0" cy="0"/>
+          <a:chOff x="0" y="0"/>
+          <a:chExt cx="0" cy="0"/>
+        </a:xfrm>
+      </p:grpSpPr>
+      <p:sp>
+        <p:nvSpPr>
+          <p:cNvPr id="2" name="Slide Image Placeholder 1"/>
+          <p:cNvSpPr>
+            <a:spLocks noGrp="1" noRot="1" noChangeAspect="1"/>
+          </p:cNvSpPr>
+          <p:nvPr>
+            <p:ph type="sldImg"/>
+          </p:nvPr>
+        </p:nvSpPr>
+        <p:spPr/>
+      </p:sp>
+      <p:sp>
+        <p:nvSpPr>
+          <p:cNvPr id="3" name="Notes Placeholder 2"/>
+          <p:cNvSpPr>
+            <a:spLocks noGrp="1"/>
+          </p:cNvSpPr>
+          <p:nvPr>
+            <p:ph type="body" idx="1"/>
+          </p:nvPr>
+        </p:nvSpPr>
+        <p:spPr/>
+        <p:txBody>
+          <a:bodyPr/>
+          <a:lstStyle/>
+          <a:p>
+            <a:r>
+              <a:rPr lang="en-US" dirty="0"/>
+              <a:t>Il 18 ottobre sera sono state prese e realizzate le scelte di allineamento ai documenti ufficiali: Rapporto a 7 fasi con feedback di 20 giorni (Guida 6.3.1), conservazione 12 anni (Guida 6.2.1 e 6.5.1), un solo account per Organizzazione con fino a 2 delegati (Guida 7.2), periodo di 10 anni o 7 rinnovabili (Standard 4.3.8), stati e ID della Guida, ritiro e rientro, un solo progetto per territorio, tariffe e sospensione fino al saldo, piattaforma pubblica, crediti emessi con registro esterno, reclami, qualità dei dati. Il ruolo di soggetto promotore del programma è definito: Wastelab ha conferito in esclusiva a Fondazione Operate la gestione commerciale e tecnologica (portale CWP). Restano aperte quelle in tabella. Lo Standard 4.14 chiede al promotore del progetto di conservare i documenti almeno 2 anni dopo la fine del progetto, i registri 5 anni dopo la vendita (Standard 6.3). Scelte prese prima (Registro, capitolo Decisioni): A (una nuova versione non fa ripartire il termine), B (errata corrige: ripartenza decisa caso per caso), D (commentatori esterni con email confermata, in attesa di SPID), durate modificabili dall'Admin, pagamenti visibili al Comune, chiusura manuale della pratica, documenti richiesti non bloccanti, audit leggibile dallo staff. Le scelte interpretative del calcolo sono sette (docs/crediti-cwp.md). Il 19 ottobre: più amministratori con uno principale protetto; qualificazione ACN valutata non necessaria (da confermare con un parere legale).</a:t>
+            </a:r>
+            <a:endParaRPr lang="en-US" dirty="0"/>
+          </a:p>
+        </p:txBody>
+      </p:sp>
+      <p:sp>
+        <p:nvSpPr>
+          <p:cNvPr id="4" name="Slide Number Placeholder 3"/>
+          <p:cNvSpPr>
+            <a:spLocks noGrp="1"/>
+          </p:cNvSpPr>
+          <p:nvPr>
+            <p:ph type="sldNum" sz="quarter" idx="10"/>
+          </p:nvPr>
+        </p:nvSpPr>
+        <p:spPr/>
+        <p:txBody>
+          <a:bodyPr/>
+          <a:lstStyle/>
+          <a:p>
+            <a:fld id="{F7021451-1387-4CA6-816F-3879F97B5CBC}" type="slidenum">
+              <a:rPr lang="en-US"/>
+              <a:t>17</a:t>
             </a:fld>
             <a:endParaRPr lang="en-US"/>
           </a:p>
@@ -1542,7 +1632,7 @@
           <a:p>
             <a:r>
               <a:rPr lang="en-US" dirty="0"/>
-              <a:t>Pagina «effetto sorpresa»: nessuno si aspetta che il portale sia già online. Il sistema è stato realizzato da Luca Moretti con l'ausilio di Claude Code ed è quasi terminato; i servizi sono già in produzione: GitHub (codice), Vercel (pubblicazione del portale), Supabase (database, utenti, documenti, funzioni) e Resend (email). Il portale è pubblicato su portale-cwp.vercel.app e funziona con dati di prova: si può aprire durante la presentazione (collegamento cliccabile) o inquadrare il codice QR con il telefono. La pagina pubblica /programma mostra già gli 8 documenti ufficiali del Programma, la Metodologia approvata, la PEC e il soggetto promotore. Lo sviluppo del portale vero è partito il 17 ottobre 2026: da allora sono state pubblicate 204 versioni, 46 script del database e 8 funzioni sul server. Restano i punti aperti delle prossime slide (servizi a pagamento, sicurezza, dati da inserire, collaudo con un Comune). Suggerimento: aprire il portale dal vivo con un utente di prova e mostrare la pagina pubblica.</a:t>
+              <a:t>Pagina «effetto sorpresa»: nessuno si aspetta che il portale sia già online. Il sistema è stato realizzato da Luca Moretti con l'ausilio di Claude Code ed è quasi terminato; i servizi sono già in produzione: GitHub (codice), Vercel (pubblicazione del portale), Supabase (database, utenti, documenti, funzioni) e Resend (email). Il portale è pubblicato su portale-cwp.vercel.app e funziona con dati di prova: si può aprire durante la presentazione (collegamento cliccabile) o inquadrare il codice QR con il telefono. La pagina pubblica /programma mostra già gli 8 documenti ufficiali del Programma, la Metodologia approvata, la PEC e il soggetto promotore. Lo sviluppo del portale vero è partito il 17 ottobre 2026: da allora sono state pubblicate 213 versioni, 47 script del database e 8 funzioni sul server. Restano i punti aperti delle prossime slide (servizi a pagamento, sicurezza, dati da inserire, collaudo con un Comune). Suggerimento: aprire il portale dal vivo con un utente di prova e mostrare la pagina pubblica.</a:t>
             </a:r>
             <a:endParaRPr lang="en-US" dirty="0"/>
           </a:p>
@@ -2253,7 +2343,7 @@
                   <a:schemeClr val="accent6"/>
                 </a:solidFill>
               </a:rPr>
-              <a:t>Portale Carbon WastePrint · Stato dei lavori e recap · 25 ottobre 2026 · rev. 4.2</a:t>
+              <a:t>Portale Carbon WastePrint · Stato dei lavori e recap · 26 ottobre 2026 · rev. 4.3</a:t>
             </a:r>
             <a:endParaRPr lang="en-US" sz="1000" dirty="0"/>
           </a:p>
@@ -2751,7 +2841,7 @@
                   <a:schemeClr val="accent3"/>
                 </a:solidFill>
               </a:rPr>
-              <a:t>Stato dei lavori e recap: metodologia, funzioni, novità, punti aperti e scelte da prendere · aggiornata al 25 ottobre 2026 · rev. 4.2</a:t>
+              <a:t>Stato dei lavori e recap: metodologia, funzioni, novità, punti aperti e scelte da prendere · aggiornata al 26 ottobre 2026 · rev. 4.3</a:t>
             </a:r>
             <a:endParaRPr lang="en-US" sz="1800" dirty="0"/>
           </a:p>
@@ -3291,7 +3381,7 @@
                 <a:ea typeface="Cambria" pitchFamily="34" charset="-122"/>
                 <a:cs typeface="Cambria" pitchFamily="34" charset="-120"/>
               </a:rPr>
-              <a:t>Punti aperti: sviluppo e servizi da attivare</a:t>
+              <a:t>Novità del 25 e 26 ottobre</a:t>
             </a:r>
             <a:endParaRPr lang="en-US" sz="3000" dirty="0"/>
           </a:p>
@@ -3299,18 +3389,109 @@
       </p:sp>
       <p:sp>
         <p:nvSpPr>
-          <p:cNvPr id="3" name="Colonna Sicurezza e infrastruttura"/>
+          <p:cNvPr id="3" name="Numero Comuni in banca dati"/>
           <p:cNvSpPr/>
           <p:nvPr/>
         </p:nvSpPr>
         <p:spPr>
           <a:xfrm>
-            <a:off x="548640" y="1325880"/>
-            <a:ext cx="3505200" cy="4846320"/>
+            <a:off x="548640" y="1188720"/>
+            <a:ext cx="2194560" cy="1417320"/>
           </a:xfrm>
           <a:prstGeom prst="roundRect">
             <a:avLst>
-              <a:gd name="adj" fmla="val 3130"/>
+              <a:gd name="adj" fmla="val 7742"/>
+            </a:avLst>
+          </a:prstGeom>
+          <a:solidFill>
+            <a:schemeClr val="accent3"/>
+          </a:solidFill>
+          <a:ln w="12700">
+            <a:solidFill>
+              <a:schemeClr val="accent3"/>
+            </a:solidFill>
+            <a:prstDash val="solid"/>
+          </a:ln>
+        </p:spPr>
+      </p:sp>
+      <p:sp>
+        <p:nvSpPr>
+          <p:cNvPr id="4" name="Text 2"/>
+          <p:cNvSpPr txBox="1"/>
+          <p:nvPr/>
+        </p:nvSpPr>
+        <p:spPr>
+          <a:xfrm>
+            <a:off x="685800" y="1188720"/>
+            <a:ext cx="1920240" cy="1417320"/>
+          </a:xfrm>
+          <a:prstGeom prst="rect">
+            <a:avLst/>
+          </a:prstGeom>
+          <a:noFill/>
+          <a:ln/>
+        </p:spPr>
+        <p:txBody>
+          <a:bodyPr wrap="square" lIns="0" tIns="0" rIns="0" bIns="0" rtlCol="0" anchor="ctr"/>
+          <a:lstStyle/>
+          <a:p>
+            <a:pPr indent="0" marL="0">
+              <a:buNone/>
+            </a:pPr>
+            <a:r>
+              <a:rPr lang="en-US" sz="2600" b="1" dirty="0">
+                <a:solidFill>
+                  <a:schemeClr val="tx2"/>
+                </a:solidFill>
+              </a:rPr>
+              <a:t>7.904</a:t>
+            </a:r>
+            <a:endParaRPr lang="en-US" sz="2600" dirty="0"/>
+          </a:p>
+          <a:p>
+            <a:pPr indent="0" marL="0">
+              <a:buNone/>
+            </a:pPr>
+            <a:r>
+              <a:rPr lang="en-US" sz="1200" b="1" dirty="0">
+                <a:solidFill>
+                  <a:schemeClr val="tx1"/>
+                </a:solidFill>
+              </a:rPr>
+              <a:t>Comuni in banca dati</a:t>
+            </a:r>
+            <a:endParaRPr lang="en-US" sz="2600" dirty="0"/>
+          </a:p>
+          <a:p>
+            <a:pPr indent="0" marL="0">
+              <a:buNone/>
+            </a:pPr>
+            <a:r>
+              <a:rPr lang="en-US" sz="1050" dirty="0">
+                <a:solidFill>
+                  <a:schemeClr val="tx1"/>
+                </a:solidFill>
+              </a:rPr>
+              <a:t>6.182 con email generica, 7.504 con PEC</a:t>
+            </a:r>
+            <a:endParaRPr lang="en-US" sz="2600" dirty="0"/>
+          </a:p>
+        </p:txBody>
+      </p:sp>
+      <p:sp>
+        <p:nvSpPr>
+          <p:cNvPr id="5" name="Numero Comuni con email tributi o ambiente"/>
+          <p:cNvSpPr/>
+          <p:nvPr/>
+        </p:nvSpPr>
+        <p:spPr>
+          <a:xfrm>
+            <a:off x="2926080" y="1188720"/>
+            <a:ext cx="2194560" cy="1417320"/>
+          </a:xfrm>
+          <a:prstGeom prst="roundRect">
+            <a:avLst>
+              <a:gd name="adj" fmla="val 7742"/>
             </a:avLst>
           </a:prstGeom>
           <a:solidFill>
@@ -3326,63 +3507,14 @@
       </p:sp>
       <p:sp>
         <p:nvSpPr>
-          <p:cNvPr id="4" name="Sicurezza e infrastruttura cerchio"/>
-          <p:cNvSpPr/>
-          <p:nvPr/>
-        </p:nvSpPr>
-        <p:spPr>
-          <a:xfrm>
-            <a:off x="777240" y="1554480"/>
-            <a:ext cx="548640" cy="548640"/>
-          </a:xfrm>
-          <a:prstGeom prst="ellipse">
-            <a:avLst/>
-          </a:prstGeom>
-          <a:solidFill>
-            <a:schemeClr val="tx2"/>
-          </a:solidFill>
-          <a:ln w="12700">
-            <a:solidFill>
-              <a:schemeClr val="tx2"/>
-            </a:solidFill>
-            <a:prstDash val="solid"/>
-          </a:ln>
-        </p:spPr>
-      </p:sp>
-      <p:pic>
-        <p:nvPicPr>
-          <p:cNvPr id="5" name="Sicurezza e infrastruttura icona" descr="preencoded.png">    </p:cNvPr>
-          <p:cNvPicPr>
-            <a:picLocks noChangeAspect="1"/>
-          </p:cNvPicPr>
-          <p:nvPr/>
-        </p:nvPicPr>
-        <p:blipFill>
-          <a:blip r:embed="rId1"/>
-          <a:stretch>
-            <a:fillRect/>
-          </a:stretch>
-        </p:blipFill>
-        <p:spPr>
-          <a:xfrm>
-            <a:off x="914400" y="1691640"/>
-            <a:ext cx="274320" cy="274320"/>
-          </a:xfrm>
-          <a:prstGeom prst="rect">
-            <a:avLst/>
-          </a:prstGeom>
-        </p:spPr>
-      </p:pic>
-      <p:sp>
-        <p:nvSpPr>
-          <p:cNvPr id="6" name="Text 3"/>
+          <p:cNvPr id="6" name="Text 4"/>
           <p:cNvSpPr txBox="1"/>
           <p:nvPr/>
         </p:nvSpPr>
         <p:spPr>
           <a:xfrm>
-            <a:off x="1463040" y="1508760"/>
-            <a:ext cx="2453640" cy="640080"/>
+            <a:off x="3063240" y="1188720"/>
+            <a:ext cx="1920240" cy="1417320"/>
           </a:xfrm>
           <a:prstGeom prst="rect">
             <a:avLst/>
@@ -3398,143 +3530,59 @@
               <a:buNone/>
             </a:pPr>
             <a:r>
-              <a:rPr lang="en-US" sz="1700" b="1" dirty="0">
+              <a:rPr lang="en-US" sz="2600" b="1" dirty="0">
                 <a:solidFill>
                   <a:schemeClr val="tx2"/>
                 </a:solidFill>
               </a:rPr>
-              <a:t>Sicurezza e infrastruttura</a:t>
-            </a:r>
-            <a:endParaRPr lang="en-US" sz="1700" dirty="0"/>
-          </a:p>
-        </p:txBody>
-      </p:sp>
-      <p:sp>
-        <p:nvSpPr>
-          <p:cNvPr id="7" name="Text 4"/>
-          <p:cNvSpPr txBox="1"/>
-          <p:nvPr/>
-        </p:nvSpPr>
-        <p:spPr>
-          <a:xfrm>
-            <a:off x="822960" y="2286000"/>
-            <a:ext cx="3048000" cy="3749040"/>
-          </a:xfrm>
-          <a:prstGeom prst="rect">
-            <a:avLst/>
-          </a:prstGeom>
-          <a:noFill/>
-          <a:ln/>
-        </p:spPr>
-        <p:txBody>
-          <a:bodyPr wrap="square" lIns="0" tIns="0" rIns="0" bIns="0" rtlCol="0" anchor="t"/>
-          <a:lstStyle/>
-          <a:p>
-            <a:pPr marL="342900" indent="-342900">
-              <a:spcAft>
-                <a:spcPts val="700"/>
-              </a:spcAft>
-              <a:buSzPct val="100000"/>
-              <a:buChar char="•"/>
-            </a:pPr>
-            <a:r>
-              <a:rPr lang="en-US" sz="1350" dirty="0">
+              <a:t>3.092</a:t>
+            </a:r>
+            <a:endParaRPr lang="en-US" sz="2600" dirty="0"/>
+          </a:p>
+          <a:p>
+            <a:pPr indent="0" marL="0">
+              <a:buNone/>
+            </a:pPr>
+            <a:r>
+              <a:rPr lang="en-US" sz="1200" b="1" dirty="0">
                 <a:solidFill>
                   <a:schemeClr val="tx1"/>
                 </a:solidFill>
               </a:rPr>
-              <a:t>Fatto il 20/10: registro degli accessi e avvisi di sicurezza, uscita per inattività, intestazioni del sito, librerie aggiornate (0 vulnerabilità)</a:t>
-            </a:r>
-            <a:endParaRPr lang="en-US" sz="1350" dirty="0"/>
-          </a:p>
-          <a:p>
-            <a:pPr marL="342900" indent="-342900">
-              <a:spcAft>
-                <a:spcPts val="700"/>
-              </a:spcAft>
-              <a:buSzPct val="100000"/>
-              <a:buChar char="•"/>
-            </a:pPr>
-            <a:r>
-              <a:rPr lang="en-US" sz="1350" dirty="0">
+              <a:t>Comuni con email tributi o ambiente</a:t>
+            </a:r>
+            <a:endParaRPr lang="en-US" sz="2600" dirty="0"/>
+          </a:p>
+          <a:p>
+            <a:pPr indent="0" marL="0">
+              <a:buNone/>
+            </a:pPr>
+            <a:r>
+              <a:rPr lang="en-US" sz="1050" dirty="0">
                 <a:solidFill>
                   <a:schemeClr val="tx1"/>
                 </a:solidFill>
               </a:rPr>
-              <a:t>Verifica in due passaggi per lo staff (pronta, spenta); CAPTCHA sulle pagine pubbliche</a:t>
-            </a:r>
-            <a:endParaRPr lang="en-US" sz="1350" dirty="0"/>
-          </a:p>
-          <a:p>
-            <a:pPr marL="342900" indent="-342900">
-              <a:spcAft>
-                <a:spcPts val="700"/>
-              </a:spcAft>
-              <a:buSzPct val="100000"/>
-              <a:buChar char="•"/>
-            </a:pPr>
-            <a:r>
-              <a:rPr lang="en-US" sz="1350" dirty="0">
-                <a:solidFill>
-                  <a:schemeClr val="tx1"/>
-                </a:solidFill>
-              </a:rPr>
-              <a:t>Antivirus sui file; verifica OWASP, test di intrusione a fine sviluppo</a:t>
-            </a:r>
-            <a:endParaRPr lang="en-US" sz="1350" dirty="0"/>
-          </a:p>
-          <a:p>
-            <a:pPr marL="342900" indent="-342900">
-              <a:spcAft>
-                <a:spcPts val="700"/>
-              </a:spcAft>
-              <a:buSzPct val="100000"/>
-              <a:buChar char="•"/>
-            </a:pPr>
-            <a:r>
-              <a:rPr lang="en-US" sz="1350" dirty="0">
-                <a:solidFill>
-                  <a:schemeClr val="tx1"/>
-                </a:solidFill>
-              </a:rPr>
-              <a:t>Backup automatico completo ogni giorno alle 20 dal Mac nella cartella Drive Cwp › backup (pronto, da installare sul Mac) e istruzioni di ripristino provate; da fare ambiente di prova e monitoraggio errori</a:t>
-            </a:r>
-            <a:endParaRPr lang="en-US" sz="1350" dirty="0"/>
-          </a:p>
-          <a:p>
-            <a:pPr marL="342900" indent="-342900">
-              <a:spcAft>
-                <a:spcPts val="700"/>
-              </a:spcAft>
-              <a:buSzPct val="100000"/>
-              <a:buChar char="•"/>
-            </a:pPr>
-            <a:r>
-              <a:rPr lang="en-US" sz="1350" dirty="0">
-                <a:solidFill>
-                  <a:schemeClr val="tx1"/>
-                </a:solidFill>
-              </a:rPr>
-              <a:t>Piani a pagamento e repository privato (slide «Piani a pagamento»); dominio email verificato, che serve anche alle email con le credenziali</a:t>
-            </a:r>
-            <a:endParaRPr lang="en-US" sz="1350" dirty="0"/>
-          </a:p>
-        </p:txBody>
-      </p:sp>
-      <p:sp>
-        <p:nvSpPr>
-          <p:cNvPr id="8" name="Colonna Avvio della piattaforma pubblica"/>
+              <a:t>lette dai siti, con la pagina di provenienza</a:t>
+            </a:r>
+            <a:endParaRPr lang="en-US" sz="2600" dirty="0"/>
+          </a:p>
+        </p:txBody>
+      </p:sp>
+      <p:sp>
+        <p:nvSpPr>
+          <p:cNvPr id="7" name="Numero siti letti in automatico"/>
           <p:cNvSpPr/>
           <p:nvPr/>
         </p:nvSpPr>
         <p:spPr>
           <a:xfrm>
-            <a:off x="4328160" y="1325880"/>
-            <a:ext cx="3505200" cy="4846320"/>
+            <a:off x="5303520" y="1188720"/>
+            <a:ext cx="2194560" cy="1417320"/>
           </a:xfrm>
           <a:prstGeom prst="roundRect">
             <a:avLst>
-              <a:gd name="adj" fmla="val 3130"/>
+              <a:gd name="adj" fmla="val 7742"/>
             </a:avLst>
           </a:prstGeom>
           <a:solidFill>
@@ -3550,63 +3598,14 @@
       </p:sp>
       <p:sp>
         <p:nvSpPr>
-          <p:cNvPr id="9" name="Avvio della piattaforma pubblica cerchio"/>
-          <p:cNvSpPr/>
-          <p:nvPr/>
-        </p:nvSpPr>
-        <p:spPr>
-          <a:xfrm>
-            <a:off x="4556760" y="1554480"/>
-            <a:ext cx="548640" cy="548640"/>
-          </a:xfrm>
-          <a:prstGeom prst="ellipse">
-            <a:avLst/>
-          </a:prstGeom>
-          <a:solidFill>
-            <a:schemeClr val="accent2"/>
-          </a:solidFill>
-          <a:ln w="12700">
-            <a:solidFill>
-              <a:schemeClr val="accent2"/>
-            </a:solidFill>
-            <a:prstDash val="solid"/>
-          </a:ln>
-        </p:spPr>
-      </p:sp>
-      <p:pic>
-        <p:nvPicPr>
-          <p:cNvPr id="10" name="Avvio della piattaforma pubblica icona" descr="preencoded.png">    </p:cNvPr>
-          <p:cNvPicPr>
-            <a:picLocks noChangeAspect="1"/>
-          </p:cNvPicPr>
-          <p:nvPr/>
-        </p:nvPicPr>
-        <p:blipFill>
-          <a:blip r:embed="rId2"/>
-          <a:stretch>
-            <a:fillRect/>
-          </a:stretch>
-        </p:blipFill>
-        <p:spPr>
-          <a:xfrm>
-            <a:off x="4693920" y="1691640"/>
-            <a:ext cx="274320" cy="274320"/>
-          </a:xfrm>
-          <a:prstGeom prst="rect">
-            <a:avLst/>
-          </a:prstGeom>
-        </p:spPr>
-      </p:pic>
-      <p:sp>
-        <p:nvSpPr>
-          <p:cNvPr id="11" name="Text 7"/>
+          <p:cNvPr id="8" name="Text 6"/>
           <p:cNvSpPr txBox="1"/>
           <p:nvPr/>
         </p:nvSpPr>
         <p:spPr>
           <a:xfrm>
-            <a:off x="5242560" y="1508760"/>
-            <a:ext cx="2453640" cy="640080"/>
+            <a:off x="5440680" y="1188720"/>
+            <a:ext cx="1920240" cy="1417320"/>
           </a:xfrm>
           <a:prstGeom prst="rect">
             <a:avLst/>
@@ -3622,143 +3621,59 @@
               <a:buNone/>
             </a:pPr>
             <a:r>
-              <a:rPr lang="en-US" sz="1700" b="1" dirty="0">
+              <a:rPr lang="en-US" sz="2600" b="1" dirty="0">
                 <a:solidFill>
                   <a:schemeClr val="tx2"/>
                 </a:solidFill>
               </a:rPr>
-              <a:t>Avvio della piattaforma pubblica</a:t>
-            </a:r>
-            <a:endParaRPr lang="en-US" sz="1700" dirty="0"/>
-          </a:p>
-        </p:txBody>
-      </p:sp>
-      <p:sp>
-        <p:nvSpPr>
-          <p:cNvPr id="12" name="Text 8"/>
-          <p:cNvSpPr txBox="1"/>
-          <p:nvPr/>
-        </p:nvSpPr>
-        <p:spPr>
-          <a:xfrm>
-            <a:off x="4602480" y="2286000"/>
-            <a:ext cx="3048000" cy="3749040"/>
-          </a:xfrm>
-          <a:prstGeom prst="rect">
-            <a:avLst/>
-          </a:prstGeom>
-          <a:noFill/>
-          <a:ln/>
-        </p:spPr>
-        <p:txBody>
-          <a:bodyPr wrap="square" lIns="0" tIns="0" rIns="0" bIns="0" rtlCol="0" anchor="t"/>
-          <a:lstStyle/>
-          <a:p>
-            <a:pPr marL="342900" indent="-342900">
-              <a:spcAft>
-                <a:spcPts val="700"/>
-              </a:spcAft>
-              <a:buSzPct val="100000"/>
-              <a:buChar char="•"/>
-            </a:pPr>
-            <a:r>
-              <a:rPr lang="en-US" sz="1350" dirty="0">
+              <a:t>5.535</a:t>
+            </a:r>
+            <a:endParaRPr lang="en-US" sz="2600" dirty="0"/>
+          </a:p>
+          <a:p>
+            <a:pPr indent="0" marL="0">
+              <a:buNone/>
+            </a:pPr>
+            <a:r>
+              <a:rPr lang="en-US" sz="1200" b="1" dirty="0">
                 <a:solidFill>
                   <a:schemeClr val="tx1"/>
                 </a:solidFill>
               </a:rPr>
-              <a:t>Pagina /programma attiva con gli 8 documenti ufficiali v1.2 e la Metodologia approvata</a:t>
-            </a:r>
-            <a:endParaRPr lang="en-US" sz="1350" dirty="0"/>
-          </a:p>
-          <a:p>
-            <a:pPr marL="342900" indent="-342900">
-              <a:spcAft>
-                <a:spcPts val="700"/>
-              </a:spcAft>
-              <a:buSzPct val="100000"/>
-              <a:buChar char="•"/>
-            </a:pPr>
-            <a:r>
-              <a:rPr lang="en-US" sz="1350" dirty="0">
+              <a:t>siti letti in automatico</a:t>
+            </a:r>
+            <a:endParaRPr lang="en-US" sz="2600" dirty="0"/>
+          </a:p>
+          <a:p>
+            <a:pPr indent="0" marL="0">
+              <a:buNone/>
+            </a:pPr>
+            <a:r>
+              <a:rPr lang="en-US" sz="1050" dirty="0">
                 <a:solidFill>
                   <a:schemeClr val="tx1"/>
                 </a:solidFill>
               </a:rPr>
-              <a:t>PEC del Programma per i reclami: operate@pec.it</a:t>
-            </a:r>
-            <a:endParaRPr lang="en-US" sz="1350" dirty="0"/>
-          </a:p>
-          <a:p>
-            <a:pPr marL="342900" indent="-342900">
-              <a:spcAft>
-                <a:spcPts val="700"/>
-              </a:spcAft>
-              <a:buSzPct val="100000"/>
-              <a:buChar char="•"/>
-            </a:pPr>
-            <a:r>
-              <a:rPr lang="en-US" sz="1350" dirty="0">
-                <a:solidFill>
-                  <a:schemeClr val="tx1"/>
-                </a:solidFill>
-              </a:rPr>
-              <a:t>Da inserire: enti di validazione e verifica e registri riconosciuti, modulistica</a:t>
-            </a:r>
-            <a:endParaRPr lang="en-US" sz="1350" dirty="0"/>
-          </a:p>
-          <a:p>
-            <a:pPr marL="342900" indent="-342900">
-              <a:spcAft>
-                <a:spcPts val="700"/>
-              </a:spcAft>
-              <a:buSzPct val="100000"/>
-              <a:buChar char="•"/>
-            </a:pPr>
-            <a:r>
-              <a:rPr lang="en-US" sz="1350" dirty="0">
-                <a:solidFill>
-                  <a:schemeClr val="tx1"/>
-                </a:solidFill>
-              </a:rPr>
-              <a:t>Accesso con SPID, CIE o CNS al feedback pubblico (adesione come fornitore di servizi)</a:t>
-            </a:r>
-            <a:endParaRPr lang="en-US" sz="1350" dirty="0"/>
-          </a:p>
-          <a:p>
-            <a:pPr marL="342900" indent="-342900">
-              <a:spcAft>
-                <a:spcPts val="700"/>
-              </a:spcAft>
-              <a:buSzPct val="100000"/>
-              <a:buChar char="•"/>
-            </a:pPr>
-            <a:r>
-              <a:rPr lang="en-US" sz="1350" dirty="0">
-                <a:solidFill>
-                  <a:schemeClr val="tx1"/>
-                </a:solidFill>
-              </a:rPr>
-              <a:t>Collaudo in corso con 5 Amministratori: correzioni dei rapporti V01 e V05 in produzione il 20-21/10; rilievi N01-N06 (22/10) corretti e in produzione; restano le regole metodologiche da confermare</a:t>
-            </a:r>
-            <a:endParaRPr lang="en-US" sz="1350" dirty="0"/>
-          </a:p>
-        </p:txBody>
-      </p:sp>
-      <p:sp>
-        <p:nvSpPr>
-          <p:cNvPr id="13" name="Colonna Qualità dei dati e completamenti"/>
+              <a:t>gratis; 985 rifiutano i programmi automatici</a:t>
+            </a:r>
+            <a:endParaRPr lang="en-US" sz="2600" dirty="0"/>
+          </a:p>
+        </p:txBody>
+      </p:sp>
+      <p:sp>
+        <p:nvSpPr>
+          <p:cNvPr id="9" name="Lettura dei siti"/>
           <p:cNvSpPr/>
           <p:nvPr/>
         </p:nvSpPr>
         <p:spPr>
           <a:xfrm>
-            <a:off x="8107680" y="1325880"/>
-            <a:ext cx="3505200" cy="4846320"/>
+            <a:off x="548640" y="2834640"/>
+            <a:ext cx="6949440" cy="2011680"/>
           </a:xfrm>
           <a:prstGeom prst="roundRect">
             <a:avLst>
-              <a:gd name="adj" fmla="val 3130"/>
+              <a:gd name="adj" fmla="val 5455"/>
             </a:avLst>
           </a:prstGeom>
           <a:solidFill>
@@ -3774,63 +3689,91 @@
       </p:sp>
       <p:sp>
         <p:nvSpPr>
-          <p:cNvPr id="14" name="Qualità dei dati e completamenti cerchio"/>
+          <p:cNvPr id="10" name="Text 8"/>
+          <p:cNvSpPr txBox="1"/>
+          <p:nvPr/>
+        </p:nvSpPr>
+        <p:spPr>
+          <a:xfrm>
+            <a:off x="731520" y="2926080"/>
+            <a:ext cx="6583680" cy="1828800"/>
+          </a:xfrm>
+          <a:prstGeom prst="rect">
+            <a:avLst/>
+          </a:prstGeom>
+          <a:noFill/>
+          <a:ln/>
+        </p:spPr>
+        <p:txBody>
+          <a:bodyPr wrap="square" lIns="0" tIns="0" rIns="0" bIns="0" rtlCol="0" anchor="t"/>
+          <a:lstStyle/>
+          <a:p>
+            <a:pPr indent="0" marL="0">
+              <a:buNone/>
+            </a:pPr>
+            <a:r>
+              <a:rPr lang="en-US" sz="1350" b="1" dirty="0">
+                <a:solidFill>
+                  <a:schemeClr val="tx2"/>
+                </a:solidFill>
+              </a:rPr>
+              <a:t>Lettura dei siti di Comuni e gestori</a:t>
+            </a:r>
+            <a:endParaRPr lang="en-US" sz="1350" dirty="0"/>
+          </a:p>
+          <a:p>
+            <a:pPr indent="0" marL="0">
+              <a:buNone/>
+            </a:pPr>
+            <a:r>
+              <a:rPr lang="en-US" sz="1250" dirty="0">
+                <a:solidFill>
+                  <a:schemeClr val="tx1"/>
+                </a:solidFill>
+              </a:rPr>
+              <a:t>Il portale legge da solo home page, contatti, uffici, amministrazione trasparente e organigramma (rispetta robots.txt, una pagina alla volta) e completa email generica, PEC, telefono, uffici tributi e ambiente con i responsabili, amministratori e direttori dei gestori. Regole fisse nel codice, nessun servizio a pagamento (scelta di Luca). Riempie solo i campi vuoti; ogni dato ha la pagina da cui è preso. Gestori: 166 imprese lombarde delle classi A-C verificate a mano; per i circa 5.650 gestori senza sito il sito va prima trovato.</a:t>
+            </a:r>
+            <a:endParaRPr lang="en-US" sz="1350" dirty="0"/>
+          </a:p>
+        </p:txBody>
+      </p:sp>
+      <p:sp>
+        <p:nvSpPr>
+          <p:cNvPr id="11" name="Elenco novità 25-26 ottobre"/>
           <p:cNvSpPr/>
           <p:nvPr/>
         </p:nvSpPr>
         <p:spPr>
           <a:xfrm>
-            <a:off x="8336280" y="1554480"/>
-            <a:ext cx="548640" cy="548640"/>
-          </a:xfrm>
-          <a:prstGeom prst="ellipse">
-            <a:avLst/>
+            <a:off x="7726680" y="1188720"/>
+            <a:ext cx="3886200" cy="5074920"/>
+          </a:xfrm>
+          <a:prstGeom prst="roundRect">
+            <a:avLst>
+              <a:gd name="adj" fmla="val 2824"/>
+            </a:avLst>
           </a:prstGeom>
           <a:solidFill>
-            <a:schemeClr val="tx2"/>
+            <a:schemeClr val="bg2"/>
           </a:solidFill>
           <a:ln w="12700">
             <a:solidFill>
-              <a:schemeClr val="tx2"/>
+              <a:schemeClr val="bg2"/>
             </a:solidFill>
             <a:prstDash val="solid"/>
           </a:ln>
         </p:spPr>
       </p:sp>
-      <p:pic>
-        <p:nvPicPr>
-          <p:cNvPr id="15" name="Qualità dei dati e completamenti icona" descr="preencoded.png">    </p:cNvPr>
-          <p:cNvPicPr>
-            <a:picLocks noChangeAspect="1"/>
-          </p:cNvPicPr>
-          <p:nvPr/>
-        </p:nvPicPr>
-        <p:blipFill>
-          <a:blip r:embed="rId3"/>
-          <a:stretch>
-            <a:fillRect/>
-          </a:stretch>
-        </p:blipFill>
-        <p:spPr>
-          <a:xfrm>
-            <a:off x="8473440" y="1691640"/>
-            <a:ext cx="274320" cy="274320"/>
-          </a:xfrm>
-          <a:prstGeom prst="rect">
-            <a:avLst/>
-          </a:prstGeom>
-        </p:spPr>
-      </p:pic>
-      <p:sp>
-        <p:nvSpPr>
-          <p:cNvPr id="16" name="Text 11"/>
+      <p:sp>
+        <p:nvSpPr>
+          <p:cNvPr id="12" name="Text 10"/>
           <p:cNvSpPr txBox="1"/>
           <p:nvPr/>
         </p:nvSpPr>
         <p:spPr>
           <a:xfrm>
-            <a:off x="9022080" y="1508760"/>
-            <a:ext cx="2453640" cy="640080"/>
+            <a:off x="7909560" y="1325880"/>
+            <a:ext cx="3566160" cy="4846320"/>
           </a:xfrm>
           <a:prstGeom prst="rect">
             <a:avLst/>
@@ -3839,131 +3782,141 @@
           <a:ln/>
         </p:spPr>
         <p:txBody>
-          <a:bodyPr wrap="square" lIns="0" tIns="0" rIns="0" bIns="0" rtlCol="0" anchor="ctr"/>
-          <a:lstStyle/>
-          <a:p>
-            <a:pPr indent="0" marL="0">
-              <a:buNone/>
-            </a:pPr>
-            <a:r>
-              <a:rPr lang="en-US" sz="1700" b="1" dirty="0">
+          <a:bodyPr wrap="square" lIns="0" tIns="0" rIns="0" bIns="0" rtlCol="0" anchor="t"/>
+          <a:lstStyle/>
+          <a:p>
+            <a:pPr indent="0" marL="0">
+              <a:spcAft>
+                <a:spcPts val="500"/>
+              </a:spcAft>
+              <a:buNone/>
+            </a:pPr>
+            <a:r>
+              <a:rPr lang="en-US" sz="1350" b="1" dirty="0">
                 <a:solidFill>
                   <a:schemeClr val="tx2"/>
                 </a:solidFill>
               </a:rPr>
-              <a:t>Qualità dei dati e completamenti</a:t>
-            </a:r>
-            <a:endParaRPr lang="en-US" sz="1700" dirty="0"/>
-          </a:p>
-        </p:txBody>
-      </p:sp>
-      <p:sp>
-        <p:nvSpPr>
-          <p:cNvPr id="17" name="Text 12"/>
-          <p:cNvSpPr txBox="1"/>
-          <p:nvPr/>
-        </p:nvSpPr>
-        <p:spPr>
-          <a:xfrm>
-            <a:off x="8382000" y="2286000"/>
-            <a:ext cx="3048000" cy="3749040"/>
-          </a:xfrm>
-          <a:prstGeom prst="rect">
-            <a:avLst/>
-          </a:prstGeom>
-          <a:noFill/>
-          <a:ln/>
-        </p:spPr>
-        <p:txBody>
-          <a:bodyPr wrap="square" lIns="0" tIns="0" rIns="0" bIns="0" rtlCol="0" anchor="t"/>
-          <a:lstStyle/>
-          <a:p>
-            <a:pPr marL="342900" indent="-342900">
+              <a:t>Pratiche</a:t>
+            </a:r>
+            <a:endParaRPr lang="en-US" sz="1350" dirty="0"/>
+          </a:p>
+          <a:p>
+            <a:pPr indent="0" marL="0">
               <a:spcAft>
-                <a:spcPts val="700"/>
+                <a:spcPts val="500"/>
               </a:spcAft>
-              <a:buSzPct val="100000"/>
-              <a:buChar char="•"/>
-            </a:pPr>
-            <a:r>
-              <a:rPr lang="en-US" sz="1350" dirty="0">
+              <a:buNone/>
+            </a:pPr>
+            <a:r>
+              <a:rPr lang="en-US" sz="1200" dirty="0">
                 <a:solidFill>
                   <a:schemeClr val="tx1"/>
                 </a:solidFill>
               </a:rPr>
-              <a:t>Dati ufficiali per i controlli: popolazione e cluster SOSE di ogni Comune</a:t>
+              <a:t>Rapporto di Monitoraggio solo per Progetti registrati (fase 6 completata)</a:t>
             </a:r>
             <a:endParaRPr lang="en-US" sz="1350" dirty="0"/>
           </a:p>
           <a:p>
-            <a:pPr marL="342900" indent="-342900">
+            <a:pPr indent="0" marL="0">
               <a:spcAft>
-                <a:spcPts val="700"/>
+                <a:spcPts val="500"/>
               </a:spcAft>
-              <a:buSzPct val="100000"/>
-              <a:buChar char="•"/>
-            </a:pPr>
-            <a:r>
-              <a:rPr lang="en-US" sz="1350" dirty="0">
+              <a:buNone/>
+            </a:pPr>
+            <a:r>
+              <a:rPr lang="en-US" sz="1350" b="1" dirty="0">
+                <a:solidFill>
+                  <a:schemeClr val="tx2"/>
+                </a:solidFill>
+              </a:rPr>
+              <a:t>Listino</a:t>
+            </a:r>
+            <a:endParaRPr lang="en-US" sz="1350" dirty="0"/>
+          </a:p>
+          <a:p>
+            <a:pPr indent="0" marL="0">
+              <a:spcAft>
+                <a:spcPts val="500"/>
+              </a:spcAft>
+              <a:buNone/>
+            </a:pPr>
+            <a:r>
+              <a:rPr lang="en-US" sz="1200" dirty="0">
                 <a:solidFill>
                   <a:schemeClr val="tx1"/>
                 </a:solidFill>
               </a:rPr>
-              <a:t>Conferma delle scelte interpretative del calcolo con l'ente</a:t>
+              <a:t>Caso 1 o Caso 2 obbligatorio per ogni Progetto; i 5 Progetti esistenti a Caso 1 con abitanti</a:t>
             </a:r>
             <a:endParaRPr lang="en-US" sz="1350" dirty="0"/>
           </a:p>
           <a:p>
-            <a:pPr marL="342900" indent="-342900">
+            <a:pPr indent="0" marL="0">
               <a:spcAft>
-                <a:spcPts val="700"/>
+                <a:spcPts val="500"/>
               </a:spcAft>
-              <a:buSzPct val="100000"/>
-              <a:buChar char="•"/>
-            </a:pPr>
-            <a:r>
-              <a:rPr lang="en-US" sz="1350" dirty="0">
+              <a:buNone/>
+            </a:pPr>
+            <a:r>
+              <a:rPr lang="en-US" sz="1350" b="1" dirty="0">
+                <a:solidFill>
+                  <a:schemeClr val="tx2"/>
+                </a:solidFill>
+              </a:rPr>
+              <a:t>Simulatore</a:t>
+            </a:r>
+            <a:endParaRPr lang="en-US" sz="1350" dirty="0"/>
+          </a:p>
+          <a:p>
+            <a:pPr indent="0" marL="0">
+              <a:spcAft>
+                <a:spcPts val="500"/>
+              </a:spcAft>
+              <a:buNone/>
+            </a:pPr>
+            <a:r>
+              <a:rPr lang="en-US" sz="1200" dirty="0">
                 <a:solidFill>
                   <a:schemeClr val="tx1"/>
                 </a:solidFill>
               </a:rPr>
-              <a:t>Privacy: DPIA, registro dei trattamenti; accessibilità WCAG 2.1 AA</a:t>
+              <a:t>scenari di stima per i 5 Comuni dei Progetti (cluster SOSE 4, Tabella 3)</a:t>
             </a:r>
             <a:endParaRPr lang="en-US" sz="1350" dirty="0"/>
           </a:p>
           <a:p>
-            <a:pPr marL="342900" indent="-342900">
+            <a:pPr indent="0" marL="0">
               <a:spcAft>
-                <a:spcPts val="700"/>
+                <a:spcPts val="500"/>
               </a:spcAft>
-              <a:buSzPct val="100000"/>
-              <a:buChar char="•"/>
-            </a:pPr>
-            <a:r>
-              <a:rPr lang="en-US" sz="1350" dirty="0">
+              <a:buNone/>
+            </a:pPr>
+            <a:r>
+              <a:rPr lang="en-US" sz="1350" b="1" dirty="0">
+                <a:solidFill>
+                  <a:schemeClr val="tx2"/>
+                </a:solidFill>
+              </a:rPr>
+              <a:t>Marketing</a:t>
+            </a:r>
+            <a:endParaRPr lang="en-US" sz="1350" dirty="0"/>
+          </a:p>
+          <a:p>
+            <a:pPr indent="0" marL="0">
+              <a:spcAft>
+                <a:spcPts val="500"/>
+              </a:spcAft>
+              <a:buNone/>
+            </a:pPr>
+            <a:r>
+              <a:rPr lang="en-US" sz="1200" dirty="0">
                 <a:solidFill>
                   <a:schemeClr val="tx1"/>
                 </a:solidFill>
               </a:rPr>
-              <a:t>Collaudo con i dati reali di un Comune</a:t>
-            </a:r>
-            <a:endParaRPr lang="en-US" sz="1350" dirty="0"/>
-          </a:p>
-          <a:p>
-            <a:pPr marL="342900" indent="-342900">
-              <a:spcAft>
-                <a:spcPts val="700"/>
-              </a:spcAft>
-              <a:buSzPct val="100000"/>
-              <a:buChar char="•"/>
-            </a:pPr>
-            <a:r>
-              <a:rPr lang="en-US" sz="1350" dirty="0">
-                <a:solidFill>
-                  <a:schemeClr val="tx1"/>
-                </a:solidFill>
-              </a:rPr>
-              <a:t>Nuovi moduli: simulatore con PDF ed Excel, assistente virtuale (poi Operatori e aiuto sulla pratica), Audit User e utenti online (fatti il 20/10); navigazione da smartphone (22/10); Banca Dati Utenze per utenza nel calcolo (22-23/10); valore dei crediti in Dashboard (23/10); Marketplaces da definire</a:t>
+              <a:t>elenco dei Comuni senza filtri veloce; lettura automatica dei siti</a:t>
             </a:r>
             <a:endParaRPr lang="en-US" sz="1350" dirty="0"/>
           </a:p>
@@ -4074,7 +4027,7 @@
                 <a:ea typeface="Cambria" pitchFamily="34" charset="-122"/>
                 <a:cs typeface="Cambria" pitchFamily="34" charset="-120"/>
               </a:rPr>
-              <a:t>Nuovi moduli: simulatore e assistente virtuale</a:t>
+              <a:t>Punti aperti: sviluppo e servizi da attivare</a:t>
             </a:r>
             <a:endParaRPr lang="en-US" sz="3000" dirty="0"/>
           </a:p>
@@ -4082,18 +4035,18 @@
       </p:sp>
       <p:sp>
         <p:nvSpPr>
-          <p:cNvPr id="3" name="Riquadro simulatore"/>
+          <p:cNvPr id="3" name="Colonna Sicurezza e infrastruttura"/>
           <p:cNvSpPr/>
           <p:nvPr/>
         </p:nvSpPr>
         <p:spPr>
           <a:xfrm>
-            <a:off x="548640" y="1234440"/>
-            <a:ext cx="7086600" cy="5029200"/>
+            <a:off x="548640" y="1325880"/>
+            <a:ext cx="3505200" cy="4846320"/>
           </a:xfrm>
           <a:prstGeom prst="roundRect">
             <a:avLst>
-              <a:gd name="adj" fmla="val 2182"/>
+              <a:gd name="adj" fmla="val 3130"/>
             </a:avLst>
           </a:prstGeom>
           <a:solidFill>
@@ -4109,13 +4062,237 @@
       </p:sp>
       <p:sp>
         <p:nvSpPr>
-          <p:cNvPr id="4" name="Simulatore cerchio"/>
+          <p:cNvPr id="4" name="Sicurezza e infrastruttura cerchio"/>
           <p:cNvSpPr/>
           <p:nvPr/>
         </p:nvSpPr>
         <p:spPr>
           <a:xfrm>
-            <a:off x="777240" y="1417320"/>
+            <a:off x="777240" y="1554480"/>
+            <a:ext cx="548640" cy="548640"/>
+          </a:xfrm>
+          <a:prstGeom prst="ellipse">
+            <a:avLst/>
+          </a:prstGeom>
+          <a:solidFill>
+            <a:schemeClr val="tx2"/>
+          </a:solidFill>
+          <a:ln w="12700">
+            <a:solidFill>
+              <a:schemeClr val="tx2"/>
+            </a:solidFill>
+            <a:prstDash val="solid"/>
+          </a:ln>
+        </p:spPr>
+      </p:sp>
+      <p:pic>
+        <p:nvPicPr>
+          <p:cNvPr id="5" name="Sicurezza e infrastruttura icona" descr="preencoded.png">    </p:cNvPr>
+          <p:cNvPicPr>
+            <a:picLocks noChangeAspect="1"/>
+          </p:cNvPicPr>
+          <p:nvPr/>
+        </p:nvPicPr>
+        <p:blipFill>
+          <a:blip r:embed="rId1"/>
+          <a:stretch>
+            <a:fillRect/>
+          </a:stretch>
+        </p:blipFill>
+        <p:spPr>
+          <a:xfrm>
+            <a:off x="914400" y="1691640"/>
+            <a:ext cx="274320" cy="274320"/>
+          </a:xfrm>
+          <a:prstGeom prst="rect">
+            <a:avLst/>
+          </a:prstGeom>
+        </p:spPr>
+      </p:pic>
+      <p:sp>
+        <p:nvSpPr>
+          <p:cNvPr id="6" name="Text 3"/>
+          <p:cNvSpPr txBox="1"/>
+          <p:nvPr/>
+        </p:nvSpPr>
+        <p:spPr>
+          <a:xfrm>
+            <a:off x="1463040" y="1508760"/>
+            <a:ext cx="2453640" cy="640080"/>
+          </a:xfrm>
+          <a:prstGeom prst="rect">
+            <a:avLst/>
+          </a:prstGeom>
+          <a:noFill/>
+          <a:ln/>
+        </p:spPr>
+        <p:txBody>
+          <a:bodyPr wrap="square" lIns="0" tIns="0" rIns="0" bIns="0" rtlCol="0" anchor="ctr"/>
+          <a:lstStyle/>
+          <a:p>
+            <a:pPr indent="0" marL="0">
+              <a:buNone/>
+            </a:pPr>
+            <a:r>
+              <a:rPr lang="en-US" sz="1700" b="1" dirty="0">
+                <a:solidFill>
+                  <a:schemeClr val="tx2"/>
+                </a:solidFill>
+              </a:rPr>
+              <a:t>Sicurezza e infrastruttura</a:t>
+            </a:r>
+            <a:endParaRPr lang="en-US" sz="1700" dirty="0"/>
+          </a:p>
+        </p:txBody>
+      </p:sp>
+      <p:sp>
+        <p:nvSpPr>
+          <p:cNvPr id="7" name="Text 4"/>
+          <p:cNvSpPr txBox="1"/>
+          <p:nvPr/>
+        </p:nvSpPr>
+        <p:spPr>
+          <a:xfrm>
+            <a:off x="822960" y="2286000"/>
+            <a:ext cx="3048000" cy="3749040"/>
+          </a:xfrm>
+          <a:prstGeom prst="rect">
+            <a:avLst/>
+          </a:prstGeom>
+          <a:noFill/>
+          <a:ln/>
+        </p:spPr>
+        <p:txBody>
+          <a:bodyPr wrap="square" lIns="0" tIns="0" rIns="0" bIns="0" rtlCol="0" anchor="t"/>
+          <a:lstStyle/>
+          <a:p>
+            <a:pPr marL="342900" indent="-342900">
+              <a:spcAft>
+                <a:spcPts val="700"/>
+              </a:spcAft>
+              <a:buSzPct val="100000"/>
+              <a:buChar char="•"/>
+            </a:pPr>
+            <a:r>
+              <a:rPr lang="en-US" sz="1350" dirty="0">
+                <a:solidFill>
+                  <a:schemeClr val="tx1"/>
+                </a:solidFill>
+              </a:rPr>
+              <a:t>Fatto il 20/10: registro degli accessi e avvisi di sicurezza, uscita per inattività, intestazioni del sito, librerie aggiornate (0 vulnerabilità)</a:t>
+            </a:r>
+            <a:endParaRPr lang="en-US" sz="1350" dirty="0"/>
+          </a:p>
+          <a:p>
+            <a:pPr marL="342900" indent="-342900">
+              <a:spcAft>
+                <a:spcPts val="700"/>
+              </a:spcAft>
+              <a:buSzPct val="100000"/>
+              <a:buChar char="•"/>
+            </a:pPr>
+            <a:r>
+              <a:rPr lang="en-US" sz="1350" dirty="0">
+                <a:solidFill>
+                  <a:schemeClr val="tx1"/>
+                </a:solidFill>
+              </a:rPr>
+              <a:t>Verifica in due passaggi per lo staff (pronta, spenta); CAPTCHA sulle pagine pubbliche</a:t>
+            </a:r>
+            <a:endParaRPr lang="en-US" sz="1350" dirty="0"/>
+          </a:p>
+          <a:p>
+            <a:pPr marL="342900" indent="-342900">
+              <a:spcAft>
+                <a:spcPts val="700"/>
+              </a:spcAft>
+              <a:buSzPct val="100000"/>
+              <a:buChar char="•"/>
+            </a:pPr>
+            <a:r>
+              <a:rPr lang="en-US" sz="1350" dirty="0">
+                <a:solidFill>
+                  <a:schemeClr val="tx1"/>
+                </a:solidFill>
+              </a:rPr>
+              <a:t>Antivirus sui file; verifica OWASP, test di intrusione a fine sviluppo</a:t>
+            </a:r>
+            <a:endParaRPr lang="en-US" sz="1350" dirty="0"/>
+          </a:p>
+          <a:p>
+            <a:pPr marL="342900" indent="-342900">
+              <a:spcAft>
+                <a:spcPts val="700"/>
+              </a:spcAft>
+              <a:buSzPct val="100000"/>
+              <a:buChar char="•"/>
+            </a:pPr>
+            <a:r>
+              <a:rPr lang="en-US" sz="1350" dirty="0">
+                <a:solidFill>
+                  <a:schemeClr val="tx1"/>
+                </a:solidFill>
+              </a:rPr>
+              <a:t>Backup automatico completo ogni giorno alle 20 dal Mac nella cartella Drive Cwp › backup (pronto, da installare sul Mac) e istruzioni di ripristino provate; da fare ambiente di prova e monitoraggio errori</a:t>
+            </a:r>
+            <a:endParaRPr lang="en-US" sz="1350" dirty="0"/>
+          </a:p>
+          <a:p>
+            <a:pPr marL="342900" indent="-342900">
+              <a:spcAft>
+                <a:spcPts val="700"/>
+              </a:spcAft>
+              <a:buSzPct val="100000"/>
+              <a:buChar char="•"/>
+            </a:pPr>
+            <a:r>
+              <a:rPr lang="en-US" sz="1350" dirty="0">
+                <a:solidFill>
+                  <a:schemeClr val="tx1"/>
+                </a:solidFill>
+              </a:rPr>
+              <a:t>Piani a pagamento e repository privato (slide «Piani a pagamento»); dominio email verificato, che serve anche alle email con le credenziali</a:t>
+            </a:r>
+            <a:endParaRPr lang="en-US" sz="1350" dirty="0"/>
+          </a:p>
+        </p:txBody>
+      </p:sp>
+      <p:sp>
+        <p:nvSpPr>
+          <p:cNvPr id="8" name="Colonna Avvio della piattaforma pubblica"/>
+          <p:cNvSpPr/>
+          <p:nvPr/>
+        </p:nvSpPr>
+        <p:spPr>
+          <a:xfrm>
+            <a:off x="4328160" y="1325880"/>
+            <a:ext cx="3505200" cy="4846320"/>
+          </a:xfrm>
+          <a:prstGeom prst="roundRect">
+            <a:avLst>
+              <a:gd name="adj" fmla="val 3130"/>
+            </a:avLst>
+          </a:prstGeom>
+          <a:solidFill>
+            <a:schemeClr val="bg2"/>
+          </a:solidFill>
+          <a:ln w="12700">
+            <a:solidFill>
+              <a:schemeClr val="bg2"/>
+            </a:solidFill>
+            <a:prstDash val="solid"/>
+          </a:ln>
+        </p:spPr>
+      </p:sp>
+      <p:sp>
+        <p:nvSpPr>
+          <p:cNvPr id="9" name="Avvio della piattaforma pubblica cerchio"/>
+          <p:cNvSpPr/>
+          <p:nvPr/>
+        </p:nvSpPr>
+        <p:spPr>
+          <a:xfrm>
+            <a:off x="4556760" y="1554480"/>
             <a:ext cx="548640" cy="548640"/>
           </a:xfrm>
           <a:prstGeom prst="ellipse">
@@ -4134,21 +4311,21 @@
       </p:sp>
       <p:pic>
         <p:nvPicPr>
-          <p:cNvPr id="5" name="Simulatore icona" descr="preencoded.png">    </p:cNvPr>
+          <p:cNvPr id="10" name="Avvio della piattaforma pubblica icona" descr="preencoded.png">    </p:cNvPr>
           <p:cNvPicPr>
             <a:picLocks noChangeAspect="1"/>
           </p:cNvPicPr>
           <p:nvPr/>
         </p:nvPicPr>
         <p:blipFill>
-          <a:blip r:embed="rId1"/>
+          <a:blip r:embed="rId2"/>
           <a:stretch>
             <a:fillRect/>
           </a:stretch>
         </p:blipFill>
         <p:spPr>
           <a:xfrm>
-            <a:off x="914400" y="1554480"/>
+            <a:off x="4693920" y="1691640"/>
             <a:ext cx="274320" cy="274320"/>
           </a:xfrm>
           <a:prstGeom prst="rect">
@@ -4158,14 +4335,14 @@
       </p:pic>
       <p:sp>
         <p:nvSpPr>
-          <p:cNvPr id="6" name="Text 3"/>
+          <p:cNvPr id="11" name="Text 7"/>
           <p:cNvSpPr txBox="1"/>
           <p:nvPr/>
         </p:nvSpPr>
         <p:spPr>
           <a:xfrm>
-            <a:off x="1463040" y="1371600"/>
-            <a:ext cx="3840480" cy="365760"/>
+            <a:off x="5242560" y="1508760"/>
+            <a:ext cx="2453640" cy="640080"/>
           </a:xfrm>
           <a:prstGeom prst="rect">
             <a:avLst/>
@@ -4181,27 +4358,27 @@
               <a:buNone/>
             </a:pPr>
             <a:r>
-              <a:rPr lang="en-US" sz="1800" b="1" dirty="0">
+              <a:rPr lang="en-US" sz="1700" b="1" dirty="0">
                 <a:solidFill>
                   <a:schemeClr val="tx2"/>
                 </a:solidFill>
               </a:rPr>
-              <a:t>Simulatore di scenari</a:t>
-            </a:r>
-            <a:endParaRPr lang="en-US" sz="1800" dirty="0"/>
-          </a:p>
-        </p:txBody>
-      </p:sp>
-      <p:sp>
-        <p:nvSpPr>
-          <p:cNvPr id="7" name="Text 4"/>
+              <a:t>Avvio della piattaforma pubblica</a:t>
+            </a:r>
+            <a:endParaRPr lang="en-US" sz="1700" dirty="0"/>
+          </a:p>
+        </p:txBody>
+      </p:sp>
+      <p:sp>
+        <p:nvSpPr>
+          <p:cNvPr id="12" name="Text 8"/>
           <p:cNvSpPr txBox="1"/>
           <p:nvPr/>
         </p:nvSpPr>
         <p:spPr>
           <a:xfrm>
-            <a:off x="1463040" y="1737360"/>
-            <a:ext cx="3931920" cy="457200"/>
+            <a:off x="4602480" y="2286000"/>
+            <a:ext cx="3048000" cy="3749040"/>
           </a:xfrm>
           <a:prstGeom prst="rect">
             <a:avLst/>
@@ -4210,46 +4387,122 @@
           <a:ln/>
         </p:spPr>
         <p:txBody>
-          <a:bodyPr wrap="square" lIns="0" tIns="0" rIns="0" bIns="0" rtlCol="0" anchor="ctr"/>
-          <a:lstStyle/>
-          <a:p>
-            <a:pPr indent="0" marL="0">
-              <a:buNone/>
-            </a:pPr>
-            <a:r>
-              <a:rPr lang="en-US" sz="1200" dirty="0">
-                <a:solidFill>
-                  <a:schemeClr val="accent6"/>
-                </a:solidFill>
-              </a:rPr>
-              <a:t>Quanti crediti potrebbe generare un Comune? Una stima anno per anno, prima di aderire.</a:t>
-            </a:r>
-            <a:endParaRPr lang="en-US" sz="1200" dirty="0"/>
-          </a:p>
-        </p:txBody>
-      </p:sp>
-      <p:sp>
-        <p:nvSpPr>
-          <p:cNvPr id="8" name="Badge online"/>
+          <a:bodyPr wrap="square" lIns="0" tIns="0" rIns="0" bIns="0" rtlCol="0" anchor="t"/>
+          <a:lstStyle/>
+          <a:p>
+            <a:pPr marL="342900" indent="-342900">
+              <a:spcAft>
+                <a:spcPts val="700"/>
+              </a:spcAft>
+              <a:buSzPct val="100000"/>
+              <a:buChar char="•"/>
+            </a:pPr>
+            <a:r>
+              <a:rPr lang="en-US" sz="1350" dirty="0">
+                <a:solidFill>
+                  <a:schemeClr val="tx1"/>
+                </a:solidFill>
+              </a:rPr>
+              <a:t>Pagina /programma attiva con gli 8 documenti ufficiali v1.2 e la Metodologia approvata</a:t>
+            </a:r>
+            <a:endParaRPr lang="en-US" sz="1350" dirty="0"/>
+          </a:p>
+          <a:p>
+            <a:pPr marL="342900" indent="-342900">
+              <a:spcAft>
+                <a:spcPts val="700"/>
+              </a:spcAft>
+              <a:buSzPct val="100000"/>
+              <a:buChar char="•"/>
+            </a:pPr>
+            <a:r>
+              <a:rPr lang="en-US" sz="1350" dirty="0">
+                <a:solidFill>
+                  <a:schemeClr val="tx1"/>
+                </a:solidFill>
+              </a:rPr>
+              <a:t>PEC del Programma per i reclami: operate@pec.it</a:t>
+            </a:r>
+            <a:endParaRPr lang="en-US" sz="1350" dirty="0"/>
+          </a:p>
+          <a:p>
+            <a:pPr marL="342900" indent="-342900">
+              <a:spcAft>
+                <a:spcPts val="700"/>
+              </a:spcAft>
+              <a:buSzPct val="100000"/>
+              <a:buChar char="•"/>
+            </a:pPr>
+            <a:r>
+              <a:rPr lang="en-US" sz="1350" dirty="0">
+                <a:solidFill>
+                  <a:schemeClr val="tx1"/>
+                </a:solidFill>
+              </a:rPr>
+              <a:t>Da inserire: enti di validazione e verifica e registri riconosciuti, modulistica</a:t>
+            </a:r>
+            <a:endParaRPr lang="en-US" sz="1350" dirty="0"/>
+          </a:p>
+          <a:p>
+            <a:pPr marL="342900" indent="-342900">
+              <a:spcAft>
+                <a:spcPts val="700"/>
+              </a:spcAft>
+              <a:buSzPct val="100000"/>
+              <a:buChar char="•"/>
+            </a:pPr>
+            <a:r>
+              <a:rPr lang="en-US" sz="1350" dirty="0">
+                <a:solidFill>
+                  <a:schemeClr val="tx1"/>
+                </a:solidFill>
+              </a:rPr>
+              <a:t>Accesso con SPID, CIE o CNS al feedback pubblico (adesione come fornitore di servizi)</a:t>
+            </a:r>
+            <a:endParaRPr lang="en-US" sz="1350" dirty="0"/>
+          </a:p>
+          <a:p>
+            <a:pPr marL="342900" indent="-342900">
+              <a:spcAft>
+                <a:spcPts val="700"/>
+              </a:spcAft>
+              <a:buSzPct val="100000"/>
+              <a:buChar char="•"/>
+            </a:pPr>
+            <a:r>
+              <a:rPr lang="en-US" sz="1350" dirty="0">
+                <a:solidFill>
+                  <a:schemeClr val="tx1"/>
+                </a:solidFill>
+              </a:rPr>
+              <a:t>Collaudo in corso con 5 Amministratori: correzioni dei rapporti V01 e V05 in produzione il 20-21/10; rilievi N01-N06 (22/10) corretti e in produzione; restano le regole metodologiche da confermare</a:t>
+            </a:r>
+            <a:endParaRPr lang="en-US" sz="1350" dirty="0"/>
+          </a:p>
+        </p:txBody>
+      </p:sp>
+      <p:sp>
+        <p:nvSpPr>
+          <p:cNvPr id="13" name="Colonna Qualità dei dati e completamenti"/>
           <p:cNvSpPr/>
           <p:nvPr/>
         </p:nvSpPr>
         <p:spPr>
           <a:xfrm>
-            <a:off x="1463040" y="2212848"/>
-            <a:ext cx="2148840" cy="274320"/>
+            <a:off x="8107680" y="1325880"/>
+            <a:ext cx="3505200" cy="4846320"/>
           </a:xfrm>
           <a:prstGeom prst="roundRect">
             <a:avLst>
-              <a:gd name="adj" fmla="val 50000"/>
+              <a:gd name="adj" fmla="val 3130"/>
             </a:avLst>
           </a:prstGeom>
           <a:solidFill>
-            <a:schemeClr val="accent2"/>
+            <a:schemeClr val="bg2"/>
           </a:solidFill>
           <a:ln w="12700">
             <a:solidFill>
-              <a:schemeClr val="accent2"/>
+              <a:schemeClr val="bg2"/>
             </a:solidFill>
             <a:prstDash val="solid"/>
           </a:ln>
@@ -4257,185 +4510,14 @@
       </p:sp>
       <p:sp>
         <p:nvSpPr>
-          <p:cNvPr id="9" name="Text 6"/>
-          <p:cNvSpPr txBox="1"/>
-          <p:nvPr/>
-        </p:nvSpPr>
-        <p:spPr>
-          <a:xfrm>
-            <a:off x="1463040" y="2212848"/>
-            <a:ext cx="2148840" cy="274320"/>
-          </a:xfrm>
-          <a:prstGeom prst="rect">
-            <a:avLst/>
-          </a:prstGeom>
-          <a:noFill/>
-          <a:ln/>
-        </p:spPr>
-        <p:txBody>
-          <a:bodyPr wrap="square" lIns="0" tIns="0" rIns="0" bIns="0" rtlCol="0" anchor="ctr"/>
-          <a:lstStyle/>
-          <a:p>
-            <a:pPr algn="ctr" indent="0" marL="0">
-              <a:buNone/>
-            </a:pPr>
-            <a:r>
-              <a:rPr lang="en-US" sz="1000" b="1" spc="100" kern="0" dirty="0">
-                <a:solidFill>
-                  <a:schemeClr val="bg1"/>
-                </a:solidFill>
-              </a:rPr>
-              <a:t>PRIMA VERSIONE ONLINE</a:t>
-            </a:r>
-            <a:endParaRPr lang="en-US" sz="1000" dirty="0"/>
-          </a:p>
-        </p:txBody>
-      </p:sp>
-      <p:sp>
-        <p:nvSpPr>
-          <p:cNvPr id="10" name="Menu durata"/>
+          <p:cNvPr id="14" name="Qualità dei dati e completamenti cerchio"/>
           <p:cNvSpPr/>
           <p:nvPr/>
         </p:nvSpPr>
         <p:spPr>
           <a:xfrm>
-            <a:off x="5532120" y="1417320"/>
-            <a:ext cx="1920240" cy="384048"/>
-          </a:xfrm>
-          <a:prstGeom prst="roundRect">
-            <a:avLst>
-              <a:gd name="adj" fmla="val 14286"/>
-            </a:avLst>
-          </a:prstGeom>
-          <a:solidFill>
-            <a:schemeClr val="bg1"/>
-          </a:solidFill>
-          <a:ln w="15875">
-            <a:solidFill>
-              <a:srgbClr val="2F5D3A"/>
-            </a:solidFill>
-            <a:prstDash val="solid"/>
-          </a:ln>
-        </p:spPr>
-      </p:sp>
-      <p:sp>
-        <p:nvSpPr>
-          <p:cNvPr id="11" name="Text 8"/>
-          <p:cNvSpPr txBox="1"/>
-          <p:nvPr/>
-        </p:nvSpPr>
-        <p:spPr>
-          <a:xfrm>
-            <a:off x="5623560" y="1417320"/>
-            <a:ext cx="1783080" cy="384048"/>
-          </a:xfrm>
-          <a:prstGeom prst="rect">
-            <a:avLst/>
-          </a:prstGeom>
-          <a:noFill/>
-          <a:ln/>
-        </p:spPr>
-        <p:txBody>
-          <a:bodyPr wrap="square" lIns="0" tIns="0" rIns="0" bIns="0" rtlCol="0" anchor="ctr"/>
-          <a:lstStyle/>
-          <a:p>
-            <a:pPr indent="0" marL="0">
-              <a:buNone/>
-            </a:pPr>
-            <a:r>
-              <a:rPr lang="en-US" sz="1200" dirty="0">
-                <a:solidFill>
-                  <a:schemeClr val="accent6"/>
-                </a:solidFill>
-              </a:rPr>
-              <a:t>Durata: </a:t>
-            </a:r>
-            <a:pPr indent="0" marL="0">
-              <a:buNone/>
-            </a:pPr>
-            <a:r>
-              <a:rPr lang="en-US" sz="1200" b="1" dirty="0">
-                <a:solidFill>
-                  <a:schemeClr val="tx2"/>
-                </a:solidFill>
-              </a:rPr>
-              <a:t>10 anni  ▾</a:t>
-            </a:r>
-            <a:endParaRPr lang="en-US" sz="1200" dirty="0"/>
-          </a:p>
-        </p:txBody>
-      </p:sp>
-      <p:sp>
-        <p:nvSpPr>
-          <p:cNvPr id="12" name="Opzioni durata"/>
-          <p:cNvSpPr/>
-          <p:nvPr/>
-        </p:nvSpPr>
-        <p:spPr>
-          <a:xfrm>
-            <a:off x="5532120" y="1819656"/>
-            <a:ext cx="1920240" cy="603504"/>
-          </a:xfrm>
-          <a:prstGeom prst="rect">
-            <a:avLst/>
-          </a:prstGeom>
-          <a:solidFill>
-            <a:schemeClr val="bg1"/>
-          </a:solidFill>
-          <a:ln w="9525">
-            <a:solidFill>
-              <a:srgbClr val="D9D4C5"/>
-            </a:solidFill>
-            <a:prstDash val="solid"/>
-          </a:ln>
-        </p:spPr>
-      </p:sp>
-      <p:sp>
-        <p:nvSpPr>
-          <p:cNvPr id="13" name="Text 10"/>
-          <p:cNvSpPr txBox="1"/>
-          <p:nvPr/>
-        </p:nvSpPr>
-        <p:spPr>
-          <a:xfrm>
-            <a:off x="5532120" y="1819656"/>
-            <a:ext cx="1920240" cy="603504"/>
-          </a:xfrm>
-          <a:prstGeom prst="rect">
-            <a:avLst/>
-          </a:prstGeom>
-          <a:noFill/>
-          <a:ln/>
-        </p:spPr>
-        <p:txBody>
-          <a:bodyPr wrap="square" lIns="0" tIns="0" rIns="0" bIns="0" rtlCol="0" anchor="ctr"/>
-          <a:lstStyle/>
-          <a:p>
-            <a:pPr algn="ctr" indent="0" marL="0">
-              <a:buNone/>
-            </a:pPr>
-            <a:r>
-              <a:rPr lang="en-US" sz="1100" dirty="0">
-                <a:solidFill>
-                  <a:schemeClr val="tx1"/>
-                </a:solidFill>
-              </a:rPr>
-              <a:t>7 anni  ·  10 anni  ·  21 anni</a:t>
-            </a:r>
-            <a:endParaRPr lang="en-US" sz="1100" dirty="0"/>
-          </a:p>
-        </p:txBody>
-      </p:sp>
-      <p:sp>
-        <p:nvSpPr>
-          <p:cNvPr id="14" name="Passo 1"/>
-          <p:cNvSpPr/>
-          <p:nvPr/>
-        </p:nvSpPr>
-        <p:spPr>
-          <a:xfrm>
-            <a:off x="822960" y="2633472"/>
-            <a:ext cx="420624" cy="420624"/>
+            <a:off x="8336280" y="1554480"/>
+            <a:ext cx="548640" cy="548640"/>
           </a:xfrm>
           <a:prstGeom prst="ellipse">
             <a:avLst/>
@@ -4451,641 +4533,23 @@
           </a:ln>
         </p:spPr>
       </p:sp>
-      <p:sp>
-        <p:nvSpPr>
-          <p:cNvPr id="15" name="Text 12"/>
-          <p:cNvSpPr txBox="1"/>
-          <p:nvPr/>
-        </p:nvSpPr>
-        <p:spPr>
-          <a:xfrm>
-            <a:off x="822960" y="2633472"/>
-            <a:ext cx="420624" cy="420624"/>
-          </a:xfrm>
-          <a:prstGeom prst="rect">
-            <a:avLst/>
-          </a:prstGeom>
-          <a:noFill/>
-          <a:ln/>
-        </p:spPr>
-        <p:txBody>
-          <a:bodyPr wrap="square" lIns="0" tIns="0" rIns="0" bIns="0" rtlCol="0" anchor="ctr"/>
-          <a:lstStyle/>
-          <a:p>
-            <a:pPr algn="ctr" indent="0" marL="0">
-              <a:buNone/>
-            </a:pPr>
-            <a:r>
-              <a:rPr lang="en-US" sz="1400" b="1" dirty="0">
-                <a:solidFill>
-                  <a:schemeClr val="bg1"/>
-                </a:solidFill>
-              </a:rPr>
-              <a:t>1</a:t>
-            </a:r>
-            <a:endParaRPr lang="en-US" sz="1400" dirty="0"/>
-          </a:p>
-        </p:txBody>
-      </p:sp>
-      <p:sp>
-        <p:nvSpPr>
-          <p:cNvPr id="16" name="Text 13"/>
-          <p:cNvSpPr txBox="1"/>
-          <p:nvPr/>
-        </p:nvSpPr>
-        <p:spPr>
-          <a:xfrm>
-            <a:off x="1417320" y="2560320"/>
-            <a:ext cx="6035040" cy="603504"/>
-          </a:xfrm>
-          <a:prstGeom prst="rect">
-            <a:avLst/>
-          </a:prstGeom>
-          <a:noFill/>
-          <a:ln/>
-        </p:spPr>
-        <p:txBody>
-          <a:bodyPr wrap="square" lIns="0" tIns="0" rIns="0" bIns="0" rtlCol="0" anchor="ctr"/>
-          <a:lstStyle/>
-          <a:p>
-            <a:pPr indent="0" marL="0">
-              <a:buNone/>
-            </a:pPr>
-            <a:r>
-              <a:rPr lang="en-US" sz="1350" b="1" dirty="0">
-                <a:solidFill>
-                  <a:schemeClr val="tx2"/>
-                </a:solidFill>
-              </a:rPr>
-              <a:t>Scenari per Comune</a:t>
-            </a:r>
-            <a:endParaRPr lang="en-US" sz="1350" dirty="0"/>
-          </a:p>
-          <a:p>
-            <a:pPr indent="0" marL="0">
-              <a:buNone/>
-            </a:pPr>
-            <a:r>
-              <a:rPr lang="en-US" sz="1150" dirty="0">
-                <a:solidFill>
-                  <a:schemeClr val="tx1"/>
-                </a:solidFill>
-              </a:rPr>
-              <a:t>Più scenari per ogni Comune («prudente», «obiettivo»…), durata 7, 10 o 21 anni</a:t>
-            </a:r>
-            <a:endParaRPr lang="en-US" sz="1350" dirty="0"/>
-          </a:p>
-        </p:txBody>
-      </p:sp>
-      <p:sp>
-        <p:nvSpPr>
-          <p:cNvPr id="17" name="Passo 2"/>
-          <p:cNvSpPr/>
-          <p:nvPr/>
-        </p:nvSpPr>
-        <p:spPr>
-          <a:xfrm>
-            <a:off x="822960" y="3346704"/>
-            <a:ext cx="420624" cy="420624"/>
-          </a:xfrm>
-          <a:prstGeom prst="ellipse">
-            <a:avLst/>
-          </a:prstGeom>
-          <a:solidFill>
-            <a:schemeClr val="tx2"/>
-          </a:solidFill>
-          <a:ln w="12700">
-            <a:solidFill>
-              <a:schemeClr val="tx2"/>
-            </a:solidFill>
-            <a:prstDash val="solid"/>
-          </a:ln>
-        </p:spPr>
-      </p:sp>
-      <p:sp>
-        <p:nvSpPr>
-          <p:cNvPr id="18" name="Text 15"/>
-          <p:cNvSpPr txBox="1"/>
-          <p:nvPr/>
-        </p:nvSpPr>
-        <p:spPr>
-          <a:xfrm>
-            <a:off x="822960" y="3346704"/>
-            <a:ext cx="420624" cy="420624"/>
-          </a:xfrm>
-          <a:prstGeom prst="rect">
-            <a:avLst/>
-          </a:prstGeom>
-          <a:noFill/>
-          <a:ln/>
-        </p:spPr>
-        <p:txBody>
-          <a:bodyPr wrap="square" lIns="0" tIns="0" rIns="0" bIns="0" rtlCol="0" anchor="ctr"/>
-          <a:lstStyle/>
-          <a:p>
-            <a:pPr algn="ctr" indent="0" marL="0">
-              <a:buNone/>
-            </a:pPr>
-            <a:r>
-              <a:rPr lang="en-US" sz="1400" b="1" dirty="0">
-                <a:solidFill>
-                  <a:schemeClr val="bg1"/>
-                </a:solidFill>
-              </a:rPr>
-              <a:t>2</a:t>
-            </a:r>
-            <a:endParaRPr lang="en-US" sz="1400" dirty="0"/>
-          </a:p>
-        </p:txBody>
-      </p:sp>
-      <p:sp>
-        <p:nvSpPr>
-          <p:cNvPr id="19" name="Text 16"/>
-          <p:cNvSpPr txBox="1"/>
-          <p:nvPr/>
-        </p:nvSpPr>
-        <p:spPr>
-          <a:xfrm>
-            <a:off x="1417320" y="3273552"/>
-            <a:ext cx="6035040" cy="603504"/>
-          </a:xfrm>
-          <a:prstGeom prst="rect">
-            <a:avLst/>
-          </a:prstGeom>
-          <a:noFill/>
-          <a:ln/>
-        </p:spPr>
-        <p:txBody>
-          <a:bodyPr wrap="square" lIns="0" tIns="0" rIns="0" bIns="0" rtlCol="0" anchor="ctr"/>
-          <a:lstStyle/>
-          <a:p>
-            <a:pPr indent="0" marL="0">
-              <a:buNone/>
-            </a:pPr>
-            <a:r>
-              <a:rPr lang="en-US" sz="1350" b="1" dirty="0">
-                <a:solidFill>
-                  <a:schemeClr val="tx2"/>
-                </a:solidFill>
-              </a:rPr>
-              <a:t>Scenario di riferimento (Standard 4.8.1)</a:t>
-            </a:r>
-            <a:endParaRPr lang="en-US" sz="1350" dirty="0"/>
-          </a:p>
-          <a:p>
-            <a:pPr indent="0" marL="0">
-              <a:buNone/>
-            </a:pPr>
-            <a:r>
-              <a:rPr lang="en-US" sz="1150" dirty="0">
-                <a:solidFill>
-                  <a:schemeClr val="tx1"/>
-                </a:solidFill>
-              </a:rPr>
-              <a:t>Anno con il 65% di differenziata o valori medi del cluster SOSE; situazione attuale come partenza</a:t>
-            </a:r>
-            <a:endParaRPr lang="en-US" sz="1350" dirty="0"/>
-          </a:p>
-        </p:txBody>
-      </p:sp>
-      <p:sp>
-        <p:nvSpPr>
-          <p:cNvPr id="20" name="Passo 3"/>
-          <p:cNvSpPr/>
-          <p:nvPr/>
-        </p:nvSpPr>
-        <p:spPr>
-          <a:xfrm>
-            <a:off x="822960" y="4059936"/>
-            <a:ext cx="420624" cy="420624"/>
-          </a:xfrm>
-          <a:prstGeom prst="ellipse">
-            <a:avLst/>
-          </a:prstGeom>
-          <a:solidFill>
-            <a:schemeClr val="tx2"/>
-          </a:solidFill>
-          <a:ln w="12700">
-            <a:solidFill>
-              <a:schemeClr val="tx2"/>
-            </a:solidFill>
-            <a:prstDash val="solid"/>
-          </a:ln>
-        </p:spPr>
-      </p:sp>
-      <p:sp>
-        <p:nvSpPr>
-          <p:cNvPr id="21" name="Text 18"/>
-          <p:cNvSpPr txBox="1"/>
-          <p:nvPr/>
-        </p:nvSpPr>
-        <p:spPr>
-          <a:xfrm>
-            <a:off x="822960" y="4059936"/>
-            <a:ext cx="420624" cy="420624"/>
-          </a:xfrm>
-          <a:prstGeom prst="rect">
-            <a:avLst/>
-          </a:prstGeom>
-          <a:noFill/>
-          <a:ln/>
-        </p:spPr>
-        <p:txBody>
-          <a:bodyPr wrap="square" lIns="0" tIns="0" rIns="0" bIns="0" rtlCol="0" anchor="ctr"/>
-          <a:lstStyle/>
-          <a:p>
-            <a:pPr algn="ctr" indent="0" marL="0">
-              <a:buNone/>
-            </a:pPr>
-            <a:r>
-              <a:rPr lang="en-US" sz="1400" b="1" dirty="0">
-                <a:solidFill>
-                  <a:schemeClr val="bg1"/>
-                </a:solidFill>
-              </a:rPr>
-              <a:t>3</a:t>
-            </a:r>
-            <a:endParaRPr lang="en-US" sz="1400" dirty="0"/>
-          </a:p>
-        </p:txBody>
-      </p:sp>
-      <p:sp>
-        <p:nvSpPr>
-          <p:cNvPr id="22" name="Text 19"/>
-          <p:cNvSpPr txBox="1"/>
-          <p:nvPr/>
-        </p:nvSpPr>
-        <p:spPr>
-          <a:xfrm>
-            <a:off x="1417320" y="3986784"/>
-            <a:ext cx="6035040" cy="603504"/>
-          </a:xfrm>
-          <a:prstGeom prst="rect">
-            <a:avLst/>
-          </a:prstGeom>
-          <a:noFill/>
-          <a:ln/>
-        </p:spPr>
-        <p:txBody>
-          <a:bodyPr wrap="square" lIns="0" tIns="0" rIns="0" bIns="0" rtlCol="0" anchor="ctr"/>
-          <a:lstStyle/>
-          <a:p>
-            <a:pPr indent="0" marL="0">
-              <a:buNone/>
-            </a:pPr>
-            <a:r>
-              <a:rPr lang="en-US" sz="1350" b="1" dirty="0">
-                <a:solidFill>
-                  <a:schemeClr val="tx2"/>
-                </a:solidFill>
-              </a:rPr>
-              <a:t>Obiettivi anno per anno</a:t>
-            </a:r>
-            <a:endParaRPr lang="en-US" sz="1350" dirty="0"/>
-          </a:p>
-          <a:p>
-            <a:pPr indent="0" marL="0">
-              <a:buNone/>
-            </a:pPr>
-            <a:r>
-              <a:rPr lang="en-US" sz="1150" dirty="0">
-                <a:solidFill>
-                  <a:schemeClr val="tx1"/>
-                </a:solidFill>
-              </a:rPr>
-              <a:t>Produzione totale e pro capite prevista, secco residuo pro capite obiettivo</a:t>
-            </a:r>
-            <a:endParaRPr lang="en-US" sz="1350" dirty="0"/>
-          </a:p>
-        </p:txBody>
-      </p:sp>
-      <p:sp>
-        <p:nvSpPr>
-          <p:cNvPr id="23" name="Passo 4"/>
-          <p:cNvSpPr/>
-          <p:nvPr/>
-        </p:nvSpPr>
-        <p:spPr>
-          <a:xfrm>
-            <a:off x="822960" y="4773168"/>
-            <a:ext cx="420624" cy="420624"/>
-          </a:xfrm>
-          <a:prstGeom prst="ellipse">
-            <a:avLst/>
-          </a:prstGeom>
-          <a:solidFill>
-            <a:schemeClr val="tx2"/>
-          </a:solidFill>
-          <a:ln w="12700">
-            <a:solidFill>
-              <a:schemeClr val="tx2"/>
-            </a:solidFill>
-            <a:prstDash val="solid"/>
-          </a:ln>
-        </p:spPr>
-      </p:sp>
-      <p:sp>
-        <p:nvSpPr>
-          <p:cNvPr id="24" name="Text 21"/>
-          <p:cNvSpPr txBox="1"/>
-          <p:nvPr/>
-        </p:nvSpPr>
-        <p:spPr>
-          <a:xfrm>
-            <a:off x="822960" y="4773168"/>
-            <a:ext cx="420624" cy="420624"/>
-          </a:xfrm>
-          <a:prstGeom prst="rect">
-            <a:avLst/>
-          </a:prstGeom>
-          <a:noFill/>
-          <a:ln/>
-        </p:spPr>
-        <p:txBody>
-          <a:bodyPr wrap="square" lIns="0" tIns="0" rIns="0" bIns="0" rtlCol="0" anchor="ctr"/>
-          <a:lstStyle/>
-          <a:p>
-            <a:pPr algn="ctr" indent="0" marL="0">
-              <a:buNone/>
-            </a:pPr>
-            <a:r>
-              <a:rPr lang="en-US" sz="1400" b="1" dirty="0">
-                <a:solidFill>
-                  <a:schemeClr val="bg1"/>
-                </a:solidFill>
-              </a:rPr>
-              <a:t>4</a:t>
-            </a:r>
-            <a:endParaRPr lang="en-US" sz="1400" dirty="0"/>
-          </a:p>
-        </p:txBody>
-      </p:sp>
-      <p:sp>
-        <p:nvSpPr>
-          <p:cNvPr id="25" name="Text 22"/>
-          <p:cNvSpPr txBox="1"/>
-          <p:nvPr/>
-        </p:nvSpPr>
-        <p:spPr>
-          <a:xfrm>
-            <a:off x="1417320" y="4700016"/>
-            <a:ext cx="6035040" cy="603504"/>
-          </a:xfrm>
-          <a:prstGeom prst="rect">
-            <a:avLst/>
-          </a:prstGeom>
-          <a:noFill/>
-          <a:ln/>
-        </p:spPr>
-        <p:txBody>
-          <a:bodyPr wrap="square" lIns="0" tIns="0" rIns="0" bIns="0" rtlCol="0" anchor="ctr"/>
-          <a:lstStyle/>
-          <a:p>
-            <a:pPr indent="0" marL="0">
-              <a:buNone/>
-            </a:pPr>
-            <a:r>
-              <a:rPr lang="en-US" sz="1350" b="1" dirty="0">
-                <a:solidFill>
-                  <a:schemeClr val="tx2"/>
-                </a:solidFill>
-              </a:rPr>
-              <a:t>% di differenziata</a:t>
-            </a:r>
-            <a:endParaRPr lang="en-US" sz="1350" dirty="0"/>
-          </a:p>
-          <a:p>
-            <a:pPr indent="0" marL="0">
-              <a:buNone/>
-            </a:pPr>
-            <a:r>
-              <a:rPr lang="en-US" sz="1150" dirty="0">
-                <a:solidFill>
-                  <a:schemeClr val="tx1"/>
-                </a:solidFill>
-              </a:rPr>
-              <a:t>Ricalcolata ogni anno: (totale − secco) / totale</a:t>
-            </a:r>
-            <a:endParaRPr lang="en-US" sz="1350" dirty="0"/>
-          </a:p>
-        </p:txBody>
-      </p:sp>
-      <p:sp>
-        <p:nvSpPr>
-          <p:cNvPr id="26" name="Passo 5"/>
-          <p:cNvSpPr/>
-          <p:nvPr/>
-        </p:nvSpPr>
-        <p:spPr>
-          <a:xfrm>
-            <a:off x="822960" y="5486400"/>
-            <a:ext cx="420624" cy="420624"/>
-          </a:xfrm>
-          <a:prstGeom prst="ellipse">
-            <a:avLst/>
-          </a:prstGeom>
-          <a:solidFill>
-            <a:schemeClr val="accent2"/>
-          </a:solidFill>
-          <a:ln w="12700">
-            <a:solidFill>
-              <a:schemeClr val="accent2"/>
-            </a:solidFill>
-            <a:prstDash val="solid"/>
-          </a:ln>
-        </p:spPr>
-      </p:sp>
-      <p:sp>
-        <p:nvSpPr>
-          <p:cNvPr id="27" name="Text 24"/>
-          <p:cNvSpPr txBox="1"/>
-          <p:nvPr/>
-        </p:nvSpPr>
-        <p:spPr>
-          <a:xfrm>
-            <a:off x="822960" y="5486400"/>
-            <a:ext cx="420624" cy="420624"/>
-          </a:xfrm>
-          <a:prstGeom prst="rect">
-            <a:avLst/>
-          </a:prstGeom>
-          <a:noFill/>
-          <a:ln/>
-        </p:spPr>
-        <p:txBody>
-          <a:bodyPr wrap="square" lIns="0" tIns="0" rIns="0" bIns="0" rtlCol="0" anchor="ctr"/>
-          <a:lstStyle/>
-          <a:p>
-            <a:pPr algn="ctr" indent="0" marL="0">
-              <a:buNone/>
-            </a:pPr>
-            <a:r>
-              <a:rPr lang="en-US" sz="1400" b="1" dirty="0">
-                <a:solidFill>
-                  <a:schemeClr val="bg1"/>
-                </a:solidFill>
-              </a:rPr>
-              <a:t>5</a:t>
-            </a:r>
-            <a:endParaRPr lang="en-US" sz="1400" dirty="0"/>
-          </a:p>
-        </p:txBody>
-      </p:sp>
-      <p:sp>
-        <p:nvSpPr>
-          <p:cNvPr id="28" name="Text 25"/>
-          <p:cNvSpPr txBox="1"/>
-          <p:nvPr/>
-        </p:nvSpPr>
-        <p:spPr>
-          <a:xfrm>
-            <a:off x="1417320" y="5413248"/>
-            <a:ext cx="6035040" cy="603504"/>
-          </a:xfrm>
-          <a:prstGeom prst="rect">
-            <a:avLst/>
-          </a:prstGeom>
-          <a:noFill/>
-          <a:ln/>
-        </p:spPr>
-        <p:txBody>
-          <a:bodyPr wrap="square" lIns="0" tIns="0" rIns="0" bIns="0" rtlCol="0" anchor="ctr"/>
-          <a:lstStyle/>
-          <a:p>
-            <a:pPr indent="0" marL="0">
-              <a:buNone/>
-            </a:pPr>
-            <a:r>
-              <a:rPr lang="en-US" sz="1350" b="1" dirty="0">
-                <a:solidFill>
-                  <a:schemeClr val="tx2"/>
-                </a:solidFill>
-              </a:rPr>
-              <a:t>Crediti e conti economici</a:t>
-            </a:r>
-            <a:endParaRPr lang="en-US" sz="1350" dirty="0"/>
-          </a:p>
-          <a:p>
-            <a:pPr indent="0" marL="0">
-              <a:buNone/>
-            </a:pPr>
-            <a:r>
-              <a:rPr lang="en-US" sz="1150" dirty="0">
-                <a:solidFill>
-                  <a:schemeClr val="tx1"/>
-                </a:solidFill>
-              </a:rPr>
-              <a:t>Bilancio del Comune o per utenza (come l'Allegato A EsaCom); ricavi a 32 € anno per anno; costi Caso 1 o 2; margine</a:t>
-            </a:r>
-            <a:endParaRPr lang="en-US" sz="1350" dirty="0"/>
-          </a:p>
-        </p:txBody>
-      </p:sp>
-      <p:sp>
-        <p:nvSpPr>
-          <p:cNvPr id="29" name="Text 26"/>
-          <p:cNvSpPr txBox="1"/>
-          <p:nvPr/>
-        </p:nvSpPr>
-        <p:spPr>
-          <a:xfrm>
-            <a:off x="822960" y="6035040"/>
-            <a:ext cx="6675120" cy="228600"/>
-          </a:xfrm>
-          <a:prstGeom prst="rect">
-            <a:avLst/>
-          </a:prstGeom>
-          <a:noFill/>
-          <a:ln/>
-        </p:spPr>
-        <p:txBody>
-          <a:bodyPr wrap="square" lIns="0" tIns="0" rIns="0" bIns="0" rtlCol="0" anchor="ctr"/>
-          <a:lstStyle/>
-          <a:p>
-            <a:pPr indent="0" marL="0">
-              <a:buNone/>
-            </a:pPr>
-            <a:r>
-              <a:rPr lang="en-US" sz="1000" i="1" dirty="0">
-                <a:solidFill>
-                  <a:schemeClr val="accent6"/>
-                </a:solidFill>
-              </a:rPr>
-              <a:t>Stima ex ante a scopo di pianificazione: i crediti veri si calcolano ex post con la Banca Dati Utenze.</a:t>
-            </a:r>
-            <a:endParaRPr lang="en-US" sz="1000" dirty="0"/>
-          </a:p>
-        </p:txBody>
-      </p:sp>
-      <p:sp>
-        <p:nvSpPr>
-          <p:cNvPr id="30" name="Riquadro assistente"/>
-          <p:cNvSpPr/>
-          <p:nvPr/>
-        </p:nvSpPr>
-        <p:spPr>
-          <a:xfrm>
-            <a:off x="7863840" y="1234440"/>
-            <a:ext cx="3749040" cy="5029200"/>
-          </a:xfrm>
-          <a:prstGeom prst="roundRect">
-            <a:avLst>
-              <a:gd name="adj" fmla="val 2927"/>
-            </a:avLst>
-          </a:prstGeom>
-          <a:solidFill>
-            <a:schemeClr val="accent3"/>
-          </a:solidFill>
-          <a:ln w="12700">
-            <a:solidFill>
-              <a:schemeClr val="accent3"/>
-            </a:solidFill>
-            <a:prstDash val="solid"/>
-          </a:ln>
-        </p:spPr>
-      </p:sp>
-      <p:sp>
-        <p:nvSpPr>
-          <p:cNvPr id="31" name="Assistente cerchio"/>
-          <p:cNvSpPr/>
-          <p:nvPr/>
-        </p:nvSpPr>
-        <p:spPr>
-          <a:xfrm>
-            <a:off x="8092440" y="1417320"/>
-            <a:ext cx="548640" cy="548640"/>
-          </a:xfrm>
-          <a:prstGeom prst="ellipse">
-            <a:avLst/>
-          </a:prstGeom>
-          <a:solidFill>
-            <a:schemeClr val="tx2"/>
-          </a:solidFill>
-          <a:ln w="12700">
-            <a:solidFill>
-              <a:schemeClr val="tx2"/>
-            </a:solidFill>
-            <a:prstDash val="solid"/>
-          </a:ln>
-        </p:spPr>
-      </p:sp>
       <p:pic>
         <p:nvPicPr>
-          <p:cNvPr id="32" name="Assistente icona" descr="preencoded.png">    </p:cNvPr>
+          <p:cNvPr id="15" name="Qualità dei dati e completamenti icona" descr="preencoded.png">    </p:cNvPr>
           <p:cNvPicPr>
             <a:picLocks noChangeAspect="1"/>
           </p:cNvPicPr>
           <p:nvPr/>
         </p:nvPicPr>
         <p:blipFill>
-          <a:blip r:embed="rId2"/>
+          <a:blip r:embed="rId3"/>
           <a:stretch>
             <a:fillRect/>
           </a:stretch>
         </p:blipFill>
         <p:spPr>
           <a:xfrm>
-            <a:off x="8229600" y="1554480"/>
+            <a:off x="8473440" y="1691640"/>
             <a:ext cx="274320" cy="274320"/>
           </a:xfrm>
           <a:prstGeom prst="rect">
@@ -5095,14 +4559,14 @@
       </p:pic>
       <p:sp>
         <p:nvSpPr>
-          <p:cNvPr id="33" name="Text 29"/>
+          <p:cNvPr id="16" name="Text 11"/>
           <p:cNvSpPr txBox="1"/>
           <p:nvPr/>
         </p:nvSpPr>
         <p:spPr>
           <a:xfrm>
-            <a:off x="8778240" y="1371600"/>
-            <a:ext cx="2743200" cy="685800"/>
+            <a:off x="9022080" y="1508760"/>
+            <a:ext cx="2453640" cy="640080"/>
           </a:xfrm>
           <a:prstGeom prst="rect">
             <a:avLst/>
@@ -5118,54 +4582,27 @@
               <a:buNone/>
             </a:pPr>
             <a:r>
-              <a:rPr lang="en-US" sz="1800" b="1" dirty="0">
+              <a:rPr lang="en-US" sz="1700" b="1" dirty="0">
                 <a:solidFill>
                   <a:schemeClr val="tx2"/>
                 </a:solidFill>
               </a:rPr>
-              <a:t>Assistente virtuale Claude</a:t>
-            </a:r>
-            <a:endParaRPr lang="en-US" sz="1800" dirty="0"/>
-          </a:p>
-        </p:txBody>
-      </p:sp>
-      <p:sp>
-        <p:nvSpPr>
-          <p:cNvPr id="34" name="Badge attivo"/>
-          <p:cNvSpPr/>
-          <p:nvPr/>
-        </p:nvSpPr>
-        <p:spPr>
-          <a:xfrm>
-            <a:off x="8778240" y="2029968"/>
-            <a:ext cx="2194560" cy="256032"/>
-          </a:xfrm>
-          <a:prstGeom prst="roundRect">
-            <a:avLst>
-              <a:gd name="adj" fmla="val 50000"/>
-            </a:avLst>
-          </a:prstGeom>
-          <a:solidFill>
-            <a:schemeClr val="bg1"/>
-          </a:solidFill>
-          <a:ln w="9525">
-            <a:solidFill>
-              <a:schemeClr val="tx2"/>
-            </a:solidFill>
-            <a:prstDash val="solid"/>
-          </a:ln>
-        </p:spPr>
-      </p:sp>
-      <p:sp>
-        <p:nvSpPr>
-          <p:cNvPr id="35" name="Text 31"/>
+              <a:t>Qualità dei dati e completamenti</a:t>
+            </a:r>
+            <a:endParaRPr lang="en-US" sz="1700" dirty="0"/>
+          </a:p>
+        </p:txBody>
+      </p:sp>
+      <p:sp>
+        <p:nvSpPr>
+          <p:cNvPr id="17" name="Text 12"/>
           <p:cNvSpPr txBox="1"/>
           <p:nvPr/>
         </p:nvSpPr>
         <p:spPr>
           <a:xfrm>
-            <a:off x="8778240" y="2029968"/>
-            <a:ext cx="2194560" cy="256032"/>
+            <a:off x="8382000" y="2286000"/>
+            <a:ext cx="3048000" cy="3749040"/>
           </a:xfrm>
           <a:prstGeom prst="rect">
             <a:avLst/>
@@ -5174,179 +4611,97 @@
           <a:ln/>
         </p:spPr>
         <p:txBody>
-          <a:bodyPr wrap="square" lIns="0" tIns="0" rIns="0" bIns="0" rtlCol="0" anchor="ctr"/>
-          <a:lstStyle/>
-          <a:p>
-            <a:pPr algn="ctr" indent="0" marL="0">
-              <a:buNone/>
-            </a:pPr>
-            <a:r>
-              <a:rPr lang="en-US" sz="950" b="1" spc="100" kern="0" dirty="0">
-                <a:solidFill>
-                  <a:schemeClr val="tx2"/>
-                </a:solidFill>
-              </a:rPr>
-              <a:t>ATTIVO DAL 19/10</a:t>
-            </a:r>
-            <a:endParaRPr lang="en-US" sz="950" dirty="0"/>
-          </a:p>
-        </p:txBody>
-      </p:sp>
-      <p:sp>
-        <p:nvSpPr>
-          <p:cNvPr id="36" name="Text 32"/>
-          <p:cNvSpPr txBox="1"/>
-          <p:nvPr/>
-        </p:nvSpPr>
-        <p:spPr>
-          <a:xfrm>
-            <a:off x="8092440" y="2423160"/>
-            <a:ext cx="3337560" cy="3703320"/>
-          </a:xfrm>
-          <a:prstGeom prst="rect">
-            <a:avLst/>
-          </a:prstGeom>
-          <a:noFill/>
-          <a:ln/>
-        </p:spPr>
-        <p:txBody>
           <a:bodyPr wrap="square" lIns="0" tIns="0" rIns="0" bIns="0" rtlCol="0" anchor="t"/>
           <a:lstStyle/>
           <a:p>
-            <a:pPr indent="0" marL="0">
+            <a:pPr marL="342900" indent="-342900">
               <a:spcAft>
-                <a:spcPts val="600"/>
+                <a:spcPts val="700"/>
               </a:spcAft>
-              <a:buNone/>
-            </a:pPr>
-            <a:r>
-              <a:rPr lang="en-US" sz="1250" b="1" dirty="0">
-                <a:solidFill>
-                  <a:schemeClr val="tx2"/>
-                </a:solidFill>
-              </a:rPr>
-              <a:t>Per enti e Amministratori</a:t>
-            </a:r>
-            <a:endParaRPr lang="en-US" sz="1250" dirty="0"/>
-          </a:p>
-          <a:p>
-            <a:pPr indent="0" marL="0">
+              <a:buSzPct val="100000"/>
+              <a:buChar char="•"/>
+            </a:pPr>
+            <a:r>
+              <a:rPr lang="en-US" sz="1350" dirty="0">
+                <a:solidFill>
+                  <a:schemeClr val="tx1"/>
+                </a:solidFill>
+              </a:rPr>
+              <a:t>Dati ufficiali per i controlli: popolazione e cluster SOSE di ogni Comune</a:t>
+            </a:r>
+            <a:endParaRPr lang="en-US" sz="1350" dirty="0"/>
+          </a:p>
+          <a:p>
+            <a:pPr marL="342900" indent="-342900">
               <a:spcAft>
-                <a:spcPts val="600"/>
+                <a:spcPts val="700"/>
               </a:spcAft>
-              <a:buNone/>
-            </a:pPr>
-            <a:r>
-              <a:rPr lang="en-US" sz="1250" dirty="0">
+              <a:buSzPct val="100000"/>
+              <a:buChar char="•"/>
+            </a:pPr>
+            <a:r>
+              <a:rPr lang="en-US" sz="1350" dirty="0">
                 <a:solidFill>
                   <a:schemeClr val="tx1"/>
                 </a:solidFill>
               </a:rPr>
-              <a:t>pulsante «✦ Assistente»: come si fa un'operazione, fasi, costi; risponde dai manuali e dalle tariffe</a:t>
-            </a:r>
-            <a:endParaRPr lang="en-US" sz="1250" dirty="0"/>
-          </a:p>
-          <a:p>
-            <a:pPr indent="0" marL="0">
+              <a:t>Conferma delle scelte interpretative del calcolo con l'ente</a:t>
+            </a:r>
+            <a:endParaRPr lang="en-US" sz="1350" dirty="0"/>
+          </a:p>
+          <a:p>
+            <a:pPr marL="342900" indent="-342900">
               <a:spcAft>
-                <a:spcPts val="600"/>
+                <a:spcPts val="700"/>
               </a:spcAft>
-              <a:buNone/>
-            </a:pPr>
-            <a:r>
-              <a:rPr lang="en-US" sz="1250" b="1" dirty="0">
-                <a:solidFill>
-                  <a:schemeClr val="tx2"/>
-                </a:solidFill>
-              </a:rPr>
-              <a:t>Garanzie</a:t>
-            </a:r>
-            <a:endParaRPr lang="en-US" sz="1250" dirty="0"/>
-          </a:p>
-          <a:p>
-            <a:pPr indent="0" marL="0">
+              <a:buSzPct val="100000"/>
+              <a:buChar char="•"/>
+            </a:pPr>
+            <a:r>
+              <a:rPr lang="en-US" sz="1350" dirty="0">
+                <a:solidFill>
+                  <a:schemeClr val="tx1"/>
+                </a:solidFill>
+              </a:rPr>
+              <a:t>Privacy: DPIA, registro dei trattamenti; accessibilità WCAG 2.1 AA</a:t>
+            </a:r>
+            <a:endParaRPr lang="en-US" sz="1350" dirty="0"/>
+          </a:p>
+          <a:p>
+            <a:pPr marL="342900" indent="-342900">
               <a:spcAft>
-                <a:spcPts val="600"/>
+                <a:spcPts val="700"/>
               </a:spcAft>
-              <a:buNone/>
-            </a:pPr>
-            <a:r>
-              <a:rPr lang="en-US" sz="1250" dirty="0">
+              <a:buSzPct val="100000"/>
+              <a:buChar char="•"/>
+            </a:pPr>
+            <a:r>
+              <a:rPr lang="en-US" sz="1350" dirty="0">
                 <a:solidFill>
                   <a:schemeClr val="tx1"/>
                 </a:solidFill>
               </a:rPr>
-              <a:t>non vede le pratiche e non decide; nessun testo salvato; limite di domande al giorno</a:t>
-            </a:r>
-            <a:endParaRPr lang="en-US" sz="1250" dirty="0"/>
-          </a:p>
-          <a:p>
-            <a:pPr indent="0" marL="0">
+              <a:t>Collaudo con i dati reali di un Comune</a:t>
+            </a:r>
+            <a:endParaRPr lang="en-US" sz="1350" dirty="0"/>
+          </a:p>
+          <a:p>
+            <a:pPr marL="342900" indent="-342900">
               <a:spcAft>
-                <a:spcPts val="600"/>
+                <a:spcPts val="700"/>
               </a:spcAft>
-              <a:buNone/>
-            </a:pPr>
-            <a:r>
-              <a:rPr lang="en-US" sz="1250" b="1" dirty="0">
-                <a:solidFill>
-                  <a:schemeClr val="tx2"/>
-                </a:solidFill>
-              </a:rPr>
-              <a:t>Come funziona</a:t>
-            </a:r>
-            <a:endParaRPr lang="en-US" sz="1250" dirty="0"/>
-          </a:p>
-          <a:p>
-            <a:pPr indent="0" marL="0">
-              <a:spcAft>
-                <a:spcPts val="600"/>
-              </a:spcAft>
-              <a:buNone/>
-            </a:pPr>
-            <a:r>
-              <a:rPr lang="en-US" sz="1250" dirty="0">
+              <a:buSzPct val="100000"/>
+              <a:buChar char="•"/>
+            </a:pPr>
+            <a:r>
+              <a:rPr lang="en-US" sz="1350" dirty="0">
                 <a:solidFill>
                   <a:schemeClr val="tx1"/>
                 </a:solidFill>
               </a:rPr>
-              <a:t>Claude Haiku 5.5 tramite una funzione sul server; la chiave resta in Supabase; meno di un centesimo a domanda</a:t>
-            </a:r>
-            <a:endParaRPr lang="en-US" sz="1250" dirty="0"/>
-          </a:p>
-          <a:p>
-            <a:pPr indent="0" marL="0">
-              <a:spcAft>
-                <a:spcPts val="600"/>
-              </a:spcAft>
-              <a:buNone/>
-            </a:pPr>
-            <a:r>
-              <a:rPr lang="en-US" sz="1250" b="1" dirty="0">
-                <a:solidFill>
-                  <a:schemeClr val="tx2"/>
-                </a:solidFill>
-              </a:rPr>
-              <a:t>Prossimi passi</a:t>
-            </a:r>
-            <a:endParaRPr lang="en-US" sz="1250" dirty="0"/>
-          </a:p>
-          <a:p>
-            <a:pPr indent="0" marL="0">
-              <a:spcAft>
-                <a:spcPts val="600"/>
-              </a:spcAft>
-              <a:buNone/>
-            </a:pPr>
-            <a:r>
-              <a:rPr lang="en-US" sz="1250" dirty="0">
-                <a:solidFill>
-                  <a:schemeClr val="tx1"/>
-                </a:solidFill>
-              </a:rPr>
-              <a:t>estensione agli Operatori e aiuto sulla singola pratica, con regole sulla privacy</a:t>
-            </a:r>
-            <a:endParaRPr lang="en-US" sz="1250" dirty="0"/>
+              <a:t>Nuovi moduli: simulatore con PDF ed Excel, assistente virtuale (poi Operatori e aiuto sulla pratica), Audit User e utenti online (fatti il 20/10); navigazione da smartphone (22/10); Banca Dati Utenze per utenza nel calcolo (22-23/10); valore dei crediti in Dashboard (23/10); Marketplaces da definire</a:t>
+            </a:r>
+            <a:endParaRPr lang="en-US" sz="1350" dirty="0"/>
           </a:p>
         </p:txBody>
       </p:sp>
@@ -5455,7 +4810,7 @@
                 <a:ea typeface="Cambria" pitchFamily="34" charset="-122"/>
                 <a:cs typeface="Cambria" pitchFamily="34" charset="-120"/>
               </a:rPr>
-              <a:t>Il simulatore in pratica</a:t>
+              <a:t>Nuovi moduli: simulatore e assistente virtuale</a:t>
             </a:r>
             <a:endParaRPr lang="en-US" sz="3000" dirty="0"/>
           </a:p>
@@ -5463,54 +4818,59 @@
       </p:sp>
       <p:sp>
         <p:nvSpPr>
-          <p:cNvPr id="3" name="Text 1"/>
-          <p:cNvSpPr txBox="1"/>
-          <p:nvPr/>
-        </p:nvSpPr>
-        <p:spPr>
-          <a:xfrm>
-            <a:off x="548640" y="1097280"/>
-            <a:ext cx="11064240" cy="365760"/>
-          </a:xfrm>
-          <a:prstGeom prst="rect">
-            <a:avLst/>
-          </a:prstGeom>
-          <a:noFill/>
-          <a:ln/>
-        </p:spPr>
-        <p:txBody>
-          <a:bodyPr wrap="square" lIns="0" tIns="0" rIns="0" bIns="0" rtlCol="0" anchor="ctr"/>
-          <a:lstStyle/>
-          <a:p>
-            <a:pPr indent="0" marL="0">
-              <a:buNone/>
-            </a:pPr>
-            <a:r>
-              <a:rPr lang="en-US" sz="1300" b="1" dirty="0">
-                <a:solidFill>
-                  <a:schemeClr val="tx2"/>
-                </a:solidFill>
-              </a:rPr>
-              <a:t>Portale → menu Simulatore. </a:t>
-            </a:r>
-            <a:pPr indent="0" marL="0">
-              <a:buNone/>
-            </a:pPr>
-            <a:r>
-              <a:rPr lang="en-US" sz="1300" dirty="0">
-                <a:solidFill>
-                  <a:schemeClr val="accent6"/>
-                </a:solidFill>
-              </a:rPr>
-              <a:t>Esempio con dati di prova: Comune di 12.500 abitanti (cluster 4), oggi 430 kg/ab e 90 kg/ab di secco, obiettivo 2036: 380 e 50 kg/ab.</a:t>
-            </a:r>
-            <a:endParaRPr lang="en-US" sz="1300" dirty="0"/>
-          </a:p>
-        </p:txBody>
+          <p:cNvPr id="3" name="Riquadro simulatore"/>
+          <p:cNvSpPr/>
+          <p:nvPr/>
+        </p:nvSpPr>
+        <p:spPr>
+          <a:xfrm>
+            <a:off x="548640" y="1234440"/>
+            <a:ext cx="7086600" cy="5029200"/>
+          </a:xfrm>
+          <a:prstGeom prst="roundRect">
+            <a:avLst>
+              <a:gd name="adj" fmla="val 2182"/>
+            </a:avLst>
+          </a:prstGeom>
+          <a:solidFill>
+            <a:schemeClr val="bg2"/>
+          </a:solidFill>
+          <a:ln w="12700">
+            <a:solidFill>
+              <a:schemeClr val="bg2"/>
+            </a:solidFill>
+            <a:prstDash val="solid"/>
+          </a:ln>
+        </p:spPr>
+      </p:sp>
+      <p:sp>
+        <p:nvSpPr>
+          <p:cNvPr id="4" name="Simulatore cerchio"/>
+          <p:cNvSpPr/>
+          <p:nvPr/>
+        </p:nvSpPr>
+        <p:spPr>
+          <a:xfrm>
+            <a:off x="777240" y="1417320"/>
+            <a:ext cx="548640" cy="548640"/>
+          </a:xfrm>
+          <a:prstGeom prst="ellipse">
+            <a:avLst/>
+          </a:prstGeom>
+          <a:solidFill>
+            <a:schemeClr val="accent2"/>
+          </a:solidFill>
+          <a:ln w="12700">
+            <a:solidFill>
+              <a:schemeClr val="accent2"/>
+            </a:solidFill>
+            <a:prstDash val="solid"/>
+          </a:ln>
+        </p:spPr>
       </p:sp>
       <p:pic>
         <p:nvPicPr>
-          <p:cNvPr id="4" name="Schermata simulatore" descr="Risultati del simulatore: crediti netti per anno e raccolta differenziata">    </p:cNvPr>
+          <p:cNvPr id="5" name="Simulatore icona" descr="preencoded.png">    </p:cNvPr>
           <p:cNvPicPr>
             <a:picLocks noChangeAspect="1"/>
           </p:cNvPicPr>
@@ -5524,8 +4884,8 @@
         </p:blipFill>
         <p:spPr>
           <a:xfrm>
-            <a:off x="548640" y="1572768"/>
-            <a:ext cx="11064240" cy="3955466"/>
+            <a:off x="914400" y="1554480"/>
+            <a:ext cx="274320" cy="274320"/>
           </a:xfrm>
           <a:prstGeom prst="rect">
             <a:avLst/>
@@ -5534,18 +4894,879 @@
       </p:pic>
       <p:sp>
         <p:nvSpPr>
-          <p:cNvPr id="5" name="Passo simulatore 1"/>
+          <p:cNvPr id="6" name="Text 3"/>
+          <p:cNvSpPr txBox="1"/>
+          <p:nvPr/>
+        </p:nvSpPr>
+        <p:spPr>
+          <a:xfrm>
+            <a:off x="1463040" y="1371600"/>
+            <a:ext cx="3840480" cy="365760"/>
+          </a:xfrm>
+          <a:prstGeom prst="rect">
+            <a:avLst/>
+          </a:prstGeom>
+          <a:noFill/>
+          <a:ln/>
+        </p:spPr>
+        <p:txBody>
+          <a:bodyPr wrap="square" lIns="0" tIns="0" rIns="0" bIns="0" rtlCol="0" anchor="ctr"/>
+          <a:lstStyle/>
+          <a:p>
+            <a:pPr indent="0" marL="0">
+              <a:buNone/>
+            </a:pPr>
+            <a:r>
+              <a:rPr lang="en-US" sz="1800" b="1" dirty="0">
+                <a:solidFill>
+                  <a:schemeClr val="tx2"/>
+                </a:solidFill>
+              </a:rPr>
+              <a:t>Simulatore di scenari</a:t>
+            </a:r>
+            <a:endParaRPr lang="en-US" sz="1800" dirty="0"/>
+          </a:p>
+        </p:txBody>
+      </p:sp>
+      <p:sp>
+        <p:nvSpPr>
+          <p:cNvPr id="7" name="Text 4"/>
+          <p:cNvSpPr txBox="1"/>
+          <p:nvPr/>
+        </p:nvSpPr>
+        <p:spPr>
+          <a:xfrm>
+            <a:off x="1463040" y="1737360"/>
+            <a:ext cx="3931920" cy="457200"/>
+          </a:xfrm>
+          <a:prstGeom prst="rect">
+            <a:avLst/>
+          </a:prstGeom>
+          <a:noFill/>
+          <a:ln/>
+        </p:spPr>
+        <p:txBody>
+          <a:bodyPr wrap="square" lIns="0" tIns="0" rIns="0" bIns="0" rtlCol="0" anchor="ctr"/>
+          <a:lstStyle/>
+          <a:p>
+            <a:pPr indent="0" marL="0">
+              <a:buNone/>
+            </a:pPr>
+            <a:r>
+              <a:rPr lang="en-US" sz="1200" dirty="0">
+                <a:solidFill>
+                  <a:schemeClr val="accent6"/>
+                </a:solidFill>
+              </a:rPr>
+              <a:t>Quanti crediti potrebbe generare un Comune? Una stima anno per anno, prima di aderire.</a:t>
+            </a:r>
+            <a:endParaRPr lang="en-US" sz="1200" dirty="0"/>
+          </a:p>
+        </p:txBody>
+      </p:sp>
+      <p:sp>
+        <p:nvSpPr>
+          <p:cNvPr id="8" name="Badge online"/>
           <p:cNvSpPr/>
           <p:nvPr/>
         </p:nvSpPr>
         <p:spPr>
           <a:xfrm>
-            <a:off x="548640" y="5669280"/>
-            <a:ext cx="2103120" cy="566928"/>
+            <a:off x="1463040" y="2212848"/>
+            <a:ext cx="2148840" cy="274320"/>
           </a:xfrm>
           <a:prstGeom prst="roundRect">
             <a:avLst>
-              <a:gd name="adj" fmla="val 19355"/>
+              <a:gd name="adj" fmla="val 50000"/>
+            </a:avLst>
+          </a:prstGeom>
+          <a:solidFill>
+            <a:schemeClr val="accent2"/>
+          </a:solidFill>
+          <a:ln w="12700">
+            <a:solidFill>
+              <a:schemeClr val="accent2"/>
+            </a:solidFill>
+            <a:prstDash val="solid"/>
+          </a:ln>
+        </p:spPr>
+      </p:sp>
+      <p:sp>
+        <p:nvSpPr>
+          <p:cNvPr id="9" name="Text 6"/>
+          <p:cNvSpPr txBox="1"/>
+          <p:nvPr/>
+        </p:nvSpPr>
+        <p:spPr>
+          <a:xfrm>
+            <a:off x="1463040" y="2212848"/>
+            <a:ext cx="2148840" cy="274320"/>
+          </a:xfrm>
+          <a:prstGeom prst="rect">
+            <a:avLst/>
+          </a:prstGeom>
+          <a:noFill/>
+          <a:ln/>
+        </p:spPr>
+        <p:txBody>
+          <a:bodyPr wrap="square" lIns="0" tIns="0" rIns="0" bIns="0" rtlCol="0" anchor="ctr"/>
+          <a:lstStyle/>
+          <a:p>
+            <a:pPr algn="ctr" indent="0" marL="0">
+              <a:buNone/>
+            </a:pPr>
+            <a:r>
+              <a:rPr lang="en-US" sz="1000" b="1" spc="100" kern="0" dirty="0">
+                <a:solidFill>
+                  <a:schemeClr val="bg1"/>
+                </a:solidFill>
+              </a:rPr>
+              <a:t>PRIMA VERSIONE ONLINE</a:t>
+            </a:r>
+            <a:endParaRPr lang="en-US" sz="1000" dirty="0"/>
+          </a:p>
+        </p:txBody>
+      </p:sp>
+      <p:sp>
+        <p:nvSpPr>
+          <p:cNvPr id="10" name="Menu durata"/>
+          <p:cNvSpPr/>
+          <p:nvPr/>
+        </p:nvSpPr>
+        <p:spPr>
+          <a:xfrm>
+            <a:off x="5532120" y="1417320"/>
+            <a:ext cx="1920240" cy="384048"/>
+          </a:xfrm>
+          <a:prstGeom prst="roundRect">
+            <a:avLst>
+              <a:gd name="adj" fmla="val 14286"/>
+            </a:avLst>
+          </a:prstGeom>
+          <a:solidFill>
+            <a:schemeClr val="bg1"/>
+          </a:solidFill>
+          <a:ln w="15875">
+            <a:solidFill>
+              <a:srgbClr val="2F5D3A"/>
+            </a:solidFill>
+            <a:prstDash val="solid"/>
+          </a:ln>
+        </p:spPr>
+      </p:sp>
+      <p:sp>
+        <p:nvSpPr>
+          <p:cNvPr id="11" name="Text 8"/>
+          <p:cNvSpPr txBox="1"/>
+          <p:nvPr/>
+        </p:nvSpPr>
+        <p:spPr>
+          <a:xfrm>
+            <a:off x="5623560" y="1417320"/>
+            <a:ext cx="1783080" cy="384048"/>
+          </a:xfrm>
+          <a:prstGeom prst="rect">
+            <a:avLst/>
+          </a:prstGeom>
+          <a:noFill/>
+          <a:ln/>
+        </p:spPr>
+        <p:txBody>
+          <a:bodyPr wrap="square" lIns="0" tIns="0" rIns="0" bIns="0" rtlCol="0" anchor="ctr"/>
+          <a:lstStyle/>
+          <a:p>
+            <a:pPr indent="0" marL="0">
+              <a:buNone/>
+            </a:pPr>
+            <a:r>
+              <a:rPr lang="en-US" sz="1200" dirty="0">
+                <a:solidFill>
+                  <a:schemeClr val="accent6"/>
+                </a:solidFill>
+              </a:rPr>
+              <a:t>Durata: </a:t>
+            </a:r>
+            <a:pPr indent="0" marL="0">
+              <a:buNone/>
+            </a:pPr>
+            <a:r>
+              <a:rPr lang="en-US" sz="1200" b="1" dirty="0">
+                <a:solidFill>
+                  <a:schemeClr val="tx2"/>
+                </a:solidFill>
+              </a:rPr>
+              <a:t>10 anni  ▾</a:t>
+            </a:r>
+            <a:endParaRPr lang="en-US" sz="1200" dirty="0"/>
+          </a:p>
+        </p:txBody>
+      </p:sp>
+      <p:sp>
+        <p:nvSpPr>
+          <p:cNvPr id="12" name="Opzioni durata"/>
+          <p:cNvSpPr/>
+          <p:nvPr/>
+        </p:nvSpPr>
+        <p:spPr>
+          <a:xfrm>
+            <a:off x="5532120" y="1819656"/>
+            <a:ext cx="1920240" cy="603504"/>
+          </a:xfrm>
+          <a:prstGeom prst="rect">
+            <a:avLst/>
+          </a:prstGeom>
+          <a:solidFill>
+            <a:schemeClr val="bg1"/>
+          </a:solidFill>
+          <a:ln w="9525">
+            <a:solidFill>
+              <a:srgbClr val="D9D4C5"/>
+            </a:solidFill>
+            <a:prstDash val="solid"/>
+          </a:ln>
+        </p:spPr>
+      </p:sp>
+      <p:sp>
+        <p:nvSpPr>
+          <p:cNvPr id="13" name="Text 10"/>
+          <p:cNvSpPr txBox="1"/>
+          <p:nvPr/>
+        </p:nvSpPr>
+        <p:spPr>
+          <a:xfrm>
+            <a:off x="5532120" y="1819656"/>
+            <a:ext cx="1920240" cy="603504"/>
+          </a:xfrm>
+          <a:prstGeom prst="rect">
+            <a:avLst/>
+          </a:prstGeom>
+          <a:noFill/>
+          <a:ln/>
+        </p:spPr>
+        <p:txBody>
+          <a:bodyPr wrap="square" lIns="0" tIns="0" rIns="0" bIns="0" rtlCol="0" anchor="ctr"/>
+          <a:lstStyle/>
+          <a:p>
+            <a:pPr algn="ctr" indent="0" marL="0">
+              <a:buNone/>
+            </a:pPr>
+            <a:r>
+              <a:rPr lang="en-US" sz="1100" dirty="0">
+                <a:solidFill>
+                  <a:schemeClr val="tx1"/>
+                </a:solidFill>
+              </a:rPr>
+              <a:t>7 anni  ·  10 anni  ·  21 anni</a:t>
+            </a:r>
+            <a:endParaRPr lang="en-US" sz="1100" dirty="0"/>
+          </a:p>
+        </p:txBody>
+      </p:sp>
+      <p:sp>
+        <p:nvSpPr>
+          <p:cNvPr id="14" name="Passo 1"/>
+          <p:cNvSpPr/>
+          <p:nvPr/>
+        </p:nvSpPr>
+        <p:spPr>
+          <a:xfrm>
+            <a:off x="822960" y="2633472"/>
+            <a:ext cx="420624" cy="420624"/>
+          </a:xfrm>
+          <a:prstGeom prst="ellipse">
+            <a:avLst/>
+          </a:prstGeom>
+          <a:solidFill>
+            <a:schemeClr val="tx2"/>
+          </a:solidFill>
+          <a:ln w="12700">
+            <a:solidFill>
+              <a:schemeClr val="tx2"/>
+            </a:solidFill>
+            <a:prstDash val="solid"/>
+          </a:ln>
+        </p:spPr>
+      </p:sp>
+      <p:sp>
+        <p:nvSpPr>
+          <p:cNvPr id="15" name="Text 12"/>
+          <p:cNvSpPr txBox="1"/>
+          <p:nvPr/>
+        </p:nvSpPr>
+        <p:spPr>
+          <a:xfrm>
+            <a:off x="822960" y="2633472"/>
+            <a:ext cx="420624" cy="420624"/>
+          </a:xfrm>
+          <a:prstGeom prst="rect">
+            <a:avLst/>
+          </a:prstGeom>
+          <a:noFill/>
+          <a:ln/>
+        </p:spPr>
+        <p:txBody>
+          <a:bodyPr wrap="square" lIns="0" tIns="0" rIns="0" bIns="0" rtlCol="0" anchor="ctr"/>
+          <a:lstStyle/>
+          <a:p>
+            <a:pPr algn="ctr" indent="0" marL="0">
+              <a:buNone/>
+            </a:pPr>
+            <a:r>
+              <a:rPr lang="en-US" sz="1400" b="1" dirty="0">
+                <a:solidFill>
+                  <a:schemeClr val="bg1"/>
+                </a:solidFill>
+              </a:rPr>
+              <a:t>1</a:t>
+            </a:r>
+            <a:endParaRPr lang="en-US" sz="1400" dirty="0"/>
+          </a:p>
+        </p:txBody>
+      </p:sp>
+      <p:sp>
+        <p:nvSpPr>
+          <p:cNvPr id="16" name="Text 13"/>
+          <p:cNvSpPr txBox="1"/>
+          <p:nvPr/>
+        </p:nvSpPr>
+        <p:spPr>
+          <a:xfrm>
+            <a:off x="1417320" y="2560320"/>
+            <a:ext cx="6035040" cy="603504"/>
+          </a:xfrm>
+          <a:prstGeom prst="rect">
+            <a:avLst/>
+          </a:prstGeom>
+          <a:noFill/>
+          <a:ln/>
+        </p:spPr>
+        <p:txBody>
+          <a:bodyPr wrap="square" lIns="0" tIns="0" rIns="0" bIns="0" rtlCol="0" anchor="ctr"/>
+          <a:lstStyle/>
+          <a:p>
+            <a:pPr indent="0" marL="0">
+              <a:buNone/>
+            </a:pPr>
+            <a:r>
+              <a:rPr lang="en-US" sz="1350" b="1" dirty="0">
+                <a:solidFill>
+                  <a:schemeClr val="tx2"/>
+                </a:solidFill>
+              </a:rPr>
+              <a:t>Scenari per Comune</a:t>
+            </a:r>
+            <a:endParaRPr lang="en-US" sz="1350" dirty="0"/>
+          </a:p>
+          <a:p>
+            <a:pPr indent="0" marL="0">
+              <a:buNone/>
+            </a:pPr>
+            <a:r>
+              <a:rPr lang="en-US" sz="1150" dirty="0">
+                <a:solidFill>
+                  <a:schemeClr val="tx1"/>
+                </a:solidFill>
+              </a:rPr>
+              <a:t>Più scenari per ogni Comune («prudente», «obiettivo»…), durata 7, 10 o 21 anni</a:t>
+            </a:r>
+            <a:endParaRPr lang="en-US" sz="1350" dirty="0"/>
+          </a:p>
+        </p:txBody>
+      </p:sp>
+      <p:sp>
+        <p:nvSpPr>
+          <p:cNvPr id="17" name="Passo 2"/>
+          <p:cNvSpPr/>
+          <p:nvPr/>
+        </p:nvSpPr>
+        <p:spPr>
+          <a:xfrm>
+            <a:off x="822960" y="3346704"/>
+            <a:ext cx="420624" cy="420624"/>
+          </a:xfrm>
+          <a:prstGeom prst="ellipse">
+            <a:avLst/>
+          </a:prstGeom>
+          <a:solidFill>
+            <a:schemeClr val="tx2"/>
+          </a:solidFill>
+          <a:ln w="12700">
+            <a:solidFill>
+              <a:schemeClr val="tx2"/>
+            </a:solidFill>
+            <a:prstDash val="solid"/>
+          </a:ln>
+        </p:spPr>
+      </p:sp>
+      <p:sp>
+        <p:nvSpPr>
+          <p:cNvPr id="18" name="Text 15"/>
+          <p:cNvSpPr txBox="1"/>
+          <p:nvPr/>
+        </p:nvSpPr>
+        <p:spPr>
+          <a:xfrm>
+            <a:off x="822960" y="3346704"/>
+            <a:ext cx="420624" cy="420624"/>
+          </a:xfrm>
+          <a:prstGeom prst="rect">
+            <a:avLst/>
+          </a:prstGeom>
+          <a:noFill/>
+          <a:ln/>
+        </p:spPr>
+        <p:txBody>
+          <a:bodyPr wrap="square" lIns="0" tIns="0" rIns="0" bIns="0" rtlCol="0" anchor="ctr"/>
+          <a:lstStyle/>
+          <a:p>
+            <a:pPr algn="ctr" indent="0" marL="0">
+              <a:buNone/>
+            </a:pPr>
+            <a:r>
+              <a:rPr lang="en-US" sz="1400" b="1" dirty="0">
+                <a:solidFill>
+                  <a:schemeClr val="bg1"/>
+                </a:solidFill>
+              </a:rPr>
+              <a:t>2</a:t>
+            </a:r>
+            <a:endParaRPr lang="en-US" sz="1400" dirty="0"/>
+          </a:p>
+        </p:txBody>
+      </p:sp>
+      <p:sp>
+        <p:nvSpPr>
+          <p:cNvPr id="19" name="Text 16"/>
+          <p:cNvSpPr txBox="1"/>
+          <p:nvPr/>
+        </p:nvSpPr>
+        <p:spPr>
+          <a:xfrm>
+            <a:off x="1417320" y="3273552"/>
+            <a:ext cx="6035040" cy="603504"/>
+          </a:xfrm>
+          <a:prstGeom prst="rect">
+            <a:avLst/>
+          </a:prstGeom>
+          <a:noFill/>
+          <a:ln/>
+        </p:spPr>
+        <p:txBody>
+          <a:bodyPr wrap="square" lIns="0" tIns="0" rIns="0" bIns="0" rtlCol="0" anchor="ctr"/>
+          <a:lstStyle/>
+          <a:p>
+            <a:pPr indent="0" marL="0">
+              <a:buNone/>
+            </a:pPr>
+            <a:r>
+              <a:rPr lang="en-US" sz="1350" b="1" dirty="0">
+                <a:solidFill>
+                  <a:schemeClr val="tx2"/>
+                </a:solidFill>
+              </a:rPr>
+              <a:t>Scenario di riferimento (Standard 4.8.1)</a:t>
+            </a:r>
+            <a:endParaRPr lang="en-US" sz="1350" dirty="0"/>
+          </a:p>
+          <a:p>
+            <a:pPr indent="0" marL="0">
+              <a:buNone/>
+            </a:pPr>
+            <a:r>
+              <a:rPr lang="en-US" sz="1150" dirty="0">
+                <a:solidFill>
+                  <a:schemeClr val="tx1"/>
+                </a:solidFill>
+              </a:rPr>
+              <a:t>Anno con il 65% di differenziata o valori medi del cluster SOSE; situazione attuale come partenza</a:t>
+            </a:r>
+            <a:endParaRPr lang="en-US" sz="1350" dirty="0"/>
+          </a:p>
+        </p:txBody>
+      </p:sp>
+      <p:sp>
+        <p:nvSpPr>
+          <p:cNvPr id="20" name="Passo 3"/>
+          <p:cNvSpPr/>
+          <p:nvPr/>
+        </p:nvSpPr>
+        <p:spPr>
+          <a:xfrm>
+            <a:off x="822960" y="4059936"/>
+            <a:ext cx="420624" cy="420624"/>
+          </a:xfrm>
+          <a:prstGeom prst="ellipse">
+            <a:avLst/>
+          </a:prstGeom>
+          <a:solidFill>
+            <a:schemeClr val="tx2"/>
+          </a:solidFill>
+          <a:ln w="12700">
+            <a:solidFill>
+              <a:schemeClr val="tx2"/>
+            </a:solidFill>
+            <a:prstDash val="solid"/>
+          </a:ln>
+        </p:spPr>
+      </p:sp>
+      <p:sp>
+        <p:nvSpPr>
+          <p:cNvPr id="21" name="Text 18"/>
+          <p:cNvSpPr txBox="1"/>
+          <p:nvPr/>
+        </p:nvSpPr>
+        <p:spPr>
+          <a:xfrm>
+            <a:off x="822960" y="4059936"/>
+            <a:ext cx="420624" cy="420624"/>
+          </a:xfrm>
+          <a:prstGeom prst="rect">
+            <a:avLst/>
+          </a:prstGeom>
+          <a:noFill/>
+          <a:ln/>
+        </p:spPr>
+        <p:txBody>
+          <a:bodyPr wrap="square" lIns="0" tIns="0" rIns="0" bIns="0" rtlCol="0" anchor="ctr"/>
+          <a:lstStyle/>
+          <a:p>
+            <a:pPr algn="ctr" indent="0" marL="0">
+              <a:buNone/>
+            </a:pPr>
+            <a:r>
+              <a:rPr lang="en-US" sz="1400" b="1" dirty="0">
+                <a:solidFill>
+                  <a:schemeClr val="bg1"/>
+                </a:solidFill>
+              </a:rPr>
+              <a:t>3</a:t>
+            </a:r>
+            <a:endParaRPr lang="en-US" sz="1400" dirty="0"/>
+          </a:p>
+        </p:txBody>
+      </p:sp>
+      <p:sp>
+        <p:nvSpPr>
+          <p:cNvPr id="22" name="Text 19"/>
+          <p:cNvSpPr txBox="1"/>
+          <p:nvPr/>
+        </p:nvSpPr>
+        <p:spPr>
+          <a:xfrm>
+            <a:off x="1417320" y="3986784"/>
+            <a:ext cx="6035040" cy="603504"/>
+          </a:xfrm>
+          <a:prstGeom prst="rect">
+            <a:avLst/>
+          </a:prstGeom>
+          <a:noFill/>
+          <a:ln/>
+        </p:spPr>
+        <p:txBody>
+          <a:bodyPr wrap="square" lIns="0" tIns="0" rIns="0" bIns="0" rtlCol="0" anchor="ctr"/>
+          <a:lstStyle/>
+          <a:p>
+            <a:pPr indent="0" marL="0">
+              <a:buNone/>
+            </a:pPr>
+            <a:r>
+              <a:rPr lang="en-US" sz="1350" b="1" dirty="0">
+                <a:solidFill>
+                  <a:schemeClr val="tx2"/>
+                </a:solidFill>
+              </a:rPr>
+              <a:t>Obiettivi anno per anno</a:t>
+            </a:r>
+            <a:endParaRPr lang="en-US" sz="1350" dirty="0"/>
+          </a:p>
+          <a:p>
+            <a:pPr indent="0" marL="0">
+              <a:buNone/>
+            </a:pPr>
+            <a:r>
+              <a:rPr lang="en-US" sz="1150" dirty="0">
+                <a:solidFill>
+                  <a:schemeClr val="tx1"/>
+                </a:solidFill>
+              </a:rPr>
+              <a:t>Produzione totale e pro capite prevista, secco residuo pro capite obiettivo</a:t>
+            </a:r>
+            <a:endParaRPr lang="en-US" sz="1350" dirty="0"/>
+          </a:p>
+        </p:txBody>
+      </p:sp>
+      <p:sp>
+        <p:nvSpPr>
+          <p:cNvPr id="23" name="Passo 4"/>
+          <p:cNvSpPr/>
+          <p:nvPr/>
+        </p:nvSpPr>
+        <p:spPr>
+          <a:xfrm>
+            <a:off x="822960" y="4773168"/>
+            <a:ext cx="420624" cy="420624"/>
+          </a:xfrm>
+          <a:prstGeom prst="ellipse">
+            <a:avLst/>
+          </a:prstGeom>
+          <a:solidFill>
+            <a:schemeClr val="tx2"/>
+          </a:solidFill>
+          <a:ln w="12700">
+            <a:solidFill>
+              <a:schemeClr val="tx2"/>
+            </a:solidFill>
+            <a:prstDash val="solid"/>
+          </a:ln>
+        </p:spPr>
+      </p:sp>
+      <p:sp>
+        <p:nvSpPr>
+          <p:cNvPr id="24" name="Text 21"/>
+          <p:cNvSpPr txBox="1"/>
+          <p:nvPr/>
+        </p:nvSpPr>
+        <p:spPr>
+          <a:xfrm>
+            <a:off x="822960" y="4773168"/>
+            <a:ext cx="420624" cy="420624"/>
+          </a:xfrm>
+          <a:prstGeom prst="rect">
+            <a:avLst/>
+          </a:prstGeom>
+          <a:noFill/>
+          <a:ln/>
+        </p:spPr>
+        <p:txBody>
+          <a:bodyPr wrap="square" lIns="0" tIns="0" rIns="0" bIns="0" rtlCol="0" anchor="ctr"/>
+          <a:lstStyle/>
+          <a:p>
+            <a:pPr algn="ctr" indent="0" marL="0">
+              <a:buNone/>
+            </a:pPr>
+            <a:r>
+              <a:rPr lang="en-US" sz="1400" b="1" dirty="0">
+                <a:solidFill>
+                  <a:schemeClr val="bg1"/>
+                </a:solidFill>
+              </a:rPr>
+              <a:t>4</a:t>
+            </a:r>
+            <a:endParaRPr lang="en-US" sz="1400" dirty="0"/>
+          </a:p>
+        </p:txBody>
+      </p:sp>
+      <p:sp>
+        <p:nvSpPr>
+          <p:cNvPr id="25" name="Text 22"/>
+          <p:cNvSpPr txBox="1"/>
+          <p:nvPr/>
+        </p:nvSpPr>
+        <p:spPr>
+          <a:xfrm>
+            <a:off x="1417320" y="4700016"/>
+            <a:ext cx="6035040" cy="603504"/>
+          </a:xfrm>
+          <a:prstGeom prst="rect">
+            <a:avLst/>
+          </a:prstGeom>
+          <a:noFill/>
+          <a:ln/>
+        </p:spPr>
+        <p:txBody>
+          <a:bodyPr wrap="square" lIns="0" tIns="0" rIns="0" bIns="0" rtlCol="0" anchor="ctr"/>
+          <a:lstStyle/>
+          <a:p>
+            <a:pPr indent="0" marL="0">
+              <a:buNone/>
+            </a:pPr>
+            <a:r>
+              <a:rPr lang="en-US" sz="1350" b="1" dirty="0">
+                <a:solidFill>
+                  <a:schemeClr val="tx2"/>
+                </a:solidFill>
+              </a:rPr>
+              <a:t>% di differenziata</a:t>
+            </a:r>
+            <a:endParaRPr lang="en-US" sz="1350" dirty="0"/>
+          </a:p>
+          <a:p>
+            <a:pPr indent="0" marL="0">
+              <a:buNone/>
+            </a:pPr>
+            <a:r>
+              <a:rPr lang="en-US" sz="1150" dirty="0">
+                <a:solidFill>
+                  <a:schemeClr val="tx1"/>
+                </a:solidFill>
+              </a:rPr>
+              <a:t>Ricalcolata ogni anno: (totale − secco) / totale</a:t>
+            </a:r>
+            <a:endParaRPr lang="en-US" sz="1350" dirty="0"/>
+          </a:p>
+        </p:txBody>
+      </p:sp>
+      <p:sp>
+        <p:nvSpPr>
+          <p:cNvPr id="26" name="Passo 5"/>
+          <p:cNvSpPr/>
+          <p:nvPr/>
+        </p:nvSpPr>
+        <p:spPr>
+          <a:xfrm>
+            <a:off x="822960" y="5486400"/>
+            <a:ext cx="420624" cy="420624"/>
+          </a:xfrm>
+          <a:prstGeom prst="ellipse">
+            <a:avLst/>
+          </a:prstGeom>
+          <a:solidFill>
+            <a:schemeClr val="accent2"/>
+          </a:solidFill>
+          <a:ln w="12700">
+            <a:solidFill>
+              <a:schemeClr val="accent2"/>
+            </a:solidFill>
+            <a:prstDash val="solid"/>
+          </a:ln>
+        </p:spPr>
+      </p:sp>
+      <p:sp>
+        <p:nvSpPr>
+          <p:cNvPr id="27" name="Text 24"/>
+          <p:cNvSpPr txBox="1"/>
+          <p:nvPr/>
+        </p:nvSpPr>
+        <p:spPr>
+          <a:xfrm>
+            <a:off x="822960" y="5486400"/>
+            <a:ext cx="420624" cy="420624"/>
+          </a:xfrm>
+          <a:prstGeom prst="rect">
+            <a:avLst/>
+          </a:prstGeom>
+          <a:noFill/>
+          <a:ln/>
+        </p:spPr>
+        <p:txBody>
+          <a:bodyPr wrap="square" lIns="0" tIns="0" rIns="0" bIns="0" rtlCol="0" anchor="ctr"/>
+          <a:lstStyle/>
+          <a:p>
+            <a:pPr algn="ctr" indent="0" marL="0">
+              <a:buNone/>
+            </a:pPr>
+            <a:r>
+              <a:rPr lang="en-US" sz="1400" b="1" dirty="0">
+                <a:solidFill>
+                  <a:schemeClr val="bg1"/>
+                </a:solidFill>
+              </a:rPr>
+              <a:t>5</a:t>
+            </a:r>
+            <a:endParaRPr lang="en-US" sz="1400" dirty="0"/>
+          </a:p>
+        </p:txBody>
+      </p:sp>
+      <p:sp>
+        <p:nvSpPr>
+          <p:cNvPr id="28" name="Text 25"/>
+          <p:cNvSpPr txBox="1"/>
+          <p:nvPr/>
+        </p:nvSpPr>
+        <p:spPr>
+          <a:xfrm>
+            <a:off x="1417320" y="5413248"/>
+            <a:ext cx="6035040" cy="603504"/>
+          </a:xfrm>
+          <a:prstGeom prst="rect">
+            <a:avLst/>
+          </a:prstGeom>
+          <a:noFill/>
+          <a:ln/>
+        </p:spPr>
+        <p:txBody>
+          <a:bodyPr wrap="square" lIns="0" tIns="0" rIns="0" bIns="0" rtlCol="0" anchor="ctr"/>
+          <a:lstStyle/>
+          <a:p>
+            <a:pPr indent="0" marL="0">
+              <a:buNone/>
+            </a:pPr>
+            <a:r>
+              <a:rPr lang="en-US" sz="1350" b="1" dirty="0">
+                <a:solidFill>
+                  <a:schemeClr val="tx2"/>
+                </a:solidFill>
+              </a:rPr>
+              <a:t>Crediti e conti economici</a:t>
+            </a:r>
+            <a:endParaRPr lang="en-US" sz="1350" dirty="0"/>
+          </a:p>
+          <a:p>
+            <a:pPr indent="0" marL="0">
+              <a:buNone/>
+            </a:pPr>
+            <a:r>
+              <a:rPr lang="en-US" sz="1150" dirty="0">
+                <a:solidFill>
+                  <a:schemeClr val="tx1"/>
+                </a:solidFill>
+              </a:rPr>
+              <a:t>Bilancio del Comune o per utenza (come l'Allegato A EsaCom); ricavi a 32 € anno per anno; costi Caso 1 o 2; margine</a:t>
+            </a:r>
+            <a:endParaRPr lang="en-US" sz="1350" dirty="0"/>
+          </a:p>
+        </p:txBody>
+      </p:sp>
+      <p:sp>
+        <p:nvSpPr>
+          <p:cNvPr id="29" name="Text 26"/>
+          <p:cNvSpPr txBox="1"/>
+          <p:nvPr/>
+        </p:nvSpPr>
+        <p:spPr>
+          <a:xfrm>
+            <a:off x="822960" y="6035040"/>
+            <a:ext cx="6675120" cy="228600"/>
+          </a:xfrm>
+          <a:prstGeom prst="rect">
+            <a:avLst/>
+          </a:prstGeom>
+          <a:noFill/>
+          <a:ln/>
+        </p:spPr>
+        <p:txBody>
+          <a:bodyPr wrap="square" lIns="0" tIns="0" rIns="0" bIns="0" rtlCol="0" anchor="ctr"/>
+          <a:lstStyle/>
+          <a:p>
+            <a:pPr indent="0" marL="0">
+              <a:buNone/>
+            </a:pPr>
+            <a:r>
+              <a:rPr lang="en-US" sz="1000" i="1" dirty="0">
+                <a:solidFill>
+                  <a:schemeClr val="accent6"/>
+                </a:solidFill>
+              </a:rPr>
+              <a:t>Stima ex ante a scopo di pianificazione: i crediti veri si calcolano ex post con la Banca Dati Utenze.</a:t>
+            </a:r>
+            <a:endParaRPr lang="en-US" sz="1000" dirty="0"/>
+          </a:p>
+        </p:txBody>
+      </p:sp>
+      <p:sp>
+        <p:nvSpPr>
+          <p:cNvPr id="30" name="Riquadro assistente"/>
+          <p:cNvSpPr/>
+          <p:nvPr/>
+        </p:nvSpPr>
+        <p:spPr>
+          <a:xfrm>
+            <a:off x="7863840" y="1234440"/>
+            <a:ext cx="3749040" cy="5029200"/>
+          </a:xfrm>
+          <a:prstGeom prst="roundRect">
+            <a:avLst>
+              <a:gd name="adj" fmla="val 2927"/>
             </a:avLst>
           </a:prstGeom>
           <a:solidFill>
@@ -5561,77 +5782,63 @@
       </p:sp>
       <p:sp>
         <p:nvSpPr>
-          <p:cNvPr id="6" name="Text 3"/>
-          <p:cNvSpPr txBox="1"/>
-          <p:nvPr/>
-        </p:nvSpPr>
-        <p:spPr>
-          <a:xfrm>
-            <a:off x="640080" y="5669280"/>
-            <a:ext cx="1920240" cy="566928"/>
-          </a:xfrm>
-          <a:prstGeom prst="rect">
-            <a:avLst/>
-          </a:prstGeom>
-          <a:noFill/>
-          <a:ln/>
-        </p:spPr>
-        <p:txBody>
-          <a:bodyPr wrap="square" lIns="0" tIns="0" rIns="0" bIns="0" rtlCol="0" anchor="ctr"/>
-          <a:lstStyle/>
-          <a:p>
-            <a:pPr algn="ctr" indent="0" marL="0">
-              <a:buNone/>
-            </a:pPr>
-            <a:r>
-              <a:rPr lang="en-US" sz="1150" b="1" dirty="0">
-                <a:solidFill>
-                  <a:schemeClr val="tx2"/>
-                </a:solidFill>
-              </a:rPr>
-              <a:t>Durata 7 · 10 · 21 anni</a:t>
-            </a:r>
-            <a:endParaRPr lang="en-US" sz="1150" dirty="0"/>
-          </a:p>
-        </p:txBody>
-      </p:sp>
-      <p:sp>
-        <p:nvSpPr>
-          <p:cNvPr id="7" name="Passo simulatore 2"/>
+          <p:cNvPr id="31" name="Assistente cerchio"/>
           <p:cNvSpPr/>
           <p:nvPr/>
         </p:nvSpPr>
         <p:spPr>
           <a:xfrm>
-            <a:off x="2798064" y="5669280"/>
-            <a:ext cx="2103120" cy="566928"/>
-          </a:xfrm>
-          <a:prstGeom prst="roundRect">
-            <a:avLst>
-              <a:gd name="adj" fmla="val 19355"/>
-            </a:avLst>
+            <a:off x="8092440" y="1417320"/>
+            <a:ext cx="548640" cy="548640"/>
+          </a:xfrm>
+          <a:prstGeom prst="ellipse">
+            <a:avLst/>
           </a:prstGeom>
           <a:solidFill>
-            <a:schemeClr val="accent3"/>
+            <a:schemeClr val="tx2"/>
           </a:solidFill>
           <a:ln w="12700">
             <a:solidFill>
-              <a:schemeClr val="accent3"/>
+              <a:schemeClr val="tx2"/>
             </a:solidFill>
             <a:prstDash val="solid"/>
           </a:ln>
         </p:spPr>
       </p:sp>
-      <p:sp>
-        <p:nvSpPr>
-          <p:cNvPr id="8" name="Text 5"/>
+      <p:pic>
+        <p:nvPicPr>
+          <p:cNvPr id="32" name="Assistente icona" descr="preencoded.png">    </p:cNvPr>
+          <p:cNvPicPr>
+            <a:picLocks noChangeAspect="1"/>
+          </p:cNvPicPr>
+          <p:nvPr/>
+        </p:nvPicPr>
+        <p:blipFill>
+          <a:blip r:embed="rId2"/>
+          <a:stretch>
+            <a:fillRect/>
+          </a:stretch>
+        </p:blipFill>
+        <p:spPr>
+          <a:xfrm>
+            <a:off x="8229600" y="1554480"/>
+            <a:ext cx="274320" cy="274320"/>
+          </a:xfrm>
+          <a:prstGeom prst="rect">
+            <a:avLst/>
+          </a:prstGeom>
+        </p:spPr>
+      </p:pic>
+      <p:sp>
+        <p:nvSpPr>
+          <p:cNvPr id="33" name="Text 29"/>
           <p:cNvSpPr txBox="1"/>
           <p:nvPr/>
         </p:nvSpPr>
         <p:spPr>
           <a:xfrm>
-            <a:off x="2889504" y="5669280"/>
-            <a:ext cx="1920240" cy="566928"/>
+            <a:off x="8778240" y="1371600"/>
+            <a:ext cx="2743200" cy="685800"/>
           </a:xfrm>
           <a:prstGeom prst="rect">
             <a:avLst/>
@@ -5643,43 +5850,43 @@
           <a:bodyPr wrap="square" lIns="0" tIns="0" rIns="0" bIns="0" rtlCol="0" anchor="ctr"/>
           <a:lstStyle/>
           <a:p>
-            <a:pPr algn="ctr" indent="0" marL="0">
-              <a:buNone/>
-            </a:pPr>
-            <a:r>
-              <a:rPr lang="en-US" sz="1150" b="1" dirty="0">
+            <a:pPr indent="0" marL="0">
+              <a:buNone/>
+            </a:pPr>
+            <a:r>
+              <a:rPr lang="en-US" sz="1800" b="1" dirty="0">
                 <a:solidFill>
                   <a:schemeClr val="tx2"/>
                 </a:solidFill>
               </a:rPr>
-              <a:t>Riferimento Standard 4.8.1: anno al 65% o cluster</a:t>
-            </a:r>
-            <a:endParaRPr lang="en-US" sz="1150" dirty="0"/>
-          </a:p>
-        </p:txBody>
-      </p:sp>
-      <p:sp>
-        <p:nvSpPr>
-          <p:cNvPr id="9" name="Passo simulatore 3"/>
+              <a:t>Assistente virtuale Claude</a:t>
+            </a:r>
+            <a:endParaRPr lang="en-US" sz="1800" dirty="0"/>
+          </a:p>
+        </p:txBody>
+      </p:sp>
+      <p:sp>
+        <p:nvSpPr>
+          <p:cNvPr id="34" name="Badge attivo"/>
           <p:cNvSpPr/>
           <p:nvPr/>
         </p:nvSpPr>
         <p:spPr>
           <a:xfrm>
-            <a:off x="5047488" y="5669280"/>
-            <a:ext cx="2103120" cy="566928"/>
+            <a:off x="8778240" y="2029968"/>
+            <a:ext cx="2194560" cy="256032"/>
           </a:xfrm>
           <a:prstGeom prst="roundRect">
             <a:avLst>
-              <a:gd name="adj" fmla="val 19355"/>
+              <a:gd name="adj" fmla="val 50000"/>
             </a:avLst>
           </a:prstGeom>
           <a:solidFill>
-            <a:schemeClr val="accent3"/>
+            <a:schemeClr val="bg1"/>
           </a:solidFill>
-          <a:ln w="12700">
+          <a:ln w="9525">
             <a:solidFill>
-              <a:schemeClr val="accent3"/>
+              <a:schemeClr val="tx2"/>
             </a:solidFill>
             <a:prstDash val="solid"/>
           </a:ln>
@@ -5687,14 +5894,14 @@
       </p:sp>
       <p:sp>
         <p:nvSpPr>
-          <p:cNvPr id="10" name="Text 7"/>
+          <p:cNvPr id="35" name="Text 31"/>
           <p:cNvSpPr txBox="1"/>
           <p:nvPr/>
         </p:nvSpPr>
         <p:spPr>
           <a:xfrm>
-            <a:off x="5138928" y="5669280"/>
-            <a:ext cx="1920240" cy="566928"/>
+            <a:off x="8778240" y="2029968"/>
+            <a:ext cx="2194560" cy="256032"/>
           </a:xfrm>
           <a:prstGeom prst="rect">
             <a:avLst/>
@@ -5710,54 +5917,27 @@
               <a:buNone/>
             </a:pPr>
             <a:r>
-              <a:rPr lang="en-US" sz="1150" b="1" dirty="0">
+              <a:rPr lang="en-US" sz="950" b="1" spc="100" kern="0" dirty="0">
                 <a:solidFill>
                   <a:schemeClr val="tx2"/>
                 </a:solidFill>
               </a:rPr>
-              <a:t>Obiettivi annui e traiettoria automatica</a:t>
-            </a:r>
-            <a:endParaRPr lang="en-US" sz="1150" dirty="0"/>
-          </a:p>
-        </p:txBody>
-      </p:sp>
-      <p:sp>
-        <p:nvSpPr>
-          <p:cNvPr id="11" name="Passo simulatore 4"/>
-          <p:cNvSpPr/>
-          <p:nvPr/>
-        </p:nvSpPr>
-        <p:spPr>
-          <a:xfrm>
-            <a:off x="7296912" y="5669280"/>
-            <a:ext cx="2103120" cy="566928"/>
-          </a:xfrm>
-          <a:prstGeom prst="roundRect">
-            <a:avLst>
-              <a:gd name="adj" fmla="val 19355"/>
-            </a:avLst>
-          </a:prstGeom>
-          <a:solidFill>
-            <a:schemeClr val="accent3"/>
-          </a:solidFill>
-          <a:ln w="12700">
-            <a:solidFill>
-              <a:schemeClr val="accent3"/>
-            </a:solidFill>
-            <a:prstDash val="solid"/>
-          </a:ln>
-        </p:spPr>
-      </p:sp>
-      <p:sp>
-        <p:nvSpPr>
-          <p:cNvPr id="12" name="Text 9"/>
+              <a:t>ATTIVO DAL 19/10</a:t>
+            </a:r>
+            <a:endParaRPr lang="en-US" sz="950" dirty="0"/>
+          </a:p>
+        </p:txBody>
+      </p:sp>
+      <p:sp>
+        <p:nvSpPr>
+          <p:cNvPr id="36" name="Text 32"/>
           <p:cNvSpPr txBox="1"/>
           <p:nvPr/>
         </p:nvSpPr>
         <p:spPr>
           <a:xfrm>
-            <a:off x="7388352" y="5669280"/>
-            <a:ext cx="1920240" cy="566928"/>
+            <a:off x="8092440" y="2423160"/>
+            <a:ext cx="3337560" cy="3703320"/>
           </a:xfrm>
           <a:prstGeom prst="rect">
             <a:avLst/>
@@ -5766,84 +5946,143 @@
           <a:ln/>
         </p:spPr>
         <p:txBody>
-          <a:bodyPr wrap="square" lIns="0" tIns="0" rIns="0" bIns="0" rtlCol="0" anchor="ctr"/>
-          <a:lstStyle/>
-          <a:p>
-            <a:pPr algn="ctr" indent="0" marL="0">
-              <a:buNone/>
-            </a:pPr>
-            <a:r>
-              <a:rPr lang="en-US" sz="1150" b="1" dirty="0">
+          <a:bodyPr wrap="square" lIns="0" tIns="0" rIns="0" bIns="0" rtlCol="0" anchor="t"/>
+          <a:lstStyle/>
+          <a:p>
+            <a:pPr indent="0" marL="0">
+              <a:spcAft>
+                <a:spcPts val="600"/>
+              </a:spcAft>
+              <a:buNone/>
+            </a:pPr>
+            <a:r>
+              <a:rPr lang="en-US" sz="1250" b="1" dirty="0">
                 <a:solidFill>
                   <a:schemeClr val="tx2"/>
                 </a:solidFill>
               </a:rPr>
-              <a:t>% differenziata ricalcolata</a:t>
-            </a:r>
-            <a:endParaRPr lang="en-US" sz="1150" dirty="0"/>
-          </a:p>
-        </p:txBody>
-      </p:sp>
-      <p:sp>
-        <p:nvSpPr>
-          <p:cNvPr id="13" name="Passo simulatore 5"/>
-          <p:cNvSpPr/>
-          <p:nvPr/>
-        </p:nvSpPr>
-        <p:spPr>
-          <a:xfrm>
-            <a:off x="9546336" y="5669280"/>
-            <a:ext cx="2103120" cy="566928"/>
-          </a:xfrm>
-          <a:prstGeom prst="roundRect">
-            <a:avLst>
-              <a:gd name="adj" fmla="val 19355"/>
-            </a:avLst>
-          </a:prstGeom>
-          <a:solidFill>
-            <a:schemeClr val="accent4"/>
-          </a:solidFill>
-          <a:ln w="12700">
-            <a:solidFill>
-              <a:schemeClr val="accent4"/>
-            </a:solidFill>
-            <a:prstDash val="solid"/>
-          </a:ln>
-        </p:spPr>
-      </p:sp>
-      <p:sp>
-        <p:nvSpPr>
-          <p:cNvPr id="14" name="Text 11"/>
-          <p:cNvSpPr txBox="1"/>
-          <p:nvPr/>
-        </p:nvSpPr>
-        <p:spPr>
-          <a:xfrm>
-            <a:off x="9637776" y="5669280"/>
-            <a:ext cx="1920240" cy="566928"/>
-          </a:xfrm>
-          <a:prstGeom prst="rect">
-            <a:avLst/>
-          </a:prstGeom>
-          <a:noFill/>
-          <a:ln/>
-        </p:spPr>
-        <p:txBody>
-          <a:bodyPr wrap="square" lIns="0" tIns="0" rIns="0" bIns="0" rtlCol="0" anchor="ctr"/>
-          <a:lstStyle/>
-          <a:p>
-            <a:pPr algn="ctr" indent="0" marL="0">
-              <a:buNone/>
-            </a:pPr>
-            <a:r>
-              <a:rPr lang="en-US" sz="1150" b="1" dirty="0">
+              <a:t>Per enti e Amministratori</a:t>
+            </a:r>
+            <a:endParaRPr lang="en-US" sz="1250" dirty="0"/>
+          </a:p>
+          <a:p>
+            <a:pPr indent="0" marL="0">
+              <a:spcAft>
+                <a:spcPts val="600"/>
+              </a:spcAft>
+              <a:buNone/>
+            </a:pPr>
+            <a:r>
+              <a:rPr lang="en-US" sz="1250" dirty="0">
+                <a:solidFill>
+                  <a:schemeClr val="tx1"/>
+                </a:solidFill>
+              </a:rPr>
+              <a:t>pulsante «✦ Assistente»: come si fa un'operazione, fasi, costi; risponde dai manuali e dalle tariffe</a:t>
+            </a:r>
+            <a:endParaRPr lang="en-US" sz="1250" dirty="0"/>
+          </a:p>
+          <a:p>
+            <a:pPr indent="0" marL="0">
+              <a:spcAft>
+                <a:spcPts val="600"/>
+              </a:spcAft>
+              <a:buNone/>
+            </a:pPr>
+            <a:r>
+              <a:rPr lang="en-US" sz="1250" b="1" dirty="0">
                 <a:solidFill>
                   <a:schemeClr val="tx2"/>
                 </a:solidFill>
               </a:rPr>
-              <a:t>Crediti per anno, confronto, CSV e stampa</a:t>
-            </a:r>
-            <a:endParaRPr lang="en-US" sz="1150" dirty="0"/>
+              <a:t>Garanzie</a:t>
+            </a:r>
+            <a:endParaRPr lang="en-US" sz="1250" dirty="0"/>
+          </a:p>
+          <a:p>
+            <a:pPr indent="0" marL="0">
+              <a:spcAft>
+                <a:spcPts val="600"/>
+              </a:spcAft>
+              <a:buNone/>
+            </a:pPr>
+            <a:r>
+              <a:rPr lang="en-US" sz="1250" dirty="0">
+                <a:solidFill>
+                  <a:schemeClr val="tx1"/>
+                </a:solidFill>
+              </a:rPr>
+              <a:t>non vede le pratiche e non decide; nessun testo salvato; limite di domande al giorno</a:t>
+            </a:r>
+            <a:endParaRPr lang="en-US" sz="1250" dirty="0"/>
+          </a:p>
+          <a:p>
+            <a:pPr indent="0" marL="0">
+              <a:spcAft>
+                <a:spcPts val="600"/>
+              </a:spcAft>
+              <a:buNone/>
+            </a:pPr>
+            <a:r>
+              <a:rPr lang="en-US" sz="1250" b="1" dirty="0">
+                <a:solidFill>
+                  <a:schemeClr val="tx2"/>
+                </a:solidFill>
+              </a:rPr>
+              <a:t>Come funziona</a:t>
+            </a:r>
+            <a:endParaRPr lang="en-US" sz="1250" dirty="0"/>
+          </a:p>
+          <a:p>
+            <a:pPr indent="0" marL="0">
+              <a:spcAft>
+                <a:spcPts val="600"/>
+              </a:spcAft>
+              <a:buNone/>
+            </a:pPr>
+            <a:r>
+              <a:rPr lang="en-US" sz="1250" dirty="0">
+                <a:solidFill>
+                  <a:schemeClr val="tx1"/>
+                </a:solidFill>
+              </a:rPr>
+              <a:t>Claude Haiku 5.5 tramite una funzione sul server; la chiave resta in Supabase; meno di un centesimo a domanda</a:t>
+            </a:r>
+            <a:endParaRPr lang="en-US" sz="1250" dirty="0"/>
+          </a:p>
+          <a:p>
+            <a:pPr indent="0" marL="0">
+              <a:spcAft>
+                <a:spcPts val="600"/>
+              </a:spcAft>
+              <a:buNone/>
+            </a:pPr>
+            <a:r>
+              <a:rPr lang="en-US" sz="1250" b="1" dirty="0">
+                <a:solidFill>
+                  <a:schemeClr val="tx2"/>
+                </a:solidFill>
+              </a:rPr>
+              <a:t>Prossimi passi</a:t>
+            </a:r>
+            <a:endParaRPr lang="en-US" sz="1250" dirty="0"/>
+          </a:p>
+          <a:p>
+            <a:pPr indent="0" marL="0">
+              <a:spcAft>
+                <a:spcPts val="600"/>
+              </a:spcAft>
+              <a:buNone/>
+            </a:pPr>
+            <a:r>
+              <a:rPr lang="en-US" sz="1250" dirty="0">
+                <a:solidFill>
+                  <a:schemeClr val="tx1"/>
+                </a:solidFill>
+              </a:rPr>
+              <a:t>estensione agli Operatori e aiuto sulla singola pratica, con regole sulla privacy</a:t>
+            </a:r>
+            <a:endParaRPr lang="en-US" sz="1250" dirty="0"/>
           </a:p>
         </p:txBody>
       </p:sp>
@@ -5952,15 +6191,62 @@
                 <a:ea typeface="Cambria" pitchFamily="34" charset="-122"/>
                 <a:cs typeface="Cambria" pitchFamily="34" charset="-120"/>
               </a:rPr>
-              <a:t>Simulazione economica: ricavi e costi per il Comune</a:t>
+              <a:t>Il simulatore in pratica</a:t>
             </a:r>
             <a:endParaRPr lang="en-US" sz="3000" dirty="0"/>
+          </a:p>
+        </p:txBody>
+      </p:sp>
+      <p:sp>
+        <p:nvSpPr>
+          <p:cNvPr id="3" name="Text 1"/>
+          <p:cNvSpPr txBox="1"/>
+          <p:nvPr/>
+        </p:nvSpPr>
+        <p:spPr>
+          <a:xfrm>
+            <a:off x="548640" y="1097280"/>
+            <a:ext cx="11064240" cy="365760"/>
+          </a:xfrm>
+          <a:prstGeom prst="rect">
+            <a:avLst/>
+          </a:prstGeom>
+          <a:noFill/>
+          <a:ln/>
+        </p:spPr>
+        <p:txBody>
+          <a:bodyPr wrap="square" lIns="0" tIns="0" rIns="0" bIns="0" rtlCol="0" anchor="ctr"/>
+          <a:lstStyle/>
+          <a:p>
+            <a:pPr indent="0" marL="0">
+              <a:buNone/>
+            </a:pPr>
+            <a:r>
+              <a:rPr lang="en-US" sz="1300" b="1" dirty="0">
+                <a:solidFill>
+                  <a:schemeClr val="tx2"/>
+                </a:solidFill>
+              </a:rPr>
+              <a:t>Portale → menu Simulatore. </a:t>
+            </a:r>
+            <a:pPr indent="0" marL="0">
+              <a:buNone/>
+            </a:pPr>
+            <a:r>
+              <a:rPr lang="en-US" sz="1300" dirty="0">
+                <a:solidFill>
+                  <a:schemeClr val="accent6"/>
+                </a:solidFill>
+              </a:rPr>
+              <a:t>Esempio con dati di prova: Comune di 12.500 abitanti (cluster 4), oggi 430 kg/ab e 90 kg/ab di secco, obiettivo 2036: 380 e 50 kg/ab.</a:t>
+            </a:r>
+            <a:endParaRPr lang="en-US" sz="1300" dirty="0"/>
           </a:p>
         </p:txBody>
       </p:sp>
       <p:pic>
         <p:nvPicPr>
-          <p:cNvPr id="3" name="Schermata costi" descr="Simulatore, metodo per utenza: costi Caso 1 per 16.735 abitanti, ricavi, margine e margine netto per anno">    </p:cNvPr>
+          <p:cNvPr id="4" name="Schermata simulatore" descr="Risultati del simulatore: crediti netti per anno e raccolta differenziata">    </p:cNvPr>
           <p:cNvPicPr>
             <a:picLocks noChangeAspect="1"/>
           </p:cNvPicPr>
@@ -5974,8 +6260,8 @@
         </p:blipFill>
         <p:spPr>
           <a:xfrm>
-            <a:off x="548640" y="1188720"/>
-            <a:ext cx="6242333" cy="5029200"/>
+            <a:off x="548640" y="1572768"/>
+            <a:ext cx="11064240" cy="3955466"/>
           </a:xfrm>
           <a:prstGeom prst="rect">
             <a:avLst/>
@@ -5984,26 +6270,26 @@
       </p:pic>
       <p:sp>
         <p:nvSpPr>
-          <p:cNvPr id="4" name="Riquadro economia"/>
+          <p:cNvPr id="5" name="Passo simulatore 1"/>
           <p:cNvSpPr/>
           <p:nvPr/>
         </p:nvSpPr>
         <p:spPr>
           <a:xfrm>
-            <a:off x="7452360" y="1188720"/>
-            <a:ext cx="4160520" cy="5001768"/>
+            <a:off x="548640" y="5669280"/>
+            <a:ext cx="2103120" cy="566928"/>
           </a:xfrm>
           <a:prstGeom prst="roundRect">
             <a:avLst>
-              <a:gd name="adj" fmla="val 2637"/>
+              <a:gd name="adj" fmla="val 19355"/>
             </a:avLst>
           </a:prstGeom>
           <a:solidFill>
-            <a:schemeClr val="bg2"/>
+            <a:schemeClr val="accent3"/>
           </a:solidFill>
           <a:ln w="12700">
             <a:solidFill>
-              <a:schemeClr val="bg2"/>
+              <a:schemeClr val="accent3"/>
             </a:solidFill>
             <a:prstDash val="solid"/>
           </a:ln>
@@ -6011,14 +6297,14 @@
       </p:sp>
       <p:sp>
         <p:nvSpPr>
-          <p:cNvPr id="5" name="Text 2"/>
+          <p:cNvPr id="6" name="Text 3"/>
           <p:cNvSpPr txBox="1"/>
           <p:nvPr/>
         </p:nvSpPr>
         <p:spPr>
           <a:xfrm>
-            <a:off x="7635240" y="1298448"/>
-            <a:ext cx="3794760" cy="4800600"/>
+            <a:off x="640080" y="5669280"/>
+            <a:ext cx="1920240" cy="566928"/>
           </a:xfrm>
           <a:prstGeom prst="rect">
             <a:avLst/>
@@ -6027,284 +6313,273 @@
           <a:ln/>
         </p:spPr>
         <p:txBody>
-          <a:bodyPr wrap="square" lIns="0" tIns="0" rIns="0" bIns="0" rtlCol="0" anchor="t"/>
-          <a:lstStyle/>
-          <a:p>
-            <a:pPr indent="0" marL="0">
-              <a:spcAft>
-                <a:spcPts val="300"/>
-              </a:spcAft>
-              <a:buNone/>
-            </a:pPr>
-            <a:r>
-              <a:rPr lang="en-US" sz="1400" b="1" dirty="0">
+          <a:bodyPr wrap="square" lIns="0" tIns="0" rIns="0" bIns="0" rtlCol="0" anchor="ctr"/>
+          <a:lstStyle/>
+          <a:p>
+            <a:pPr algn="ctr" indent="0" marL="0">
+              <a:buNone/>
+            </a:pPr>
+            <a:r>
+              <a:rPr lang="en-US" sz="1150" b="1" dirty="0">
                 <a:solidFill>
                   <a:schemeClr val="tx2"/>
                 </a:solidFill>
               </a:rPr>
-              <a:t>Ricavi</a:t>
-            </a:r>
-            <a:endParaRPr lang="en-US" sz="1200" dirty="0"/>
-          </a:p>
-          <a:p>
-            <a:pPr indent="0" marL="0">
-              <a:spcAft>
-                <a:spcPts val="300"/>
-              </a:spcAft>
-              <a:buNone/>
-            </a:pPr>
-            <a:r>
-              <a:rPr lang="en-US" sz="1200" dirty="0">
-                <a:solidFill>
-                  <a:schemeClr val="tx1"/>
-                </a:solidFill>
-              </a:rPr>
-              <a:t>Valore del credito digitato anno per anno (proposto 32 €).</a:t>
-            </a:r>
-            <a:endParaRPr lang="en-US" sz="1200" dirty="0"/>
-          </a:p>
-          <a:p>
-            <a:pPr indent="0" marL="0">
-              <a:spcAft>
-                <a:spcPts val="300"/>
-              </a:spcAft>
-              <a:buNone/>
-            </a:pPr>
-            <a:r>
-              <a:rPr lang="en-US" sz="600" dirty="0">
-                <a:solidFill>
-                  <a:schemeClr val="tx1"/>
-                </a:solidFill>
-              </a:rPr>
-              <a:t> </a:t>
-            </a:r>
-            <a:endParaRPr lang="en-US" sz="1200" dirty="0"/>
-          </a:p>
-          <a:p>
-            <a:pPr indent="0" marL="0">
-              <a:spcAft>
-                <a:spcPts val="300"/>
-              </a:spcAft>
-              <a:buNone/>
-            </a:pPr>
-            <a:r>
-              <a:rPr lang="en-US" sz="1400" b="1" dirty="0">
+              <a:t>Durata 7 · 10 · 21 anni</a:t>
+            </a:r>
+            <a:endParaRPr lang="en-US" sz="1150" dirty="0"/>
+          </a:p>
+        </p:txBody>
+      </p:sp>
+      <p:sp>
+        <p:nvSpPr>
+          <p:cNvPr id="7" name="Passo simulatore 2"/>
+          <p:cNvSpPr/>
+          <p:nvPr/>
+        </p:nvSpPr>
+        <p:spPr>
+          <a:xfrm>
+            <a:off x="2798064" y="5669280"/>
+            <a:ext cx="2103120" cy="566928"/>
+          </a:xfrm>
+          <a:prstGeom prst="roundRect">
+            <a:avLst>
+              <a:gd name="adj" fmla="val 19355"/>
+            </a:avLst>
+          </a:prstGeom>
+          <a:solidFill>
+            <a:schemeClr val="accent3"/>
+          </a:solidFill>
+          <a:ln w="12700">
+            <a:solidFill>
+              <a:schemeClr val="accent3"/>
+            </a:solidFill>
+            <a:prstDash val="solid"/>
+          </a:ln>
+        </p:spPr>
+      </p:sp>
+      <p:sp>
+        <p:nvSpPr>
+          <p:cNvPr id="8" name="Text 5"/>
+          <p:cNvSpPr txBox="1"/>
+          <p:nvPr/>
+        </p:nvSpPr>
+        <p:spPr>
+          <a:xfrm>
+            <a:off x="2889504" y="5669280"/>
+            <a:ext cx="1920240" cy="566928"/>
+          </a:xfrm>
+          <a:prstGeom prst="rect">
+            <a:avLst/>
+          </a:prstGeom>
+          <a:noFill/>
+          <a:ln/>
+        </p:spPr>
+        <p:txBody>
+          <a:bodyPr wrap="square" lIns="0" tIns="0" rIns="0" bIns="0" rtlCol="0" anchor="ctr"/>
+          <a:lstStyle/>
+          <a:p>
+            <a:pPr algn="ctr" indent="0" marL="0">
+              <a:buNone/>
+            </a:pPr>
+            <a:r>
+              <a:rPr lang="en-US" sz="1150" b="1" dirty="0">
                 <a:solidFill>
                   <a:schemeClr val="tx2"/>
                 </a:solidFill>
               </a:rPr>
-              <a:t>Costi per il Comune: Caso 1 o Caso 2?</a:t>
-            </a:r>
-            <a:endParaRPr lang="en-US" sz="1200" dirty="0"/>
-          </a:p>
-          <a:p>
-            <a:pPr indent="0" marL="0">
-              <a:spcAft>
-                <a:spcPts val="300"/>
-              </a:spcAft>
-              <a:buNone/>
-            </a:pPr>
-            <a:r>
-              <a:rPr lang="en-US" sz="1200" dirty="0">
-                <a:solidFill>
-                  <a:schemeClr val="tx1"/>
-                </a:solidFill>
-              </a:rPr>
-              <a:t>Caso 1 progetto volontario, Caso 2 progetto obbligatorio da bando di gara. Sei voci (Progetto, Rapporto, registrazioni) in € per abitante interpolati per popolazione, con minimo e massimo annuo (tabelle del 28/07/2026).</a:t>
-            </a:r>
-            <a:endParaRPr lang="en-US" sz="1200" dirty="0"/>
-          </a:p>
-          <a:p>
-            <a:pPr indent="0" marL="0">
-              <a:spcAft>
-                <a:spcPts val="300"/>
-              </a:spcAft>
-              <a:buNone/>
-            </a:pPr>
-            <a:r>
-              <a:rPr lang="en-US" sz="600" dirty="0">
-                <a:solidFill>
-                  <a:schemeClr val="tx1"/>
-                </a:solidFill>
-              </a:rPr>
-              <a:t> </a:t>
-            </a:r>
-            <a:endParaRPr lang="en-US" sz="1200" dirty="0"/>
-          </a:p>
-          <a:p>
-            <a:pPr indent="0" marL="0">
-              <a:spcAft>
-                <a:spcPts val="300"/>
-              </a:spcAft>
-              <a:buNone/>
-            </a:pPr>
-            <a:r>
-              <a:rPr lang="en-US" sz="1400" b="1" dirty="0">
+              <a:t>Riferimento Standard 4.8.1: anno al 65% o cluster</a:t>
+            </a:r>
+            <a:endParaRPr lang="en-US" sz="1150" dirty="0"/>
+          </a:p>
+        </p:txBody>
+      </p:sp>
+      <p:sp>
+        <p:nvSpPr>
+          <p:cNvPr id="9" name="Passo simulatore 3"/>
+          <p:cNvSpPr/>
+          <p:nvPr/>
+        </p:nvSpPr>
+        <p:spPr>
+          <a:xfrm>
+            <a:off x="5047488" y="5669280"/>
+            <a:ext cx="2103120" cy="566928"/>
+          </a:xfrm>
+          <a:prstGeom prst="roundRect">
+            <a:avLst>
+              <a:gd name="adj" fmla="val 19355"/>
+            </a:avLst>
+          </a:prstGeom>
+          <a:solidFill>
+            <a:schemeClr val="accent3"/>
+          </a:solidFill>
+          <a:ln w="12700">
+            <a:solidFill>
+              <a:schemeClr val="accent3"/>
+            </a:solidFill>
+            <a:prstDash val="solid"/>
+          </a:ln>
+        </p:spPr>
+      </p:sp>
+      <p:sp>
+        <p:nvSpPr>
+          <p:cNvPr id="10" name="Text 7"/>
+          <p:cNvSpPr txBox="1"/>
+          <p:nvPr/>
+        </p:nvSpPr>
+        <p:spPr>
+          <a:xfrm>
+            <a:off x="5138928" y="5669280"/>
+            <a:ext cx="1920240" cy="566928"/>
+          </a:xfrm>
+          <a:prstGeom prst="rect">
+            <a:avLst/>
+          </a:prstGeom>
+          <a:noFill/>
+          <a:ln/>
+        </p:spPr>
+        <p:txBody>
+          <a:bodyPr wrap="square" lIns="0" tIns="0" rIns="0" bIns="0" rtlCol="0" anchor="ctr"/>
+          <a:lstStyle/>
+          <a:p>
+            <a:pPr algn="ctr" indent="0" marL="0">
+              <a:buNone/>
+            </a:pPr>
+            <a:r>
+              <a:rPr lang="en-US" sz="1150" b="1" dirty="0">
                 <a:solidFill>
                   <a:schemeClr val="tx2"/>
                 </a:solidFill>
               </a:rPr>
-              <a:t>Bovisio-Masciago, 10 anni, 32 €/credito</a:t>
-            </a:r>
-            <a:endParaRPr lang="en-US" sz="1200" dirty="0"/>
-          </a:p>
-          <a:p>
-            <a:pPr indent="0" marL="0">
-              <a:spcAft>
-                <a:spcPts val="300"/>
-              </a:spcAft>
-              <a:buNone/>
-            </a:pPr>
-            <a:r>
-              <a:rPr lang="en-US" sz="1200" b="1" dirty="0">
-                <a:solidFill>
-                  <a:schemeClr val="tx1"/>
-                </a:solidFill>
-              </a:rPr>
-              <a:t>Per utenza (come Allegato A): </a:t>
-            </a:r>
-            <a:pPr indent="0" marL="0">
-              <a:spcAft>
-                <a:spcPts val="300"/>
-              </a:spcAft>
-              <a:buNone/>
-            </a:pPr>
-            <a:r>
-              <a:rPr lang="en-US" sz="1200" dirty="0">
-                <a:solidFill>
-                  <a:schemeClr val="tx1"/>
-                </a:solidFill>
-              </a:rPr>
-              <a:t>34.188 crediti, ricavi € 1.093.792</a:t>
-            </a:r>
-            <a:endParaRPr lang="en-US" sz="1200" dirty="0"/>
-          </a:p>
-          <a:p>
-            <a:pPr indent="0" marL="0">
-              <a:spcAft>
-                <a:spcPts val="300"/>
-              </a:spcAft>
-              <a:buNone/>
-            </a:pPr>
-            <a:r>
-              <a:rPr lang="en-US" sz="1200" dirty="0">
-                <a:solidFill>
-                  <a:schemeClr val="tx1"/>
-                </a:solidFill>
-              </a:rPr>
-              <a:t>Caso 1 costi € 162.330 → </a:t>
-            </a:r>
-            <a:pPr indent="0" marL="0">
-              <a:spcAft>
-                <a:spcPts val="300"/>
-              </a:spcAft>
-              <a:buNone/>
-            </a:pPr>
-            <a:r>
-              <a:rPr lang="en-US" sz="1200" b="1" dirty="0">
+              <a:t>Obiettivi annui e traiettoria automatica</a:t>
+            </a:r>
+            <a:endParaRPr lang="en-US" sz="1150" dirty="0"/>
+          </a:p>
+        </p:txBody>
+      </p:sp>
+      <p:sp>
+        <p:nvSpPr>
+          <p:cNvPr id="11" name="Passo simulatore 4"/>
+          <p:cNvSpPr/>
+          <p:nvPr/>
+        </p:nvSpPr>
+        <p:spPr>
+          <a:xfrm>
+            <a:off x="7296912" y="5669280"/>
+            <a:ext cx="2103120" cy="566928"/>
+          </a:xfrm>
+          <a:prstGeom prst="roundRect">
+            <a:avLst>
+              <a:gd name="adj" fmla="val 19355"/>
+            </a:avLst>
+          </a:prstGeom>
+          <a:solidFill>
+            <a:schemeClr val="accent3"/>
+          </a:solidFill>
+          <a:ln w="12700">
+            <a:solidFill>
+              <a:schemeClr val="accent3"/>
+            </a:solidFill>
+            <a:prstDash val="solid"/>
+          </a:ln>
+        </p:spPr>
+      </p:sp>
+      <p:sp>
+        <p:nvSpPr>
+          <p:cNvPr id="12" name="Text 9"/>
+          <p:cNvSpPr txBox="1"/>
+          <p:nvPr/>
+        </p:nvSpPr>
+        <p:spPr>
+          <a:xfrm>
+            <a:off x="7388352" y="5669280"/>
+            <a:ext cx="1920240" cy="566928"/>
+          </a:xfrm>
+          <a:prstGeom prst="rect">
+            <a:avLst/>
+          </a:prstGeom>
+          <a:noFill/>
+          <a:ln/>
+        </p:spPr>
+        <p:txBody>
+          <a:bodyPr wrap="square" lIns="0" tIns="0" rIns="0" bIns="0" rtlCol="0" anchor="ctr"/>
+          <a:lstStyle/>
+          <a:p>
+            <a:pPr algn="ctr" indent="0" marL="0">
+              <a:buNone/>
+            </a:pPr>
+            <a:r>
+              <a:rPr lang="en-US" sz="1150" b="1" dirty="0">
                 <a:solidFill>
                   <a:schemeClr val="tx2"/>
                 </a:solidFill>
               </a:rPr>
-              <a:t>+€ 931.463</a:t>
-            </a:r>
-            <a:endParaRPr lang="en-US" sz="1200" dirty="0"/>
-          </a:p>
-          <a:p>
-            <a:pPr indent="0" marL="0">
-              <a:spcAft>
-                <a:spcPts val="300"/>
-              </a:spcAft>
-              <a:buNone/>
-            </a:pPr>
-            <a:r>
-              <a:rPr lang="en-US" sz="1200" dirty="0">
-                <a:solidFill>
-                  <a:schemeClr val="tx1"/>
-                </a:solidFill>
-              </a:rPr>
-              <a:t>Caso 2 costi € 242.658 → </a:t>
-            </a:r>
-            <a:pPr indent="0" marL="0">
-              <a:spcAft>
-                <a:spcPts val="300"/>
-              </a:spcAft>
-              <a:buNone/>
-            </a:pPr>
-            <a:r>
-              <a:rPr lang="en-US" sz="1200" b="1" dirty="0">
+              <a:t>% differenziata ricalcolata</a:t>
+            </a:r>
+            <a:endParaRPr lang="en-US" sz="1150" dirty="0"/>
+          </a:p>
+        </p:txBody>
+      </p:sp>
+      <p:sp>
+        <p:nvSpPr>
+          <p:cNvPr id="13" name="Passo simulatore 5"/>
+          <p:cNvSpPr/>
+          <p:nvPr/>
+        </p:nvSpPr>
+        <p:spPr>
+          <a:xfrm>
+            <a:off x="9546336" y="5669280"/>
+            <a:ext cx="2103120" cy="566928"/>
+          </a:xfrm>
+          <a:prstGeom prst="roundRect">
+            <a:avLst>
+              <a:gd name="adj" fmla="val 19355"/>
+            </a:avLst>
+          </a:prstGeom>
+          <a:solidFill>
+            <a:schemeClr val="accent4"/>
+          </a:solidFill>
+          <a:ln w="12700">
+            <a:solidFill>
+              <a:schemeClr val="accent4"/>
+            </a:solidFill>
+            <a:prstDash val="solid"/>
+          </a:ln>
+        </p:spPr>
+      </p:sp>
+      <p:sp>
+        <p:nvSpPr>
+          <p:cNvPr id="14" name="Text 11"/>
+          <p:cNvSpPr txBox="1"/>
+          <p:nvPr/>
+        </p:nvSpPr>
+        <p:spPr>
+          <a:xfrm>
+            <a:off x="9637776" y="5669280"/>
+            <a:ext cx="1920240" cy="566928"/>
+          </a:xfrm>
+          <a:prstGeom prst="rect">
+            <a:avLst/>
+          </a:prstGeom>
+          <a:noFill/>
+          <a:ln/>
+        </p:spPr>
+        <p:txBody>
+          <a:bodyPr wrap="square" lIns="0" tIns="0" rIns="0" bIns="0" rtlCol="0" anchor="ctr"/>
+          <a:lstStyle/>
+          <a:p>
+            <a:pPr algn="ctr" indent="0" marL="0">
+              <a:buNone/>
+            </a:pPr>
+            <a:r>
+              <a:rPr lang="en-US" sz="1150" b="1" dirty="0">
                 <a:solidFill>
                   <a:schemeClr val="tx2"/>
                 </a:solidFill>
               </a:rPr>
-              <a:t>+€ 851.135</a:t>
-            </a:r>
-            <a:endParaRPr lang="en-US" sz="1200" dirty="0"/>
-          </a:p>
-          <a:p>
-            <a:pPr indent="0" marL="0">
-              <a:spcAft>
-                <a:spcPts val="300"/>
-              </a:spcAft>
-              <a:buNone/>
-            </a:pPr>
-            <a:r>
-              <a:rPr lang="en-US" sz="1200" b="1" dirty="0">
-                <a:solidFill>
-                  <a:schemeClr val="tx1"/>
-                </a:solidFill>
-              </a:rPr>
-              <a:t>Bilancio del Comune: </a:t>
-            </a:r>
-            <a:pPr indent="0" marL="0">
-              <a:spcAft>
-                <a:spcPts val="300"/>
-              </a:spcAft>
-              <a:buNone/>
-            </a:pPr>
-            <a:r>
-              <a:rPr lang="en-US" sz="1200" dirty="0">
-                <a:solidFill>
-                  <a:schemeClr val="tx1"/>
-                </a:solidFill>
-              </a:rPr>
-              <a:t>6.707 crediti, € 214.464; Caso 1 +€ 52.134, Caso 2 −€ 28.193</a:t>
-            </a:r>
-            <a:endParaRPr lang="en-US" sz="1200" dirty="0"/>
-          </a:p>
-          <a:p>
-            <a:pPr indent="0" marL="0">
-              <a:spcAft>
-                <a:spcPts val="300"/>
-              </a:spcAft>
-              <a:buNone/>
-            </a:pPr>
-            <a:r>
-              <a:rPr lang="en-US" sz="600" dirty="0">
-                <a:solidFill>
-                  <a:schemeClr val="tx1"/>
-                </a:solidFill>
-              </a:rPr>
-              <a:t> </a:t>
-            </a:r>
-            <a:endParaRPr lang="en-US" sz="1200" dirty="0"/>
-          </a:p>
-          <a:p>
-            <a:pPr indent="0" marL="0">
-              <a:spcAft>
-                <a:spcPts val="300"/>
-              </a:spcAft>
-              <a:buNone/>
-            </a:pPr>
-            <a:r>
-              <a:rPr lang="en-US" sz="1200" i="1" dirty="0">
-                <a:solidFill>
-                  <a:schemeClr val="accent6"/>
-                </a:solidFill>
-              </a:rPr>
-              <a:t>Il Caso 1 riproduce i costi dei contratti EsaCom, il metodo per utenza le loro stime (0,19-0,23 crediti per abitante all'anno).</a:t>
-            </a:r>
-            <a:endParaRPr lang="en-US" sz="1200" dirty="0"/>
+              <a:t>Crediti per anno, confronto, CSV e stampa</a:t>
+            </a:r>
+            <a:endParaRPr lang="en-US" sz="1150" dirty="0"/>
           </a:p>
         </p:txBody>
       </p:sp>
@@ -6413,6 +6688,467 @@
                 <a:ea typeface="Cambria" pitchFamily="34" charset="-122"/>
                 <a:cs typeface="Cambria" pitchFamily="34" charset="-120"/>
               </a:rPr>
+              <a:t>Simulazione economica: ricavi e costi per il Comune</a:t>
+            </a:r>
+            <a:endParaRPr lang="en-US" sz="3000" dirty="0"/>
+          </a:p>
+        </p:txBody>
+      </p:sp>
+      <p:pic>
+        <p:nvPicPr>
+          <p:cNvPr id="3" name="Schermata costi" descr="Simulatore, metodo per utenza: costi Caso 1 per 16.735 abitanti, ricavi, margine e margine netto per anno">    </p:cNvPr>
+          <p:cNvPicPr>
+            <a:picLocks noChangeAspect="1"/>
+          </p:cNvPicPr>
+          <p:nvPr/>
+        </p:nvPicPr>
+        <p:blipFill>
+          <a:blip r:embed="rId1"/>
+          <a:stretch>
+            <a:fillRect/>
+          </a:stretch>
+        </p:blipFill>
+        <p:spPr>
+          <a:xfrm>
+            <a:off x="548640" y="1188720"/>
+            <a:ext cx="6242333" cy="5029200"/>
+          </a:xfrm>
+          <a:prstGeom prst="rect">
+            <a:avLst/>
+          </a:prstGeom>
+        </p:spPr>
+      </p:pic>
+      <p:sp>
+        <p:nvSpPr>
+          <p:cNvPr id="4" name="Riquadro economia"/>
+          <p:cNvSpPr/>
+          <p:nvPr/>
+        </p:nvSpPr>
+        <p:spPr>
+          <a:xfrm>
+            <a:off x="7452360" y="1188720"/>
+            <a:ext cx="4160520" cy="5001768"/>
+          </a:xfrm>
+          <a:prstGeom prst="roundRect">
+            <a:avLst>
+              <a:gd name="adj" fmla="val 2637"/>
+            </a:avLst>
+          </a:prstGeom>
+          <a:solidFill>
+            <a:schemeClr val="bg2"/>
+          </a:solidFill>
+          <a:ln w="12700">
+            <a:solidFill>
+              <a:schemeClr val="bg2"/>
+            </a:solidFill>
+            <a:prstDash val="solid"/>
+          </a:ln>
+        </p:spPr>
+      </p:sp>
+      <p:sp>
+        <p:nvSpPr>
+          <p:cNvPr id="5" name="Text 2"/>
+          <p:cNvSpPr txBox="1"/>
+          <p:nvPr/>
+        </p:nvSpPr>
+        <p:spPr>
+          <a:xfrm>
+            <a:off x="7635240" y="1298448"/>
+            <a:ext cx="3794760" cy="4800600"/>
+          </a:xfrm>
+          <a:prstGeom prst="rect">
+            <a:avLst/>
+          </a:prstGeom>
+          <a:noFill/>
+          <a:ln/>
+        </p:spPr>
+        <p:txBody>
+          <a:bodyPr wrap="square" lIns="0" tIns="0" rIns="0" bIns="0" rtlCol="0" anchor="t"/>
+          <a:lstStyle/>
+          <a:p>
+            <a:pPr indent="0" marL="0">
+              <a:spcAft>
+                <a:spcPts val="300"/>
+              </a:spcAft>
+              <a:buNone/>
+            </a:pPr>
+            <a:r>
+              <a:rPr lang="en-US" sz="1400" b="1" dirty="0">
+                <a:solidFill>
+                  <a:schemeClr val="tx2"/>
+                </a:solidFill>
+              </a:rPr>
+              <a:t>Ricavi</a:t>
+            </a:r>
+            <a:endParaRPr lang="en-US" sz="1200" dirty="0"/>
+          </a:p>
+          <a:p>
+            <a:pPr indent="0" marL="0">
+              <a:spcAft>
+                <a:spcPts val="300"/>
+              </a:spcAft>
+              <a:buNone/>
+            </a:pPr>
+            <a:r>
+              <a:rPr lang="en-US" sz="1200" dirty="0">
+                <a:solidFill>
+                  <a:schemeClr val="tx1"/>
+                </a:solidFill>
+              </a:rPr>
+              <a:t>Valore del credito digitato anno per anno (proposto 32 €).</a:t>
+            </a:r>
+            <a:endParaRPr lang="en-US" sz="1200" dirty="0"/>
+          </a:p>
+          <a:p>
+            <a:pPr indent="0" marL="0">
+              <a:spcAft>
+                <a:spcPts val="300"/>
+              </a:spcAft>
+              <a:buNone/>
+            </a:pPr>
+            <a:r>
+              <a:rPr lang="en-US" sz="600" dirty="0">
+                <a:solidFill>
+                  <a:schemeClr val="tx1"/>
+                </a:solidFill>
+              </a:rPr>
+              <a:t> </a:t>
+            </a:r>
+            <a:endParaRPr lang="en-US" sz="1200" dirty="0"/>
+          </a:p>
+          <a:p>
+            <a:pPr indent="0" marL="0">
+              <a:spcAft>
+                <a:spcPts val="300"/>
+              </a:spcAft>
+              <a:buNone/>
+            </a:pPr>
+            <a:r>
+              <a:rPr lang="en-US" sz="1400" b="1" dirty="0">
+                <a:solidFill>
+                  <a:schemeClr val="tx2"/>
+                </a:solidFill>
+              </a:rPr>
+              <a:t>Costi per il Comune: Caso 1 o Caso 2?</a:t>
+            </a:r>
+            <a:endParaRPr lang="en-US" sz="1200" dirty="0"/>
+          </a:p>
+          <a:p>
+            <a:pPr indent="0" marL="0">
+              <a:spcAft>
+                <a:spcPts val="300"/>
+              </a:spcAft>
+              <a:buNone/>
+            </a:pPr>
+            <a:r>
+              <a:rPr lang="en-US" sz="1200" dirty="0">
+                <a:solidFill>
+                  <a:schemeClr val="tx1"/>
+                </a:solidFill>
+              </a:rPr>
+              <a:t>Caso 1 progetto volontario, Caso 2 progetto obbligatorio da bando di gara. Sei voci (Progetto, Rapporto, registrazioni) in € per abitante interpolati per popolazione, con minimo e massimo annuo (tabelle del 28/07/2026).</a:t>
+            </a:r>
+            <a:endParaRPr lang="en-US" sz="1200" dirty="0"/>
+          </a:p>
+          <a:p>
+            <a:pPr indent="0" marL="0">
+              <a:spcAft>
+                <a:spcPts val="300"/>
+              </a:spcAft>
+              <a:buNone/>
+            </a:pPr>
+            <a:r>
+              <a:rPr lang="en-US" sz="600" dirty="0">
+                <a:solidFill>
+                  <a:schemeClr val="tx1"/>
+                </a:solidFill>
+              </a:rPr>
+              <a:t> </a:t>
+            </a:r>
+            <a:endParaRPr lang="en-US" sz="1200" dirty="0"/>
+          </a:p>
+          <a:p>
+            <a:pPr indent="0" marL="0">
+              <a:spcAft>
+                <a:spcPts val="300"/>
+              </a:spcAft>
+              <a:buNone/>
+            </a:pPr>
+            <a:r>
+              <a:rPr lang="en-US" sz="1400" b="1" dirty="0">
+                <a:solidFill>
+                  <a:schemeClr val="tx2"/>
+                </a:solidFill>
+              </a:rPr>
+              <a:t>Bovisio-Masciago, 10 anni, 32 €/credito</a:t>
+            </a:r>
+            <a:endParaRPr lang="en-US" sz="1200" dirty="0"/>
+          </a:p>
+          <a:p>
+            <a:pPr indent="0" marL="0">
+              <a:spcAft>
+                <a:spcPts val="300"/>
+              </a:spcAft>
+              <a:buNone/>
+            </a:pPr>
+            <a:r>
+              <a:rPr lang="en-US" sz="1200" b="1" dirty="0">
+                <a:solidFill>
+                  <a:schemeClr val="tx1"/>
+                </a:solidFill>
+              </a:rPr>
+              <a:t>Per utenza (come Allegato A): </a:t>
+            </a:r>
+            <a:pPr indent="0" marL="0">
+              <a:spcAft>
+                <a:spcPts val="300"/>
+              </a:spcAft>
+              <a:buNone/>
+            </a:pPr>
+            <a:r>
+              <a:rPr lang="en-US" sz="1200" dirty="0">
+                <a:solidFill>
+                  <a:schemeClr val="tx1"/>
+                </a:solidFill>
+              </a:rPr>
+              <a:t>34.188 crediti, ricavi € 1.093.792</a:t>
+            </a:r>
+            <a:endParaRPr lang="en-US" sz="1200" dirty="0"/>
+          </a:p>
+          <a:p>
+            <a:pPr indent="0" marL="0">
+              <a:spcAft>
+                <a:spcPts val="300"/>
+              </a:spcAft>
+              <a:buNone/>
+            </a:pPr>
+            <a:r>
+              <a:rPr lang="en-US" sz="1200" dirty="0">
+                <a:solidFill>
+                  <a:schemeClr val="tx1"/>
+                </a:solidFill>
+              </a:rPr>
+              <a:t>Caso 1 costi € 162.330 → </a:t>
+            </a:r>
+            <a:pPr indent="0" marL="0">
+              <a:spcAft>
+                <a:spcPts val="300"/>
+              </a:spcAft>
+              <a:buNone/>
+            </a:pPr>
+            <a:r>
+              <a:rPr lang="en-US" sz="1200" b="1" dirty="0">
+                <a:solidFill>
+                  <a:schemeClr val="tx2"/>
+                </a:solidFill>
+              </a:rPr>
+              <a:t>+€ 931.463</a:t>
+            </a:r>
+            <a:endParaRPr lang="en-US" sz="1200" dirty="0"/>
+          </a:p>
+          <a:p>
+            <a:pPr indent="0" marL="0">
+              <a:spcAft>
+                <a:spcPts val="300"/>
+              </a:spcAft>
+              <a:buNone/>
+            </a:pPr>
+            <a:r>
+              <a:rPr lang="en-US" sz="1200" dirty="0">
+                <a:solidFill>
+                  <a:schemeClr val="tx1"/>
+                </a:solidFill>
+              </a:rPr>
+              <a:t>Caso 2 costi € 242.658 → </a:t>
+            </a:r>
+            <a:pPr indent="0" marL="0">
+              <a:spcAft>
+                <a:spcPts val="300"/>
+              </a:spcAft>
+              <a:buNone/>
+            </a:pPr>
+            <a:r>
+              <a:rPr lang="en-US" sz="1200" b="1" dirty="0">
+                <a:solidFill>
+                  <a:schemeClr val="tx2"/>
+                </a:solidFill>
+              </a:rPr>
+              <a:t>+€ 851.135</a:t>
+            </a:r>
+            <a:endParaRPr lang="en-US" sz="1200" dirty="0"/>
+          </a:p>
+          <a:p>
+            <a:pPr indent="0" marL="0">
+              <a:spcAft>
+                <a:spcPts val="300"/>
+              </a:spcAft>
+              <a:buNone/>
+            </a:pPr>
+            <a:r>
+              <a:rPr lang="en-US" sz="1200" b="1" dirty="0">
+                <a:solidFill>
+                  <a:schemeClr val="tx1"/>
+                </a:solidFill>
+              </a:rPr>
+              <a:t>Bilancio del Comune: </a:t>
+            </a:r>
+            <a:pPr indent="0" marL="0">
+              <a:spcAft>
+                <a:spcPts val="300"/>
+              </a:spcAft>
+              <a:buNone/>
+            </a:pPr>
+            <a:r>
+              <a:rPr lang="en-US" sz="1200" dirty="0">
+                <a:solidFill>
+                  <a:schemeClr val="tx1"/>
+                </a:solidFill>
+              </a:rPr>
+              <a:t>6.707 crediti, € 214.464; Caso 1 +€ 52.134, Caso 2 −€ 28.193</a:t>
+            </a:r>
+            <a:endParaRPr lang="en-US" sz="1200" dirty="0"/>
+          </a:p>
+          <a:p>
+            <a:pPr indent="0" marL="0">
+              <a:spcAft>
+                <a:spcPts val="300"/>
+              </a:spcAft>
+              <a:buNone/>
+            </a:pPr>
+            <a:r>
+              <a:rPr lang="en-US" sz="600" dirty="0">
+                <a:solidFill>
+                  <a:schemeClr val="tx1"/>
+                </a:solidFill>
+              </a:rPr>
+              <a:t> </a:t>
+            </a:r>
+            <a:endParaRPr lang="en-US" sz="1200" dirty="0"/>
+          </a:p>
+          <a:p>
+            <a:pPr indent="0" marL="0">
+              <a:spcAft>
+                <a:spcPts val="300"/>
+              </a:spcAft>
+              <a:buNone/>
+            </a:pPr>
+            <a:r>
+              <a:rPr lang="en-US" sz="1200" i="1" dirty="0">
+                <a:solidFill>
+                  <a:schemeClr val="accent6"/>
+                </a:solidFill>
+              </a:rPr>
+              <a:t>Il Caso 1 riproduce i costi dei contratti EsaCom, il metodo per utenza le loro stime (0,19-0,23 crediti per abitante all'anno).</a:t>
+            </a:r>
+            <a:endParaRPr lang="en-US" sz="1200" dirty="0"/>
+          </a:p>
+        </p:txBody>
+      </p:sp>
+      <p:sp>
+        <p:nvSpPr>
+          <p:cNvPr id="25" name="Slide Number Placeholder 0"/>
+          <p:cNvSpPr>
+            <a:spLocks noGrp="1"/>
+          </p:cNvSpPr>
+          <p:nvPr>
+            <p:ph type="sldNum" sz="quarter" idx="4294967295"/>
+          </p:nvPr>
+        </p:nvSpPr>
+        <p:spPr>
+          <a:xfrm>
+            <a:off x="11155680" y="6400800"/>
+            <a:ext cx="457200" cy="274320"/>
+          </a:xfrm>
+          <a:prstGeom prst="rect">
+            <a:avLst/>
+          </a:prstGeom>
+          <a:extLst>
+            <a:ext uri="{C572A759-6A51-4108-AA02-DFA0A04FC94B}">
+              <ma14:wrappingTextBoxFlag xmlns:ma14="http://schemas.microsoft.com/office/mac/drawingml/2011/main" val="0"/>
+            </a:ext>
+          </a:extLst>
+        </p:spPr>
+        <p:txBody>
+          <a:bodyPr/>
+          <a:lstStyle>
+            <a:lvl1pPr>
+              <a:defRPr sz="1000">
+                <a:solidFill>
+                  <a:schemeClr val="accent6"/>
+                </a:solidFill>
+              </a:defRPr>
+            </a:lvl1pPr>
+          </a:lstStyle>
+          <a:p>
+            <a:pPr algn="r"/>
+            <a:fld id="{F7021451-1387-4CA6-816F-3879F97B5CBC}" type="slidenum">
+              <a:rPr b="0" lang="en-US"/>
+              <a:t>15</a:t>
+            </a:fld>
+            <a:endParaRPr lang="en-US"/>
+          </a:p>
+        </p:txBody>
+      </p:sp>
+    </p:spTree>
+  </p:cSld>
+  <p:clrMapOvr>
+    <a:masterClrMapping/>
+  </p:clrMapOvr>
+</p:sld>
+</file>
+
+<file path=ppt/slides/slide16.xml><?xml version="1.0" encoding="utf-8"?>
+<p:sld xmlns:a="http://schemas.openxmlformats.org/drawingml/2006/main" xmlns:r="http://schemas.openxmlformats.org/officeDocument/2006/relationships" xmlns:p="http://schemas.openxmlformats.org/presentationml/2006/main">
+  <p:cSld name="Slide 16">
+    <p:spTree>
+      <p:nvGrpSpPr>
+        <p:cNvPr id="1" name=""/>
+        <p:cNvGrpSpPr/>
+        <p:nvPr/>
+      </p:nvGrpSpPr>
+      <p:grpSpPr>
+        <a:xfrm>
+          <a:off x="0" y="0"/>
+          <a:ext cx="0" cy="0"/>
+          <a:chOff x="0" y="0"/>
+          <a:chExt cx="0" cy="0"/>
+        </a:xfrm>
+      </p:grpSpPr>
+      <p:sp>
+        <p:nvSpPr>
+          <p:cNvPr id="2" name="Text 0"/>
+          <p:cNvSpPr/>
+          <p:nvPr>
+            <p:ph idx="100" type="title" hasCustomPrompt="1"/>
+          </p:nvPr>
+        </p:nvSpPr>
+        <p:spPr>
+          <a:xfrm>
+            <a:off x="548640" y="320040"/>
+            <a:ext cx="9144000" cy="731520"/>
+          </a:xfrm>
+          <a:prstGeom prst="rect">
+            <a:avLst/>
+          </a:prstGeom>
+          <a:noFill/>
+          <a:ln/>
+        </p:spPr>
+        <p:txBody>
+          <a:bodyPr wrap="square" lIns="0" tIns="0" rIns="0" bIns="0" rtlCol="0" anchor="ctr"/>
+          <a:lstStyle/>
+          <a:p>
+            <a:pPr algn="l" indent="0" marL="0">
+              <a:buNone/>
+            </a:pPr>
+            <a:r>
+              <a:rPr lang="en-US" sz="3000" b="1" dirty="0">
+                <a:solidFill>
+                  <a:schemeClr val="tx2"/>
+                </a:solidFill>
+                <a:latin typeface="Cambria" pitchFamily="34" charset="0"/>
+                <a:ea typeface="Cambria" pitchFamily="34" charset="-122"/>
+                <a:cs typeface="Cambria" pitchFamily="34" charset="-120"/>
+              </a:rPr>
               <a:t>Piani a pagamento: sicurezza e stabilità</a:t>
             </a:r>
             <a:endParaRPr lang="en-US" sz="3000" dirty="0"/>
@@ -6421,7 +7157,7 @@
       </p:sp>
       <p:graphicFrame>
         <p:nvGraphicFramePr>
-          <p:cNvPr id="16" name="Table 0"/>
+          <p:cNvPr id="17" name="Table 0"/>
           <p:cNvGraphicFramePr>
             <a:graphicFrameLocks noGrp="1"/>
           </p:cNvGraphicFramePr>
@@ -8528,7 +9264,7 @@
             <a:pPr algn="r"/>
             <a:fld id="{F7021451-1387-4CA6-816F-3879F97B5CBC}" type="slidenum">
               <a:rPr b="0" lang="en-US"/>
-              <a:t>15</a:t>
+              <a:t>16</a:t>
             </a:fld>
             <a:endParaRPr lang="en-US"/>
           </a:p>
@@ -8542,9 +9278,9 @@
 </p:sld>
 </file>
 
-<file path=ppt/slides/slide16.xml><?xml version="1.0" encoding="utf-8"?>
+<file path=ppt/slides/slide17.xml><?xml version="1.0" encoding="utf-8"?>
 <p:sld xmlns:a="http://schemas.openxmlformats.org/drawingml/2006/main" xmlns:r="http://schemas.openxmlformats.org/officeDocument/2006/relationships" xmlns:p="http://schemas.openxmlformats.org/presentationml/2006/main">
-  <p:cSld name="Slide 16">
+  <p:cSld name="Slide 17">
     <p:spTree>
       <p:nvGrpSpPr>
         <p:cNvPr id="1" name=""/>
@@ -8602,7 +9338,7 @@
       </p:sp>
       <p:graphicFrame>
         <p:nvGraphicFramePr>
-          <p:cNvPr id="17" name="Table 0"/>
+          <p:cNvPr id="18" name="Table 0"/>
           <p:cNvGraphicFramePr>
             <a:graphicFrameLocks noGrp="1"/>
           </p:cNvGraphicFramePr>
@@ -10335,7 +11071,7 @@
             <a:pPr algn="r"/>
             <a:fld id="{F7021451-1387-4CA6-816F-3879F97B5CBC}" type="slidenum">
               <a:rPr b="0" lang="en-US"/>
-              <a:t>16</a:t>
+              <a:t>17</a:t>
             </a:fld>
             <a:endParaRPr lang="en-US"/>
           </a:p>
@@ -14282,7 +15018,7 @@
                 <a:ea typeface="Cambria" pitchFamily="34" charset="-122"/>
                 <a:cs typeface="Cambria" pitchFamily="34" charset="-120"/>
               </a:rPr>
-              <a:t>46</a:t>
+              <a:t>47</a:t>
             </a:r>
             <a:endParaRPr lang="en-US" sz="3000" dirty="0"/>
           </a:p>
@@ -14588,7 +15324,7 @@
                 <a:ea typeface="Cambria" pitchFamily="34" charset="-122"/>
                 <a:cs typeface="Cambria" pitchFamily="34" charset="-120"/>
               </a:rPr>
-              <a:t>≈44.400</a:t>
+              <a:t>≈44.600</a:t>
             </a:r>
             <a:endParaRPr lang="en-US" sz="3000" dirty="0"/>
           </a:p>
@@ -15375,7 +16111,7 @@
                 <a:ea typeface="Cambria" pitchFamily="34" charset="-122"/>
                 <a:cs typeface="Cambria" pitchFamily="34" charset="-120"/>
               </a:rPr>
-              <a:t>204</a:t>
+              <a:t>213</a:t>
             </a:r>
             <a:endParaRPr lang="en-US" sz="2400" dirty="0"/>
           </a:p>
@@ -15428,7 +16164,7 @@
                 <a:ea typeface="Cambria" pitchFamily="34" charset="-122"/>
                 <a:cs typeface="Cambria" pitchFamily="34" charset="-120"/>
               </a:rPr>
-              <a:t>46</a:t>
+              <a:t>47</a:t>
             </a:r>
             <a:endParaRPr lang="en-US" sz="2400" dirty="0"/>
           </a:p>
@@ -15534,7 +16270,7 @@
                 <a:ea typeface="Cambria" pitchFamily="34" charset="-122"/>
                 <a:cs typeface="Cambria" pitchFamily="34" charset="-120"/>
               </a:rPr>
-              <a:t>≈44.400</a:t>
+              <a:t>≈44.600</a:t>
             </a:r>
             <a:endParaRPr lang="en-US" sz="2400" dirty="0"/>
           </a:p>

--- a/public/documentazione/Presentazione_Portale_CWP.pptx
+++ b/public/documentazione/Presentazione_Portale_CWP.pptx
@@ -22,9 +22,10 @@
     <p:sldId id="270" r:id="rId16"/>
     <p:sldId id="271" r:id="rId17"/>
     <p:sldId id="272" r:id="rId18"/>
+    <p:sldId id="273" r:id="rId19"/>
   </p:sldIdLst>
   <p:notesMasterIdLst>
-    <p:notesMasterId r:id="rId19"/>
+    <p:notesMasterId r:id="rId20"/>
   </p:notesMasterIdLst>
   <p:sldSz cx="12192000" cy="6858000"/>
   <p:notesSz cx="6858000" cy="12192000"/>
@@ -123,53 +124,54 @@
   <p:extLst>
     <p:ext uri="{521415D9-36F7-43E2-AB2F-B90AF26B5E84}">
       <p14:sectionLst xmlns:p14="http://schemas.microsoft.com/office/powerpoint/2010/main">
-        <p14:section name="Apertura" id="{7da20ac0-d03a-a5c3-40b2-3ab2798de5aa}">
+        <p14:section name="Apertura" id="{5df3e669-5760-4431-8a7a-13d8d7ae2771}">
           <p14:sldIdLst>
             <p14:sldId id="256"/>
           </p14:sldIdLst>
         </p14:section>
-        <p14:section name="Metodologia" id="{8f98600f-1c8c-7b18-ba77-9121aa41e473}">
+        <p14:section name="Metodologia" id="{b65c0d2f-9cfb-9ab4-f46d-8cc59c353aab}">
           <p14:sldIdLst>
             <p14:sldId id="257"/>
           </p14:sldIdLst>
         </p14:section>
-        <p14:section name="Analisi funzionale" id="{140d3ef0-8407-bd94-3320-8a095b0aa0a2}">
+        <p14:section name="Analisi funzionale" id="{a8cd118c-b5cb-4664-2626-58cf929fe683}">
           <p14:sldIdLst>
             <p14:sldId id="258"/>
             <p14:sldId id="259"/>
           </p14:sldIdLst>
         </p14:section>
-        <p14:section name="Già realtà" id="{f1b685e6-1c2d-4d4b-50c7-8bdb029bdbba}">
+        <p14:section name="Già realtà" id="{49326b14-7be2-8c74-b825-6e6fda482018}">
           <p14:sldIdLst>
             <p14:sldId id="260"/>
           </p14:sldIdLst>
         </p14:section>
-        <p14:section name="Architettura e ruoli" id="{8771927b-0f33-7a12-b483-b9293a00953a}">
+        <p14:section name="Architettura e ruoli" id="{5866044f-8d7c-3622-3971-5c553b57ecf5}">
           <p14:sldIdLst>
             <p14:sldId id="261"/>
             <p14:sldId id="262"/>
           </p14:sldIdLst>
         </p14:section>
-        <p14:section name="Novità" id="{606f21dd-ff25-da0a-34bd-c57ef5f8ef71}">
+        <p14:section name="Novità" id="{575ce25c-73a7-252e-7a5a-f08895450098}">
           <p14:sldIdLst>
             <p14:sldId id="263"/>
             <p14:sldId id="264"/>
             <p14:sldId id="265"/>
             <p14:sldId id="266"/>
+            <p14:sldId id="267"/>
           </p14:sldIdLst>
         </p14:section>
-        <p14:section name="Punti aperti" id="{3becb8ee-9210-68fd-608b-cf965e01752b}">
+        <p14:section name="Punti aperti" id="{8d82e651-f979-e24c-7272-26f4fcda3381}">
           <p14:sldIdLst>
-            <p14:sldId id="267"/>
             <p14:sldId id="268"/>
             <p14:sldId id="269"/>
             <p14:sldId id="270"/>
             <p14:sldId id="271"/>
+            <p14:sldId id="272"/>
           </p14:sldIdLst>
         </p14:section>
-        <p14:section name="Scelte da prendere" id="{50087bd3-b351-ed7b-97f1-696de3ce7ed0}">
+        <p14:section name="Scelte da prendere" id="{41db2b14-78ee-a47b-6e40-63fd8193f5e3}">
           <p14:sldIdLst>
-            <p14:sldId id="272"/>
+            <p14:sldId id="273"/>
           </p14:sldIdLst>
         </p14:section>
       </p14:sectionLst>
@@ -576,7 +578,7 @@
           <a:p>
             <a:r>
               <a:rPr lang="en-US" dirty="0"/>
-              <a:t>Presentazione di riepilogo del portale, aggiornata al 26 ottobre 2026 (revisione 4.3): metodologia, funzioni realizzate, novità, punti aperti di sviluppo e scelte ancora da prendere. Si rigenera a ogni rilascio insieme agli altri documenti ed è disponibile agli Amministratori nella pagina Documentazione del portale.</a:t>
+              <a:t>Presentazione di riepilogo del portale, aggiornata al 30 ottobre 2026 (revisione 4.4): metodologia, funzioni realizzate, novità, punti aperti di sviluppo e scelte ancora da prendere. Si rigenera a ogni rilascio insieme agli altri documenti ed è disponibile agli Amministratori nella pagina Documentazione del portale.</a:t>
             </a:r>
             <a:endParaRPr lang="en-US" dirty="0"/>
           </a:p>
@@ -840,7 +842,7 @@
           <a:p>
             <a:r>
               <a:rPr lang="en-US" dirty="0"/>
-              <a:t>La parte funzionale dei requisiti del 15/09 è chiusa e dal 18/10 sera il portale segue anche i documenti ufficiali del Programma. Restano tre gruppi. 1) Requisiti tecnici e di sicurezza (sezioni 13-15 dei requisiti); il 19/10 sono stati fatti l'archivio di backup completo e le Istruzioni di ripristino, mancano le copie automatiche di database e file. 2) Avvio della piattaforma pubblica (Guida 3.7): la pagina /programma è attiva e pubblica già gli otto documenti ufficiali v1.2 (Guida, Definizioni, Normativa, Standard, Metodologia, Politica di reclamo, Schema tariffario, Gestione qualità dei dati) e la Metodologia approvata; la PEC del Programma per i reclami è operate@pec.it; vanno aggiunti gli enti di validazione e verifica e i registri riconosciuti e la modulistica quando disponibile. L'accesso con SPID, CIE o CNS (Guida 3.9) richiede l'adesione della Fondazione come fornitore di servizi (AgID o aggregatore accreditato): fino ad allora resta l'email confermata. 3) Qualità dei dati e completamenti: i controlli del documento Gestione della qualità dei dati sono nel calcolo (Tabella 3 dello Standard ±30% con motivazione obbligatoria, completezza, unicità, letture a buon fine, tempestività) e servono popolazione e cluster SOSE ufficiali di ogni Comune; poi privacy, accessibilità, collaudo con dati reali. L'assistente AI resta un supporto al back-office, come previsto dai requisiti (sezione 17). Da fare subito (19/10 sera). Azioni di Luca: ripubblicare le funzioni crea-utente e reimposta-password (email delle credenziali), rieseguire la funzione utente_mai_attivo dello script 30, verificare il dominio email su Resend, decidere se intestare alla Fondazione la fatturazione dell'assistente. Sviluppo: utenti online per l'amministratore principale, messaggi d'errore dell'assistente in italiano (proposta), stampa PDF del simulatore, sicurezza e piani a pagamento, collaudo con dati reali.</a:t>
+              <a:t>Rilievi del documento TEST_PORTALE_CWP del 29 ottobre 2026: 31 punti verificati su portale, codice, database e documenti del Programma. Scelte di Luca del 30 ottobre: correggere tutto tranne il Marketing. Correzioni (script 48 e pagine, da pubblicare con l'OK di Luca): nomi delle fasi come nella Guida; Dashboard con lo stato nel Programma, l'ente di validazione, le fatture scadute e in scadenza e le dichiarazioni di cancellazione dei crediti venduti da ricevere; controllo di codice fiscale e partita IVA e data di approvazione degli enti; verifiche documentali (fasi 2 e 6) solo con i documenti obbligatori e con i codici ISTAT, con deroga motivata dell'Amministratore; codice della pratica sempre automatico; ricorso e costi dei reclami; nel calcolo anno di monitoraggio e anno di riferimento dello Standard 4.8.1, ex post solo per anni conclusi e Progetti registrati, avviso dei risultati non aggiornati; simulatore con il riferimento come da Standard, senza taratura e senza riferimenti EsaCom, valore ipotetico del credito; CSV dell'Audit; Banca Dati Utenze senza nomi e indirizzi. Domande alla Fondazione: fase 7, valore del credito, tipologie di promotori, listino ufficiale, iter del ricorso, paniere del secco, accesso degli enti, invio degli 8 moduli.</a:t>
             </a:r>
             <a:endParaRPr lang="en-US" dirty="0"/>
           </a:p>
@@ -928,7 +930,7 @@
           <a:p>
             <a:r>
               <a:rPr lang="en-US" dirty="0"/>
-              <a:t>Due nuovi moduli entrano nel progetto e in tutti i documenti (Registro, backlog punti 37 e 21). Simulatore di scenari, richiesto da Luca il 19/10: per ogni Comune si creano più scenari; la durata si sceglie da un menu a tendina tra 7, 10 e 21 anni (Standard 4.3.8: periodo di 10 anni oppure 7 rinnovabili fino a 21); si acquisiscono i dati dell'anno base (popolazione, produzione totale e pro capite, raccolta differenziata, ripartizione per frazione, parametri del calcolo); per ogni anno si inseriscono gli obiettivi di produzione totale e pro capite e di secco residuo pro capite; il simulatore ricalcola la percentuale di differenziata e stima anno per anno i crediti che il Comune potrebbe generare, con due metodi: il bilancio del Comune (tutte le utenze insieme, il più prudente) e il metodo per utenza con le sole utenze virtuose e il buffer del Capitolo 7, lo stesso delle stime dell'Allegato A dei contratti EsaCom. È una stima ex ante utile a presentare il Programma ai Comuni: il modello semplificato va confermato dalla Fondazione. Assistente virtuale (prima versione del 19/10, attiva dallo stesso giorno): pulsante «✦ Assistente» per Amministratori e utenti degli enti; risponde in italiano solo dalla base di conoscenza (Manuale Utente e tariffe per gli enti, in più Manuale Amministratore e note sul calcolo per gli Amministratori), non vede le pratiche, non salva i testi, limite di 40 domande al giorno per utente. Funziona con Claude Haiku 5.5 tramite la funzione del server «assistente»; la base di conoscenza resta nella cache dei prompt, quindi una domanda costa di solito meno di un centesimo di dollaro. Funziona con una chiave della Claude Console, legata a un solo spazio di lavoro, inserita da Luca nei segreti di Supabase: l'uso API è fatturato a parte rispetto ai piani claude.ai; Luca ha collegato i crediti API mensili del piano Max e acquistato 100 dollari di crediti. Prova dal vivo del 19/10: risposte corrette su creazione utenti e costi del Caso 1. Passi successivi: Operatori e aiuto sulla singola pratica.</a:t>
+              <a:t>La parte funzionale dei requisiti del 15/09 è chiusa e dal 18/10 sera il portale segue anche i documenti ufficiali del Programma. Restano tre gruppi. 1) Requisiti tecnici e di sicurezza (sezioni 13-15 dei requisiti); il 19/10 sono stati fatti l'archivio di backup completo e le Istruzioni di ripristino, mancano le copie automatiche di database e file. 2) Avvio della piattaforma pubblica (Guida 3.7): la pagina /programma è attiva e pubblica già gli otto documenti ufficiali v1.2 (Guida, Definizioni, Normativa, Standard, Metodologia, Politica di reclamo, Schema tariffario, Gestione qualità dei dati) e la Metodologia approvata; la PEC del Programma per i reclami è operate@pec.it; vanno aggiunti gli enti di validazione e verifica e i registri riconosciuti e la modulistica quando disponibile. L'accesso con SPID, CIE o CNS (Guida 3.9) richiede l'adesione della Fondazione come fornitore di servizi (AgID o aggregatore accreditato): fino ad allora resta l'email confermata. 3) Qualità dei dati e completamenti: i controlli del documento Gestione della qualità dei dati sono nel calcolo (Tabella 3 dello Standard ±30% con motivazione obbligatoria, completezza, unicità, letture a buon fine, tempestività) e servono popolazione e cluster SOSE ufficiali di ogni Comune; poi privacy, accessibilità, collaudo con dati reali. L'assistente AI resta un supporto al back-office, come previsto dai requisiti (sezione 17). Da fare subito (19/10 sera). Azioni di Luca: ripubblicare le funzioni crea-utente e reimposta-password (email delle credenziali), rieseguire la funzione utente_mai_attivo dello script 30, verificare il dominio email su Resend, decidere se intestare alla Fondazione la fatturazione dell'assistente. Sviluppo: utenti online per l'amministratore principale, messaggi d'errore dell'assistente in italiano (proposta), stampa PDF del simulatore, sicurezza e piani a pagamento, collaudo con dati reali.</a:t>
             </a:r>
             <a:endParaRPr lang="en-US" dirty="0"/>
           </a:p>
@@ -1016,7 +1018,7 @@
           <a:p>
             <a:r>
               <a:rPr lang="en-US" dirty="0"/>
-              <a:t>Il simulatore è già nel portale (menu Simulatore, per Operatori e Amministratori) ed è conforme al modello CWP: scenario di riferimento dello Standard 4.8.1 (anno in cui il Comune ha raggiunto il 65% di differenziata oppure valori medi del cluster SOSE della Tabella 3 × popolazione ISPRA 2022), durata 7, 10 o 21 anni (Standard 4.3.8), stima ex ante a livello di Comune ammessa dalla Metodologia (Capitoli 6.1 e 6.2), fattori di emissione e formule della Metodologia v1.2, buffer. L'esempio usa dati di prova: un Comune di 12.500 abitanti del cluster 4 (riferimento 445 kg/ab, 78,7% di differenziata), oggi a 430 kg/ab con 90 kg/ab di secco, obiettivo al 2036 di 380 kg/ab e 50 kg/ab di secco. Il simulatore ricalcola ogni anno la differenziata (fino all'87%) e stima circa 11.500 tCO₂eq di crediti netti in 10 anni dopo un buffer del 20%. Da sapere: i crediti nascono dai rifiuti evitati rispetto al riferimento (qui 1 t in meno vale circa 2,7 tCO₂eq); spostare rifiuti dal secco alla differenziata a parità di totale non genera crediti. È una stima ex ante, non certificabile; il modello va confermato dalla Fondazione.</a:t>
+              <a:t>Due nuovi moduli entrano nel progetto e in tutti i documenti (Registro, backlog punti 37 e 21). Simulatore di scenari, richiesto da Luca il 19/10: per ogni Comune si creano più scenari; la durata si sceglie da un menu a tendina tra 7, 10 e 21 anni (Standard 4.3.8: periodo di 10 anni oppure 7 rinnovabili fino a 21); si acquisiscono i dati dell'anno base (popolazione, produzione totale e pro capite, raccolta differenziata, ripartizione per frazione, parametri del calcolo); per ogni anno si inseriscono gli obiettivi di produzione totale e pro capite e di secco residuo pro capite; il simulatore ricalcola la percentuale di differenziata e stima anno per anno i crediti che il Comune potrebbe generare, con due metodi: il bilancio del Comune (tutte le utenze insieme, il più prudente) e il metodo per utenza con le sole utenze virtuose e il buffer del Capitolo 7, lo stesso delle stime dell'Allegato A dei contratti EsaCom. È una stima ex ante utile a presentare il Programma ai Comuni: il modello semplificato va confermato dalla Fondazione. Assistente virtuale (prima versione del 19/10, attiva dallo stesso giorno): pulsante «✦ Assistente» per Amministratori e utenti degli enti; risponde in italiano solo dalla base di conoscenza (Manuale Utente e tariffe per gli enti, in più Manuale Amministratore e note sul calcolo per gli Amministratori), non vede le pratiche, non salva i testi, limite di 40 domande al giorno per utente. Funziona con Claude Haiku 5.5 tramite la funzione del server «assistente»; la base di conoscenza resta nella cache dei prompt, quindi una domanda costa di solito meno di un centesimo di dollaro. Funziona con una chiave della Claude Console, legata a un solo spazio di lavoro, inserita da Luca nei segreti di Supabase: l'uso API è fatturato a parte rispetto ai piani claude.ai; Luca ha collegato i crediti API mensili del piano Max e acquistato 100 dollari di crediti. Prova dal vivo del 19/10: risposte corrette su creazione utenti e costi del Caso 1. Passi successivi: Operatori e aiuto sulla singola pratica.</a:t>
             </a:r>
             <a:endParaRPr lang="en-US" dirty="0"/>
           </a:p>
@@ -1104,7 +1106,7 @@
           <a:p>
             <a:r>
               <a:rPr lang="en-US" dirty="0"/>
-              <a:t>Il simulatore stima anche la parte economica per il Comune o il gestore. Ricavi: crediti netti stimati per anno × valore del credito, digitato anno per anno (proposto 32 €). Costi: il simulatore chiede se usare il Caso 1 (progetto volontario) o il Caso 2 (progetto obbligatorio, per esempio da bando di gara di un Comune che ha inserito il CWP come metodo), con le tabelle «Costi per il Soggetto Promotore» di Fondazione Operate del 28/07/2026: sei voci (Progetto, Rapporto di Monitoraggio, registrazione del Progetto, dei crediti del Progetto, del Rapporto e dei crediti del Rapporto), costo per abitante per fascia di popolazione con interpolazione e arrotondamento per eccesso, minimo e massimo annuo, una tantum ammortizzati in 10 anni; validazione dell'ente esclusa. Esempio con i dati ISPRA 2021 di Bovisio-Masciago (16.735 abitanti), obiettivo 400 kg/ab e 50 kg/ab di secco al 2036, 32 € a credito. Con il metodo per utenza (solo utenze virtuose, secco e organico misurati, tariffa puntuale, variabilità tra utenze 30%, buffer 30%): 34.188 crediti netti in 10 anni (0,20 per abitante all'anno, nell'intervallo 0,19-0,23 dell'Allegato A EsaCom), ricavi 1.093.792 €; Caso 1 costi 162.330 € (9,70 € per abitante) e margine +931.463 €; Caso 2 costi 242.658 € e margine +851.135 €. Con il bilancio del Comune (il metodo più prudente): 6.707 crediti, ricavi 214.464 €, Caso 1 +52.134 € (rientro nel 2034), Caso 2 −28.193 €. La differenza viene soprattutto dal fatto che Bovisio ha già l'84% di differenziata: il secco delle utenze è molto sotto il riferimento al 65%. Il Caso 1 con 154.247 abitanti riproduce le cifre dei contratti tipo EsaCom. L'Allegato A indica 6,08 € per abitante di costo contro 5,36 delle tabelle: la differenza potrebbe essere l'ente di validazione e verifica. Stima indicativa, non un piano finanziario.</a:t>
+              <a:t>Il simulatore è già nel portale (menu Simulatore, per Operatori e Amministratori) ed è conforme al modello CWP: scenario di riferimento dello Standard 4.8.1 (anno in cui il Comune ha raggiunto il 65% di differenziata oppure valori medi del cluster SOSE della Tabella 3 × popolazione ISPRA 2022), durata 7, 10 o 21 anni (Standard 4.3.8), stima ex ante a livello di Comune ammessa dalla Metodologia (Capitoli 6.1 e 6.2), fattori di emissione e formule della Metodologia v1.2, buffer. L'esempio usa dati di prova: un Comune di 12.500 abitanti del cluster 4 (riferimento 445 kg/ab, 78,7% di differenziata), oggi a 430 kg/ab con 90 kg/ab di secco, obiettivo al 2036 di 380 kg/ab e 50 kg/ab di secco. Il simulatore ricalcola ogni anno la differenziata (fino all'87%) e stima circa 11.500 tCO₂eq di crediti netti in 10 anni dopo un buffer del 20%. Da sapere: i crediti nascono dai rifiuti evitati rispetto al riferimento (qui 1 t in meno vale circa 2,7 tCO₂eq); spostare rifiuti dal secco alla differenziata a parità di totale non genera crediti. È una stima ex ante, non certificabile; il modello va confermato dalla Fondazione.</a:t>
             </a:r>
             <a:endParaRPr lang="en-US" dirty="0"/>
           </a:p>
@@ -1192,7 +1194,7 @@
           <a:p>
             <a:r>
               <a:rPr lang="en-US" dirty="0"/>
-              <a:t>Oggi tutti i servizi sono sui piani gratuiti, che non vanno bene per l'esercizio (attenzione: le copie giornaliere di Supabase Pro non comprendono i file caricati, che si copiano a parte come spiegato nelle Istruzioni di ripristino): Vercel Hobby è solo per uso non commerciale, i progetti Supabase gratuiti non hanno backup e si sospendono dopo una settimana di inattività, Resend gratuito invia al massimo 100 email al giorno, e il repository GitHub è pubblico. Indispensabili (circa 74 dollari al mese): GitHub Team (4 dollari per utente) con un'organizzazione intestata alla Fondazione, repository privato e regole sul ramo main (revisione obbligatoria); Vercel Pro (20 dollari per utente, banda 1 TB, uso commerciale, controllo della spesa); Supabase Pro (25 dollari, comprende 10 dollari di calcolo Micro: backup giornalieri conservati 7 giorni, progetto mai sospeso, 8 GB di database, 100 GB di file, 100.000 utenti attivi al mese) più il passaggio al calcolo Small (15 dollari, 2 GB di memoria, differenza 5 dollari); Resend Pro (20 dollari, 50.000 email al mese, nessun limite giornaliero). Consigliati (circa 130 dollari in più): Point-in-Time Recovery di Supabase (100 dollari al mese, ripristino al minuto degli ultimi 7 giorni), ambiente di prova con branching Supabase (0,01344 dollari l'ora, circa 10 dollari al mese se sempre attivo), GitHub Secret Protection (19 dollari per committer attivo). Sentry Developer è gratuito (1 utente, 5.000 errori al mese). Il piano Supabase Team (599 dollari al mese, certificazioni SOC 2 e ISO 27001, backup 14 giorni) oggi non serve. A costo zero: verifica in due passaggi sugli account dei fornitori, chiavi solo nelle variabili d'ambiente, dominio operate.it per portale ed email (SPF, DKIM, DMARC).</a:t>
+              <a:t>Il simulatore stima anche la parte economica per il Comune o il gestore. Ricavi: crediti netti stimati per anno × valore del credito, digitato anno per anno (proposto 32 €). Costi: il simulatore chiede se usare il Caso 1 (progetto volontario) o il Caso 2 (progetto obbligatorio, per esempio da bando di gara di un Comune che ha inserito il CWP come metodo), con le tabelle «Costi per il Soggetto Promotore» di Fondazione Operate del 28/07/2026: sei voci (Progetto, Rapporto di Monitoraggio, registrazione del Progetto, dei crediti del Progetto, del Rapporto e dei crediti del Rapporto), costo per abitante per fascia di popolazione con interpolazione e arrotondamento per eccesso, minimo e massimo annuo, una tantum ammortizzati in 10 anni; validazione dell'ente esclusa. Esempio con i dati ISPRA 2021 di Bovisio-Masciago (16.735 abitanti), obiettivo 400 kg/ab e 50 kg/ab di secco al 2036, 32 € a credito. Con il metodo per utenza (solo utenze virtuose, secco e organico misurati, tariffa puntuale, variabilità tra utenze 30%, buffer 30%): 34.188 crediti netti in 10 anni (0,20 per abitante all'anno, nell'intervallo 0,19-0,23 dell'Allegato A EsaCom), ricavi 1.093.792 €; Caso 1 costi 162.330 € (9,70 € per abitante) e margine +931.463 €; Caso 2 costi 242.658 € e margine +851.135 €. Con il bilancio del Comune (il metodo più prudente): 6.707 crediti, ricavi 214.464 €, Caso 1 +52.134 € (rientro nel 2034), Caso 2 −28.193 €. La differenza viene soprattutto dal fatto che Bovisio ha già l'84% di differenziata: il secco delle utenze è molto sotto il riferimento al 65%. Il Caso 1 con 154.247 abitanti riproduce le cifre dei contratti tipo EsaCom. L'Allegato A indica 6,08 € per abitante di costo contro 5,36 delle tabelle: la differenza potrebbe essere l'ente di validazione e verifica. Stima indicativa, non un piano finanziario.</a:t>
             </a:r>
             <a:endParaRPr lang="en-US" dirty="0"/>
           </a:p>
@@ -1280,7 +1282,7 @@
           <a:p>
             <a:r>
               <a:rPr lang="en-US" dirty="0"/>
-              <a:t>Il 18 ottobre sera sono state prese e realizzate le scelte di allineamento ai documenti ufficiali: Rapporto a 7 fasi con feedback di 20 giorni (Guida 6.3.1), conservazione 12 anni (Guida 6.2.1 e 6.5.1), un solo account per Organizzazione con fino a 2 delegati (Guida 7.2), periodo di 10 anni o 7 rinnovabili (Standard 4.3.8), stati e ID della Guida, ritiro e rientro, un solo progetto per territorio, tariffe e sospensione fino al saldo, piattaforma pubblica, crediti emessi con registro esterno, reclami, qualità dei dati. Il ruolo di soggetto promotore del programma è definito: Wastelab ha conferito in esclusiva a Fondazione Operate la gestione commerciale e tecnologica (portale CWP). Restano aperte quelle in tabella. Lo Standard 4.14 chiede al promotore del progetto di conservare i documenti almeno 2 anni dopo la fine del progetto, i registri 5 anni dopo la vendita (Standard 6.3). Scelte prese prima (Registro, capitolo Decisioni): A (una nuova versione non fa ripartire il termine), B (errata corrige: ripartenza decisa caso per caso), D (commentatori esterni con email confermata, in attesa di SPID), durate modificabili dall'Admin, pagamenti visibili al Comune, chiusura manuale della pratica, documenti richiesti non bloccanti, audit leggibile dallo staff. Le scelte interpretative del calcolo sono sette (docs/crediti-cwp.md). Il 19 ottobre: più amministratori con uno principale protetto; qualificazione ACN valutata non necessaria (da confermare con un parere legale).</a:t>
+              <a:t>Oggi tutti i servizi sono sui piani gratuiti, che non vanno bene per l'esercizio (attenzione: le copie giornaliere di Supabase Pro non comprendono i file caricati, che si copiano a parte come spiegato nelle Istruzioni di ripristino): Vercel Hobby è solo per uso non commerciale, i progetti Supabase gratuiti non hanno backup e si sospendono dopo una settimana di inattività, Resend gratuito invia al massimo 100 email al giorno, e il repository GitHub è pubblico. Indispensabili (circa 74 dollari al mese): GitHub Team (4 dollari per utente) con un'organizzazione intestata alla Fondazione, repository privato e regole sul ramo main (revisione obbligatoria); Vercel Pro (20 dollari per utente, banda 1 TB, uso commerciale, controllo della spesa); Supabase Pro (25 dollari, comprende 10 dollari di calcolo Micro: backup giornalieri conservati 7 giorni, progetto mai sospeso, 8 GB di database, 100 GB di file, 100.000 utenti attivi al mese) più il passaggio al calcolo Small (15 dollari, 2 GB di memoria, differenza 5 dollari); Resend Pro (20 dollari, 50.000 email al mese, nessun limite giornaliero). Consigliati (circa 130 dollari in più): Point-in-Time Recovery di Supabase (100 dollari al mese, ripristino al minuto degli ultimi 7 giorni), ambiente di prova con branching Supabase (0,01344 dollari l'ora, circa 10 dollari al mese se sempre attivo), GitHub Secret Protection (19 dollari per committer attivo). Sentry Developer è gratuito (1 utente, 5.000 errori al mese). Il piano Supabase Team (599 dollari al mese, certificazioni SOC 2 e ISO 27001, backup 14 giorni) oggi non serve. A costo zero: verifica in due passaggi sugli account dei fornitori, chiavi solo nelle variabili d'ambiente, dominio operate.it per portale ed email (SPF, DKIM, DMARC).</a:t>
             </a:r>
             <a:endParaRPr lang="en-US" dirty="0"/>
           </a:p>
@@ -1304,6 +1306,94 @@
             <a:fld id="{F7021451-1387-4CA6-816F-3879F97B5CBC}" type="slidenum">
               <a:rPr lang="en-US"/>
               <a:t>17</a:t>
+            </a:fld>
+            <a:endParaRPr lang="en-US"/>
+          </a:p>
+        </p:txBody>
+      </p:sp>
+    </p:spTree>
+    <p:extLst>
+      <p:ext uri="{BB962C8B-B14F-4D97-AF65-F5344CB8AC3E}">
+        <p14:creationId xmlns:p14="http://schemas.microsoft.com/office/powerpoint/2010/main" val="1024086991"/>
+      </p:ext>
+    </p:extLst>
+  </p:cSld>
+  <p:clrMapOvr>
+    <a:masterClrMapping/>
+  </p:clrMapOvr>
+</p:notes>
+</file>
+
+<file path=ppt/notesSlides/notesSlide18.xml><?xml version="1.0" encoding="utf-8"?>
+<p:notes xmlns:a="http://schemas.openxmlformats.org/drawingml/2006/main" xmlns:r="http://schemas.openxmlformats.org/officeDocument/2006/relationships" xmlns:p="http://schemas.openxmlformats.org/presentationml/2006/main">
+  <p:cSld>
+    <p:spTree>
+      <p:nvGrpSpPr>
+        <p:cNvPr id="1" name=""/>
+        <p:cNvGrpSpPr/>
+        <p:nvPr/>
+      </p:nvGrpSpPr>
+      <p:grpSpPr>
+        <a:xfrm>
+          <a:off x="0" y="0"/>
+          <a:ext cx="0" cy="0"/>
+          <a:chOff x="0" y="0"/>
+          <a:chExt cx="0" cy="0"/>
+        </a:xfrm>
+      </p:grpSpPr>
+      <p:sp>
+        <p:nvSpPr>
+          <p:cNvPr id="2" name="Slide Image Placeholder 1"/>
+          <p:cNvSpPr>
+            <a:spLocks noGrp="1" noRot="1" noChangeAspect="1"/>
+          </p:cNvSpPr>
+          <p:nvPr>
+            <p:ph type="sldImg"/>
+          </p:nvPr>
+        </p:nvSpPr>
+        <p:spPr/>
+      </p:sp>
+      <p:sp>
+        <p:nvSpPr>
+          <p:cNvPr id="3" name="Notes Placeholder 2"/>
+          <p:cNvSpPr>
+            <a:spLocks noGrp="1"/>
+          </p:cNvSpPr>
+          <p:nvPr>
+            <p:ph type="body" idx="1"/>
+          </p:nvPr>
+        </p:nvSpPr>
+        <p:spPr/>
+        <p:txBody>
+          <a:bodyPr/>
+          <a:lstStyle/>
+          <a:p>
+            <a:r>
+              <a:rPr lang="en-US" dirty="0"/>
+              <a:t>Il 18 ottobre sera sono state prese e realizzate le scelte di allineamento ai documenti ufficiali: Rapporto a 7 fasi con feedback di 20 giorni (Guida 6.3.1), conservazione 12 anni (Guida 6.2.1 e 6.5.1), un solo account per Organizzazione con fino a 2 delegati (Guida 7.2), periodo di 10 anni o 7 rinnovabili (Standard 4.3.8), stati e ID della Guida, ritiro e rientro, un solo progetto per territorio, tariffe e sospensione fino al saldo, piattaforma pubblica, crediti emessi con registro esterno, reclami, qualità dei dati. Il ruolo di soggetto promotore del programma è definito: Wastelab ha conferito in esclusiva a Fondazione Operate la gestione commerciale e tecnologica (portale CWP). Restano aperte quelle in tabella. Lo Standard 4.14 chiede al promotore del progetto di conservare i documenti almeno 2 anni dopo la fine del progetto, i registri 5 anni dopo la vendita (Standard 6.3). Scelte prese prima (Registro, capitolo Decisioni): A (una nuova versione non fa ripartire il termine), B (errata corrige: ripartenza decisa caso per caso), D (commentatori esterni con email confermata, in attesa di SPID), durate modificabili dall'Admin, pagamenti visibili al Comune, chiusura manuale della pratica, documenti richiesti non bloccanti, audit leggibile dallo staff. Le scelte interpretative del calcolo sono sette (docs/crediti-cwp.md). Il 19 ottobre: più amministratori con uno principale protetto; qualificazione ACN valutata non necessaria (da confermare con un parere legale).</a:t>
+            </a:r>
+            <a:endParaRPr lang="en-US" dirty="0"/>
+          </a:p>
+        </p:txBody>
+      </p:sp>
+      <p:sp>
+        <p:nvSpPr>
+          <p:cNvPr id="4" name="Slide Number Placeholder 3"/>
+          <p:cNvSpPr>
+            <a:spLocks noGrp="1"/>
+          </p:cNvSpPr>
+          <p:nvPr>
+            <p:ph type="sldNum" sz="quarter" idx="10"/>
+          </p:nvPr>
+        </p:nvSpPr>
+        <p:spPr/>
+        <p:txBody>
+          <a:bodyPr/>
+          <a:lstStyle/>
+          <a:p>
+            <a:fld id="{F7021451-1387-4CA6-816F-3879F97B5CBC}" type="slidenum">
+              <a:rPr lang="en-US"/>
+              <a:t>18</a:t>
             </a:fld>
             <a:endParaRPr lang="en-US"/>
           </a:p>
@@ -1632,7 +1722,7 @@
           <a:p>
             <a:r>
               <a:rPr lang="en-US" dirty="0"/>
-              <a:t>Pagina «effetto sorpresa»: nessuno si aspetta che il portale sia già online. Il sistema è stato realizzato da Luca Moretti con l'ausilio di Claude Code ed è quasi terminato; i servizi sono già in produzione: GitHub (codice), Vercel (pubblicazione del portale), Supabase (database, utenti, documenti, funzioni) e Resend (email). Il portale è pubblicato su portale-cwp.vercel.app e funziona con dati di prova: si può aprire durante la presentazione (collegamento cliccabile) o inquadrare il codice QR con il telefono. La pagina pubblica /programma mostra già gli 8 documenti ufficiali del Programma, la Metodologia approvata, la PEC e il soggetto promotore. Lo sviluppo del portale vero è partito il 17 ottobre 2026: da allora sono state pubblicate 213 versioni, 47 script del database e 8 funzioni sul server. Restano i punti aperti delle prossime slide (servizi a pagamento, sicurezza, dati da inserire, collaudo con un Comune). Suggerimento: aprire il portale dal vivo con un utente di prova e mostrare la pagina pubblica.</a:t>
+              <a:t>Pagina «effetto sorpresa»: nessuno si aspetta che il portale sia già online. Il sistema è stato realizzato da Luca Moretti con l'ausilio di Claude Code ed è quasi terminato; i servizi sono già in produzione: GitHub (codice), Vercel (pubblicazione del portale), Supabase (database, utenti, documenti, funzioni) e Resend (email). Il portale è pubblicato su portale-cwp.vercel.app e funziona con dati di prova: si può aprire durante la presentazione (collegamento cliccabile) o inquadrare il codice QR con il telefono. La pagina pubblica /programma mostra già gli 8 documenti ufficiali del Programma, la Metodologia approvata, la PEC e il soggetto promotore. Lo sviluppo del portale vero è partito il 17 ottobre 2026: da allora sono state pubblicate 225 versioni, 48 script del database e 8 funzioni sul server. Restano i punti aperti delle prossime slide (servizi a pagamento, sicurezza, dati da inserire, collaudo con un Comune). Suggerimento: aprire il portale dal vivo con un utente di prova e mostrare la pagina pubblica.</a:t>
             </a:r>
             <a:endParaRPr lang="en-US" dirty="0"/>
           </a:p>
@@ -2343,7 +2433,7 @@
                   <a:schemeClr val="accent6"/>
                 </a:solidFill>
               </a:rPr>
-              <a:t>Portale Carbon WastePrint · Stato dei lavori e recap · 26 ottobre 2026 · rev. 4.3</a:t>
+              <a:t>Portale Carbon WastePrint · Stato dei lavori e recap · 30 ottobre 2026 · rev. 4.4</a:t>
             </a:r>
             <a:endParaRPr lang="en-US" sz="1000" dirty="0"/>
           </a:p>
@@ -2841,7 +2931,7 @@
                   <a:schemeClr val="accent3"/>
                 </a:solidFill>
               </a:rPr>
-              <a:t>Stato dei lavori e recap: metodologia, funzioni, novità, punti aperti e scelte da prendere · aggiornata al 26 ottobre 2026 · rev. 4.3</a:t>
+              <a:t>Stato dei lavori e recap: metodologia, funzioni, novità, punti aperti e scelte da prendere · aggiornata al 30 ottobre 2026 · rev. 4.4</a:t>
             </a:r>
             <a:endParaRPr lang="en-US" sz="1800" dirty="0"/>
           </a:p>
@@ -4027,7 +4117,7 @@
                 <a:ea typeface="Cambria" pitchFamily="34" charset="-122"/>
                 <a:cs typeface="Cambria" pitchFamily="34" charset="-120"/>
               </a:rPr>
-              <a:t>Punti aperti: sviluppo e servizi da attivare</a:t>
+              <a:t>Collaudo del 29 ottobre: Standard e Guida</a:t>
             </a:r>
             <a:endParaRPr lang="en-US" sz="3000" dirty="0"/>
           </a:p>
@@ -4035,18 +4125,109 @@
       </p:sp>
       <p:sp>
         <p:nvSpPr>
-          <p:cNvPr id="3" name="Colonna Sicurezza e infrastruttura"/>
+          <p:cNvPr id="3" name="Numero rilievi verificati"/>
           <p:cNvSpPr/>
           <p:nvPr/>
         </p:nvSpPr>
         <p:spPr>
           <a:xfrm>
-            <a:off x="548640" y="1325880"/>
-            <a:ext cx="3505200" cy="4846320"/>
+            <a:off x="548640" y="1188720"/>
+            <a:ext cx="2194560" cy="1417320"/>
           </a:xfrm>
           <a:prstGeom prst="roundRect">
             <a:avLst>
-              <a:gd name="adj" fmla="val 3130"/>
+              <a:gd name="adj" fmla="val 7742"/>
+            </a:avLst>
+          </a:prstGeom>
+          <a:solidFill>
+            <a:schemeClr val="accent3"/>
+          </a:solidFill>
+          <a:ln w="12700">
+            <a:solidFill>
+              <a:schemeClr val="accent3"/>
+            </a:solidFill>
+            <a:prstDash val="solid"/>
+          </a:ln>
+        </p:spPr>
+      </p:sp>
+      <p:sp>
+        <p:nvSpPr>
+          <p:cNvPr id="4" name="Text 2"/>
+          <p:cNvSpPr txBox="1"/>
+          <p:nvPr/>
+        </p:nvSpPr>
+        <p:spPr>
+          <a:xfrm>
+            <a:off x="685800" y="1188720"/>
+            <a:ext cx="1920240" cy="1417320"/>
+          </a:xfrm>
+          <a:prstGeom prst="rect">
+            <a:avLst/>
+          </a:prstGeom>
+          <a:noFill/>
+          <a:ln/>
+        </p:spPr>
+        <p:txBody>
+          <a:bodyPr wrap="square" lIns="0" tIns="0" rIns="0" bIns="0" rtlCol="0" anchor="ctr"/>
+          <a:lstStyle/>
+          <a:p>
+            <a:pPr indent="0" marL="0">
+              <a:buNone/>
+            </a:pPr>
+            <a:r>
+              <a:rPr lang="en-US" sz="2600" b="1" dirty="0">
+                <a:solidFill>
+                  <a:schemeClr val="tx2"/>
+                </a:solidFill>
+              </a:rPr>
+              <a:t>31</a:t>
+            </a:r>
+            <a:endParaRPr lang="en-US" sz="2600" dirty="0"/>
+          </a:p>
+          <a:p>
+            <a:pPr indent="0" marL="0">
+              <a:buNone/>
+            </a:pPr>
+            <a:r>
+              <a:rPr lang="en-US" sz="1200" b="1" dirty="0">
+                <a:solidFill>
+                  <a:schemeClr val="tx1"/>
+                </a:solidFill>
+              </a:rPr>
+              <a:t>rilievi verificati</a:t>
+            </a:r>
+            <a:endParaRPr lang="en-US" sz="2600" dirty="0"/>
+          </a:p>
+          <a:p>
+            <a:pPr indent="0" marL="0">
+              <a:buNone/>
+            </a:pPr>
+            <a:r>
+              <a:rPr lang="en-US" sz="1050" dirty="0">
+                <a:solidFill>
+                  <a:schemeClr val="tx1"/>
+                </a:solidFill>
+              </a:rPr>
+              <a:t>documento TEST_PORTALE_CWP</a:t>
+            </a:r>
+            <a:endParaRPr lang="en-US" sz="2600" dirty="0"/>
+          </a:p>
+        </p:txBody>
+      </p:sp>
+      <p:sp>
+        <p:nvSpPr>
+          <p:cNvPr id="5" name="Numero correzioni pronte"/>
+          <p:cNvSpPr/>
+          <p:nvPr/>
+        </p:nvSpPr>
+        <p:spPr>
+          <a:xfrm>
+            <a:off x="2926080" y="1188720"/>
+            <a:ext cx="2194560" cy="1417320"/>
+          </a:xfrm>
+          <a:prstGeom prst="roundRect">
+            <a:avLst>
+              <a:gd name="adj" fmla="val 7742"/>
             </a:avLst>
           </a:prstGeom>
           <a:solidFill>
@@ -4062,63 +4243,14 @@
       </p:sp>
       <p:sp>
         <p:nvSpPr>
-          <p:cNvPr id="4" name="Sicurezza e infrastruttura cerchio"/>
-          <p:cNvSpPr/>
-          <p:nvPr/>
-        </p:nvSpPr>
-        <p:spPr>
-          <a:xfrm>
-            <a:off x="777240" y="1554480"/>
-            <a:ext cx="548640" cy="548640"/>
-          </a:xfrm>
-          <a:prstGeom prst="ellipse">
-            <a:avLst/>
-          </a:prstGeom>
-          <a:solidFill>
-            <a:schemeClr val="tx2"/>
-          </a:solidFill>
-          <a:ln w="12700">
-            <a:solidFill>
-              <a:schemeClr val="tx2"/>
-            </a:solidFill>
-            <a:prstDash val="solid"/>
-          </a:ln>
-        </p:spPr>
-      </p:sp>
-      <p:pic>
-        <p:nvPicPr>
-          <p:cNvPr id="5" name="Sicurezza e infrastruttura icona" descr="preencoded.png">    </p:cNvPr>
-          <p:cNvPicPr>
-            <a:picLocks noChangeAspect="1"/>
-          </p:cNvPicPr>
-          <p:nvPr/>
-        </p:nvPicPr>
-        <p:blipFill>
-          <a:blip r:embed="rId1"/>
-          <a:stretch>
-            <a:fillRect/>
-          </a:stretch>
-        </p:blipFill>
-        <p:spPr>
-          <a:xfrm>
-            <a:off x="914400" y="1691640"/>
-            <a:ext cx="274320" cy="274320"/>
-          </a:xfrm>
-          <a:prstGeom prst="rect">
-            <a:avLst/>
-          </a:prstGeom>
-        </p:spPr>
-      </p:pic>
-      <p:sp>
-        <p:nvSpPr>
-          <p:cNvPr id="6" name="Text 3"/>
+          <p:cNvPr id="6" name="Text 4"/>
           <p:cNvSpPr txBox="1"/>
           <p:nvPr/>
         </p:nvSpPr>
         <p:spPr>
           <a:xfrm>
-            <a:off x="1463040" y="1508760"/>
-            <a:ext cx="2453640" cy="640080"/>
+            <a:off x="3063240" y="1188720"/>
+            <a:ext cx="1920240" cy="1417320"/>
           </a:xfrm>
           <a:prstGeom prst="rect">
             <a:avLst/>
@@ -4134,143 +4266,59 @@
               <a:buNone/>
             </a:pPr>
             <a:r>
-              <a:rPr lang="en-US" sz="1700" b="1" dirty="0">
+              <a:rPr lang="en-US" sz="2600" b="1" dirty="0">
                 <a:solidFill>
                   <a:schemeClr val="tx2"/>
                 </a:solidFill>
               </a:rPr>
-              <a:t>Sicurezza e infrastruttura</a:t>
-            </a:r>
-            <a:endParaRPr lang="en-US" sz="1700" dirty="0"/>
-          </a:p>
-        </p:txBody>
-      </p:sp>
-      <p:sp>
-        <p:nvSpPr>
-          <p:cNvPr id="7" name="Text 4"/>
-          <p:cNvSpPr txBox="1"/>
-          <p:nvPr/>
-        </p:nvSpPr>
-        <p:spPr>
-          <a:xfrm>
-            <a:off x="822960" y="2286000"/>
-            <a:ext cx="3048000" cy="3749040"/>
-          </a:xfrm>
-          <a:prstGeom prst="rect">
-            <a:avLst/>
-          </a:prstGeom>
-          <a:noFill/>
-          <a:ln/>
-        </p:spPr>
-        <p:txBody>
-          <a:bodyPr wrap="square" lIns="0" tIns="0" rIns="0" bIns="0" rtlCol="0" anchor="t"/>
-          <a:lstStyle/>
-          <a:p>
-            <a:pPr marL="342900" indent="-342900">
-              <a:spcAft>
-                <a:spcPts val="700"/>
-              </a:spcAft>
-              <a:buSzPct val="100000"/>
-              <a:buChar char="•"/>
-            </a:pPr>
-            <a:r>
-              <a:rPr lang="en-US" sz="1350" dirty="0">
+              <a:t>21</a:t>
+            </a:r>
+            <a:endParaRPr lang="en-US" sz="2600" dirty="0"/>
+          </a:p>
+          <a:p>
+            <a:pPr indent="0" marL="0">
+              <a:buNone/>
+            </a:pPr>
+            <a:r>
+              <a:rPr lang="en-US" sz="1200" b="1" dirty="0">
                 <a:solidFill>
                   <a:schemeClr val="tx1"/>
                 </a:solidFill>
               </a:rPr>
-              <a:t>Fatto il 20/10: registro degli accessi e avvisi di sicurezza, uscita per inattività, intestazioni del sito, librerie aggiornate (0 vulnerabilità)</a:t>
-            </a:r>
-            <a:endParaRPr lang="en-US" sz="1350" dirty="0"/>
-          </a:p>
-          <a:p>
-            <a:pPr marL="342900" indent="-342900">
-              <a:spcAft>
-                <a:spcPts val="700"/>
-              </a:spcAft>
-              <a:buSzPct val="100000"/>
-              <a:buChar char="•"/>
-            </a:pPr>
-            <a:r>
-              <a:rPr lang="en-US" sz="1350" dirty="0">
+              <a:t>correzioni pronte</a:t>
+            </a:r>
+            <a:endParaRPr lang="en-US" sz="2600" dirty="0"/>
+          </a:p>
+          <a:p>
+            <a:pPr indent="0" marL="0">
+              <a:buNone/>
+            </a:pPr>
+            <a:r>
+              <a:rPr lang="en-US" sz="1050" dirty="0">
                 <a:solidFill>
                   <a:schemeClr val="tx1"/>
                 </a:solidFill>
               </a:rPr>
-              <a:t>Verifica in due passaggi per lo staff (pronta, spenta); CAPTCHA sulle pagine pubbliche</a:t>
-            </a:r>
-            <a:endParaRPr lang="en-US" sz="1350" dirty="0"/>
-          </a:p>
-          <a:p>
-            <a:pPr marL="342900" indent="-342900">
-              <a:spcAft>
-                <a:spcPts val="700"/>
-              </a:spcAft>
-              <a:buSzPct val="100000"/>
-              <a:buChar char="•"/>
-            </a:pPr>
-            <a:r>
-              <a:rPr lang="en-US" sz="1350" dirty="0">
-                <a:solidFill>
-                  <a:schemeClr val="tx1"/>
-                </a:solidFill>
-              </a:rPr>
-              <a:t>Antivirus sui file; verifica OWASP, test di intrusione a fine sviluppo</a:t>
-            </a:r>
-            <a:endParaRPr lang="en-US" sz="1350" dirty="0"/>
-          </a:p>
-          <a:p>
-            <a:pPr marL="342900" indent="-342900">
-              <a:spcAft>
-                <a:spcPts val="700"/>
-              </a:spcAft>
-              <a:buSzPct val="100000"/>
-              <a:buChar char="•"/>
-            </a:pPr>
-            <a:r>
-              <a:rPr lang="en-US" sz="1350" dirty="0">
-                <a:solidFill>
-                  <a:schemeClr val="tx1"/>
-                </a:solidFill>
-              </a:rPr>
-              <a:t>Backup automatico completo ogni giorno alle 20 dal Mac nella cartella Drive Cwp › backup (pronto, da installare sul Mac) e istruzioni di ripristino provate; da fare ambiente di prova e monitoraggio errori</a:t>
-            </a:r>
-            <a:endParaRPr lang="en-US" sz="1350" dirty="0"/>
-          </a:p>
-          <a:p>
-            <a:pPr marL="342900" indent="-342900">
-              <a:spcAft>
-                <a:spcPts val="700"/>
-              </a:spcAft>
-              <a:buSzPct val="100000"/>
-              <a:buChar char="•"/>
-            </a:pPr>
-            <a:r>
-              <a:rPr lang="en-US" sz="1350" dirty="0">
-                <a:solidFill>
-                  <a:schemeClr val="tx1"/>
-                </a:solidFill>
-              </a:rPr>
-              <a:t>Piani a pagamento e repository privato (slide «Piani a pagamento»); dominio email verificato, che serve anche alle email con le credenziali</a:t>
-            </a:r>
-            <a:endParaRPr lang="en-US" sz="1350" dirty="0"/>
-          </a:p>
-        </p:txBody>
-      </p:sp>
-      <p:sp>
-        <p:nvSpPr>
-          <p:cNvPr id="8" name="Colonna Avvio della piattaforma pubblica"/>
+              <a:t>script 48 e pagine, da pubblicare</a:t>
+            </a:r>
+            <a:endParaRPr lang="en-US" sz="2600" dirty="0"/>
+          </a:p>
+        </p:txBody>
+      </p:sp>
+      <p:sp>
+        <p:nvSpPr>
+          <p:cNvPr id="7" name="Numero domande alla Fondazione"/>
           <p:cNvSpPr/>
           <p:nvPr/>
         </p:nvSpPr>
         <p:spPr>
           <a:xfrm>
-            <a:off x="4328160" y="1325880"/>
-            <a:ext cx="3505200" cy="4846320"/>
+            <a:off x="5303520" y="1188720"/>
+            <a:ext cx="2194560" cy="1417320"/>
           </a:xfrm>
           <a:prstGeom prst="roundRect">
             <a:avLst>
-              <a:gd name="adj" fmla="val 3130"/>
+              <a:gd name="adj" fmla="val 7742"/>
             </a:avLst>
           </a:prstGeom>
           <a:solidFill>
@@ -4286,63 +4334,14 @@
       </p:sp>
       <p:sp>
         <p:nvSpPr>
-          <p:cNvPr id="9" name="Avvio della piattaforma pubblica cerchio"/>
-          <p:cNvSpPr/>
-          <p:nvPr/>
-        </p:nvSpPr>
-        <p:spPr>
-          <a:xfrm>
-            <a:off x="4556760" y="1554480"/>
-            <a:ext cx="548640" cy="548640"/>
-          </a:xfrm>
-          <a:prstGeom prst="ellipse">
-            <a:avLst/>
-          </a:prstGeom>
-          <a:solidFill>
-            <a:schemeClr val="accent2"/>
-          </a:solidFill>
-          <a:ln w="12700">
-            <a:solidFill>
-              <a:schemeClr val="accent2"/>
-            </a:solidFill>
-            <a:prstDash val="solid"/>
-          </a:ln>
-        </p:spPr>
-      </p:sp>
-      <p:pic>
-        <p:nvPicPr>
-          <p:cNvPr id="10" name="Avvio della piattaforma pubblica icona" descr="preencoded.png">    </p:cNvPr>
-          <p:cNvPicPr>
-            <a:picLocks noChangeAspect="1"/>
-          </p:cNvPicPr>
-          <p:nvPr/>
-        </p:nvPicPr>
-        <p:blipFill>
-          <a:blip r:embed="rId2"/>
-          <a:stretch>
-            <a:fillRect/>
-          </a:stretch>
-        </p:blipFill>
-        <p:spPr>
-          <a:xfrm>
-            <a:off x="4693920" y="1691640"/>
-            <a:ext cx="274320" cy="274320"/>
-          </a:xfrm>
-          <a:prstGeom prst="rect">
-            <a:avLst/>
-          </a:prstGeom>
-        </p:spPr>
-      </p:pic>
-      <p:sp>
-        <p:nvSpPr>
-          <p:cNvPr id="11" name="Text 7"/>
+          <p:cNvPr id="8" name="Text 6"/>
           <p:cNvSpPr txBox="1"/>
           <p:nvPr/>
         </p:nvSpPr>
         <p:spPr>
           <a:xfrm>
-            <a:off x="5242560" y="1508760"/>
-            <a:ext cx="2453640" cy="640080"/>
+            <a:off x="5440680" y="1188720"/>
+            <a:ext cx="1920240" cy="1417320"/>
           </a:xfrm>
           <a:prstGeom prst="rect">
             <a:avLst/>
@@ -4358,143 +4357,59 @@
               <a:buNone/>
             </a:pPr>
             <a:r>
-              <a:rPr lang="en-US" sz="1700" b="1" dirty="0">
+              <a:rPr lang="en-US" sz="2600" b="1" dirty="0">
                 <a:solidFill>
                   <a:schemeClr val="tx2"/>
                 </a:solidFill>
               </a:rPr>
-              <a:t>Avvio della piattaforma pubblica</a:t>
-            </a:r>
-            <a:endParaRPr lang="en-US" sz="1700" dirty="0"/>
-          </a:p>
-        </p:txBody>
-      </p:sp>
-      <p:sp>
-        <p:nvSpPr>
-          <p:cNvPr id="12" name="Text 8"/>
-          <p:cNvSpPr txBox="1"/>
-          <p:nvPr/>
-        </p:nvSpPr>
-        <p:spPr>
-          <a:xfrm>
-            <a:off x="4602480" y="2286000"/>
-            <a:ext cx="3048000" cy="3749040"/>
-          </a:xfrm>
-          <a:prstGeom prst="rect">
-            <a:avLst/>
-          </a:prstGeom>
-          <a:noFill/>
-          <a:ln/>
-        </p:spPr>
-        <p:txBody>
-          <a:bodyPr wrap="square" lIns="0" tIns="0" rIns="0" bIns="0" rtlCol="0" anchor="t"/>
-          <a:lstStyle/>
-          <a:p>
-            <a:pPr marL="342900" indent="-342900">
-              <a:spcAft>
-                <a:spcPts val="700"/>
-              </a:spcAft>
-              <a:buSzPct val="100000"/>
-              <a:buChar char="•"/>
-            </a:pPr>
-            <a:r>
-              <a:rPr lang="en-US" sz="1350" dirty="0">
+              <a:t>8</a:t>
+            </a:r>
+            <a:endParaRPr lang="en-US" sz="2600" dirty="0"/>
+          </a:p>
+          <a:p>
+            <a:pPr indent="0" marL="0">
+              <a:buNone/>
+            </a:pPr>
+            <a:r>
+              <a:rPr lang="en-US" sz="1200" b="1" dirty="0">
                 <a:solidFill>
                   <a:schemeClr val="tx1"/>
                 </a:solidFill>
               </a:rPr>
-              <a:t>Pagina /programma attiva con gli 8 documenti ufficiali v1.2 e la Metodologia approvata</a:t>
-            </a:r>
-            <a:endParaRPr lang="en-US" sz="1350" dirty="0"/>
-          </a:p>
-          <a:p>
-            <a:pPr marL="342900" indent="-342900">
-              <a:spcAft>
-                <a:spcPts val="700"/>
-              </a:spcAft>
-              <a:buSzPct val="100000"/>
-              <a:buChar char="•"/>
-            </a:pPr>
-            <a:r>
-              <a:rPr lang="en-US" sz="1350" dirty="0">
+              <a:t>domande alla Fondazione</a:t>
+            </a:r>
+            <a:endParaRPr lang="en-US" sz="2600" dirty="0"/>
+          </a:p>
+          <a:p>
+            <a:pPr indent="0" marL="0">
+              <a:buNone/>
+            </a:pPr>
+            <a:r>
+              <a:rPr lang="en-US" sz="1050" dirty="0">
                 <a:solidFill>
                   <a:schemeClr val="tx1"/>
                 </a:solidFill>
               </a:rPr>
-              <a:t>PEC del Programma per i reclami: operate@pec.it</a:t>
-            </a:r>
-            <a:endParaRPr lang="en-US" sz="1350" dirty="0"/>
-          </a:p>
-          <a:p>
-            <a:pPr marL="342900" indent="-342900">
-              <a:spcAft>
-                <a:spcPts val="700"/>
-              </a:spcAft>
-              <a:buSzPct val="100000"/>
-              <a:buChar char="•"/>
-            </a:pPr>
-            <a:r>
-              <a:rPr lang="en-US" sz="1350" dirty="0">
-                <a:solidFill>
-                  <a:schemeClr val="tx1"/>
-                </a:solidFill>
-              </a:rPr>
-              <a:t>Da inserire: enti di validazione e verifica e registri riconosciuti, modulistica</a:t>
-            </a:r>
-            <a:endParaRPr lang="en-US" sz="1350" dirty="0"/>
-          </a:p>
-          <a:p>
-            <a:pPr marL="342900" indent="-342900">
-              <a:spcAft>
-                <a:spcPts val="700"/>
-              </a:spcAft>
-              <a:buSzPct val="100000"/>
-              <a:buChar char="•"/>
-            </a:pPr>
-            <a:r>
-              <a:rPr lang="en-US" sz="1350" dirty="0">
-                <a:solidFill>
-                  <a:schemeClr val="tx1"/>
-                </a:solidFill>
-              </a:rPr>
-              <a:t>Accesso con SPID, CIE o CNS al feedback pubblico (adesione come fornitore di servizi)</a:t>
-            </a:r>
-            <a:endParaRPr lang="en-US" sz="1350" dirty="0"/>
-          </a:p>
-          <a:p>
-            <a:pPr marL="342900" indent="-342900">
-              <a:spcAft>
-                <a:spcPts val="700"/>
-              </a:spcAft>
-              <a:buSzPct val="100000"/>
-              <a:buChar char="•"/>
-            </a:pPr>
-            <a:r>
-              <a:rPr lang="en-US" sz="1350" dirty="0">
-                <a:solidFill>
-                  <a:schemeClr val="tx1"/>
-                </a:solidFill>
-              </a:rPr>
-              <a:t>Collaudo in corso con 5 Amministratori: correzioni dei rapporti V01 e V05 in produzione il 20-21/10; rilievi N01-N06 (22/10) corretti e in produzione; restano le regole metodologiche da confermare</a:t>
-            </a:r>
-            <a:endParaRPr lang="en-US" sz="1350" dirty="0"/>
-          </a:p>
-        </p:txBody>
-      </p:sp>
-      <p:sp>
-        <p:nvSpPr>
-          <p:cNvPr id="13" name="Colonna Qualità dei dati e completamenti"/>
+              <a:t>fasi, prezzo, listino, ricorso, paniere…</a:t>
+            </a:r>
+            <a:endParaRPr lang="en-US" sz="2600" dirty="0"/>
+          </a:p>
+        </p:txBody>
+      </p:sp>
+      <p:sp>
+        <p:nvSpPr>
+          <p:cNvPr id="9" name="Scelte di Luca"/>
           <p:cNvSpPr/>
           <p:nvPr/>
         </p:nvSpPr>
         <p:spPr>
           <a:xfrm>
-            <a:off x="8107680" y="1325880"/>
-            <a:ext cx="3505200" cy="4846320"/>
+            <a:off x="548640" y="2834640"/>
+            <a:ext cx="6949440" cy="2011680"/>
           </a:xfrm>
           <a:prstGeom prst="roundRect">
             <a:avLst>
-              <a:gd name="adj" fmla="val 3130"/>
+              <a:gd name="adj" fmla="val 5455"/>
             </a:avLst>
           </a:prstGeom>
           <a:solidFill>
@@ -4510,63 +4425,91 @@
       </p:sp>
       <p:sp>
         <p:nvSpPr>
-          <p:cNvPr id="14" name="Qualità dei dati e completamenti cerchio"/>
+          <p:cNvPr id="10" name="Text 8"/>
+          <p:cNvSpPr txBox="1"/>
+          <p:nvPr/>
+        </p:nvSpPr>
+        <p:spPr>
+          <a:xfrm>
+            <a:off x="731520" y="2926080"/>
+            <a:ext cx="6583680" cy="1828800"/>
+          </a:xfrm>
+          <a:prstGeom prst="rect">
+            <a:avLst/>
+          </a:prstGeom>
+          <a:noFill/>
+          <a:ln/>
+        </p:spPr>
+        <p:txBody>
+          <a:bodyPr wrap="square" lIns="0" tIns="0" rIns="0" bIns="0" rtlCol="0" anchor="t"/>
+          <a:lstStyle/>
+          <a:p>
+            <a:pPr indent="0" marL="0">
+              <a:buNone/>
+            </a:pPr>
+            <a:r>
+              <a:rPr lang="en-US" sz="1350" b="1" dirty="0">
+                <a:solidFill>
+                  <a:schemeClr val="tx2"/>
+                </a:solidFill>
+              </a:rPr>
+              <a:t>Scelte di Luca del 30 ottobre</a:t>
+            </a:r>
+            <a:endParaRPr lang="en-US" sz="1350" dirty="0"/>
+          </a:p>
+          <a:p>
+            <a:pPr indent="0" marL="0">
+              <a:buNone/>
+            </a:pPr>
+            <a:r>
+              <a:rPr lang="en-US" sz="1250" dirty="0">
+                <a:solidFill>
+                  <a:schemeClr val="tx1"/>
+                </a:solidFill>
+              </a:rPr>
+              <a:t>Dove il portale si scostava da Standard e Guida si segue il Programma: riferimento del simulatore come da Standard 4.8.1, niente taratura né riferimenti EsaCom, verifiche documentali solo con i documenti obbligatori (deroga motivata dell'Amministratore), codice della pratica sempre automatico, Banca Dati Utenze senza nomi e indirizzi. Il Marketing resta invariato.</a:t>
+            </a:r>
+            <a:endParaRPr lang="en-US" sz="1350" dirty="0"/>
+          </a:p>
+        </p:txBody>
+      </p:sp>
+      <p:sp>
+        <p:nvSpPr>
+          <p:cNvPr id="11" name="Elenco correzioni del 30 ottobre"/>
           <p:cNvSpPr/>
           <p:nvPr/>
         </p:nvSpPr>
         <p:spPr>
           <a:xfrm>
-            <a:off x="8336280" y="1554480"/>
-            <a:ext cx="548640" cy="548640"/>
-          </a:xfrm>
-          <a:prstGeom prst="ellipse">
-            <a:avLst/>
+            <a:off x="7726680" y="1188720"/>
+            <a:ext cx="3886200" cy="5074920"/>
+          </a:xfrm>
+          <a:prstGeom prst="roundRect">
+            <a:avLst>
+              <a:gd name="adj" fmla="val 2824"/>
+            </a:avLst>
           </a:prstGeom>
           <a:solidFill>
-            <a:schemeClr val="tx2"/>
+            <a:schemeClr val="bg2"/>
           </a:solidFill>
           <a:ln w="12700">
             <a:solidFill>
-              <a:schemeClr val="tx2"/>
+              <a:schemeClr val="bg2"/>
             </a:solidFill>
             <a:prstDash val="solid"/>
           </a:ln>
         </p:spPr>
       </p:sp>
-      <p:pic>
-        <p:nvPicPr>
-          <p:cNvPr id="15" name="Qualità dei dati e completamenti icona" descr="preencoded.png">    </p:cNvPr>
-          <p:cNvPicPr>
-            <a:picLocks noChangeAspect="1"/>
-          </p:cNvPicPr>
-          <p:nvPr/>
-        </p:nvPicPr>
-        <p:blipFill>
-          <a:blip r:embed="rId3"/>
-          <a:stretch>
-            <a:fillRect/>
-          </a:stretch>
-        </p:blipFill>
-        <p:spPr>
-          <a:xfrm>
-            <a:off x="8473440" y="1691640"/>
-            <a:ext cx="274320" cy="274320"/>
-          </a:xfrm>
-          <a:prstGeom prst="rect">
-            <a:avLst/>
-          </a:prstGeom>
-        </p:spPr>
-      </p:pic>
-      <p:sp>
-        <p:nvSpPr>
-          <p:cNvPr id="16" name="Text 11"/>
+      <p:sp>
+        <p:nvSpPr>
+          <p:cNvPr id="12" name="Text 10"/>
           <p:cNvSpPr txBox="1"/>
           <p:nvPr/>
         </p:nvSpPr>
         <p:spPr>
           <a:xfrm>
-            <a:off x="9022080" y="1508760"/>
-            <a:ext cx="2453640" cy="640080"/>
+            <a:off x="7909560" y="1325880"/>
+            <a:ext cx="3566160" cy="4846320"/>
           </a:xfrm>
           <a:prstGeom prst="rect">
             <a:avLst/>
@@ -4575,131 +4518,175 @@
           <a:ln/>
         </p:spPr>
         <p:txBody>
-          <a:bodyPr wrap="square" lIns="0" tIns="0" rIns="0" bIns="0" rtlCol="0" anchor="ctr"/>
-          <a:lstStyle/>
-          <a:p>
-            <a:pPr indent="0" marL="0">
-              <a:buNone/>
-            </a:pPr>
-            <a:r>
-              <a:rPr lang="en-US" sz="1700" b="1" dirty="0">
+          <a:bodyPr wrap="square" lIns="0" tIns="0" rIns="0" bIns="0" rtlCol="0" anchor="t"/>
+          <a:lstStyle/>
+          <a:p>
+            <a:pPr indent="0" marL="0">
+              <a:spcAft>
+                <a:spcPts val="500"/>
+              </a:spcAft>
+              <a:buNone/>
+            </a:pPr>
+            <a:r>
+              <a:rPr lang="en-US" sz="1350" b="1" dirty="0">
                 <a:solidFill>
                   <a:schemeClr val="tx2"/>
                 </a:solidFill>
               </a:rPr>
-              <a:t>Qualità dei dati e completamenti</a:t>
-            </a:r>
-            <a:endParaRPr lang="en-US" sz="1700" dirty="0"/>
-          </a:p>
-        </p:txBody>
-      </p:sp>
-      <p:sp>
-        <p:nvSpPr>
-          <p:cNvPr id="17" name="Text 12"/>
-          <p:cNvSpPr txBox="1"/>
-          <p:nvPr/>
-        </p:nvSpPr>
-        <p:spPr>
-          <a:xfrm>
-            <a:off x="8382000" y="2286000"/>
-            <a:ext cx="3048000" cy="3749040"/>
-          </a:xfrm>
-          <a:prstGeom prst="rect">
-            <a:avLst/>
-          </a:prstGeom>
-          <a:noFill/>
-          <a:ln/>
-        </p:spPr>
-        <p:txBody>
-          <a:bodyPr wrap="square" lIns="0" tIns="0" rIns="0" bIns="0" rtlCol="0" anchor="t"/>
-          <a:lstStyle/>
-          <a:p>
-            <a:pPr marL="342900" indent="-342900">
+              <a:t>Fasi</a:t>
+            </a:r>
+            <a:endParaRPr lang="en-US" sz="1350" dirty="0"/>
+          </a:p>
+          <a:p>
+            <a:pPr indent="0" marL="0">
               <a:spcAft>
-                <a:spcPts val="700"/>
+                <a:spcPts val="500"/>
               </a:spcAft>
-              <a:buSzPct val="100000"/>
-              <a:buChar char="•"/>
-            </a:pPr>
-            <a:r>
-              <a:rPr lang="en-US" sz="1350" dirty="0">
+              <a:buNone/>
+            </a:pPr>
+            <a:r>
+              <a:rPr lang="en-US" sz="1200" dirty="0">
                 <a:solidFill>
                   <a:schemeClr val="tx1"/>
                 </a:solidFill>
               </a:rPr>
-              <a:t>Dati ufficiali per i controlli: popolazione e cluster SOSE di ogni Comune</a:t>
+              <a:t>Validazione del progetto; fase 7 Registrazione del progetto (Rapporto: Emissione dei crediti)</a:t>
             </a:r>
             <a:endParaRPr lang="en-US" sz="1350" dirty="0"/>
           </a:p>
           <a:p>
-            <a:pPr marL="342900" indent="-342900">
+            <a:pPr indent="0" marL="0">
               <a:spcAft>
-                <a:spcPts val="700"/>
+                <a:spcPts val="500"/>
               </a:spcAft>
-              <a:buSzPct val="100000"/>
-              <a:buChar char="•"/>
-            </a:pPr>
-            <a:r>
-              <a:rPr lang="en-US" sz="1350" dirty="0">
+              <a:buNone/>
+            </a:pPr>
+            <a:r>
+              <a:rPr lang="en-US" sz="1350" b="1" dirty="0">
+                <a:solidFill>
+                  <a:schemeClr val="tx2"/>
+                </a:solidFill>
+              </a:rPr>
+              <a:t>Dashboard</a:t>
+            </a:r>
+            <a:endParaRPr lang="en-US" sz="1350" dirty="0"/>
+          </a:p>
+          <a:p>
+            <a:pPr indent="0" marL="0">
+              <a:spcAft>
+                <a:spcPts val="500"/>
+              </a:spcAft>
+              <a:buNone/>
+            </a:pPr>
+            <a:r>
+              <a:rPr lang="en-US" sz="1200" dirty="0">
                 <a:solidFill>
                   <a:schemeClr val="tx1"/>
                 </a:solidFill>
               </a:rPr>
-              <a:t>Conferma delle scelte interpretative del calcolo con l'ente</a:t>
+              <a:t>stato nel Programma, ente, fatture scadute e in scadenza, dichiarazioni di cancellazione</a:t>
             </a:r>
             <a:endParaRPr lang="en-US" sz="1350" dirty="0"/>
           </a:p>
           <a:p>
-            <a:pPr marL="342900" indent="-342900">
+            <a:pPr indent="0" marL="0">
               <a:spcAft>
-                <a:spcPts val="700"/>
+                <a:spcPts val="500"/>
               </a:spcAft>
-              <a:buSzPct val="100000"/>
-              <a:buChar char="•"/>
-            </a:pPr>
-            <a:r>
-              <a:rPr lang="en-US" sz="1350" dirty="0">
+              <a:buNone/>
+            </a:pPr>
+            <a:r>
+              <a:rPr lang="en-US" sz="1350" b="1" dirty="0">
+                <a:solidFill>
+                  <a:schemeClr val="tx2"/>
+                </a:solidFill>
+              </a:rPr>
+              <a:t>Anagrafiche</a:t>
+            </a:r>
+            <a:endParaRPr lang="en-US" sz="1350" dirty="0"/>
+          </a:p>
+          <a:p>
+            <a:pPr indent="0" marL="0">
+              <a:spcAft>
+                <a:spcPts val="500"/>
+              </a:spcAft>
+              <a:buNone/>
+            </a:pPr>
+            <a:r>
+              <a:rPr lang="en-US" sz="1200" dirty="0">
                 <a:solidFill>
                   <a:schemeClr val="tx1"/>
                 </a:solidFill>
               </a:rPr>
-              <a:t>Privacy: DPIA, registro dei trattamenti; accessibilità WCAG 2.1 AA</a:t>
+              <a:t>codice fiscale e partita IVA controllati; data di approvazione degli enti</a:t>
             </a:r>
             <a:endParaRPr lang="en-US" sz="1350" dirty="0"/>
           </a:p>
           <a:p>
-            <a:pPr marL="342900" indent="-342900">
+            <a:pPr indent="0" marL="0">
               <a:spcAft>
-                <a:spcPts val="700"/>
+                <a:spcPts val="500"/>
               </a:spcAft>
-              <a:buSzPct val="100000"/>
-              <a:buChar char="•"/>
-            </a:pPr>
-            <a:r>
-              <a:rPr lang="en-US" sz="1350" dirty="0">
+              <a:buNone/>
+            </a:pPr>
+            <a:r>
+              <a:rPr lang="en-US" sz="1350" b="1" dirty="0">
+                <a:solidFill>
+                  <a:schemeClr val="tx2"/>
+                </a:solidFill>
+              </a:rPr>
+              <a:t>Calcolo</a:t>
+            </a:r>
+            <a:endParaRPr lang="en-US" sz="1350" dirty="0"/>
+          </a:p>
+          <a:p>
+            <a:pPr indent="0" marL="0">
+              <a:spcAft>
+                <a:spcPts val="500"/>
+              </a:spcAft>
+              <a:buNone/>
+            </a:pPr>
+            <a:r>
+              <a:rPr lang="en-US" sz="1200" dirty="0">
                 <a:solidFill>
                   <a:schemeClr val="tx1"/>
                 </a:solidFill>
               </a:rPr>
-              <a:t>Collaudo con i dati reali di un Comune</a:t>
+              <a:t>anno di monitoraggio e anno di riferimento; ex post solo per anni conclusi e Progetti registrati</a:t>
             </a:r>
             <a:endParaRPr lang="en-US" sz="1350" dirty="0"/>
           </a:p>
           <a:p>
-            <a:pPr marL="342900" indent="-342900">
+            <a:pPr indent="0" marL="0">
               <a:spcAft>
-                <a:spcPts val="700"/>
+                <a:spcPts val="500"/>
               </a:spcAft>
-              <a:buSzPct val="100000"/>
-              <a:buChar char="•"/>
-            </a:pPr>
-            <a:r>
-              <a:rPr lang="en-US" sz="1350" dirty="0">
+              <a:buNone/>
+            </a:pPr>
+            <a:r>
+              <a:rPr lang="en-US" sz="1350" b="1" dirty="0">
+                <a:solidFill>
+                  <a:schemeClr val="tx2"/>
+                </a:solidFill>
+              </a:rPr>
+              <a:t>Reclami</a:t>
+            </a:r>
+            <a:endParaRPr lang="en-US" sz="1350" dirty="0"/>
+          </a:p>
+          <a:p>
+            <a:pPr indent="0" marL="0">
+              <a:spcAft>
+                <a:spcPts val="500"/>
+              </a:spcAft>
+              <a:buNone/>
+            </a:pPr>
+            <a:r>
+              <a:rPr lang="en-US" sz="1200" dirty="0">
                 <a:solidFill>
                   <a:schemeClr val="tx1"/>
                 </a:solidFill>
               </a:rPr>
-              <a:t>Nuovi moduli: simulatore con PDF ed Excel, assistente virtuale (poi Operatori e aiuto sulla pratica), Audit User e utenti online (fatti il 20/10); navigazione da smartphone (22/10); Banca Dati Utenze per utenza nel calcolo (22-23/10); valore dei crediti in Dashboard (23/10); Marketplaces da definire</a:t>
+              <a:t>ricorso; costi comunicati e non dovuti</a:t>
             </a:r>
             <a:endParaRPr lang="en-US" sz="1350" dirty="0"/>
           </a:p>
@@ -4810,7 +4797,7 @@
                 <a:ea typeface="Cambria" pitchFamily="34" charset="-122"/>
                 <a:cs typeface="Cambria" pitchFamily="34" charset="-120"/>
               </a:rPr>
-              <a:t>Nuovi moduli: simulatore e assistente virtuale</a:t>
+              <a:t>Punti aperti: sviluppo e servizi da attivare</a:t>
             </a:r>
             <a:endParaRPr lang="en-US" sz="3000" dirty="0"/>
           </a:p>
@@ -4818,18 +4805,18 @@
       </p:sp>
       <p:sp>
         <p:nvSpPr>
-          <p:cNvPr id="3" name="Riquadro simulatore"/>
+          <p:cNvPr id="3" name="Colonna Sicurezza e infrastruttura"/>
           <p:cNvSpPr/>
           <p:nvPr/>
         </p:nvSpPr>
         <p:spPr>
           <a:xfrm>
-            <a:off x="548640" y="1234440"/>
-            <a:ext cx="7086600" cy="5029200"/>
+            <a:off x="548640" y="1325880"/>
+            <a:ext cx="3505200" cy="4846320"/>
           </a:xfrm>
           <a:prstGeom prst="roundRect">
             <a:avLst>
-              <a:gd name="adj" fmla="val 2182"/>
+              <a:gd name="adj" fmla="val 3130"/>
             </a:avLst>
           </a:prstGeom>
           <a:solidFill>
@@ -4845,13 +4832,237 @@
       </p:sp>
       <p:sp>
         <p:nvSpPr>
-          <p:cNvPr id="4" name="Simulatore cerchio"/>
+          <p:cNvPr id="4" name="Sicurezza e infrastruttura cerchio"/>
           <p:cNvSpPr/>
           <p:nvPr/>
         </p:nvSpPr>
         <p:spPr>
           <a:xfrm>
-            <a:off x="777240" y="1417320"/>
+            <a:off x="777240" y="1554480"/>
+            <a:ext cx="548640" cy="548640"/>
+          </a:xfrm>
+          <a:prstGeom prst="ellipse">
+            <a:avLst/>
+          </a:prstGeom>
+          <a:solidFill>
+            <a:schemeClr val="tx2"/>
+          </a:solidFill>
+          <a:ln w="12700">
+            <a:solidFill>
+              <a:schemeClr val="tx2"/>
+            </a:solidFill>
+            <a:prstDash val="solid"/>
+          </a:ln>
+        </p:spPr>
+      </p:sp>
+      <p:pic>
+        <p:nvPicPr>
+          <p:cNvPr id="5" name="Sicurezza e infrastruttura icona" descr="preencoded.png">    </p:cNvPr>
+          <p:cNvPicPr>
+            <a:picLocks noChangeAspect="1"/>
+          </p:cNvPicPr>
+          <p:nvPr/>
+        </p:nvPicPr>
+        <p:blipFill>
+          <a:blip r:embed="rId1"/>
+          <a:stretch>
+            <a:fillRect/>
+          </a:stretch>
+        </p:blipFill>
+        <p:spPr>
+          <a:xfrm>
+            <a:off x="914400" y="1691640"/>
+            <a:ext cx="274320" cy="274320"/>
+          </a:xfrm>
+          <a:prstGeom prst="rect">
+            <a:avLst/>
+          </a:prstGeom>
+        </p:spPr>
+      </p:pic>
+      <p:sp>
+        <p:nvSpPr>
+          <p:cNvPr id="6" name="Text 3"/>
+          <p:cNvSpPr txBox="1"/>
+          <p:nvPr/>
+        </p:nvSpPr>
+        <p:spPr>
+          <a:xfrm>
+            <a:off x="1463040" y="1508760"/>
+            <a:ext cx="2453640" cy="640080"/>
+          </a:xfrm>
+          <a:prstGeom prst="rect">
+            <a:avLst/>
+          </a:prstGeom>
+          <a:noFill/>
+          <a:ln/>
+        </p:spPr>
+        <p:txBody>
+          <a:bodyPr wrap="square" lIns="0" tIns="0" rIns="0" bIns="0" rtlCol="0" anchor="ctr"/>
+          <a:lstStyle/>
+          <a:p>
+            <a:pPr indent="0" marL="0">
+              <a:buNone/>
+            </a:pPr>
+            <a:r>
+              <a:rPr lang="en-US" sz="1700" b="1" dirty="0">
+                <a:solidFill>
+                  <a:schemeClr val="tx2"/>
+                </a:solidFill>
+              </a:rPr>
+              <a:t>Sicurezza e infrastruttura</a:t>
+            </a:r>
+            <a:endParaRPr lang="en-US" sz="1700" dirty="0"/>
+          </a:p>
+        </p:txBody>
+      </p:sp>
+      <p:sp>
+        <p:nvSpPr>
+          <p:cNvPr id="7" name="Text 4"/>
+          <p:cNvSpPr txBox="1"/>
+          <p:nvPr/>
+        </p:nvSpPr>
+        <p:spPr>
+          <a:xfrm>
+            <a:off x="822960" y="2286000"/>
+            <a:ext cx="3048000" cy="3749040"/>
+          </a:xfrm>
+          <a:prstGeom prst="rect">
+            <a:avLst/>
+          </a:prstGeom>
+          <a:noFill/>
+          <a:ln/>
+        </p:spPr>
+        <p:txBody>
+          <a:bodyPr wrap="square" lIns="0" tIns="0" rIns="0" bIns="0" rtlCol="0" anchor="t"/>
+          <a:lstStyle/>
+          <a:p>
+            <a:pPr marL="342900" indent="-342900">
+              <a:spcAft>
+                <a:spcPts val="700"/>
+              </a:spcAft>
+              <a:buSzPct val="100000"/>
+              <a:buChar char="•"/>
+            </a:pPr>
+            <a:r>
+              <a:rPr lang="en-US" sz="1350" dirty="0">
+                <a:solidFill>
+                  <a:schemeClr val="tx1"/>
+                </a:solidFill>
+              </a:rPr>
+              <a:t>Fatto il 20/10: registro degli accessi e avvisi di sicurezza, uscita per inattività, intestazioni del sito, librerie aggiornate (0 vulnerabilità)</a:t>
+            </a:r>
+            <a:endParaRPr lang="en-US" sz="1350" dirty="0"/>
+          </a:p>
+          <a:p>
+            <a:pPr marL="342900" indent="-342900">
+              <a:spcAft>
+                <a:spcPts val="700"/>
+              </a:spcAft>
+              <a:buSzPct val="100000"/>
+              <a:buChar char="•"/>
+            </a:pPr>
+            <a:r>
+              <a:rPr lang="en-US" sz="1350" dirty="0">
+                <a:solidFill>
+                  <a:schemeClr val="tx1"/>
+                </a:solidFill>
+              </a:rPr>
+              <a:t>Verifica in due passaggi per lo staff (pronta, spenta); CAPTCHA sulle pagine pubbliche</a:t>
+            </a:r>
+            <a:endParaRPr lang="en-US" sz="1350" dirty="0"/>
+          </a:p>
+          <a:p>
+            <a:pPr marL="342900" indent="-342900">
+              <a:spcAft>
+                <a:spcPts val="700"/>
+              </a:spcAft>
+              <a:buSzPct val="100000"/>
+              <a:buChar char="•"/>
+            </a:pPr>
+            <a:r>
+              <a:rPr lang="en-US" sz="1350" dirty="0">
+                <a:solidFill>
+                  <a:schemeClr val="tx1"/>
+                </a:solidFill>
+              </a:rPr>
+              <a:t>Antivirus sui file; verifica OWASP, test di intrusione a fine sviluppo</a:t>
+            </a:r>
+            <a:endParaRPr lang="en-US" sz="1350" dirty="0"/>
+          </a:p>
+          <a:p>
+            <a:pPr marL="342900" indent="-342900">
+              <a:spcAft>
+                <a:spcPts val="700"/>
+              </a:spcAft>
+              <a:buSzPct val="100000"/>
+              <a:buChar char="•"/>
+            </a:pPr>
+            <a:r>
+              <a:rPr lang="en-US" sz="1350" dirty="0">
+                <a:solidFill>
+                  <a:schemeClr val="tx1"/>
+                </a:solidFill>
+              </a:rPr>
+              <a:t>Backup automatico completo ogni giorno alle 20 dal Mac nella cartella Drive Cwp › backup (pronto, da installare sul Mac) e istruzioni di ripristino provate; da fare ambiente di prova e monitoraggio errori</a:t>
+            </a:r>
+            <a:endParaRPr lang="en-US" sz="1350" dirty="0"/>
+          </a:p>
+          <a:p>
+            <a:pPr marL="342900" indent="-342900">
+              <a:spcAft>
+                <a:spcPts val="700"/>
+              </a:spcAft>
+              <a:buSzPct val="100000"/>
+              <a:buChar char="•"/>
+            </a:pPr>
+            <a:r>
+              <a:rPr lang="en-US" sz="1350" dirty="0">
+                <a:solidFill>
+                  <a:schemeClr val="tx1"/>
+                </a:solidFill>
+              </a:rPr>
+              <a:t>Piani a pagamento e repository privato (slide «Piani a pagamento»); dominio email verificato, che serve anche alle email con le credenziali</a:t>
+            </a:r>
+            <a:endParaRPr lang="en-US" sz="1350" dirty="0"/>
+          </a:p>
+        </p:txBody>
+      </p:sp>
+      <p:sp>
+        <p:nvSpPr>
+          <p:cNvPr id="8" name="Colonna Avvio della piattaforma pubblica"/>
+          <p:cNvSpPr/>
+          <p:nvPr/>
+        </p:nvSpPr>
+        <p:spPr>
+          <a:xfrm>
+            <a:off x="4328160" y="1325880"/>
+            <a:ext cx="3505200" cy="4846320"/>
+          </a:xfrm>
+          <a:prstGeom prst="roundRect">
+            <a:avLst>
+              <a:gd name="adj" fmla="val 3130"/>
+            </a:avLst>
+          </a:prstGeom>
+          <a:solidFill>
+            <a:schemeClr val="bg2"/>
+          </a:solidFill>
+          <a:ln w="12700">
+            <a:solidFill>
+              <a:schemeClr val="bg2"/>
+            </a:solidFill>
+            <a:prstDash val="solid"/>
+          </a:ln>
+        </p:spPr>
+      </p:sp>
+      <p:sp>
+        <p:nvSpPr>
+          <p:cNvPr id="9" name="Avvio della piattaforma pubblica cerchio"/>
+          <p:cNvSpPr/>
+          <p:nvPr/>
+        </p:nvSpPr>
+        <p:spPr>
+          <a:xfrm>
+            <a:off x="4556760" y="1554480"/>
             <a:ext cx="548640" cy="548640"/>
           </a:xfrm>
           <a:prstGeom prst="ellipse">
@@ -4870,21 +5081,21 @@
       </p:sp>
       <p:pic>
         <p:nvPicPr>
-          <p:cNvPr id="5" name="Simulatore icona" descr="preencoded.png">    </p:cNvPr>
+          <p:cNvPr id="10" name="Avvio della piattaforma pubblica icona" descr="preencoded.png">    </p:cNvPr>
           <p:cNvPicPr>
             <a:picLocks noChangeAspect="1"/>
           </p:cNvPicPr>
           <p:nvPr/>
         </p:nvPicPr>
         <p:blipFill>
-          <a:blip r:embed="rId1"/>
+          <a:blip r:embed="rId2"/>
           <a:stretch>
             <a:fillRect/>
           </a:stretch>
         </p:blipFill>
         <p:spPr>
           <a:xfrm>
-            <a:off x="914400" y="1554480"/>
+            <a:off x="4693920" y="1691640"/>
             <a:ext cx="274320" cy="274320"/>
           </a:xfrm>
           <a:prstGeom prst="rect">
@@ -4894,14 +5105,14 @@
       </p:pic>
       <p:sp>
         <p:nvSpPr>
-          <p:cNvPr id="6" name="Text 3"/>
+          <p:cNvPr id="11" name="Text 7"/>
           <p:cNvSpPr txBox="1"/>
           <p:nvPr/>
         </p:nvSpPr>
         <p:spPr>
           <a:xfrm>
-            <a:off x="1463040" y="1371600"/>
-            <a:ext cx="3840480" cy="365760"/>
+            <a:off x="5242560" y="1508760"/>
+            <a:ext cx="2453640" cy="640080"/>
           </a:xfrm>
           <a:prstGeom prst="rect">
             <a:avLst/>
@@ -4917,27 +5128,27 @@
               <a:buNone/>
             </a:pPr>
             <a:r>
-              <a:rPr lang="en-US" sz="1800" b="1" dirty="0">
+              <a:rPr lang="en-US" sz="1700" b="1" dirty="0">
                 <a:solidFill>
                   <a:schemeClr val="tx2"/>
                 </a:solidFill>
               </a:rPr>
-              <a:t>Simulatore di scenari</a:t>
-            </a:r>
-            <a:endParaRPr lang="en-US" sz="1800" dirty="0"/>
-          </a:p>
-        </p:txBody>
-      </p:sp>
-      <p:sp>
-        <p:nvSpPr>
-          <p:cNvPr id="7" name="Text 4"/>
+              <a:t>Avvio della piattaforma pubblica</a:t>
+            </a:r>
+            <a:endParaRPr lang="en-US" sz="1700" dirty="0"/>
+          </a:p>
+        </p:txBody>
+      </p:sp>
+      <p:sp>
+        <p:nvSpPr>
+          <p:cNvPr id="12" name="Text 8"/>
           <p:cNvSpPr txBox="1"/>
           <p:nvPr/>
         </p:nvSpPr>
         <p:spPr>
           <a:xfrm>
-            <a:off x="1463040" y="1737360"/>
-            <a:ext cx="3931920" cy="457200"/>
+            <a:off x="4602480" y="2286000"/>
+            <a:ext cx="3048000" cy="3749040"/>
           </a:xfrm>
           <a:prstGeom prst="rect">
             <a:avLst/>
@@ -4946,46 +5157,122 @@
           <a:ln/>
         </p:spPr>
         <p:txBody>
-          <a:bodyPr wrap="square" lIns="0" tIns="0" rIns="0" bIns="0" rtlCol="0" anchor="ctr"/>
-          <a:lstStyle/>
-          <a:p>
-            <a:pPr indent="0" marL="0">
-              <a:buNone/>
-            </a:pPr>
-            <a:r>
-              <a:rPr lang="en-US" sz="1200" dirty="0">
-                <a:solidFill>
-                  <a:schemeClr val="accent6"/>
-                </a:solidFill>
-              </a:rPr>
-              <a:t>Quanti crediti potrebbe generare un Comune? Una stima anno per anno, prima di aderire.</a:t>
-            </a:r>
-            <a:endParaRPr lang="en-US" sz="1200" dirty="0"/>
-          </a:p>
-        </p:txBody>
-      </p:sp>
-      <p:sp>
-        <p:nvSpPr>
-          <p:cNvPr id="8" name="Badge online"/>
+          <a:bodyPr wrap="square" lIns="0" tIns="0" rIns="0" bIns="0" rtlCol="0" anchor="t"/>
+          <a:lstStyle/>
+          <a:p>
+            <a:pPr marL="342900" indent="-342900">
+              <a:spcAft>
+                <a:spcPts val="700"/>
+              </a:spcAft>
+              <a:buSzPct val="100000"/>
+              <a:buChar char="•"/>
+            </a:pPr>
+            <a:r>
+              <a:rPr lang="en-US" sz="1350" dirty="0">
+                <a:solidFill>
+                  <a:schemeClr val="tx1"/>
+                </a:solidFill>
+              </a:rPr>
+              <a:t>Pagina /programma attiva con gli 8 documenti ufficiali v1.2 e la Metodologia approvata</a:t>
+            </a:r>
+            <a:endParaRPr lang="en-US" sz="1350" dirty="0"/>
+          </a:p>
+          <a:p>
+            <a:pPr marL="342900" indent="-342900">
+              <a:spcAft>
+                <a:spcPts val="700"/>
+              </a:spcAft>
+              <a:buSzPct val="100000"/>
+              <a:buChar char="•"/>
+            </a:pPr>
+            <a:r>
+              <a:rPr lang="en-US" sz="1350" dirty="0">
+                <a:solidFill>
+                  <a:schemeClr val="tx1"/>
+                </a:solidFill>
+              </a:rPr>
+              <a:t>PEC del Programma per i reclami: operate@pec.it</a:t>
+            </a:r>
+            <a:endParaRPr lang="en-US" sz="1350" dirty="0"/>
+          </a:p>
+          <a:p>
+            <a:pPr marL="342900" indent="-342900">
+              <a:spcAft>
+                <a:spcPts val="700"/>
+              </a:spcAft>
+              <a:buSzPct val="100000"/>
+              <a:buChar char="•"/>
+            </a:pPr>
+            <a:r>
+              <a:rPr lang="en-US" sz="1350" dirty="0">
+                <a:solidFill>
+                  <a:schemeClr val="tx1"/>
+                </a:solidFill>
+              </a:rPr>
+              <a:t>Da inserire: enti di validazione e verifica e registri riconosciuti, modulistica</a:t>
+            </a:r>
+            <a:endParaRPr lang="en-US" sz="1350" dirty="0"/>
+          </a:p>
+          <a:p>
+            <a:pPr marL="342900" indent="-342900">
+              <a:spcAft>
+                <a:spcPts val="700"/>
+              </a:spcAft>
+              <a:buSzPct val="100000"/>
+              <a:buChar char="•"/>
+            </a:pPr>
+            <a:r>
+              <a:rPr lang="en-US" sz="1350" dirty="0">
+                <a:solidFill>
+                  <a:schemeClr val="tx1"/>
+                </a:solidFill>
+              </a:rPr>
+              <a:t>Accesso con SPID, CIE o CNS al feedback pubblico (adesione come fornitore di servizi)</a:t>
+            </a:r>
+            <a:endParaRPr lang="en-US" sz="1350" dirty="0"/>
+          </a:p>
+          <a:p>
+            <a:pPr marL="342900" indent="-342900">
+              <a:spcAft>
+                <a:spcPts val="700"/>
+              </a:spcAft>
+              <a:buSzPct val="100000"/>
+              <a:buChar char="•"/>
+            </a:pPr>
+            <a:r>
+              <a:rPr lang="en-US" sz="1350" dirty="0">
+                <a:solidFill>
+                  <a:schemeClr val="tx1"/>
+                </a:solidFill>
+              </a:rPr>
+              <a:t>Collaudo in corso con 5 Amministratori: correzioni dei rapporti V01 e V05 in produzione il 20-21/10; rilievi N01-N06 (22/10) corretti e in produzione; restano le regole metodologiche da confermare</a:t>
+            </a:r>
+            <a:endParaRPr lang="en-US" sz="1350" dirty="0"/>
+          </a:p>
+        </p:txBody>
+      </p:sp>
+      <p:sp>
+        <p:nvSpPr>
+          <p:cNvPr id="13" name="Colonna Qualità dei dati e completamenti"/>
           <p:cNvSpPr/>
           <p:nvPr/>
         </p:nvSpPr>
         <p:spPr>
           <a:xfrm>
-            <a:off x="1463040" y="2212848"/>
-            <a:ext cx="2148840" cy="274320"/>
+            <a:off x="8107680" y="1325880"/>
+            <a:ext cx="3505200" cy="4846320"/>
           </a:xfrm>
           <a:prstGeom prst="roundRect">
             <a:avLst>
-              <a:gd name="adj" fmla="val 50000"/>
+              <a:gd name="adj" fmla="val 3130"/>
             </a:avLst>
           </a:prstGeom>
           <a:solidFill>
-            <a:schemeClr val="accent2"/>
+            <a:schemeClr val="bg2"/>
           </a:solidFill>
           <a:ln w="12700">
             <a:solidFill>
-              <a:schemeClr val="accent2"/>
+              <a:schemeClr val="bg2"/>
             </a:solidFill>
             <a:prstDash val="solid"/>
           </a:ln>
@@ -4993,185 +5280,14 @@
       </p:sp>
       <p:sp>
         <p:nvSpPr>
-          <p:cNvPr id="9" name="Text 6"/>
-          <p:cNvSpPr txBox="1"/>
-          <p:nvPr/>
-        </p:nvSpPr>
-        <p:spPr>
-          <a:xfrm>
-            <a:off x="1463040" y="2212848"/>
-            <a:ext cx="2148840" cy="274320"/>
-          </a:xfrm>
-          <a:prstGeom prst="rect">
-            <a:avLst/>
-          </a:prstGeom>
-          <a:noFill/>
-          <a:ln/>
-        </p:spPr>
-        <p:txBody>
-          <a:bodyPr wrap="square" lIns="0" tIns="0" rIns="0" bIns="0" rtlCol="0" anchor="ctr"/>
-          <a:lstStyle/>
-          <a:p>
-            <a:pPr algn="ctr" indent="0" marL="0">
-              <a:buNone/>
-            </a:pPr>
-            <a:r>
-              <a:rPr lang="en-US" sz="1000" b="1" spc="100" kern="0" dirty="0">
-                <a:solidFill>
-                  <a:schemeClr val="bg1"/>
-                </a:solidFill>
-              </a:rPr>
-              <a:t>PRIMA VERSIONE ONLINE</a:t>
-            </a:r>
-            <a:endParaRPr lang="en-US" sz="1000" dirty="0"/>
-          </a:p>
-        </p:txBody>
-      </p:sp>
-      <p:sp>
-        <p:nvSpPr>
-          <p:cNvPr id="10" name="Menu durata"/>
+          <p:cNvPr id="14" name="Qualità dei dati e completamenti cerchio"/>
           <p:cNvSpPr/>
           <p:nvPr/>
         </p:nvSpPr>
         <p:spPr>
           <a:xfrm>
-            <a:off x="5532120" y="1417320"/>
-            <a:ext cx="1920240" cy="384048"/>
-          </a:xfrm>
-          <a:prstGeom prst="roundRect">
-            <a:avLst>
-              <a:gd name="adj" fmla="val 14286"/>
-            </a:avLst>
-          </a:prstGeom>
-          <a:solidFill>
-            <a:schemeClr val="bg1"/>
-          </a:solidFill>
-          <a:ln w="15875">
-            <a:solidFill>
-              <a:srgbClr val="2F5D3A"/>
-            </a:solidFill>
-            <a:prstDash val="solid"/>
-          </a:ln>
-        </p:spPr>
-      </p:sp>
-      <p:sp>
-        <p:nvSpPr>
-          <p:cNvPr id="11" name="Text 8"/>
-          <p:cNvSpPr txBox="1"/>
-          <p:nvPr/>
-        </p:nvSpPr>
-        <p:spPr>
-          <a:xfrm>
-            <a:off x="5623560" y="1417320"/>
-            <a:ext cx="1783080" cy="384048"/>
-          </a:xfrm>
-          <a:prstGeom prst="rect">
-            <a:avLst/>
-          </a:prstGeom>
-          <a:noFill/>
-          <a:ln/>
-        </p:spPr>
-        <p:txBody>
-          <a:bodyPr wrap="square" lIns="0" tIns="0" rIns="0" bIns="0" rtlCol="0" anchor="ctr"/>
-          <a:lstStyle/>
-          <a:p>
-            <a:pPr indent="0" marL="0">
-              <a:buNone/>
-            </a:pPr>
-            <a:r>
-              <a:rPr lang="en-US" sz="1200" dirty="0">
-                <a:solidFill>
-                  <a:schemeClr val="accent6"/>
-                </a:solidFill>
-              </a:rPr>
-              <a:t>Durata: </a:t>
-            </a:r>
-            <a:pPr indent="0" marL="0">
-              <a:buNone/>
-            </a:pPr>
-            <a:r>
-              <a:rPr lang="en-US" sz="1200" b="1" dirty="0">
-                <a:solidFill>
-                  <a:schemeClr val="tx2"/>
-                </a:solidFill>
-              </a:rPr>
-              <a:t>10 anni  ▾</a:t>
-            </a:r>
-            <a:endParaRPr lang="en-US" sz="1200" dirty="0"/>
-          </a:p>
-        </p:txBody>
-      </p:sp>
-      <p:sp>
-        <p:nvSpPr>
-          <p:cNvPr id="12" name="Opzioni durata"/>
-          <p:cNvSpPr/>
-          <p:nvPr/>
-        </p:nvSpPr>
-        <p:spPr>
-          <a:xfrm>
-            <a:off x="5532120" y="1819656"/>
-            <a:ext cx="1920240" cy="603504"/>
-          </a:xfrm>
-          <a:prstGeom prst="rect">
-            <a:avLst/>
-          </a:prstGeom>
-          <a:solidFill>
-            <a:schemeClr val="bg1"/>
-          </a:solidFill>
-          <a:ln w="9525">
-            <a:solidFill>
-              <a:srgbClr val="D9D4C5"/>
-            </a:solidFill>
-            <a:prstDash val="solid"/>
-          </a:ln>
-        </p:spPr>
-      </p:sp>
-      <p:sp>
-        <p:nvSpPr>
-          <p:cNvPr id="13" name="Text 10"/>
-          <p:cNvSpPr txBox="1"/>
-          <p:nvPr/>
-        </p:nvSpPr>
-        <p:spPr>
-          <a:xfrm>
-            <a:off x="5532120" y="1819656"/>
-            <a:ext cx="1920240" cy="603504"/>
-          </a:xfrm>
-          <a:prstGeom prst="rect">
-            <a:avLst/>
-          </a:prstGeom>
-          <a:noFill/>
-          <a:ln/>
-        </p:spPr>
-        <p:txBody>
-          <a:bodyPr wrap="square" lIns="0" tIns="0" rIns="0" bIns="0" rtlCol="0" anchor="ctr"/>
-          <a:lstStyle/>
-          <a:p>
-            <a:pPr algn="ctr" indent="0" marL="0">
-              <a:buNone/>
-            </a:pPr>
-            <a:r>
-              <a:rPr lang="en-US" sz="1100" dirty="0">
-                <a:solidFill>
-                  <a:schemeClr val="tx1"/>
-                </a:solidFill>
-              </a:rPr>
-              <a:t>7 anni  ·  10 anni  ·  21 anni</a:t>
-            </a:r>
-            <a:endParaRPr lang="en-US" sz="1100" dirty="0"/>
-          </a:p>
-        </p:txBody>
-      </p:sp>
-      <p:sp>
-        <p:nvSpPr>
-          <p:cNvPr id="14" name="Passo 1"/>
-          <p:cNvSpPr/>
-          <p:nvPr/>
-        </p:nvSpPr>
-        <p:spPr>
-          <a:xfrm>
-            <a:off x="822960" y="2633472"/>
-            <a:ext cx="420624" cy="420624"/>
+            <a:off x="8336280" y="1554480"/>
+            <a:ext cx="548640" cy="548640"/>
           </a:xfrm>
           <a:prstGeom prst="ellipse">
             <a:avLst/>
@@ -5187,641 +5303,23 @@
           </a:ln>
         </p:spPr>
       </p:sp>
-      <p:sp>
-        <p:nvSpPr>
-          <p:cNvPr id="15" name="Text 12"/>
-          <p:cNvSpPr txBox="1"/>
-          <p:nvPr/>
-        </p:nvSpPr>
-        <p:spPr>
-          <a:xfrm>
-            <a:off x="822960" y="2633472"/>
-            <a:ext cx="420624" cy="420624"/>
-          </a:xfrm>
-          <a:prstGeom prst="rect">
-            <a:avLst/>
-          </a:prstGeom>
-          <a:noFill/>
-          <a:ln/>
-        </p:spPr>
-        <p:txBody>
-          <a:bodyPr wrap="square" lIns="0" tIns="0" rIns="0" bIns="0" rtlCol="0" anchor="ctr"/>
-          <a:lstStyle/>
-          <a:p>
-            <a:pPr algn="ctr" indent="0" marL="0">
-              <a:buNone/>
-            </a:pPr>
-            <a:r>
-              <a:rPr lang="en-US" sz="1400" b="1" dirty="0">
-                <a:solidFill>
-                  <a:schemeClr val="bg1"/>
-                </a:solidFill>
-              </a:rPr>
-              <a:t>1</a:t>
-            </a:r>
-            <a:endParaRPr lang="en-US" sz="1400" dirty="0"/>
-          </a:p>
-        </p:txBody>
-      </p:sp>
-      <p:sp>
-        <p:nvSpPr>
-          <p:cNvPr id="16" name="Text 13"/>
-          <p:cNvSpPr txBox="1"/>
-          <p:nvPr/>
-        </p:nvSpPr>
-        <p:spPr>
-          <a:xfrm>
-            <a:off x="1417320" y="2560320"/>
-            <a:ext cx="6035040" cy="603504"/>
-          </a:xfrm>
-          <a:prstGeom prst="rect">
-            <a:avLst/>
-          </a:prstGeom>
-          <a:noFill/>
-          <a:ln/>
-        </p:spPr>
-        <p:txBody>
-          <a:bodyPr wrap="square" lIns="0" tIns="0" rIns="0" bIns="0" rtlCol="0" anchor="ctr"/>
-          <a:lstStyle/>
-          <a:p>
-            <a:pPr indent="0" marL="0">
-              <a:buNone/>
-            </a:pPr>
-            <a:r>
-              <a:rPr lang="en-US" sz="1350" b="1" dirty="0">
-                <a:solidFill>
-                  <a:schemeClr val="tx2"/>
-                </a:solidFill>
-              </a:rPr>
-              <a:t>Scenari per Comune</a:t>
-            </a:r>
-            <a:endParaRPr lang="en-US" sz="1350" dirty="0"/>
-          </a:p>
-          <a:p>
-            <a:pPr indent="0" marL="0">
-              <a:buNone/>
-            </a:pPr>
-            <a:r>
-              <a:rPr lang="en-US" sz="1150" dirty="0">
-                <a:solidFill>
-                  <a:schemeClr val="tx1"/>
-                </a:solidFill>
-              </a:rPr>
-              <a:t>Più scenari per ogni Comune («prudente», «obiettivo»…), durata 7, 10 o 21 anni</a:t>
-            </a:r>
-            <a:endParaRPr lang="en-US" sz="1350" dirty="0"/>
-          </a:p>
-        </p:txBody>
-      </p:sp>
-      <p:sp>
-        <p:nvSpPr>
-          <p:cNvPr id="17" name="Passo 2"/>
-          <p:cNvSpPr/>
-          <p:nvPr/>
-        </p:nvSpPr>
-        <p:spPr>
-          <a:xfrm>
-            <a:off x="822960" y="3346704"/>
-            <a:ext cx="420624" cy="420624"/>
-          </a:xfrm>
-          <a:prstGeom prst="ellipse">
-            <a:avLst/>
-          </a:prstGeom>
-          <a:solidFill>
-            <a:schemeClr val="tx2"/>
-          </a:solidFill>
-          <a:ln w="12700">
-            <a:solidFill>
-              <a:schemeClr val="tx2"/>
-            </a:solidFill>
-            <a:prstDash val="solid"/>
-          </a:ln>
-        </p:spPr>
-      </p:sp>
-      <p:sp>
-        <p:nvSpPr>
-          <p:cNvPr id="18" name="Text 15"/>
-          <p:cNvSpPr txBox="1"/>
-          <p:nvPr/>
-        </p:nvSpPr>
-        <p:spPr>
-          <a:xfrm>
-            <a:off x="822960" y="3346704"/>
-            <a:ext cx="420624" cy="420624"/>
-          </a:xfrm>
-          <a:prstGeom prst="rect">
-            <a:avLst/>
-          </a:prstGeom>
-          <a:noFill/>
-          <a:ln/>
-        </p:spPr>
-        <p:txBody>
-          <a:bodyPr wrap="square" lIns="0" tIns="0" rIns="0" bIns="0" rtlCol="0" anchor="ctr"/>
-          <a:lstStyle/>
-          <a:p>
-            <a:pPr algn="ctr" indent="0" marL="0">
-              <a:buNone/>
-            </a:pPr>
-            <a:r>
-              <a:rPr lang="en-US" sz="1400" b="1" dirty="0">
-                <a:solidFill>
-                  <a:schemeClr val="bg1"/>
-                </a:solidFill>
-              </a:rPr>
-              <a:t>2</a:t>
-            </a:r>
-            <a:endParaRPr lang="en-US" sz="1400" dirty="0"/>
-          </a:p>
-        </p:txBody>
-      </p:sp>
-      <p:sp>
-        <p:nvSpPr>
-          <p:cNvPr id="19" name="Text 16"/>
-          <p:cNvSpPr txBox="1"/>
-          <p:nvPr/>
-        </p:nvSpPr>
-        <p:spPr>
-          <a:xfrm>
-            <a:off x="1417320" y="3273552"/>
-            <a:ext cx="6035040" cy="603504"/>
-          </a:xfrm>
-          <a:prstGeom prst="rect">
-            <a:avLst/>
-          </a:prstGeom>
-          <a:noFill/>
-          <a:ln/>
-        </p:spPr>
-        <p:txBody>
-          <a:bodyPr wrap="square" lIns="0" tIns="0" rIns="0" bIns="0" rtlCol="0" anchor="ctr"/>
-          <a:lstStyle/>
-          <a:p>
-            <a:pPr indent="0" marL="0">
-              <a:buNone/>
-            </a:pPr>
-            <a:r>
-              <a:rPr lang="en-US" sz="1350" b="1" dirty="0">
-                <a:solidFill>
-                  <a:schemeClr val="tx2"/>
-                </a:solidFill>
-              </a:rPr>
-              <a:t>Scenario di riferimento (Standard 4.8.1)</a:t>
-            </a:r>
-            <a:endParaRPr lang="en-US" sz="1350" dirty="0"/>
-          </a:p>
-          <a:p>
-            <a:pPr indent="0" marL="0">
-              <a:buNone/>
-            </a:pPr>
-            <a:r>
-              <a:rPr lang="en-US" sz="1150" dirty="0">
-                <a:solidFill>
-                  <a:schemeClr val="tx1"/>
-                </a:solidFill>
-              </a:rPr>
-              <a:t>Anno con il 65% di differenziata o valori medi del cluster SOSE; situazione attuale come partenza</a:t>
-            </a:r>
-            <a:endParaRPr lang="en-US" sz="1350" dirty="0"/>
-          </a:p>
-        </p:txBody>
-      </p:sp>
-      <p:sp>
-        <p:nvSpPr>
-          <p:cNvPr id="20" name="Passo 3"/>
-          <p:cNvSpPr/>
-          <p:nvPr/>
-        </p:nvSpPr>
-        <p:spPr>
-          <a:xfrm>
-            <a:off x="822960" y="4059936"/>
-            <a:ext cx="420624" cy="420624"/>
-          </a:xfrm>
-          <a:prstGeom prst="ellipse">
-            <a:avLst/>
-          </a:prstGeom>
-          <a:solidFill>
-            <a:schemeClr val="tx2"/>
-          </a:solidFill>
-          <a:ln w="12700">
-            <a:solidFill>
-              <a:schemeClr val="tx2"/>
-            </a:solidFill>
-            <a:prstDash val="solid"/>
-          </a:ln>
-        </p:spPr>
-      </p:sp>
-      <p:sp>
-        <p:nvSpPr>
-          <p:cNvPr id="21" name="Text 18"/>
-          <p:cNvSpPr txBox="1"/>
-          <p:nvPr/>
-        </p:nvSpPr>
-        <p:spPr>
-          <a:xfrm>
-            <a:off x="822960" y="4059936"/>
-            <a:ext cx="420624" cy="420624"/>
-          </a:xfrm>
-          <a:prstGeom prst="rect">
-            <a:avLst/>
-          </a:prstGeom>
-          <a:noFill/>
-          <a:ln/>
-        </p:spPr>
-        <p:txBody>
-          <a:bodyPr wrap="square" lIns="0" tIns="0" rIns="0" bIns="0" rtlCol="0" anchor="ctr"/>
-          <a:lstStyle/>
-          <a:p>
-            <a:pPr algn="ctr" indent="0" marL="0">
-              <a:buNone/>
-            </a:pPr>
-            <a:r>
-              <a:rPr lang="en-US" sz="1400" b="1" dirty="0">
-                <a:solidFill>
-                  <a:schemeClr val="bg1"/>
-                </a:solidFill>
-              </a:rPr>
-              <a:t>3</a:t>
-            </a:r>
-            <a:endParaRPr lang="en-US" sz="1400" dirty="0"/>
-          </a:p>
-        </p:txBody>
-      </p:sp>
-      <p:sp>
-        <p:nvSpPr>
-          <p:cNvPr id="22" name="Text 19"/>
-          <p:cNvSpPr txBox="1"/>
-          <p:nvPr/>
-        </p:nvSpPr>
-        <p:spPr>
-          <a:xfrm>
-            <a:off x="1417320" y="3986784"/>
-            <a:ext cx="6035040" cy="603504"/>
-          </a:xfrm>
-          <a:prstGeom prst="rect">
-            <a:avLst/>
-          </a:prstGeom>
-          <a:noFill/>
-          <a:ln/>
-        </p:spPr>
-        <p:txBody>
-          <a:bodyPr wrap="square" lIns="0" tIns="0" rIns="0" bIns="0" rtlCol="0" anchor="ctr"/>
-          <a:lstStyle/>
-          <a:p>
-            <a:pPr indent="0" marL="0">
-              <a:buNone/>
-            </a:pPr>
-            <a:r>
-              <a:rPr lang="en-US" sz="1350" b="1" dirty="0">
-                <a:solidFill>
-                  <a:schemeClr val="tx2"/>
-                </a:solidFill>
-              </a:rPr>
-              <a:t>Obiettivi anno per anno</a:t>
-            </a:r>
-            <a:endParaRPr lang="en-US" sz="1350" dirty="0"/>
-          </a:p>
-          <a:p>
-            <a:pPr indent="0" marL="0">
-              <a:buNone/>
-            </a:pPr>
-            <a:r>
-              <a:rPr lang="en-US" sz="1150" dirty="0">
-                <a:solidFill>
-                  <a:schemeClr val="tx1"/>
-                </a:solidFill>
-              </a:rPr>
-              <a:t>Produzione totale e pro capite prevista, secco residuo pro capite obiettivo</a:t>
-            </a:r>
-            <a:endParaRPr lang="en-US" sz="1350" dirty="0"/>
-          </a:p>
-        </p:txBody>
-      </p:sp>
-      <p:sp>
-        <p:nvSpPr>
-          <p:cNvPr id="23" name="Passo 4"/>
-          <p:cNvSpPr/>
-          <p:nvPr/>
-        </p:nvSpPr>
-        <p:spPr>
-          <a:xfrm>
-            <a:off x="822960" y="4773168"/>
-            <a:ext cx="420624" cy="420624"/>
-          </a:xfrm>
-          <a:prstGeom prst="ellipse">
-            <a:avLst/>
-          </a:prstGeom>
-          <a:solidFill>
-            <a:schemeClr val="tx2"/>
-          </a:solidFill>
-          <a:ln w="12700">
-            <a:solidFill>
-              <a:schemeClr val="tx2"/>
-            </a:solidFill>
-            <a:prstDash val="solid"/>
-          </a:ln>
-        </p:spPr>
-      </p:sp>
-      <p:sp>
-        <p:nvSpPr>
-          <p:cNvPr id="24" name="Text 21"/>
-          <p:cNvSpPr txBox="1"/>
-          <p:nvPr/>
-        </p:nvSpPr>
-        <p:spPr>
-          <a:xfrm>
-            <a:off x="822960" y="4773168"/>
-            <a:ext cx="420624" cy="420624"/>
-          </a:xfrm>
-          <a:prstGeom prst="rect">
-            <a:avLst/>
-          </a:prstGeom>
-          <a:noFill/>
-          <a:ln/>
-        </p:spPr>
-        <p:txBody>
-          <a:bodyPr wrap="square" lIns="0" tIns="0" rIns="0" bIns="0" rtlCol="0" anchor="ctr"/>
-          <a:lstStyle/>
-          <a:p>
-            <a:pPr algn="ctr" indent="0" marL="0">
-              <a:buNone/>
-            </a:pPr>
-            <a:r>
-              <a:rPr lang="en-US" sz="1400" b="1" dirty="0">
-                <a:solidFill>
-                  <a:schemeClr val="bg1"/>
-                </a:solidFill>
-              </a:rPr>
-              <a:t>4</a:t>
-            </a:r>
-            <a:endParaRPr lang="en-US" sz="1400" dirty="0"/>
-          </a:p>
-        </p:txBody>
-      </p:sp>
-      <p:sp>
-        <p:nvSpPr>
-          <p:cNvPr id="25" name="Text 22"/>
-          <p:cNvSpPr txBox="1"/>
-          <p:nvPr/>
-        </p:nvSpPr>
-        <p:spPr>
-          <a:xfrm>
-            <a:off x="1417320" y="4700016"/>
-            <a:ext cx="6035040" cy="603504"/>
-          </a:xfrm>
-          <a:prstGeom prst="rect">
-            <a:avLst/>
-          </a:prstGeom>
-          <a:noFill/>
-          <a:ln/>
-        </p:spPr>
-        <p:txBody>
-          <a:bodyPr wrap="square" lIns="0" tIns="0" rIns="0" bIns="0" rtlCol="0" anchor="ctr"/>
-          <a:lstStyle/>
-          <a:p>
-            <a:pPr indent="0" marL="0">
-              <a:buNone/>
-            </a:pPr>
-            <a:r>
-              <a:rPr lang="en-US" sz="1350" b="1" dirty="0">
-                <a:solidFill>
-                  <a:schemeClr val="tx2"/>
-                </a:solidFill>
-              </a:rPr>
-              <a:t>% di differenziata</a:t>
-            </a:r>
-            <a:endParaRPr lang="en-US" sz="1350" dirty="0"/>
-          </a:p>
-          <a:p>
-            <a:pPr indent="0" marL="0">
-              <a:buNone/>
-            </a:pPr>
-            <a:r>
-              <a:rPr lang="en-US" sz="1150" dirty="0">
-                <a:solidFill>
-                  <a:schemeClr val="tx1"/>
-                </a:solidFill>
-              </a:rPr>
-              <a:t>Ricalcolata ogni anno: (totale − secco) / totale</a:t>
-            </a:r>
-            <a:endParaRPr lang="en-US" sz="1350" dirty="0"/>
-          </a:p>
-        </p:txBody>
-      </p:sp>
-      <p:sp>
-        <p:nvSpPr>
-          <p:cNvPr id="26" name="Passo 5"/>
-          <p:cNvSpPr/>
-          <p:nvPr/>
-        </p:nvSpPr>
-        <p:spPr>
-          <a:xfrm>
-            <a:off x="822960" y="5486400"/>
-            <a:ext cx="420624" cy="420624"/>
-          </a:xfrm>
-          <a:prstGeom prst="ellipse">
-            <a:avLst/>
-          </a:prstGeom>
-          <a:solidFill>
-            <a:schemeClr val="accent2"/>
-          </a:solidFill>
-          <a:ln w="12700">
-            <a:solidFill>
-              <a:schemeClr val="accent2"/>
-            </a:solidFill>
-            <a:prstDash val="solid"/>
-          </a:ln>
-        </p:spPr>
-      </p:sp>
-      <p:sp>
-        <p:nvSpPr>
-          <p:cNvPr id="27" name="Text 24"/>
-          <p:cNvSpPr txBox="1"/>
-          <p:nvPr/>
-        </p:nvSpPr>
-        <p:spPr>
-          <a:xfrm>
-            <a:off x="822960" y="5486400"/>
-            <a:ext cx="420624" cy="420624"/>
-          </a:xfrm>
-          <a:prstGeom prst="rect">
-            <a:avLst/>
-          </a:prstGeom>
-          <a:noFill/>
-          <a:ln/>
-        </p:spPr>
-        <p:txBody>
-          <a:bodyPr wrap="square" lIns="0" tIns="0" rIns="0" bIns="0" rtlCol="0" anchor="ctr"/>
-          <a:lstStyle/>
-          <a:p>
-            <a:pPr algn="ctr" indent="0" marL="0">
-              <a:buNone/>
-            </a:pPr>
-            <a:r>
-              <a:rPr lang="en-US" sz="1400" b="1" dirty="0">
-                <a:solidFill>
-                  <a:schemeClr val="bg1"/>
-                </a:solidFill>
-              </a:rPr>
-              <a:t>5</a:t>
-            </a:r>
-            <a:endParaRPr lang="en-US" sz="1400" dirty="0"/>
-          </a:p>
-        </p:txBody>
-      </p:sp>
-      <p:sp>
-        <p:nvSpPr>
-          <p:cNvPr id="28" name="Text 25"/>
-          <p:cNvSpPr txBox="1"/>
-          <p:nvPr/>
-        </p:nvSpPr>
-        <p:spPr>
-          <a:xfrm>
-            <a:off x="1417320" y="5413248"/>
-            <a:ext cx="6035040" cy="603504"/>
-          </a:xfrm>
-          <a:prstGeom prst="rect">
-            <a:avLst/>
-          </a:prstGeom>
-          <a:noFill/>
-          <a:ln/>
-        </p:spPr>
-        <p:txBody>
-          <a:bodyPr wrap="square" lIns="0" tIns="0" rIns="0" bIns="0" rtlCol="0" anchor="ctr"/>
-          <a:lstStyle/>
-          <a:p>
-            <a:pPr indent="0" marL="0">
-              <a:buNone/>
-            </a:pPr>
-            <a:r>
-              <a:rPr lang="en-US" sz="1350" b="1" dirty="0">
-                <a:solidFill>
-                  <a:schemeClr val="tx2"/>
-                </a:solidFill>
-              </a:rPr>
-              <a:t>Crediti e conti economici</a:t>
-            </a:r>
-            <a:endParaRPr lang="en-US" sz="1350" dirty="0"/>
-          </a:p>
-          <a:p>
-            <a:pPr indent="0" marL="0">
-              <a:buNone/>
-            </a:pPr>
-            <a:r>
-              <a:rPr lang="en-US" sz="1150" dirty="0">
-                <a:solidFill>
-                  <a:schemeClr val="tx1"/>
-                </a:solidFill>
-              </a:rPr>
-              <a:t>Bilancio del Comune o per utenza (come l'Allegato A EsaCom); ricavi a 32 € anno per anno; costi Caso 1 o 2; margine</a:t>
-            </a:r>
-            <a:endParaRPr lang="en-US" sz="1350" dirty="0"/>
-          </a:p>
-        </p:txBody>
-      </p:sp>
-      <p:sp>
-        <p:nvSpPr>
-          <p:cNvPr id="29" name="Text 26"/>
-          <p:cNvSpPr txBox="1"/>
-          <p:nvPr/>
-        </p:nvSpPr>
-        <p:spPr>
-          <a:xfrm>
-            <a:off x="822960" y="6035040"/>
-            <a:ext cx="6675120" cy="228600"/>
-          </a:xfrm>
-          <a:prstGeom prst="rect">
-            <a:avLst/>
-          </a:prstGeom>
-          <a:noFill/>
-          <a:ln/>
-        </p:spPr>
-        <p:txBody>
-          <a:bodyPr wrap="square" lIns="0" tIns="0" rIns="0" bIns="0" rtlCol="0" anchor="ctr"/>
-          <a:lstStyle/>
-          <a:p>
-            <a:pPr indent="0" marL="0">
-              <a:buNone/>
-            </a:pPr>
-            <a:r>
-              <a:rPr lang="en-US" sz="1000" i="1" dirty="0">
-                <a:solidFill>
-                  <a:schemeClr val="accent6"/>
-                </a:solidFill>
-              </a:rPr>
-              <a:t>Stima ex ante a scopo di pianificazione: i crediti veri si calcolano ex post con la Banca Dati Utenze.</a:t>
-            </a:r>
-            <a:endParaRPr lang="en-US" sz="1000" dirty="0"/>
-          </a:p>
-        </p:txBody>
-      </p:sp>
-      <p:sp>
-        <p:nvSpPr>
-          <p:cNvPr id="30" name="Riquadro assistente"/>
-          <p:cNvSpPr/>
-          <p:nvPr/>
-        </p:nvSpPr>
-        <p:spPr>
-          <a:xfrm>
-            <a:off x="7863840" y="1234440"/>
-            <a:ext cx="3749040" cy="5029200"/>
-          </a:xfrm>
-          <a:prstGeom prst="roundRect">
-            <a:avLst>
-              <a:gd name="adj" fmla="val 2927"/>
-            </a:avLst>
-          </a:prstGeom>
-          <a:solidFill>
-            <a:schemeClr val="accent3"/>
-          </a:solidFill>
-          <a:ln w="12700">
-            <a:solidFill>
-              <a:schemeClr val="accent3"/>
-            </a:solidFill>
-            <a:prstDash val="solid"/>
-          </a:ln>
-        </p:spPr>
-      </p:sp>
-      <p:sp>
-        <p:nvSpPr>
-          <p:cNvPr id="31" name="Assistente cerchio"/>
-          <p:cNvSpPr/>
-          <p:nvPr/>
-        </p:nvSpPr>
-        <p:spPr>
-          <a:xfrm>
-            <a:off x="8092440" y="1417320"/>
-            <a:ext cx="548640" cy="548640"/>
-          </a:xfrm>
-          <a:prstGeom prst="ellipse">
-            <a:avLst/>
-          </a:prstGeom>
-          <a:solidFill>
-            <a:schemeClr val="tx2"/>
-          </a:solidFill>
-          <a:ln w="12700">
-            <a:solidFill>
-              <a:schemeClr val="tx2"/>
-            </a:solidFill>
-            <a:prstDash val="solid"/>
-          </a:ln>
-        </p:spPr>
-      </p:sp>
       <p:pic>
         <p:nvPicPr>
-          <p:cNvPr id="32" name="Assistente icona" descr="preencoded.png">    </p:cNvPr>
+          <p:cNvPr id="15" name="Qualità dei dati e completamenti icona" descr="preencoded.png">    </p:cNvPr>
           <p:cNvPicPr>
             <a:picLocks noChangeAspect="1"/>
           </p:cNvPicPr>
           <p:nvPr/>
         </p:nvPicPr>
         <p:blipFill>
-          <a:blip r:embed="rId2"/>
+          <a:blip r:embed="rId3"/>
           <a:stretch>
             <a:fillRect/>
           </a:stretch>
         </p:blipFill>
         <p:spPr>
           <a:xfrm>
-            <a:off x="8229600" y="1554480"/>
+            <a:off x="8473440" y="1691640"/>
             <a:ext cx="274320" cy="274320"/>
           </a:xfrm>
           <a:prstGeom prst="rect">
@@ -5831,14 +5329,14 @@
       </p:pic>
       <p:sp>
         <p:nvSpPr>
-          <p:cNvPr id="33" name="Text 29"/>
+          <p:cNvPr id="16" name="Text 11"/>
           <p:cNvSpPr txBox="1"/>
           <p:nvPr/>
         </p:nvSpPr>
         <p:spPr>
           <a:xfrm>
-            <a:off x="8778240" y="1371600"/>
-            <a:ext cx="2743200" cy="685800"/>
+            <a:off x="9022080" y="1508760"/>
+            <a:ext cx="2453640" cy="640080"/>
           </a:xfrm>
           <a:prstGeom prst="rect">
             <a:avLst/>
@@ -5854,54 +5352,27 @@
               <a:buNone/>
             </a:pPr>
             <a:r>
-              <a:rPr lang="en-US" sz="1800" b="1" dirty="0">
+              <a:rPr lang="en-US" sz="1700" b="1" dirty="0">
                 <a:solidFill>
                   <a:schemeClr val="tx2"/>
                 </a:solidFill>
               </a:rPr>
-              <a:t>Assistente virtuale Claude</a:t>
-            </a:r>
-            <a:endParaRPr lang="en-US" sz="1800" dirty="0"/>
-          </a:p>
-        </p:txBody>
-      </p:sp>
-      <p:sp>
-        <p:nvSpPr>
-          <p:cNvPr id="34" name="Badge attivo"/>
-          <p:cNvSpPr/>
-          <p:nvPr/>
-        </p:nvSpPr>
-        <p:spPr>
-          <a:xfrm>
-            <a:off x="8778240" y="2029968"/>
-            <a:ext cx="2194560" cy="256032"/>
-          </a:xfrm>
-          <a:prstGeom prst="roundRect">
-            <a:avLst>
-              <a:gd name="adj" fmla="val 50000"/>
-            </a:avLst>
-          </a:prstGeom>
-          <a:solidFill>
-            <a:schemeClr val="bg1"/>
-          </a:solidFill>
-          <a:ln w="9525">
-            <a:solidFill>
-              <a:schemeClr val="tx2"/>
-            </a:solidFill>
-            <a:prstDash val="solid"/>
-          </a:ln>
-        </p:spPr>
-      </p:sp>
-      <p:sp>
-        <p:nvSpPr>
-          <p:cNvPr id="35" name="Text 31"/>
+              <a:t>Qualità dei dati e completamenti</a:t>
+            </a:r>
+            <a:endParaRPr lang="en-US" sz="1700" dirty="0"/>
+          </a:p>
+        </p:txBody>
+      </p:sp>
+      <p:sp>
+        <p:nvSpPr>
+          <p:cNvPr id="17" name="Text 12"/>
           <p:cNvSpPr txBox="1"/>
           <p:nvPr/>
         </p:nvSpPr>
         <p:spPr>
           <a:xfrm>
-            <a:off x="8778240" y="2029968"/>
-            <a:ext cx="2194560" cy="256032"/>
+            <a:off x="8382000" y="2286000"/>
+            <a:ext cx="3048000" cy="3749040"/>
           </a:xfrm>
           <a:prstGeom prst="rect">
             <a:avLst/>
@@ -5910,179 +5381,97 @@
           <a:ln/>
         </p:spPr>
         <p:txBody>
-          <a:bodyPr wrap="square" lIns="0" tIns="0" rIns="0" bIns="0" rtlCol="0" anchor="ctr"/>
-          <a:lstStyle/>
-          <a:p>
-            <a:pPr algn="ctr" indent="0" marL="0">
-              <a:buNone/>
-            </a:pPr>
-            <a:r>
-              <a:rPr lang="en-US" sz="950" b="1" spc="100" kern="0" dirty="0">
-                <a:solidFill>
-                  <a:schemeClr val="tx2"/>
-                </a:solidFill>
-              </a:rPr>
-              <a:t>ATTIVO DAL 19/10</a:t>
-            </a:r>
-            <a:endParaRPr lang="en-US" sz="950" dirty="0"/>
-          </a:p>
-        </p:txBody>
-      </p:sp>
-      <p:sp>
-        <p:nvSpPr>
-          <p:cNvPr id="36" name="Text 32"/>
-          <p:cNvSpPr txBox="1"/>
-          <p:nvPr/>
-        </p:nvSpPr>
-        <p:spPr>
-          <a:xfrm>
-            <a:off x="8092440" y="2423160"/>
-            <a:ext cx="3337560" cy="3703320"/>
-          </a:xfrm>
-          <a:prstGeom prst="rect">
-            <a:avLst/>
-          </a:prstGeom>
-          <a:noFill/>
-          <a:ln/>
-        </p:spPr>
-        <p:txBody>
           <a:bodyPr wrap="square" lIns="0" tIns="0" rIns="0" bIns="0" rtlCol="0" anchor="t"/>
           <a:lstStyle/>
           <a:p>
-            <a:pPr indent="0" marL="0">
+            <a:pPr marL="342900" indent="-342900">
               <a:spcAft>
-                <a:spcPts val="600"/>
+                <a:spcPts val="700"/>
               </a:spcAft>
-              <a:buNone/>
-            </a:pPr>
-            <a:r>
-              <a:rPr lang="en-US" sz="1250" b="1" dirty="0">
-                <a:solidFill>
-                  <a:schemeClr val="tx2"/>
-                </a:solidFill>
-              </a:rPr>
-              <a:t>Per enti e Amministratori</a:t>
-            </a:r>
-            <a:endParaRPr lang="en-US" sz="1250" dirty="0"/>
-          </a:p>
-          <a:p>
-            <a:pPr indent="0" marL="0">
+              <a:buSzPct val="100000"/>
+              <a:buChar char="•"/>
+            </a:pPr>
+            <a:r>
+              <a:rPr lang="en-US" sz="1350" dirty="0">
+                <a:solidFill>
+                  <a:schemeClr val="tx1"/>
+                </a:solidFill>
+              </a:rPr>
+              <a:t>Dati ufficiali per i controlli: popolazione e cluster SOSE di ogni Comune</a:t>
+            </a:r>
+            <a:endParaRPr lang="en-US" sz="1350" dirty="0"/>
+          </a:p>
+          <a:p>
+            <a:pPr marL="342900" indent="-342900">
               <a:spcAft>
-                <a:spcPts val="600"/>
+                <a:spcPts val="700"/>
               </a:spcAft>
-              <a:buNone/>
-            </a:pPr>
-            <a:r>
-              <a:rPr lang="en-US" sz="1250" dirty="0">
+              <a:buSzPct val="100000"/>
+              <a:buChar char="•"/>
+            </a:pPr>
+            <a:r>
+              <a:rPr lang="en-US" sz="1350" dirty="0">
                 <a:solidFill>
                   <a:schemeClr val="tx1"/>
                 </a:solidFill>
               </a:rPr>
-              <a:t>pulsante «✦ Assistente»: come si fa un'operazione, fasi, costi; risponde dai manuali e dalle tariffe</a:t>
-            </a:r>
-            <a:endParaRPr lang="en-US" sz="1250" dirty="0"/>
-          </a:p>
-          <a:p>
-            <a:pPr indent="0" marL="0">
+              <a:t>Conferma delle scelte interpretative del calcolo con l'ente</a:t>
+            </a:r>
+            <a:endParaRPr lang="en-US" sz="1350" dirty="0"/>
+          </a:p>
+          <a:p>
+            <a:pPr marL="342900" indent="-342900">
               <a:spcAft>
-                <a:spcPts val="600"/>
+                <a:spcPts val="700"/>
               </a:spcAft>
-              <a:buNone/>
-            </a:pPr>
-            <a:r>
-              <a:rPr lang="en-US" sz="1250" b="1" dirty="0">
-                <a:solidFill>
-                  <a:schemeClr val="tx2"/>
-                </a:solidFill>
-              </a:rPr>
-              <a:t>Garanzie</a:t>
-            </a:r>
-            <a:endParaRPr lang="en-US" sz="1250" dirty="0"/>
-          </a:p>
-          <a:p>
-            <a:pPr indent="0" marL="0">
+              <a:buSzPct val="100000"/>
+              <a:buChar char="•"/>
+            </a:pPr>
+            <a:r>
+              <a:rPr lang="en-US" sz="1350" dirty="0">
+                <a:solidFill>
+                  <a:schemeClr val="tx1"/>
+                </a:solidFill>
+              </a:rPr>
+              <a:t>Privacy: DPIA, registro dei trattamenti; accessibilità WCAG 2.1 AA</a:t>
+            </a:r>
+            <a:endParaRPr lang="en-US" sz="1350" dirty="0"/>
+          </a:p>
+          <a:p>
+            <a:pPr marL="342900" indent="-342900">
               <a:spcAft>
-                <a:spcPts val="600"/>
+                <a:spcPts val="700"/>
               </a:spcAft>
-              <a:buNone/>
-            </a:pPr>
-            <a:r>
-              <a:rPr lang="en-US" sz="1250" dirty="0">
+              <a:buSzPct val="100000"/>
+              <a:buChar char="•"/>
+            </a:pPr>
+            <a:r>
+              <a:rPr lang="en-US" sz="1350" dirty="0">
                 <a:solidFill>
                   <a:schemeClr val="tx1"/>
                 </a:solidFill>
               </a:rPr>
-              <a:t>non vede le pratiche e non decide; nessun testo salvato; limite di domande al giorno</a:t>
-            </a:r>
-            <a:endParaRPr lang="en-US" sz="1250" dirty="0"/>
-          </a:p>
-          <a:p>
-            <a:pPr indent="0" marL="0">
+              <a:t>Collaudo con i dati reali di un Comune</a:t>
+            </a:r>
+            <a:endParaRPr lang="en-US" sz="1350" dirty="0"/>
+          </a:p>
+          <a:p>
+            <a:pPr marL="342900" indent="-342900">
               <a:spcAft>
-                <a:spcPts val="600"/>
+                <a:spcPts val="700"/>
               </a:spcAft>
-              <a:buNone/>
-            </a:pPr>
-            <a:r>
-              <a:rPr lang="en-US" sz="1250" b="1" dirty="0">
-                <a:solidFill>
-                  <a:schemeClr val="tx2"/>
-                </a:solidFill>
-              </a:rPr>
-              <a:t>Come funziona</a:t>
-            </a:r>
-            <a:endParaRPr lang="en-US" sz="1250" dirty="0"/>
-          </a:p>
-          <a:p>
-            <a:pPr indent="0" marL="0">
-              <a:spcAft>
-                <a:spcPts val="600"/>
-              </a:spcAft>
-              <a:buNone/>
-            </a:pPr>
-            <a:r>
-              <a:rPr lang="en-US" sz="1250" dirty="0">
+              <a:buSzPct val="100000"/>
+              <a:buChar char="•"/>
+            </a:pPr>
+            <a:r>
+              <a:rPr lang="en-US" sz="1350" dirty="0">
                 <a:solidFill>
                   <a:schemeClr val="tx1"/>
                 </a:solidFill>
               </a:rPr>
-              <a:t>Claude Haiku 5.5 tramite una funzione sul server; la chiave resta in Supabase; meno di un centesimo a domanda</a:t>
-            </a:r>
-            <a:endParaRPr lang="en-US" sz="1250" dirty="0"/>
-          </a:p>
-          <a:p>
-            <a:pPr indent="0" marL="0">
-              <a:spcAft>
-                <a:spcPts val="600"/>
-              </a:spcAft>
-              <a:buNone/>
-            </a:pPr>
-            <a:r>
-              <a:rPr lang="en-US" sz="1250" b="1" dirty="0">
-                <a:solidFill>
-                  <a:schemeClr val="tx2"/>
-                </a:solidFill>
-              </a:rPr>
-              <a:t>Prossimi passi</a:t>
-            </a:r>
-            <a:endParaRPr lang="en-US" sz="1250" dirty="0"/>
-          </a:p>
-          <a:p>
-            <a:pPr indent="0" marL="0">
-              <a:spcAft>
-                <a:spcPts val="600"/>
-              </a:spcAft>
-              <a:buNone/>
-            </a:pPr>
-            <a:r>
-              <a:rPr lang="en-US" sz="1250" dirty="0">
-                <a:solidFill>
-                  <a:schemeClr val="tx1"/>
-                </a:solidFill>
-              </a:rPr>
-              <a:t>estensione agli Operatori e aiuto sulla singola pratica, con regole sulla privacy</a:t>
-            </a:r>
-            <a:endParaRPr lang="en-US" sz="1250" dirty="0"/>
+              <a:t>Nuovi moduli: simulatore con PDF ed Excel, assistente virtuale (poi Operatori e aiuto sulla pratica), Audit User e utenti online (fatti il 20/10); navigazione da smartphone (22/10); Banca Dati Utenze per utenza nel calcolo (22-23/10); valore dei crediti in Dashboard (23/10); Marketplaces da definire</a:t>
+            </a:r>
+            <a:endParaRPr lang="en-US" sz="1350" dirty="0"/>
           </a:p>
         </p:txBody>
       </p:sp>
@@ -6191,7 +5580,7 @@
                 <a:ea typeface="Cambria" pitchFamily="34" charset="-122"/>
                 <a:cs typeface="Cambria" pitchFamily="34" charset="-120"/>
               </a:rPr>
-              <a:t>Il simulatore in pratica</a:t>
+              <a:t>Nuovi moduli: simulatore e assistente virtuale</a:t>
             </a:r>
             <a:endParaRPr lang="en-US" sz="3000" dirty="0"/>
           </a:p>
@@ -6199,54 +5588,59 @@
       </p:sp>
       <p:sp>
         <p:nvSpPr>
-          <p:cNvPr id="3" name="Text 1"/>
-          <p:cNvSpPr txBox="1"/>
-          <p:nvPr/>
-        </p:nvSpPr>
-        <p:spPr>
-          <a:xfrm>
-            <a:off x="548640" y="1097280"/>
-            <a:ext cx="11064240" cy="365760"/>
-          </a:xfrm>
-          <a:prstGeom prst="rect">
-            <a:avLst/>
-          </a:prstGeom>
-          <a:noFill/>
-          <a:ln/>
-        </p:spPr>
-        <p:txBody>
-          <a:bodyPr wrap="square" lIns="0" tIns="0" rIns="0" bIns="0" rtlCol="0" anchor="ctr"/>
-          <a:lstStyle/>
-          <a:p>
-            <a:pPr indent="0" marL="0">
-              <a:buNone/>
-            </a:pPr>
-            <a:r>
-              <a:rPr lang="en-US" sz="1300" b="1" dirty="0">
-                <a:solidFill>
-                  <a:schemeClr val="tx2"/>
-                </a:solidFill>
-              </a:rPr>
-              <a:t>Portale → menu Simulatore. </a:t>
-            </a:r>
-            <a:pPr indent="0" marL="0">
-              <a:buNone/>
-            </a:pPr>
-            <a:r>
-              <a:rPr lang="en-US" sz="1300" dirty="0">
-                <a:solidFill>
-                  <a:schemeClr val="accent6"/>
-                </a:solidFill>
-              </a:rPr>
-              <a:t>Esempio con dati di prova: Comune di 12.500 abitanti (cluster 4), oggi 430 kg/ab e 90 kg/ab di secco, obiettivo 2036: 380 e 50 kg/ab.</a:t>
-            </a:r>
-            <a:endParaRPr lang="en-US" sz="1300" dirty="0"/>
-          </a:p>
-        </p:txBody>
+          <p:cNvPr id="3" name="Riquadro simulatore"/>
+          <p:cNvSpPr/>
+          <p:nvPr/>
+        </p:nvSpPr>
+        <p:spPr>
+          <a:xfrm>
+            <a:off x="548640" y="1234440"/>
+            <a:ext cx="7086600" cy="5029200"/>
+          </a:xfrm>
+          <a:prstGeom prst="roundRect">
+            <a:avLst>
+              <a:gd name="adj" fmla="val 2182"/>
+            </a:avLst>
+          </a:prstGeom>
+          <a:solidFill>
+            <a:schemeClr val="bg2"/>
+          </a:solidFill>
+          <a:ln w="12700">
+            <a:solidFill>
+              <a:schemeClr val="bg2"/>
+            </a:solidFill>
+            <a:prstDash val="solid"/>
+          </a:ln>
+        </p:spPr>
+      </p:sp>
+      <p:sp>
+        <p:nvSpPr>
+          <p:cNvPr id="4" name="Simulatore cerchio"/>
+          <p:cNvSpPr/>
+          <p:nvPr/>
+        </p:nvSpPr>
+        <p:spPr>
+          <a:xfrm>
+            <a:off x="777240" y="1417320"/>
+            <a:ext cx="548640" cy="548640"/>
+          </a:xfrm>
+          <a:prstGeom prst="ellipse">
+            <a:avLst/>
+          </a:prstGeom>
+          <a:solidFill>
+            <a:schemeClr val="accent2"/>
+          </a:solidFill>
+          <a:ln w="12700">
+            <a:solidFill>
+              <a:schemeClr val="accent2"/>
+            </a:solidFill>
+            <a:prstDash val="solid"/>
+          </a:ln>
+        </p:spPr>
       </p:sp>
       <p:pic>
         <p:nvPicPr>
-          <p:cNvPr id="4" name="Schermata simulatore" descr="Risultati del simulatore: crediti netti per anno e raccolta differenziata">    </p:cNvPr>
+          <p:cNvPr id="5" name="Simulatore icona" descr="preencoded.png">    </p:cNvPr>
           <p:cNvPicPr>
             <a:picLocks noChangeAspect="1"/>
           </p:cNvPicPr>
@@ -6260,8 +5654,8 @@
         </p:blipFill>
         <p:spPr>
           <a:xfrm>
-            <a:off x="548640" y="1572768"/>
-            <a:ext cx="11064240" cy="3955466"/>
+            <a:off x="914400" y="1554480"/>
+            <a:ext cx="274320" cy="274320"/>
           </a:xfrm>
           <a:prstGeom prst="rect">
             <a:avLst/>
@@ -6270,18 +5664,879 @@
       </p:pic>
       <p:sp>
         <p:nvSpPr>
-          <p:cNvPr id="5" name="Passo simulatore 1"/>
+          <p:cNvPr id="6" name="Text 3"/>
+          <p:cNvSpPr txBox="1"/>
+          <p:nvPr/>
+        </p:nvSpPr>
+        <p:spPr>
+          <a:xfrm>
+            <a:off x="1463040" y="1371600"/>
+            <a:ext cx="3840480" cy="365760"/>
+          </a:xfrm>
+          <a:prstGeom prst="rect">
+            <a:avLst/>
+          </a:prstGeom>
+          <a:noFill/>
+          <a:ln/>
+        </p:spPr>
+        <p:txBody>
+          <a:bodyPr wrap="square" lIns="0" tIns="0" rIns="0" bIns="0" rtlCol="0" anchor="ctr"/>
+          <a:lstStyle/>
+          <a:p>
+            <a:pPr indent="0" marL="0">
+              <a:buNone/>
+            </a:pPr>
+            <a:r>
+              <a:rPr lang="en-US" sz="1800" b="1" dirty="0">
+                <a:solidFill>
+                  <a:schemeClr val="tx2"/>
+                </a:solidFill>
+              </a:rPr>
+              <a:t>Simulatore di scenari</a:t>
+            </a:r>
+            <a:endParaRPr lang="en-US" sz="1800" dirty="0"/>
+          </a:p>
+        </p:txBody>
+      </p:sp>
+      <p:sp>
+        <p:nvSpPr>
+          <p:cNvPr id="7" name="Text 4"/>
+          <p:cNvSpPr txBox="1"/>
+          <p:nvPr/>
+        </p:nvSpPr>
+        <p:spPr>
+          <a:xfrm>
+            <a:off x="1463040" y="1737360"/>
+            <a:ext cx="3931920" cy="457200"/>
+          </a:xfrm>
+          <a:prstGeom prst="rect">
+            <a:avLst/>
+          </a:prstGeom>
+          <a:noFill/>
+          <a:ln/>
+        </p:spPr>
+        <p:txBody>
+          <a:bodyPr wrap="square" lIns="0" tIns="0" rIns="0" bIns="0" rtlCol="0" anchor="ctr"/>
+          <a:lstStyle/>
+          <a:p>
+            <a:pPr indent="0" marL="0">
+              <a:buNone/>
+            </a:pPr>
+            <a:r>
+              <a:rPr lang="en-US" sz="1200" dirty="0">
+                <a:solidFill>
+                  <a:schemeClr val="accent6"/>
+                </a:solidFill>
+              </a:rPr>
+              <a:t>Quanti crediti potrebbe generare un Comune? Una stima anno per anno, prima di aderire.</a:t>
+            </a:r>
+            <a:endParaRPr lang="en-US" sz="1200" dirty="0"/>
+          </a:p>
+        </p:txBody>
+      </p:sp>
+      <p:sp>
+        <p:nvSpPr>
+          <p:cNvPr id="8" name="Badge online"/>
           <p:cNvSpPr/>
           <p:nvPr/>
         </p:nvSpPr>
         <p:spPr>
           <a:xfrm>
-            <a:off x="548640" y="5669280"/>
-            <a:ext cx="2103120" cy="566928"/>
+            <a:off x="1463040" y="2212848"/>
+            <a:ext cx="2148840" cy="274320"/>
           </a:xfrm>
           <a:prstGeom prst="roundRect">
             <a:avLst>
-              <a:gd name="adj" fmla="val 19355"/>
+              <a:gd name="adj" fmla="val 50000"/>
+            </a:avLst>
+          </a:prstGeom>
+          <a:solidFill>
+            <a:schemeClr val="accent2"/>
+          </a:solidFill>
+          <a:ln w="12700">
+            <a:solidFill>
+              <a:schemeClr val="accent2"/>
+            </a:solidFill>
+            <a:prstDash val="solid"/>
+          </a:ln>
+        </p:spPr>
+      </p:sp>
+      <p:sp>
+        <p:nvSpPr>
+          <p:cNvPr id="9" name="Text 6"/>
+          <p:cNvSpPr txBox="1"/>
+          <p:nvPr/>
+        </p:nvSpPr>
+        <p:spPr>
+          <a:xfrm>
+            <a:off x="1463040" y="2212848"/>
+            <a:ext cx="2148840" cy="274320"/>
+          </a:xfrm>
+          <a:prstGeom prst="rect">
+            <a:avLst/>
+          </a:prstGeom>
+          <a:noFill/>
+          <a:ln/>
+        </p:spPr>
+        <p:txBody>
+          <a:bodyPr wrap="square" lIns="0" tIns="0" rIns="0" bIns="0" rtlCol="0" anchor="ctr"/>
+          <a:lstStyle/>
+          <a:p>
+            <a:pPr algn="ctr" indent="0" marL="0">
+              <a:buNone/>
+            </a:pPr>
+            <a:r>
+              <a:rPr lang="en-US" sz="1000" b="1" spc="100" kern="0" dirty="0">
+                <a:solidFill>
+                  <a:schemeClr val="bg1"/>
+                </a:solidFill>
+              </a:rPr>
+              <a:t>PRIMA VERSIONE ONLINE</a:t>
+            </a:r>
+            <a:endParaRPr lang="en-US" sz="1000" dirty="0"/>
+          </a:p>
+        </p:txBody>
+      </p:sp>
+      <p:sp>
+        <p:nvSpPr>
+          <p:cNvPr id="10" name="Menu durata"/>
+          <p:cNvSpPr/>
+          <p:nvPr/>
+        </p:nvSpPr>
+        <p:spPr>
+          <a:xfrm>
+            <a:off x="5532120" y="1417320"/>
+            <a:ext cx="1920240" cy="384048"/>
+          </a:xfrm>
+          <a:prstGeom prst="roundRect">
+            <a:avLst>
+              <a:gd name="adj" fmla="val 14286"/>
+            </a:avLst>
+          </a:prstGeom>
+          <a:solidFill>
+            <a:schemeClr val="bg1"/>
+          </a:solidFill>
+          <a:ln w="15875">
+            <a:solidFill>
+              <a:srgbClr val="2F5D3A"/>
+            </a:solidFill>
+            <a:prstDash val="solid"/>
+          </a:ln>
+        </p:spPr>
+      </p:sp>
+      <p:sp>
+        <p:nvSpPr>
+          <p:cNvPr id="11" name="Text 8"/>
+          <p:cNvSpPr txBox="1"/>
+          <p:nvPr/>
+        </p:nvSpPr>
+        <p:spPr>
+          <a:xfrm>
+            <a:off x="5623560" y="1417320"/>
+            <a:ext cx="1783080" cy="384048"/>
+          </a:xfrm>
+          <a:prstGeom prst="rect">
+            <a:avLst/>
+          </a:prstGeom>
+          <a:noFill/>
+          <a:ln/>
+        </p:spPr>
+        <p:txBody>
+          <a:bodyPr wrap="square" lIns="0" tIns="0" rIns="0" bIns="0" rtlCol="0" anchor="ctr"/>
+          <a:lstStyle/>
+          <a:p>
+            <a:pPr indent="0" marL="0">
+              <a:buNone/>
+            </a:pPr>
+            <a:r>
+              <a:rPr lang="en-US" sz="1200" dirty="0">
+                <a:solidFill>
+                  <a:schemeClr val="accent6"/>
+                </a:solidFill>
+              </a:rPr>
+              <a:t>Durata: </a:t>
+            </a:r>
+            <a:pPr indent="0" marL="0">
+              <a:buNone/>
+            </a:pPr>
+            <a:r>
+              <a:rPr lang="en-US" sz="1200" b="1" dirty="0">
+                <a:solidFill>
+                  <a:schemeClr val="tx2"/>
+                </a:solidFill>
+              </a:rPr>
+              <a:t>10 anni  ▾</a:t>
+            </a:r>
+            <a:endParaRPr lang="en-US" sz="1200" dirty="0"/>
+          </a:p>
+        </p:txBody>
+      </p:sp>
+      <p:sp>
+        <p:nvSpPr>
+          <p:cNvPr id="12" name="Opzioni durata"/>
+          <p:cNvSpPr/>
+          <p:nvPr/>
+        </p:nvSpPr>
+        <p:spPr>
+          <a:xfrm>
+            <a:off x="5532120" y="1819656"/>
+            <a:ext cx="1920240" cy="603504"/>
+          </a:xfrm>
+          <a:prstGeom prst="rect">
+            <a:avLst/>
+          </a:prstGeom>
+          <a:solidFill>
+            <a:schemeClr val="bg1"/>
+          </a:solidFill>
+          <a:ln w="9525">
+            <a:solidFill>
+              <a:srgbClr val="D9D4C5"/>
+            </a:solidFill>
+            <a:prstDash val="solid"/>
+          </a:ln>
+        </p:spPr>
+      </p:sp>
+      <p:sp>
+        <p:nvSpPr>
+          <p:cNvPr id="13" name="Text 10"/>
+          <p:cNvSpPr txBox="1"/>
+          <p:nvPr/>
+        </p:nvSpPr>
+        <p:spPr>
+          <a:xfrm>
+            <a:off x="5532120" y="1819656"/>
+            <a:ext cx="1920240" cy="603504"/>
+          </a:xfrm>
+          <a:prstGeom prst="rect">
+            <a:avLst/>
+          </a:prstGeom>
+          <a:noFill/>
+          <a:ln/>
+        </p:spPr>
+        <p:txBody>
+          <a:bodyPr wrap="square" lIns="0" tIns="0" rIns="0" bIns="0" rtlCol="0" anchor="ctr"/>
+          <a:lstStyle/>
+          <a:p>
+            <a:pPr algn="ctr" indent="0" marL="0">
+              <a:buNone/>
+            </a:pPr>
+            <a:r>
+              <a:rPr lang="en-US" sz="1100" dirty="0">
+                <a:solidFill>
+                  <a:schemeClr val="tx1"/>
+                </a:solidFill>
+              </a:rPr>
+              <a:t>7 anni  ·  10 anni  ·  21 anni</a:t>
+            </a:r>
+            <a:endParaRPr lang="en-US" sz="1100" dirty="0"/>
+          </a:p>
+        </p:txBody>
+      </p:sp>
+      <p:sp>
+        <p:nvSpPr>
+          <p:cNvPr id="14" name="Passo 1"/>
+          <p:cNvSpPr/>
+          <p:nvPr/>
+        </p:nvSpPr>
+        <p:spPr>
+          <a:xfrm>
+            <a:off x="822960" y="2633472"/>
+            <a:ext cx="420624" cy="420624"/>
+          </a:xfrm>
+          <a:prstGeom prst="ellipse">
+            <a:avLst/>
+          </a:prstGeom>
+          <a:solidFill>
+            <a:schemeClr val="tx2"/>
+          </a:solidFill>
+          <a:ln w="12700">
+            <a:solidFill>
+              <a:schemeClr val="tx2"/>
+            </a:solidFill>
+            <a:prstDash val="solid"/>
+          </a:ln>
+        </p:spPr>
+      </p:sp>
+      <p:sp>
+        <p:nvSpPr>
+          <p:cNvPr id="15" name="Text 12"/>
+          <p:cNvSpPr txBox="1"/>
+          <p:nvPr/>
+        </p:nvSpPr>
+        <p:spPr>
+          <a:xfrm>
+            <a:off x="822960" y="2633472"/>
+            <a:ext cx="420624" cy="420624"/>
+          </a:xfrm>
+          <a:prstGeom prst="rect">
+            <a:avLst/>
+          </a:prstGeom>
+          <a:noFill/>
+          <a:ln/>
+        </p:spPr>
+        <p:txBody>
+          <a:bodyPr wrap="square" lIns="0" tIns="0" rIns="0" bIns="0" rtlCol="0" anchor="ctr"/>
+          <a:lstStyle/>
+          <a:p>
+            <a:pPr algn="ctr" indent="0" marL="0">
+              <a:buNone/>
+            </a:pPr>
+            <a:r>
+              <a:rPr lang="en-US" sz="1400" b="1" dirty="0">
+                <a:solidFill>
+                  <a:schemeClr val="bg1"/>
+                </a:solidFill>
+              </a:rPr>
+              <a:t>1</a:t>
+            </a:r>
+            <a:endParaRPr lang="en-US" sz="1400" dirty="0"/>
+          </a:p>
+        </p:txBody>
+      </p:sp>
+      <p:sp>
+        <p:nvSpPr>
+          <p:cNvPr id="16" name="Text 13"/>
+          <p:cNvSpPr txBox="1"/>
+          <p:nvPr/>
+        </p:nvSpPr>
+        <p:spPr>
+          <a:xfrm>
+            <a:off x="1417320" y="2560320"/>
+            <a:ext cx="6035040" cy="603504"/>
+          </a:xfrm>
+          <a:prstGeom prst="rect">
+            <a:avLst/>
+          </a:prstGeom>
+          <a:noFill/>
+          <a:ln/>
+        </p:spPr>
+        <p:txBody>
+          <a:bodyPr wrap="square" lIns="0" tIns="0" rIns="0" bIns="0" rtlCol="0" anchor="ctr"/>
+          <a:lstStyle/>
+          <a:p>
+            <a:pPr indent="0" marL="0">
+              <a:buNone/>
+            </a:pPr>
+            <a:r>
+              <a:rPr lang="en-US" sz="1350" b="1" dirty="0">
+                <a:solidFill>
+                  <a:schemeClr val="tx2"/>
+                </a:solidFill>
+              </a:rPr>
+              <a:t>Scenari per Comune</a:t>
+            </a:r>
+            <a:endParaRPr lang="en-US" sz="1350" dirty="0"/>
+          </a:p>
+          <a:p>
+            <a:pPr indent="0" marL="0">
+              <a:buNone/>
+            </a:pPr>
+            <a:r>
+              <a:rPr lang="en-US" sz="1150" dirty="0">
+                <a:solidFill>
+                  <a:schemeClr val="tx1"/>
+                </a:solidFill>
+              </a:rPr>
+              <a:t>Più scenari per ogni Comune («prudente», «obiettivo»…), durata 7, 10 o 21 anni</a:t>
+            </a:r>
+            <a:endParaRPr lang="en-US" sz="1350" dirty="0"/>
+          </a:p>
+        </p:txBody>
+      </p:sp>
+      <p:sp>
+        <p:nvSpPr>
+          <p:cNvPr id="17" name="Passo 2"/>
+          <p:cNvSpPr/>
+          <p:nvPr/>
+        </p:nvSpPr>
+        <p:spPr>
+          <a:xfrm>
+            <a:off x="822960" y="3346704"/>
+            <a:ext cx="420624" cy="420624"/>
+          </a:xfrm>
+          <a:prstGeom prst="ellipse">
+            <a:avLst/>
+          </a:prstGeom>
+          <a:solidFill>
+            <a:schemeClr val="tx2"/>
+          </a:solidFill>
+          <a:ln w="12700">
+            <a:solidFill>
+              <a:schemeClr val="tx2"/>
+            </a:solidFill>
+            <a:prstDash val="solid"/>
+          </a:ln>
+        </p:spPr>
+      </p:sp>
+      <p:sp>
+        <p:nvSpPr>
+          <p:cNvPr id="18" name="Text 15"/>
+          <p:cNvSpPr txBox="1"/>
+          <p:nvPr/>
+        </p:nvSpPr>
+        <p:spPr>
+          <a:xfrm>
+            <a:off x="822960" y="3346704"/>
+            <a:ext cx="420624" cy="420624"/>
+          </a:xfrm>
+          <a:prstGeom prst="rect">
+            <a:avLst/>
+          </a:prstGeom>
+          <a:noFill/>
+          <a:ln/>
+        </p:spPr>
+        <p:txBody>
+          <a:bodyPr wrap="square" lIns="0" tIns="0" rIns="0" bIns="0" rtlCol="0" anchor="ctr"/>
+          <a:lstStyle/>
+          <a:p>
+            <a:pPr algn="ctr" indent="0" marL="0">
+              <a:buNone/>
+            </a:pPr>
+            <a:r>
+              <a:rPr lang="en-US" sz="1400" b="1" dirty="0">
+                <a:solidFill>
+                  <a:schemeClr val="bg1"/>
+                </a:solidFill>
+              </a:rPr>
+              <a:t>2</a:t>
+            </a:r>
+            <a:endParaRPr lang="en-US" sz="1400" dirty="0"/>
+          </a:p>
+        </p:txBody>
+      </p:sp>
+      <p:sp>
+        <p:nvSpPr>
+          <p:cNvPr id="19" name="Text 16"/>
+          <p:cNvSpPr txBox="1"/>
+          <p:nvPr/>
+        </p:nvSpPr>
+        <p:spPr>
+          <a:xfrm>
+            <a:off x="1417320" y="3273552"/>
+            <a:ext cx="6035040" cy="603504"/>
+          </a:xfrm>
+          <a:prstGeom prst="rect">
+            <a:avLst/>
+          </a:prstGeom>
+          <a:noFill/>
+          <a:ln/>
+        </p:spPr>
+        <p:txBody>
+          <a:bodyPr wrap="square" lIns="0" tIns="0" rIns="0" bIns="0" rtlCol="0" anchor="ctr"/>
+          <a:lstStyle/>
+          <a:p>
+            <a:pPr indent="0" marL="0">
+              <a:buNone/>
+            </a:pPr>
+            <a:r>
+              <a:rPr lang="en-US" sz="1350" b="1" dirty="0">
+                <a:solidFill>
+                  <a:schemeClr val="tx2"/>
+                </a:solidFill>
+              </a:rPr>
+              <a:t>Scenario di riferimento (Standard 4.8.1)</a:t>
+            </a:r>
+            <a:endParaRPr lang="en-US" sz="1350" dirty="0"/>
+          </a:p>
+          <a:p>
+            <a:pPr indent="0" marL="0">
+              <a:buNone/>
+            </a:pPr>
+            <a:r>
+              <a:rPr lang="en-US" sz="1150" dirty="0">
+                <a:solidFill>
+                  <a:schemeClr val="tx1"/>
+                </a:solidFill>
+              </a:rPr>
+              <a:t>Anno con il 65% di differenziata o valori medi del cluster SOSE; situazione attuale come partenza</a:t>
+            </a:r>
+            <a:endParaRPr lang="en-US" sz="1350" dirty="0"/>
+          </a:p>
+        </p:txBody>
+      </p:sp>
+      <p:sp>
+        <p:nvSpPr>
+          <p:cNvPr id="20" name="Passo 3"/>
+          <p:cNvSpPr/>
+          <p:nvPr/>
+        </p:nvSpPr>
+        <p:spPr>
+          <a:xfrm>
+            <a:off x="822960" y="4059936"/>
+            <a:ext cx="420624" cy="420624"/>
+          </a:xfrm>
+          <a:prstGeom prst="ellipse">
+            <a:avLst/>
+          </a:prstGeom>
+          <a:solidFill>
+            <a:schemeClr val="tx2"/>
+          </a:solidFill>
+          <a:ln w="12700">
+            <a:solidFill>
+              <a:schemeClr val="tx2"/>
+            </a:solidFill>
+            <a:prstDash val="solid"/>
+          </a:ln>
+        </p:spPr>
+      </p:sp>
+      <p:sp>
+        <p:nvSpPr>
+          <p:cNvPr id="21" name="Text 18"/>
+          <p:cNvSpPr txBox="1"/>
+          <p:nvPr/>
+        </p:nvSpPr>
+        <p:spPr>
+          <a:xfrm>
+            <a:off x="822960" y="4059936"/>
+            <a:ext cx="420624" cy="420624"/>
+          </a:xfrm>
+          <a:prstGeom prst="rect">
+            <a:avLst/>
+          </a:prstGeom>
+          <a:noFill/>
+          <a:ln/>
+        </p:spPr>
+        <p:txBody>
+          <a:bodyPr wrap="square" lIns="0" tIns="0" rIns="0" bIns="0" rtlCol="0" anchor="ctr"/>
+          <a:lstStyle/>
+          <a:p>
+            <a:pPr algn="ctr" indent="0" marL="0">
+              <a:buNone/>
+            </a:pPr>
+            <a:r>
+              <a:rPr lang="en-US" sz="1400" b="1" dirty="0">
+                <a:solidFill>
+                  <a:schemeClr val="bg1"/>
+                </a:solidFill>
+              </a:rPr>
+              <a:t>3</a:t>
+            </a:r>
+            <a:endParaRPr lang="en-US" sz="1400" dirty="0"/>
+          </a:p>
+        </p:txBody>
+      </p:sp>
+      <p:sp>
+        <p:nvSpPr>
+          <p:cNvPr id="22" name="Text 19"/>
+          <p:cNvSpPr txBox="1"/>
+          <p:nvPr/>
+        </p:nvSpPr>
+        <p:spPr>
+          <a:xfrm>
+            <a:off x="1417320" y="3986784"/>
+            <a:ext cx="6035040" cy="603504"/>
+          </a:xfrm>
+          <a:prstGeom prst="rect">
+            <a:avLst/>
+          </a:prstGeom>
+          <a:noFill/>
+          <a:ln/>
+        </p:spPr>
+        <p:txBody>
+          <a:bodyPr wrap="square" lIns="0" tIns="0" rIns="0" bIns="0" rtlCol="0" anchor="ctr"/>
+          <a:lstStyle/>
+          <a:p>
+            <a:pPr indent="0" marL="0">
+              <a:buNone/>
+            </a:pPr>
+            <a:r>
+              <a:rPr lang="en-US" sz="1350" b="1" dirty="0">
+                <a:solidFill>
+                  <a:schemeClr val="tx2"/>
+                </a:solidFill>
+              </a:rPr>
+              <a:t>Obiettivi anno per anno</a:t>
+            </a:r>
+            <a:endParaRPr lang="en-US" sz="1350" dirty="0"/>
+          </a:p>
+          <a:p>
+            <a:pPr indent="0" marL="0">
+              <a:buNone/>
+            </a:pPr>
+            <a:r>
+              <a:rPr lang="en-US" sz="1150" dirty="0">
+                <a:solidFill>
+                  <a:schemeClr val="tx1"/>
+                </a:solidFill>
+              </a:rPr>
+              <a:t>Produzione totale e pro capite prevista, secco residuo pro capite obiettivo</a:t>
+            </a:r>
+            <a:endParaRPr lang="en-US" sz="1350" dirty="0"/>
+          </a:p>
+        </p:txBody>
+      </p:sp>
+      <p:sp>
+        <p:nvSpPr>
+          <p:cNvPr id="23" name="Passo 4"/>
+          <p:cNvSpPr/>
+          <p:nvPr/>
+        </p:nvSpPr>
+        <p:spPr>
+          <a:xfrm>
+            <a:off x="822960" y="4773168"/>
+            <a:ext cx="420624" cy="420624"/>
+          </a:xfrm>
+          <a:prstGeom prst="ellipse">
+            <a:avLst/>
+          </a:prstGeom>
+          <a:solidFill>
+            <a:schemeClr val="tx2"/>
+          </a:solidFill>
+          <a:ln w="12700">
+            <a:solidFill>
+              <a:schemeClr val="tx2"/>
+            </a:solidFill>
+            <a:prstDash val="solid"/>
+          </a:ln>
+        </p:spPr>
+      </p:sp>
+      <p:sp>
+        <p:nvSpPr>
+          <p:cNvPr id="24" name="Text 21"/>
+          <p:cNvSpPr txBox="1"/>
+          <p:nvPr/>
+        </p:nvSpPr>
+        <p:spPr>
+          <a:xfrm>
+            <a:off x="822960" y="4773168"/>
+            <a:ext cx="420624" cy="420624"/>
+          </a:xfrm>
+          <a:prstGeom prst="rect">
+            <a:avLst/>
+          </a:prstGeom>
+          <a:noFill/>
+          <a:ln/>
+        </p:spPr>
+        <p:txBody>
+          <a:bodyPr wrap="square" lIns="0" tIns="0" rIns="0" bIns="0" rtlCol="0" anchor="ctr"/>
+          <a:lstStyle/>
+          <a:p>
+            <a:pPr algn="ctr" indent="0" marL="0">
+              <a:buNone/>
+            </a:pPr>
+            <a:r>
+              <a:rPr lang="en-US" sz="1400" b="1" dirty="0">
+                <a:solidFill>
+                  <a:schemeClr val="bg1"/>
+                </a:solidFill>
+              </a:rPr>
+              <a:t>4</a:t>
+            </a:r>
+            <a:endParaRPr lang="en-US" sz="1400" dirty="0"/>
+          </a:p>
+        </p:txBody>
+      </p:sp>
+      <p:sp>
+        <p:nvSpPr>
+          <p:cNvPr id="25" name="Text 22"/>
+          <p:cNvSpPr txBox="1"/>
+          <p:nvPr/>
+        </p:nvSpPr>
+        <p:spPr>
+          <a:xfrm>
+            <a:off x="1417320" y="4700016"/>
+            <a:ext cx="6035040" cy="603504"/>
+          </a:xfrm>
+          <a:prstGeom prst="rect">
+            <a:avLst/>
+          </a:prstGeom>
+          <a:noFill/>
+          <a:ln/>
+        </p:spPr>
+        <p:txBody>
+          <a:bodyPr wrap="square" lIns="0" tIns="0" rIns="0" bIns="0" rtlCol="0" anchor="ctr"/>
+          <a:lstStyle/>
+          <a:p>
+            <a:pPr indent="0" marL="0">
+              <a:buNone/>
+            </a:pPr>
+            <a:r>
+              <a:rPr lang="en-US" sz="1350" b="1" dirty="0">
+                <a:solidFill>
+                  <a:schemeClr val="tx2"/>
+                </a:solidFill>
+              </a:rPr>
+              <a:t>% di differenziata</a:t>
+            </a:r>
+            <a:endParaRPr lang="en-US" sz="1350" dirty="0"/>
+          </a:p>
+          <a:p>
+            <a:pPr indent="0" marL="0">
+              <a:buNone/>
+            </a:pPr>
+            <a:r>
+              <a:rPr lang="en-US" sz="1150" dirty="0">
+                <a:solidFill>
+                  <a:schemeClr val="tx1"/>
+                </a:solidFill>
+              </a:rPr>
+              <a:t>Ricalcolata ogni anno: (totale − secco) / totale</a:t>
+            </a:r>
+            <a:endParaRPr lang="en-US" sz="1350" dirty="0"/>
+          </a:p>
+        </p:txBody>
+      </p:sp>
+      <p:sp>
+        <p:nvSpPr>
+          <p:cNvPr id="26" name="Passo 5"/>
+          <p:cNvSpPr/>
+          <p:nvPr/>
+        </p:nvSpPr>
+        <p:spPr>
+          <a:xfrm>
+            <a:off x="822960" y="5486400"/>
+            <a:ext cx="420624" cy="420624"/>
+          </a:xfrm>
+          <a:prstGeom prst="ellipse">
+            <a:avLst/>
+          </a:prstGeom>
+          <a:solidFill>
+            <a:schemeClr val="accent2"/>
+          </a:solidFill>
+          <a:ln w="12700">
+            <a:solidFill>
+              <a:schemeClr val="accent2"/>
+            </a:solidFill>
+            <a:prstDash val="solid"/>
+          </a:ln>
+        </p:spPr>
+      </p:sp>
+      <p:sp>
+        <p:nvSpPr>
+          <p:cNvPr id="27" name="Text 24"/>
+          <p:cNvSpPr txBox="1"/>
+          <p:nvPr/>
+        </p:nvSpPr>
+        <p:spPr>
+          <a:xfrm>
+            <a:off x="822960" y="5486400"/>
+            <a:ext cx="420624" cy="420624"/>
+          </a:xfrm>
+          <a:prstGeom prst="rect">
+            <a:avLst/>
+          </a:prstGeom>
+          <a:noFill/>
+          <a:ln/>
+        </p:spPr>
+        <p:txBody>
+          <a:bodyPr wrap="square" lIns="0" tIns="0" rIns="0" bIns="0" rtlCol="0" anchor="ctr"/>
+          <a:lstStyle/>
+          <a:p>
+            <a:pPr algn="ctr" indent="0" marL="0">
+              <a:buNone/>
+            </a:pPr>
+            <a:r>
+              <a:rPr lang="en-US" sz="1400" b="1" dirty="0">
+                <a:solidFill>
+                  <a:schemeClr val="bg1"/>
+                </a:solidFill>
+              </a:rPr>
+              <a:t>5</a:t>
+            </a:r>
+            <a:endParaRPr lang="en-US" sz="1400" dirty="0"/>
+          </a:p>
+        </p:txBody>
+      </p:sp>
+      <p:sp>
+        <p:nvSpPr>
+          <p:cNvPr id="28" name="Text 25"/>
+          <p:cNvSpPr txBox="1"/>
+          <p:nvPr/>
+        </p:nvSpPr>
+        <p:spPr>
+          <a:xfrm>
+            <a:off x="1417320" y="5413248"/>
+            <a:ext cx="6035040" cy="603504"/>
+          </a:xfrm>
+          <a:prstGeom prst="rect">
+            <a:avLst/>
+          </a:prstGeom>
+          <a:noFill/>
+          <a:ln/>
+        </p:spPr>
+        <p:txBody>
+          <a:bodyPr wrap="square" lIns="0" tIns="0" rIns="0" bIns="0" rtlCol="0" anchor="ctr"/>
+          <a:lstStyle/>
+          <a:p>
+            <a:pPr indent="0" marL="0">
+              <a:buNone/>
+            </a:pPr>
+            <a:r>
+              <a:rPr lang="en-US" sz="1350" b="1" dirty="0">
+                <a:solidFill>
+                  <a:schemeClr val="tx2"/>
+                </a:solidFill>
+              </a:rPr>
+              <a:t>Crediti e conti economici</a:t>
+            </a:r>
+            <a:endParaRPr lang="en-US" sz="1350" dirty="0"/>
+          </a:p>
+          <a:p>
+            <a:pPr indent="0" marL="0">
+              <a:buNone/>
+            </a:pPr>
+            <a:r>
+              <a:rPr lang="en-US" sz="1150" dirty="0">
+                <a:solidFill>
+                  <a:schemeClr val="tx1"/>
+                </a:solidFill>
+              </a:rPr>
+              <a:t>Bilancio del Comune o per utenza (solo utenze virtuose); ricavi a un valore ipotetico del credito; costi Caso 1 o 2; margine</a:t>
+            </a:r>
+            <a:endParaRPr lang="en-US" sz="1350" dirty="0"/>
+          </a:p>
+        </p:txBody>
+      </p:sp>
+      <p:sp>
+        <p:nvSpPr>
+          <p:cNvPr id="29" name="Text 26"/>
+          <p:cNvSpPr txBox="1"/>
+          <p:nvPr/>
+        </p:nvSpPr>
+        <p:spPr>
+          <a:xfrm>
+            <a:off x="822960" y="6035040"/>
+            <a:ext cx="6675120" cy="228600"/>
+          </a:xfrm>
+          <a:prstGeom prst="rect">
+            <a:avLst/>
+          </a:prstGeom>
+          <a:noFill/>
+          <a:ln/>
+        </p:spPr>
+        <p:txBody>
+          <a:bodyPr wrap="square" lIns="0" tIns="0" rIns="0" bIns="0" rtlCol="0" anchor="ctr"/>
+          <a:lstStyle/>
+          <a:p>
+            <a:pPr indent="0" marL="0">
+              <a:buNone/>
+            </a:pPr>
+            <a:r>
+              <a:rPr lang="en-US" sz="1000" i="1" dirty="0">
+                <a:solidFill>
+                  <a:schemeClr val="accent6"/>
+                </a:solidFill>
+              </a:rPr>
+              <a:t>Stima ex ante a scopo di pianificazione: i crediti veri si calcolano ex post con la Banca Dati Utenze.</a:t>
+            </a:r>
+            <a:endParaRPr lang="en-US" sz="1000" dirty="0"/>
+          </a:p>
+        </p:txBody>
+      </p:sp>
+      <p:sp>
+        <p:nvSpPr>
+          <p:cNvPr id="30" name="Riquadro assistente"/>
+          <p:cNvSpPr/>
+          <p:nvPr/>
+        </p:nvSpPr>
+        <p:spPr>
+          <a:xfrm>
+            <a:off x="7863840" y="1234440"/>
+            <a:ext cx="3749040" cy="5029200"/>
+          </a:xfrm>
+          <a:prstGeom prst="roundRect">
+            <a:avLst>
+              <a:gd name="adj" fmla="val 2927"/>
             </a:avLst>
           </a:prstGeom>
           <a:solidFill>
@@ -6297,77 +6552,63 @@
       </p:sp>
       <p:sp>
         <p:nvSpPr>
-          <p:cNvPr id="6" name="Text 3"/>
-          <p:cNvSpPr txBox="1"/>
-          <p:nvPr/>
-        </p:nvSpPr>
-        <p:spPr>
-          <a:xfrm>
-            <a:off x="640080" y="5669280"/>
-            <a:ext cx="1920240" cy="566928"/>
-          </a:xfrm>
-          <a:prstGeom prst="rect">
-            <a:avLst/>
-          </a:prstGeom>
-          <a:noFill/>
-          <a:ln/>
-        </p:spPr>
-        <p:txBody>
-          <a:bodyPr wrap="square" lIns="0" tIns="0" rIns="0" bIns="0" rtlCol="0" anchor="ctr"/>
-          <a:lstStyle/>
-          <a:p>
-            <a:pPr algn="ctr" indent="0" marL="0">
-              <a:buNone/>
-            </a:pPr>
-            <a:r>
-              <a:rPr lang="en-US" sz="1150" b="1" dirty="0">
-                <a:solidFill>
-                  <a:schemeClr val="tx2"/>
-                </a:solidFill>
-              </a:rPr>
-              <a:t>Durata 7 · 10 · 21 anni</a:t>
-            </a:r>
-            <a:endParaRPr lang="en-US" sz="1150" dirty="0"/>
-          </a:p>
-        </p:txBody>
-      </p:sp>
-      <p:sp>
-        <p:nvSpPr>
-          <p:cNvPr id="7" name="Passo simulatore 2"/>
+          <p:cNvPr id="31" name="Assistente cerchio"/>
           <p:cNvSpPr/>
           <p:nvPr/>
         </p:nvSpPr>
         <p:spPr>
           <a:xfrm>
-            <a:off x="2798064" y="5669280"/>
-            <a:ext cx="2103120" cy="566928"/>
-          </a:xfrm>
-          <a:prstGeom prst="roundRect">
-            <a:avLst>
-              <a:gd name="adj" fmla="val 19355"/>
-            </a:avLst>
+            <a:off x="8092440" y="1417320"/>
+            <a:ext cx="548640" cy="548640"/>
+          </a:xfrm>
+          <a:prstGeom prst="ellipse">
+            <a:avLst/>
           </a:prstGeom>
           <a:solidFill>
-            <a:schemeClr val="accent3"/>
+            <a:schemeClr val="tx2"/>
           </a:solidFill>
           <a:ln w="12700">
             <a:solidFill>
-              <a:schemeClr val="accent3"/>
+              <a:schemeClr val="tx2"/>
             </a:solidFill>
             <a:prstDash val="solid"/>
           </a:ln>
         </p:spPr>
       </p:sp>
-      <p:sp>
-        <p:nvSpPr>
-          <p:cNvPr id="8" name="Text 5"/>
+      <p:pic>
+        <p:nvPicPr>
+          <p:cNvPr id="32" name="Assistente icona" descr="preencoded.png">    </p:cNvPr>
+          <p:cNvPicPr>
+            <a:picLocks noChangeAspect="1"/>
+          </p:cNvPicPr>
+          <p:nvPr/>
+        </p:nvPicPr>
+        <p:blipFill>
+          <a:blip r:embed="rId2"/>
+          <a:stretch>
+            <a:fillRect/>
+          </a:stretch>
+        </p:blipFill>
+        <p:spPr>
+          <a:xfrm>
+            <a:off x="8229600" y="1554480"/>
+            <a:ext cx="274320" cy="274320"/>
+          </a:xfrm>
+          <a:prstGeom prst="rect">
+            <a:avLst/>
+          </a:prstGeom>
+        </p:spPr>
+      </p:pic>
+      <p:sp>
+        <p:nvSpPr>
+          <p:cNvPr id="33" name="Text 29"/>
           <p:cNvSpPr txBox="1"/>
           <p:nvPr/>
         </p:nvSpPr>
         <p:spPr>
           <a:xfrm>
-            <a:off x="2889504" y="5669280"/>
-            <a:ext cx="1920240" cy="566928"/>
+            <a:off x="8778240" y="1371600"/>
+            <a:ext cx="2743200" cy="685800"/>
           </a:xfrm>
           <a:prstGeom prst="rect">
             <a:avLst/>
@@ -6379,43 +6620,43 @@
           <a:bodyPr wrap="square" lIns="0" tIns="0" rIns="0" bIns="0" rtlCol="0" anchor="ctr"/>
           <a:lstStyle/>
           <a:p>
-            <a:pPr algn="ctr" indent="0" marL="0">
-              <a:buNone/>
-            </a:pPr>
-            <a:r>
-              <a:rPr lang="en-US" sz="1150" b="1" dirty="0">
+            <a:pPr indent="0" marL="0">
+              <a:buNone/>
+            </a:pPr>
+            <a:r>
+              <a:rPr lang="en-US" sz="1800" b="1" dirty="0">
                 <a:solidFill>
                   <a:schemeClr val="tx2"/>
                 </a:solidFill>
               </a:rPr>
-              <a:t>Riferimento Standard 4.8.1: anno al 65% o cluster</a:t>
-            </a:r>
-            <a:endParaRPr lang="en-US" sz="1150" dirty="0"/>
-          </a:p>
-        </p:txBody>
-      </p:sp>
-      <p:sp>
-        <p:nvSpPr>
-          <p:cNvPr id="9" name="Passo simulatore 3"/>
+              <a:t>Assistente virtuale Claude</a:t>
+            </a:r>
+            <a:endParaRPr lang="en-US" sz="1800" dirty="0"/>
+          </a:p>
+        </p:txBody>
+      </p:sp>
+      <p:sp>
+        <p:nvSpPr>
+          <p:cNvPr id="34" name="Badge attivo"/>
           <p:cNvSpPr/>
           <p:nvPr/>
         </p:nvSpPr>
         <p:spPr>
           <a:xfrm>
-            <a:off x="5047488" y="5669280"/>
-            <a:ext cx="2103120" cy="566928"/>
+            <a:off x="8778240" y="2029968"/>
+            <a:ext cx="2194560" cy="256032"/>
           </a:xfrm>
           <a:prstGeom prst="roundRect">
             <a:avLst>
-              <a:gd name="adj" fmla="val 19355"/>
+              <a:gd name="adj" fmla="val 50000"/>
             </a:avLst>
           </a:prstGeom>
           <a:solidFill>
-            <a:schemeClr val="accent3"/>
+            <a:schemeClr val="bg1"/>
           </a:solidFill>
-          <a:ln w="12700">
+          <a:ln w="9525">
             <a:solidFill>
-              <a:schemeClr val="accent3"/>
+              <a:schemeClr val="tx2"/>
             </a:solidFill>
             <a:prstDash val="solid"/>
           </a:ln>
@@ -6423,14 +6664,14 @@
       </p:sp>
       <p:sp>
         <p:nvSpPr>
-          <p:cNvPr id="10" name="Text 7"/>
+          <p:cNvPr id="35" name="Text 31"/>
           <p:cNvSpPr txBox="1"/>
           <p:nvPr/>
         </p:nvSpPr>
         <p:spPr>
           <a:xfrm>
-            <a:off x="5138928" y="5669280"/>
-            <a:ext cx="1920240" cy="566928"/>
+            <a:off x="8778240" y="2029968"/>
+            <a:ext cx="2194560" cy="256032"/>
           </a:xfrm>
           <a:prstGeom prst="rect">
             <a:avLst/>
@@ -6446,54 +6687,27 @@
               <a:buNone/>
             </a:pPr>
             <a:r>
-              <a:rPr lang="en-US" sz="1150" b="1" dirty="0">
+              <a:rPr lang="en-US" sz="950" b="1" spc="100" kern="0" dirty="0">
                 <a:solidFill>
                   <a:schemeClr val="tx2"/>
                 </a:solidFill>
               </a:rPr>
-              <a:t>Obiettivi annui e traiettoria automatica</a:t>
-            </a:r>
-            <a:endParaRPr lang="en-US" sz="1150" dirty="0"/>
-          </a:p>
-        </p:txBody>
-      </p:sp>
-      <p:sp>
-        <p:nvSpPr>
-          <p:cNvPr id="11" name="Passo simulatore 4"/>
-          <p:cNvSpPr/>
-          <p:nvPr/>
-        </p:nvSpPr>
-        <p:spPr>
-          <a:xfrm>
-            <a:off x="7296912" y="5669280"/>
-            <a:ext cx="2103120" cy="566928"/>
-          </a:xfrm>
-          <a:prstGeom prst="roundRect">
-            <a:avLst>
-              <a:gd name="adj" fmla="val 19355"/>
-            </a:avLst>
-          </a:prstGeom>
-          <a:solidFill>
-            <a:schemeClr val="accent3"/>
-          </a:solidFill>
-          <a:ln w="12700">
-            <a:solidFill>
-              <a:schemeClr val="accent3"/>
-            </a:solidFill>
-            <a:prstDash val="solid"/>
-          </a:ln>
-        </p:spPr>
-      </p:sp>
-      <p:sp>
-        <p:nvSpPr>
-          <p:cNvPr id="12" name="Text 9"/>
+              <a:t>ATTIVO DAL 19/10</a:t>
+            </a:r>
+            <a:endParaRPr lang="en-US" sz="950" dirty="0"/>
+          </a:p>
+        </p:txBody>
+      </p:sp>
+      <p:sp>
+        <p:nvSpPr>
+          <p:cNvPr id="36" name="Text 32"/>
           <p:cNvSpPr txBox="1"/>
           <p:nvPr/>
         </p:nvSpPr>
         <p:spPr>
           <a:xfrm>
-            <a:off x="7388352" y="5669280"/>
-            <a:ext cx="1920240" cy="566928"/>
+            <a:off x="8092440" y="2423160"/>
+            <a:ext cx="3337560" cy="3703320"/>
           </a:xfrm>
           <a:prstGeom prst="rect">
             <a:avLst/>
@@ -6502,84 +6716,143 @@
           <a:ln/>
         </p:spPr>
         <p:txBody>
-          <a:bodyPr wrap="square" lIns="0" tIns="0" rIns="0" bIns="0" rtlCol="0" anchor="ctr"/>
-          <a:lstStyle/>
-          <a:p>
-            <a:pPr algn="ctr" indent="0" marL="0">
-              <a:buNone/>
-            </a:pPr>
-            <a:r>
-              <a:rPr lang="en-US" sz="1150" b="1" dirty="0">
+          <a:bodyPr wrap="square" lIns="0" tIns="0" rIns="0" bIns="0" rtlCol="0" anchor="t"/>
+          <a:lstStyle/>
+          <a:p>
+            <a:pPr indent="0" marL="0">
+              <a:spcAft>
+                <a:spcPts val="600"/>
+              </a:spcAft>
+              <a:buNone/>
+            </a:pPr>
+            <a:r>
+              <a:rPr lang="en-US" sz="1250" b="1" dirty="0">
                 <a:solidFill>
                   <a:schemeClr val="tx2"/>
                 </a:solidFill>
               </a:rPr>
-              <a:t>% differenziata ricalcolata</a:t>
-            </a:r>
-            <a:endParaRPr lang="en-US" sz="1150" dirty="0"/>
-          </a:p>
-        </p:txBody>
-      </p:sp>
-      <p:sp>
-        <p:nvSpPr>
-          <p:cNvPr id="13" name="Passo simulatore 5"/>
-          <p:cNvSpPr/>
-          <p:nvPr/>
-        </p:nvSpPr>
-        <p:spPr>
-          <a:xfrm>
-            <a:off x="9546336" y="5669280"/>
-            <a:ext cx="2103120" cy="566928"/>
-          </a:xfrm>
-          <a:prstGeom prst="roundRect">
-            <a:avLst>
-              <a:gd name="adj" fmla="val 19355"/>
-            </a:avLst>
-          </a:prstGeom>
-          <a:solidFill>
-            <a:schemeClr val="accent4"/>
-          </a:solidFill>
-          <a:ln w="12700">
-            <a:solidFill>
-              <a:schemeClr val="accent4"/>
-            </a:solidFill>
-            <a:prstDash val="solid"/>
-          </a:ln>
-        </p:spPr>
-      </p:sp>
-      <p:sp>
-        <p:nvSpPr>
-          <p:cNvPr id="14" name="Text 11"/>
-          <p:cNvSpPr txBox="1"/>
-          <p:nvPr/>
-        </p:nvSpPr>
-        <p:spPr>
-          <a:xfrm>
-            <a:off x="9637776" y="5669280"/>
-            <a:ext cx="1920240" cy="566928"/>
-          </a:xfrm>
-          <a:prstGeom prst="rect">
-            <a:avLst/>
-          </a:prstGeom>
-          <a:noFill/>
-          <a:ln/>
-        </p:spPr>
-        <p:txBody>
-          <a:bodyPr wrap="square" lIns="0" tIns="0" rIns="0" bIns="0" rtlCol="0" anchor="ctr"/>
-          <a:lstStyle/>
-          <a:p>
-            <a:pPr algn="ctr" indent="0" marL="0">
-              <a:buNone/>
-            </a:pPr>
-            <a:r>
-              <a:rPr lang="en-US" sz="1150" b="1" dirty="0">
+              <a:t>Per enti e Amministratori</a:t>
+            </a:r>
+            <a:endParaRPr lang="en-US" sz="1250" dirty="0"/>
+          </a:p>
+          <a:p>
+            <a:pPr indent="0" marL="0">
+              <a:spcAft>
+                <a:spcPts val="600"/>
+              </a:spcAft>
+              <a:buNone/>
+            </a:pPr>
+            <a:r>
+              <a:rPr lang="en-US" sz="1250" dirty="0">
+                <a:solidFill>
+                  <a:schemeClr val="tx1"/>
+                </a:solidFill>
+              </a:rPr>
+              <a:t>pulsante «✦ Assistente»: come si fa un'operazione, fasi, costi; risponde dai manuali e dalle tariffe</a:t>
+            </a:r>
+            <a:endParaRPr lang="en-US" sz="1250" dirty="0"/>
+          </a:p>
+          <a:p>
+            <a:pPr indent="0" marL="0">
+              <a:spcAft>
+                <a:spcPts val="600"/>
+              </a:spcAft>
+              <a:buNone/>
+            </a:pPr>
+            <a:r>
+              <a:rPr lang="en-US" sz="1250" b="1" dirty="0">
                 <a:solidFill>
                   <a:schemeClr val="tx2"/>
                 </a:solidFill>
               </a:rPr>
-              <a:t>Crediti per anno, confronto, CSV e stampa</a:t>
-            </a:r>
-            <a:endParaRPr lang="en-US" sz="1150" dirty="0"/>
+              <a:t>Garanzie</a:t>
+            </a:r>
+            <a:endParaRPr lang="en-US" sz="1250" dirty="0"/>
+          </a:p>
+          <a:p>
+            <a:pPr indent="0" marL="0">
+              <a:spcAft>
+                <a:spcPts val="600"/>
+              </a:spcAft>
+              <a:buNone/>
+            </a:pPr>
+            <a:r>
+              <a:rPr lang="en-US" sz="1250" dirty="0">
+                <a:solidFill>
+                  <a:schemeClr val="tx1"/>
+                </a:solidFill>
+              </a:rPr>
+              <a:t>non vede le pratiche e non decide; nessun testo salvato; limite di domande al giorno</a:t>
+            </a:r>
+            <a:endParaRPr lang="en-US" sz="1250" dirty="0"/>
+          </a:p>
+          <a:p>
+            <a:pPr indent="0" marL="0">
+              <a:spcAft>
+                <a:spcPts val="600"/>
+              </a:spcAft>
+              <a:buNone/>
+            </a:pPr>
+            <a:r>
+              <a:rPr lang="en-US" sz="1250" b="1" dirty="0">
+                <a:solidFill>
+                  <a:schemeClr val="tx2"/>
+                </a:solidFill>
+              </a:rPr>
+              <a:t>Come funziona</a:t>
+            </a:r>
+            <a:endParaRPr lang="en-US" sz="1250" dirty="0"/>
+          </a:p>
+          <a:p>
+            <a:pPr indent="0" marL="0">
+              <a:spcAft>
+                <a:spcPts val="600"/>
+              </a:spcAft>
+              <a:buNone/>
+            </a:pPr>
+            <a:r>
+              <a:rPr lang="en-US" sz="1250" dirty="0">
+                <a:solidFill>
+                  <a:schemeClr val="tx1"/>
+                </a:solidFill>
+              </a:rPr>
+              <a:t>Claude Haiku 5.5 tramite una funzione sul server; la chiave resta in Supabase; meno di un centesimo a domanda</a:t>
+            </a:r>
+            <a:endParaRPr lang="en-US" sz="1250" dirty="0"/>
+          </a:p>
+          <a:p>
+            <a:pPr indent="0" marL="0">
+              <a:spcAft>
+                <a:spcPts val="600"/>
+              </a:spcAft>
+              <a:buNone/>
+            </a:pPr>
+            <a:r>
+              <a:rPr lang="en-US" sz="1250" b="1" dirty="0">
+                <a:solidFill>
+                  <a:schemeClr val="tx2"/>
+                </a:solidFill>
+              </a:rPr>
+              <a:t>Prossimi passi</a:t>
+            </a:r>
+            <a:endParaRPr lang="en-US" sz="1250" dirty="0"/>
+          </a:p>
+          <a:p>
+            <a:pPr indent="0" marL="0">
+              <a:spcAft>
+                <a:spcPts val="600"/>
+              </a:spcAft>
+              <a:buNone/>
+            </a:pPr>
+            <a:r>
+              <a:rPr lang="en-US" sz="1250" dirty="0">
+                <a:solidFill>
+                  <a:schemeClr val="tx1"/>
+                </a:solidFill>
+              </a:rPr>
+              <a:t>estensione agli Operatori e aiuto sulla singola pratica, con regole sulla privacy</a:t>
+            </a:r>
+            <a:endParaRPr lang="en-US" sz="1250" dirty="0"/>
           </a:p>
         </p:txBody>
       </p:sp>
@@ -6688,15 +6961,62 @@
                 <a:ea typeface="Cambria" pitchFamily="34" charset="-122"/>
                 <a:cs typeface="Cambria" pitchFamily="34" charset="-120"/>
               </a:rPr>
-              <a:t>Simulazione economica: ricavi e costi per il Comune</a:t>
+              <a:t>Il simulatore in pratica</a:t>
             </a:r>
             <a:endParaRPr lang="en-US" sz="3000" dirty="0"/>
+          </a:p>
+        </p:txBody>
+      </p:sp>
+      <p:sp>
+        <p:nvSpPr>
+          <p:cNvPr id="3" name="Text 1"/>
+          <p:cNvSpPr txBox="1"/>
+          <p:nvPr/>
+        </p:nvSpPr>
+        <p:spPr>
+          <a:xfrm>
+            <a:off x="548640" y="1097280"/>
+            <a:ext cx="11064240" cy="365760"/>
+          </a:xfrm>
+          <a:prstGeom prst="rect">
+            <a:avLst/>
+          </a:prstGeom>
+          <a:noFill/>
+          <a:ln/>
+        </p:spPr>
+        <p:txBody>
+          <a:bodyPr wrap="square" lIns="0" tIns="0" rIns="0" bIns="0" rtlCol="0" anchor="ctr"/>
+          <a:lstStyle/>
+          <a:p>
+            <a:pPr indent="0" marL="0">
+              <a:buNone/>
+            </a:pPr>
+            <a:r>
+              <a:rPr lang="en-US" sz="1300" b="1" dirty="0">
+                <a:solidFill>
+                  <a:schemeClr val="tx2"/>
+                </a:solidFill>
+              </a:rPr>
+              <a:t>Portale → menu Simulatore. </a:t>
+            </a:r>
+            <a:pPr indent="0" marL="0">
+              <a:buNone/>
+            </a:pPr>
+            <a:r>
+              <a:rPr lang="en-US" sz="1300" dirty="0">
+                <a:solidFill>
+                  <a:schemeClr val="accent6"/>
+                </a:solidFill>
+              </a:rPr>
+              <a:t>Esempio con dati di prova: Comune di 12.500 abitanti (cluster 4), oggi 430 kg/ab e 90 kg/ab di secco, obiettivo 2036: 380 e 50 kg/ab.</a:t>
+            </a:r>
+            <a:endParaRPr lang="en-US" sz="1300" dirty="0"/>
           </a:p>
         </p:txBody>
       </p:sp>
       <p:pic>
         <p:nvPicPr>
-          <p:cNvPr id="3" name="Schermata costi" descr="Simulatore, metodo per utenza: costi Caso 1 per 16.735 abitanti, ricavi, margine e margine netto per anno">    </p:cNvPr>
+          <p:cNvPr id="4" name="Schermata simulatore" descr="Risultati del simulatore: crediti netti per anno e raccolta differenziata">    </p:cNvPr>
           <p:cNvPicPr>
             <a:picLocks noChangeAspect="1"/>
           </p:cNvPicPr>
@@ -6710,8 +7030,8 @@
         </p:blipFill>
         <p:spPr>
           <a:xfrm>
-            <a:off x="548640" y="1188720"/>
-            <a:ext cx="6242333" cy="5029200"/>
+            <a:off x="548640" y="1572768"/>
+            <a:ext cx="11064240" cy="3955466"/>
           </a:xfrm>
           <a:prstGeom prst="rect">
             <a:avLst/>
@@ -6720,26 +7040,26 @@
       </p:pic>
       <p:sp>
         <p:nvSpPr>
-          <p:cNvPr id="4" name="Riquadro economia"/>
+          <p:cNvPr id="5" name="Passo simulatore 1"/>
           <p:cNvSpPr/>
           <p:nvPr/>
         </p:nvSpPr>
         <p:spPr>
           <a:xfrm>
-            <a:off x="7452360" y="1188720"/>
-            <a:ext cx="4160520" cy="5001768"/>
+            <a:off x="548640" y="5669280"/>
+            <a:ext cx="2103120" cy="566928"/>
           </a:xfrm>
           <a:prstGeom prst="roundRect">
             <a:avLst>
-              <a:gd name="adj" fmla="val 2637"/>
+              <a:gd name="adj" fmla="val 19355"/>
             </a:avLst>
           </a:prstGeom>
           <a:solidFill>
-            <a:schemeClr val="bg2"/>
+            <a:schemeClr val="accent3"/>
           </a:solidFill>
           <a:ln w="12700">
             <a:solidFill>
-              <a:schemeClr val="bg2"/>
+              <a:schemeClr val="accent3"/>
             </a:solidFill>
             <a:prstDash val="solid"/>
           </a:ln>
@@ -6747,14 +7067,14 @@
       </p:sp>
       <p:sp>
         <p:nvSpPr>
-          <p:cNvPr id="5" name="Text 2"/>
+          <p:cNvPr id="6" name="Text 3"/>
           <p:cNvSpPr txBox="1"/>
           <p:nvPr/>
         </p:nvSpPr>
         <p:spPr>
           <a:xfrm>
-            <a:off x="7635240" y="1298448"/>
-            <a:ext cx="3794760" cy="4800600"/>
+            <a:off x="640080" y="5669280"/>
+            <a:ext cx="1920240" cy="566928"/>
           </a:xfrm>
           <a:prstGeom prst="rect">
             <a:avLst/>
@@ -6763,284 +7083,273 @@
           <a:ln/>
         </p:spPr>
         <p:txBody>
-          <a:bodyPr wrap="square" lIns="0" tIns="0" rIns="0" bIns="0" rtlCol="0" anchor="t"/>
-          <a:lstStyle/>
-          <a:p>
-            <a:pPr indent="0" marL="0">
-              <a:spcAft>
-                <a:spcPts val="300"/>
-              </a:spcAft>
-              <a:buNone/>
-            </a:pPr>
-            <a:r>
-              <a:rPr lang="en-US" sz="1400" b="1" dirty="0">
+          <a:bodyPr wrap="square" lIns="0" tIns="0" rIns="0" bIns="0" rtlCol="0" anchor="ctr"/>
+          <a:lstStyle/>
+          <a:p>
+            <a:pPr algn="ctr" indent="0" marL="0">
+              <a:buNone/>
+            </a:pPr>
+            <a:r>
+              <a:rPr lang="en-US" sz="1150" b="1" dirty="0">
                 <a:solidFill>
                   <a:schemeClr val="tx2"/>
                 </a:solidFill>
               </a:rPr>
-              <a:t>Ricavi</a:t>
-            </a:r>
-            <a:endParaRPr lang="en-US" sz="1200" dirty="0"/>
-          </a:p>
-          <a:p>
-            <a:pPr indent="0" marL="0">
-              <a:spcAft>
-                <a:spcPts val="300"/>
-              </a:spcAft>
-              <a:buNone/>
-            </a:pPr>
-            <a:r>
-              <a:rPr lang="en-US" sz="1200" dirty="0">
-                <a:solidFill>
-                  <a:schemeClr val="tx1"/>
-                </a:solidFill>
-              </a:rPr>
-              <a:t>Valore del credito digitato anno per anno (proposto 32 €).</a:t>
-            </a:r>
-            <a:endParaRPr lang="en-US" sz="1200" dirty="0"/>
-          </a:p>
-          <a:p>
-            <a:pPr indent="0" marL="0">
-              <a:spcAft>
-                <a:spcPts val="300"/>
-              </a:spcAft>
-              <a:buNone/>
-            </a:pPr>
-            <a:r>
-              <a:rPr lang="en-US" sz="600" dirty="0">
-                <a:solidFill>
-                  <a:schemeClr val="tx1"/>
-                </a:solidFill>
-              </a:rPr>
-              <a:t> </a:t>
-            </a:r>
-            <a:endParaRPr lang="en-US" sz="1200" dirty="0"/>
-          </a:p>
-          <a:p>
-            <a:pPr indent="0" marL="0">
-              <a:spcAft>
-                <a:spcPts val="300"/>
-              </a:spcAft>
-              <a:buNone/>
-            </a:pPr>
-            <a:r>
-              <a:rPr lang="en-US" sz="1400" b="1" dirty="0">
+              <a:t>Durata 7 · 10 · 21 anni</a:t>
+            </a:r>
+            <a:endParaRPr lang="en-US" sz="1150" dirty="0"/>
+          </a:p>
+        </p:txBody>
+      </p:sp>
+      <p:sp>
+        <p:nvSpPr>
+          <p:cNvPr id="7" name="Passo simulatore 2"/>
+          <p:cNvSpPr/>
+          <p:nvPr/>
+        </p:nvSpPr>
+        <p:spPr>
+          <a:xfrm>
+            <a:off x="2798064" y="5669280"/>
+            <a:ext cx="2103120" cy="566928"/>
+          </a:xfrm>
+          <a:prstGeom prst="roundRect">
+            <a:avLst>
+              <a:gd name="adj" fmla="val 19355"/>
+            </a:avLst>
+          </a:prstGeom>
+          <a:solidFill>
+            <a:schemeClr val="accent3"/>
+          </a:solidFill>
+          <a:ln w="12700">
+            <a:solidFill>
+              <a:schemeClr val="accent3"/>
+            </a:solidFill>
+            <a:prstDash val="solid"/>
+          </a:ln>
+        </p:spPr>
+      </p:sp>
+      <p:sp>
+        <p:nvSpPr>
+          <p:cNvPr id="8" name="Text 5"/>
+          <p:cNvSpPr txBox="1"/>
+          <p:nvPr/>
+        </p:nvSpPr>
+        <p:spPr>
+          <a:xfrm>
+            <a:off x="2889504" y="5669280"/>
+            <a:ext cx="1920240" cy="566928"/>
+          </a:xfrm>
+          <a:prstGeom prst="rect">
+            <a:avLst/>
+          </a:prstGeom>
+          <a:noFill/>
+          <a:ln/>
+        </p:spPr>
+        <p:txBody>
+          <a:bodyPr wrap="square" lIns="0" tIns="0" rIns="0" bIns="0" rtlCol="0" anchor="ctr"/>
+          <a:lstStyle/>
+          <a:p>
+            <a:pPr algn="ctr" indent="0" marL="0">
+              <a:buNone/>
+            </a:pPr>
+            <a:r>
+              <a:rPr lang="en-US" sz="1150" b="1" dirty="0">
                 <a:solidFill>
                   <a:schemeClr val="tx2"/>
                 </a:solidFill>
               </a:rPr>
-              <a:t>Costi per il Comune: Caso 1 o Caso 2?</a:t>
-            </a:r>
-            <a:endParaRPr lang="en-US" sz="1200" dirty="0"/>
-          </a:p>
-          <a:p>
-            <a:pPr indent="0" marL="0">
-              <a:spcAft>
-                <a:spcPts val="300"/>
-              </a:spcAft>
-              <a:buNone/>
-            </a:pPr>
-            <a:r>
-              <a:rPr lang="en-US" sz="1200" dirty="0">
-                <a:solidFill>
-                  <a:schemeClr val="tx1"/>
-                </a:solidFill>
-              </a:rPr>
-              <a:t>Caso 1 progetto volontario, Caso 2 progetto obbligatorio da bando di gara. Sei voci (Progetto, Rapporto, registrazioni) in € per abitante interpolati per popolazione, con minimo e massimo annuo (tabelle del 28/07/2026).</a:t>
-            </a:r>
-            <a:endParaRPr lang="en-US" sz="1200" dirty="0"/>
-          </a:p>
-          <a:p>
-            <a:pPr indent="0" marL="0">
-              <a:spcAft>
-                <a:spcPts val="300"/>
-              </a:spcAft>
-              <a:buNone/>
-            </a:pPr>
-            <a:r>
-              <a:rPr lang="en-US" sz="600" dirty="0">
-                <a:solidFill>
-                  <a:schemeClr val="tx1"/>
-                </a:solidFill>
-              </a:rPr>
-              <a:t> </a:t>
-            </a:r>
-            <a:endParaRPr lang="en-US" sz="1200" dirty="0"/>
-          </a:p>
-          <a:p>
-            <a:pPr indent="0" marL="0">
-              <a:spcAft>
-                <a:spcPts val="300"/>
-              </a:spcAft>
-              <a:buNone/>
-            </a:pPr>
-            <a:r>
-              <a:rPr lang="en-US" sz="1400" b="1" dirty="0">
+              <a:t>Riferimento Standard 4.8.1: anno al 65% o cluster</a:t>
+            </a:r>
+            <a:endParaRPr lang="en-US" sz="1150" dirty="0"/>
+          </a:p>
+        </p:txBody>
+      </p:sp>
+      <p:sp>
+        <p:nvSpPr>
+          <p:cNvPr id="9" name="Passo simulatore 3"/>
+          <p:cNvSpPr/>
+          <p:nvPr/>
+        </p:nvSpPr>
+        <p:spPr>
+          <a:xfrm>
+            <a:off x="5047488" y="5669280"/>
+            <a:ext cx="2103120" cy="566928"/>
+          </a:xfrm>
+          <a:prstGeom prst="roundRect">
+            <a:avLst>
+              <a:gd name="adj" fmla="val 19355"/>
+            </a:avLst>
+          </a:prstGeom>
+          <a:solidFill>
+            <a:schemeClr val="accent3"/>
+          </a:solidFill>
+          <a:ln w="12700">
+            <a:solidFill>
+              <a:schemeClr val="accent3"/>
+            </a:solidFill>
+            <a:prstDash val="solid"/>
+          </a:ln>
+        </p:spPr>
+      </p:sp>
+      <p:sp>
+        <p:nvSpPr>
+          <p:cNvPr id="10" name="Text 7"/>
+          <p:cNvSpPr txBox="1"/>
+          <p:nvPr/>
+        </p:nvSpPr>
+        <p:spPr>
+          <a:xfrm>
+            <a:off x="5138928" y="5669280"/>
+            <a:ext cx="1920240" cy="566928"/>
+          </a:xfrm>
+          <a:prstGeom prst="rect">
+            <a:avLst/>
+          </a:prstGeom>
+          <a:noFill/>
+          <a:ln/>
+        </p:spPr>
+        <p:txBody>
+          <a:bodyPr wrap="square" lIns="0" tIns="0" rIns="0" bIns="0" rtlCol="0" anchor="ctr"/>
+          <a:lstStyle/>
+          <a:p>
+            <a:pPr algn="ctr" indent="0" marL="0">
+              <a:buNone/>
+            </a:pPr>
+            <a:r>
+              <a:rPr lang="en-US" sz="1150" b="1" dirty="0">
                 <a:solidFill>
                   <a:schemeClr val="tx2"/>
                 </a:solidFill>
               </a:rPr>
-              <a:t>Bovisio-Masciago, 10 anni, 32 €/credito</a:t>
-            </a:r>
-            <a:endParaRPr lang="en-US" sz="1200" dirty="0"/>
-          </a:p>
-          <a:p>
-            <a:pPr indent="0" marL="0">
-              <a:spcAft>
-                <a:spcPts val="300"/>
-              </a:spcAft>
-              <a:buNone/>
-            </a:pPr>
-            <a:r>
-              <a:rPr lang="en-US" sz="1200" b="1" dirty="0">
-                <a:solidFill>
-                  <a:schemeClr val="tx1"/>
-                </a:solidFill>
-              </a:rPr>
-              <a:t>Per utenza (come Allegato A): </a:t>
-            </a:r>
-            <a:pPr indent="0" marL="0">
-              <a:spcAft>
-                <a:spcPts val="300"/>
-              </a:spcAft>
-              <a:buNone/>
-            </a:pPr>
-            <a:r>
-              <a:rPr lang="en-US" sz="1200" dirty="0">
-                <a:solidFill>
-                  <a:schemeClr val="tx1"/>
-                </a:solidFill>
-              </a:rPr>
-              <a:t>34.188 crediti, ricavi € 1.093.792</a:t>
-            </a:r>
-            <a:endParaRPr lang="en-US" sz="1200" dirty="0"/>
-          </a:p>
-          <a:p>
-            <a:pPr indent="0" marL="0">
-              <a:spcAft>
-                <a:spcPts val="300"/>
-              </a:spcAft>
-              <a:buNone/>
-            </a:pPr>
-            <a:r>
-              <a:rPr lang="en-US" sz="1200" dirty="0">
-                <a:solidFill>
-                  <a:schemeClr val="tx1"/>
-                </a:solidFill>
-              </a:rPr>
-              <a:t>Caso 1 costi € 162.330 → </a:t>
-            </a:r>
-            <a:pPr indent="0" marL="0">
-              <a:spcAft>
-                <a:spcPts val="300"/>
-              </a:spcAft>
-              <a:buNone/>
-            </a:pPr>
-            <a:r>
-              <a:rPr lang="en-US" sz="1200" b="1" dirty="0">
+              <a:t>Obiettivi annui e traiettoria automatica</a:t>
+            </a:r>
+            <a:endParaRPr lang="en-US" sz="1150" dirty="0"/>
+          </a:p>
+        </p:txBody>
+      </p:sp>
+      <p:sp>
+        <p:nvSpPr>
+          <p:cNvPr id="11" name="Passo simulatore 4"/>
+          <p:cNvSpPr/>
+          <p:nvPr/>
+        </p:nvSpPr>
+        <p:spPr>
+          <a:xfrm>
+            <a:off x="7296912" y="5669280"/>
+            <a:ext cx="2103120" cy="566928"/>
+          </a:xfrm>
+          <a:prstGeom prst="roundRect">
+            <a:avLst>
+              <a:gd name="adj" fmla="val 19355"/>
+            </a:avLst>
+          </a:prstGeom>
+          <a:solidFill>
+            <a:schemeClr val="accent3"/>
+          </a:solidFill>
+          <a:ln w="12700">
+            <a:solidFill>
+              <a:schemeClr val="accent3"/>
+            </a:solidFill>
+            <a:prstDash val="solid"/>
+          </a:ln>
+        </p:spPr>
+      </p:sp>
+      <p:sp>
+        <p:nvSpPr>
+          <p:cNvPr id="12" name="Text 9"/>
+          <p:cNvSpPr txBox="1"/>
+          <p:nvPr/>
+        </p:nvSpPr>
+        <p:spPr>
+          <a:xfrm>
+            <a:off x="7388352" y="5669280"/>
+            <a:ext cx="1920240" cy="566928"/>
+          </a:xfrm>
+          <a:prstGeom prst="rect">
+            <a:avLst/>
+          </a:prstGeom>
+          <a:noFill/>
+          <a:ln/>
+        </p:spPr>
+        <p:txBody>
+          <a:bodyPr wrap="square" lIns="0" tIns="0" rIns="0" bIns="0" rtlCol="0" anchor="ctr"/>
+          <a:lstStyle/>
+          <a:p>
+            <a:pPr algn="ctr" indent="0" marL="0">
+              <a:buNone/>
+            </a:pPr>
+            <a:r>
+              <a:rPr lang="en-US" sz="1150" b="1" dirty="0">
                 <a:solidFill>
                   <a:schemeClr val="tx2"/>
                 </a:solidFill>
               </a:rPr>
-              <a:t>+€ 931.463</a:t>
-            </a:r>
-            <a:endParaRPr lang="en-US" sz="1200" dirty="0"/>
-          </a:p>
-          <a:p>
-            <a:pPr indent="0" marL="0">
-              <a:spcAft>
-                <a:spcPts val="300"/>
-              </a:spcAft>
-              <a:buNone/>
-            </a:pPr>
-            <a:r>
-              <a:rPr lang="en-US" sz="1200" dirty="0">
-                <a:solidFill>
-                  <a:schemeClr val="tx1"/>
-                </a:solidFill>
-              </a:rPr>
-              <a:t>Caso 2 costi € 242.658 → </a:t>
-            </a:r>
-            <a:pPr indent="0" marL="0">
-              <a:spcAft>
-                <a:spcPts val="300"/>
-              </a:spcAft>
-              <a:buNone/>
-            </a:pPr>
-            <a:r>
-              <a:rPr lang="en-US" sz="1200" b="1" dirty="0">
+              <a:t>% differenziata ricalcolata</a:t>
+            </a:r>
+            <a:endParaRPr lang="en-US" sz="1150" dirty="0"/>
+          </a:p>
+        </p:txBody>
+      </p:sp>
+      <p:sp>
+        <p:nvSpPr>
+          <p:cNvPr id="13" name="Passo simulatore 5"/>
+          <p:cNvSpPr/>
+          <p:nvPr/>
+        </p:nvSpPr>
+        <p:spPr>
+          <a:xfrm>
+            <a:off x="9546336" y="5669280"/>
+            <a:ext cx="2103120" cy="566928"/>
+          </a:xfrm>
+          <a:prstGeom prst="roundRect">
+            <a:avLst>
+              <a:gd name="adj" fmla="val 19355"/>
+            </a:avLst>
+          </a:prstGeom>
+          <a:solidFill>
+            <a:schemeClr val="accent4"/>
+          </a:solidFill>
+          <a:ln w="12700">
+            <a:solidFill>
+              <a:schemeClr val="accent4"/>
+            </a:solidFill>
+            <a:prstDash val="solid"/>
+          </a:ln>
+        </p:spPr>
+      </p:sp>
+      <p:sp>
+        <p:nvSpPr>
+          <p:cNvPr id="14" name="Text 11"/>
+          <p:cNvSpPr txBox="1"/>
+          <p:nvPr/>
+        </p:nvSpPr>
+        <p:spPr>
+          <a:xfrm>
+            <a:off x="9637776" y="5669280"/>
+            <a:ext cx="1920240" cy="566928"/>
+          </a:xfrm>
+          <a:prstGeom prst="rect">
+            <a:avLst/>
+          </a:prstGeom>
+          <a:noFill/>
+          <a:ln/>
+        </p:spPr>
+        <p:txBody>
+          <a:bodyPr wrap="square" lIns="0" tIns="0" rIns="0" bIns="0" rtlCol="0" anchor="ctr"/>
+          <a:lstStyle/>
+          <a:p>
+            <a:pPr algn="ctr" indent="0" marL="0">
+              <a:buNone/>
+            </a:pPr>
+            <a:r>
+              <a:rPr lang="en-US" sz="1150" b="1" dirty="0">
                 <a:solidFill>
                   <a:schemeClr val="tx2"/>
                 </a:solidFill>
               </a:rPr>
-              <a:t>+€ 851.135</a:t>
-            </a:r>
-            <a:endParaRPr lang="en-US" sz="1200" dirty="0"/>
-          </a:p>
-          <a:p>
-            <a:pPr indent="0" marL="0">
-              <a:spcAft>
-                <a:spcPts val="300"/>
-              </a:spcAft>
-              <a:buNone/>
-            </a:pPr>
-            <a:r>
-              <a:rPr lang="en-US" sz="1200" b="1" dirty="0">
-                <a:solidFill>
-                  <a:schemeClr val="tx1"/>
-                </a:solidFill>
-              </a:rPr>
-              <a:t>Bilancio del Comune: </a:t>
-            </a:r>
-            <a:pPr indent="0" marL="0">
-              <a:spcAft>
-                <a:spcPts val="300"/>
-              </a:spcAft>
-              <a:buNone/>
-            </a:pPr>
-            <a:r>
-              <a:rPr lang="en-US" sz="1200" dirty="0">
-                <a:solidFill>
-                  <a:schemeClr val="tx1"/>
-                </a:solidFill>
-              </a:rPr>
-              <a:t>6.707 crediti, € 214.464; Caso 1 +€ 52.134, Caso 2 −€ 28.193</a:t>
-            </a:r>
-            <a:endParaRPr lang="en-US" sz="1200" dirty="0"/>
-          </a:p>
-          <a:p>
-            <a:pPr indent="0" marL="0">
-              <a:spcAft>
-                <a:spcPts val="300"/>
-              </a:spcAft>
-              <a:buNone/>
-            </a:pPr>
-            <a:r>
-              <a:rPr lang="en-US" sz="600" dirty="0">
-                <a:solidFill>
-                  <a:schemeClr val="tx1"/>
-                </a:solidFill>
-              </a:rPr>
-              <a:t> </a:t>
-            </a:r>
-            <a:endParaRPr lang="en-US" sz="1200" dirty="0"/>
-          </a:p>
-          <a:p>
-            <a:pPr indent="0" marL="0">
-              <a:spcAft>
-                <a:spcPts val="300"/>
-              </a:spcAft>
-              <a:buNone/>
-            </a:pPr>
-            <a:r>
-              <a:rPr lang="en-US" sz="1200" i="1" dirty="0">
-                <a:solidFill>
-                  <a:schemeClr val="accent6"/>
-                </a:solidFill>
-              </a:rPr>
-              <a:t>Il Caso 1 riproduce i costi dei contratti EsaCom, il metodo per utenza le loro stime (0,19-0,23 crediti per abitante all'anno).</a:t>
-            </a:r>
-            <a:endParaRPr lang="en-US" sz="1200" dirty="0"/>
+              <a:t>Crediti per anno, confronto, CSV e stampa</a:t>
+            </a:r>
+            <a:endParaRPr lang="en-US" sz="1150" dirty="0"/>
           </a:p>
         </p:txBody>
       </p:sp>
@@ -7149,6 +7458,467 @@
                 <a:ea typeface="Cambria" pitchFamily="34" charset="-122"/>
                 <a:cs typeface="Cambria" pitchFamily="34" charset="-120"/>
               </a:rPr>
+              <a:t>Simulazione economica: ricavi e costi per il Comune</a:t>
+            </a:r>
+            <a:endParaRPr lang="en-US" sz="3000" dirty="0"/>
+          </a:p>
+        </p:txBody>
+      </p:sp>
+      <p:pic>
+        <p:nvPicPr>
+          <p:cNvPr id="3" name="Schermata costi" descr="Simulatore, metodo per utenza: costi Caso 1 per 16.735 abitanti, ricavi, margine e margine netto per anno">    </p:cNvPr>
+          <p:cNvPicPr>
+            <a:picLocks noChangeAspect="1"/>
+          </p:cNvPicPr>
+          <p:nvPr/>
+        </p:nvPicPr>
+        <p:blipFill>
+          <a:blip r:embed="rId1"/>
+          <a:stretch>
+            <a:fillRect/>
+          </a:stretch>
+        </p:blipFill>
+        <p:spPr>
+          <a:xfrm>
+            <a:off x="548640" y="1188720"/>
+            <a:ext cx="6242333" cy="5029200"/>
+          </a:xfrm>
+          <a:prstGeom prst="rect">
+            <a:avLst/>
+          </a:prstGeom>
+        </p:spPr>
+      </p:pic>
+      <p:sp>
+        <p:nvSpPr>
+          <p:cNvPr id="4" name="Riquadro economia"/>
+          <p:cNvSpPr/>
+          <p:nvPr/>
+        </p:nvSpPr>
+        <p:spPr>
+          <a:xfrm>
+            <a:off x="7452360" y="1188720"/>
+            <a:ext cx="4160520" cy="5001768"/>
+          </a:xfrm>
+          <a:prstGeom prst="roundRect">
+            <a:avLst>
+              <a:gd name="adj" fmla="val 2637"/>
+            </a:avLst>
+          </a:prstGeom>
+          <a:solidFill>
+            <a:schemeClr val="bg2"/>
+          </a:solidFill>
+          <a:ln w="12700">
+            <a:solidFill>
+              <a:schemeClr val="bg2"/>
+            </a:solidFill>
+            <a:prstDash val="solid"/>
+          </a:ln>
+        </p:spPr>
+      </p:sp>
+      <p:sp>
+        <p:nvSpPr>
+          <p:cNvPr id="5" name="Text 2"/>
+          <p:cNvSpPr txBox="1"/>
+          <p:nvPr/>
+        </p:nvSpPr>
+        <p:spPr>
+          <a:xfrm>
+            <a:off x="7635240" y="1298448"/>
+            <a:ext cx="3794760" cy="4800600"/>
+          </a:xfrm>
+          <a:prstGeom prst="rect">
+            <a:avLst/>
+          </a:prstGeom>
+          <a:noFill/>
+          <a:ln/>
+        </p:spPr>
+        <p:txBody>
+          <a:bodyPr wrap="square" lIns="0" tIns="0" rIns="0" bIns="0" rtlCol="0" anchor="t"/>
+          <a:lstStyle/>
+          <a:p>
+            <a:pPr indent="0" marL="0">
+              <a:spcAft>
+                <a:spcPts val="300"/>
+              </a:spcAft>
+              <a:buNone/>
+            </a:pPr>
+            <a:r>
+              <a:rPr lang="en-US" sz="1400" b="1" dirty="0">
+                <a:solidFill>
+                  <a:schemeClr val="tx2"/>
+                </a:solidFill>
+              </a:rPr>
+              <a:t>Ricavi</a:t>
+            </a:r>
+            <a:endParaRPr lang="en-US" sz="1200" dirty="0"/>
+          </a:p>
+          <a:p>
+            <a:pPr indent="0" marL="0">
+              <a:spcAft>
+                <a:spcPts val="300"/>
+              </a:spcAft>
+              <a:buNone/>
+            </a:pPr>
+            <a:r>
+              <a:rPr lang="en-US" sz="1200" dirty="0">
+                <a:solidFill>
+                  <a:schemeClr val="tx1"/>
+                </a:solidFill>
+              </a:rPr>
+              <a:t>Valore del credito digitato anno per anno (proposto 32 €).</a:t>
+            </a:r>
+            <a:endParaRPr lang="en-US" sz="1200" dirty="0"/>
+          </a:p>
+          <a:p>
+            <a:pPr indent="0" marL="0">
+              <a:spcAft>
+                <a:spcPts val="300"/>
+              </a:spcAft>
+              <a:buNone/>
+            </a:pPr>
+            <a:r>
+              <a:rPr lang="en-US" sz="600" dirty="0">
+                <a:solidFill>
+                  <a:schemeClr val="tx1"/>
+                </a:solidFill>
+              </a:rPr>
+              <a:t> </a:t>
+            </a:r>
+            <a:endParaRPr lang="en-US" sz="1200" dirty="0"/>
+          </a:p>
+          <a:p>
+            <a:pPr indent="0" marL="0">
+              <a:spcAft>
+                <a:spcPts val="300"/>
+              </a:spcAft>
+              <a:buNone/>
+            </a:pPr>
+            <a:r>
+              <a:rPr lang="en-US" sz="1400" b="1" dirty="0">
+                <a:solidFill>
+                  <a:schemeClr val="tx2"/>
+                </a:solidFill>
+              </a:rPr>
+              <a:t>Costi per il Comune: Caso 1 o Caso 2?</a:t>
+            </a:r>
+            <a:endParaRPr lang="en-US" sz="1200" dirty="0"/>
+          </a:p>
+          <a:p>
+            <a:pPr indent="0" marL="0">
+              <a:spcAft>
+                <a:spcPts val="300"/>
+              </a:spcAft>
+              <a:buNone/>
+            </a:pPr>
+            <a:r>
+              <a:rPr lang="en-US" sz="1200" dirty="0">
+                <a:solidFill>
+                  <a:schemeClr val="tx1"/>
+                </a:solidFill>
+              </a:rPr>
+              <a:t>Caso 1 progetto volontario, Caso 2 progetto obbligatorio da bando di gara. Sei voci (Progetto, Rapporto, registrazioni) in € per abitante interpolati per popolazione, con minimo e massimo annuo (tabelle del 28/07/2026).</a:t>
+            </a:r>
+            <a:endParaRPr lang="en-US" sz="1200" dirty="0"/>
+          </a:p>
+          <a:p>
+            <a:pPr indent="0" marL="0">
+              <a:spcAft>
+                <a:spcPts val="300"/>
+              </a:spcAft>
+              <a:buNone/>
+            </a:pPr>
+            <a:r>
+              <a:rPr lang="en-US" sz="600" dirty="0">
+                <a:solidFill>
+                  <a:schemeClr val="tx1"/>
+                </a:solidFill>
+              </a:rPr>
+              <a:t> </a:t>
+            </a:r>
+            <a:endParaRPr lang="en-US" sz="1200" dirty="0"/>
+          </a:p>
+          <a:p>
+            <a:pPr indent="0" marL="0">
+              <a:spcAft>
+                <a:spcPts val="300"/>
+              </a:spcAft>
+              <a:buNone/>
+            </a:pPr>
+            <a:r>
+              <a:rPr lang="en-US" sz="1400" b="1" dirty="0">
+                <a:solidFill>
+                  <a:schemeClr val="tx2"/>
+                </a:solidFill>
+              </a:rPr>
+              <a:t>Bovisio-Masciago, 10 anni, 32 €/credito</a:t>
+            </a:r>
+            <a:endParaRPr lang="en-US" sz="1200" dirty="0"/>
+          </a:p>
+          <a:p>
+            <a:pPr indent="0" marL="0">
+              <a:spcAft>
+                <a:spcPts val="300"/>
+              </a:spcAft>
+              <a:buNone/>
+            </a:pPr>
+            <a:r>
+              <a:rPr lang="en-US" sz="1200" b="1" dirty="0">
+                <a:solidFill>
+                  <a:schemeClr val="tx1"/>
+                </a:solidFill>
+              </a:rPr>
+              <a:t>Per utenza (come Allegato A): </a:t>
+            </a:r>
+            <a:pPr indent="0" marL="0">
+              <a:spcAft>
+                <a:spcPts val="300"/>
+              </a:spcAft>
+              <a:buNone/>
+            </a:pPr>
+            <a:r>
+              <a:rPr lang="en-US" sz="1200" dirty="0">
+                <a:solidFill>
+                  <a:schemeClr val="tx1"/>
+                </a:solidFill>
+              </a:rPr>
+              <a:t>34.188 crediti, ricavi € 1.093.792</a:t>
+            </a:r>
+            <a:endParaRPr lang="en-US" sz="1200" dirty="0"/>
+          </a:p>
+          <a:p>
+            <a:pPr indent="0" marL="0">
+              <a:spcAft>
+                <a:spcPts val="300"/>
+              </a:spcAft>
+              <a:buNone/>
+            </a:pPr>
+            <a:r>
+              <a:rPr lang="en-US" sz="1200" dirty="0">
+                <a:solidFill>
+                  <a:schemeClr val="tx1"/>
+                </a:solidFill>
+              </a:rPr>
+              <a:t>Caso 1 costi € 162.330 → </a:t>
+            </a:r>
+            <a:pPr indent="0" marL="0">
+              <a:spcAft>
+                <a:spcPts val="300"/>
+              </a:spcAft>
+              <a:buNone/>
+            </a:pPr>
+            <a:r>
+              <a:rPr lang="en-US" sz="1200" b="1" dirty="0">
+                <a:solidFill>
+                  <a:schemeClr val="tx2"/>
+                </a:solidFill>
+              </a:rPr>
+              <a:t>+€ 931.463</a:t>
+            </a:r>
+            <a:endParaRPr lang="en-US" sz="1200" dirty="0"/>
+          </a:p>
+          <a:p>
+            <a:pPr indent="0" marL="0">
+              <a:spcAft>
+                <a:spcPts val="300"/>
+              </a:spcAft>
+              <a:buNone/>
+            </a:pPr>
+            <a:r>
+              <a:rPr lang="en-US" sz="1200" dirty="0">
+                <a:solidFill>
+                  <a:schemeClr val="tx1"/>
+                </a:solidFill>
+              </a:rPr>
+              <a:t>Caso 2 costi € 242.658 → </a:t>
+            </a:r>
+            <a:pPr indent="0" marL="0">
+              <a:spcAft>
+                <a:spcPts val="300"/>
+              </a:spcAft>
+              <a:buNone/>
+            </a:pPr>
+            <a:r>
+              <a:rPr lang="en-US" sz="1200" b="1" dirty="0">
+                <a:solidFill>
+                  <a:schemeClr val="tx2"/>
+                </a:solidFill>
+              </a:rPr>
+              <a:t>+€ 851.135</a:t>
+            </a:r>
+            <a:endParaRPr lang="en-US" sz="1200" dirty="0"/>
+          </a:p>
+          <a:p>
+            <a:pPr indent="0" marL="0">
+              <a:spcAft>
+                <a:spcPts val="300"/>
+              </a:spcAft>
+              <a:buNone/>
+            </a:pPr>
+            <a:r>
+              <a:rPr lang="en-US" sz="1200" b="1" dirty="0">
+                <a:solidFill>
+                  <a:schemeClr val="tx1"/>
+                </a:solidFill>
+              </a:rPr>
+              <a:t>Bilancio del Comune: </a:t>
+            </a:r>
+            <a:pPr indent="0" marL="0">
+              <a:spcAft>
+                <a:spcPts val="300"/>
+              </a:spcAft>
+              <a:buNone/>
+            </a:pPr>
+            <a:r>
+              <a:rPr lang="en-US" sz="1200" dirty="0">
+                <a:solidFill>
+                  <a:schemeClr val="tx1"/>
+                </a:solidFill>
+              </a:rPr>
+              <a:t>6.707 crediti, € 214.464; Caso 1 +€ 52.134, Caso 2 −€ 28.193</a:t>
+            </a:r>
+            <a:endParaRPr lang="en-US" sz="1200" dirty="0"/>
+          </a:p>
+          <a:p>
+            <a:pPr indent="0" marL="0">
+              <a:spcAft>
+                <a:spcPts val="300"/>
+              </a:spcAft>
+              <a:buNone/>
+            </a:pPr>
+            <a:r>
+              <a:rPr lang="en-US" sz="600" dirty="0">
+                <a:solidFill>
+                  <a:schemeClr val="tx1"/>
+                </a:solidFill>
+              </a:rPr>
+              <a:t> </a:t>
+            </a:r>
+            <a:endParaRPr lang="en-US" sz="1200" dirty="0"/>
+          </a:p>
+          <a:p>
+            <a:pPr indent="0" marL="0">
+              <a:spcAft>
+                <a:spcPts val="300"/>
+              </a:spcAft>
+              <a:buNone/>
+            </a:pPr>
+            <a:r>
+              <a:rPr lang="en-US" sz="1200" i="1" dirty="0">
+                <a:solidFill>
+                  <a:schemeClr val="accent6"/>
+                </a:solidFill>
+              </a:rPr>
+              <a:t>Dal 30/10 lo scenario di riferimento segue lo Standard 4.8.1: anno con il 64-66% di differenziata o valori del cluster, senza ricalcoli.</a:t>
+            </a:r>
+            <a:endParaRPr lang="en-US" sz="1200" dirty="0"/>
+          </a:p>
+        </p:txBody>
+      </p:sp>
+      <p:sp>
+        <p:nvSpPr>
+          <p:cNvPr id="25" name="Slide Number Placeholder 0"/>
+          <p:cNvSpPr>
+            <a:spLocks noGrp="1"/>
+          </p:cNvSpPr>
+          <p:nvPr>
+            <p:ph type="sldNum" sz="quarter" idx="4294967295"/>
+          </p:nvPr>
+        </p:nvSpPr>
+        <p:spPr>
+          <a:xfrm>
+            <a:off x="11155680" y="6400800"/>
+            <a:ext cx="457200" cy="274320"/>
+          </a:xfrm>
+          <a:prstGeom prst="rect">
+            <a:avLst/>
+          </a:prstGeom>
+          <a:extLst>
+            <a:ext uri="{C572A759-6A51-4108-AA02-DFA0A04FC94B}">
+              <ma14:wrappingTextBoxFlag xmlns:ma14="http://schemas.microsoft.com/office/mac/drawingml/2011/main" val="0"/>
+            </a:ext>
+          </a:extLst>
+        </p:spPr>
+        <p:txBody>
+          <a:bodyPr/>
+          <a:lstStyle>
+            <a:lvl1pPr>
+              <a:defRPr sz="1000">
+                <a:solidFill>
+                  <a:schemeClr val="accent6"/>
+                </a:solidFill>
+              </a:defRPr>
+            </a:lvl1pPr>
+          </a:lstStyle>
+          <a:p>
+            <a:pPr algn="r"/>
+            <a:fld id="{F7021451-1387-4CA6-816F-3879F97B5CBC}" type="slidenum">
+              <a:rPr b="0" lang="en-US"/>
+              <a:t>16</a:t>
+            </a:fld>
+            <a:endParaRPr lang="en-US"/>
+          </a:p>
+        </p:txBody>
+      </p:sp>
+    </p:spTree>
+  </p:cSld>
+  <p:clrMapOvr>
+    <a:masterClrMapping/>
+  </p:clrMapOvr>
+</p:sld>
+</file>
+
+<file path=ppt/slides/slide17.xml><?xml version="1.0" encoding="utf-8"?>
+<p:sld xmlns:a="http://schemas.openxmlformats.org/drawingml/2006/main" xmlns:r="http://schemas.openxmlformats.org/officeDocument/2006/relationships" xmlns:p="http://schemas.openxmlformats.org/presentationml/2006/main">
+  <p:cSld name="Slide 17">
+    <p:spTree>
+      <p:nvGrpSpPr>
+        <p:cNvPr id="1" name=""/>
+        <p:cNvGrpSpPr/>
+        <p:nvPr/>
+      </p:nvGrpSpPr>
+      <p:grpSpPr>
+        <a:xfrm>
+          <a:off x="0" y="0"/>
+          <a:ext cx="0" cy="0"/>
+          <a:chOff x="0" y="0"/>
+          <a:chExt cx="0" cy="0"/>
+        </a:xfrm>
+      </p:grpSpPr>
+      <p:sp>
+        <p:nvSpPr>
+          <p:cNvPr id="2" name="Text 0"/>
+          <p:cNvSpPr/>
+          <p:nvPr>
+            <p:ph idx="100" type="title" hasCustomPrompt="1"/>
+          </p:nvPr>
+        </p:nvSpPr>
+        <p:spPr>
+          <a:xfrm>
+            <a:off x="548640" y="320040"/>
+            <a:ext cx="9144000" cy="731520"/>
+          </a:xfrm>
+          <a:prstGeom prst="rect">
+            <a:avLst/>
+          </a:prstGeom>
+          <a:noFill/>
+          <a:ln/>
+        </p:spPr>
+        <p:txBody>
+          <a:bodyPr wrap="square" lIns="0" tIns="0" rIns="0" bIns="0" rtlCol="0" anchor="ctr"/>
+          <a:lstStyle/>
+          <a:p>
+            <a:pPr algn="l" indent="0" marL="0">
+              <a:buNone/>
+            </a:pPr>
+            <a:r>
+              <a:rPr lang="en-US" sz="3000" b="1" dirty="0">
+                <a:solidFill>
+                  <a:schemeClr val="tx2"/>
+                </a:solidFill>
+                <a:latin typeface="Cambria" pitchFamily="34" charset="0"/>
+                <a:ea typeface="Cambria" pitchFamily="34" charset="-122"/>
+                <a:cs typeface="Cambria" pitchFamily="34" charset="-120"/>
+              </a:rPr>
               <a:t>Piani a pagamento: sicurezza e stabilità</a:t>
             </a:r>
             <a:endParaRPr lang="en-US" sz="3000" dirty="0"/>
@@ -7157,7 +7927,7 @@
       </p:sp>
       <p:graphicFrame>
         <p:nvGraphicFramePr>
-          <p:cNvPr id="17" name="Table 0"/>
+          <p:cNvPr id="18" name="Table 0"/>
           <p:cNvGraphicFramePr>
             <a:graphicFrameLocks noGrp="1"/>
           </p:cNvGraphicFramePr>
@@ -9264,7 +10034,7 @@
             <a:pPr algn="r"/>
             <a:fld id="{F7021451-1387-4CA6-816F-3879F97B5CBC}" type="slidenum">
               <a:rPr b="0" lang="en-US"/>
-              <a:t>16</a:t>
+              <a:t>17</a:t>
             </a:fld>
             <a:endParaRPr lang="en-US"/>
           </a:p>
@@ -9278,9 +10048,9 @@
 </p:sld>
 </file>
 
-<file path=ppt/slides/slide17.xml><?xml version="1.0" encoding="utf-8"?>
+<file path=ppt/slides/slide18.xml><?xml version="1.0" encoding="utf-8"?>
 <p:sld xmlns:a="http://schemas.openxmlformats.org/drawingml/2006/main" xmlns:r="http://schemas.openxmlformats.org/officeDocument/2006/relationships" xmlns:p="http://schemas.openxmlformats.org/presentationml/2006/main">
-  <p:cSld name="Slide 17">
+  <p:cSld name="Slide 18">
     <p:spTree>
       <p:nvGrpSpPr>
         <p:cNvPr id="1" name=""/>
@@ -9338,7 +10108,7 @@
       </p:sp>
       <p:graphicFrame>
         <p:nvGraphicFramePr>
-          <p:cNvPr id="18" name="Table 0"/>
+          <p:cNvPr id="19" name="Table 0"/>
           <p:cNvGraphicFramePr>
             <a:graphicFrameLocks noGrp="1"/>
           </p:cNvGraphicFramePr>
@@ -10549,7 +11319,7 @@
                             <a:schemeClr val="tx1"/>
                           </a:solidFill>
                         </a:rPr>
-                        <a:t>Solo utenze virtuose con buffer (Metodologia 4.6 e Cap. 7), come l'Allegato A EsaCom</a:t>
+                        <a:t>Solo utenze virtuose con buffer (Metodologia 4.6 e Cap. 7)</a:t>
                       </a:r>
                       <a:endParaRPr lang="en-US" sz="1300" dirty="0"/>
                     </a:p>
@@ -11071,7 +11841,7 @@
             <a:pPr algn="r"/>
             <a:fld id="{F7021451-1387-4CA6-816F-3879F97B5CBC}" type="slidenum">
               <a:rPr b="0" lang="en-US"/>
-              <a:t>17</a:t>
+              <a:t>18</a:t>
             </a:fld>
             <a:endParaRPr lang="en-US"/>
           </a:p>
@@ -15018,7 +15788,7 @@
                 <a:ea typeface="Cambria" pitchFamily="34" charset="-122"/>
                 <a:cs typeface="Cambria" pitchFamily="34" charset="-120"/>
               </a:rPr>
-              <a:t>47</a:t>
+              <a:t>48</a:t>
             </a:r>
             <a:endParaRPr lang="en-US" sz="3000" dirty="0"/>
           </a:p>
@@ -15324,7 +16094,7 @@
                 <a:ea typeface="Cambria" pitchFamily="34" charset="-122"/>
                 <a:cs typeface="Cambria" pitchFamily="34" charset="-120"/>
               </a:rPr>
-              <a:t>≈44.600</a:t>
+              <a:t>≈44.700</a:t>
             </a:r>
             <a:endParaRPr lang="en-US" sz="3000" dirty="0"/>
           </a:p>
@@ -16111,7 +16881,7 @@
                 <a:ea typeface="Cambria" pitchFamily="34" charset="-122"/>
                 <a:cs typeface="Cambria" pitchFamily="34" charset="-120"/>
               </a:rPr>
-              <a:t>213</a:t>
+              <a:t>225</a:t>
             </a:r>
             <a:endParaRPr lang="en-US" sz="2400" dirty="0"/>
           </a:p>
@@ -16164,7 +16934,7 @@
                 <a:ea typeface="Cambria" pitchFamily="34" charset="-122"/>
                 <a:cs typeface="Cambria" pitchFamily="34" charset="-120"/>
               </a:rPr>
-              <a:t>47</a:t>
+              <a:t>48</a:t>
             </a:r>
             <a:endParaRPr lang="en-US" sz="2400" dirty="0"/>
           </a:p>
@@ -16270,7 +17040,7 @@
                 <a:ea typeface="Cambria" pitchFamily="34" charset="-122"/>
                 <a:cs typeface="Cambria" pitchFamily="34" charset="-120"/>
               </a:rPr>
-              <a:t>≈44.600</a:t>
+              <a:t>≈44.700</a:t>
             </a:r>
             <a:endParaRPr lang="en-US" sz="2400" dirty="0"/>
           </a:p>
@@ -20039,7 +20809,7 @@
                   <a:schemeClr val="tx1"/>
                 </a:solidFill>
               </a:rPr>
-              <a:t>calcolati, emessi e venduti; prezzo di riferimento 32 €</a:t>
+              <a:t>calcolati, emessi e venduti; valore ipotetico 32 € (non stabilito dal Programma)</a:t>
             </a:r>
             <a:endParaRPr lang="en-US" sz="1300" dirty="0"/>
           </a:p>

--- a/public/documentazione/Presentazione_Portale_CWP.pptx
+++ b/public/documentazione/Presentazione_Portale_CWP.pptx
@@ -124,34 +124,34 @@
   <p:extLst>
     <p:ext uri="{521415D9-36F7-43E2-AB2F-B90AF26B5E84}">
       <p14:sectionLst xmlns:p14="http://schemas.microsoft.com/office/powerpoint/2010/main">
-        <p14:section name="Apertura" id="{5df3e669-5760-4431-8a7a-13d8d7ae2771}">
+        <p14:section name="Apertura" id="{4097bff3-ffd0-a800-26ab-c2aec0ef800f}">
           <p14:sldIdLst>
             <p14:sldId id="256"/>
           </p14:sldIdLst>
         </p14:section>
-        <p14:section name="Metodologia" id="{b65c0d2f-9cfb-9ab4-f46d-8cc59c353aab}">
+        <p14:section name="Metodologia" id="{c03c48fb-8016-2551-96c4-b926b8849f03}">
           <p14:sldIdLst>
             <p14:sldId id="257"/>
           </p14:sldIdLst>
         </p14:section>
-        <p14:section name="Analisi funzionale" id="{a8cd118c-b5cb-4664-2626-58cf929fe683}">
+        <p14:section name="Analisi funzionale" id="{7911148b-c0f8-a6b2-02b1-6b7f4faed3a1}">
           <p14:sldIdLst>
             <p14:sldId id="258"/>
             <p14:sldId id="259"/>
           </p14:sldIdLst>
         </p14:section>
-        <p14:section name="Già realtà" id="{49326b14-7be2-8c74-b825-6e6fda482018}">
+        <p14:section name="Già realtà" id="{2dafcbcc-29c7-933b-de9d-1abc22c2f59a}">
           <p14:sldIdLst>
             <p14:sldId id="260"/>
           </p14:sldIdLst>
         </p14:section>
-        <p14:section name="Architettura e ruoli" id="{5866044f-8d7c-3622-3971-5c553b57ecf5}">
+        <p14:section name="Architettura e ruoli" id="{feb215ab-7c50-aab1-5321-d07be921c271}">
           <p14:sldIdLst>
             <p14:sldId id="261"/>
             <p14:sldId id="262"/>
           </p14:sldIdLst>
         </p14:section>
-        <p14:section name="Novità" id="{575ce25c-73a7-252e-7a5a-f08895450098}">
+        <p14:section name="Novità" id="{fbb62ef2-9983-ede1-e779-732b75b1bd36}">
           <p14:sldIdLst>
             <p14:sldId id="263"/>
             <p14:sldId id="264"/>
@@ -160,7 +160,7 @@
             <p14:sldId id="267"/>
           </p14:sldIdLst>
         </p14:section>
-        <p14:section name="Punti aperti" id="{8d82e651-f979-e24c-7272-26f4fcda3381}">
+        <p14:section name="Punti aperti" id="{c4bce8b3-8bad-33da-53db-8cc4f0ffeb02}">
           <p14:sldIdLst>
             <p14:sldId id="268"/>
             <p14:sldId id="269"/>
@@ -169,7 +169,7 @@
             <p14:sldId id="272"/>
           </p14:sldIdLst>
         </p14:section>
-        <p14:section name="Scelte da prendere" id="{41db2b14-78ee-a47b-6e40-63fd8193f5e3}">
+        <p14:section name="Scelte da prendere" id="{9cfa58dd-a88c-03a0-087b-71ac4633e3e6}">
           <p14:sldIdLst>
             <p14:sldId id="273"/>
           </p14:sldIdLst>
@@ -578,7 +578,7 @@
           <a:p>
             <a:r>
               <a:rPr lang="en-US" dirty="0"/>
-              <a:t>Presentazione di riepilogo del portale, aggiornata al 30 ottobre 2026 (revisione 4.4): metodologia, funzioni realizzate, novità, punti aperti di sviluppo e scelte ancora da prendere. Si rigenera a ogni rilascio insieme agli altri documenti ed è disponibile agli Amministratori nella pagina Documentazione del portale.</a:t>
+              <a:t>Presentazione di riepilogo del portale, aggiornata al 31 ottobre 2026 (revisione 4.5): metodologia, funzioni realizzate, novità, punti aperti di sviluppo e scelte ancora da prendere. Si rigenera a ogni rilascio insieme agli altri documenti ed è disponibile agli Amministratori nella pagina Documentazione del portale.</a:t>
             </a:r>
             <a:endParaRPr lang="en-US" dirty="0"/>
           </a:p>
@@ -842,7 +842,7 @@
           <a:p>
             <a:r>
               <a:rPr lang="en-US" dirty="0"/>
-              <a:t>Rilievi del documento TEST_PORTALE_CWP del 29 ottobre 2026: 31 punti verificati su portale, codice, database e documenti del Programma. Scelte di Luca del 30 ottobre: correggere tutto tranne il Marketing. Correzioni (script 48 e pagine, da pubblicare con l'OK di Luca): nomi delle fasi come nella Guida; Dashboard con lo stato nel Programma, l'ente di validazione, le fatture scadute e in scadenza e le dichiarazioni di cancellazione dei crediti venduti da ricevere; controllo di codice fiscale e partita IVA e data di approvazione degli enti; verifiche documentali (fasi 2 e 6) solo con i documenti obbligatori e con i codici ISTAT, con deroga motivata dell'Amministratore; codice della pratica sempre automatico; ricorso e costi dei reclami; nel calcolo anno di monitoraggio e anno di riferimento dello Standard 4.8.1, ex post solo per anni conclusi e Progetti registrati, avviso dei risultati non aggiornati; simulatore con il riferimento come da Standard, senza taratura e senza riferimenti EsaCom, valore ipotetico del credito; CSV dell'Audit; Banca Dati Utenze senza nomi e indirizzi. Domande alla Fondazione: fase 7, valore del credito, tipologie di promotori, listino ufficiale, iter del ricorso, paniere del secco, accesso degli enti, invio degli 8 moduli.</a:t>
+              <a:t>Rilievi del documento TEST_PORTALE_CWP del 29 ottobre 2026: 31 punti verificati su portale, codice, database e documenti del Programma. Scelte di Luca del 30 ottobre: correggere tutto tranne il Marketing. Correzioni (script 48 e pagine, in produzione dal 31 ottobre 2026 alle 09:12, da ritestare con i collaudatori): nomi delle fasi come nella Guida; Dashboard con lo stato nel Programma, l'ente di validazione, le fatture scadute e in scadenza e le dichiarazioni di cancellazione dei crediti venduti da ricevere; controllo di codice fiscale e partita IVA e data di approvazione degli enti; verifiche documentali (fasi 2 e 6) solo con i documenti obbligatori e con i codici ISTAT, con deroga motivata dell'Amministratore; codice della pratica sempre automatico; ricorso e costi dei reclami; nel calcolo anno di monitoraggio e anno di riferimento dello Standard 4.8.1, ex post solo per anni conclusi e Progetti registrati, avviso dei risultati non aggiornati; simulatore con il riferimento come da Standard, senza taratura e senza riferimenti EsaCom, valore ipotetico del credito; CSV dell'Audit; Banca Dati Utenze senza nomi e indirizzi. Domande alla Fondazione: fase 7, valore del credito, tipologie di promotori, listino ufficiale, iter del ricorso, paniere del secco, accesso degli enti, invio degli 8 moduli.</a:t>
             </a:r>
             <a:endParaRPr lang="en-US" dirty="0"/>
           </a:p>
@@ -1722,7 +1722,7 @@
           <a:p>
             <a:r>
               <a:rPr lang="en-US" dirty="0"/>
-              <a:t>Pagina «effetto sorpresa»: nessuno si aspetta che il portale sia già online. Il sistema è stato realizzato da Luca Moretti con l'ausilio di Claude Code ed è quasi terminato; i servizi sono già in produzione: GitHub (codice), Vercel (pubblicazione del portale), Supabase (database, utenti, documenti, funzioni) e Resend (email). Il portale è pubblicato su portale-cwp.vercel.app e funziona con dati di prova: si può aprire durante la presentazione (collegamento cliccabile) o inquadrare il codice QR con il telefono. La pagina pubblica /programma mostra già gli 8 documenti ufficiali del Programma, la Metodologia approvata, la PEC e il soggetto promotore. Lo sviluppo del portale vero è partito il 17 ottobre 2026: da allora sono state pubblicate 225 versioni, 48 script del database e 8 funzioni sul server. Restano i punti aperti delle prossime slide (servizi a pagamento, sicurezza, dati da inserire, collaudo con un Comune). Suggerimento: aprire il portale dal vivo con un utente di prova e mostrare la pagina pubblica.</a:t>
+              <a:t>Pagina «effetto sorpresa»: nessuno si aspetta che il portale sia già online. Il sistema è stato realizzato da Luca Moretti con l'ausilio di Claude Code ed è quasi terminato; i servizi sono già in produzione: GitHub (codice), Vercel (pubblicazione del portale), Supabase (database, utenti, documenti, funzioni) e Resend (email). Il portale è pubblicato su portale-cwp.vercel.app e funziona con dati di prova: si può aprire durante la presentazione (collegamento cliccabile) o inquadrare il codice QR con il telefono. La pagina pubblica /programma mostra già gli 8 documenti ufficiali del Programma, la Metodologia approvata, la PEC e il soggetto promotore. Lo sviluppo del portale vero è partito il 17 ottobre 2026: da allora sono state pubblicate 228 versioni, 48 script del database e 8 funzioni sul server. Restano i punti aperti delle prossime slide (servizi a pagamento, sicurezza, dati da inserire, collaudo con un Comune). Suggerimento: aprire il portale dal vivo con un utente di prova e mostrare la pagina pubblica.</a:t>
             </a:r>
             <a:endParaRPr lang="en-US" dirty="0"/>
           </a:p>
@@ -2433,7 +2433,7 @@
                   <a:schemeClr val="accent6"/>
                 </a:solidFill>
               </a:rPr>
-              <a:t>Portale Carbon WastePrint · Stato dei lavori e recap · 30 ottobre 2026 · rev. 4.4</a:t>
+              <a:t>Portale Carbon WastePrint · Stato dei lavori e recap · 31 ottobre 2026 · rev. 4.5</a:t>
             </a:r>
             <a:endParaRPr lang="en-US" sz="1000" dirty="0"/>
           </a:p>
@@ -2931,7 +2931,7 @@
                   <a:schemeClr val="accent3"/>
                 </a:solidFill>
               </a:rPr>
-              <a:t>Stato dei lavori e recap: metodologia, funzioni, novità, punti aperti e scelte da prendere · aggiornata al 30 ottobre 2026 · rev. 4.4</a:t>
+              <a:t>Stato dei lavori e recap: metodologia, funzioni, novità, punti aperti e scelte da prendere · aggiornata al 31 ottobre 2026 · rev. 4.5</a:t>
             </a:r>
             <a:endParaRPr lang="en-US" sz="1800" dirty="0"/>
           </a:p>
@@ -4216,7 +4216,7 @@
       </p:sp>
       <p:sp>
         <p:nvSpPr>
-          <p:cNvPr id="5" name="Numero correzioni pronte"/>
+          <p:cNvPr id="5" name="Numero correzioni in produzione"/>
           <p:cNvSpPr/>
           <p:nvPr/>
         </p:nvSpPr>
@@ -4285,7 +4285,7 @@
                   <a:schemeClr val="tx1"/>
                 </a:solidFill>
               </a:rPr>
-              <a:t>correzioni pronte</a:t>
+              <a:t>correzioni in produzione</a:t>
             </a:r>
             <a:endParaRPr lang="en-US" sz="2600" dirty="0"/>
           </a:p>
@@ -4299,7 +4299,7 @@
                   <a:schemeClr val="tx1"/>
                 </a:solidFill>
               </a:rPr>
-              <a:t>script 48 e pagine, da pubblicare</a:t>
+              <a:t>dal 31 ottobre (script 48)</a:t>
             </a:r>
             <a:endParaRPr lang="en-US" sz="2600" dirty="0"/>
           </a:p>
@@ -16094,7 +16094,7 @@
                 <a:ea typeface="Cambria" pitchFamily="34" charset="-122"/>
                 <a:cs typeface="Cambria" pitchFamily="34" charset="-120"/>
               </a:rPr>
-              <a:t>≈44.700</a:t>
+              <a:t>≈45.700</a:t>
             </a:r>
             <a:endParaRPr lang="en-US" sz="3000" dirty="0"/>
           </a:p>
@@ -16881,7 +16881,7 @@
                 <a:ea typeface="Cambria" pitchFamily="34" charset="-122"/>
                 <a:cs typeface="Cambria" pitchFamily="34" charset="-120"/>
               </a:rPr>
-              <a:t>225</a:t>
+              <a:t>228</a:t>
             </a:r>
             <a:endParaRPr lang="en-US" sz="2400" dirty="0"/>
           </a:p>
@@ -17040,7 +17040,7 @@
                 <a:ea typeface="Cambria" pitchFamily="34" charset="-122"/>
                 <a:cs typeface="Cambria" pitchFamily="34" charset="-120"/>
               </a:rPr>
-              <a:t>≈44.700</a:t>
+              <a:t>≈45.700</a:t>
             </a:r>
             <a:endParaRPr lang="en-US" sz="2400" dirty="0"/>
           </a:p>
